--- a/Gaussian_Blobs_Microscopy_v3.pptx
+++ b/Gaussian_Blobs_Microscopy_v3.pptx
@@ -21,9 +21,11 @@
     <p:sldId id="269" r:id="rId15"/>
     <p:sldId id="270" r:id="rId16"/>
     <p:sldId id="271" r:id="rId17"/>
+    <p:sldId id="272" r:id="rId18"/>
+    <p:sldId id="273" r:id="rId19"/>
   </p:sldIdLst>
   <p:notesMasterIdLst>
-    <p:notesMasterId r:id="rId18"/>
+    <p:notesMasterId r:id="rId20"/>
   </p:notesMasterIdLst>
   <p:sldSz cx="9144000" cy="5143500"/>
   <p:notesSz cx="5143500" cy="9144000"/>
@@ -122,14 +124,14 @@
   <p:extLst>
     <p:ext uri="{521415D9-36F7-43E2-AB2F-B90AF26B5E84}">
       <p14:sectionLst xmlns:p14="http://schemas.microsoft.com/office/powerpoint/2010/main">
-        <p14:section name="Problem and data" id="{cce7a953-b532-d8b8-04ab-8b7090e05bf6}">
+        <p14:section name="Problem and data" id="{91ee26a0-ae3c-47fd-8e07-59eade617032}">
           <p14:sldIdLst>
             <p14:sldId id="256"/>
             <p14:sldId id="257"/>
             <p14:sldId id="258"/>
           </p14:sldIdLst>
         </p14:section>
-        <p14:section name="Simple setup and changes" id="{b317d696-486e-1e92-14cc-254827cb6833}">
+        <p14:section name="Simple setup and changes" id="{bb0a7a01-7063-2fd8-bc30-daee9a11b2f1}">
           <p14:sldIdLst>
             <p14:sldId id="259"/>
             <p14:sldId id="260"/>
@@ -137,25 +139,27 @@
             <p14:sldId id="262"/>
             <p14:sldId id="263"/>
             <p14:sldId id="264"/>
-          </p14:sldIdLst>
-        </p14:section>
-        <p14:section name="Results and validation" id="{a8ec65fa-692b-6804-3b74-b5c683b185e0}">
-          <p14:sldIdLst>
             <p14:sldId id="265"/>
             <p14:sldId id="266"/>
           </p14:sldIdLst>
         </p14:section>
-        <p14:section name="State of the art" id="{0890358e-d18e-3f85-107f-411bc87c8497}">
+        <p14:section name="Results and validation" id="{73db0fab-f6a8-0c17-91fd-017d1b546af0}">
           <p14:sldIdLst>
             <p14:sldId id="267"/>
             <p14:sldId id="268"/>
-            <p14:sldId id="269"/>
           </p14:sldIdLst>
         </p14:section>
-        <p14:section name="Conclusion" id="{08b97672-4ea8-6121-efa3-9668ea65836c}">
+        <p14:section name="State of the art" id="{e23e6550-bb1f-fb27-3a4d-05fdc81a7f82}">
           <p14:sldIdLst>
+            <p14:sldId id="269"/>
             <p14:sldId id="270"/>
             <p14:sldId id="271"/>
+          </p14:sldIdLst>
+        </p14:section>
+        <p14:section name="Conclusion" id="{e0fd0226-ba45-3b9b-289c-5128779c7d57}">
+          <p14:sldIdLst>
+            <p14:sldId id="272"/>
+            <p14:sldId id="273"/>
           </p14:sldIdLst>
         </p14:section>
       </p14:sectionLst>
@@ -168,6 +172,560 @@
 </file>
 
 <file path=ppt/charts/chart1.xml><?xml version="1.0" encoding="utf-8"?>
+<c:chartSpace xmlns:c="http://schemas.openxmlformats.org/drawingml/2006/chart" xmlns:a="http://schemas.openxmlformats.org/drawingml/2006/main" xmlns:r="http://schemas.openxmlformats.org/officeDocument/2006/relationships">
+  <c:date1904 val="0"/>
+  <c:roundedCorners val="1"/>
+  <c:chart>
+    <c:title>
+      <c:tx>
+        <c:rich>
+          <a:bodyPr/>
+          <a:lstStyle/>
+          <a:p>
+            <a:pPr>
+              <a:defRPr sz="1200" b="0" i="0" u="none" strike="noStrike">
+                <a:solidFill>
+                  <a:srgbClr val="3A3F4B"/>
+                </a:solidFill>
+                <a:latin typeface="+mn-lt"/>
+              </a:defRPr>
+            </a:pPr>
+            <a:r>
+              <a:rPr sz="1200" b="0" i="0" u="none" strike="noStrike">
+                <a:solidFill>
+                  <a:srgbClr val="3A3F4B"/>
+                </a:solidFill>
+                <a:latin typeface="+mn-lt"/>
+              </a:rPr>
+              <a:t>Akim's phantom experiments: best PSNR (dB) of 8 fits each</a:t>
+            </a:r>
+          </a:p>
+        </c:rich>
+      </c:tx>
+      <c:layout/>
+      <c:overlay val="0"/>
+    </c:title>
+    <c:autoTitleDeleted val="0"/>
+    <c:plotArea>
+      <c:layout/>
+      <c:barChart>
+        <c:barDir val="col"/>
+        <c:grouping val="clustered"/>
+        <c:varyColors val="0"/>
+        <c:ser>
+          <c:idx val="0"/>
+          <c:order val="0"/>
+          <c:tx>
+            <c:strRef>
+              <c:f>Sheet1!$B$1</c:f>
+              <c:strCache>
+                <c:ptCount val="1"/>
+                <c:pt idx="0">
+                  <c:v>PSNR (dB)</c:v>
+                </c:pt>
+              </c:strCache>
+            </c:strRef>
+          </c:tx>
+          <c:spPr>
+            <a:solidFill>
+              <a:srgbClr val="2A78D6"/>
+            </a:solidFill>
+            <a:effectLst/>
+          </c:spPr>
+          <c:invertIfNegative val="0"/>
+          <c:dLbls>
+            <c:numFmt formatCode="0.0" sourceLinked="0"/>
+            <c:txPr>
+              <a:bodyPr/>
+              <a:lstStyle/>
+              <a:p>
+                <a:pPr>
+                  <a:defRPr b="0" i="0" strike="noStrike" sz="1200" u="none">
+                    <a:solidFill>
+                      <a:srgbClr val="15171C"/>
+                    </a:solidFill>
+                    <a:latin typeface="+mn-lt"/>
+                  </a:defRPr>
+                </a:pPr>
+              </a:p>
+            </c:txPr>
+            <c:showLegendKey val="0"/>
+            <c:showVal val="1"/>
+            <c:showCatName val="0"/>
+            <c:showSerName val="0"/>
+            <c:showPercent val="0"/>
+            <c:showBubbleSize val="0"/>
+            <c:showLeaderLines val="0"/>
+          </c:dLbls>
+          <c:cat>
+            <c:multiLvlStrRef>
+              <c:f>Sheet1!$A$2:$A$5</c:f>
+              <c:multiLvlStrCache>
+                <c:ptCount val="4"/>
+                <c:lvl>
+                  <c:pt idx="0">
+                    <c:v>random start</c:v>
+                  </c:pt>
+                  <c:pt idx="1">
+                    <c:v>random, more steps</c:v>
+                  </c:pt>
+                  <c:pt idx="2">
+                    <c:v>start on peaks</c:v>
+                  </c:pt>
+                  <c:pt idx="3">
+                    <c:v>peaks, more steps</c:v>
+                  </c:pt>
+                </c:lvl>
+              </c:multiLvlStrCache>
+            </c:multiLvlStrRef>
+          </c:cat>
+          <c:val>
+            <c:numRef>
+              <c:f>Sheet1!$B$2:$B$5</c:f>
+              <c:numCache>
+                <c:formatCode>General</c:formatCode>
+                <c:ptCount val="4"/>
+                <c:pt idx="0">
+                  <c:v>31.97</c:v>
+                </c:pt>
+                <c:pt idx="1">
+                  <c:v>33.65</c:v>
+                </c:pt>
+                <c:pt idx="2">
+                  <c:v>53.05</c:v>
+                </c:pt>
+                <c:pt idx="3">
+                  <c:v>55.12</c:v>
+                </c:pt>
+              </c:numCache>
+            </c:numRef>
+          </c:val>
+        </c:ser>
+        <c:dLbls>
+          <c:numFmt formatCode="0.0" sourceLinked="0"/>
+          <c:txPr>
+            <a:bodyPr/>
+            <a:lstStyle/>
+            <a:p>
+              <a:pPr>
+                <a:defRPr b="0" i="0" strike="noStrike" sz="1200" u="none">
+                  <a:solidFill>
+                    <a:srgbClr val="15171C"/>
+                  </a:solidFill>
+                  <a:latin typeface="+mn-lt"/>
+                </a:defRPr>
+              </a:pPr>
+            </a:p>
+          </c:txPr>
+          <c:showLegendKey val="0"/>
+          <c:showVal val="1"/>
+          <c:showCatName val="0"/>
+          <c:showSerName val="0"/>
+          <c:showPercent val="0"/>
+          <c:showBubbleSize val="0"/>
+          <c:showLeaderLines val="0"/>
+        </c:dLbls>
+        <c:gapWidth val="50"/>
+        <c:overlap val="0"/>
+        <c:axId val="2094734554"/>
+        <c:axId val="2094734552"/>
+        <c:axId val="2094734556"/>
+      </c:barChart>
+      <c:catAx>
+        <c:axId val="2094734554"/>
+        <c:scaling>
+          <c:orientation val="minMax"/>
+        </c:scaling>
+        <c:delete val="0"/>
+        <c:axPos val="b"/>
+        <c:numFmt formatCode="General" sourceLinked="1"/>
+        <c:majorTickMark val="out"/>
+        <c:minorTickMark val="none"/>
+        <c:tickLblPos val="low"/>
+        <c:spPr>
+          <a:ln w="12700" cap="flat">
+            <a:solidFill>
+              <a:srgbClr val="888888"/>
+            </a:solidFill>
+            <a:prstDash val="solid"/>
+            <a:round/>
+          </a:ln>
+        </c:spPr>
+        <c:txPr>
+          <a:bodyPr/>
+          <a:lstStyle/>
+          <a:p>
+            <a:pPr>
+              <a:defRPr sz="1100" b="0" i="0" u="none" strike="noStrike">
+                <a:solidFill>
+                  <a:srgbClr val="3A3F4B"/>
+                </a:solidFill>
+                <a:latin typeface="+mn-lt"/>
+              </a:defRPr>
+            </a:pPr>
+            <a:endParaRPr lang="en-US"/>
+          </a:p>
+        </c:txPr>
+        <c:crossAx val="2094734552"/>
+        <c:crosses val="autoZero"/>
+        <c:auto val="1"/>
+        <c:lblAlgn val="ctr"/>
+        <c:noMultiLvlLbl val="1"/>
+      </c:catAx>
+      <c:valAx>
+        <c:axId val="2094734552"/>
+        <c:scaling>
+          <c:orientation val="minMax"/>
+          <c:max val="60"/>
+          <c:min val="0"/>
+        </c:scaling>
+        <c:delete val="0"/>
+        <c:axPos val="l"/>
+        <c:majorGridlines>
+          <c:spPr>
+            <a:ln w="6350" cap="flat">
+              <a:solidFill>
+                <a:srgbClr val="E5E7EB"/>
+              </a:solidFill>
+              <a:prstDash val="solid"/>
+              <a:round/>
+            </a:ln>
+          </c:spPr>
+        </c:majorGridlines>
+        <c:numFmt formatCode="0" sourceLinked="0"/>
+        <c:majorTickMark val="out"/>
+        <c:minorTickMark val="none"/>
+        <c:tickLblPos val="nextTo"/>
+        <c:spPr>
+          <a:ln w="12700" cap="flat">
+            <a:solidFill>
+              <a:srgbClr val="888888"/>
+            </a:solidFill>
+            <a:prstDash val="solid"/>
+            <a:round/>
+          </a:ln>
+        </c:spPr>
+        <c:txPr>
+          <a:bodyPr/>
+          <a:lstStyle/>
+          <a:p>
+            <a:pPr>
+              <a:defRPr sz="1100" b="0" i="0" u="none" strike="noStrike">
+                <a:solidFill>
+                  <a:srgbClr val="3A3F4B"/>
+                </a:solidFill>
+                <a:latin typeface="+mn-lt"/>
+              </a:defRPr>
+            </a:pPr>
+            <a:endParaRPr lang="en-US"/>
+          </a:p>
+        </c:txPr>
+        <c:crossAx val="2094734554"/>
+        <c:crosses val="autoZero"/>
+        <c:crossBetween val="between"/>
+      </c:valAx>
+      <c:spPr>
+        <a:noFill/>
+        <a:ln>
+          <a:noFill/>
+        </a:ln>
+        <a:effectLst/>
+      </c:spPr>
+    </c:plotArea>
+    <c:plotVisOnly val="1"/>
+    <c:dispBlanksAs val="span"/>
+  </c:chart>
+  <c:spPr>
+    <a:noFill/>
+    <a:ln>
+      <a:noFill/>
+    </a:ln>
+    <a:effectLst/>
+  </c:spPr>
+  <c:externalData r:id="rId1">
+    <c:autoUpdate val="0"/>
+  </c:externalData>
+</c:chartSpace>
+</file>
+
+<file path=ppt/charts/chart2.xml><?xml version="1.0" encoding="utf-8"?>
+<c:chartSpace xmlns:c="http://schemas.openxmlformats.org/drawingml/2006/chart" xmlns:a="http://schemas.openxmlformats.org/drawingml/2006/main" xmlns:r="http://schemas.openxmlformats.org/officeDocument/2006/relationships">
+  <c:date1904 val="0"/>
+  <c:roundedCorners val="1"/>
+  <c:chart>
+    <c:title>
+      <c:tx>
+        <c:rich>
+          <a:bodyPr/>
+          <a:lstStyle/>
+          <a:p>
+            <a:pPr>
+              <a:defRPr sz="1200" b="0" i="0" u="none" strike="noStrike">
+                <a:solidFill>
+                  <a:srgbClr val="3A3F4B"/>
+                </a:solidFill>
+                <a:latin typeface="+mn-lt"/>
+              </a:defRPr>
+            </a:pPr>
+            <a:r>
+              <a:rPr sz="1200" b="0" i="0" u="none" strike="noStrike">
+                <a:solidFill>
+                  <a:srgbClr val="3A3F4B"/>
+                </a:solidFill>
+                <a:latin typeface="+mn-lt"/>
+              </a:rPr>
+              <a:t>Akim's real Tribolium sweep: median PSNR (dB), ~75 fits per shape</a:t>
+            </a:r>
+          </a:p>
+        </c:rich>
+      </c:tx>
+      <c:layout/>
+      <c:overlay val="0"/>
+    </c:title>
+    <c:autoTitleDeleted val="0"/>
+    <c:plotArea>
+      <c:layout/>
+      <c:barChart>
+        <c:barDir val="col"/>
+        <c:grouping val="clustered"/>
+        <c:varyColors val="0"/>
+        <c:ser>
+          <c:idx val="0"/>
+          <c:order val="0"/>
+          <c:tx>
+            <c:strRef>
+              <c:f>Sheet1!$B$1</c:f>
+              <c:strCache>
+                <c:ptCount val="1"/>
+                <c:pt idx="0">
+                  <c:v>median PSNR (dB)</c:v>
+                </c:pt>
+              </c:strCache>
+            </c:strRef>
+          </c:tx>
+          <c:spPr>
+            <a:solidFill>
+              <a:srgbClr val="2A78D6"/>
+            </a:solidFill>
+            <a:effectLst/>
+          </c:spPr>
+          <c:invertIfNegative val="0"/>
+          <c:dLbls>
+            <c:numFmt formatCode="0.0" sourceLinked="0"/>
+            <c:txPr>
+              <a:bodyPr/>
+              <a:lstStyle/>
+              <a:p>
+                <a:pPr>
+                  <a:defRPr b="0" i="0" strike="noStrike" sz="1200" u="none">
+                    <a:solidFill>
+                      <a:srgbClr val="15171C"/>
+                    </a:solidFill>
+                    <a:latin typeface="+mn-lt"/>
+                  </a:defRPr>
+                </a:pPr>
+              </a:p>
+            </c:txPr>
+            <c:showLegendKey val="0"/>
+            <c:showVal val="1"/>
+            <c:showCatName val="0"/>
+            <c:showSerName val="0"/>
+            <c:showPercent val="0"/>
+            <c:showBubbleSize val="0"/>
+            <c:showLeaderLines val="0"/>
+          </c:dLbls>
+          <c:cat>
+            <c:multiLvlStrRef>
+              <c:f>Sheet1!$A$2:$A$5</c:f>
+              <c:multiLvlStrCache>
+                <c:ptCount val="4"/>
+                <c:lvl>
+                  <c:pt idx="0">
+                    <c:v>fixed round</c:v>
+                  </c:pt>
+                  <c:pt idx="1">
+                    <c:v>learned round</c:v>
+                  </c:pt>
+                  <c:pt idx="2">
+                    <c:v>stretched</c:v>
+                  </c:pt>
+                  <c:pt idx="3">
+                    <c:v>stretched + rotated</c:v>
+                  </c:pt>
+                </c:lvl>
+              </c:multiLvlStrCache>
+            </c:multiLvlStrRef>
+          </c:cat>
+          <c:val>
+            <c:numRef>
+              <c:f>Sheet1!$B$2:$B$5</c:f>
+              <c:numCache>
+                <c:formatCode>General</c:formatCode>
+                <c:ptCount val="4"/>
+                <c:pt idx="0">
+                  <c:v>6.82</c:v>
+                </c:pt>
+                <c:pt idx="1">
+                  <c:v>20.36</c:v>
+                </c:pt>
+                <c:pt idx="2">
+                  <c:v>23.32</c:v>
+                </c:pt>
+                <c:pt idx="3">
+                  <c:v>23.96</c:v>
+                </c:pt>
+              </c:numCache>
+            </c:numRef>
+          </c:val>
+        </c:ser>
+        <c:dLbls>
+          <c:numFmt formatCode="0.0" sourceLinked="0"/>
+          <c:txPr>
+            <a:bodyPr/>
+            <a:lstStyle/>
+            <a:p>
+              <a:pPr>
+                <a:defRPr b="0" i="0" strike="noStrike" sz="1200" u="none">
+                  <a:solidFill>
+                    <a:srgbClr val="15171C"/>
+                  </a:solidFill>
+                  <a:latin typeface="+mn-lt"/>
+                </a:defRPr>
+              </a:pPr>
+            </a:p>
+          </c:txPr>
+          <c:showLegendKey val="0"/>
+          <c:showVal val="1"/>
+          <c:showCatName val="0"/>
+          <c:showSerName val="0"/>
+          <c:showPercent val="0"/>
+          <c:showBubbleSize val="0"/>
+          <c:showLeaderLines val="0"/>
+        </c:dLbls>
+        <c:gapWidth val="50"/>
+        <c:overlap val="0"/>
+        <c:axId val="2094734554"/>
+        <c:axId val="2094734552"/>
+        <c:axId val="2094734556"/>
+      </c:barChart>
+      <c:catAx>
+        <c:axId val="2094734554"/>
+        <c:scaling>
+          <c:orientation val="minMax"/>
+        </c:scaling>
+        <c:delete val="0"/>
+        <c:axPos val="b"/>
+        <c:numFmt formatCode="General" sourceLinked="1"/>
+        <c:majorTickMark val="out"/>
+        <c:minorTickMark val="none"/>
+        <c:tickLblPos val="low"/>
+        <c:spPr>
+          <a:ln w="12700" cap="flat">
+            <a:solidFill>
+              <a:srgbClr val="888888"/>
+            </a:solidFill>
+            <a:prstDash val="solid"/>
+            <a:round/>
+          </a:ln>
+        </c:spPr>
+        <c:txPr>
+          <a:bodyPr/>
+          <a:lstStyle/>
+          <a:p>
+            <a:pPr>
+              <a:defRPr sz="1100" b="0" i="0" u="none" strike="noStrike">
+                <a:solidFill>
+                  <a:srgbClr val="3A3F4B"/>
+                </a:solidFill>
+                <a:latin typeface="+mn-lt"/>
+              </a:defRPr>
+            </a:pPr>
+            <a:endParaRPr lang="en-US"/>
+          </a:p>
+        </c:txPr>
+        <c:crossAx val="2094734552"/>
+        <c:crosses val="autoZero"/>
+        <c:auto val="1"/>
+        <c:lblAlgn val="ctr"/>
+        <c:noMultiLvlLbl val="1"/>
+      </c:catAx>
+      <c:valAx>
+        <c:axId val="2094734552"/>
+        <c:scaling>
+          <c:orientation val="minMax"/>
+          <c:max val="30"/>
+          <c:min val="0"/>
+        </c:scaling>
+        <c:delete val="0"/>
+        <c:axPos val="l"/>
+        <c:majorGridlines>
+          <c:spPr>
+            <a:ln w="6350" cap="flat">
+              <a:solidFill>
+                <a:srgbClr val="E5E7EB"/>
+              </a:solidFill>
+              <a:prstDash val="solid"/>
+              <a:round/>
+            </a:ln>
+          </c:spPr>
+        </c:majorGridlines>
+        <c:numFmt formatCode="0" sourceLinked="0"/>
+        <c:majorTickMark val="out"/>
+        <c:minorTickMark val="none"/>
+        <c:tickLblPos val="nextTo"/>
+        <c:spPr>
+          <a:ln w="12700" cap="flat">
+            <a:solidFill>
+              <a:srgbClr val="888888"/>
+            </a:solidFill>
+            <a:prstDash val="solid"/>
+            <a:round/>
+          </a:ln>
+        </c:spPr>
+        <c:txPr>
+          <a:bodyPr/>
+          <a:lstStyle/>
+          <a:p>
+            <a:pPr>
+              <a:defRPr sz="1100" b="0" i="0" u="none" strike="noStrike">
+                <a:solidFill>
+                  <a:srgbClr val="3A3F4B"/>
+                </a:solidFill>
+                <a:latin typeface="+mn-lt"/>
+              </a:defRPr>
+            </a:pPr>
+            <a:endParaRPr lang="en-US"/>
+          </a:p>
+        </c:txPr>
+        <c:crossAx val="2094734554"/>
+        <c:crosses val="autoZero"/>
+        <c:crossBetween val="between"/>
+      </c:valAx>
+      <c:spPr>
+        <a:noFill/>
+        <a:ln>
+          <a:noFill/>
+        </a:ln>
+        <a:effectLst/>
+      </c:spPr>
+    </c:plotArea>
+    <c:plotVisOnly val="1"/>
+    <c:dispBlanksAs val="span"/>
+  </c:chart>
+  <c:spPr>
+    <a:noFill/>
+    <a:ln>
+      <a:noFill/>
+    </a:ln>
+    <a:effectLst/>
+  </c:spPr>
+  <c:externalData r:id="rId1">
+    <c:autoUpdate val="0"/>
+  </c:externalData>
+</c:chartSpace>
+</file>
+
+<file path=ppt/charts/chart3.xml><?xml version="1.0" encoding="utf-8"?>
 <c:chartSpace xmlns:c="http://schemas.openxmlformats.org/drawingml/2006/chart" xmlns:a="http://schemas.openxmlformats.org/drawingml/2006/main" xmlns:r="http://schemas.openxmlformats.org/officeDocument/2006/relationships">
   <c:date1904 val="0"/>
   <c:roundedCorners val="1"/>
@@ -438,7 +996,7 @@
 </c:chartSpace>
 </file>
 
-<file path=ppt/charts/chart2.xml><?xml version="1.0" encoding="utf-8"?>
+<file path=ppt/charts/chart4.xml><?xml version="1.0" encoding="utf-8"?>
 <c:chartSpace xmlns:c="http://schemas.openxmlformats.org/drawingml/2006/chart" xmlns:a="http://schemas.openxmlformats.org/drawingml/2006/main" xmlns:r="http://schemas.openxmlformats.org/officeDocument/2006/relationships">
   <c:date1904 val="0"/>
   <c:roundedCorners val="1"/>
@@ -797,7 +1355,7 @@
 </c:chartSpace>
 </file>
 
-<file path=ppt/charts/chart3.xml><?xml version="1.0" encoding="utf-8"?>
+<file path=ppt/charts/chart5.xml><?xml version="1.0" encoding="utf-8"?>
 <c:chartSpace xmlns:c="http://schemas.openxmlformats.org/drawingml/2006/chart" xmlns:a="http://schemas.openxmlformats.org/drawingml/2006/main" xmlns:r="http://schemas.openxmlformats.org/officeDocument/2006/relationships">
   <c:date1904 val="0"/>
   <c:roundedCorners val="1"/>
@@ -1133,7 +1691,7 @@
 </c:chartSpace>
 </file>
 
-<file path=ppt/charts/chart4.xml><?xml version="1.0" encoding="utf-8"?>
+<file path=ppt/charts/chart6.xml><?xml version="1.0" encoding="utf-8"?>
 <c:chartSpace xmlns:c="http://schemas.openxmlformats.org/drawingml/2006/chart" xmlns:a="http://schemas.openxmlformats.org/drawingml/2006/main" xmlns:r="http://schemas.openxmlformats.org/officeDocument/2006/relationships">
   <c:date1904 val="0"/>
   <c:roundedCorners val="1"/>
@@ -2007,11 +2565,13 @@
             <a:r>
               <a:rPr lang="en-US" dirty="0"/>
               <a:t>SAY:
-Here are the four changes side by side, each compared with the version just before it. I want to be clear that these were measured one at a time, on Tribolium, so you cannot add them up into one overall improvement. Together they turn a fit that merely looks right into one where the nuclei are found much more reliably.
+Why did blobs not move? The step size for positions was taken from 3D-splatting code made for photo scenes, where coordinates are small, and we never rescaled it for voxel coordinates. Raising it lets blobs travel: one in three moves to a different nucleus. With bad starting points this closes the gap completely. But with good starting points it slightly hurts. So the lesson is a trade-off: good starts with small steps is still best, at F1 0.84.
 TERMS ON THIS SLIDE:
-- Naive / simple setup: round blobs, starts on the brightest peaks, default step size, no cap.
+- Learning rate / step size: how far each fitting step moves the numbers. Too small: blobs barely move. Too large: they overshoot.
+- F1: one number combining 'how many real nuclei were found' and 'how many detections were real'; 1.0 is perfect.
+- Moved to another nucleus (migration): the nearest nucleus of a blob changed between start and end.
 IF ASKED:
-- Why not one combined number? Each experiment used a different number of regions, seeds and references; combining them would hide that.</a:t>
+- Does that undo Steps 1 and 4? It reframes them: starting points mattered so much because blobs could not move. With a suitable step size, a random start reaches the same F1.</a:t>
             </a:r>
             <a:endParaRPr lang="en-US" dirty="0"/>
           </a:p>
@@ -2100,13 +2660,13 @@
             <a:r>
               <a:rPr lang="en-US" dirty="0"/>
               <a:t>SAY:
-Three checks that the fit does what we think. First, shape: the learned blobs are about as stretched as the real nuclei. Second, the honest test against people's annotations: on Drosophila, among the 100 most confident detections, the fitted blobs contain 14 of 29 hand-marked nuclei, the raw image only 10. So fitting ranks real nuclei higher. Third, fits are repeatable. And the limit: if the plain detector may use all its candidates it finds 26 of 29, more than any fit. So this is better ranking, not a better detector.
+We then asked which nuclei are still lost. They are the faint ones, and when we followed their blobs during fitting, the blobs did not fade; they spread out, about 30 percent wider than for nuclei we kept, until there was no peak left to detect. So we capped the width of nucleus blobs. Over four regions, faint nuclei found went from 13 of 31 to 19 of 31, and image quality changed by only 0.01 dB. Honestly: one region got worse, and on the Drosophila data the cap changed nothing.
 TERMS ON THIS SLIDE:
-- Top 100 detections: compare methods at the same number of guesses, because only some nuclei are marked and extra detections cannot be judged as wrong.
-- Raw-image detector: the same peak detector run directly on the original data.
-- Repeated fits: the same data fitted three times; for the Luxar fits used later, nuclei kept differed by at most 2.1-3.7 points depending on the detector.
+- Faint nucleus: one whose brightness above the surroundings is in the lower half.
+- Size cap: an upper limit on a blob's size, applied only to the blobs that started on nuclei.
+- Region: one 64 x 128 x 128 crop of the Tribolium frame.
 IF ASKED:
-- How noisy is 14 vs 10? One nucleus is 3.4% of 29; we only call a difference real if it is about 3 nuclei and has the same sign in all seeds (mean of 3 seeds here).</a:t>
+- Is +6 nuclei significant? It is one seed and 4 regions, so treat it as promising, not settled. The result survived a scoring-bug fix (it was +7 before).</a:t>
             </a:r>
             <a:endParaRPr lang="en-US" dirty="0"/>
           </a:p>
@@ -2195,15 +2755,11 @@
             <a:r>
               <a:rPr lang="en-US" dirty="0"/>
               <a:t>SAY:
-Our own fits were better than our naive start, but are they better than what exists? The strongest existing tool is Luxar, from the Royer lab, which fits Gaussian blobs to large microscopy data. We compared Luxar with ordinary image compression, JPEG2000, squeezed to exactly the same number of bytes, on 12 C. elegans frames with almost 3,000 hand-marked nuclei, and asked four different nucleus detectors how many nuclei survive. The pictures show the same region at about 89 times smaller: the codecs keep the texture, Luxar draws smooth blobs.
+Here are all six changes side by side, two by Akim and four by us, each compared with the version just before it. I want to be clear that these were measured one at a time, on different data and with different numbers of repeats, so you cannot add them up into one overall improvement. Together they turn a fit that merely looks right into one where the nuclei are found much more reliably.
 TERMS ON THIS SLIDE:
-- Compression ratio: original size divided by compressed size; 100x means 100 times smaller.
-- Same file size (matched bytes): every Luxar file is compared with a JPEG2000 file of exactly the same size on disk.
-- JPEG2000 / JPEG-XL: standard image compression formats; here each 2D slice of the volume is compressed.
-- Nuclei kept: nuclei found after compression divided by nuclei found in the original by the same detector (1.0 = nothing lost).
+- Naive / simple setup: round blobs with random starting positions, default step size, no cap.
 IF ASKED:
-- Why not compare with our own fits? Luxar is faster and better engineered; if blobs are to win anywhere, the strongest blob tool must win.
-- We found a bug in our own first JPEG2000 setup (it compressed the volume along the wrong axes, about 10 dB worse). Fixing it reversed our first conclusion; a test now prevents it.</a:t>
+- Why not one combined number? Each experiment used a different number of regions, seeds and references; combining them would hide that.</a:t>
             </a:r>
             <a:endParaRPr lang="en-US" dirty="0"/>
           </a:p>
@@ -2292,16 +2848,13 @@
             <a:r>
               <a:rPr lang="en-US" dirty="0"/>
               <a:t>SAY:
-The result. Bars above zero mean the blobs kept more nuclei than JPEG2000 at the same file size; below zero, JPEG2000 kept more. Up to about 300 times compression the answer depends on the detector: Cellpose in 3D mode finds 3.5 points more nuclei in the blob version, the classical watershed and Cellpose in 2D mode find more in JPEG2000, and the simple blob detector LoG shows no consistent difference. Beyond 300 times, every detector prefers JPEG2000 by 17 to 23 points. Meanwhile PSNR says JPEG2000 is better on every single frame, so PSNR alone could not have told you which format a given analysis needs. The same Cellpose network changing sides between 2D and 3D mode shows the problem comes from processing slice by slice.
+Three checks that the fit does what we think. First, shape: the learned blobs are about as stretched as the real nuclei. Second, the honest test against people's annotations: on Drosophila, among the 100 most confident detections, the fitted blobs contain 14 of 29 hand-marked nuclei, the raw image only 10. So fitting ranks real nuclei higher. Third, fits are repeatable. And the limit: if the plain detector may use all its candidates it finds 26 of 29, more than any fit. So this is better ranking, not a better detector.
 TERMS ON THIS SLIDE:
-- LoG (Laplacian of Gaussian): a classic blob detector that responds to bright round spots of a given size.
-- Watershed: a classical segmentation that separates touching bright regions, like water filling valleys.
-- Cellpose: a widely used deep-learning model that outlines cells or nuclei. 2D mode works slice by slice and joins slices; 3D mode looks at the volume in three directions at once.
-- Points: percentage points of nuclei kept, e.g. 0.90 vs 0.86 is 4 points.
-- Statistics: each frame counts once; Wilcoxon signed-rank tests over the 12 frames, Holm-corrected for 8 tests. Everything except LoG below 300x is significant (p ≤ 0.01).
+- Top 100 detections: compare methods at the same number of guesses, because only some nuclei are marked and extra detections cannot be judged as wrong.
+- Raw-image detector: the same peak detector run directly on the original data.
+- Repeated fits: the same data fitted three times; for the Luxar fits used later, nuclei kept differed by at most 2.1-3.7 points depending on the detector.
 IF ASKED:
-- Is LoG +1.3 real? No: 8 of 12 frames, p = 0.11; it comes from one embryo only.
-- Why does JPEG2000 win at high compression? Below about 3 blobs per nucleus, blob fits lose whole nuclei; wavelet compression degrades gradually.</a:t>
+- How noisy is 14 vs 10? One nucleus is 3.4% of 29; we only call a difference real if it is about 3 nuclei and has the same sign in all seeds (mean of 3 seeds here).</a:t>
             </a:r>
             <a:endParaRPr lang="en-US" dirty="0"/>
           </a:p>
@@ -2390,13 +2943,15 @@
             <a:r>
               <a:rPr lang="en-US" dirty="0"/>
               <a:t>SAY:
-Why do blobs collapse at high compression? Each point is one Luxar fit; the x axis is blobs per hand-marked nucleus. Above about 3 blobs per nucleus almost every nucleus survives; below that, they disappear quickly, on every frame of both embryos. At the same time, PSNR changes very little across these budgets. So if you choose the budget by image quality, you can fall off this cliff without noticing.
+Our own fits were better than our naive start, but are they better than what exists? The strongest existing tool is Luxar, from the Royer lab, which fits Gaussian blobs to large microscopy data. We compared Luxar with ordinary image compression, JPEG2000, squeezed to exactly the same number of bytes, on 12 C. elegans frames with almost 3,000 hand-marked nuclei, and asked four different nucleus detectors how many nuclei survive. The pictures show the same region at about 89 times smaller: the codecs keep the texture, Luxar draws smooth blobs.
 TERMS ON THIS SLIDE:
-- Blobs per nucleus: number of blobs in the fit divided by the number of hand-marked nuclei in that frame.
-- Cliff: a sudden drop instead of a gradual decline.
-- 90% line: the threshold we fixed in advance to define the cliff (we wrote down '≤ 3.5 blobs per nucleus' before running the extra frames).
+- Compression ratio: original size divided by compressed size; 100x means 100 times smaller.
+- Same file size (matched bytes): every Luxar file is compared with a JPEG2000 file of exactly the same size on disk.
+- JPEG2000 / JPEG-XL: standard image compression formats; here each 2D slice of the volume is compressed.
+- Nuclei kept: nuclei found after compression divided by nuclei found in the original by the same detector (1.0 = nothing lost).
 IF ASKED:
-- Why fix thresholds in advance? So we cannot tune the claim to the data afterwards. Two of our advance predictions failed, and we report them as failed.</a:t>
+- Why not compare with our own fits? Luxar is faster and better engineered; if blobs are to win anywhere, the strongest blob tool must win.
+- We found a bug in our own first JPEG2000 setup (it compressed the volume along the wrong axes, about 10 dB worse). Fixing it reversed our first conclusion; a test now prevents it.</a:t>
             </a:r>
             <a:endParaRPr lang="en-US" dirty="0"/>
           </a:p>
@@ -2485,11 +3040,16 @@
             <a:r>
               <a:rPr lang="en-US" dirty="0"/>
               <a:t>SAY:
-Three take-aways. One: our step-by-step changes made blob fits find nuclei much more reliably. Two: compared with the state of the art at equal file size, blobs are good for viewing but not the right format for measuring; a standard codec keeps the nuclei as well or better. Three: the usual image-quality number cannot decide this; you have to test with the analysis you plan to run.
+The result. Bars above zero mean the blobs kept more nuclei than JPEG2000 at the same file size; below zero, JPEG2000 kept more. Up to about 300 times compression the answer depends on the detector: Cellpose in 3D mode finds 3.5 points more nuclei in the blob version, the classical watershed and Cellpose in 2D mode find more in JPEG2000, and the simple blob detector LoG shows no consistent difference. Beyond 300 times, every detector prefers JPEG2000 by 17 to 23 points. Meanwhile PSNR says JPEG2000 is better on every single frame, so PSNR alone could not have told you which format a given analysis needs. The same Cellpose network changing sides between 2D and 3D mode shows the problem comes from processing slice by slice.
 TERMS ON THIS SLIDE:
-- Codec: a compression method (coder-decoder).
+- LoG (Laplacian of Gaussian): a classic blob detector that responds to bright round spots of a given size.
+- Watershed: a classical segmentation that separates touching bright regions, like water filling valleys.
+- Cellpose: a widely used deep-learning model that outlines cells or nuclei. 2D mode works slice by slice and joins slices; 3D mode looks at the volume in three directions at once.
+- Points: percentage points of nuclei kept, e.g. 0.90 vs 0.86 is 4 points.
+- Statistics: each frame counts once; Wilcoxon signed-rank tests over the 12 frames, Holm-corrected for 8 tests. Everything except LoG below 300x is significant (p ≤ 0.01).
 IF ASKED:
-- So was the project a failure? No: we now know where blobs should and should not be trusted, which is what a user needs; and the evaluation method itself is reusable.</a:t>
+- Is LoG +1.3 real? No: 8 of 12 frames, p = 0.11; it comes from one embryo only.
+- Why does JPEG2000 win at high compression? Below about 3 blobs per nucleus, blob fits lose whole nuclei; wavelet compression degrades gradually.</a:t>
             </a:r>
             <a:endParaRPr lang="en-US" dirty="0"/>
           </a:p>
@@ -2578,6 +3138,194 @@
             <a:r>
               <a:rPr lang="en-US" dirty="0"/>
               <a:t>SAY:
+Why do blobs collapse at high compression? Each point is one Luxar fit; the x axis is blobs per hand-marked nucleus. Above about 3 blobs per nucleus almost every nucleus survives; below that, they disappear quickly, on every frame of both embryos. At the same time, PSNR changes very little across these budgets. So if you choose the budget by image quality, you can fall off this cliff without noticing.
+TERMS ON THIS SLIDE:
+- Blobs per nucleus: number of blobs in the fit divided by the number of hand-marked nuclei in that frame.
+- Cliff: a sudden drop instead of a gradual decline.
+- 90% line: the threshold we fixed in advance to define the cliff (we wrote down '≤ 3.5 blobs per nucleus' before running the extra frames).
+IF ASKED:
+- Why fix thresholds in advance? So we cannot tune the claim to the data afterwards. Two of our advance predictions failed, and we report them as failed.</a:t>
+            </a:r>
+            <a:endParaRPr lang="en-US" dirty="0"/>
+          </a:p>
+        </p:txBody>
+      </p:sp>
+      <p:sp>
+        <p:nvSpPr>
+          <p:cNvPr id="4" name="Slide Number Placeholder 3"/>
+          <p:cNvSpPr>
+            <a:spLocks noGrp="1"/>
+          </p:cNvSpPr>
+          <p:nvPr>
+            <p:ph type="sldNum" sz="quarter" idx="10"/>
+          </p:nvPr>
+        </p:nvSpPr>
+        <p:spPr/>
+        <p:txBody>
+          <a:bodyPr/>
+          <a:lstStyle/>
+          <a:p>
+            <a:fld id="{F7021451-1387-4CA6-816F-3879F97B5CBC}" type="slidenum">
+              <a:rPr lang="en-US"/>
+              <a:t>16</a:t>
+            </a:fld>
+            <a:endParaRPr lang="en-US"/>
+          </a:p>
+        </p:txBody>
+      </p:sp>
+    </p:spTree>
+    <p:extLst>
+      <p:ext uri="{BB962C8B-B14F-4D97-AF65-F5344CB8AC3E}">
+        <p14:creationId xmlns:p14="http://schemas.microsoft.com/office/powerpoint/2010/main" val="1024086991"/>
+      </p:ext>
+    </p:extLst>
+  </p:cSld>
+  <p:clrMapOvr>
+    <a:masterClrMapping/>
+  </p:clrMapOvr>
+</p:notes>
+</file>
+
+<file path=ppt/notesSlides/notesSlide17.xml><?xml version="1.0" encoding="utf-8"?>
+<p:notes xmlns:a="http://schemas.openxmlformats.org/drawingml/2006/main" xmlns:r="http://schemas.openxmlformats.org/officeDocument/2006/relationships" xmlns:p="http://schemas.openxmlformats.org/presentationml/2006/main">
+  <p:cSld>
+    <p:spTree>
+      <p:nvGrpSpPr>
+        <p:cNvPr id="1" name=""/>
+        <p:cNvGrpSpPr/>
+        <p:nvPr/>
+      </p:nvGrpSpPr>
+      <p:grpSpPr>
+        <a:xfrm>
+          <a:off x="0" y="0"/>
+          <a:ext cx="0" cy="0"/>
+          <a:chOff x="0" y="0"/>
+          <a:chExt cx="0" cy="0"/>
+        </a:xfrm>
+      </p:grpSpPr>
+      <p:sp>
+        <p:nvSpPr>
+          <p:cNvPr id="2" name="Slide Image Placeholder 1"/>
+          <p:cNvSpPr>
+            <a:spLocks noGrp="1" noRot="1" noChangeAspect="1"/>
+          </p:cNvSpPr>
+          <p:nvPr>
+            <p:ph type="sldImg"/>
+          </p:nvPr>
+        </p:nvSpPr>
+        <p:spPr/>
+      </p:sp>
+      <p:sp>
+        <p:nvSpPr>
+          <p:cNvPr id="3" name="Notes Placeholder 2"/>
+          <p:cNvSpPr>
+            <a:spLocks noGrp="1"/>
+          </p:cNvSpPr>
+          <p:nvPr>
+            <p:ph type="body" idx="1"/>
+          </p:nvPr>
+        </p:nvSpPr>
+        <p:spPr/>
+        <p:txBody>
+          <a:bodyPr/>
+          <a:lstStyle/>
+          <a:p>
+            <a:r>
+              <a:rPr lang="en-US" dirty="0"/>
+              <a:t>SAY:
+Three take-aways. One: our step-by-step changes made blob fits find nuclei much more reliably. Two: compared with the state of the art at equal file size, blobs are good for viewing but not the right format for measuring; a standard codec keeps the nuclei as well or better. Three: the usual image-quality number cannot decide this; you have to test with the analysis you plan to run.
+TERMS ON THIS SLIDE:
+- Codec: a compression method (coder-decoder).
+IF ASKED:
+- So was the project a failure? No: we now know where blobs should and should not be trusted, which is what a user needs; and the evaluation method itself is reusable.</a:t>
+            </a:r>
+            <a:endParaRPr lang="en-US" dirty="0"/>
+          </a:p>
+        </p:txBody>
+      </p:sp>
+      <p:sp>
+        <p:nvSpPr>
+          <p:cNvPr id="4" name="Slide Number Placeholder 3"/>
+          <p:cNvSpPr>
+            <a:spLocks noGrp="1"/>
+          </p:cNvSpPr>
+          <p:nvPr>
+            <p:ph type="sldNum" sz="quarter" idx="10"/>
+          </p:nvPr>
+        </p:nvSpPr>
+        <p:spPr/>
+        <p:txBody>
+          <a:bodyPr/>
+          <a:lstStyle/>
+          <a:p>
+            <a:fld id="{F7021451-1387-4CA6-816F-3879F97B5CBC}" type="slidenum">
+              <a:rPr lang="en-US"/>
+              <a:t>17</a:t>
+            </a:fld>
+            <a:endParaRPr lang="en-US"/>
+          </a:p>
+        </p:txBody>
+      </p:sp>
+    </p:spTree>
+    <p:extLst>
+      <p:ext uri="{BB962C8B-B14F-4D97-AF65-F5344CB8AC3E}">
+        <p14:creationId xmlns:p14="http://schemas.microsoft.com/office/powerpoint/2010/main" val="1024086991"/>
+      </p:ext>
+    </p:extLst>
+  </p:cSld>
+  <p:clrMapOvr>
+    <a:masterClrMapping/>
+  </p:clrMapOvr>
+</p:notes>
+</file>
+
+<file path=ppt/notesSlides/notesSlide18.xml><?xml version="1.0" encoding="utf-8"?>
+<p:notes xmlns:a="http://schemas.openxmlformats.org/drawingml/2006/main" xmlns:r="http://schemas.openxmlformats.org/officeDocument/2006/relationships" xmlns:p="http://schemas.openxmlformats.org/presentationml/2006/main">
+  <p:cSld>
+    <p:spTree>
+      <p:nvGrpSpPr>
+        <p:cNvPr id="1" name=""/>
+        <p:cNvGrpSpPr/>
+        <p:nvPr/>
+      </p:nvGrpSpPr>
+      <p:grpSpPr>
+        <a:xfrm>
+          <a:off x="0" y="0"/>
+          <a:ext cx="0" cy="0"/>
+          <a:chOff x="0" y="0"/>
+          <a:chExt cx="0" cy="0"/>
+        </a:xfrm>
+      </p:grpSpPr>
+      <p:sp>
+        <p:nvSpPr>
+          <p:cNvPr id="2" name="Slide Image Placeholder 1"/>
+          <p:cNvSpPr>
+            <a:spLocks noGrp="1" noRot="1" noChangeAspect="1"/>
+          </p:cNvSpPr>
+          <p:nvPr>
+            <p:ph type="sldImg"/>
+          </p:nvPr>
+        </p:nvSpPr>
+        <p:spPr/>
+      </p:sp>
+      <p:sp>
+        <p:nvSpPr>
+          <p:cNvPr id="3" name="Notes Placeholder 2"/>
+          <p:cNvSpPr>
+            <a:spLocks noGrp="1"/>
+          </p:cNvSpPr>
+          <p:nvPr>
+            <p:ph type="body" idx="1"/>
+          </p:nvPr>
+        </p:nvSpPr>
+        <p:spPr/>
+        <p:txBody>
+          <a:bodyPr/>
+          <a:lstStyle/>
+          <a:p>
+            <a:r>
+              <a:rPr lang="en-US" dirty="0"/>
+              <a:t>SAY:
 Following our supervisor's advice, the next step is compression biologists would actually use: lossless storage, or near-lossless where every error stays below the camera noise; video codecs, which exploit the similarity between neighbouring slices and time points; and judging success by whether cells can still be tracked, using the Cell Tracking Challenge's official scores.
 TERMS ON THIS SLIDE:
 - Lossless: the decompressed data is bit-for-bit identical to the original.
@@ -2608,7 +3356,7 @@
           <a:p>
             <a:fld id="{F7021451-1387-4CA6-816F-3879F97B5CBC}" type="slidenum">
               <a:rPr lang="en-US"/>
-              <a:t>16</a:t>
+              <a:t>18</a:t>
             </a:fld>
             <a:endParaRPr lang="en-US"/>
           </a:p>
@@ -3058,15 +3806,15 @@
             <a:r>
               <a:rPr lang="en-US" dirty="0"/>
               <a:t>SAY:
-First change on real data. A round blob has one size; real nuclei look stretched along the depth axis, partly because the microscope blurs more in depth. So we let each blob have three sizes, and then also a rotation. Image quality rose from 22.3 to 25.5 dB, averaged over 15 fits per setting: 5 random seeds times 3 blob budgets. Most of the gain comes from stretching; rotation adds half a dB. And the blobs did what we expected: their depth-to-width ratio, 0.79, is close to the ratio measured on the real nuclei, 0.73.
+This is my teammate Akim's work, from his archive of 57 experiments. On the phantom, he compared random starting positions with starting each blob on a bright peak of the data. More fitting steps barely helped random starts, plus 1.7 dB. Starting on peaks jumped from 32 to 53 dB, and with 3,000 steps to 55. So the very first lesson was: where the blobs start matters more than how long you fit.
 TERMS ON THIS SLIDE:
-- Round (isotropic) blob: same size in every direction.
-- Stretched (anisotropic, axis-aligned) blob: three independent sizes along x, y and z.
-- Rotation: lets the stretched blob point in any direction.
-- Seed: the random number that decides the starting point of a fit; different seeds test whether a result is luck.
+- Starting position (initialisation): where each blob is placed before fitting begins.
+- Bright peak (local maximum): a voxel brighter than all its neighbours; a quick guess for where a blob belongs.
+- Fitting steps (iterations): how many times all blob numbers are adjusted.
+- Best of 8 fits: each setting was run with four blob shapes and two budgets (50 and 100 blobs); the bar shows the best one.
 IF ASKED:
-- Did this also help finding nuclei? Slightly: nucleus F1 0.745 (round) vs 0.805 (stretched + rotated), significant in a paired test (p = 0.006, 5 seeds).
-- Why does the axis start at 20? To make a 3 dB difference visible; it is stated on the chart.</a:t>
+- Why does a random start fail? Later we found the reason: blobs barely move during fitting with the default step size (Step 5).
+- Who did what? Steps 1 and 2 are Akim's experiments; Steps 0 and 3-6 are ours; the comparison with the state of the art is ours.</a:t>
             </a:r>
             <a:endParaRPr lang="en-US" dirty="0"/>
           </a:p>
@@ -3155,14 +3903,17 @@
             <a:r>
               <a:rPr lang="en-US" dirty="0"/>
               <a:t>SAY:
-Second change. We measured how far blobs travel during fitting: less than one voxel on average, while nuclei are about 20 voxels apart. So a blob that starts between nuclei stays there. The old start put blobs on the brightest peaks, and bright background crowded out faint nuclei: only 73% of nuclei had a blob at the start. Starting one blob per detected nucleus covers all of them and raises the share of nuclei found after fitting from 52 to 71%.
+Then Akim moved to the real Tribolium data: 43 experiments and 299 fits. He compared four blob shapes: a fixed round blob, a round blob whose size is learned, a stretched blob, and a stretched blob that can also rotate. Fixed round blobs basically fail, 6.8 dB. Stretched and rotated blobs are best, median 24 dB. He also varied the number of blobs from 50 to 1,000, how voxels are sampled during fitting, the loss, and an automatic tuner that reads settings from the data. His best fit was 25.9 dB with 750 to 1,000 blobs on the whole volume. He also tried splitting blobs during fitting, densification, which did not beat a fixed budget, and matching the number of blobs to the number of cells, which found cells with F1 0.76.
 TERMS ON THIS SLIDE:
-- Detected nucleus / peak: a local brightness maximum found by a simple detector before fitting.
-- Peak-search window (non-maximum suppression): around each peak, weaker peaks closer than a set distance are ignored, so one nucleus gives one peak.
-- Found after fitting (recall): the share of reference nuclei that a detector still finds in the reconstruction.
+- Fixed round blob: every blob has the same, unchangeable size; only position and brightness are fitted.
+- Learned round blob: one size per blob, fitted.
+- Sampling: each fitting step looks at a random subset of voxels (here 50,000), partly chosen from bright regions.
+- Loss: the number the fit tries to reduce, here the squared difference between blobs and data (plus variants Akim tested).
+- Automatic settings (auto-tuner): Akim's tool that estimates background, noise, nucleus size and spacing from the data.
+- Densification: splitting or cloning blobs during fitting where the error is large (a standard 3D-splatting trick).
 IF ASKED:
-- Is this circular? Partly, on Tribolium: the reference nuclei came from a related detector. On hand-marked Drosophila nuclei the 'window = nucleus spacing' rule did NOT transfer; what transferred was setting windows in micrometres, not voxels.
-- Why did blobs not move? See the next step: the step size was too small.</a:t>
+- Why is fixed round so bad? Its size was fixed at 2 voxels while real nuclei need 5-7, so it cannot cover them; part of the gap is that constant, not roundness itself.
+- Why median, not best? One run per setting can be lucky; the median over ~75 fits is more robust. Our next step re-tested this with repeated seeds.</a:t>
             </a:r>
             <a:endParaRPr lang="en-US" dirty="0"/>
           </a:p>
@@ -3251,13 +4002,15 @@
             <a:r>
               <a:rPr lang="en-US" dirty="0"/>
               <a:t>SAY:
-Why did blobs not move? The step size for positions was taken from 3D-splatting code made for photo scenes, where coordinates are small, and we never rescaled it for voxel coordinates. Raising it lets blobs travel: one in three moves to a different nucleus. With bad starting points this closes the gap completely. But with good starting points it slightly hurts. So the lesson is a trade-off: good starts with small steps is still best, at F1 0.84.
+Our first own step was to check Akim's shape result with repeats: the same three blob shapes, each fitted 15 times, with 5 random seeds and 3 blob budgets, on the same kind of real crops. The result holds: 22.3 dB for round blobs, 25.5 for stretched and rotated, and the spread between repeats is small. Most of the gain comes from stretching; rotation adds half a dB. And the blobs did what we expected: their depth-to-width ratio, 0.79, is close to the ratio measured on the real nuclei, 0.73. Real nuclei look stretched in depth partly because the microscope blurs more along that axis.
 TERMS ON THIS SLIDE:
-- Learning rate / step size: how far each fitting step moves the numbers. Too small: blobs barely move. Too large: they overshoot.
-- F1: one number combining 'how many real nuclei were found' and 'how many detections were real'; 1.0 is perfect.
-- Moved to another nucleus (migration): the nearest nucleus of a blob changed between start and end.
+- Round (isotropic) blob: same size in every direction.
+- Stretched (anisotropic, axis-aligned) blob: three independent sizes along x, y and z.
+- Rotation: lets the stretched blob point in any direction.
+- Seed: the random number that decides the starting point of a fit; different seeds test whether a result is luck.
 IF ASKED:
-- Does that undo step 2? It reframes it: starting points mattered so much because blobs could not move. With a suitable step size, a random start reaches the same F1.</a:t>
+- Did this also help finding nuclei? Slightly: nucleus F1 0.745 (round) vs 0.805 (stretched + rotated), significant in a paired test (p = 0.006, 5 seeds).
+- Why does the axis start at 20? To make a 3 dB difference visible; it is stated on the chart.</a:t>
             </a:r>
             <a:endParaRPr lang="en-US" dirty="0"/>
           </a:p>
@@ -3346,13 +4099,14 @@
             <a:r>
               <a:rPr lang="en-US" dirty="0"/>
               <a:t>SAY:
-We then asked which nuclei are still lost. They are the faint ones, and when we followed their blobs during fitting, the blobs did not fade; they spread out, about 30 percent wider than for nuclei we kept, until there was no peak left to detect. So we capped the width of nucleus blobs. Over four regions, faint nuclei found went from 13 of 31 to 19 of 31, and image quality changed by only 0.01 dB. Honestly: one region got worse, and on the Drosophila data the cap changed nothing.
+Building on Akim's peak starts. We measured how far blobs travel during fitting: less than one voxel on average, while nuclei are about 20 voxels apart. So a blob that starts between nuclei stays there. Akim's start put blobs on the brightest peaks, and bright background crowded out faint nuclei: only 73% of nuclei had a blob at the start. Starting one blob per detected nucleus covers all of them and raises the share of nuclei found after fitting from 52 to 71%.
 TERMS ON THIS SLIDE:
-- Faint nucleus: one whose brightness above the surroundings is in the lower half.
-- Size cap: an upper limit on a blob's size, applied only to the blobs that started on nuclei.
-- Region: one 64 x 128 x 128 crop of the Tribolium frame.
+- Detected nucleus / peak: a local brightness maximum found by a simple detector before fitting.
+- Peak-search window (non-maximum suppression): around each peak, weaker peaks closer than a set distance are ignored, so one nucleus gives one peak.
+- Found after fitting (recall): the share of reference nuclei that a detector still finds in the reconstruction.
 IF ASKED:
-- Is +6 nuclei significant? It is one seed and 4 regions, so treat it as promising, not settled. The result survived a scoring-bug fix (it was +7 before).</a:t>
+- Is this circular? Partly, on Tribolium: the reference nuclei came from a related detector. On hand-marked Drosophila nuclei the 'window = nucleus spacing' rule did NOT transfer; what transferred was setting windows in micrometres, not voxels.
+- Why did blobs not move? See the next step: the step size was too small.</a:t>
             </a:r>
             <a:endParaRPr lang="en-US" dirty="0"/>
           </a:p>
@@ -4359,7 +5113,7 @@
                   <a:schemeClr val="tx1"/>
                 </a:solidFill>
               </a:rPr>
-              <a:t>From the simple setup to the final recipe</a:t>
+              <a:t>Step 5 · Bigger steps let blobs travel</a:t>
             </a:r>
             <a:endParaRPr lang="en-US" sz="2800" dirty="0"/>
           </a:p>
@@ -4367,1416 +5121,57 @@
       </p:sp>
       <p:graphicFrame>
         <p:nvGraphicFramePr>
-          <p:cNvPr id="11" name="Table 0"/>
-          <p:cNvGraphicFramePr>
-            <a:graphicFrameLocks noGrp="1"/>
-          </p:cNvGraphicFramePr>
-          <p:nvPr>
-            <p:extLst>
-              <p:ext uri="{D42A27DB-BD31-4B8C-83A1-F6EECF244321}">
-                <p14:modId xmlns:p14="http://schemas.microsoft.com/office/powerpoint/2010/main" val="1579011935"/>
-              </p:ext>
-            </p:extLst>
-          </p:nvPr>
+          <p:cNvPr id="3" name="Chart 0" descr=""/>
+          <p:cNvGraphicFramePr/>
+          <p:nvPr/>
         </p:nvGraphicFramePr>
         <p:xfrm>
-          <a:off x="457200" y="1143000"/>
-          <a:ext cx="8229600" cy="914400"/>
+          <a:off x="457200" y="1051560"/>
+          <a:ext cx="4754880" cy="3246120"/>
         </p:xfrm>
-        <a:graphic>
-          <a:graphicData uri="http://schemas.openxmlformats.org/drawingml/2006/table">
-            <a:tbl>
-              <a:tblPr/>
-              <a:tblGrid>
-                <a:gridCol w="2651760"/>
-                <a:gridCol w="2560320"/>
-                <a:gridCol w="1508760"/>
-                <a:gridCol w="1508760"/>
-              </a:tblGrid>
-              <a:tr h="457200">
-                <a:tc>
-                  <a:txBody>
-                    <a:bodyPr/>
-                    <a:lstStyle/>
-                    <a:p>
-                      <a:pPr indent="0" marL="0">
-                        <a:buNone/>
-                      </a:pPr>
-                      <a:r>
-                        <a:rPr lang="en-US" sz="1600" b="1" dirty="0">
-                          <a:solidFill>
-                            <a:srgbClr val="FFFFFF"/>
-                          </a:solidFill>
-                          <a:latin typeface="Calibri" pitchFamily="34" charset="0"/>
-                          <a:ea typeface="Calibri" pitchFamily="34" charset="-122"/>
-                          <a:cs typeface="Calibri" pitchFamily="34" charset="-120"/>
-                        </a:rPr>
-                        <a:t>Change</a:t>
-                      </a:r>
-                      <a:endParaRPr lang="en-US" sz="1600" dirty="0">
-                        <a:latin typeface="Calibri" charset="0"/>
-                        <a:ea typeface="Calibri" charset="0"/>
-                        <a:cs typeface="Calibri" charset="0"/>
-                      </a:endParaRPr>
-                    </a:p>
-                  </a:txBody>
-                  <a:tcPr marL="91440" marR="91440" marT="45720" marB="45720">
-                    <a:lnL w="6350" cap="flat" cmpd="sng" algn="ctr">
-                      <a:solidFill>
-                        <a:srgbClr val="E5E7EB"/>
-                      </a:solidFill>
-                      <a:prstDash val="solid"/>
-                      <a:round/>
-                      <a:headEnd type="none" w="med" len="med"/>
-                      <a:tailEnd type="none" w="med" len="med"/>
-                    </a:lnL>
-                    <a:lnR w="6350" cap="flat" cmpd="sng" algn="ctr">
-                      <a:solidFill>
-                        <a:srgbClr val="E5E7EB"/>
-                      </a:solidFill>
-                      <a:prstDash val="solid"/>
-                      <a:round/>
-                      <a:headEnd type="none" w="med" len="med"/>
-                      <a:tailEnd type="none" w="med" len="med"/>
-                    </a:lnR>
-                    <a:lnT w="6350" cap="flat" cmpd="sng" algn="ctr">
-                      <a:solidFill>
-                        <a:srgbClr val="E5E7EB"/>
-                      </a:solidFill>
-                      <a:prstDash val="solid"/>
-                      <a:round/>
-                      <a:headEnd type="none" w="med" len="med"/>
-                      <a:tailEnd type="none" w="med" len="med"/>
-                    </a:lnT>
-                    <a:lnB w="6350" cap="flat" cmpd="sng" algn="ctr">
-                      <a:solidFill>
-                        <a:srgbClr val="E5E7EB"/>
-                      </a:solidFill>
-                      <a:prstDash val="solid"/>
-                      <a:round/>
-                      <a:headEnd type="none" w="med" len="med"/>
-                      <a:tailEnd type="none" w="med" len="med"/>
-                    </a:lnB>
-                    <a:solidFill>
-                      <a:srgbClr val="3A3F4B"/>
-                    </a:solidFill>
-                  </a:tcPr>
-                </a:tc>
-                <a:tc>
-                  <a:txBody>
-                    <a:bodyPr/>
-                    <a:lstStyle/>
-                    <a:p>
-                      <a:pPr indent="0" marL="0">
-                        <a:buNone/>
-                      </a:pPr>
-                      <a:r>
-                        <a:rPr lang="en-US" sz="1600" b="1" dirty="0">
-                          <a:solidFill>
-                            <a:srgbClr val="FFFFFF"/>
-                          </a:solidFill>
-                          <a:latin typeface="Calibri" pitchFamily="34" charset="0"/>
-                          <a:ea typeface="Calibri" pitchFamily="34" charset="-122"/>
-                          <a:cs typeface="Calibri" pitchFamily="34" charset="-120"/>
-                        </a:rPr>
-                        <a:t>Measured on</a:t>
-                      </a:r>
-                      <a:endParaRPr lang="en-US" sz="1600" dirty="0">
-                        <a:latin typeface="Calibri" charset="0"/>
-                        <a:ea typeface="Calibri" charset="0"/>
-                        <a:cs typeface="Calibri" charset="0"/>
-                      </a:endParaRPr>
-                    </a:p>
-                  </a:txBody>
-                  <a:tcPr marL="91440" marR="91440" marT="45720" marB="45720">
-                    <a:lnL w="6350" cap="flat" cmpd="sng" algn="ctr">
-                      <a:solidFill>
-                        <a:srgbClr val="E5E7EB"/>
-                      </a:solidFill>
-                      <a:prstDash val="solid"/>
-                      <a:round/>
-                      <a:headEnd type="none" w="med" len="med"/>
-                      <a:tailEnd type="none" w="med" len="med"/>
-                    </a:lnL>
-                    <a:lnR w="6350" cap="flat" cmpd="sng" algn="ctr">
-                      <a:solidFill>
-                        <a:srgbClr val="E5E7EB"/>
-                      </a:solidFill>
-                      <a:prstDash val="solid"/>
-                      <a:round/>
-                      <a:headEnd type="none" w="med" len="med"/>
-                      <a:tailEnd type="none" w="med" len="med"/>
-                    </a:lnR>
-                    <a:lnT w="6350" cap="flat" cmpd="sng" algn="ctr">
-                      <a:solidFill>
-                        <a:srgbClr val="E5E7EB"/>
-                      </a:solidFill>
-                      <a:prstDash val="solid"/>
-                      <a:round/>
-                      <a:headEnd type="none" w="med" len="med"/>
-                      <a:tailEnd type="none" w="med" len="med"/>
-                    </a:lnT>
-                    <a:lnB w="6350" cap="flat" cmpd="sng" algn="ctr">
-                      <a:solidFill>
-                        <a:srgbClr val="E5E7EB"/>
-                      </a:solidFill>
-                      <a:prstDash val="solid"/>
-                      <a:round/>
-                      <a:headEnd type="none" w="med" len="med"/>
-                      <a:tailEnd type="none" w="med" len="med"/>
-                    </a:lnB>
-                    <a:solidFill>
-                      <a:srgbClr val="3A3F4B"/>
-                    </a:solidFill>
-                  </a:tcPr>
-                </a:tc>
-                <a:tc>
-                  <a:txBody>
-                    <a:bodyPr/>
-                    <a:lstStyle/>
-                    <a:p>
-                      <a:pPr indent="0" marL="0">
-                        <a:buNone/>
-                      </a:pPr>
-                      <a:r>
-                        <a:rPr lang="en-US" sz="1600" b="1" dirty="0">
-                          <a:solidFill>
-                            <a:srgbClr val="FFFFFF"/>
-                          </a:solidFill>
-                          <a:latin typeface="Calibri" pitchFamily="34" charset="0"/>
-                          <a:ea typeface="Calibri" pitchFamily="34" charset="-122"/>
-                          <a:cs typeface="Calibri" pitchFamily="34" charset="-120"/>
-                        </a:rPr>
-                        <a:t>Before</a:t>
-                      </a:r>
-                      <a:endParaRPr lang="en-US" sz="1600" dirty="0">
-                        <a:latin typeface="Calibri" charset="0"/>
-                        <a:ea typeface="Calibri" charset="0"/>
-                        <a:cs typeface="Calibri" charset="0"/>
-                      </a:endParaRPr>
-                    </a:p>
-                  </a:txBody>
-                  <a:tcPr marL="91440" marR="91440" marT="45720" marB="45720">
-                    <a:lnL w="6350" cap="flat" cmpd="sng" algn="ctr">
-                      <a:solidFill>
-                        <a:srgbClr val="E5E7EB"/>
-                      </a:solidFill>
-                      <a:prstDash val="solid"/>
-                      <a:round/>
-                      <a:headEnd type="none" w="med" len="med"/>
-                      <a:tailEnd type="none" w="med" len="med"/>
-                    </a:lnL>
-                    <a:lnR w="6350" cap="flat" cmpd="sng" algn="ctr">
-                      <a:solidFill>
-                        <a:srgbClr val="E5E7EB"/>
-                      </a:solidFill>
-                      <a:prstDash val="solid"/>
-                      <a:round/>
-                      <a:headEnd type="none" w="med" len="med"/>
-                      <a:tailEnd type="none" w="med" len="med"/>
-                    </a:lnR>
-                    <a:lnT w="6350" cap="flat" cmpd="sng" algn="ctr">
-                      <a:solidFill>
-                        <a:srgbClr val="E5E7EB"/>
-                      </a:solidFill>
-                      <a:prstDash val="solid"/>
-                      <a:round/>
-                      <a:headEnd type="none" w="med" len="med"/>
-                      <a:tailEnd type="none" w="med" len="med"/>
-                    </a:lnT>
-                    <a:lnB w="6350" cap="flat" cmpd="sng" algn="ctr">
-                      <a:solidFill>
-                        <a:srgbClr val="E5E7EB"/>
-                      </a:solidFill>
-                      <a:prstDash val="solid"/>
-                      <a:round/>
-                      <a:headEnd type="none" w="med" len="med"/>
-                      <a:tailEnd type="none" w="med" len="med"/>
-                    </a:lnB>
-                    <a:solidFill>
-                      <a:srgbClr val="3A3F4B"/>
-                    </a:solidFill>
-                  </a:tcPr>
-                </a:tc>
-                <a:tc>
-                  <a:txBody>
-                    <a:bodyPr/>
-                    <a:lstStyle/>
-                    <a:p>
-                      <a:pPr indent="0" marL="0">
-                        <a:buNone/>
-                      </a:pPr>
-                      <a:r>
-                        <a:rPr lang="en-US" sz="1600" b="1" dirty="0">
-                          <a:solidFill>
-                            <a:srgbClr val="FFFFFF"/>
-                          </a:solidFill>
-                          <a:latin typeface="Calibri" pitchFamily="34" charset="0"/>
-                          <a:ea typeface="Calibri" pitchFamily="34" charset="-122"/>
-                          <a:cs typeface="Calibri" pitchFamily="34" charset="-120"/>
-                        </a:rPr>
-                        <a:t>After</a:t>
-                      </a:r>
-                      <a:endParaRPr lang="en-US" sz="1600" dirty="0">
-                        <a:latin typeface="Calibri" charset="0"/>
-                        <a:ea typeface="Calibri" charset="0"/>
-                        <a:cs typeface="Calibri" charset="0"/>
-                      </a:endParaRPr>
-                    </a:p>
-                  </a:txBody>
-                  <a:tcPr marL="91440" marR="91440" marT="45720" marB="45720">
-                    <a:lnL w="6350" cap="flat" cmpd="sng" algn="ctr">
-                      <a:solidFill>
-                        <a:srgbClr val="E5E7EB"/>
-                      </a:solidFill>
-                      <a:prstDash val="solid"/>
-                      <a:round/>
-                      <a:headEnd type="none" w="med" len="med"/>
-                      <a:tailEnd type="none" w="med" len="med"/>
-                    </a:lnL>
-                    <a:lnR w="6350" cap="flat" cmpd="sng" algn="ctr">
-                      <a:solidFill>
-                        <a:srgbClr val="E5E7EB"/>
-                      </a:solidFill>
-                      <a:prstDash val="solid"/>
-                      <a:round/>
-                      <a:headEnd type="none" w="med" len="med"/>
-                      <a:tailEnd type="none" w="med" len="med"/>
-                    </a:lnR>
-                    <a:lnT w="6350" cap="flat" cmpd="sng" algn="ctr">
-                      <a:solidFill>
-                        <a:srgbClr val="E5E7EB"/>
-                      </a:solidFill>
-                      <a:prstDash val="solid"/>
-                      <a:round/>
-                      <a:headEnd type="none" w="med" len="med"/>
-                      <a:tailEnd type="none" w="med" len="med"/>
-                    </a:lnT>
-                    <a:lnB w="6350" cap="flat" cmpd="sng" algn="ctr">
-                      <a:solidFill>
-                        <a:srgbClr val="E5E7EB"/>
-                      </a:solidFill>
-                      <a:prstDash val="solid"/>
-                      <a:round/>
-                      <a:headEnd type="none" w="med" len="med"/>
-                      <a:tailEnd type="none" w="med" len="med"/>
-                    </a:lnB>
-                    <a:solidFill>
-                      <a:srgbClr val="3A3F4B"/>
-                    </a:solidFill>
-                  </a:tcPr>
-                </a:tc>
-              </a:tr>
-              <a:tr h="457200">
-                <a:tc>
-                  <a:txBody>
-                    <a:bodyPr/>
-                    <a:lstStyle/>
-                    <a:p>
-                      <a:pPr algn="l" indent="0" marL="0">
-                        <a:buNone/>
-                      </a:pPr>
-                      <a:r>
-                        <a:rPr lang="en-US" sz="1600" dirty="0">
-                          <a:solidFill>
-                            <a:srgbClr val="15171C"/>
-                          </a:solidFill>
-                          <a:latin typeface="Calibri" pitchFamily="34" charset="0"/>
-                          <a:ea typeface="Calibri" pitchFamily="34" charset="-122"/>
-                          <a:cs typeface="Calibri" pitchFamily="34" charset="-120"/>
-                        </a:rPr>
-                        <a:t>Stretch + rotate</a:t>
-                      </a:r>
-                      <a:endParaRPr lang="en-US" sz="1600" dirty="0">
-                        <a:latin typeface="Calibri" charset="0"/>
-                        <a:ea typeface="Calibri" charset="0"/>
-                        <a:cs typeface="Calibri" charset="0"/>
-                      </a:endParaRPr>
-                    </a:p>
-                  </a:txBody>
-                  <a:tcPr marL="91440" marR="91440" marT="45720" marB="45720">
-                    <a:lnL w="6350" cap="flat" cmpd="sng" algn="ctr">
-                      <a:solidFill>
-                        <a:srgbClr val="E5E7EB"/>
-                      </a:solidFill>
-                      <a:prstDash val="solid"/>
-                      <a:round/>
-                      <a:headEnd type="none" w="med" len="med"/>
-                      <a:tailEnd type="none" w="med" len="med"/>
-                    </a:lnL>
-                    <a:lnR w="6350" cap="flat" cmpd="sng" algn="ctr">
-                      <a:solidFill>
-                        <a:srgbClr val="E5E7EB"/>
-                      </a:solidFill>
-                      <a:prstDash val="solid"/>
-                      <a:round/>
-                      <a:headEnd type="none" w="med" len="med"/>
-                      <a:tailEnd type="none" w="med" len="med"/>
-                    </a:lnR>
-                    <a:lnT w="6350" cap="flat" cmpd="sng" algn="ctr">
-                      <a:solidFill>
-                        <a:srgbClr val="E5E7EB"/>
-                      </a:solidFill>
-                      <a:prstDash val="solid"/>
-                      <a:round/>
-                      <a:headEnd type="none" w="med" len="med"/>
-                      <a:tailEnd type="none" w="med" len="med"/>
-                    </a:lnT>
-                    <a:lnB w="6350" cap="flat" cmpd="sng" algn="ctr">
-                      <a:solidFill>
-                        <a:srgbClr val="E5E7EB"/>
-                      </a:solidFill>
-                      <a:prstDash val="solid"/>
-                      <a:round/>
-                      <a:headEnd type="none" w="med" len="med"/>
-                      <a:tailEnd type="none" w="med" len="med"/>
-                    </a:lnB>
-                    <a:solidFill>
-                      <a:srgbClr val="FFFFFF"/>
-                    </a:solidFill>
-                  </a:tcPr>
-                </a:tc>
-                <a:tc>
-                  <a:txBody>
-                    <a:bodyPr/>
-                    <a:lstStyle/>
-                    <a:p>
-                      <a:pPr algn="l" indent="0" marL="0">
-                        <a:buNone/>
-                      </a:pPr>
-                      <a:r>
-                        <a:rPr lang="en-US" sz="1600" dirty="0">
-                          <a:solidFill>
-                            <a:srgbClr val="15171C"/>
-                          </a:solidFill>
-                          <a:latin typeface="Calibri" pitchFamily="34" charset="0"/>
-                          <a:ea typeface="Calibri" pitchFamily="34" charset="-122"/>
-                          <a:cs typeface="Calibri" pitchFamily="34" charset="-120"/>
-                        </a:rPr>
-                        <a:t>PSNR, 15 fits</a:t>
-                      </a:r>
-                      <a:endParaRPr lang="en-US" sz="1600" dirty="0">
-                        <a:latin typeface="Calibri" charset="0"/>
-                        <a:ea typeface="Calibri" charset="0"/>
-                        <a:cs typeface="Calibri" charset="0"/>
-                      </a:endParaRPr>
-                    </a:p>
-                  </a:txBody>
-                  <a:tcPr marL="91440" marR="91440" marT="45720" marB="45720">
-                    <a:lnL w="6350" cap="flat" cmpd="sng" algn="ctr">
-                      <a:solidFill>
-                        <a:srgbClr val="E5E7EB"/>
-                      </a:solidFill>
-                      <a:prstDash val="solid"/>
-                      <a:round/>
-                      <a:headEnd type="none" w="med" len="med"/>
-                      <a:tailEnd type="none" w="med" len="med"/>
-                    </a:lnL>
-                    <a:lnR w="6350" cap="flat" cmpd="sng" algn="ctr">
-                      <a:solidFill>
-                        <a:srgbClr val="E5E7EB"/>
-                      </a:solidFill>
-                      <a:prstDash val="solid"/>
-                      <a:round/>
-                      <a:headEnd type="none" w="med" len="med"/>
-                      <a:tailEnd type="none" w="med" len="med"/>
-                    </a:lnR>
-                    <a:lnT w="6350" cap="flat" cmpd="sng" algn="ctr">
-                      <a:solidFill>
-                        <a:srgbClr val="E5E7EB"/>
-                      </a:solidFill>
-                      <a:prstDash val="solid"/>
-                      <a:round/>
-                      <a:headEnd type="none" w="med" len="med"/>
-                      <a:tailEnd type="none" w="med" len="med"/>
-                    </a:lnT>
-                    <a:lnB w="6350" cap="flat" cmpd="sng" algn="ctr">
-                      <a:solidFill>
-                        <a:srgbClr val="E5E7EB"/>
-                      </a:solidFill>
-                      <a:prstDash val="solid"/>
-                      <a:round/>
-                      <a:headEnd type="none" w="med" len="med"/>
-                      <a:tailEnd type="none" w="med" len="med"/>
-                    </a:lnB>
-                    <a:solidFill>
-                      <a:srgbClr val="FFFFFF"/>
-                    </a:solidFill>
-                  </a:tcPr>
-                </a:tc>
-                <a:tc>
-                  <a:txBody>
-                    <a:bodyPr/>
-                    <a:lstStyle/>
-                    <a:p>
-                      <a:pPr algn="ctr" indent="0" marL="0">
-                        <a:buNone/>
-                      </a:pPr>
-                      <a:r>
-                        <a:rPr lang="en-US" sz="1600" dirty="0">
-                          <a:solidFill>
-                            <a:srgbClr val="15171C"/>
-                          </a:solidFill>
-                          <a:latin typeface="Calibri" pitchFamily="34" charset="0"/>
-                          <a:ea typeface="Calibri" pitchFamily="34" charset="-122"/>
-                          <a:cs typeface="Calibri" pitchFamily="34" charset="-120"/>
-                        </a:rPr>
-                        <a:t>22.3 dB</a:t>
-                      </a:r>
-                      <a:endParaRPr lang="en-US" sz="1600" dirty="0">
-                        <a:latin typeface="Calibri" charset="0"/>
-                        <a:ea typeface="Calibri" charset="0"/>
-                        <a:cs typeface="Calibri" charset="0"/>
-                      </a:endParaRPr>
-                    </a:p>
-                  </a:txBody>
-                  <a:tcPr marL="91440" marR="91440" marT="45720" marB="45720">
-                    <a:lnL w="6350" cap="flat" cmpd="sng" algn="ctr">
-                      <a:solidFill>
-                        <a:srgbClr val="E5E7EB"/>
-                      </a:solidFill>
-                      <a:prstDash val="solid"/>
-                      <a:round/>
-                      <a:headEnd type="none" w="med" len="med"/>
-                      <a:tailEnd type="none" w="med" len="med"/>
-                    </a:lnL>
-                    <a:lnR w="6350" cap="flat" cmpd="sng" algn="ctr">
-                      <a:solidFill>
-                        <a:srgbClr val="E5E7EB"/>
-                      </a:solidFill>
-                      <a:prstDash val="solid"/>
-                      <a:round/>
-                      <a:headEnd type="none" w="med" len="med"/>
-                      <a:tailEnd type="none" w="med" len="med"/>
-                    </a:lnR>
-                    <a:lnT w="6350" cap="flat" cmpd="sng" algn="ctr">
-                      <a:solidFill>
-                        <a:srgbClr val="E5E7EB"/>
-                      </a:solidFill>
-                      <a:prstDash val="solid"/>
-                      <a:round/>
-                      <a:headEnd type="none" w="med" len="med"/>
-                      <a:tailEnd type="none" w="med" len="med"/>
-                    </a:lnT>
-                    <a:lnB w="6350" cap="flat" cmpd="sng" algn="ctr">
-                      <a:solidFill>
-                        <a:srgbClr val="E5E7EB"/>
-                      </a:solidFill>
-                      <a:prstDash val="solid"/>
-                      <a:round/>
-                      <a:headEnd type="none" w="med" len="med"/>
-                      <a:tailEnd type="none" w="med" len="med"/>
-                    </a:lnB>
-                    <a:solidFill>
-                      <a:srgbClr val="FFFFFF"/>
-                    </a:solidFill>
-                  </a:tcPr>
-                </a:tc>
-                <a:tc>
-                  <a:txBody>
-                    <a:bodyPr/>
-                    <a:lstStyle/>
-                    <a:p>
-                      <a:pPr algn="ctr" indent="0" marL="0">
-                        <a:buNone/>
-                      </a:pPr>
-                      <a:r>
-                        <a:rPr lang="en-US" sz="1600" b="1" dirty="0">
-                          <a:solidFill>
-                            <a:srgbClr val="E8730C"/>
-                          </a:solidFill>
-                          <a:latin typeface="Calibri" pitchFamily="34" charset="0"/>
-                          <a:ea typeface="Calibri" pitchFamily="34" charset="-122"/>
-                          <a:cs typeface="Calibri" pitchFamily="34" charset="-120"/>
-                        </a:rPr>
-                        <a:t>25.5 dB</a:t>
-                      </a:r>
-                      <a:endParaRPr lang="en-US" sz="1600" dirty="0">
-                        <a:latin typeface="Calibri" charset="0"/>
-                        <a:ea typeface="Calibri" charset="0"/>
-                        <a:cs typeface="Calibri" charset="0"/>
-                      </a:endParaRPr>
-                    </a:p>
-                  </a:txBody>
-                  <a:tcPr marL="91440" marR="91440" marT="45720" marB="45720">
-                    <a:lnL w="6350" cap="flat" cmpd="sng" algn="ctr">
-                      <a:solidFill>
-                        <a:srgbClr val="E5E7EB"/>
-                      </a:solidFill>
-                      <a:prstDash val="solid"/>
-                      <a:round/>
-                      <a:headEnd type="none" w="med" len="med"/>
-                      <a:tailEnd type="none" w="med" len="med"/>
-                    </a:lnL>
-                    <a:lnR w="6350" cap="flat" cmpd="sng" algn="ctr">
-                      <a:solidFill>
-                        <a:srgbClr val="E5E7EB"/>
-                      </a:solidFill>
-                      <a:prstDash val="solid"/>
-                      <a:round/>
-                      <a:headEnd type="none" w="med" len="med"/>
-                      <a:tailEnd type="none" w="med" len="med"/>
-                    </a:lnR>
-                    <a:lnT w="6350" cap="flat" cmpd="sng" algn="ctr">
-                      <a:solidFill>
-                        <a:srgbClr val="E5E7EB"/>
-                      </a:solidFill>
-                      <a:prstDash val="solid"/>
-                      <a:round/>
-                      <a:headEnd type="none" w="med" len="med"/>
-                      <a:tailEnd type="none" w="med" len="med"/>
-                    </a:lnT>
-                    <a:lnB w="6350" cap="flat" cmpd="sng" algn="ctr">
-                      <a:solidFill>
-                        <a:srgbClr val="E5E7EB"/>
-                      </a:solidFill>
-                      <a:prstDash val="solid"/>
-                      <a:round/>
-                      <a:headEnd type="none" w="med" len="med"/>
-                      <a:tailEnd type="none" w="med" len="med"/>
-                    </a:lnB>
-                    <a:solidFill>
-                      <a:srgbClr val="FFFFFF"/>
-                    </a:solidFill>
-                  </a:tcPr>
-                </a:tc>
-              </a:tr>
-              <a:tr h="457200">
-                <a:tc>
-                  <a:txBody>
-                    <a:bodyPr/>
-                    <a:lstStyle/>
-                    <a:p>
-                      <a:pPr algn="l" indent="0" marL="0">
-                        <a:buNone/>
-                      </a:pPr>
-                      <a:r>
-                        <a:rPr lang="en-US" sz="1600" dirty="0">
-                          <a:solidFill>
-                            <a:srgbClr val="15171C"/>
-                          </a:solidFill>
-                          <a:latin typeface="Calibri" pitchFamily="34" charset="0"/>
-                          <a:ea typeface="Calibri" pitchFamily="34" charset="-122"/>
-                          <a:cs typeface="Calibri" pitchFamily="34" charset="-120"/>
-                        </a:rPr>
-                        <a:t>One start per nucleus</a:t>
-                      </a:r>
-                      <a:endParaRPr lang="en-US" sz="1600" dirty="0">
-                        <a:latin typeface="Calibri" charset="0"/>
-                        <a:ea typeface="Calibri" charset="0"/>
-                        <a:cs typeface="Calibri" charset="0"/>
-                      </a:endParaRPr>
-                    </a:p>
-                  </a:txBody>
-                  <a:tcPr marL="91440" marR="91440" marT="45720" marB="45720">
-                    <a:lnL w="6350" cap="flat" cmpd="sng" algn="ctr">
-                      <a:solidFill>
-                        <a:srgbClr val="E5E7EB"/>
-                      </a:solidFill>
-                      <a:prstDash val="solid"/>
-                      <a:round/>
-                      <a:headEnd type="none" w="med" len="med"/>
-                      <a:tailEnd type="none" w="med" len="med"/>
-                    </a:lnL>
-                    <a:lnR w="6350" cap="flat" cmpd="sng" algn="ctr">
-                      <a:solidFill>
-                        <a:srgbClr val="E5E7EB"/>
-                      </a:solidFill>
-                      <a:prstDash val="solid"/>
-                      <a:round/>
-                      <a:headEnd type="none" w="med" len="med"/>
-                      <a:tailEnd type="none" w="med" len="med"/>
-                    </a:lnR>
-                    <a:lnT w="6350" cap="flat" cmpd="sng" algn="ctr">
-                      <a:solidFill>
-                        <a:srgbClr val="E5E7EB"/>
-                      </a:solidFill>
-                      <a:prstDash val="solid"/>
-                      <a:round/>
-                      <a:headEnd type="none" w="med" len="med"/>
-                      <a:tailEnd type="none" w="med" len="med"/>
-                    </a:lnT>
-                    <a:lnB w="6350" cap="flat" cmpd="sng" algn="ctr">
-                      <a:solidFill>
-                        <a:srgbClr val="E5E7EB"/>
-                      </a:solidFill>
-                      <a:prstDash val="solid"/>
-                      <a:round/>
-                      <a:headEnd type="none" w="med" len="med"/>
-                      <a:tailEnd type="none" w="med" len="med"/>
-                    </a:lnB>
-                    <a:solidFill>
-                      <a:srgbClr val="FFFFFF"/>
-                    </a:solidFill>
-                  </a:tcPr>
-                </a:tc>
-                <a:tc>
-                  <a:txBody>
-                    <a:bodyPr/>
-                    <a:lstStyle/>
-                    <a:p>
-                      <a:pPr algn="l" indent="0" marL="0">
-                        <a:buNone/>
-                      </a:pPr>
-                      <a:r>
-                        <a:rPr lang="en-US" sz="1600" dirty="0">
-                          <a:solidFill>
-                            <a:srgbClr val="15171C"/>
-                          </a:solidFill>
-                          <a:latin typeface="Calibri" pitchFamily="34" charset="0"/>
-                          <a:ea typeface="Calibri" pitchFamily="34" charset="-122"/>
-                          <a:cs typeface="Calibri" pitchFamily="34" charset="-120"/>
-                        </a:rPr>
-                        <a:t>nuclei found, 110</a:t>
-                      </a:r>
-                      <a:endParaRPr lang="en-US" sz="1600" dirty="0">
-                        <a:latin typeface="Calibri" charset="0"/>
-                        <a:ea typeface="Calibri" charset="0"/>
-                        <a:cs typeface="Calibri" charset="0"/>
-                      </a:endParaRPr>
-                    </a:p>
-                  </a:txBody>
-                  <a:tcPr marL="91440" marR="91440" marT="45720" marB="45720">
-                    <a:lnL w="6350" cap="flat" cmpd="sng" algn="ctr">
-                      <a:solidFill>
-                        <a:srgbClr val="E5E7EB"/>
-                      </a:solidFill>
-                      <a:prstDash val="solid"/>
-                      <a:round/>
-                      <a:headEnd type="none" w="med" len="med"/>
-                      <a:tailEnd type="none" w="med" len="med"/>
-                    </a:lnL>
-                    <a:lnR w="6350" cap="flat" cmpd="sng" algn="ctr">
-                      <a:solidFill>
-                        <a:srgbClr val="E5E7EB"/>
-                      </a:solidFill>
-                      <a:prstDash val="solid"/>
-                      <a:round/>
-                      <a:headEnd type="none" w="med" len="med"/>
-                      <a:tailEnd type="none" w="med" len="med"/>
-                    </a:lnR>
-                    <a:lnT w="6350" cap="flat" cmpd="sng" algn="ctr">
-                      <a:solidFill>
-                        <a:srgbClr val="E5E7EB"/>
-                      </a:solidFill>
-                      <a:prstDash val="solid"/>
-                      <a:round/>
-                      <a:headEnd type="none" w="med" len="med"/>
-                      <a:tailEnd type="none" w="med" len="med"/>
-                    </a:lnT>
-                    <a:lnB w="6350" cap="flat" cmpd="sng" algn="ctr">
-                      <a:solidFill>
-                        <a:srgbClr val="E5E7EB"/>
-                      </a:solidFill>
-                      <a:prstDash val="solid"/>
-                      <a:round/>
-                      <a:headEnd type="none" w="med" len="med"/>
-                      <a:tailEnd type="none" w="med" len="med"/>
-                    </a:lnB>
-                    <a:solidFill>
-                      <a:srgbClr val="FFFFFF"/>
-                    </a:solidFill>
-                  </a:tcPr>
-                </a:tc>
-                <a:tc>
-                  <a:txBody>
-                    <a:bodyPr/>
-                    <a:lstStyle/>
-                    <a:p>
-                      <a:pPr algn="ctr" indent="0" marL="0">
-                        <a:buNone/>
-                      </a:pPr>
-                      <a:r>
-                        <a:rPr lang="en-US" sz="1600" dirty="0">
-                          <a:solidFill>
-                            <a:srgbClr val="15171C"/>
-                          </a:solidFill>
-                          <a:latin typeface="Calibri" pitchFamily="34" charset="0"/>
-                          <a:ea typeface="Calibri" pitchFamily="34" charset="-122"/>
-                          <a:cs typeface="Calibri" pitchFamily="34" charset="-120"/>
-                        </a:rPr>
-                        <a:t>52%</a:t>
-                      </a:r>
-                      <a:endParaRPr lang="en-US" sz="1600" dirty="0">
-                        <a:latin typeface="Calibri" charset="0"/>
-                        <a:ea typeface="Calibri" charset="0"/>
-                        <a:cs typeface="Calibri" charset="0"/>
-                      </a:endParaRPr>
-                    </a:p>
-                  </a:txBody>
-                  <a:tcPr marL="91440" marR="91440" marT="45720" marB="45720">
-                    <a:lnL w="6350" cap="flat" cmpd="sng" algn="ctr">
-                      <a:solidFill>
-                        <a:srgbClr val="E5E7EB"/>
-                      </a:solidFill>
-                      <a:prstDash val="solid"/>
-                      <a:round/>
-                      <a:headEnd type="none" w="med" len="med"/>
-                      <a:tailEnd type="none" w="med" len="med"/>
-                    </a:lnL>
-                    <a:lnR w="6350" cap="flat" cmpd="sng" algn="ctr">
-                      <a:solidFill>
-                        <a:srgbClr val="E5E7EB"/>
-                      </a:solidFill>
-                      <a:prstDash val="solid"/>
-                      <a:round/>
-                      <a:headEnd type="none" w="med" len="med"/>
-                      <a:tailEnd type="none" w="med" len="med"/>
-                    </a:lnR>
-                    <a:lnT w="6350" cap="flat" cmpd="sng" algn="ctr">
-                      <a:solidFill>
-                        <a:srgbClr val="E5E7EB"/>
-                      </a:solidFill>
-                      <a:prstDash val="solid"/>
-                      <a:round/>
-                      <a:headEnd type="none" w="med" len="med"/>
-                      <a:tailEnd type="none" w="med" len="med"/>
-                    </a:lnT>
-                    <a:lnB w="6350" cap="flat" cmpd="sng" algn="ctr">
-                      <a:solidFill>
-                        <a:srgbClr val="E5E7EB"/>
-                      </a:solidFill>
-                      <a:prstDash val="solid"/>
-                      <a:round/>
-                      <a:headEnd type="none" w="med" len="med"/>
-                      <a:tailEnd type="none" w="med" len="med"/>
-                    </a:lnB>
-                    <a:solidFill>
-                      <a:srgbClr val="FFFFFF"/>
-                    </a:solidFill>
-                  </a:tcPr>
-                </a:tc>
-                <a:tc>
-                  <a:txBody>
-                    <a:bodyPr/>
-                    <a:lstStyle/>
-                    <a:p>
-                      <a:pPr algn="ctr" indent="0" marL="0">
-                        <a:buNone/>
-                      </a:pPr>
-                      <a:r>
-                        <a:rPr lang="en-US" sz="1600" b="1" dirty="0">
-                          <a:solidFill>
-                            <a:srgbClr val="E8730C"/>
-                          </a:solidFill>
-                          <a:latin typeface="Calibri" pitchFamily="34" charset="0"/>
-                          <a:ea typeface="Calibri" pitchFamily="34" charset="-122"/>
-                          <a:cs typeface="Calibri" pitchFamily="34" charset="-120"/>
-                        </a:rPr>
-                        <a:t>71%</a:t>
-                      </a:r>
-                      <a:endParaRPr lang="en-US" sz="1600" dirty="0">
-                        <a:latin typeface="Calibri" charset="0"/>
-                        <a:ea typeface="Calibri" charset="0"/>
-                        <a:cs typeface="Calibri" charset="0"/>
-                      </a:endParaRPr>
-                    </a:p>
-                  </a:txBody>
-                  <a:tcPr marL="91440" marR="91440" marT="45720" marB="45720">
-                    <a:lnL w="6350" cap="flat" cmpd="sng" algn="ctr">
-                      <a:solidFill>
-                        <a:srgbClr val="E5E7EB"/>
-                      </a:solidFill>
-                      <a:prstDash val="solid"/>
-                      <a:round/>
-                      <a:headEnd type="none" w="med" len="med"/>
-                      <a:tailEnd type="none" w="med" len="med"/>
-                    </a:lnL>
-                    <a:lnR w="6350" cap="flat" cmpd="sng" algn="ctr">
-                      <a:solidFill>
-                        <a:srgbClr val="E5E7EB"/>
-                      </a:solidFill>
-                      <a:prstDash val="solid"/>
-                      <a:round/>
-                      <a:headEnd type="none" w="med" len="med"/>
-                      <a:tailEnd type="none" w="med" len="med"/>
-                    </a:lnR>
-                    <a:lnT w="6350" cap="flat" cmpd="sng" algn="ctr">
-                      <a:solidFill>
-                        <a:srgbClr val="E5E7EB"/>
-                      </a:solidFill>
-                      <a:prstDash val="solid"/>
-                      <a:round/>
-                      <a:headEnd type="none" w="med" len="med"/>
-                      <a:tailEnd type="none" w="med" len="med"/>
-                    </a:lnT>
-                    <a:lnB w="6350" cap="flat" cmpd="sng" algn="ctr">
-                      <a:solidFill>
-                        <a:srgbClr val="E5E7EB"/>
-                      </a:solidFill>
-                      <a:prstDash val="solid"/>
-                      <a:round/>
-                      <a:headEnd type="none" w="med" len="med"/>
-                      <a:tailEnd type="none" w="med" len="med"/>
-                    </a:lnB>
-                    <a:solidFill>
-                      <a:srgbClr val="FFFFFF"/>
-                    </a:solidFill>
-                  </a:tcPr>
-                </a:tc>
-              </a:tr>
-              <a:tr h="457200">
-                <a:tc>
-                  <a:txBody>
-                    <a:bodyPr/>
-                    <a:lstStyle/>
-                    <a:p>
-                      <a:pPr algn="l" indent="0" marL="0">
-                        <a:buNone/>
-                      </a:pPr>
-                      <a:r>
-                        <a:rPr lang="en-US" sz="1600" dirty="0">
-                          <a:solidFill>
-                            <a:srgbClr val="15171C"/>
-                          </a:solidFill>
-                          <a:latin typeface="Calibri" pitchFamily="34" charset="0"/>
-                          <a:ea typeface="Calibri" pitchFamily="34" charset="-122"/>
-                          <a:cs typeface="Calibri" pitchFamily="34" charset="-120"/>
-                        </a:rPr>
-                        <a:t>Bigger position steps</a:t>
-                      </a:r>
-                      <a:endParaRPr lang="en-US" sz="1600" dirty="0">
-                        <a:latin typeface="Calibri" charset="0"/>
-                        <a:ea typeface="Calibri" charset="0"/>
-                        <a:cs typeface="Calibri" charset="0"/>
-                      </a:endParaRPr>
-                    </a:p>
-                  </a:txBody>
-                  <a:tcPr marL="91440" marR="91440" marT="45720" marB="45720">
-                    <a:lnL w="6350" cap="flat" cmpd="sng" algn="ctr">
-                      <a:solidFill>
-                        <a:srgbClr val="E5E7EB"/>
-                      </a:solidFill>
-                      <a:prstDash val="solid"/>
-                      <a:round/>
-                      <a:headEnd type="none" w="med" len="med"/>
-                      <a:tailEnd type="none" w="med" len="med"/>
-                    </a:lnL>
-                    <a:lnR w="6350" cap="flat" cmpd="sng" algn="ctr">
-                      <a:solidFill>
-                        <a:srgbClr val="E5E7EB"/>
-                      </a:solidFill>
-                      <a:prstDash val="solid"/>
-                      <a:round/>
-                      <a:headEnd type="none" w="med" len="med"/>
-                      <a:tailEnd type="none" w="med" len="med"/>
-                    </a:lnR>
-                    <a:lnT w="6350" cap="flat" cmpd="sng" algn="ctr">
-                      <a:solidFill>
-                        <a:srgbClr val="E5E7EB"/>
-                      </a:solidFill>
-                      <a:prstDash val="solid"/>
-                      <a:round/>
-                      <a:headEnd type="none" w="med" len="med"/>
-                      <a:tailEnd type="none" w="med" len="med"/>
-                    </a:lnT>
-                    <a:lnB w="6350" cap="flat" cmpd="sng" algn="ctr">
-                      <a:solidFill>
-                        <a:srgbClr val="E5E7EB"/>
-                      </a:solidFill>
-                      <a:prstDash val="solid"/>
-                      <a:round/>
-                      <a:headEnd type="none" w="med" len="med"/>
-                      <a:tailEnd type="none" w="med" len="med"/>
-                    </a:lnB>
-                    <a:solidFill>
-                      <a:srgbClr val="FFFFFF"/>
-                    </a:solidFill>
-                  </a:tcPr>
-                </a:tc>
-                <a:tc>
-                  <a:txBody>
-                    <a:bodyPr/>
-                    <a:lstStyle/>
-                    <a:p>
-                      <a:pPr algn="l" indent="0" marL="0">
-                        <a:buNone/>
-                      </a:pPr>
-                      <a:r>
-                        <a:rPr lang="en-US" sz="1600" dirty="0">
-                          <a:solidFill>
-                            <a:srgbClr val="15171C"/>
-                          </a:solidFill>
-                          <a:latin typeface="Calibri" pitchFamily="34" charset="0"/>
-                          <a:ea typeface="Calibri" pitchFamily="34" charset="-122"/>
-                          <a:cs typeface="Calibri" pitchFamily="34" charset="-120"/>
-                        </a:rPr>
-                        <a:t>F1, random starts</a:t>
-                      </a:r>
-                      <a:endParaRPr lang="en-US" sz="1600" dirty="0">
-                        <a:latin typeface="Calibri" charset="0"/>
-                        <a:ea typeface="Calibri" charset="0"/>
-                        <a:cs typeface="Calibri" charset="0"/>
-                      </a:endParaRPr>
-                    </a:p>
-                  </a:txBody>
-                  <a:tcPr marL="91440" marR="91440" marT="45720" marB="45720">
-                    <a:lnL w="6350" cap="flat" cmpd="sng" algn="ctr">
-                      <a:solidFill>
-                        <a:srgbClr val="E5E7EB"/>
-                      </a:solidFill>
-                      <a:prstDash val="solid"/>
-                      <a:round/>
-                      <a:headEnd type="none" w="med" len="med"/>
-                      <a:tailEnd type="none" w="med" len="med"/>
-                    </a:lnL>
-                    <a:lnR w="6350" cap="flat" cmpd="sng" algn="ctr">
-                      <a:solidFill>
-                        <a:srgbClr val="E5E7EB"/>
-                      </a:solidFill>
-                      <a:prstDash val="solid"/>
-                      <a:round/>
-                      <a:headEnd type="none" w="med" len="med"/>
-                      <a:tailEnd type="none" w="med" len="med"/>
-                    </a:lnR>
-                    <a:lnT w="6350" cap="flat" cmpd="sng" algn="ctr">
-                      <a:solidFill>
-                        <a:srgbClr val="E5E7EB"/>
-                      </a:solidFill>
-                      <a:prstDash val="solid"/>
-                      <a:round/>
-                      <a:headEnd type="none" w="med" len="med"/>
-                      <a:tailEnd type="none" w="med" len="med"/>
-                    </a:lnT>
-                    <a:lnB w="6350" cap="flat" cmpd="sng" algn="ctr">
-                      <a:solidFill>
-                        <a:srgbClr val="E5E7EB"/>
-                      </a:solidFill>
-                      <a:prstDash val="solid"/>
-                      <a:round/>
-                      <a:headEnd type="none" w="med" len="med"/>
-                      <a:tailEnd type="none" w="med" len="med"/>
-                    </a:lnB>
-                    <a:solidFill>
-                      <a:srgbClr val="FFFFFF"/>
-                    </a:solidFill>
-                  </a:tcPr>
-                </a:tc>
-                <a:tc>
-                  <a:txBody>
-                    <a:bodyPr/>
-                    <a:lstStyle/>
-                    <a:p>
-                      <a:pPr algn="ctr" indent="0" marL="0">
-                        <a:buNone/>
-                      </a:pPr>
-                      <a:r>
-                        <a:rPr lang="en-US" sz="1600" dirty="0">
-                          <a:solidFill>
-                            <a:srgbClr val="15171C"/>
-                          </a:solidFill>
-                          <a:latin typeface="Calibri" pitchFamily="34" charset="0"/>
-                          <a:ea typeface="Calibri" pitchFamily="34" charset="-122"/>
-                          <a:cs typeface="Calibri" pitchFamily="34" charset="-120"/>
-                        </a:rPr>
-                        <a:t>0.64</a:t>
-                      </a:r>
-                      <a:endParaRPr lang="en-US" sz="1600" dirty="0">
-                        <a:latin typeface="Calibri" charset="0"/>
-                        <a:ea typeface="Calibri" charset="0"/>
-                        <a:cs typeface="Calibri" charset="0"/>
-                      </a:endParaRPr>
-                    </a:p>
-                  </a:txBody>
-                  <a:tcPr marL="91440" marR="91440" marT="45720" marB="45720">
-                    <a:lnL w="6350" cap="flat" cmpd="sng" algn="ctr">
-                      <a:solidFill>
-                        <a:srgbClr val="E5E7EB"/>
-                      </a:solidFill>
-                      <a:prstDash val="solid"/>
-                      <a:round/>
-                      <a:headEnd type="none" w="med" len="med"/>
-                      <a:tailEnd type="none" w="med" len="med"/>
-                    </a:lnL>
-                    <a:lnR w="6350" cap="flat" cmpd="sng" algn="ctr">
-                      <a:solidFill>
-                        <a:srgbClr val="E5E7EB"/>
-                      </a:solidFill>
-                      <a:prstDash val="solid"/>
-                      <a:round/>
-                      <a:headEnd type="none" w="med" len="med"/>
-                      <a:tailEnd type="none" w="med" len="med"/>
-                    </a:lnR>
-                    <a:lnT w="6350" cap="flat" cmpd="sng" algn="ctr">
-                      <a:solidFill>
-                        <a:srgbClr val="E5E7EB"/>
-                      </a:solidFill>
-                      <a:prstDash val="solid"/>
-                      <a:round/>
-                      <a:headEnd type="none" w="med" len="med"/>
-                      <a:tailEnd type="none" w="med" len="med"/>
-                    </a:lnT>
-                    <a:lnB w="6350" cap="flat" cmpd="sng" algn="ctr">
-                      <a:solidFill>
-                        <a:srgbClr val="E5E7EB"/>
-                      </a:solidFill>
-                      <a:prstDash val="solid"/>
-                      <a:round/>
-                      <a:headEnd type="none" w="med" len="med"/>
-                      <a:tailEnd type="none" w="med" len="med"/>
-                    </a:lnB>
-                    <a:solidFill>
-                      <a:srgbClr val="FFFFFF"/>
-                    </a:solidFill>
-                  </a:tcPr>
-                </a:tc>
-                <a:tc>
-                  <a:txBody>
-                    <a:bodyPr/>
-                    <a:lstStyle/>
-                    <a:p>
-                      <a:pPr algn="ctr" indent="0" marL="0">
-                        <a:buNone/>
-                      </a:pPr>
-                      <a:r>
-                        <a:rPr lang="en-US" sz="1600" b="1" dirty="0">
-                          <a:solidFill>
-                            <a:srgbClr val="E8730C"/>
-                          </a:solidFill>
-                          <a:latin typeface="Calibri" pitchFamily="34" charset="0"/>
-                          <a:ea typeface="Calibri" pitchFamily="34" charset="-122"/>
-                          <a:cs typeface="Calibri" pitchFamily="34" charset="-120"/>
-                        </a:rPr>
-                        <a:t>0.78</a:t>
-                      </a:r>
-                      <a:endParaRPr lang="en-US" sz="1600" dirty="0">
-                        <a:latin typeface="Calibri" charset="0"/>
-                        <a:ea typeface="Calibri" charset="0"/>
-                        <a:cs typeface="Calibri" charset="0"/>
-                      </a:endParaRPr>
-                    </a:p>
-                  </a:txBody>
-                  <a:tcPr marL="91440" marR="91440" marT="45720" marB="45720">
-                    <a:lnL w="6350" cap="flat" cmpd="sng" algn="ctr">
-                      <a:solidFill>
-                        <a:srgbClr val="E5E7EB"/>
-                      </a:solidFill>
-                      <a:prstDash val="solid"/>
-                      <a:round/>
-                      <a:headEnd type="none" w="med" len="med"/>
-                      <a:tailEnd type="none" w="med" len="med"/>
-                    </a:lnL>
-                    <a:lnR w="6350" cap="flat" cmpd="sng" algn="ctr">
-                      <a:solidFill>
-                        <a:srgbClr val="E5E7EB"/>
-                      </a:solidFill>
-                      <a:prstDash val="solid"/>
-                      <a:round/>
-                      <a:headEnd type="none" w="med" len="med"/>
-                      <a:tailEnd type="none" w="med" len="med"/>
-                    </a:lnR>
-                    <a:lnT w="6350" cap="flat" cmpd="sng" algn="ctr">
-                      <a:solidFill>
-                        <a:srgbClr val="E5E7EB"/>
-                      </a:solidFill>
-                      <a:prstDash val="solid"/>
-                      <a:round/>
-                      <a:headEnd type="none" w="med" len="med"/>
-                      <a:tailEnd type="none" w="med" len="med"/>
-                    </a:lnT>
-                    <a:lnB w="6350" cap="flat" cmpd="sng" algn="ctr">
-                      <a:solidFill>
-                        <a:srgbClr val="E5E7EB"/>
-                      </a:solidFill>
-                      <a:prstDash val="solid"/>
-                      <a:round/>
-                      <a:headEnd type="none" w="med" len="med"/>
-                      <a:tailEnd type="none" w="med" len="med"/>
-                    </a:lnB>
-                    <a:solidFill>
-                      <a:srgbClr val="FFFFFF"/>
-                    </a:solidFill>
-                  </a:tcPr>
-                </a:tc>
-              </a:tr>
-              <a:tr h="457200">
-                <a:tc>
-                  <a:txBody>
-                    <a:bodyPr/>
-                    <a:lstStyle/>
-                    <a:p>
-                      <a:pPr algn="l" indent="0" marL="0">
-                        <a:buNone/>
-                      </a:pPr>
-                      <a:r>
-                        <a:rPr lang="en-US" sz="1600" dirty="0">
-                          <a:solidFill>
-                            <a:srgbClr val="15171C"/>
-                          </a:solidFill>
-                          <a:latin typeface="Calibri" pitchFamily="34" charset="0"/>
-                          <a:ea typeface="Calibri" pitchFamily="34" charset="-122"/>
-                          <a:cs typeface="Calibri" pitchFamily="34" charset="-120"/>
-                        </a:rPr>
-                        <a:t>Size cap</a:t>
-                      </a:r>
-                      <a:endParaRPr lang="en-US" sz="1600" dirty="0">
-                        <a:latin typeface="Calibri" charset="0"/>
-                        <a:ea typeface="Calibri" charset="0"/>
-                        <a:cs typeface="Calibri" charset="0"/>
-                      </a:endParaRPr>
-                    </a:p>
-                  </a:txBody>
-                  <a:tcPr marL="91440" marR="91440" marT="45720" marB="45720">
-                    <a:lnL w="6350" cap="flat" cmpd="sng" algn="ctr">
-                      <a:solidFill>
-                        <a:srgbClr val="E5E7EB"/>
-                      </a:solidFill>
-                      <a:prstDash val="solid"/>
-                      <a:round/>
-                      <a:headEnd type="none" w="med" len="med"/>
-                      <a:tailEnd type="none" w="med" len="med"/>
-                    </a:lnL>
-                    <a:lnR w="6350" cap="flat" cmpd="sng" algn="ctr">
-                      <a:solidFill>
-                        <a:srgbClr val="E5E7EB"/>
-                      </a:solidFill>
-                      <a:prstDash val="solid"/>
-                      <a:round/>
-                      <a:headEnd type="none" w="med" len="med"/>
-                      <a:tailEnd type="none" w="med" len="med"/>
-                    </a:lnR>
-                    <a:lnT w="6350" cap="flat" cmpd="sng" algn="ctr">
-                      <a:solidFill>
-                        <a:srgbClr val="E5E7EB"/>
-                      </a:solidFill>
-                      <a:prstDash val="solid"/>
-                      <a:round/>
-                      <a:headEnd type="none" w="med" len="med"/>
-                      <a:tailEnd type="none" w="med" len="med"/>
-                    </a:lnT>
-                    <a:lnB w="6350" cap="flat" cmpd="sng" algn="ctr">
-                      <a:solidFill>
-                        <a:srgbClr val="E5E7EB"/>
-                      </a:solidFill>
-                      <a:prstDash val="solid"/>
-                      <a:round/>
-                      <a:headEnd type="none" w="med" len="med"/>
-                      <a:tailEnd type="none" w="med" len="med"/>
-                    </a:lnB>
-                    <a:solidFill>
-                      <a:srgbClr val="FFFFFF"/>
-                    </a:solidFill>
-                  </a:tcPr>
-                </a:tc>
-                <a:tc>
-                  <a:txBody>
-                    <a:bodyPr/>
-                    <a:lstStyle/>
-                    <a:p>
-                      <a:pPr algn="l" indent="0" marL="0">
-                        <a:buNone/>
-                      </a:pPr>
-                      <a:r>
-                        <a:rPr lang="en-US" sz="1600" dirty="0">
-                          <a:solidFill>
-                            <a:srgbClr val="15171C"/>
-                          </a:solidFill>
-                          <a:latin typeface="Calibri" pitchFamily="34" charset="0"/>
-                          <a:ea typeface="Calibri" pitchFamily="34" charset="-122"/>
-                          <a:cs typeface="Calibri" pitchFamily="34" charset="-120"/>
-                        </a:rPr>
-                        <a:t>faint nuclei found, 31</a:t>
-                      </a:r>
-                      <a:endParaRPr lang="en-US" sz="1600" dirty="0">
-                        <a:latin typeface="Calibri" charset="0"/>
-                        <a:ea typeface="Calibri" charset="0"/>
-                        <a:cs typeface="Calibri" charset="0"/>
-                      </a:endParaRPr>
-                    </a:p>
-                  </a:txBody>
-                  <a:tcPr marL="91440" marR="91440" marT="45720" marB="45720">
-                    <a:lnL w="6350" cap="flat" cmpd="sng" algn="ctr">
-                      <a:solidFill>
-                        <a:srgbClr val="E5E7EB"/>
-                      </a:solidFill>
-                      <a:prstDash val="solid"/>
-                      <a:round/>
-                      <a:headEnd type="none" w="med" len="med"/>
-                      <a:tailEnd type="none" w="med" len="med"/>
-                    </a:lnL>
-                    <a:lnR w="6350" cap="flat" cmpd="sng" algn="ctr">
-                      <a:solidFill>
-                        <a:srgbClr val="E5E7EB"/>
-                      </a:solidFill>
-                      <a:prstDash val="solid"/>
-                      <a:round/>
-                      <a:headEnd type="none" w="med" len="med"/>
-                      <a:tailEnd type="none" w="med" len="med"/>
-                    </a:lnR>
-                    <a:lnT w="6350" cap="flat" cmpd="sng" algn="ctr">
-                      <a:solidFill>
-                        <a:srgbClr val="E5E7EB"/>
-                      </a:solidFill>
-                      <a:prstDash val="solid"/>
-                      <a:round/>
-                      <a:headEnd type="none" w="med" len="med"/>
-                      <a:tailEnd type="none" w="med" len="med"/>
-                    </a:lnT>
-                    <a:lnB w="6350" cap="flat" cmpd="sng" algn="ctr">
-                      <a:solidFill>
-                        <a:srgbClr val="E5E7EB"/>
-                      </a:solidFill>
-                      <a:prstDash val="solid"/>
-                      <a:round/>
-                      <a:headEnd type="none" w="med" len="med"/>
-                      <a:tailEnd type="none" w="med" len="med"/>
-                    </a:lnB>
-                    <a:solidFill>
-                      <a:srgbClr val="FFFFFF"/>
-                    </a:solidFill>
-                  </a:tcPr>
-                </a:tc>
-                <a:tc>
-                  <a:txBody>
-                    <a:bodyPr/>
-                    <a:lstStyle/>
-                    <a:p>
-                      <a:pPr algn="ctr" indent="0" marL="0">
-                        <a:buNone/>
-                      </a:pPr>
-                      <a:r>
-                        <a:rPr lang="en-US" sz="1600" dirty="0">
-                          <a:solidFill>
-                            <a:srgbClr val="15171C"/>
-                          </a:solidFill>
-                          <a:latin typeface="Calibri" pitchFamily="34" charset="0"/>
-                          <a:ea typeface="Calibri" pitchFamily="34" charset="-122"/>
-                          <a:cs typeface="Calibri" pitchFamily="34" charset="-120"/>
-                        </a:rPr>
-                        <a:t>13</a:t>
-                      </a:r>
-                      <a:endParaRPr lang="en-US" sz="1600" dirty="0">
-                        <a:latin typeface="Calibri" charset="0"/>
-                        <a:ea typeface="Calibri" charset="0"/>
-                        <a:cs typeface="Calibri" charset="0"/>
-                      </a:endParaRPr>
-                    </a:p>
-                  </a:txBody>
-                  <a:tcPr marL="91440" marR="91440" marT="45720" marB="45720">
-                    <a:lnL w="6350" cap="flat" cmpd="sng" algn="ctr">
-                      <a:solidFill>
-                        <a:srgbClr val="E5E7EB"/>
-                      </a:solidFill>
-                      <a:prstDash val="solid"/>
-                      <a:round/>
-                      <a:headEnd type="none" w="med" len="med"/>
-                      <a:tailEnd type="none" w="med" len="med"/>
-                    </a:lnL>
-                    <a:lnR w="6350" cap="flat" cmpd="sng" algn="ctr">
-                      <a:solidFill>
-                        <a:srgbClr val="E5E7EB"/>
-                      </a:solidFill>
-                      <a:prstDash val="solid"/>
-                      <a:round/>
-                      <a:headEnd type="none" w="med" len="med"/>
-                      <a:tailEnd type="none" w="med" len="med"/>
-                    </a:lnR>
-                    <a:lnT w="6350" cap="flat" cmpd="sng" algn="ctr">
-                      <a:solidFill>
-                        <a:srgbClr val="E5E7EB"/>
-                      </a:solidFill>
-                      <a:prstDash val="solid"/>
-                      <a:round/>
-                      <a:headEnd type="none" w="med" len="med"/>
-                      <a:tailEnd type="none" w="med" len="med"/>
-                    </a:lnT>
-                    <a:lnB w="6350" cap="flat" cmpd="sng" algn="ctr">
-                      <a:solidFill>
-                        <a:srgbClr val="E5E7EB"/>
-                      </a:solidFill>
-                      <a:prstDash val="solid"/>
-                      <a:round/>
-                      <a:headEnd type="none" w="med" len="med"/>
-                      <a:tailEnd type="none" w="med" len="med"/>
-                    </a:lnB>
-                    <a:solidFill>
-                      <a:srgbClr val="FFFFFF"/>
-                    </a:solidFill>
-                  </a:tcPr>
-                </a:tc>
-                <a:tc>
-                  <a:txBody>
-                    <a:bodyPr/>
-                    <a:lstStyle/>
-                    <a:p>
-                      <a:pPr algn="ctr" indent="0" marL="0">
-                        <a:buNone/>
-                      </a:pPr>
-                      <a:r>
-                        <a:rPr lang="en-US" sz="1600" b="1" dirty="0">
-                          <a:solidFill>
-                            <a:srgbClr val="E8730C"/>
-                          </a:solidFill>
-                          <a:latin typeface="Calibri" pitchFamily="34" charset="0"/>
-                          <a:ea typeface="Calibri" pitchFamily="34" charset="-122"/>
-                          <a:cs typeface="Calibri" pitchFamily="34" charset="-120"/>
-                        </a:rPr>
-                        <a:t>19</a:t>
-                      </a:r>
-                      <a:endParaRPr lang="en-US" sz="1600" dirty="0">
-                        <a:latin typeface="Calibri" charset="0"/>
-                        <a:ea typeface="Calibri" charset="0"/>
-                        <a:cs typeface="Calibri" charset="0"/>
-                      </a:endParaRPr>
-                    </a:p>
-                  </a:txBody>
-                  <a:tcPr marL="91440" marR="91440" marT="45720" marB="45720">
-                    <a:lnL w="6350" cap="flat" cmpd="sng" algn="ctr">
-                      <a:solidFill>
-                        <a:srgbClr val="E5E7EB"/>
-                      </a:solidFill>
-                      <a:prstDash val="solid"/>
-                      <a:round/>
-                      <a:headEnd type="none" w="med" len="med"/>
-                      <a:tailEnd type="none" w="med" len="med"/>
-                    </a:lnL>
-                    <a:lnR w="6350" cap="flat" cmpd="sng" algn="ctr">
-                      <a:solidFill>
-                        <a:srgbClr val="E5E7EB"/>
-                      </a:solidFill>
-                      <a:prstDash val="solid"/>
-                      <a:round/>
-                      <a:headEnd type="none" w="med" len="med"/>
-                      <a:tailEnd type="none" w="med" len="med"/>
-                    </a:lnR>
-                    <a:lnT w="6350" cap="flat" cmpd="sng" algn="ctr">
-                      <a:solidFill>
-                        <a:srgbClr val="E5E7EB"/>
-                      </a:solidFill>
-                      <a:prstDash val="solid"/>
-                      <a:round/>
-                      <a:headEnd type="none" w="med" len="med"/>
-                      <a:tailEnd type="none" w="med" len="med"/>
-                    </a:lnT>
-                    <a:lnB w="6350" cap="flat" cmpd="sng" algn="ctr">
-                      <a:solidFill>
-                        <a:srgbClr val="E5E7EB"/>
-                      </a:solidFill>
-                      <a:prstDash val="solid"/>
-                      <a:round/>
-                      <a:headEnd type="none" w="med" len="med"/>
-                      <a:tailEnd type="none" w="med" len="med"/>
-                    </a:lnB>
-                    <a:solidFill>
-                      <a:srgbClr val="FFFFFF"/>
-                    </a:solidFill>
-                  </a:tcPr>
-                </a:tc>
-              </a:tr>
-            </a:tbl>
+        <a:graphic xmlns:a="http://schemas.openxmlformats.org/drawingml/2006/main">
+          <a:graphicData uri="http://schemas.openxmlformats.org/drawingml/2006/chart">
+            <c:chart xmlns:c="http://schemas.openxmlformats.org/drawingml/2006/chart" r:id="rId1"/>
           </a:graphicData>
         </a:graphic>
       </p:graphicFrame>
       <p:sp>
         <p:nvSpPr>
-          <p:cNvPr id="4" name="Text 1"/>
+          <p:cNvPr id="4" name="step-card-0"/>
+          <p:cNvSpPr/>
+          <p:nvPr/>
+        </p:nvSpPr>
+        <p:spPr>
+          <a:xfrm>
+            <a:off x="5486400" y="1051560"/>
+            <a:ext cx="3200400" cy="1143000"/>
+          </a:xfrm>
+          <a:prstGeom prst="roundRect">
+            <a:avLst>
+              <a:gd name="adj" fmla="val 6400"/>
+            </a:avLst>
+          </a:prstGeom>
+          <a:solidFill>
+            <a:schemeClr val="bg2"/>
+          </a:solidFill>
+          <a:ln w="12700">
+            <a:solidFill>
+              <a:schemeClr val="bg2"/>
+            </a:solidFill>
+            <a:prstDash val="solid"/>
+          </a:ln>
+        </p:spPr>
+      </p:sp>
+      <p:sp>
+        <p:nvSpPr>
+          <p:cNvPr id="5" name="Text 2"/>
           <p:cNvSpPr txBox="1"/>
           <p:nvPr/>
         </p:nvSpPr>
         <p:spPr>
           <a:xfrm>
-            <a:off x="457200" y="3840480"/>
-            <a:ext cx="8229600" cy="457200"/>
+            <a:off x="5650992" y="1143000"/>
+            <a:ext cx="2871216" cy="228600"/>
           </a:xfrm>
           <a:prstGeom prst="rect">
             <a:avLst/>
@@ -5792,14 +5187,248 @@
               <a:buNone/>
             </a:pPr>
             <a:r>
-              <a:rPr lang="en-US" sz="1500" dirty="0">
-                <a:solidFill>
-                  <a:schemeClr val="tx2"/>
+              <a:rPr lang="en-US" sz="1200" b="1" dirty="0">
+                <a:solidFill>
+                  <a:schemeClr val="accent1"/>
                 </a:solidFill>
               </a:rPr>
-              <a:t>Each change measured on its own, against the step before; the numbers are not added together.</a:t>
-            </a:r>
-            <a:endParaRPr lang="en-US" sz="1500" dirty="0"/>
+              <a:t>WHAT WE CHANGED</a:t>
+            </a:r>
+            <a:endParaRPr lang="en-US" sz="1200" dirty="0"/>
+          </a:p>
+        </p:txBody>
+      </p:sp>
+      <p:sp>
+        <p:nvSpPr>
+          <p:cNvPr id="6" name="Text 3"/>
+          <p:cNvSpPr txBox="1"/>
+          <p:nvPr/>
+        </p:nvSpPr>
+        <p:spPr>
+          <a:xfrm>
+            <a:off x="5650992" y="1399032"/>
+            <a:ext cx="2871216" cy="722376"/>
+          </a:xfrm>
+          <a:prstGeom prst="rect">
+            <a:avLst/>
+          </a:prstGeom>
+          <a:noFill/>
+          <a:ln/>
+        </p:spPr>
+        <p:txBody>
+          <a:bodyPr wrap="square" lIns="0" tIns="0" rIns="0" bIns="0" rtlCol="0" anchor="t"/>
+          <a:lstStyle/>
+          <a:p>
+            <a:pPr indent="0" marL="0">
+              <a:buNone/>
+            </a:pPr>
+            <a:r>
+              <a:rPr lang="en-US" sz="1400" dirty="0">
+                <a:solidFill>
+                  <a:schemeClr val="tx1"/>
+                </a:solidFill>
+              </a:rPr>
+              <a:t>Raised the step size for blob positions up to 62×</a:t>
+            </a:r>
+            <a:endParaRPr lang="en-US" sz="1400" dirty="0"/>
+          </a:p>
+        </p:txBody>
+      </p:sp>
+      <p:sp>
+        <p:nvSpPr>
+          <p:cNvPr id="7" name="step-card-1"/>
+          <p:cNvSpPr/>
+          <p:nvPr/>
+        </p:nvSpPr>
+        <p:spPr>
+          <a:xfrm>
+            <a:off x="5486400" y="2258568"/>
+            <a:ext cx="3200400" cy="1143000"/>
+          </a:xfrm>
+          <a:prstGeom prst="roundRect">
+            <a:avLst>
+              <a:gd name="adj" fmla="val 6400"/>
+            </a:avLst>
+          </a:prstGeom>
+          <a:solidFill>
+            <a:schemeClr val="bg2"/>
+          </a:solidFill>
+          <a:ln w="12700">
+            <a:solidFill>
+              <a:schemeClr val="bg2"/>
+            </a:solidFill>
+            <a:prstDash val="solid"/>
+          </a:ln>
+        </p:spPr>
+      </p:sp>
+      <p:sp>
+        <p:nvSpPr>
+          <p:cNvPr id="8" name="Text 5"/>
+          <p:cNvSpPr txBox="1"/>
+          <p:nvPr/>
+        </p:nvSpPr>
+        <p:spPr>
+          <a:xfrm>
+            <a:off x="5650992" y="2350008"/>
+            <a:ext cx="2871216" cy="228600"/>
+          </a:xfrm>
+          <a:prstGeom prst="rect">
+            <a:avLst/>
+          </a:prstGeom>
+          <a:noFill/>
+          <a:ln/>
+        </p:spPr>
+        <p:txBody>
+          <a:bodyPr wrap="square" lIns="0" tIns="0" rIns="0" bIns="0" rtlCol="0" anchor="t"/>
+          <a:lstStyle/>
+          <a:p>
+            <a:pPr indent="0" marL="0">
+              <a:buNone/>
+            </a:pPr>
+            <a:r>
+              <a:rPr lang="en-US" sz="1200" b="1" dirty="0">
+                <a:solidFill>
+                  <a:schemeClr val="accent1"/>
+                </a:solidFill>
+              </a:rPr>
+              <a:t>WHY</a:t>
+            </a:r>
+            <a:endParaRPr lang="en-US" sz="1200" dirty="0"/>
+          </a:p>
+        </p:txBody>
+      </p:sp>
+      <p:sp>
+        <p:nvSpPr>
+          <p:cNvPr id="9" name="Text 6"/>
+          <p:cNvSpPr txBox="1"/>
+          <p:nvPr/>
+        </p:nvSpPr>
+        <p:spPr>
+          <a:xfrm>
+            <a:off x="5650992" y="2606040"/>
+            <a:ext cx="2871216" cy="722376"/>
+          </a:xfrm>
+          <a:prstGeom prst="rect">
+            <a:avLst/>
+          </a:prstGeom>
+          <a:noFill/>
+          <a:ln/>
+        </p:spPr>
+        <p:txBody>
+          <a:bodyPr wrap="square" lIns="0" tIns="0" rIns="0" bIns="0" rtlCol="0" anchor="t"/>
+          <a:lstStyle/>
+          <a:p>
+            <a:pPr indent="0" marL="0">
+              <a:buNone/>
+            </a:pPr>
+            <a:r>
+              <a:rPr lang="en-US" sz="1400" dirty="0">
+                <a:solidFill>
+                  <a:schemeClr val="tx1"/>
+                </a:solidFill>
+              </a:rPr>
+              <a:t>The default was copied from photo-scene code and never scaled to voxel units</a:t>
+            </a:r>
+            <a:endParaRPr lang="en-US" sz="1400" dirty="0"/>
+          </a:p>
+        </p:txBody>
+      </p:sp>
+      <p:sp>
+        <p:nvSpPr>
+          <p:cNvPr id="10" name="step-card-2"/>
+          <p:cNvSpPr/>
+          <p:nvPr/>
+        </p:nvSpPr>
+        <p:spPr>
+          <a:xfrm>
+            <a:off x="5486400" y="3465576"/>
+            <a:ext cx="3200400" cy="1143000"/>
+          </a:xfrm>
+          <a:prstGeom prst="roundRect">
+            <a:avLst>
+              <a:gd name="adj" fmla="val 6400"/>
+            </a:avLst>
+          </a:prstGeom>
+          <a:solidFill>
+            <a:schemeClr val="bg2"/>
+          </a:solidFill>
+          <a:ln w="12700">
+            <a:solidFill>
+              <a:schemeClr val="bg2"/>
+            </a:solidFill>
+            <a:prstDash val="solid"/>
+          </a:ln>
+        </p:spPr>
+      </p:sp>
+      <p:sp>
+        <p:nvSpPr>
+          <p:cNvPr id="11" name="Text 8"/>
+          <p:cNvSpPr txBox="1"/>
+          <p:nvPr/>
+        </p:nvSpPr>
+        <p:spPr>
+          <a:xfrm>
+            <a:off x="5650992" y="3557016"/>
+            <a:ext cx="2871216" cy="228600"/>
+          </a:xfrm>
+          <a:prstGeom prst="rect">
+            <a:avLst/>
+          </a:prstGeom>
+          <a:noFill/>
+          <a:ln/>
+        </p:spPr>
+        <p:txBody>
+          <a:bodyPr wrap="square" lIns="0" tIns="0" rIns="0" bIns="0" rtlCol="0" anchor="t"/>
+          <a:lstStyle/>
+          <a:p>
+            <a:pPr indent="0" marL="0">
+              <a:buNone/>
+            </a:pPr>
+            <a:r>
+              <a:rPr lang="en-US" sz="1200" b="1" dirty="0">
+                <a:solidFill>
+                  <a:schemeClr val="accent1"/>
+                </a:solidFill>
+              </a:rPr>
+              <a:t>RESULT</a:t>
+            </a:r>
+            <a:endParaRPr lang="en-US" sz="1200" dirty="0"/>
+          </a:p>
+        </p:txBody>
+      </p:sp>
+      <p:sp>
+        <p:nvSpPr>
+          <p:cNvPr id="12" name="Text 9"/>
+          <p:cNvSpPr txBox="1"/>
+          <p:nvPr/>
+        </p:nvSpPr>
+        <p:spPr>
+          <a:xfrm>
+            <a:off x="5650992" y="3813048"/>
+            <a:ext cx="2871216" cy="722376"/>
+          </a:xfrm>
+          <a:prstGeom prst="rect">
+            <a:avLst/>
+          </a:prstGeom>
+          <a:noFill/>
+          <a:ln/>
+        </p:spPr>
+        <p:txBody>
+          <a:bodyPr wrap="square" lIns="0" tIns="0" rIns="0" bIns="0" rtlCol="0" anchor="t"/>
+          <a:lstStyle/>
+          <a:p>
+            <a:pPr indent="0" marL="0">
+              <a:buNone/>
+            </a:pPr>
+            <a:r>
+              <a:rPr lang="en-US" sz="1400" dirty="0">
+                <a:solidFill>
+                  <a:schemeClr val="tx1"/>
+                </a:solidFill>
+              </a:rPr>
+              <a:t>Badly started fits catch up (F1 0.64 → 0.78), but good starts get worse (0.84 → 0.78)</a:t>
+            </a:r>
+            <a:endParaRPr lang="en-US" sz="1400" dirty="0"/>
           </a:p>
         </p:txBody>
       </p:sp>
@@ -5905,26 +5534,86 @@
                   <a:schemeClr val="tx1"/>
                 </a:solidFill>
               </a:rPr>
-              <a:t>Does the fit behave as expected?</a:t>
+              <a:t>Step 6 · Faint nuclei: cap the blob size</a:t>
             </a:r>
             <a:endParaRPr lang="en-US" sz="2800" dirty="0"/>
           </a:p>
         </p:txBody>
       </p:sp>
-      <p:sp>
-        <p:nvSpPr>
-          <p:cNvPr id="3" name="check-0"/>
+      <p:pic>
+        <p:nvPicPr>
+          <p:cNvPr id="3" name="size-cap" descr="D:\masters\MLCV seminar\TeamProject\presentation\figs\size_cap.png">    </p:cNvPr>
+          <p:cNvPicPr>
+            <a:picLocks noChangeAspect="1"/>
+          </p:cNvPicPr>
+          <p:nvPr/>
+        </p:nvPicPr>
+        <p:blipFill>
+          <a:blip r:embed="rId1"/>
+          <a:stretch>
+            <a:fillRect/>
+          </a:stretch>
+        </p:blipFill>
+        <p:spPr>
+          <a:xfrm>
+            <a:off x="457200" y="1097280"/>
+            <a:ext cx="4754880" cy="2377440"/>
+          </a:xfrm>
+          <a:prstGeom prst="rect">
+            <a:avLst/>
+          </a:prstGeom>
+        </p:spPr>
+      </p:pic>
+      <p:sp>
+        <p:nvSpPr>
+          <p:cNvPr id="4" name="Text 1"/>
+          <p:cNvSpPr txBox="1"/>
+          <p:nvPr/>
+        </p:nvSpPr>
+        <p:spPr>
+          <a:xfrm>
+            <a:off x="457200" y="3566160"/>
+            <a:ext cx="4754880" cy="274320"/>
+          </a:xfrm>
+          <a:prstGeom prst="rect">
+            <a:avLst/>
+          </a:prstGeom>
+          <a:noFill/>
+          <a:ln/>
+        </p:spPr>
+        <p:txBody>
+          <a:bodyPr wrap="square" lIns="0" tIns="0" rIns="0" bIns="0" rtlCol="0" anchor="t"/>
+          <a:lstStyle/>
+          <a:p>
+            <a:pPr indent="0" marL="0">
+              <a:buNone/>
+            </a:pPr>
+            <a:r>
+              <a:rPr lang="en-US" sz="1100" dirty="0">
+                <a:solidFill>
+                  <a:schemeClr val="accent5"/>
+                </a:solidFill>
+              </a:rPr>
+              <a:t>Green: nucleus found  ·  red: missed</a:t>
+            </a:r>
+            <a:endParaRPr lang="en-US" sz="1100" dirty="0"/>
+          </a:p>
+        </p:txBody>
+      </p:sp>
+      <p:sp>
+        <p:nvSpPr>
+          <p:cNvPr id="5" name="step-card-0"/>
           <p:cNvSpPr/>
           <p:nvPr/>
         </p:nvSpPr>
         <p:spPr>
           <a:xfrm>
-            <a:off x="457200" y="1143000"/>
-            <a:ext cx="2606040" cy="2377440"/>
+            <a:off x="5486400" y="1051560"/>
+            <a:ext cx="3200400" cy="1143000"/>
           </a:xfrm>
           <a:prstGeom prst="roundRect">
             <a:avLst>
-              <a:gd name="adj" fmla="val 3077"/>
+              <a:gd name="adj" fmla="val 6400"/>
             </a:avLst>
           </a:prstGeom>
           <a:solidFill>
@@ -5940,14 +5629,14 @@
       </p:sp>
       <p:sp>
         <p:nvSpPr>
-          <p:cNvPr id="4" name="Text 2"/>
+          <p:cNvPr id="6" name="Text 3"/>
           <p:cNvSpPr txBox="1"/>
           <p:nvPr/>
         </p:nvSpPr>
         <p:spPr>
           <a:xfrm>
-            <a:off x="640080" y="1325880"/>
-            <a:ext cx="2240280" cy="731520"/>
+            <a:off x="5650992" y="1143000"/>
+            <a:ext cx="2871216" cy="228600"/>
           </a:xfrm>
           <a:prstGeom prst="rect">
             <a:avLst/>
@@ -5963,30 +5652,27 @@
               <a:buNone/>
             </a:pPr>
             <a:r>
-              <a:rPr lang="en-US" sz="3200" b="1" dirty="0">
-                <a:solidFill>
-                  <a:schemeClr val="accent3"/>
-                </a:solidFill>
-                <a:latin typeface="Cambria" pitchFamily="34" charset="0"/>
-                <a:ea typeface="Cambria" pitchFamily="34" charset="-122"/>
-                <a:cs typeface="Cambria" pitchFamily="34" charset="-120"/>
+              <a:rPr lang="en-US" sz="1200" b="1" dirty="0">
+                <a:solidFill>
+                  <a:schemeClr val="accent1"/>
+                </a:solidFill>
               </a:rPr>
-              <a:t>0.79 vs 0.73</a:t>
-            </a:r>
-            <a:endParaRPr lang="en-US" sz="3200" dirty="0"/>
-          </a:p>
-        </p:txBody>
-      </p:sp>
-      <p:sp>
-        <p:nvSpPr>
-          <p:cNvPr id="5" name="Text 3"/>
+              <a:t>WHAT WE CHANGED</a:t>
+            </a:r>
+            <a:endParaRPr lang="en-US" sz="1200" dirty="0"/>
+          </a:p>
+        </p:txBody>
+      </p:sp>
+      <p:sp>
+        <p:nvSpPr>
+          <p:cNvPr id="7" name="Text 4"/>
           <p:cNvSpPr txBox="1"/>
           <p:nvPr/>
         </p:nvSpPr>
         <p:spPr>
           <a:xfrm>
-            <a:off x="640080" y="2148840"/>
-            <a:ext cx="2240280" cy="1234440"/>
+            <a:off x="5650992" y="1399032"/>
+            <a:ext cx="2871216" cy="722376"/>
           </a:xfrm>
           <a:prstGeom prst="rect">
             <a:avLst/>
@@ -6002,31 +5688,31 @@
               <a:buNone/>
             </a:pPr>
             <a:r>
-              <a:rPr lang="en-US" sz="1500" dirty="0">
-                <a:solidFill>
-                  <a:schemeClr val="tx2"/>
+              <a:rPr lang="en-US" sz="1400" dirty="0">
+                <a:solidFill>
+                  <a:schemeClr val="tx1"/>
                 </a:solidFill>
               </a:rPr>
-              <a:t>depth-to-width ratio: learned blobs vs measured nuclei</a:t>
-            </a:r>
-            <a:endParaRPr lang="en-US" sz="1500" dirty="0"/>
-          </a:p>
-        </p:txBody>
-      </p:sp>
-      <p:sp>
-        <p:nvSpPr>
-          <p:cNvPr id="6" name="check-1"/>
+              <a:t>Limited how wide a nucleus blob may grow (10 voxels)</a:t>
+            </a:r>
+            <a:endParaRPr lang="en-US" sz="1400" dirty="0"/>
+          </a:p>
+        </p:txBody>
+      </p:sp>
+      <p:sp>
+        <p:nvSpPr>
+          <p:cNvPr id="8" name="step-card-1"/>
           <p:cNvSpPr/>
           <p:nvPr/>
         </p:nvSpPr>
         <p:spPr>
           <a:xfrm>
-            <a:off x="3246120" y="1143000"/>
-            <a:ext cx="2606040" cy="2377440"/>
+            <a:off x="5486400" y="2258568"/>
+            <a:ext cx="3200400" cy="1143000"/>
           </a:xfrm>
           <a:prstGeom prst="roundRect">
             <a:avLst>
-              <a:gd name="adj" fmla="val 3077"/>
+              <a:gd name="adj" fmla="val 6400"/>
             </a:avLst>
           </a:prstGeom>
           <a:solidFill>
@@ -6042,14 +5728,14 @@
       </p:sp>
       <p:sp>
         <p:nvSpPr>
-          <p:cNvPr id="7" name="Text 5"/>
+          <p:cNvPr id="9" name="Text 6"/>
           <p:cNvSpPr txBox="1"/>
           <p:nvPr/>
         </p:nvSpPr>
         <p:spPr>
           <a:xfrm>
-            <a:off x="3429000" y="1325880"/>
-            <a:ext cx="2240280" cy="731520"/>
+            <a:off x="5650992" y="2350008"/>
+            <a:ext cx="2871216" cy="228600"/>
           </a:xfrm>
           <a:prstGeom prst="rect">
             <a:avLst/>
@@ -6065,30 +5751,27 @@
               <a:buNone/>
             </a:pPr>
             <a:r>
-              <a:rPr lang="en-US" sz="3200" b="1" dirty="0">
-                <a:solidFill>
-                  <a:schemeClr val="accent3"/>
-                </a:solidFill>
-                <a:latin typeface="Cambria" pitchFamily="34" charset="0"/>
-                <a:ea typeface="Cambria" pitchFamily="34" charset="-122"/>
-                <a:cs typeface="Cambria" pitchFamily="34" charset="-120"/>
+              <a:rPr lang="en-US" sz="1200" b="1" dirty="0">
+                <a:solidFill>
+                  <a:schemeClr val="accent1"/>
+                </a:solidFill>
               </a:rPr>
-              <a:t>14 vs 10</a:t>
-            </a:r>
-            <a:endParaRPr lang="en-US" sz="3200" dirty="0"/>
-          </a:p>
-        </p:txBody>
-      </p:sp>
-      <p:sp>
-        <p:nvSpPr>
-          <p:cNvPr id="8" name="Text 6"/>
+              <a:t>WHY</a:t>
+            </a:r>
+            <a:endParaRPr lang="en-US" sz="1200" dirty="0"/>
+          </a:p>
+        </p:txBody>
+      </p:sp>
+      <p:sp>
+        <p:nvSpPr>
+          <p:cNvPr id="10" name="Text 7"/>
           <p:cNvSpPr txBox="1"/>
           <p:nvPr/>
         </p:nvSpPr>
         <p:spPr>
           <a:xfrm>
-            <a:off x="3429000" y="2148840"/>
-            <a:ext cx="2240280" cy="1234440"/>
+            <a:off x="5650992" y="2606040"/>
+            <a:ext cx="2871216" cy="722376"/>
           </a:xfrm>
           <a:prstGeom prst="rect">
             <a:avLst/>
@@ -6104,31 +5787,31 @@
               <a:buNone/>
             </a:pPr>
             <a:r>
-              <a:rPr lang="en-US" sz="1500" dirty="0">
-                <a:solidFill>
-                  <a:schemeClr val="tx2"/>
+              <a:rPr lang="en-US" sz="1400" dirty="0">
+                <a:solidFill>
+                  <a:schemeClr val="tx1"/>
                 </a:solidFill>
               </a:rPr>
-              <a:t>hand-marked Drosophila nuclei in the top 100 detections: fitted blobs vs raw image</a:t>
-            </a:r>
-            <a:endParaRPr lang="en-US" sz="1500" dirty="0"/>
-          </a:p>
-        </p:txBody>
-      </p:sp>
-      <p:sp>
-        <p:nvSpPr>
-          <p:cNvPr id="9" name="check-2"/>
+              <a:t>Lost faint nuclei had blobs ~30% wider, spread out until no peak was left</a:t>
+            </a:r>
+            <a:endParaRPr lang="en-US" sz="1400" dirty="0"/>
+          </a:p>
+        </p:txBody>
+      </p:sp>
+      <p:sp>
+        <p:nvSpPr>
+          <p:cNvPr id="11" name="step-card-2"/>
           <p:cNvSpPr/>
           <p:nvPr/>
         </p:nvSpPr>
         <p:spPr>
           <a:xfrm>
-            <a:off x="6035040" y="1143000"/>
-            <a:ext cx="2606040" cy="2377440"/>
+            <a:off x="5486400" y="3465576"/>
+            <a:ext cx="3200400" cy="1143000"/>
           </a:xfrm>
           <a:prstGeom prst="roundRect">
             <a:avLst>
-              <a:gd name="adj" fmla="val 3077"/>
+              <a:gd name="adj" fmla="val 6400"/>
             </a:avLst>
           </a:prstGeom>
           <a:solidFill>
@@ -6144,14 +5827,14 @@
       </p:sp>
       <p:sp>
         <p:nvSpPr>
-          <p:cNvPr id="10" name="Text 8"/>
+          <p:cNvPr id="12" name="Text 9"/>
           <p:cNvSpPr txBox="1"/>
           <p:nvPr/>
         </p:nvSpPr>
         <p:spPr>
           <a:xfrm>
-            <a:off x="6217920" y="1325880"/>
-            <a:ext cx="2240280" cy="731520"/>
+            <a:off x="5650992" y="3557016"/>
+            <a:ext cx="2871216" cy="228600"/>
           </a:xfrm>
           <a:prstGeom prst="rect">
             <a:avLst/>
@@ -6167,30 +5850,27 @@
               <a:buNone/>
             </a:pPr>
             <a:r>
-              <a:rPr lang="en-US" sz="3200" b="1" dirty="0">
-                <a:solidFill>
-                  <a:schemeClr val="accent3"/>
-                </a:solidFill>
-                <a:latin typeface="Cambria" pitchFamily="34" charset="0"/>
-                <a:ea typeface="Cambria" pitchFamily="34" charset="-122"/>
-                <a:cs typeface="Cambria" pitchFamily="34" charset="-120"/>
+              <a:rPr lang="en-US" sz="1200" b="1" dirty="0">
+                <a:solidFill>
+                  <a:schemeClr val="accent1"/>
+                </a:solidFill>
               </a:rPr>
-              <a:t>≤ 4%</a:t>
-            </a:r>
-            <a:endParaRPr lang="en-US" sz="3200" dirty="0"/>
-          </a:p>
-        </p:txBody>
-      </p:sp>
-      <p:sp>
-        <p:nvSpPr>
-          <p:cNvPr id="11" name="Text 9"/>
+              <a:t>RESULT</a:t>
+            </a:r>
+            <a:endParaRPr lang="en-US" sz="1200" dirty="0"/>
+          </a:p>
+        </p:txBody>
+      </p:sp>
+      <p:sp>
+        <p:nvSpPr>
+          <p:cNvPr id="13" name="Text 10"/>
           <p:cNvSpPr txBox="1"/>
           <p:nvPr/>
         </p:nvSpPr>
         <p:spPr>
           <a:xfrm>
-            <a:off x="6217920" y="2148840"/>
-            <a:ext cx="2240280" cy="1234440"/>
+            <a:off x="5650992" y="3813048"/>
+            <a:ext cx="2871216" cy="722376"/>
           </a:xfrm>
           <a:prstGeom prst="rect">
             <a:avLst/>
@@ -6206,50 +5886,14 @@
               <a:buNone/>
             </a:pPr>
             <a:r>
-              <a:rPr lang="en-US" sz="1500" dirty="0">
-                <a:solidFill>
-                  <a:schemeClr val="tx2"/>
+              <a:rPr lang="en-US" sz="1400" dirty="0">
+                <a:solidFill>
+                  <a:schemeClr val="tx1"/>
                 </a:solidFill>
               </a:rPr>
-              <a:t>difference in nuclei found between three repeated fits</a:t>
-            </a:r>
-            <a:endParaRPr lang="en-US" sz="1500" dirty="0"/>
-          </a:p>
-        </p:txBody>
-      </p:sp>
-      <p:sp>
-        <p:nvSpPr>
-          <p:cNvPr id="12" name="Text 10"/>
-          <p:cNvSpPr txBox="1"/>
-          <p:nvPr/>
-        </p:nvSpPr>
-        <p:spPr>
-          <a:xfrm>
-            <a:off x="457200" y="3840480"/>
-            <a:ext cx="8229600" cy="548640"/>
-          </a:xfrm>
-          <a:prstGeom prst="rect">
-            <a:avLst/>
-          </a:prstGeom>
-          <a:noFill/>
-          <a:ln/>
-        </p:spPr>
-        <p:txBody>
-          <a:bodyPr wrap="square" lIns="0" tIns="0" rIns="0" bIns="0" rtlCol="0" anchor="t"/>
-          <a:lstStyle/>
-          <a:p>
-            <a:pPr indent="0" marL="0">
-              <a:buNone/>
-            </a:pPr>
-            <a:r>
-              <a:rPr lang="en-US" sz="1500" dirty="0">
-                <a:solidFill>
-                  <a:schemeClr val="tx2"/>
-                </a:solidFill>
-              </a:rPr>
-              <a:t>Limit: with all 457 of its candidates the raw-image detector finds 26 of 29, more than any fit.</a:t>
-            </a:r>
-            <a:endParaRPr lang="en-US" sz="1500" dirty="0"/>
+              <a:t>Faint nuclei found: 13 → 19 of 31. Image quality unchanged; 1 of 4 regions worse</a:t>
+            </a:r>
+            <a:endParaRPr lang="en-US" sz="1400" dirty="0"/>
           </a:p>
         </p:txBody>
       </p:sp>
@@ -6355,370 +5999,2449 @@
                   <a:schemeClr val="tx1"/>
                 </a:solidFill>
               </a:rPr>
-              <a:t>Against the state of the art, at the same file size</a:t>
+              <a:t>From the simple setup to the final recipe</a:t>
             </a:r>
             <a:endParaRPr lang="en-US" sz="2800" dirty="0"/>
           </a:p>
         </p:txBody>
       </p:sp>
-      <p:sp>
-        <p:nvSpPr>
-          <p:cNvPr id="3" name="Text 1"/>
+      <p:graphicFrame>
+        <p:nvGraphicFramePr>
+          <p:cNvPr id="13" name="Table 0"/>
+          <p:cNvGraphicFramePr>
+            <a:graphicFrameLocks noGrp="1"/>
+          </p:cNvGraphicFramePr>
+          <p:nvPr>
+            <p:extLst>
+              <p:ext uri="{D42A27DB-BD31-4B8C-83A1-F6EECF244321}">
+                <p14:modId xmlns:p14="http://schemas.microsoft.com/office/powerpoint/2010/main" val="1579011935"/>
+              </p:ext>
+            </p:extLst>
+          </p:nvPr>
+        </p:nvGraphicFramePr>
+        <p:xfrm>
+          <a:off x="457200" y="1051560"/>
+          <a:ext cx="8229600" cy="914400"/>
+        </p:xfrm>
+        <a:graphic>
+          <a:graphicData uri="http://schemas.openxmlformats.org/drawingml/2006/table">
+            <a:tbl>
+              <a:tblPr/>
+              <a:tblGrid>
+                <a:gridCol w="2514600"/>
+                <a:gridCol w="685800"/>
+                <a:gridCol w="2377440"/>
+                <a:gridCol w="1325880"/>
+                <a:gridCol w="1325880"/>
+              </a:tblGrid>
+              <a:tr h="393192">
+                <a:tc>
+                  <a:txBody>
+                    <a:bodyPr/>
+                    <a:lstStyle/>
+                    <a:p>
+                      <a:pPr indent="0" marL="0">
+                        <a:buNone/>
+                      </a:pPr>
+                      <a:r>
+                        <a:rPr lang="en-US" sz="1500" b="1" dirty="0">
+                          <a:solidFill>
+                            <a:srgbClr val="FFFFFF"/>
+                          </a:solidFill>
+                          <a:latin typeface="Calibri" pitchFamily="34" charset="0"/>
+                          <a:ea typeface="Calibri" pitchFamily="34" charset="-122"/>
+                          <a:cs typeface="Calibri" pitchFamily="34" charset="-120"/>
+                        </a:rPr>
+                        <a:t>Change</a:t>
+                      </a:r>
+                      <a:endParaRPr lang="en-US" sz="1500" dirty="0">
+                        <a:latin typeface="Calibri" charset="0"/>
+                        <a:ea typeface="Calibri" charset="0"/>
+                        <a:cs typeface="Calibri" charset="0"/>
+                      </a:endParaRPr>
+                    </a:p>
+                  </a:txBody>
+                  <a:tcPr marL="91440" marR="91440" marT="45720" marB="45720">
+                    <a:lnL w="6350" cap="flat" cmpd="sng" algn="ctr">
+                      <a:solidFill>
+                        <a:srgbClr val="E5E7EB"/>
+                      </a:solidFill>
+                      <a:prstDash val="solid"/>
+                      <a:round/>
+                      <a:headEnd type="none" w="med" len="med"/>
+                      <a:tailEnd type="none" w="med" len="med"/>
+                    </a:lnL>
+                    <a:lnR w="6350" cap="flat" cmpd="sng" algn="ctr">
+                      <a:solidFill>
+                        <a:srgbClr val="E5E7EB"/>
+                      </a:solidFill>
+                      <a:prstDash val="solid"/>
+                      <a:round/>
+                      <a:headEnd type="none" w="med" len="med"/>
+                      <a:tailEnd type="none" w="med" len="med"/>
+                    </a:lnR>
+                    <a:lnT w="6350" cap="flat" cmpd="sng" algn="ctr">
+                      <a:solidFill>
+                        <a:srgbClr val="E5E7EB"/>
+                      </a:solidFill>
+                      <a:prstDash val="solid"/>
+                      <a:round/>
+                      <a:headEnd type="none" w="med" len="med"/>
+                      <a:tailEnd type="none" w="med" len="med"/>
+                    </a:lnT>
+                    <a:lnB w="6350" cap="flat" cmpd="sng" algn="ctr">
+                      <a:solidFill>
+                        <a:srgbClr val="E5E7EB"/>
+                      </a:solidFill>
+                      <a:prstDash val="solid"/>
+                      <a:round/>
+                      <a:headEnd type="none" w="med" len="med"/>
+                      <a:tailEnd type="none" w="med" len="med"/>
+                    </a:lnB>
+                    <a:solidFill>
+                      <a:srgbClr val="3A3F4B"/>
+                    </a:solidFill>
+                  </a:tcPr>
+                </a:tc>
+                <a:tc>
+                  <a:txBody>
+                    <a:bodyPr/>
+                    <a:lstStyle/>
+                    <a:p>
+                      <a:pPr indent="0" marL="0">
+                        <a:buNone/>
+                      </a:pPr>
+                      <a:r>
+                        <a:rPr lang="en-US" sz="1500" b="1" dirty="0">
+                          <a:solidFill>
+                            <a:srgbClr val="FFFFFF"/>
+                          </a:solidFill>
+                          <a:latin typeface="Calibri" pitchFamily="34" charset="0"/>
+                          <a:ea typeface="Calibri" pitchFamily="34" charset="-122"/>
+                          <a:cs typeface="Calibri" pitchFamily="34" charset="-120"/>
+                        </a:rPr>
+                        <a:t>By</a:t>
+                      </a:r>
+                      <a:endParaRPr lang="en-US" sz="1500" dirty="0">
+                        <a:latin typeface="Calibri" charset="0"/>
+                        <a:ea typeface="Calibri" charset="0"/>
+                        <a:cs typeface="Calibri" charset="0"/>
+                      </a:endParaRPr>
+                    </a:p>
+                  </a:txBody>
+                  <a:tcPr marL="91440" marR="91440" marT="45720" marB="45720">
+                    <a:lnL w="6350" cap="flat" cmpd="sng" algn="ctr">
+                      <a:solidFill>
+                        <a:srgbClr val="E5E7EB"/>
+                      </a:solidFill>
+                      <a:prstDash val="solid"/>
+                      <a:round/>
+                      <a:headEnd type="none" w="med" len="med"/>
+                      <a:tailEnd type="none" w="med" len="med"/>
+                    </a:lnL>
+                    <a:lnR w="6350" cap="flat" cmpd="sng" algn="ctr">
+                      <a:solidFill>
+                        <a:srgbClr val="E5E7EB"/>
+                      </a:solidFill>
+                      <a:prstDash val="solid"/>
+                      <a:round/>
+                      <a:headEnd type="none" w="med" len="med"/>
+                      <a:tailEnd type="none" w="med" len="med"/>
+                    </a:lnR>
+                    <a:lnT w="6350" cap="flat" cmpd="sng" algn="ctr">
+                      <a:solidFill>
+                        <a:srgbClr val="E5E7EB"/>
+                      </a:solidFill>
+                      <a:prstDash val="solid"/>
+                      <a:round/>
+                      <a:headEnd type="none" w="med" len="med"/>
+                      <a:tailEnd type="none" w="med" len="med"/>
+                    </a:lnT>
+                    <a:lnB w="6350" cap="flat" cmpd="sng" algn="ctr">
+                      <a:solidFill>
+                        <a:srgbClr val="E5E7EB"/>
+                      </a:solidFill>
+                      <a:prstDash val="solid"/>
+                      <a:round/>
+                      <a:headEnd type="none" w="med" len="med"/>
+                      <a:tailEnd type="none" w="med" len="med"/>
+                    </a:lnB>
+                    <a:solidFill>
+                      <a:srgbClr val="3A3F4B"/>
+                    </a:solidFill>
+                  </a:tcPr>
+                </a:tc>
+                <a:tc>
+                  <a:txBody>
+                    <a:bodyPr/>
+                    <a:lstStyle/>
+                    <a:p>
+                      <a:pPr indent="0" marL="0">
+                        <a:buNone/>
+                      </a:pPr>
+                      <a:r>
+                        <a:rPr lang="en-US" sz="1500" b="1" dirty="0">
+                          <a:solidFill>
+                            <a:srgbClr val="FFFFFF"/>
+                          </a:solidFill>
+                          <a:latin typeface="Calibri" pitchFamily="34" charset="0"/>
+                          <a:ea typeface="Calibri" pitchFamily="34" charset="-122"/>
+                          <a:cs typeface="Calibri" pitchFamily="34" charset="-120"/>
+                        </a:rPr>
+                        <a:t>Measured on</a:t>
+                      </a:r>
+                      <a:endParaRPr lang="en-US" sz="1500" dirty="0">
+                        <a:latin typeface="Calibri" charset="0"/>
+                        <a:ea typeface="Calibri" charset="0"/>
+                        <a:cs typeface="Calibri" charset="0"/>
+                      </a:endParaRPr>
+                    </a:p>
+                  </a:txBody>
+                  <a:tcPr marL="91440" marR="91440" marT="45720" marB="45720">
+                    <a:lnL w="6350" cap="flat" cmpd="sng" algn="ctr">
+                      <a:solidFill>
+                        <a:srgbClr val="E5E7EB"/>
+                      </a:solidFill>
+                      <a:prstDash val="solid"/>
+                      <a:round/>
+                      <a:headEnd type="none" w="med" len="med"/>
+                      <a:tailEnd type="none" w="med" len="med"/>
+                    </a:lnL>
+                    <a:lnR w="6350" cap="flat" cmpd="sng" algn="ctr">
+                      <a:solidFill>
+                        <a:srgbClr val="E5E7EB"/>
+                      </a:solidFill>
+                      <a:prstDash val="solid"/>
+                      <a:round/>
+                      <a:headEnd type="none" w="med" len="med"/>
+                      <a:tailEnd type="none" w="med" len="med"/>
+                    </a:lnR>
+                    <a:lnT w="6350" cap="flat" cmpd="sng" algn="ctr">
+                      <a:solidFill>
+                        <a:srgbClr val="E5E7EB"/>
+                      </a:solidFill>
+                      <a:prstDash val="solid"/>
+                      <a:round/>
+                      <a:headEnd type="none" w="med" len="med"/>
+                      <a:tailEnd type="none" w="med" len="med"/>
+                    </a:lnT>
+                    <a:lnB w="6350" cap="flat" cmpd="sng" algn="ctr">
+                      <a:solidFill>
+                        <a:srgbClr val="E5E7EB"/>
+                      </a:solidFill>
+                      <a:prstDash val="solid"/>
+                      <a:round/>
+                      <a:headEnd type="none" w="med" len="med"/>
+                      <a:tailEnd type="none" w="med" len="med"/>
+                    </a:lnB>
+                    <a:solidFill>
+                      <a:srgbClr val="3A3F4B"/>
+                    </a:solidFill>
+                  </a:tcPr>
+                </a:tc>
+                <a:tc>
+                  <a:txBody>
+                    <a:bodyPr/>
+                    <a:lstStyle/>
+                    <a:p>
+                      <a:pPr indent="0" marL="0">
+                        <a:buNone/>
+                      </a:pPr>
+                      <a:r>
+                        <a:rPr lang="en-US" sz="1500" b="1" dirty="0">
+                          <a:solidFill>
+                            <a:srgbClr val="FFFFFF"/>
+                          </a:solidFill>
+                          <a:latin typeface="Calibri" pitchFamily="34" charset="0"/>
+                          <a:ea typeface="Calibri" pitchFamily="34" charset="-122"/>
+                          <a:cs typeface="Calibri" pitchFamily="34" charset="-120"/>
+                        </a:rPr>
+                        <a:t>Before</a:t>
+                      </a:r>
+                      <a:endParaRPr lang="en-US" sz="1500" dirty="0">
+                        <a:latin typeface="Calibri" charset="0"/>
+                        <a:ea typeface="Calibri" charset="0"/>
+                        <a:cs typeface="Calibri" charset="0"/>
+                      </a:endParaRPr>
+                    </a:p>
+                  </a:txBody>
+                  <a:tcPr marL="91440" marR="91440" marT="45720" marB="45720">
+                    <a:lnL w="6350" cap="flat" cmpd="sng" algn="ctr">
+                      <a:solidFill>
+                        <a:srgbClr val="E5E7EB"/>
+                      </a:solidFill>
+                      <a:prstDash val="solid"/>
+                      <a:round/>
+                      <a:headEnd type="none" w="med" len="med"/>
+                      <a:tailEnd type="none" w="med" len="med"/>
+                    </a:lnL>
+                    <a:lnR w="6350" cap="flat" cmpd="sng" algn="ctr">
+                      <a:solidFill>
+                        <a:srgbClr val="E5E7EB"/>
+                      </a:solidFill>
+                      <a:prstDash val="solid"/>
+                      <a:round/>
+                      <a:headEnd type="none" w="med" len="med"/>
+                      <a:tailEnd type="none" w="med" len="med"/>
+                    </a:lnR>
+                    <a:lnT w="6350" cap="flat" cmpd="sng" algn="ctr">
+                      <a:solidFill>
+                        <a:srgbClr val="E5E7EB"/>
+                      </a:solidFill>
+                      <a:prstDash val="solid"/>
+                      <a:round/>
+                      <a:headEnd type="none" w="med" len="med"/>
+                      <a:tailEnd type="none" w="med" len="med"/>
+                    </a:lnT>
+                    <a:lnB w="6350" cap="flat" cmpd="sng" algn="ctr">
+                      <a:solidFill>
+                        <a:srgbClr val="E5E7EB"/>
+                      </a:solidFill>
+                      <a:prstDash val="solid"/>
+                      <a:round/>
+                      <a:headEnd type="none" w="med" len="med"/>
+                      <a:tailEnd type="none" w="med" len="med"/>
+                    </a:lnB>
+                    <a:solidFill>
+                      <a:srgbClr val="3A3F4B"/>
+                    </a:solidFill>
+                  </a:tcPr>
+                </a:tc>
+                <a:tc>
+                  <a:txBody>
+                    <a:bodyPr/>
+                    <a:lstStyle/>
+                    <a:p>
+                      <a:pPr indent="0" marL="0">
+                        <a:buNone/>
+                      </a:pPr>
+                      <a:r>
+                        <a:rPr lang="en-US" sz="1500" b="1" dirty="0">
+                          <a:solidFill>
+                            <a:srgbClr val="FFFFFF"/>
+                          </a:solidFill>
+                          <a:latin typeface="Calibri" pitchFamily="34" charset="0"/>
+                          <a:ea typeface="Calibri" pitchFamily="34" charset="-122"/>
+                          <a:cs typeface="Calibri" pitchFamily="34" charset="-120"/>
+                        </a:rPr>
+                        <a:t>After</a:t>
+                      </a:r>
+                      <a:endParaRPr lang="en-US" sz="1500" dirty="0">
+                        <a:latin typeface="Calibri" charset="0"/>
+                        <a:ea typeface="Calibri" charset="0"/>
+                        <a:cs typeface="Calibri" charset="0"/>
+                      </a:endParaRPr>
+                    </a:p>
+                  </a:txBody>
+                  <a:tcPr marL="91440" marR="91440" marT="45720" marB="45720">
+                    <a:lnL w="6350" cap="flat" cmpd="sng" algn="ctr">
+                      <a:solidFill>
+                        <a:srgbClr val="E5E7EB"/>
+                      </a:solidFill>
+                      <a:prstDash val="solid"/>
+                      <a:round/>
+                      <a:headEnd type="none" w="med" len="med"/>
+                      <a:tailEnd type="none" w="med" len="med"/>
+                    </a:lnL>
+                    <a:lnR w="6350" cap="flat" cmpd="sng" algn="ctr">
+                      <a:solidFill>
+                        <a:srgbClr val="E5E7EB"/>
+                      </a:solidFill>
+                      <a:prstDash val="solid"/>
+                      <a:round/>
+                      <a:headEnd type="none" w="med" len="med"/>
+                      <a:tailEnd type="none" w="med" len="med"/>
+                    </a:lnR>
+                    <a:lnT w="6350" cap="flat" cmpd="sng" algn="ctr">
+                      <a:solidFill>
+                        <a:srgbClr val="E5E7EB"/>
+                      </a:solidFill>
+                      <a:prstDash val="solid"/>
+                      <a:round/>
+                      <a:headEnd type="none" w="med" len="med"/>
+                      <a:tailEnd type="none" w="med" len="med"/>
+                    </a:lnT>
+                    <a:lnB w="6350" cap="flat" cmpd="sng" algn="ctr">
+                      <a:solidFill>
+                        <a:srgbClr val="E5E7EB"/>
+                      </a:solidFill>
+                      <a:prstDash val="solid"/>
+                      <a:round/>
+                      <a:headEnd type="none" w="med" len="med"/>
+                      <a:tailEnd type="none" w="med" len="med"/>
+                    </a:lnB>
+                    <a:solidFill>
+                      <a:srgbClr val="3A3F4B"/>
+                    </a:solidFill>
+                  </a:tcPr>
+                </a:tc>
+              </a:tr>
+              <a:tr h="393192">
+                <a:tc>
+                  <a:txBody>
+                    <a:bodyPr/>
+                    <a:lstStyle/>
+                    <a:p>
+                      <a:pPr algn="l" indent="0" marL="0">
+                        <a:buNone/>
+                      </a:pPr>
+                      <a:r>
+                        <a:rPr lang="en-US" sz="1500" dirty="0">
+                          <a:solidFill>
+                            <a:srgbClr val="15171C"/>
+                          </a:solidFill>
+                          <a:latin typeface="Calibri" pitchFamily="34" charset="0"/>
+                          <a:ea typeface="Calibri" pitchFamily="34" charset="-122"/>
+                          <a:cs typeface="Calibri" pitchFamily="34" charset="-120"/>
+                        </a:rPr>
+                        <a:t>Start on bright peaks</a:t>
+                      </a:r>
+                      <a:endParaRPr lang="en-US" sz="1500" dirty="0">
+                        <a:latin typeface="Calibri" charset="0"/>
+                        <a:ea typeface="Calibri" charset="0"/>
+                        <a:cs typeface="Calibri" charset="0"/>
+                      </a:endParaRPr>
+                    </a:p>
+                  </a:txBody>
+                  <a:tcPr marL="91440" marR="91440" marT="45720" marB="45720">
+                    <a:lnL w="6350" cap="flat" cmpd="sng" algn="ctr">
+                      <a:solidFill>
+                        <a:srgbClr val="E5E7EB"/>
+                      </a:solidFill>
+                      <a:prstDash val="solid"/>
+                      <a:round/>
+                      <a:headEnd type="none" w="med" len="med"/>
+                      <a:tailEnd type="none" w="med" len="med"/>
+                    </a:lnL>
+                    <a:lnR w="6350" cap="flat" cmpd="sng" algn="ctr">
+                      <a:solidFill>
+                        <a:srgbClr val="E5E7EB"/>
+                      </a:solidFill>
+                      <a:prstDash val="solid"/>
+                      <a:round/>
+                      <a:headEnd type="none" w="med" len="med"/>
+                      <a:tailEnd type="none" w="med" len="med"/>
+                    </a:lnR>
+                    <a:lnT w="6350" cap="flat" cmpd="sng" algn="ctr">
+                      <a:solidFill>
+                        <a:srgbClr val="E5E7EB"/>
+                      </a:solidFill>
+                      <a:prstDash val="solid"/>
+                      <a:round/>
+                      <a:headEnd type="none" w="med" len="med"/>
+                      <a:tailEnd type="none" w="med" len="med"/>
+                    </a:lnT>
+                    <a:lnB w="6350" cap="flat" cmpd="sng" algn="ctr">
+                      <a:solidFill>
+                        <a:srgbClr val="E5E7EB"/>
+                      </a:solidFill>
+                      <a:prstDash val="solid"/>
+                      <a:round/>
+                      <a:headEnd type="none" w="med" len="med"/>
+                      <a:tailEnd type="none" w="med" len="med"/>
+                    </a:lnB>
+                    <a:solidFill>
+                      <a:srgbClr val="FFFFFF"/>
+                    </a:solidFill>
+                  </a:tcPr>
+                </a:tc>
+                <a:tc>
+                  <a:txBody>
+                    <a:bodyPr/>
+                    <a:lstStyle/>
+                    <a:p>
+                      <a:pPr algn="l" indent="0" marL="0">
+                        <a:buNone/>
+                      </a:pPr>
+                      <a:r>
+                        <a:rPr lang="en-US" sz="1500" dirty="0">
+                          <a:solidFill>
+                            <a:srgbClr val="15171C"/>
+                          </a:solidFill>
+                          <a:latin typeface="Calibri" pitchFamily="34" charset="0"/>
+                          <a:ea typeface="Calibri" pitchFamily="34" charset="-122"/>
+                          <a:cs typeface="Calibri" pitchFamily="34" charset="-120"/>
+                        </a:rPr>
+                        <a:t>Akim</a:t>
+                      </a:r>
+                      <a:endParaRPr lang="en-US" sz="1500" dirty="0">
+                        <a:latin typeface="Calibri" charset="0"/>
+                        <a:ea typeface="Calibri" charset="0"/>
+                        <a:cs typeface="Calibri" charset="0"/>
+                      </a:endParaRPr>
+                    </a:p>
+                  </a:txBody>
+                  <a:tcPr marL="91440" marR="91440" marT="45720" marB="45720">
+                    <a:lnL w="6350" cap="flat" cmpd="sng" algn="ctr">
+                      <a:solidFill>
+                        <a:srgbClr val="E5E7EB"/>
+                      </a:solidFill>
+                      <a:prstDash val="solid"/>
+                      <a:round/>
+                      <a:headEnd type="none" w="med" len="med"/>
+                      <a:tailEnd type="none" w="med" len="med"/>
+                    </a:lnL>
+                    <a:lnR w="6350" cap="flat" cmpd="sng" algn="ctr">
+                      <a:solidFill>
+                        <a:srgbClr val="E5E7EB"/>
+                      </a:solidFill>
+                      <a:prstDash val="solid"/>
+                      <a:round/>
+                      <a:headEnd type="none" w="med" len="med"/>
+                      <a:tailEnd type="none" w="med" len="med"/>
+                    </a:lnR>
+                    <a:lnT w="6350" cap="flat" cmpd="sng" algn="ctr">
+                      <a:solidFill>
+                        <a:srgbClr val="E5E7EB"/>
+                      </a:solidFill>
+                      <a:prstDash val="solid"/>
+                      <a:round/>
+                      <a:headEnd type="none" w="med" len="med"/>
+                      <a:tailEnd type="none" w="med" len="med"/>
+                    </a:lnT>
+                    <a:lnB w="6350" cap="flat" cmpd="sng" algn="ctr">
+                      <a:solidFill>
+                        <a:srgbClr val="E5E7EB"/>
+                      </a:solidFill>
+                      <a:prstDash val="solid"/>
+                      <a:round/>
+                      <a:headEnd type="none" w="med" len="med"/>
+                      <a:tailEnd type="none" w="med" len="med"/>
+                    </a:lnB>
+                    <a:solidFill>
+                      <a:srgbClr val="FFFFFF"/>
+                    </a:solidFill>
+                  </a:tcPr>
+                </a:tc>
+                <a:tc>
+                  <a:txBody>
+                    <a:bodyPr/>
+                    <a:lstStyle/>
+                    <a:p>
+                      <a:pPr algn="l" indent="0" marL="0">
+                        <a:buNone/>
+                      </a:pPr>
+                      <a:r>
+                        <a:rPr lang="en-US" sz="1500" dirty="0">
+                          <a:solidFill>
+                            <a:srgbClr val="15171C"/>
+                          </a:solidFill>
+                          <a:latin typeface="Calibri" pitchFamily="34" charset="0"/>
+                          <a:ea typeface="Calibri" pitchFamily="34" charset="-122"/>
+                          <a:cs typeface="Calibri" pitchFamily="34" charset="-120"/>
+                        </a:rPr>
+                        <a:t>PSNR, phantom</a:t>
+                      </a:r>
+                      <a:endParaRPr lang="en-US" sz="1500" dirty="0">
+                        <a:latin typeface="Calibri" charset="0"/>
+                        <a:ea typeface="Calibri" charset="0"/>
+                        <a:cs typeface="Calibri" charset="0"/>
+                      </a:endParaRPr>
+                    </a:p>
+                  </a:txBody>
+                  <a:tcPr marL="91440" marR="91440" marT="45720" marB="45720">
+                    <a:lnL w="6350" cap="flat" cmpd="sng" algn="ctr">
+                      <a:solidFill>
+                        <a:srgbClr val="E5E7EB"/>
+                      </a:solidFill>
+                      <a:prstDash val="solid"/>
+                      <a:round/>
+                      <a:headEnd type="none" w="med" len="med"/>
+                      <a:tailEnd type="none" w="med" len="med"/>
+                    </a:lnL>
+                    <a:lnR w="6350" cap="flat" cmpd="sng" algn="ctr">
+                      <a:solidFill>
+                        <a:srgbClr val="E5E7EB"/>
+                      </a:solidFill>
+                      <a:prstDash val="solid"/>
+                      <a:round/>
+                      <a:headEnd type="none" w="med" len="med"/>
+                      <a:tailEnd type="none" w="med" len="med"/>
+                    </a:lnR>
+                    <a:lnT w="6350" cap="flat" cmpd="sng" algn="ctr">
+                      <a:solidFill>
+                        <a:srgbClr val="E5E7EB"/>
+                      </a:solidFill>
+                      <a:prstDash val="solid"/>
+                      <a:round/>
+                      <a:headEnd type="none" w="med" len="med"/>
+                      <a:tailEnd type="none" w="med" len="med"/>
+                    </a:lnT>
+                    <a:lnB w="6350" cap="flat" cmpd="sng" algn="ctr">
+                      <a:solidFill>
+                        <a:srgbClr val="E5E7EB"/>
+                      </a:solidFill>
+                      <a:prstDash val="solid"/>
+                      <a:round/>
+                      <a:headEnd type="none" w="med" len="med"/>
+                      <a:tailEnd type="none" w="med" len="med"/>
+                    </a:lnB>
+                    <a:solidFill>
+                      <a:srgbClr val="FFFFFF"/>
+                    </a:solidFill>
+                  </a:tcPr>
+                </a:tc>
+                <a:tc>
+                  <a:txBody>
+                    <a:bodyPr/>
+                    <a:lstStyle/>
+                    <a:p>
+                      <a:pPr algn="ctr" indent="0" marL="0">
+                        <a:buNone/>
+                      </a:pPr>
+                      <a:r>
+                        <a:rPr lang="en-US" sz="1500" dirty="0">
+                          <a:solidFill>
+                            <a:srgbClr val="15171C"/>
+                          </a:solidFill>
+                          <a:latin typeface="Calibri" pitchFamily="34" charset="0"/>
+                          <a:ea typeface="Calibri" pitchFamily="34" charset="-122"/>
+                          <a:cs typeface="Calibri" pitchFamily="34" charset="-120"/>
+                        </a:rPr>
+                        <a:t>32.0 dB</a:t>
+                      </a:r>
+                      <a:endParaRPr lang="en-US" sz="1500" dirty="0">
+                        <a:latin typeface="Calibri" charset="0"/>
+                        <a:ea typeface="Calibri" charset="0"/>
+                        <a:cs typeface="Calibri" charset="0"/>
+                      </a:endParaRPr>
+                    </a:p>
+                  </a:txBody>
+                  <a:tcPr marL="91440" marR="91440" marT="45720" marB="45720">
+                    <a:lnL w="6350" cap="flat" cmpd="sng" algn="ctr">
+                      <a:solidFill>
+                        <a:srgbClr val="E5E7EB"/>
+                      </a:solidFill>
+                      <a:prstDash val="solid"/>
+                      <a:round/>
+                      <a:headEnd type="none" w="med" len="med"/>
+                      <a:tailEnd type="none" w="med" len="med"/>
+                    </a:lnL>
+                    <a:lnR w="6350" cap="flat" cmpd="sng" algn="ctr">
+                      <a:solidFill>
+                        <a:srgbClr val="E5E7EB"/>
+                      </a:solidFill>
+                      <a:prstDash val="solid"/>
+                      <a:round/>
+                      <a:headEnd type="none" w="med" len="med"/>
+                      <a:tailEnd type="none" w="med" len="med"/>
+                    </a:lnR>
+                    <a:lnT w="6350" cap="flat" cmpd="sng" algn="ctr">
+                      <a:solidFill>
+                        <a:srgbClr val="E5E7EB"/>
+                      </a:solidFill>
+                      <a:prstDash val="solid"/>
+                      <a:round/>
+                      <a:headEnd type="none" w="med" len="med"/>
+                      <a:tailEnd type="none" w="med" len="med"/>
+                    </a:lnT>
+                    <a:lnB w="6350" cap="flat" cmpd="sng" algn="ctr">
+                      <a:solidFill>
+                        <a:srgbClr val="E5E7EB"/>
+                      </a:solidFill>
+                      <a:prstDash val="solid"/>
+                      <a:round/>
+                      <a:headEnd type="none" w="med" len="med"/>
+                      <a:tailEnd type="none" w="med" len="med"/>
+                    </a:lnB>
+                    <a:solidFill>
+                      <a:srgbClr val="FFFFFF"/>
+                    </a:solidFill>
+                  </a:tcPr>
+                </a:tc>
+                <a:tc>
+                  <a:txBody>
+                    <a:bodyPr/>
+                    <a:lstStyle/>
+                    <a:p>
+                      <a:pPr algn="ctr" indent="0" marL="0">
+                        <a:buNone/>
+                      </a:pPr>
+                      <a:r>
+                        <a:rPr lang="en-US" sz="1500" b="1" dirty="0">
+                          <a:solidFill>
+                            <a:srgbClr val="E8730C"/>
+                          </a:solidFill>
+                          <a:latin typeface="Calibri" pitchFamily="34" charset="0"/>
+                          <a:ea typeface="Calibri" pitchFamily="34" charset="-122"/>
+                          <a:cs typeface="Calibri" pitchFamily="34" charset="-120"/>
+                        </a:rPr>
+                        <a:t>53.1 dB</a:t>
+                      </a:r>
+                      <a:endParaRPr lang="en-US" sz="1500" dirty="0">
+                        <a:latin typeface="Calibri" charset="0"/>
+                        <a:ea typeface="Calibri" charset="0"/>
+                        <a:cs typeface="Calibri" charset="0"/>
+                      </a:endParaRPr>
+                    </a:p>
+                  </a:txBody>
+                  <a:tcPr marL="91440" marR="91440" marT="45720" marB="45720">
+                    <a:lnL w="6350" cap="flat" cmpd="sng" algn="ctr">
+                      <a:solidFill>
+                        <a:srgbClr val="E5E7EB"/>
+                      </a:solidFill>
+                      <a:prstDash val="solid"/>
+                      <a:round/>
+                      <a:headEnd type="none" w="med" len="med"/>
+                      <a:tailEnd type="none" w="med" len="med"/>
+                    </a:lnL>
+                    <a:lnR w="6350" cap="flat" cmpd="sng" algn="ctr">
+                      <a:solidFill>
+                        <a:srgbClr val="E5E7EB"/>
+                      </a:solidFill>
+                      <a:prstDash val="solid"/>
+                      <a:round/>
+                      <a:headEnd type="none" w="med" len="med"/>
+                      <a:tailEnd type="none" w="med" len="med"/>
+                    </a:lnR>
+                    <a:lnT w="6350" cap="flat" cmpd="sng" algn="ctr">
+                      <a:solidFill>
+                        <a:srgbClr val="E5E7EB"/>
+                      </a:solidFill>
+                      <a:prstDash val="solid"/>
+                      <a:round/>
+                      <a:headEnd type="none" w="med" len="med"/>
+                      <a:tailEnd type="none" w="med" len="med"/>
+                    </a:lnT>
+                    <a:lnB w="6350" cap="flat" cmpd="sng" algn="ctr">
+                      <a:solidFill>
+                        <a:srgbClr val="E5E7EB"/>
+                      </a:solidFill>
+                      <a:prstDash val="solid"/>
+                      <a:round/>
+                      <a:headEnd type="none" w="med" len="med"/>
+                      <a:tailEnd type="none" w="med" len="med"/>
+                    </a:lnB>
+                    <a:solidFill>
+                      <a:srgbClr val="FFFFFF"/>
+                    </a:solidFill>
+                  </a:tcPr>
+                </a:tc>
+              </a:tr>
+              <a:tr h="393192">
+                <a:tc>
+                  <a:txBody>
+                    <a:bodyPr/>
+                    <a:lstStyle/>
+                    <a:p>
+                      <a:pPr algn="l" indent="0" marL="0">
+                        <a:buNone/>
+                      </a:pPr>
+                      <a:r>
+                        <a:rPr lang="en-US" sz="1500" dirty="0">
+                          <a:solidFill>
+                            <a:srgbClr val="15171C"/>
+                          </a:solidFill>
+                          <a:latin typeface="Calibri" pitchFamily="34" charset="0"/>
+                          <a:ea typeface="Calibri" pitchFamily="34" charset="-122"/>
+                          <a:cs typeface="Calibri" pitchFamily="34" charset="-120"/>
+                        </a:rPr>
+                        <a:t>Stretched + rotated blobs</a:t>
+                      </a:r>
+                      <a:endParaRPr lang="en-US" sz="1500" dirty="0">
+                        <a:latin typeface="Calibri" charset="0"/>
+                        <a:ea typeface="Calibri" charset="0"/>
+                        <a:cs typeface="Calibri" charset="0"/>
+                      </a:endParaRPr>
+                    </a:p>
+                  </a:txBody>
+                  <a:tcPr marL="91440" marR="91440" marT="45720" marB="45720">
+                    <a:lnL w="6350" cap="flat" cmpd="sng" algn="ctr">
+                      <a:solidFill>
+                        <a:srgbClr val="E5E7EB"/>
+                      </a:solidFill>
+                      <a:prstDash val="solid"/>
+                      <a:round/>
+                      <a:headEnd type="none" w="med" len="med"/>
+                      <a:tailEnd type="none" w="med" len="med"/>
+                    </a:lnL>
+                    <a:lnR w="6350" cap="flat" cmpd="sng" algn="ctr">
+                      <a:solidFill>
+                        <a:srgbClr val="E5E7EB"/>
+                      </a:solidFill>
+                      <a:prstDash val="solid"/>
+                      <a:round/>
+                      <a:headEnd type="none" w="med" len="med"/>
+                      <a:tailEnd type="none" w="med" len="med"/>
+                    </a:lnR>
+                    <a:lnT w="6350" cap="flat" cmpd="sng" algn="ctr">
+                      <a:solidFill>
+                        <a:srgbClr val="E5E7EB"/>
+                      </a:solidFill>
+                      <a:prstDash val="solid"/>
+                      <a:round/>
+                      <a:headEnd type="none" w="med" len="med"/>
+                      <a:tailEnd type="none" w="med" len="med"/>
+                    </a:lnT>
+                    <a:lnB w="6350" cap="flat" cmpd="sng" algn="ctr">
+                      <a:solidFill>
+                        <a:srgbClr val="E5E7EB"/>
+                      </a:solidFill>
+                      <a:prstDash val="solid"/>
+                      <a:round/>
+                      <a:headEnd type="none" w="med" len="med"/>
+                      <a:tailEnd type="none" w="med" len="med"/>
+                    </a:lnB>
+                    <a:solidFill>
+                      <a:srgbClr val="FFFFFF"/>
+                    </a:solidFill>
+                  </a:tcPr>
+                </a:tc>
+                <a:tc>
+                  <a:txBody>
+                    <a:bodyPr/>
+                    <a:lstStyle/>
+                    <a:p>
+                      <a:pPr algn="l" indent="0" marL="0">
+                        <a:buNone/>
+                      </a:pPr>
+                      <a:r>
+                        <a:rPr lang="en-US" sz="1500" dirty="0">
+                          <a:solidFill>
+                            <a:srgbClr val="15171C"/>
+                          </a:solidFill>
+                          <a:latin typeface="Calibri" pitchFamily="34" charset="0"/>
+                          <a:ea typeface="Calibri" pitchFamily="34" charset="-122"/>
+                          <a:cs typeface="Calibri" pitchFamily="34" charset="-120"/>
+                        </a:rPr>
+                        <a:t>Akim</a:t>
+                      </a:r>
+                      <a:endParaRPr lang="en-US" sz="1500" dirty="0">
+                        <a:latin typeface="Calibri" charset="0"/>
+                        <a:ea typeface="Calibri" charset="0"/>
+                        <a:cs typeface="Calibri" charset="0"/>
+                      </a:endParaRPr>
+                    </a:p>
+                  </a:txBody>
+                  <a:tcPr marL="91440" marR="91440" marT="45720" marB="45720">
+                    <a:lnL w="6350" cap="flat" cmpd="sng" algn="ctr">
+                      <a:solidFill>
+                        <a:srgbClr val="E5E7EB"/>
+                      </a:solidFill>
+                      <a:prstDash val="solid"/>
+                      <a:round/>
+                      <a:headEnd type="none" w="med" len="med"/>
+                      <a:tailEnd type="none" w="med" len="med"/>
+                    </a:lnL>
+                    <a:lnR w="6350" cap="flat" cmpd="sng" algn="ctr">
+                      <a:solidFill>
+                        <a:srgbClr val="E5E7EB"/>
+                      </a:solidFill>
+                      <a:prstDash val="solid"/>
+                      <a:round/>
+                      <a:headEnd type="none" w="med" len="med"/>
+                      <a:tailEnd type="none" w="med" len="med"/>
+                    </a:lnR>
+                    <a:lnT w="6350" cap="flat" cmpd="sng" algn="ctr">
+                      <a:solidFill>
+                        <a:srgbClr val="E5E7EB"/>
+                      </a:solidFill>
+                      <a:prstDash val="solid"/>
+                      <a:round/>
+                      <a:headEnd type="none" w="med" len="med"/>
+                      <a:tailEnd type="none" w="med" len="med"/>
+                    </a:lnT>
+                    <a:lnB w="6350" cap="flat" cmpd="sng" algn="ctr">
+                      <a:solidFill>
+                        <a:srgbClr val="E5E7EB"/>
+                      </a:solidFill>
+                      <a:prstDash val="solid"/>
+                      <a:round/>
+                      <a:headEnd type="none" w="med" len="med"/>
+                      <a:tailEnd type="none" w="med" len="med"/>
+                    </a:lnB>
+                    <a:solidFill>
+                      <a:srgbClr val="FFFFFF"/>
+                    </a:solidFill>
+                  </a:tcPr>
+                </a:tc>
+                <a:tc>
+                  <a:txBody>
+                    <a:bodyPr/>
+                    <a:lstStyle/>
+                    <a:p>
+                      <a:pPr algn="l" indent="0" marL="0">
+                        <a:buNone/>
+                      </a:pPr>
+                      <a:r>
+                        <a:rPr lang="en-US" sz="1500" dirty="0">
+                          <a:solidFill>
+                            <a:srgbClr val="15171C"/>
+                          </a:solidFill>
+                          <a:latin typeface="Calibri" pitchFamily="34" charset="0"/>
+                          <a:ea typeface="Calibri" pitchFamily="34" charset="-122"/>
+                          <a:cs typeface="Calibri" pitchFamily="34" charset="-120"/>
+                        </a:rPr>
+                        <a:t>PSNR, real data, median</a:t>
+                      </a:r>
+                      <a:endParaRPr lang="en-US" sz="1500" dirty="0">
+                        <a:latin typeface="Calibri" charset="0"/>
+                        <a:ea typeface="Calibri" charset="0"/>
+                        <a:cs typeface="Calibri" charset="0"/>
+                      </a:endParaRPr>
+                    </a:p>
+                  </a:txBody>
+                  <a:tcPr marL="91440" marR="91440" marT="45720" marB="45720">
+                    <a:lnL w="6350" cap="flat" cmpd="sng" algn="ctr">
+                      <a:solidFill>
+                        <a:srgbClr val="E5E7EB"/>
+                      </a:solidFill>
+                      <a:prstDash val="solid"/>
+                      <a:round/>
+                      <a:headEnd type="none" w="med" len="med"/>
+                      <a:tailEnd type="none" w="med" len="med"/>
+                    </a:lnL>
+                    <a:lnR w="6350" cap="flat" cmpd="sng" algn="ctr">
+                      <a:solidFill>
+                        <a:srgbClr val="E5E7EB"/>
+                      </a:solidFill>
+                      <a:prstDash val="solid"/>
+                      <a:round/>
+                      <a:headEnd type="none" w="med" len="med"/>
+                      <a:tailEnd type="none" w="med" len="med"/>
+                    </a:lnR>
+                    <a:lnT w="6350" cap="flat" cmpd="sng" algn="ctr">
+                      <a:solidFill>
+                        <a:srgbClr val="E5E7EB"/>
+                      </a:solidFill>
+                      <a:prstDash val="solid"/>
+                      <a:round/>
+                      <a:headEnd type="none" w="med" len="med"/>
+                      <a:tailEnd type="none" w="med" len="med"/>
+                    </a:lnT>
+                    <a:lnB w="6350" cap="flat" cmpd="sng" algn="ctr">
+                      <a:solidFill>
+                        <a:srgbClr val="E5E7EB"/>
+                      </a:solidFill>
+                      <a:prstDash val="solid"/>
+                      <a:round/>
+                      <a:headEnd type="none" w="med" len="med"/>
+                      <a:tailEnd type="none" w="med" len="med"/>
+                    </a:lnB>
+                    <a:solidFill>
+                      <a:srgbClr val="FFFFFF"/>
+                    </a:solidFill>
+                  </a:tcPr>
+                </a:tc>
+                <a:tc>
+                  <a:txBody>
+                    <a:bodyPr/>
+                    <a:lstStyle/>
+                    <a:p>
+                      <a:pPr algn="ctr" indent="0" marL="0">
+                        <a:buNone/>
+                      </a:pPr>
+                      <a:r>
+                        <a:rPr lang="en-US" sz="1500" dirty="0">
+                          <a:solidFill>
+                            <a:srgbClr val="15171C"/>
+                          </a:solidFill>
+                          <a:latin typeface="Calibri" pitchFamily="34" charset="0"/>
+                          <a:ea typeface="Calibri" pitchFamily="34" charset="-122"/>
+                          <a:cs typeface="Calibri" pitchFamily="34" charset="-120"/>
+                        </a:rPr>
+                        <a:t>20.4 dB</a:t>
+                      </a:r>
+                      <a:endParaRPr lang="en-US" sz="1500" dirty="0">
+                        <a:latin typeface="Calibri" charset="0"/>
+                        <a:ea typeface="Calibri" charset="0"/>
+                        <a:cs typeface="Calibri" charset="0"/>
+                      </a:endParaRPr>
+                    </a:p>
+                  </a:txBody>
+                  <a:tcPr marL="91440" marR="91440" marT="45720" marB="45720">
+                    <a:lnL w="6350" cap="flat" cmpd="sng" algn="ctr">
+                      <a:solidFill>
+                        <a:srgbClr val="E5E7EB"/>
+                      </a:solidFill>
+                      <a:prstDash val="solid"/>
+                      <a:round/>
+                      <a:headEnd type="none" w="med" len="med"/>
+                      <a:tailEnd type="none" w="med" len="med"/>
+                    </a:lnL>
+                    <a:lnR w="6350" cap="flat" cmpd="sng" algn="ctr">
+                      <a:solidFill>
+                        <a:srgbClr val="E5E7EB"/>
+                      </a:solidFill>
+                      <a:prstDash val="solid"/>
+                      <a:round/>
+                      <a:headEnd type="none" w="med" len="med"/>
+                      <a:tailEnd type="none" w="med" len="med"/>
+                    </a:lnR>
+                    <a:lnT w="6350" cap="flat" cmpd="sng" algn="ctr">
+                      <a:solidFill>
+                        <a:srgbClr val="E5E7EB"/>
+                      </a:solidFill>
+                      <a:prstDash val="solid"/>
+                      <a:round/>
+                      <a:headEnd type="none" w="med" len="med"/>
+                      <a:tailEnd type="none" w="med" len="med"/>
+                    </a:lnT>
+                    <a:lnB w="6350" cap="flat" cmpd="sng" algn="ctr">
+                      <a:solidFill>
+                        <a:srgbClr val="E5E7EB"/>
+                      </a:solidFill>
+                      <a:prstDash val="solid"/>
+                      <a:round/>
+                      <a:headEnd type="none" w="med" len="med"/>
+                      <a:tailEnd type="none" w="med" len="med"/>
+                    </a:lnB>
+                    <a:solidFill>
+                      <a:srgbClr val="FFFFFF"/>
+                    </a:solidFill>
+                  </a:tcPr>
+                </a:tc>
+                <a:tc>
+                  <a:txBody>
+                    <a:bodyPr/>
+                    <a:lstStyle/>
+                    <a:p>
+                      <a:pPr algn="ctr" indent="0" marL="0">
+                        <a:buNone/>
+                      </a:pPr>
+                      <a:r>
+                        <a:rPr lang="en-US" sz="1500" b="1" dirty="0">
+                          <a:solidFill>
+                            <a:srgbClr val="E8730C"/>
+                          </a:solidFill>
+                          <a:latin typeface="Calibri" pitchFamily="34" charset="0"/>
+                          <a:ea typeface="Calibri" pitchFamily="34" charset="-122"/>
+                          <a:cs typeface="Calibri" pitchFamily="34" charset="-120"/>
+                        </a:rPr>
+                        <a:t>24.0 dB</a:t>
+                      </a:r>
+                      <a:endParaRPr lang="en-US" sz="1500" dirty="0">
+                        <a:latin typeface="Calibri" charset="0"/>
+                        <a:ea typeface="Calibri" charset="0"/>
+                        <a:cs typeface="Calibri" charset="0"/>
+                      </a:endParaRPr>
+                    </a:p>
+                  </a:txBody>
+                  <a:tcPr marL="91440" marR="91440" marT="45720" marB="45720">
+                    <a:lnL w="6350" cap="flat" cmpd="sng" algn="ctr">
+                      <a:solidFill>
+                        <a:srgbClr val="E5E7EB"/>
+                      </a:solidFill>
+                      <a:prstDash val="solid"/>
+                      <a:round/>
+                      <a:headEnd type="none" w="med" len="med"/>
+                      <a:tailEnd type="none" w="med" len="med"/>
+                    </a:lnL>
+                    <a:lnR w="6350" cap="flat" cmpd="sng" algn="ctr">
+                      <a:solidFill>
+                        <a:srgbClr val="E5E7EB"/>
+                      </a:solidFill>
+                      <a:prstDash val="solid"/>
+                      <a:round/>
+                      <a:headEnd type="none" w="med" len="med"/>
+                      <a:tailEnd type="none" w="med" len="med"/>
+                    </a:lnR>
+                    <a:lnT w="6350" cap="flat" cmpd="sng" algn="ctr">
+                      <a:solidFill>
+                        <a:srgbClr val="E5E7EB"/>
+                      </a:solidFill>
+                      <a:prstDash val="solid"/>
+                      <a:round/>
+                      <a:headEnd type="none" w="med" len="med"/>
+                      <a:tailEnd type="none" w="med" len="med"/>
+                    </a:lnT>
+                    <a:lnB w="6350" cap="flat" cmpd="sng" algn="ctr">
+                      <a:solidFill>
+                        <a:srgbClr val="E5E7EB"/>
+                      </a:solidFill>
+                      <a:prstDash val="solid"/>
+                      <a:round/>
+                      <a:headEnd type="none" w="med" len="med"/>
+                      <a:tailEnd type="none" w="med" len="med"/>
+                    </a:lnB>
+                    <a:solidFill>
+                      <a:srgbClr val="FFFFFF"/>
+                    </a:solidFill>
+                  </a:tcPr>
+                </a:tc>
+              </a:tr>
+              <a:tr h="393192">
+                <a:tc>
+                  <a:txBody>
+                    <a:bodyPr/>
+                    <a:lstStyle/>
+                    <a:p>
+                      <a:pPr algn="l" indent="0" marL="0">
+                        <a:buNone/>
+                      </a:pPr>
+                      <a:r>
+                        <a:rPr lang="en-US" sz="1500" dirty="0">
+                          <a:solidFill>
+                            <a:srgbClr val="15171C"/>
+                          </a:solidFill>
+                          <a:latin typeface="Calibri" pitchFamily="34" charset="0"/>
+                          <a:ea typeface="Calibri" pitchFamily="34" charset="-122"/>
+                          <a:cs typeface="Calibri" pitchFamily="34" charset="-120"/>
+                        </a:rPr>
+                        <a:t>Repeats of the shape test</a:t>
+                      </a:r>
+                      <a:endParaRPr lang="en-US" sz="1500" dirty="0">
+                        <a:latin typeface="Calibri" charset="0"/>
+                        <a:ea typeface="Calibri" charset="0"/>
+                        <a:cs typeface="Calibri" charset="0"/>
+                      </a:endParaRPr>
+                    </a:p>
+                  </a:txBody>
+                  <a:tcPr marL="91440" marR="91440" marT="45720" marB="45720">
+                    <a:lnL w="6350" cap="flat" cmpd="sng" algn="ctr">
+                      <a:solidFill>
+                        <a:srgbClr val="E5E7EB"/>
+                      </a:solidFill>
+                      <a:prstDash val="solid"/>
+                      <a:round/>
+                      <a:headEnd type="none" w="med" len="med"/>
+                      <a:tailEnd type="none" w="med" len="med"/>
+                    </a:lnL>
+                    <a:lnR w="6350" cap="flat" cmpd="sng" algn="ctr">
+                      <a:solidFill>
+                        <a:srgbClr val="E5E7EB"/>
+                      </a:solidFill>
+                      <a:prstDash val="solid"/>
+                      <a:round/>
+                      <a:headEnd type="none" w="med" len="med"/>
+                      <a:tailEnd type="none" w="med" len="med"/>
+                    </a:lnR>
+                    <a:lnT w="6350" cap="flat" cmpd="sng" algn="ctr">
+                      <a:solidFill>
+                        <a:srgbClr val="E5E7EB"/>
+                      </a:solidFill>
+                      <a:prstDash val="solid"/>
+                      <a:round/>
+                      <a:headEnd type="none" w="med" len="med"/>
+                      <a:tailEnd type="none" w="med" len="med"/>
+                    </a:lnT>
+                    <a:lnB w="6350" cap="flat" cmpd="sng" algn="ctr">
+                      <a:solidFill>
+                        <a:srgbClr val="E5E7EB"/>
+                      </a:solidFill>
+                      <a:prstDash val="solid"/>
+                      <a:round/>
+                      <a:headEnd type="none" w="med" len="med"/>
+                      <a:tailEnd type="none" w="med" len="med"/>
+                    </a:lnB>
+                    <a:solidFill>
+                      <a:srgbClr val="FFFFFF"/>
+                    </a:solidFill>
+                  </a:tcPr>
+                </a:tc>
+                <a:tc>
+                  <a:txBody>
+                    <a:bodyPr/>
+                    <a:lstStyle/>
+                    <a:p>
+                      <a:pPr algn="l" indent="0" marL="0">
+                        <a:buNone/>
+                      </a:pPr>
+                      <a:r>
+                        <a:rPr lang="en-US" sz="1500" dirty="0">
+                          <a:solidFill>
+                            <a:srgbClr val="15171C"/>
+                          </a:solidFill>
+                          <a:latin typeface="Calibri" pitchFamily="34" charset="0"/>
+                          <a:ea typeface="Calibri" pitchFamily="34" charset="-122"/>
+                          <a:cs typeface="Calibri" pitchFamily="34" charset="-120"/>
+                        </a:rPr>
+                        <a:t>us</a:t>
+                      </a:r>
+                      <a:endParaRPr lang="en-US" sz="1500" dirty="0">
+                        <a:latin typeface="Calibri" charset="0"/>
+                        <a:ea typeface="Calibri" charset="0"/>
+                        <a:cs typeface="Calibri" charset="0"/>
+                      </a:endParaRPr>
+                    </a:p>
+                  </a:txBody>
+                  <a:tcPr marL="91440" marR="91440" marT="45720" marB="45720">
+                    <a:lnL w="6350" cap="flat" cmpd="sng" algn="ctr">
+                      <a:solidFill>
+                        <a:srgbClr val="E5E7EB"/>
+                      </a:solidFill>
+                      <a:prstDash val="solid"/>
+                      <a:round/>
+                      <a:headEnd type="none" w="med" len="med"/>
+                      <a:tailEnd type="none" w="med" len="med"/>
+                    </a:lnL>
+                    <a:lnR w="6350" cap="flat" cmpd="sng" algn="ctr">
+                      <a:solidFill>
+                        <a:srgbClr val="E5E7EB"/>
+                      </a:solidFill>
+                      <a:prstDash val="solid"/>
+                      <a:round/>
+                      <a:headEnd type="none" w="med" len="med"/>
+                      <a:tailEnd type="none" w="med" len="med"/>
+                    </a:lnR>
+                    <a:lnT w="6350" cap="flat" cmpd="sng" algn="ctr">
+                      <a:solidFill>
+                        <a:srgbClr val="E5E7EB"/>
+                      </a:solidFill>
+                      <a:prstDash val="solid"/>
+                      <a:round/>
+                      <a:headEnd type="none" w="med" len="med"/>
+                      <a:tailEnd type="none" w="med" len="med"/>
+                    </a:lnT>
+                    <a:lnB w="6350" cap="flat" cmpd="sng" algn="ctr">
+                      <a:solidFill>
+                        <a:srgbClr val="E5E7EB"/>
+                      </a:solidFill>
+                      <a:prstDash val="solid"/>
+                      <a:round/>
+                      <a:headEnd type="none" w="med" len="med"/>
+                      <a:tailEnd type="none" w="med" len="med"/>
+                    </a:lnB>
+                    <a:solidFill>
+                      <a:srgbClr val="FFFFFF"/>
+                    </a:solidFill>
+                  </a:tcPr>
+                </a:tc>
+                <a:tc>
+                  <a:txBody>
+                    <a:bodyPr/>
+                    <a:lstStyle/>
+                    <a:p>
+                      <a:pPr algn="l" indent="0" marL="0">
+                        <a:buNone/>
+                      </a:pPr>
+                      <a:r>
+                        <a:rPr lang="en-US" sz="1500" dirty="0">
+                          <a:solidFill>
+                            <a:srgbClr val="15171C"/>
+                          </a:solidFill>
+                          <a:latin typeface="Calibri" pitchFamily="34" charset="0"/>
+                          <a:ea typeface="Calibri" pitchFamily="34" charset="-122"/>
+                          <a:cs typeface="Calibri" pitchFamily="34" charset="-120"/>
+                        </a:rPr>
+                        <a:t>PSNR, 15 fits</a:t>
+                      </a:r>
+                      <a:endParaRPr lang="en-US" sz="1500" dirty="0">
+                        <a:latin typeface="Calibri" charset="0"/>
+                        <a:ea typeface="Calibri" charset="0"/>
+                        <a:cs typeface="Calibri" charset="0"/>
+                      </a:endParaRPr>
+                    </a:p>
+                  </a:txBody>
+                  <a:tcPr marL="91440" marR="91440" marT="45720" marB="45720">
+                    <a:lnL w="6350" cap="flat" cmpd="sng" algn="ctr">
+                      <a:solidFill>
+                        <a:srgbClr val="E5E7EB"/>
+                      </a:solidFill>
+                      <a:prstDash val="solid"/>
+                      <a:round/>
+                      <a:headEnd type="none" w="med" len="med"/>
+                      <a:tailEnd type="none" w="med" len="med"/>
+                    </a:lnL>
+                    <a:lnR w="6350" cap="flat" cmpd="sng" algn="ctr">
+                      <a:solidFill>
+                        <a:srgbClr val="E5E7EB"/>
+                      </a:solidFill>
+                      <a:prstDash val="solid"/>
+                      <a:round/>
+                      <a:headEnd type="none" w="med" len="med"/>
+                      <a:tailEnd type="none" w="med" len="med"/>
+                    </a:lnR>
+                    <a:lnT w="6350" cap="flat" cmpd="sng" algn="ctr">
+                      <a:solidFill>
+                        <a:srgbClr val="E5E7EB"/>
+                      </a:solidFill>
+                      <a:prstDash val="solid"/>
+                      <a:round/>
+                      <a:headEnd type="none" w="med" len="med"/>
+                      <a:tailEnd type="none" w="med" len="med"/>
+                    </a:lnT>
+                    <a:lnB w="6350" cap="flat" cmpd="sng" algn="ctr">
+                      <a:solidFill>
+                        <a:srgbClr val="E5E7EB"/>
+                      </a:solidFill>
+                      <a:prstDash val="solid"/>
+                      <a:round/>
+                      <a:headEnd type="none" w="med" len="med"/>
+                      <a:tailEnd type="none" w="med" len="med"/>
+                    </a:lnB>
+                    <a:solidFill>
+                      <a:srgbClr val="FFFFFF"/>
+                    </a:solidFill>
+                  </a:tcPr>
+                </a:tc>
+                <a:tc>
+                  <a:txBody>
+                    <a:bodyPr/>
+                    <a:lstStyle/>
+                    <a:p>
+                      <a:pPr algn="ctr" indent="0" marL="0">
+                        <a:buNone/>
+                      </a:pPr>
+                      <a:r>
+                        <a:rPr lang="en-US" sz="1500" dirty="0">
+                          <a:solidFill>
+                            <a:srgbClr val="15171C"/>
+                          </a:solidFill>
+                          <a:latin typeface="Calibri" pitchFamily="34" charset="0"/>
+                          <a:ea typeface="Calibri" pitchFamily="34" charset="-122"/>
+                          <a:cs typeface="Calibri" pitchFamily="34" charset="-120"/>
+                        </a:rPr>
+                        <a:t>22.3 dB</a:t>
+                      </a:r>
+                      <a:endParaRPr lang="en-US" sz="1500" dirty="0">
+                        <a:latin typeface="Calibri" charset="0"/>
+                        <a:ea typeface="Calibri" charset="0"/>
+                        <a:cs typeface="Calibri" charset="0"/>
+                      </a:endParaRPr>
+                    </a:p>
+                  </a:txBody>
+                  <a:tcPr marL="91440" marR="91440" marT="45720" marB="45720">
+                    <a:lnL w="6350" cap="flat" cmpd="sng" algn="ctr">
+                      <a:solidFill>
+                        <a:srgbClr val="E5E7EB"/>
+                      </a:solidFill>
+                      <a:prstDash val="solid"/>
+                      <a:round/>
+                      <a:headEnd type="none" w="med" len="med"/>
+                      <a:tailEnd type="none" w="med" len="med"/>
+                    </a:lnL>
+                    <a:lnR w="6350" cap="flat" cmpd="sng" algn="ctr">
+                      <a:solidFill>
+                        <a:srgbClr val="E5E7EB"/>
+                      </a:solidFill>
+                      <a:prstDash val="solid"/>
+                      <a:round/>
+                      <a:headEnd type="none" w="med" len="med"/>
+                      <a:tailEnd type="none" w="med" len="med"/>
+                    </a:lnR>
+                    <a:lnT w="6350" cap="flat" cmpd="sng" algn="ctr">
+                      <a:solidFill>
+                        <a:srgbClr val="E5E7EB"/>
+                      </a:solidFill>
+                      <a:prstDash val="solid"/>
+                      <a:round/>
+                      <a:headEnd type="none" w="med" len="med"/>
+                      <a:tailEnd type="none" w="med" len="med"/>
+                    </a:lnT>
+                    <a:lnB w="6350" cap="flat" cmpd="sng" algn="ctr">
+                      <a:solidFill>
+                        <a:srgbClr val="E5E7EB"/>
+                      </a:solidFill>
+                      <a:prstDash val="solid"/>
+                      <a:round/>
+                      <a:headEnd type="none" w="med" len="med"/>
+                      <a:tailEnd type="none" w="med" len="med"/>
+                    </a:lnB>
+                    <a:solidFill>
+                      <a:srgbClr val="FFFFFF"/>
+                    </a:solidFill>
+                  </a:tcPr>
+                </a:tc>
+                <a:tc>
+                  <a:txBody>
+                    <a:bodyPr/>
+                    <a:lstStyle/>
+                    <a:p>
+                      <a:pPr algn="ctr" indent="0" marL="0">
+                        <a:buNone/>
+                      </a:pPr>
+                      <a:r>
+                        <a:rPr lang="en-US" sz="1500" b="1" dirty="0">
+                          <a:solidFill>
+                            <a:srgbClr val="E8730C"/>
+                          </a:solidFill>
+                          <a:latin typeface="Calibri" pitchFamily="34" charset="0"/>
+                          <a:ea typeface="Calibri" pitchFamily="34" charset="-122"/>
+                          <a:cs typeface="Calibri" pitchFamily="34" charset="-120"/>
+                        </a:rPr>
+                        <a:t>25.5 dB</a:t>
+                      </a:r>
+                      <a:endParaRPr lang="en-US" sz="1500" dirty="0">
+                        <a:latin typeface="Calibri" charset="0"/>
+                        <a:ea typeface="Calibri" charset="0"/>
+                        <a:cs typeface="Calibri" charset="0"/>
+                      </a:endParaRPr>
+                    </a:p>
+                  </a:txBody>
+                  <a:tcPr marL="91440" marR="91440" marT="45720" marB="45720">
+                    <a:lnL w="6350" cap="flat" cmpd="sng" algn="ctr">
+                      <a:solidFill>
+                        <a:srgbClr val="E5E7EB"/>
+                      </a:solidFill>
+                      <a:prstDash val="solid"/>
+                      <a:round/>
+                      <a:headEnd type="none" w="med" len="med"/>
+                      <a:tailEnd type="none" w="med" len="med"/>
+                    </a:lnL>
+                    <a:lnR w="6350" cap="flat" cmpd="sng" algn="ctr">
+                      <a:solidFill>
+                        <a:srgbClr val="E5E7EB"/>
+                      </a:solidFill>
+                      <a:prstDash val="solid"/>
+                      <a:round/>
+                      <a:headEnd type="none" w="med" len="med"/>
+                      <a:tailEnd type="none" w="med" len="med"/>
+                    </a:lnR>
+                    <a:lnT w="6350" cap="flat" cmpd="sng" algn="ctr">
+                      <a:solidFill>
+                        <a:srgbClr val="E5E7EB"/>
+                      </a:solidFill>
+                      <a:prstDash val="solid"/>
+                      <a:round/>
+                      <a:headEnd type="none" w="med" len="med"/>
+                      <a:tailEnd type="none" w="med" len="med"/>
+                    </a:lnT>
+                    <a:lnB w="6350" cap="flat" cmpd="sng" algn="ctr">
+                      <a:solidFill>
+                        <a:srgbClr val="E5E7EB"/>
+                      </a:solidFill>
+                      <a:prstDash val="solid"/>
+                      <a:round/>
+                      <a:headEnd type="none" w="med" len="med"/>
+                      <a:tailEnd type="none" w="med" len="med"/>
+                    </a:lnB>
+                    <a:solidFill>
+                      <a:srgbClr val="FFFFFF"/>
+                    </a:solidFill>
+                  </a:tcPr>
+                </a:tc>
+              </a:tr>
+              <a:tr h="393192">
+                <a:tc>
+                  <a:txBody>
+                    <a:bodyPr/>
+                    <a:lstStyle/>
+                    <a:p>
+                      <a:pPr algn="l" indent="0" marL="0">
+                        <a:buNone/>
+                      </a:pPr>
+                      <a:r>
+                        <a:rPr lang="en-US" sz="1500" dirty="0">
+                          <a:solidFill>
+                            <a:srgbClr val="15171C"/>
+                          </a:solidFill>
+                          <a:latin typeface="Calibri" pitchFamily="34" charset="0"/>
+                          <a:ea typeface="Calibri" pitchFamily="34" charset="-122"/>
+                          <a:cs typeface="Calibri" pitchFamily="34" charset="-120"/>
+                        </a:rPr>
+                        <a:t>One start per nucleus</a:t>
+                      </a:r>
+                      <a:endParaRPr lang="en-US" sz="1500" dirty="0">
+                        <a:latin typeface="Calibri" charset="0"/>
+                        <a:ea typeface="Calibri" charset="0"/>
+                        <a:cs typeface="Calibri" charset="0"/>
+                      </a:endParaRPr>
+                    </a:p>
+                  </a:txBody>
+                  <a:tcPr marL="91440" marR="91440" marT="45720" marB="45720">
+                    <a:lnL w="6350" cap="flat" cmpd="sng" algn="ctr">
+                      <a:solidFill>
+                        <a:srgbClr val="E5E7EB"/>
+                      </a:solidFill>
+                      <a:prstDash val="solid"/>
+                      <a:round/>
+                      <a:headEnd type="none" w="med" len="med"/>
+                      <a:tailEnd type="none" w="med" len="med"/>
+                    </a:lnL>
+                    <a:lnR w="6350" cap="flat" cmpd="sng" algn="ctr">
+                      <a:solidFill>
+                        <a:srgbClr val="E5E7EB"/>
+                      </a:solidFill>
+                      <a:prstDash val="solid"/>
+                      <a:round/>
+                      <a:headEnd type="none" w="med" len="med"/>
+                      <a:tailEnd type="none" w="med" len="med"/>
+                    </a:lnR>
+                    <a:lnT w="6350" cap="flat" cmpd="sng" algn="ctr">
+                      <a:solidFill>
+                        <a:srgbClr val="E5E7EB"/>
+                      </a:solidFill>
+                      <a:prstDash val="solid"/>
+                      <a:round/>
+                      <a:headEnd type="none" w="med" len="med"/>
+                      <a:tailEnd type="none" w="med" len="med"/>
+                    </a:lnT>
+                    <a:lnB w="6350" cap="flat" cmpd="sng" algn="ctr">
+                      <a:solidFill>
+                        <a:srgbClr val="E5E7EB"/>
+                      </a:solidFill>
+                      <a:prstDash val="solid"/>
+                      <a:round/>
+                      <a:headEnd type="none" w="med" len="med"/>
+                      <a:tailEnd type="none" w="med" len="med"/>
+                    </a:lnB>
+                    <a:solidFill>
+                      <a:srgbClr val="FFFFFF"/>
+                    </a:solidFill>
+                  </a:tcPr>
+                </a:tc>
+                <a:tc>
+                  <a:txBody>
+                    <a:bodyPr/>
+                    <a:lstStyle/>
+                    <a:p>
+                      <a:pPr algn="l" indent="0" marL="0">
+                        <a:buNone/>
+                      </a:pPr>
+                      <a:r>
+                        <a:rPr lang="en-US" sz="1500" dirty="0">
+                          <a:solidFill>
+                            <a:srgbClr val="15171C"/>
+                          </a:solidFill>
+                          <a:latin typeface="Calibri" pitchFamily="34" charset="0"/>
+                          <a:ea typeface="Calibri" pitchFamily="34" charset="-122"/>
+                          <a:cs typeface="Calibri" pitchFamily="34" charset="-120"/>
+                        </a:rPr>
+                        <a:t>us</a:t>
+                      </a:r>
+                      <a:endParaRPr lang="en-US" sz="1500" dirty="0">
+                        <a:latin typeface="Calibri" charset="0"/>
+                        <a:ea typeface="Calibri" charset="0"/>
+                        <a:cs typeface="Calibri" charset="0"/>
+                      </a:endParaRPr>
+                    </a:p>
+                  </a:txBody>
+                  <a:tcPr marL="91440" marR="91440" marT="45720" marB="45720">
+                    <a:lnL w="6350" cap="flat" cmpd="sng" algn="ctr">
+                      <a:solidFill>
+                        <a:srgbClr val="E5E7EB"/>
+                      </a:solidFill>
+                      <a:prstDash val="solid"/>
+                      <a:round/>
+                      <a:headEnd type="none" w="med" len="med"/>
+                      <a:tailEnd type="none" w="med" len="med"/>
+                    </a:lnL>
+                    <a:lnR w="6350" cap="flat" cmpd="sng" algn="ctr">
+                      <a:solidFill>
+                        <a:srgbClr val="E5E7EB"/>
+                      </a:solidFill>
+                      <a:prstDash val="solid"/>
+                      <a:round/>
+                      <a:headEnd type="none" w="med" len="med"/>
+                      <a:tailEnd type="none" w="med" len="med"/>
+                    </a:lnR>
+                    <a:lnT w="6350" cap="flat" cmpd="sng" algn="ctr">
+                      <a:solidFill>
+                        <a:srgbClr val="E5E7EB"/>
+                      </a:solidFill>
+                      <a:prstDash val="solid"/>
+                      <a:round/>
+                      <a:headEnd type="none" w="med" len="med"/>
+                      <a:tailEnd type="none" w="med" len="med"/>
+                    </a:lnT>
+                    <a:lnB w="6350" cap="flat" cmpd="sng" algn="ctr">
+                      <a:solidFill>
+                        <a:srgbClr val="E5E7EB"/>
+                      </a:solidFill>
+                      <a:prstDash val="solid"/>
+                      <a:round/>
+                      <a:headEnd type="none" w="med" len="med"/>
+                      <a:tailEnd type="none" w="med" len="med"/>
+                    </a:lnB>
+                    <a:solidFill>
+                      <a:srgbClr val="FFFFFF"/>
+                    </a:solidFill>
+                  </a:tcPr>
+                </a:tc>
+                <a:tc>
+                  <a:txBody>
+                    <a:bodyPr/>
+                    <a:lstStyle/>
+                    <a:p>
+                      <a:pPr algn="l" indent="0" marL="0">
+                        <a:buNone/>
+                      </a:pPr>
+                      <a:r>
+                        <a:rPr lang="en-US" sz="1500" dirty="0">
+                          <a:solidFill>
+                            <a:srgbClr val="15171C"/>
+                          </a:solidFill>
+                          <a:latin typeface="Calibri" pitchFamily="34" charset="0"/>
+                          <a:ea typeface="Calibri" pitchFamily="34" charset="-122"/>
+                          <a:cs typeface="Calibri" pitchFamily="34" charset="-120"/>
+                        </a:rPr>
+                        <a:t>nuclei found, of 110</a:t>
+                      </a:r>
+                      <a:endParaRPr lang="en-US" sz="1500" dirty="0">
+                        <a:latin typeface="Calibri" charset="0"/>
+                        <a:ea typeface="Calibri" charset="0"/>
+                        <a:cs typeface="Calibri" charset="0"/>
+                      </a:endParaRPr>
+                    </a:p>
+                  </a:txBody>
+                  <a:tcPr marL="91440" marR="91440" marT="45720" marB="45720">
+                    <a:lnL w="6350" cap="flat" cmpd="sng" algn="ctr">
+                      <a:solidFill>
+                        <a:srgbClr val="E5E7EB"/>
+                      </a:solidFill>
+                      <a:prstDash val="solid"/>
+                      <a:round/>
+                      <a:headEnd type="none" w="med" len="med"/>
+                      <a:tailEnd type="none" w="med" len="med"/>
+                    </a:lnL>
+                    <a:lnR w="6350" cap="flat" cmpd="sng" algn="ctr">
+                      <a:solidFill>
+                        <a:srgbClr val="E5E7EB"/>
+                      </a:solidFill>
+                      <a:prstDash val="solid"/>
+                      <a:round/>
+                      <a:headEnd type="none" w="med" len="med"/>
+                      <a:tailEnd type="none" w="med" len="med"/>
+                    </a:lnR>
+                    <a:lnT w="6350" cap="flat" cmpd="sng" algn="ctr">
+                      <a:solidFill>
+                        <a:srgbClr val="E5E7EB"/>
+                      </a:solidFill>
+                      <a:prstDash val="solid"/>
+                      <a:round/>
+                      <a:headEnd type="none" w="med" len="med"/>
+                      <a:tailEnd type="none" w="med" len="med"/>
+                    </a:lnT>
+                    <a:lnB w="6350" cap="flat" cmpd="sng" algn="ctr">
+                      <a:solidFill>
+                        <a:srgbClr val="E5E7EB"/>
+                      </a:solidFill>
+                      <a:prstDash val="solid"/>
+                      <a:round/>
+                      <a:headEnd type="none" w="med" len="med"/>
+                      <a:tailEnd type="none" w="med" len="med"/>
+                    </a:lnB>
+                    <a:solidFill>
+                      <a:srgbClr val="FFFFFF"/>
+                    </a:solidFill>
+                  </a:tcPr>
+                </a:tc>
+                <a:tc>
+                  <a:txBody>
+                    <a:bodyPr/>
+                    <a:lstStyle/>
+                    <a:p>
+                      <a:pPr algn="ctr" indent="0" marL="0">
+                        <a:buNone/>
+                      </a:pPr>
+                      <a:r>
+                        <a:rPr lang="en-US" sz="1500" dirty="0">
+                          <a:solidFill>
+                            <a:srgbClr val="15171C"/>
+                          </a:solidFill>
+                          <a:latin typeface="Calibri" pitchFamily="34" charset="0"/>
+                          <a:ea typeface="Calibri" pitchFamily="34" charset="-122"/>
+                          <a:cs typeface="Calibri" pitchFamily="34" charset="-120"/>
+                        </a:rPr>
+                        <a:t>52%</a:t>
+                      </a:r>
+                      <a:endParaRPr lang="en-US" sz="1500" dirty="0">
+                        <a:latin typeface="Calibri" charset="0"/>
+                        <a:ea typeface="Calibri" charset="0"/>
+                        <a:cs typeface="Calibri" charset="0"/>
+                      </a:endParaRPr>
+                    </a:p>
+                  </a:txBody>
+                  <a:tcPr marL="91440" marR="91440" marT="45720" marB="45720">
+                    <a:lnL w="6350" cap="flat" cmpd="sng" algn="ctr">
+                      <a:solidFill>
+                        <a:srgbClr val="E5E7EB"/>
+                      </a:solidFill>
+                      <a:prstDash val="solid"/>
+                      <a:round/>
+                      <a:headEnd type="none" w="med" len="med"/>
+                      <a:tailEnd type="none" w="med" len="med"/>
+                    </a:lnL>
+                    <a:lnR w="6350" cap="flat" cmpd="sng" algn="ctr">
+                      <a:solidFill>
+                        <a:srgbClr val="E5E7EB"/>
+                      </a:solidFill>
+                      <a:prstDash val="solid"/>
+                      <a:round/>
+                      <a:headEnd type="none" w="med" len="med"/>
+                      <a:tailEnd type="none" w="med" len="med"/>
+                    </a:lnR>
+                    <a:lnT w="6350" cap="flat" cmpd="sng" algn="ctr">
+                      <a:solidFill>
+                        <a:srgbClr val="E5E7EB"/>
+                      </a:solidFill>
+                      <a:prstDash val="solid"/>
+                      <a:round/>
+                      <a:headEnd type="none" w="med" len="med"/>
+                      <a:tailEnd type="none" w="med" len="med"/>
+                    </a:lnT>
+                    <a:lnB w="6350" cap="flat" cmpd="sng" algn="ctr">
+                      <a:solidFill>
+                        <a:srgbClr val="E5E7EB"/>
+                      </a:solidFill>
+                      <a:prstDash val="solid"/>
+                      <a:round/>
+                      <a:headEnd type="none" w="med" len="med"/>
+                      <a:tailEnd type="none" w="med" len="med"/>
+                    </a:lnB>
+                    <a:solidFill>
+                      <a:srgbClr val="FFFFFF"/>
+                    </a:solidFill>
+                  </a:tcPr>
+                </a:tc>
+                <a:tc>
+                  <a:txBody>
+                    <a:bodyPr/>
+                    <a:lstStyle/>
+                    <a:p>
+                      <a:pPr algn="ctr" indent="0" marL="0">
+                        <a:buNone/>
+                      </a:pPr>
+                      <a:r>
+                        <a:rPr lang="en-US" sz="1500" b="1" dirty="0">
+                          <a:solidFill>
+                            <a:srgbClr val="E8730C"/>
+                          </a:solidFill>
+                          <a:latin typeface="Calibri" pitchFamily="34" charset="0"/>
+                          <a:ea typeface="Calibri" pitchFamily="34" charset="-122"/>
+                          <a:cs typeface="Calibri" pitchFamily="34" charset="-120"/>
+                        </a:rPr>
+                        <a:t>71%</a:t>
+                      </a:r>
+                      <a:endParaRPr lang="en-US" sz="1500" dirty="0">
+                        <a:latin typeface="Calibri" charset="0"/>
+                        <a:ea typeface="Calibri" charset="0"/>
+                        <a:cs typeface="Calibri" charset="0"/>
+                      </a:endParaRPr>
+                    </a:p>
+                  </a:txBody>
+                  <a:tcPr marL="91440" marR="91440" marT="45720" marB="45720">
+                    <a:lnL w="6350" cap="flat" cmpd="sng" algn="ctr">
+                      <a:solidFill>
+                        <a:srgbClr val="E5E7EB"/>
+                      </a:solidFill>
+                      <a:prstDash val="solid"/>
+                      <a:round/>
+                      <a:headEnd type="none" w="med" len="med"/>
+                      <a:tailEnd type="none" w="med" len="med"/>
+                    </a:lnL>
+                    <a:lnR w="6350" cap="flat" cmpd="sng" algn="ctr">
+                      <a:solidFill>
+                        <a:srgbClr val="E5E7EB"/>
+                      </a:solidFill>
+                      <a:prstDash val="solid"/>
+                      <a:round/>
+                      <a:headEnd type="none" w="med" len="med"/>
+                      <a:tailEnd type="none" w="med" len="med"/>
+                    </a:lnR>
+                    <a:lnT w="6350" cap="flat" cmpd="sng" algn="ctr">
+                      <a:solidFill>
+                        <a:srgbClr val="E5E7EB"/>
+                      </a:solidFill>
+                      <a:prstDash val="solid"/>
+                      <a:round/>
+                      <a:headEnd type="none" w="med" len="med"/>
+                      <a:tailEnd type="none" w="med" len="med"/>
+                    </a:lnT>
+                    <a:lnB w="6350" cap="flat" cmpd="sng" algn="ctr">
+                      <a:solidFill>
+                        <a:srgbClr val="E5E7EB"/>
+                      </a:solidFill>
+                      <a:prstDash val="solid"/>
+                      <a:round/>
+                      <a:headEnd type="none" w="med" len="med"/>
+                      <a:tailEnd type="none" w="med" len="med"/>
+                    </a:lnB>
+                    <a:solidFill>
+                      <a:srgbClr val="FFFFFF"/>
+                    </a:solidFill>
+                  </a:tcPr>
+                </a:tc>
+              </a:tr>
+              <a:tr h="393192">
+                <a:tc>
+                  <a:txBody>
+                    <a:bodyPr/>
+                    <a:lstStyle/>
+                    <a:p>
+                      <a:pPr algn="l" indent="0" marL="0">
+                        <a:buNone/>
+                      </a:pPr>
+                      <a:r>
+                        <a:rPr lang="en-US" sz="1500" dirty="0">
+                          <a:solidFill>
+                            <a:srgbClr val="15171C"/>
+                          </a:solidFill>
+                          <a:latin typeface="Calibri" pitchFamily="34" charset="0"/>
+                          <a:ea typeface="Calibri" pitchFamily="34" charset="-122"/>
+                          <a:cs typeface="Calibri" pitchFamily="34" charset="-120"/>
+                        </a:rPr>
+                        <a:t>Bigger position steps</a:t>
+                      </a:r>
+                      <a:endParaRPr lang="en-US" sz="1500" dirty="0">
+                        <a:latin typeface="Calibri" charset="0"/>
+                        <a:ea typeface="Calibri" charset="0"/>
+                        <a:cs typeface="Calibri" charset="0"/>
+                      </a:endParaRPr>
+                    </a:p>
+                  </a:txBody>
+                  <a:tcPr marL="91440" marR="91440" marT="45720" marB="45720">
+                    <a:lnL w="6350" cap="flat" cmpd="sng" algn="ctr">
+                      <a:solidFill>
+                        <a:srgbClr val="E5E7EB"/>
+                      </a:solidFill>
+                      <a:prstDash val="solid"/>
+                      <a:round/>
+                      <a:headEnd type="none" w="med" len="med"/>
+                      <a:tailEnd type="none" w="med" len="med"/>
+                    </a:lnL>
+                    <a:lnR w="6350" cap="flat" cmpd="sng" algn="ctr">
+                      <a:solidFill>
+                        <a:srgbClr val="E5E7EB"/>
+                      </a:solidFill>
+                      <a:prstDash val="solid"/>
+                      <a:round/>
+                      <a:headEnd type="none" w="med" len="med"/>
+                      <a:tailEnd type="none" w="med" len="med"/>
+                    </a:lnR>
+                    <a:lnT w="6350" cap="flat" cmpd="sng" algn="ctr">
+                      <a:solidFill>
+                        <a:srgbClr val="E5E7EB"/>
+                      </a:solidFill>
+                      <a:prstDash val="solid"/>
+                      <a:round/>
+                      <a:headEnd type="none" w="med" len="med"/>
+                      <a:tailEnd type="none" w="med" len="med"/>
+                    </a:lnT>
+                    <a:lnB w="6350" cap="flat" cmpd="sng" algn="ctr">
+                      <a:solidFill>
+                        <a:srgbClr val="E5E7EB"/>
+                      </a:solidFill>
+                      <a:prstDash val="solid"/>
+                      <a:round/>
+                      <a:headEnd type="none" w="med" len="med"/>
+                      <a:tailEnd type="none" w="med" len="med"/>
+                    </a:lnB>
+                    <a:solidFill>
+                      <a:srgbClr val="FFFFFF"/>
+                    </a:solidFill>
+                  </a:tcPr>
+                </a:tc>
+                <a:tc>
+                  <a:txBody>
+                    <a:bodyPr/>
+                    <a:lstStyle/>
+                    <a:p>
+                      <a:pPr algn="l" indent="0" marL="0">
+                        <a:buNone/>
+                      </a:pPr>
+                      <a:r>
+                        <a:rPr lang="en-US" sz="1500" dirty="0">
+                          <a:solidFill>
+                            <a:srgbClr val="15171C"/>
+                          </a:solidFill>
+                          <a:latin typeface="Calibri" pitchFamily="34" charset="0"/>
+                          <a:ea typeface="Calibri" pitchFamily="34" charset="-122"/>
+                          <a:cs typeface="Calibri" pitchFamily="34" charset="-120"/>
+                        </a:rPr>
+                        <a:t>us</a:t>
+                      </a:r>
+                      <a:endParaRPr lang="en-US" sz="1500" dirty="0">
+                        <a:latin typeface="Calibri" charset="0"/>
+                        <a:ea typeface="Calibri" charset="0"/>
+                        <a:cs typeface="Calibri" charset="0"/>
+                      </a:endParaRPr>
+                    </a:p>
+                  </a:txBody>
+                  <a:tcPr marL="91440" marR="91440" marT="45720" marB="45720">
+                    <a:lnL w="6350" cap="flat" cmpd="sng" algn="ctr">
+                      <a:solidFill>
+                        <a:srgbClr val="E5E7EB"/>
+                      </a:solidFill>
+                      <a:prstDash val="solid"/>
+                      <a:round/>
+                      <a:headEnd type="none" w="med" len="med"/>
+                      <a:tailEnd type="none" w="med" len="med"/>
+                    </a:lnL>
+                    <a:lnR w="6350" cap="flat" cmpd="sng" algn="ctr">
+                      <a:solidFill>
+                        <a:srgbClr val="E5E7EB"/>
+                      </a:solidFill>
+                      <a:prstDash val="solid"/>
+                      <a:round/>
+                      <a:headEnd type="none" w="med" len="med"/>
+                      <a:tailEnd type="none" w="med" len="med"/>
+                    </a:lnR>
+                    <a:lnT w="6350" cap="flat" cmpd="sng" algn="ctr">
+                      <a:solidFill>
+                        <a:srgbClr val="E5E7EB"/>
+                      </a:solidFill>
+                      <a:prstDash val="solid"/>
+                      <a:round/>
+                      <a:headEnd type="none" w="med" len="med"/>
+                      <a:tailEnd type="none" w="med" len="med"/>
+                    </a:lnT>
+                    <a:lnB w="6350" cap="flat" cmpd="sng" algn="ctr">
+                      <a:solidFill>
+                        <a:srgbClr val="E5E7EB"/>
+                      </a:solidFill>
+                      <a:prstDash val="solid"/>
+                      <a:round/>
+                      <a:headEnd type="none" w="med" len="med"/>
+                      <a:tailEnd type="none" w="med" len="med"/>
+                    </a:lnB>
+                    <a:solidFill>
+                      <a:srgbClr val="FFFFFF"/>
+                    </a:solidFill>
+                  </a:tcPr>
+                </a:tc>
+                <a:tc>
+                  <a:txBody>
+                    <a:bodyPr/>
+                    <a:lstStyle/>
+                    <a:p>
+                      <a:pPr algn="l" indent="0" marL="0">
+                        <a:buNone/>
+                      </a:pPr>
+                      <a:r>
+                        <a:rPr lang="en-US" sz="1500" dirty="0">
+                          <a:solidFill>
+                            <a:srgbClr val="15171C"/>
+                          </a:solidFill>
+                          <a:latin typeface="Calibri" pitchFamily="34" charset="0"/>
+                          <a:ea typeface="Calibri" pitchFamily="34" charset="-122"/>
+                          <a:cs typeface="Calibri" pitchFamily="34" charset="-120"/>
+                        </a:rPr>
+                        <a:t>F1, random starts</a:t>
+                      </a:r>
+                      <a:endParaRPr lang="en-US" sz="1500" dirty="0">
+                        <a:latin typeface="Calibri" charset="0"/>
+                        <a:ea typeface="Calibri" charset="0"/>
+                        <a:cs typeface="Calibri" charset="0"/>
+                      </a:endParaRPr>
+                    </a:p>
+                  </a:txBody>
+                  <a:tcPr marL="91440" marR="91440" marT="45720" marB="45720">
+                    <a:lnL w="6350" cap="flat" cmpd="sng" algn="ctr">
+                      <a:solidFill>
+                        <a:srgbClr val="E5E7EB"/>
+                      </a:solidFill>
+                      <a:prstDash val="solid"/>
+                      <a:round/>
+                      <a:headEnd type="none" w="med" len="med"/>
+                      <a:tailEnd type="none" w="med" len="med"/>
+                    </a:lnL>
+                    <a:lnR w="6350" cap="flat" cmpd="sng" algn="ctr">
+                      <a:solidFill>
+                        <a:srgbClr val="E5E7EB"/>
+                      </a:solidFill>
+                      <a:prstDash val="solid"/>
+                      <a:round/>
+                      <a:headEnd type="none" w="med" len="med"/>
+                      <a:tailEnd type="none" w="med" len="med"/>
+                    </a:lnR>
+                    <a:lnT w="6350" cap="flat" cmpd="sng" algn="ctr">
+                      <a:solidFill>
+                        <a:srgbClr val="E5E7EB"/>
+                      </a:solidFill>
+                      <a:prstDash val="solid"/>
+                      <a:round/>
+                      <a:headEnd type="none" w="med" len="med"/>
+                      <a:tailEnd type="none" w="med" len="med"/>
+                    </a:lnT>
+                    <a:lnB w="6350" cap="flat" cmpd="sng" algn="ctr">
+                      <a:solidFill>
+                        <a:srgbClr val="E5E7EB"/>
+                      </a:solidFill>
+                      <a:prstDash val="solid"/>
+                      <a:round/>
+                      <a:headEnd type="none" w="med" len="med"/>
+                      <a:tailEnd type="none" w="med" len="med"/>
+                    </a:lnB>
+                    <a:solidFill>
+                      <a:srgbClr val="FFFFFF"/>
+                    </a:solidFill>
+                  </a:tcPr>
+                </a:tc>
+                <a:tc>
+                  <a:txBody>
+                    <a:bodyPr/>
+                    <a:lstStyle/>
+                    <a:p>
+                      <a:pPr algn="ctr" indent="0" marL="0">
+                        <a:buNone/>
+                      </a:pPr>
+                      <a:r>
+                        <a:rPr lang="en-US" sz="1500" dirty="0">
+                          <a:solidFill>
+                            <a:srgbClr val="15171C"/>
+                          </a:solidFill>
+                          <a:latin typeface="Calibri" pitchFamily="34" charset="0"/>
+                          <a:ea typeface="Calibri" pitchFamily="34" charset="-122"/>
+                          <a:cs typeface="Calibri" pitchFamily="34" charset="-120"/>
+                        </a:rPr>
+                        <a:t>0.64</a:t>
+                      </a:r>
+                      <a:endParaRPr lang="en-US" sz="1500" dirty="0">
+                        <a:latin typeface="Calibri" charset="0"/>
+                        <a:ea typeface="Calibri" charset="0"/>
+                        <a:cs typeface="Calibri" charset="0"/>
+                      </a:endParaRPr>
+                    </a:p>
+                  </a:txBody>
+                  <a:tcPr marL="91440" marR="91440" marT="45720" marB="45720">
+                    <a:lnL w="6350" cap="flat" cmpd="sng" algn="ctr">
+                      <a:solidFill>
+                        <a:srgbClr val="E5E7EB"/>
+                      </a:solidFill>
+                      <a:prstDash val="solid"/>
+                      <a:round/>
+                      <a:headEnd type="none" w="med" len="med"/>
+                      <a:tailEnd type="none" w="med" len="med"/>
+                    </a:lnL>
+                    <a:lnR w="6350" cap="flat" cmpd="sng" algn="ctr">
+                      <a:solidFill>
+                        <a:srgbClr val="E5E7EB"/>
+                      </a:solidFill>
+                      <a:prstDash val="solid"/>
+                      <a:round/>
+                      <a:headEnd type="none" w="med" len="med"/>
+                      <a:tailEnd type="none" w="med" len="med"/>
+                    </a:lnR>
+                    <a:lnT w="6350" cap="flat" cmpd="sng" algn="ctr">
+                      <a:solidFill>
+                        <a:srgbClr val="E5E7EB"/>
+                      </a:solidFill>
+                      <a:prstDash val="solid"/>
+                      <a:round/>
+                      <a:headEnd type="none" w="med" len="med"/>
+                      <a:tailEnd type="none" w="med" len="med"/>
+                    </a:lnT>
+                    <a:lnB w="6350" cap="flat" cmpd="sng" algn="ctr">
+                      <a:solidFill>
+                        <a:srgbClr val="E5E7EB"/>
+                      </a:solidFill>
+                      <a:prstDash val="solid"/>
+                      <a:round/>
+                      <a:headEnd type="none" w="med" len="med"/>
+                      <a:tailEnd type="none" w="med" len="med"/>
+                    </a:lnB>
+                    <a:solidFill>
+                      <a:srgbClr val="FFFFFF"/>
+                    </a:solidFill>
+                  </a:tcPr>
+                </a:tc>
+                <a:tc>
+                  <a:txBody>
+                    <a:bodyPr/>
+                    <a:lstStyle/>
+                    <a:p>
+                      <a:pPr algn="ctr" indent="0" marL="0">
+                        <a:buNone/>
+                      </a:pPr>
+                      <a:r>
+                        <a:rPr lang="en-US" sz="1500" b="1" dirty="0">
+                          <a:solidFill>
+                            <a:srgbClr val="E8730C"/>
+                          </a:solidFill>
+                          <a:latin typeface="Calibri" pitchFamily="34" charset="0"/>
+                          <a:ea typeface="Calibri" pitchFamily="34" charset="-122"/>
+                          <a:cs typeface="Calibri" pitchFamily="34" charset="-120"/>
+                        </a:rPr>
+                        <a:t>0.78</a:t>
+                      </a:r>
+                      <a:endParaRPr lang="en-US" sz="1500" dirty="0">
+                        <a:latin typeface="Calibri" charset="0"/>
+                        <a:ea typeface="Calibri" charset="0"/>
+                        <a:cs typeface="Calibri" charset="0"/>
+                      </a:endParaRPr>
+                    </a:p>
+                  </a:txBody>
+                  <a:tcPr marL="91440" marR="91440" marT="45720" marB="45720">
+                    <a:lnL w="6350" cap="flat" cmpd="sng" algn="ctr">
+                      <a:solidFill>
+                        <a:srgbClr val="E5E7EB"/>
+                      </a:solidFill>
+                      <a:prstDash val="solid"/>
+                      <a:round/>
+                      <a:headEnd type="none" w="med" len="med"/>
+                      <a:tailEnd type="none" w="med" len="med"/>
+                    </a:lnL>
+                    <a:lnR w="6350" cap="flat" cmpd="sng" algn="ctr">
+                      <a:solidFill>
+                        <a:srgbClr val="E5E7EB"/>
+                      </a:solidFill>
+                      <a:prstDash val="solid"/>
+                      <a:round/>
+                      <a:headEnd type="none" w="med" len="med"/>
+                      <a:tailEnd type="none" w="med" len="med"/>
+                    </a:lnR>
+                    <a:lnT w="6350" cap="flat" cmpd="sng" algn="ctr">
+                      <a:solidFill>
+                        <a:srgbClr val="E5E7EB"/>
+                      </a:solidFill>
+                      <a:prstDash val="solid"/>
+                      <a:round/>
+                      <a:headEnd type="none" w="med" len="med"/>
+                      <a:tailEnd type="none" w="med" len="med"/>
+                    </a:lnT>
+                    <a:lnB w="6350" cap="flat" cmpd="sng" algn="ctr">
+                      <a:solidFill>
+                        <a:srgbClr val="E5E7EB"/>
+                      </a:solidFill>
+                      <a:prstDash val="solid"/>
+                      <a:round/>
+                      <a:headEnd type="none" w="med" len="med"/>
+                      <a:tailEnd type="none" w="med" len="med"/>
+                    </a:lnB>
+                    <a:solidFill>
+                      <a:srgbClr val="FFFFFF"/>
+                    </a:solidFill>
+                  </a:tcPr>
+                </a:tc>
+              </a:tr>
+              <a:tr h="393192">
+                <a:tc>
+                  <a:txBody>
+                    <a:bodyPr/>
+                    <a:lstStyle/>
+                    <a:p>
+                      <a:pPr algn="l" indent="0" marL="0">
+                        <a:buNone/>
+                      </a:pPr>
+                      <a:r>
+                        <a:rPr lang="en-US" sz="1500" dirty="0">
+                          <a:solidFill>
+                            <a:srgbClr val="15171C"/>
+                          </a:solidFill>
+                          <a:latin typeface="Calibri" pitchFamily="34" charset="0"/>
+                          <a:ea typeface="Calibri" pitchFamily="34" charset="-122"/>
+                          <a:cs typeface="Calibri" pitchFamily="34" charset="-120"/>
+                        </a:rPr>
+                        <a:t>Size cap</a:t>
+                      </a:r>
+                      <a:endParaRPr lang="en-US" sz="1500" dirty="0">
+                        <a:latin typeface="Calibri" charset="0"/>
+                        <a:ea typeface="Calibri" charset="0"/>
+                        <a:cs typeface="Calibri" charset="0"/>
+                      </a:endParaRPr>
+                    </a:p>
+                  </a:txBody>
+                  <a:tcPr marL="91440" marR="91440" marT="45720" marB="45720">
+                    <a:lnL w="6350" cap="flat" cmpd="sng" algn="ctr">
+                      <a:solidFill>
+                        <a:srgbClr val="E5E7EB"/>
+                      </a:solidFill>
+                      <a:prstDash val="solid"/>
+                      <a:round/>
+                      <a:headEnd type="none" w="med" len="med"/>
+                      <a:tailEnd type="none" w="med" len="med"/>
+                    </a:lnL>
+                    <a:lnR w="6350" cap="flat" cmpd="sng" algn="ctr">
+                      <a:solidFill>
+                        <a:srgbClr val="E5E7EB"/>
+                      </a:solidFill>
+                      <a:prstDash val="solid"/>
+                      <a:round/>
+                      <a:headEnd type="none" w="med" len="med"/>
+                      <a:tailEnd type="none" w="med" len="med"/>
+                    </a:lnR>
+                    <a:lnT w="6350" cap="flat" cmpd="sng" algn="ctr">
+                      <a:solidFill>
+                        <a:srgbClr val="E5E7EB"/>
+                      </a:solidFill>
+                      <a:prstDash val="solid"/>
+                      <a:round/>
+                      <a:headEnd type="none" w="med" len="med"/>
+                      <a:tailEnd type="none" w="med" len="med"/>
+                    </a:lnT>
+                    <a:lnB w="6350" cap="flat" cmpd="sng" algn="ctr">
+                      <a:solidFill>
+                        <a:srgbClr val="E5E7EB"/>
+                      </a:solidFill>
+                      <a:prstDash val="solid"/>
+                      <a:round/>
+                      <a:headEnd type="none" w="med" len="med"/>
+                      <a:tailEnd type="none" w="med" len="med"/>
+                    </a:lnB>
+                    <a:solidFill>
+                      <a:srgbClr val="FFFFFF"/>
+                    </a:solidFill>
+                  </a:tcPr>
+                </a:tc>
+                <a:tc>
+                  <a:txBody>
+                    <a:bodyPr/>
+                    <a:lstStyle/>
+                    <a:p>
+                      <a:pPr algn="l" indent="0" marL="0">
+                        <a:buNone/>
+                      </a:pPr>
+                      <a:r>
+                        <a:rPr lang="en-US" sz="1500" dirty="0">
+                          <a:solidFill>
+                            <a:srgbClr val="15171C"/>
+                          </a:solidFill>
+                          <a:latin typeface="Calibri" pitchFamily="34" charset="0"/>
+                          <a:ea typeface="Calibri" pitchFamily="34" charset="-122"/>
+                          <a:cs typeface="Calibri" pitchFamily="34" charset="-120"/>
+                        </a:rPr>
+                        <a:t>us</a:t>
+                      </a:r>
+                      <a:endParaRPr lang="en-US" sz="1500" dirty="0">
+                        <a:latin typeface="Calibri" charset="0"/>
+                        <a:ea typeface="Calibri" charset="0"/>
+                        <a:cs typeface="Calibri" charset="0"/>
+                      </a:endParaRPr>
+                    </a:p>
+                  </a:txBody>
+                  <a:tcPr marL="91440" marR="91440" marT="45720" marB="45720">
+                    <a:lnL w="6350" cap="flat" cmpd="sng" algn="ctr">
+                      <a:solidFill>
+                        <a:srgbClr val="E5E7EB"/>
+                      </a:solidFill>
+                      <a:prstDash val="solid"/>
+                      <a:round/>
+                      <a:headEnd type="none" w="med" len="med"/>
+                      <a:tailEnd type="none" w="med" len="med"/>
+                    </a:lnL>
+                    <a:lnR w="6350" cap="flat" cmpd="sng" algn="ctr">
+                      <a:solidFill>
+                        <a:srgbClr val="E5E7EB"/>
+                      </a:solidFill>
+                      <a:prstDash val="solid"/>
+                      <a:round/>
+                      <a:headEnd type="none" w="med" len="med"/>
+                      <a:tailEnd type="none" w="med" len="med"/>
+                    </a:lnR>
+                    <a:lnT w="6350" cap="flat" cmpd="sng" algn="ctr">
+                      <a:solidFill>
+                        <a:srgbClr val="E5E7EB"/>
+                      </a:solidFill>
+                      <a:prstDash val="solid"/>
+                      <a:round/>
+                      <a:headEnd type="none" w="med" len="med"/>
+                      <a:tailEnd type="none" w="med" len="med"/>
+                    </a:lnT>
+                    <a:lnB w="6350" cap="flat" cmpd="sng" algn="ctr">
+                      <a:solidFill>
+                        <a:srgbClr val="E5E7EB"/>
+                      </a:solidFill>
+                      <a:prstDash val="solid"/>
+                      <a:round/>
+                      <a:headEnd type="none" w="med" len="med"/>
+                      <a:tailEnd type="none" w="med" len="med"/>
+                    </a:lnB>
+                    <a:solidFill>
+                      <a:srgbClr val="FFFFFF"/>
+                    </a:solidFill>
+                  </a:tcPr>
+                </a:tc>
+                <a:tc>
+                  <a:txBody>
+                    <a:bodyPr/>
+                    <a:lstStyle/>
+                    <a:p>
+                      <a:pPr algn="l" indent="0" marL="0">
+                        <a:buNone/>
+                      </a:pPr>
+                      <a:r>
+                        <a:rPr lang="en-US" sz="1500" dirty="0">
+                          <a:solidFill>
+                            <a:srgbClr val="15171C"/>
+                          </a:solidFill>
+                          <a:latin typeface="Calibri" pitchFamily="34" charset="0"/>
+                          <a:ea typeface="Calibri" pitchFamily="34" charset="-122"/>
+                          <a:cs typeface="Calibri" pitchFamily="34" charset="-120"/>
+                        </a:rPr>
+                        <a:t>faint nuclei found, of 31</a:t>
+                      </a:r>
+                      <a:endParaRPr lang="en-US" sz="1500" dirty="0">
+                        <a:latin typeface="Calibri" charset="0"/>
+                        <a:ea typeface="Calibri" charset="0"/>
+                        <a:cs typeface="Calibri" charset="0"/>
+                      </a:endParaRPr>
+                    </a:p>
+                  </a:txBody>
+                  <a:tcPr marL="91440" marR="91440" marT="45720" marB="45720">
+                    <a:lnL w="6350" cap="flat" cmpd="sng" algn="ctr">
+                      <a:solidFill>
+                        <a:srgbClr val="E5E7EB"/>
+                      </a:solidFill>
+                      <a:prstDash val="solid"/>
+                      <a:round/>
+                      <a:headEnd type="none" w="med" len="med"/>
+                      <a:tailEnd type="none" w="med" len="med"/>
+                    </a:lnL>
+                    <a:lnR w="6350" cap="flat" cmpd="sng" algn="ctr">
+                      <a:solidFill>
+                        <a:srgbClr val="E5E7EB"/>
+                      </a:solidFill>
+                      <a:prstDash val="solid"/>
+                      <a:round/>
+                      <a:headEnd type="none" w="med" len="med"/>
+                      <a:tailEnd type="none" w="med" len="med"/>
+                    </a:lnR>
+                    <a:lnT w="6350" cap="flat" cmpd="sng" algn="ctr">
+                      <a:solidFill>
+                        <a:srgbClr val="E5E7EB"/>
+                      </a:solidFill>
+                      <a:prstDash val="solid"/>
+                      <a:round/>
+                      <a:headEnd type="none" w="med" len="med"/>
+                      <a:tailEnd type="none" w="med" len="med"/>
+                    </a:lnT>
+                    <a:lnB w="6350" cap="flat" cmpd="sng" algn="ctr">
+                      <a:solidFill>
+                        <a:srgbClr val="E5E7EB"/>
+                      </a:solidFill>
+                      <a:prstDash val="solid"/>
+                      <a:round/>
+                      <a:headEnd type="none" w="med" len="med"/>
+                      <a:tailEnd type="none" w="med" len="med"/>
+                    </a:lnB>
+                    <a:solidFill>
+                      <a:srgbClr val="FFFFFF"/>
+                    </a:solidFill>
+                  </a:tcPr>
+                </a:tc>
+                <a:tc>
+                  <a:txBody>
+                    <a:bodyPr/>
+                    <a:lstStyle/>
+                    <a:p>
+                      <a:pPr algn="ctr" indent="0" marL="0">
+                        <a:buNone/>
+                      </a:pPr>
+                      <a:r>
+                        <a:rPr lang="en-US" sz="1500" dirty="0">
+                          <a:solidFill>
+                            <a:srgbClr val="15171C"/>
+                          </a:solidFill>
+                          <a:latin typeface="Calibri" pitchFamily="34" charset="0"/>
+                          <a:ea typeface="Calibri" pitchFamily="34" charset="-122"/>
+                          <a:cs typeface="Calibri" pitchFamily="34" charset="-120"/>
+                        </a:rPr>
+                        <a:t>13</a:t>
+                      </a:r>
+                      <a:endParaRPr lang="en-US" sz="1500" dirty="0">
+                        <a:latin typeface="Calibri" charset="0"/>
+                        <a:ea typeface="Calibri" charset="0"/>
+                        <a:cs typeface="Calibri" charset="0"/>
+                      </a:endParaRPr>
+                    </a:p>
+                  </a:txBody>
+                  <a:tcPr marL="91440" marR="91440" marT="45720" marB="45720">
+                    <a:lnL w="6350" cap="flat" cmpd="sng" algn="ctr">
+                      <a:solidFill>
+                        <a:srgbClr val="E5E7EB"/>
+                      </a:solidFill>
+                      <a:prstDash val="solid"/>
+                      <a:round/>
+                      <a:headEnd type="none" w="med" len="med"/>
+                      <a:tailEnd type="none" w="med" len="med"/>
+                    </a:lnL>
+                    <a:lnR w="6350" cap="flat" cmpd="sng" algn="ctr">
+                      <a:solidFill>
+                        <a:srgbClr val="E5E7EB"/>
+                      </a:solidFill>
+                      <a:prstDash val="solid"/>
+                      <a:round/>
+                      <a:headEnd type="none" w="med" len="med"/>
+                      <a:tailEnd type="none" w="med" len="med"/>
+                    </a:lnR>
+                    <a:lnT w="6350" cap="flat" cmpd="sng" algn="ctr">
+                      <a:solidFill>
+                        <a:srgbClr val="E5E7EB"/>
+                      </a:solidFill>
+                      <a:prstDash val="solid"/>
+                      <a:round/>
+                      <a:headEnd type="none" w="med" len="med"/>
+                      <a:tailEnd type="none" w="med" len="med"/>
+                    </a:lnT>
+                    <a:lnB w="6350" cap="flat" cmpd="sng" algn="ctr">
+                      <a:solidFill>
+                        <a:srgbClr val="E5E7EB"/>
+                      </a:solidFill>
+                      <a:prstDash val="solid"/>
+                      <a:round/>
+                      <a:headEnd type="none" w="med" len="med"/>
+                      <a:tailEnd type="none" w="med" len="med"/>
+                    </a:lnB>
+                    <a:solidFill>
+                      <a:srgbClr val="FFFFFF"/>
+                    </a:solidFill>
+                  </a:tcPr>
+                </a:tc>
+                <a:tc>
+                  <a:txBody>
+                    <a:bodyPr/>
+                    <a:lstStyle/>
+                    <a:p>
+                      <a:pPr algn="ctr" indent="0" marL="0">
+                        <a:buNone/>
+                      </a:pPr>
+                      <a:r>
+                        <a:rPr lang="en-US" sz="1500" b="1" dirty="0">
+                          <a:solidFill>
+                            <a:srgbClr val="E8730C"/>
+                          </a:solidFill>
+                          <a:latin typeface="Calibri" pitchFamily="34" charset="0"/>
+                          <a:ea typeface="Calibri" pitchFamily="34" charset="-122"/>
+                          <a:cs typeface="Calibri" pitchFamily="34" charset="-120"/>
+                        </a:rPr>
+                        <a:t>19</a:t>
+                      </a:r>
+                      <a:endParaRPr lang="en-US" sz="1500" dirty="0">
+                        <a:latin typeface="Calibri" charset="0"/>
+                        <a:ea typeface="Calibri" charset="0"/>
+                        <a:cs typeface="Calibri" charset="0"/>
+                      </a:endParaRPr>
+                    </a:p>
+                  </a:txBody>
+                  <a:tcPr marL="91440" marR="91440" marT="45720" marB="45720">
+                    <a:lnL w="6350" cap="flat" cmpd="sng" algn="ctr">
+                      <a:solidFill>
+                        <a:srgbClr val="E5E7EB"/>
+                      </a:solidFill>
+                      <a:prstDash val="solid"/>
+                      <a:round/>
+                      <a:headEnd type="none" w="med" len="med"/>
+                      <a:tailEnd type="none" w="med" len="med"/>
+                    </a:lnL>
+                    <a:lnR w="6350" cap="flat" cmpd="sng" algn="ctr">
+                      <a:solidFill>
+                        <a:srgbClr val="E5E7EB"/>
+                      </a:solidFill>
+                      <a:prstDash val="solid"/>
+                      <a:round/>
+                      <a:headEnd type="none" w="med" len="med"/>
+                      <a:tailEnd type="none" w="med" len="med"/>
+                    </a:lnR>
+                    <a:lnT w="6350" cap="flat" cmpd="sng" algn="ctr">
+                      <a:solidFill>
+                        <a:srgbClr val="E5E7EB"/>
+                      </a:solidFill>
+                      <a:prstDash val="solid"/>
+                      <a:round/>
+                      <a:headEnd type="none" w="med" len="med"/>
+                      <a:tailEnd type="none" w="med" len="med"/>
+                    </a:lnT>
+                    <a:lnB w="6350" cap="flat" cmpd="sng" algn="ctr">
+                      <a:solidFill>
+                        <a:srgbClr val="E5E7EB"/>
+                      </a:solidFill>
+                      <a:prstDash val="solid"/>
+                      <a:round/>
+                      <a:headEnd type="none" w="med" len="med"/>
+                      <a:tailEnd type="none" w="med" len="med"/>
+                    </a:lnB>
+                    <a:solidFill>
+                      <a:srgbClr val="FFFFFF"/>
+                    </a:solidFill>
+                  </a:tcPr>
+                </a:tc>
+              </a:tr>
+            </a:tbl>
+          </a:graphicData>
+        </a:graphic>
+      </p:graphicFrame>
+      <p:sp>
+        <p:nvSpPr>
+          <p:cNvPr id="4" name="Text 1"/>
           <p:cNvSpPr txBox="1"/>
           <p:nvPr/>
         </p:nvSpPr>
         <p:spPr>
           <a:xfrm>
-            <a:off x="457200" y="1024128"/>
-            <a:ext cx="2011680" cy="274320"/>
-          </a:xfrm>
-          <a:prstGeom prst="rect">
-            <a:avLst/>
-          </a:prstGeom>
-          <a:noFill/>
-          <a:ln/>
-        </p:spPr>
-        <p:txBody>
-          <a:bodyPr wrap="square" lIns="0" tIns="0" rIns="0" bIns="0" rtlCol="0" anchor="t"/>
-          <a:lstStyle/>
-          <a:p>
-            <a:pPr algn="ctr" indent="0" marL="0">
-              <a:buNone/>
-            </a:pPr>
-            <a:r>
-              <a:rPr lang="en-US" sz="1400" b="1" dirty="0">
-                <a:solidFill>
-                  <a:schemeClr val="tx1"/>
-                </a:solidFill>
-              </a:rPr>
-              <a:t>Original</a:t>
-            </a:r>
-            <a:endParaRPr lang="en-US" sz="1400" dirty="0"/>
-          </a:p>
-        </p:txBody>
-      </p:sp>
-      <p:pic>
-        <p:nvPicPr>
-          <p:cNvPr id="4" name="four-raw" descr="D:\masters\MLCV seminar\TeamProject\presentation\figs\four_raw.png">    </p:cNvPr>
-          <p:cNvPicPr>
-            <a:picLocks noChangeAspect="1"/>
-          </p:cNvPicPr>
-          <p:nvPr/>
-        </p:nvPicPr>
-        <p:blipFill>
-          <a:blip r:embed="rId1"/>
-          <a:stretch>
-            <a:fillRect/>
-          </a:stretch>
-        </p:blipFill>
-        <p:spPr>
-          <a:xfrm>
-            <a:off x="457200" y="1325880"/>
-            <a:ext cx="2011680" cy="1536192"/>
-          </a:xfrm>
-          <a:prstGeom prst="rect">
-            <a:avLst/>
-          </a:prstGeom>
-        </p:spPr>
-      </p:pic>
-      <p:sp>
-        <p:nvSpPr>
-          <p:cNvPr id="5" name="Text 2"/>
-          <p:cNvSpPr txBox="1"/>
-          <p:nvPr/>
-        </p:nvSpPr>
-        <p:spPr>
-          <a:xfrm>
-            <a:off x="2532888" y="1024128"/>
-            <a:ext cx="2011680" cy="274320"/>
-          </a:xfrm>
-          <a:prstGeom prst="rect">
-            <a:avLst/>
-          </a:prstGeom>
-          <a:noFill/>
-          <a:ln/>
-        </p:spPr>
-        <p:txBody>
-          <a:bodyPr wrap="square" lIns="0" tIns="0" rIns="0" bIns="0" rtlCol="0" anchor="t"/>
-          <a:lstStyle/>
-          <a:p>
-            <a:pPr algn="ctr" indent="0" marL="0">
-              <a:buNone/>
-            </a:pPr>
-            <a:r>
-              <a:rPr lang="en-US" sz="1400" b="1" dirty="0">
-                <a:solidFill>
-                  <a:schemeClr val="tx1"/>
-                </a:solidFill>
-              </a:rPr>
-              <a:t>JPEG-XL 82×</a:t>
-            </a:r>
-            <a:endParaRPr lang="en-US" sz="1400" dirty="0"/>
-          </a:p>
-        </p:txBody>
-      </p:sp>
-      <p:pic>
-        <p:nvPicPr>
-          <p:cNvPr id="6" name="four-jpegxl" descr="D:\masters\MLCV seminar\TeamProject\presentation\figs\four_jpegxl.png">    </p:cNvPr>
-          <p:cNvPicPr>
-            <a:picLocks noChangeAspect="1"/>
-          </p:cNvPicPr>
-          <p:nvPr/>
-        </p:nvPicPr>
-        <p:blipFill>
-          <a:blip r:embed="rId2"/>
-          <a:stretch>
-            <a:fillRect/>
-          </a:stretch>
-        </p:blipFill>
-        <p:spPr>
-          <a:xfrm>
-            <a:off x="2532888" y="1325880"/>
-            <a:ext cx="2011680" cy="1536192"/>
-          </a:xfrm>
-          <a:prstGeom prst="rect">
-            <a:avLst/>
-          </a:prstGeom>
-        </p:spPr>
-      </p:pic>
-      <p:sp>
-        <p:nvSpPr>
-          <p:cNvPr id="7" name="Text 3"/>
-          <p:cNvSpPr txBox="1"/>
-          <p:nvPr/>
-        </p:nvSpPr>
-        <p:spPr>
-          <a:xfrm>
-            <a:off x="2532888" y="2880360"/>
-            <a:ext cx="2011680" cy="256032"/>
-          </a:xfrm>
-          <a:prstGeom prst="rect">
-            <a:avLst/>
-          </a:prstGeom>
-          <a:noFill/>
-          <a:ln/>
-        </p:spPr>
-        <p:txBody>
-          <a:bodyPr wrap="square" lIns="0" tIns="0" rIns="0" bIns="0" rtlCol="0" anchor="t"/>
-          <a:lstStyle/>
-          <a:p>
-            <a:pPr algn="ctr" indent="0" marL="0">
-              <a:buNone/>
-            </a:pPr>
-            <a:r>
-              <a:rPr lang="en-US" sz="1200" dirty="0">
-                <a:solidFill>
-                  <a:schemeClr val="accent5"/>
-                </a:solidFill>
-              </a:rPr>
-              <a:t>100% of nuclei kept</a:t>
-            </a:r>
-            <a:endParaRPr lang="en-US" sz="1200" dirty="0"/>
-          </a:p>
-        </p:txBody>
-      </p:sp>
-      <p:sp>
-        <p:nvSpPr>
-          <p:cNvPr id="8" name="Text 4"/>
-          <p:cNvSpPr txBox="1"/>
-          <p:nvPr/>
-        </p:nvSpPr>
-        <p:spPr>
-          <a:xfrm>
-            <a:off x="4608576" y="1024128"/>
-            <a:ext cx="2011680" cy="274320"/>
-          </a:xfrm>
-          <a:prstGeom prst="rect">
-            <a:avLst/>
-          </a:prstGeom>
-          <a:noFill/>
-          <a:ln/>
-        </p:spPr>
-        <p:txBody>
-          <a:bodyPr wrap="square" lIns="0" tIns="0" rIns="0" bIns="0" rtlCol="0" anchor="t"/>
-          <a:lstStyle/>
-          <a:p>
-            <a:pPr algn="ctr" indent="0" marL="0">
-              <a:buNone/>
-            </a:pPr>
-            <a:r>
-              <a:rPr lang="en-US" sz="1400" b="1" dirty="0">
-                <a:solidFill>
-                  <a:schemeClr val="tx1"/>
-                </a:solidFill>
-              </a:rPr>
-              <a:t>JPEG2000 89×</a:t>
-            </a:r>
-            <a:endParaRPr lang="en-US" sz="1400" dirty="0"/>
-          </a:p>
-        </p:txBody>
-      </p:sp>
-      <p:pic>
-        <p:nvPicPr>
-          <p:cNvPr id="9" name="four-jpeg2k" descr="D:\masters\MLCV seminar\TeamProject\presentation\figs\four_jpeg2k.png">    </p:cNvPr>
-          <p:cNvPicPr>
-            <a:picLocks noChangeAspect="1"/>
-          </p:cNvPicPr>
-          <p:nvPr/>
-        </p:nvPicPr>
-        <p:blipFill>
-          <a:blip r:embed="rId3"/>
-          <a:stretch>
-            <a:fillRect/>
-          </a:stretch>
-        </p:blipFill>
-        <p:spPr>
-          <a:xfrm>
-            <a:off x="4608576" y="1325880"/>
-            <a:ext cx="2011680" cy="1536192"/>
-          </a:xfrm>
-          <a:prstGeom prst="rect">
-            <a:avLst/>
-          </a:prstGeom>
-        </p:spPr>
-      </p:pic>
-      <p:sp>
-        <p:nvSpPr>
-          <p:cNvPr id="10" name="Text 5"/>
-          <p:cNvSpPr txBox="1"/>
-          <p:nvPr/>
-        </p:nvSpPr>
-        <p:spPr>
-          <a:xfrm>
-            <a:off x="4608576" y="2880360"/>
-            <a:ext cx="2011680" cy="256032"/>
-          </a:xfrm>
-          <a:prstGeom prst="rect">
-            <a:avLst/>
-          </a:prstGeom>
-          <a:noFill/>
-          <a:ln/>
-        </p:spPr>
-        <p:txBody>
-          <a:bodyPr wrap="square" lIns="0" tIns="0" rIns="0" bIns="0" rtlCol="0" anchor="t"/>
-          <a:lstStyle/>
-          <a:p>
-            <a:pPr algn="ctr" indent="0" marL="0">
-              <a:buNone/>
-            </a:pPr>
-            <a:r>
-              <a:rPr lang="en-US" sz="1200" dirty="0">
-                <a:solidFill>
-                  <a:schemeClr val="accent5"/>
-                </a:solidFill>
-              </a:rPr>
-              <a:t>97% of nuclei kept</a:t>
-            </a:r>
-            <a:endParaRPr lang="en-US" sz="1200" dirty="0"/>
-          </a:p>
-        </p:txBody>
-      </p:sp>
-      <p:sp>
-        <p:nvSpPr>
-          <p:cNvPr id="11" name="Text 6"/>
-          <p:cNvSpPr txBox="1"/>
-          <p:nvPr/>
-        </p:nvSpPr>
-        <p:spPr>
-          <a:xfrm>
-            <a:off x="6684264" y="1024128"/>
-            <a:ext cx="2011680" cy="274320"/>
-          </a:xfrm>
-          <a:prstGeom prst="rect">
-            <a:avLst/>
-          </a:prstGeom>
-          <a:noFill/>
-          <a:ln/>
-        </p:spPr>
-        <p:txBody>
-          <a:bodyPr wrap="square" lIns="0" tIns="0" rIns="0" bIns="0" rtlCol="0" anchor="t"/>
-          <a:lstStyle/>
-          <a:p>
-            <a:pPr algn="ctr" indent="0" marL="0">
-              <a:buNone/>
-            </a:pPr>
-            <a:r>
-              <a:rPr lang="en-US" sz="1400" b="1" dirty="0">
-                <a:solidFill>
-                  <a:schemeClr val="tx1"/>
-                </a:solidFill>
-              </a:rPr>
-              <a:t>Luxar 89×</a:t>
-            </a:r>
-            <a:endParaRPr lang="en-US" sz="1400" dirty="0"/>
-          </a:p>
-        </p:txBody>
-      </p:sp>
-      <p:pic>
-        <p:nvPicPr>
-          <p:cNvPr id="12" name="four-luxar" descr="D:\masters\MLCV seminar\TeamProject\presentation\figs\four_luxar.png">    </p:cNvPr>
-          <p:cNvPicPr>
-            <a:picLocks noChangeAspect="1"/>
-          </p:cNvPicPr>
-          <p:nvPr/>
-        </p:nvPicPr>
-        <p:blipFill>
-          <a:blip r:embed="rId4"/>
-          <a:stretch>
-            <a:fillRect/>
-          </a:stretch>
-        </p:blipFill>
-        <p:spPr>
-          <a:xfrm>
-            <a:off x="6684264" y="1325880"/>
-            <a:ext cx="2011680" cy="1536192"/>
-          </a:xfrm>
-          <a:prstGeom prst="rect">
-            <a:avLst/>
-          </a:prstGeom>
-        </p:spPr>
-      </p:pic>
-      <p:sp>
-        <p:nvSpPr>
-          <p:cNvPr id="13" name="Text 7"/>
-          <p:cNvSpPr txBox="1"/>
-          <p:nvPr/>
-        </p:nvSpPr>
-        <p:spPr>
-          <a:xfrm>
-            <a:off x="6684264" y="2880360"/>
-            <a:ext cx="2011680" cy="256032"/>
-          </a:xfrm>
-          <a:prstGeom prst="rect">
-            <a:avLst/>
-          </a:prstGeom>
-          <a:noFill/>
-          <a:ln/>
-        </p:spPr>
-        <p:txBody>
-          <a:bodyPr wrap="square" lIns="0" tIns="0" rIns="0" bIns="0" rtlCol="0" anchor="t"/>
-          <a:lstStyle/>
-          <a:p>
-            <a:pPr algn="ctr" indent="0" marL="0">
-              <a:buNone/>
-            </a:pPr>
-            <a:r>
-              <a:rPr lang="en-US" sz="1200" dirty="0">
-                <a:solidFill>
-                  <a:schemeClr val="accent5"/>
-                </a:solidFill>
-              </a:rPr>
-              <a:t>88% of nuclei kept</a:t>
-            </a:r>
-            <a:endParaRPr lang="en-US" sz="1200" dirty="0"/>
-          </a:p>
-        </p:txBody>
-      </p:sp>
-      <p:sp>
-        <p:nvSpPr>
-          <p:cNvPr id="14" name="Text 8"/>
-          <p:cNvSpPr txBox="1"/>
-          <p:nvPr/>
-        </p:nvSpPr>
-        <p:spPr>
-          <a:xfrm>
-            <a:off x="457200" y="3291840"/>
-            <a:ext cx="2606040" cy="1188720"/>
+            <a:off x="457200" y="3977640"/>
+            <a:ext cx="8229600" cy="411480"/>
           </a:xfrm>
           <a:prstGeom prst="rect">
             <a:avLst/>
@@ -6734,126 +8457,12 @@
               <a:buNone/>
             </a:pPr>
             <a:r>
-              <a:rPr lang="en-US" sz="1500" b="1" dirty="0">
-                <a:solidFill>
-                  <a:srgbClr val="E8730C"/>
+              <a:rPr lang="en-US" sz="1500" dirty="0">
+                <a:solidFill>
+                  <a:schemeClr val="tx2"/>
                 </a:solidFill>
               </a:rPr>
-              <a:t>Luxar (2026)</a:t>
-            </a:r>
-            <a:endParaRPr lang="en-US" sz="1500" dirty="0"/>
-          </a:p>
-          <a:p>
-            <a:pPr indent="0" marL="0">
-              <a:buNone/>
-            </a:pPr>
-            <a:r>
-              <a:rPr lang="en-US" sz="1500" dirty="0">
-                <a:solidFill>
-                  <a:schemeClr val="tx1"/>
-                </a:solidFill>
-              </a:rPr>
-              <a:t>state-of-the-art Gaussian-blob tool for microscopy</a:t>
-            </a:r>
-            <a:endParaRPr lang="en-US" sz="1500" dirty="0"/>
-          </a:p>
-        </p:txBody>
-      </p:sp>
-      <p:sp>
-        <p:nvSpPr>
-          <p:cNvPr id="15" name="Text 9"/>
-          <p:cNvSpPr txBox="1"/>
-          <p:nvPr/>
-        </p:nvSpPr>
-        <p:spPr>
-          <a:xfrm>
-            <a:off x="3246120" y="3291840"/>
-            <a:ext cx="2606040" cy="1188720"/>
-          </a:xfrm>
-          <a:prstGeom prst="rect">
-            <a:avLst/>
-          </a:prstGeom>
-          <a:noFill/>
-          <a:ln/>
-        </p:spPr>
-        <p:txBody>
-          <a:bodyPr wrap="square" lIns="0" tIns="0" rIns="0" bIns="0" rtlCol="0" anchor="t"/>
-          <a:lstStyle/>
-          <a:p>
-            <a:pPr indent="0" marL="0">
-              <a:buNone/>
-            </a:pPr>
-            <a:r>
-              <a:rPr lang="en-US" sz="1500" b="1" dirty="0">
-                <a:solidFill>
-                  <a:srgbClr val="E8730C"/>
-                </a:solidFill>
-              </a:rPr>
-              <a:t>JPEG2000</a:t>
-            </a:r>
-            <a:endParaRPr lang="en-US" sz="1500" dirty="0"/>
-          </a:p>
-          <a:p>
-            <a:pPr indent="0" marL="0">
-              <a:buNone/>
-            </a:pPr>
-            <a:r>
-              <a:rPr lang="en-US" sz="1500" dirty="0">
-                <a:solidFill>
-                  <a:schemeClr val="tx1"/>
-                </a:solidFill>
-              </a:rPr>
-              <a:t>standard image compression, set to exactly the same file size</a:t>
-            </a:r>
-            <a:endParaRPr lang="en-US" sz="1500" dirty="0"/>
-          </a:p>
-        </p:txBody>
-      </p:sp>
-      <p:sp>
-        <p:nvSpPr>
-          <p:cNvPr id="16" name="Text 10"/>
-          <p:cNvSpPr txBox="1"/>
-          <p:nvPr/>
-        </p:nvSpPr>
-        <p:spPr>
-          <a:xfrm>
-            <a:off x="6035040" y="3291840"/>
-            <a:ext cx="2606040" cy="1188720"/>
-          </a:xfrm>
-          <a:prstGeom prst="rect">
-            <a:avLst/>
-          </a:prstGeom>
-          <a:noFill/>
-          <a:ln/>
-        </p:spPr>
-        <p:txBody>
-          <a:bodyPr wrap="square" lIns="0" tIns="0" rIns="0" bIns="0" rtlCol="0" anchor="t"/>
-          <a:lstStyle/>
-          <a:p>
-            <a:pPr indent="0" marL="0">
-              <a:buNone/>
-            </a:pPr>
-            <a:r>
-              <a:rPr lang="en-US" sz="1500" b="1" dirty="0">
-                <a:solidFill>
-                  <a:srgbClr val="E8730C"/>
-                </a:solidFill>
-              </a:rPr>
-              <a:t>Test</a:t>
-            </a:r>
-            <a:endParaRPr lang="en-US" sz="1500" dirty="0"/>
-          </a:p>
-          <a:p>
-            <a:pPr indent="0" marL="0">
-              <a:buNone/>
-            </a:pPr>
-            <a:r>
-              <a:rPr lang="en-US" sz="1500" dirty="0">
-                <a:solidFill>
-                  <a:schemeClr val="tx1"/>
-                </a:solidFill>
-              </a:rPr>
-              <a:t>12 C. elegans frames, 2,958 hand-marked nuclei, 4 nucleus detectors</a:t>
+              <a:t>Each change measured on its own, against the version before it; the numbers are not added together.</a:t>
             </a:r>
             <a:endParaRPr lang="en-US" sz="1500" dirty="0"/>
           </a:p>
@@ -6961,42 +8570,26 @@
                   <a:schemeClr val="tx1"/>
                 </a:solidFill>
               </a:rPr>
-              <a:t>Same file size: the winner depends on the detector</a:t>
+              <a:t>Does the fit behave as expected?</a:t>
             </a:r>
             <a:endParaRPr lang="en-US" sz="2800" dirty="0"/>
           </a:p>
         </p:txBody>
       </p:sp>
-      <p:graphicFrame>
-        <p:nvGraphicFramePr>
-          <p:cNvPr id="3" name="Chart 0" descr=""/>
-          <p:cNvGraphicFramePr/>
-          <p:nvPr/>
-        </p:nvGraphicFramePr>
-        <p:xfrm>
-          <a:off x="457200" y="1051560"/>
-          <a:ext cx="5120640" cy="3429000"/>
-        </p:xfrm>
-        <a:graphic xmlns:a="http://schemas.openxmlformats.org/drawingml/2006/main">
-          <a:graphicData uri="http://schemas.openxmlformats.org/drawingml/2006/chart">
-            <c:chart xmlns:c="http://schemas.openxmlformats.org/drawingml/2006/chart" r:id="rId1"/>
-          </a:graphicData>
-        </a:graphic>
-      </p:graphicFrame>
-      <p:sp>
-        <p:nvSpPr>
-          <p:cNvPr id="4" name="psnr-card"/>
+      <p:sp>
+        <p:nvSpPr>
+          <p:cNvPr id="3" name="check-0"/>
           <p:cNvSpPr/>
           <p:nvPr/>
         </p:nvSpPr>
         <p:spPr>
           <a:xfrm>
-            <a:off x="5806440" y="1143000"/>
-            <a:ext cx="2880360" cy="1417320"/>
+            <a:off x="457200" y="1143000"/>
+            <a:ext cx="2606040" cy="2377440"/>
           </a:xfrm>
           <a:prstGeom prst="roundRect">
             <a:avLst>
-              <a:gd name="adj" fmla="val 5161"/>
+              <a:gd name="adj" fmla="val 3077"/>
             </a:avLst>
           </a:prstGeom>
           <a:solidFill>
@@ -7012,14 +8605,14 @@
       </p:sp>
       <p:sp>
         <p:nvSpPr>
-          <p:cNvPr id="5" name="Text 2"/>
+          <p:cNvPr id="4" name="Text 2"/>
           <p:cNvSpPr txBox="1"/>
           <p:nvPr/>
         </p:nvSpPr>
         <p:spPr>
           <a:xfrm>
-            <a:off x="5989320" y="1298448"/>
-            <a:ext cx="2560320" cy="1097280"/>
+            <a:off x="640080" y="1325880"/>
+            <a:ext cx="2240280" cy="731520"/>
           </a:xfrm>
           <a:prstGeom prst="rect">
             <a:avLst/>
@@ -7035,45 +8628,70 @@
               <a:buNone/>
             </a:pPr>
             <a:r>
-              <a:rPr lang="en-US" sz="1800" b="1" dirty="0">
-                <a:solidFill>
-                  <a:schemeClr val="tx1"/>
-                </a:solidFill>
+              <a:rPr lang="en-US" sz="3200" b="1" dirty="0">
+                <a:solidFill>
+                  <a:schemeClr val="accent3"/>
+                </a:solidFill>
+                <a:latin typeface="Cambria" pitchFamily="34" charset="0"/>
+                <a:ea typeface="Cambria" pitchFamily="34" charset="-122"/>
+                <a:cs typeface="Cambria" pitchFamily="34" charset="-120"/>
               </a:rPr>
-              <a:t>PSNR: JPEG2000 better</a:t>
-            </a:r>
-            <a:endParaRPr lang="en-US" sz="1800" dirty="0"/>
-          </a:p>
+              <a:t>0.79 vs 0.73</a:t>
+            </a:r>
+            <a:endParaRPr lang="en-US" sz="3200" dirty="0"/>
+          </a:p>
+        </p:txBody>
+      </p:sp>
+      <p:sp>
+        <p:nvSpPr>
+          <p:cNvPr id="5" name="Text 3"/>
+          <p:cNvSpPr txBox="1"/>
+          <p:nvPr/>
+        </p:nvSpPr>
+        <p:spPr>
+          <a:xfrm>
+            <a:off x="640080" y="2148840"/>
+            <a:ext cx="2240280" cy="1234440"/>
+          </a:xfrm>
+          <a:prstGeom prst="rect">
+            <a:avLst/>
+          </a:prstGeom>
+          <a:noFill/>
+          <a:ln/>
+        </p:spPr>
+        <p:txBody>
+          <a:bodyPr wrap="square" lIns="0" tIns="0" rIns="0" bIns="0" rtlCol="0" anchor="t"/>
+          <a:lstStyle/>
           <a:p>
             <a:pPr indent="0" marL="0">
               <a:buNone/>
             </a:pPr>
             <a:r>
-              <a:rPr lang="en-US" sz="1800" dirty="0">
-                <a:solidFill>
-                  <a:schemeClr val="tx1"/>
+              <a:rPr lang="en-US" sz="1500" dirty="0">
+                <a:solidFill>
+                  <a:schemeClr val="tx2"/>
                 </a:solidFill>
               </a:rPr>
-              <a:t>on 12 of 12 frames</a:t>
-            </a:r>
-            <a:endParaRPr lang="en-US" sz="1800" dirty="0"/>
-          </a:p>
-        </p:txBody>
-      </p:sp>
-      <p:sp>
-        <p:nvSpPr>
-          <p:cNvPr id="6" name="detectors-card"/>
+              <a:t>depth-to-width ratio: learned blobs vs measured nuclei</a:t>
+            </a:r>
+            <a:endParaRPr lang="en-US" sz="1500" dirty="0"/>
+          </a:p>
+        </p:txBody>
+      </p:sp>
+      <p:sp>
+        <p:nvSpPr>
+          <p:cNvPr id="6" name="check-1"/>
           <p:cNvSpPr/>
           <p:nvPr/>
         </p:nvSpPr>
         <p:spPr>
           <a:xfrm>
-            <a:off x="5806440" y="2697480"/>
-            <a:ext cx="2880360" cy="1783080"/>
+            <a:off x="3246120" y="1143000"/>
+            <a:ext cx="2606040" cy="2377440"/>
           </a:xfrm>
           <a:prstGeom prst="roundRect">
             <a:avLst>
-              <a:gd name="adj" fmla="val 4103"/>
+              <a:gd name="adj" fmla="val 3077"/>
             </a:avLst>
           </a:prstGeom>
           <a:solidFill>
@@ -7089,14 +8707,14 @@
       </p:sp>
       <p:sp>
         <p:nvSpPr>
-          <p:cNvPr id="7" name="Text 4"/>
+          <p:cNvPr id="7" name="Text 5"/>
           <p:cNvSpPr txBox="1"/>
           <p:nvPr/>
         </p:nvSpPr>
         <p:spPr>
           <a:xfrm>
-            <a:off x="5989320" y="2834640"/>
-            <a:ext cx="2560320" cy="1554480"/>
+            <a:off x="3429000" y="1325880"/>
+            <a:ext cx="2240280" cy="731520"/>
           </a:xfrm>
           <a:prstGeom prst="rect">
             <a:avLst/>
@@ -7112,15 +8730,40 @@
               <a:buNone/>
             </a:pPr>
             <a:r>
-              <a:rPr lang="en-US" sz="1500" b="1" dirty="0">
-                <a:solidFill>
-                  <a:schemeClr val="tx1"/>
-                </a:solidFill>
+              <a:rPr lang="en-US" sz="3200" b="1" dirty="0">
+                <a:solidFill>
+                  <a:schemeClr val="accent3"/>
+                </a:solidFill>
+                <a:latin typeface="Cambria" pitchFamily="34" charset="0"/>
+                <a:ea typeface="Cambria" pitchFamily="34" charset="-122"/>
+                <a:cs typeface="Cambria" pitchFamily="34" charset="-120"/>
               </a:rPr>
-              <a:t>Detectors disagree</a:t>
-            </a:r>
-            <a:endParaRPr lang="en-US" sz="1500" dirty="0"/>
-          </a:p>
+              <a:t>14 vs 10</a:t>
+            </a:r>
+            <a:endParaRPr lang="en-US" sz="3200" dirty="0"/>
+          </a:p>
+        </p:txBody>
+      </p:sp>
+      <p:sp>
+        <p:nvSpPr>
+          <p:cNvPr id="8" name="Text 6"/>
+          <p:cNvSpPr txBox="1"/>
+          <p:nvPr/>
+        </p:nvSpPr>
+        <p:spPr>
+          <a:xfrm>
+            <a:off x="3429000" y="2148840"/>
+            <a:ext cx="2240280" cy="1234440"/>
+          </a:xfrm>
+          <a:prstGeom prst="rect">
+            <a:avLst/>
+          </a:prstGeom>
+          <a:noFill/>
+          <a:ln/>
+        </p:spPr>
+        <p:txBody>
+          <a:bodyPr wrap="square" lIns="0" tIns="0" rIns="0" bIns="0" rtlCol="0" anchor="t"/>
+          <a:lstStyle/>
           <a:p>
             <a:pPr indent="0" marL="0">
               <a:buNone/>
@@ -7128,10 +8771,148 @@
             <a:r>
               <a:rPr lang="en-US" sz="1500" dirty="0">
                 <a:solidFill>
-                  <a:schemeClr val="tx1"/>
+                  <a:schemeClr val="tx2"/>
                 </a:solidFill>
               </a:rPr>
-              <a:t>Cellpose 3D prefers blobs; watershed and Cellpose 2D prefer JPEG2000; all prefer JPEG2000 past 300×</a:t>
+              <a:t>hand-marked Drosophila nuclei in the top 100 detections: fitted blobs vs raw image</a:t>
+            </a:r>
+            <a:endParaRPr lang="en-US" sz="1500" dirty="0"/>
+          </a:p>
+        </p:txBody>
+      </p:sp>
+      <p:sp>
+        <p:nvSpPr>
+          <p:cNvPr id="9" name="check-2"/>
+          <p:cNvSpPr/>
+          <p:nvPr/>
+        </p:nvSpPr>
+        <p:spPr>
+          <a:xfrm>
+            <a:off x="6035040" y="1143000"/>
+            <a:ext cx="2606040" cy="2377440"/>
+          </a:xfrm>
+          <a:prstGeom prst="roundRect">
+            <a:avLst>
+              <a:gd name="adj" fmla="val 3077"/>
+            </a:avLst>
+          </a:prstGeom>
+          <a:solidFill>
+            <a:schemeClr val="bg2"/>
+          </a:solidFill>
+          <a:ln w="12700">
+            <a:solidFill>
+              <a:schemeClr val="bg2"/>
+            </a:solidFill>
+            <a:prstDash val="solid"/>
+          </a:ln>
+        </p:spPr>
+      </p:sp>
+      <p:sp>
+        <p:nvSpPr>
+          <p:cNvPr id="10" name="Text 8"/>
+          <p:cNvSpPr txBox="1"/>
+          <p:nvPr/>
+        </p:nvSpPr>
+        <p:spPr>
+          <a:xfrm>
+            <a:off x="6217920" y="1325880"/>
+            <a:ext cx="2240280" cy="731520"/>
+          </a:xfrm>
+          <a:prstGeom prst="rect">
+            <a:avLst/>
+          </a:prstGeom>
+          <a:noFill/>
+          <a:ln/>
+        </p:spPr>
+        <p:txBody>
+          <a:bodyPr wrap="square" lIns="0" tIns="0" rIns="0" bIns="0" rtlCol="0" anchor="t"/>
+          <a:lstStyle/>
+          <a:p>
+            <a:pPr indent="0" marL="0">
+              <a:buNone/>
+            </a:pPr>
+            <a:r>
+              <a:rPr lang="en-US" sz="3200" b="1" dirty="0">
+                <a:solidFill>
+                  <a:schemeClr val="accent3"/>
+                </a:solidFill>
+                <a:latin typeface="Cambria" pitchFamily="34" charset="0"/>
+                <a:ea typeface="Cambria" pitchFamily="34" charset="-122"/>
+                <a:cs typeface="Cambria" pitchFamily="34" charset="-120"/>
+              </a:rPr>
+              <a:t>≤ 4%</a:t>
+            </a:r>
+            <a:endParaRPr lang="en-US" sz="3200" dirty="0"/>
+          </a:p>
+        </p:txBody>
+      </p:sp>
+      <p:sp>
+        <p:nvSpPr>
+          <p:cNvPr id="11" name="Text 9"/>
+          <p:cNvSpPr txBox="1"/>
+          <p:nvPr/>
+        </p:nvSpPr>
+        <p:spPr>
+          <a:xfrm>
+            <a:off x="6217920" y="2148840"/>
+            <a:ext cx="2240280" cy="1234440"/>
+          </a:xfrm>
+          <a:prstGeom prst="rect">
+            <a:avLst/>
+          </a:prstGeom>
+          <a:noFill/>
+          <a:ln/>
+        </p:spPr>
+        <p:txBody>
+          <a:bodyPr wrap="square" lIns="0" tIns="0" rIns="0" bIns="0" rtlCol="0" anchor="t"/>
+          <a:lstStyle/>
+          <a:p>
+            <a:pPr indent="0" marL="0">
+              <a:buNone/>
+            </a:pPr>
+            <a:r>
+              <a:rPr lang="en-US" sz="1500" dirty="0">
+                <a:solidFill>
+                  <a:schemeClr val="tx2"/>
+                </a:solidFill>
+              </a:rPr>
+              <a:t>difference in nuclei found between three repeated fits</a:t>
+            </a:r>
+            <a:endParaRPr lang="en-US" sz="1500" dirty="0"/>
+          </a:p>
+        </p:txBody>
+      </p:sp>
+      <p:sp>
+        <p:nvSpPr>
+          <p:cNvPr id="12" name="Text 10"/>
+          <p:cNvSpPr txBox="1"/>
+          <p:nvPr/>
+        </p:nvSpPr>
+        <p:spPr>
+          <a:xfrm>
+            <a:off x="457200" y="3840480"/>
+            <a:ext cx="8229600" cy="548640"/>
+          </a:xfrm>
+          <a:prstGeom prst="rect">
+            <a:avLst/>
+          </a:prstGeom>
+          <a:noFill/>
+          <a:ln/>
+        </p:spPr>
+        <p:txBody>
+          <a:bodyPr wrap="square" lIns="0" tIns="0" rIns="0" bIns="0" rtlCol="0" anchor="t"/>
+          <a:lstStyle/>
+          <a:p>
+            <a:pPr indent="0" marL="0">
+              <a:buNone/>
+            </a:pPr>
+            <a:r>
+              <a:rPr lang="en-US" sz="1500" dirty="0">
+                <a:solidFill>
+                  <a:schemeClr val="tx2"/>
+                </a:solidFill>
+              </a:rPr>
+              <a:t>Limit: with all 457 of its candidates the raw-image detector finds 26 of 29, more than any fit.</a:t>
             </a:r>
             <a:endParaRPr lang="en-US" sz="1500" dirty="0"/>
           </a:p>
@@ -7239,15 +9020,51 @@
                   <a:schemeClr val="tx1"/>
                 </a:solidFill>
               </a:rPr>
-              <a:t>Below ~3 blobs per nucleus, nuclei vanish</a:t>
+              <a:t>Against the state of the art, at the same file size</a:t>
             </a:r>
             <a:endParaRPr lang="en-US" sz="2800" dirty="0"/>
+          </a:p>
+        </p:txBody>
+      </p:sp>
+      <p:sp>
+        <p:nvSpPr>
+          <p:cNvPr id="3" name="Text 1"/>
+          <p:cNvSpPr txBox="1"/>
+          <p:nvPr/>
+        </p:nvSpPr>
+        <p:spPr>
+          <a:xfrm>
+            <a:off x="457200" y="1024128"/>
+            <a:ext cx="2011680" cy="274320"/>
+          </a:xfrm>
+          <a:prstGeom prst="rect">
+            <a:avLst/>
+          </a:prstGeom>
+          <a:noFill/>
+          <a:ln/>
+        </p:spPr>
+        <p:txBody>
+          <a:bodyPr wrap="square" lIns="0" tIns="0" rIns="0" bIns="0" rtlCol="0" anchor="t"/>
+          <a:lstStyle/>
+          <a:p>
+            <a:pPr algn="ctr" indent="0" marL="0">
+              <a:buNone/>
+            </a:pPr>
+            <a:r>
+              <a:rPr lang="en-US" sz="1400" b="1" dirty="0">
+                <a:solidFill>
+                  <a:schemeClr val="tx1"/>
+                </a:solidFill>
+              </a:rPr>
+              <a:t>Original</a:t>
+            </a:r>
+            <a:endParaRPr lang="en-US" sz="1400" dirty="0"/>
           </a:p>
         </p:txBody>
       </p:sp>
       <p:pic>
         <p:nvPicPr>
-          <p:cNvPr id="3" name="cliff" descr="D:\masters\MLCV seminar\TeamProject\presentation\figs\cliff_deck.png">    </p:cNvPr>
+          <p:cNvPr id="4" name="four-raw" descr="D:\masters\MLCV seminar\TeamProject\presentation\figs\four_raw.png">    </p:cNvPr>
           <p:cNvPicPr>
             <a:picLocks noChangeAspect="1"/>
           </p:cNvPicPr>
@@ -7261,41 +9078,14 @@
         </p:blipFill>
         <p:spPr>
           <a:xfrm>
-            <a:off x="457200" y="1097280"/>
-            <a:ext cx="5257800" cy="3108960"/>
+            <a:off x="457200" y="1325880"/>
+            <a:ext cx="2011680" cy="1536192"/>
           </a:xfrm>
           <a:prstGeom prst="rect">
             <a:avLst/>
           </a:prstGeom>
         </p:spPr>
       </p:pic>
-      <p:sp>
-        <p:nvSpPr>
-          <p:cNvPr id="4" name="step-card-0"/>
-          <p:cNvSpPr/>
-          <p:nvPr/>
-        </p:nvSpPr>
-        <p:spPr>
-          <a:xfrm>
-            <a:off x="5897880" y="1051560"/>
-            <a:ext cx="2788920" cy="1143000"/>
-          </a:xfrm>
-          <a:prstGeom prst="roundRect">
-            <a:avLst>
-              <a:gd name="adj" fmla="val 6400"/>
-            </a:avLst>
-          </a:prstGeom>
-          <a:solidFill>
-            <a:schemeClr val="bg2"/>
-          </a:solidFill>
-          <a:ln w="12700">
-            <a:solidFill>
-              <a:schemeClr val="bg2"/>
-            </a:solidFill>
-            <a:prstDash val="solid"/>
-          </a:ln>
-        </p:spPr>
-      </p:sp>
       <p:sp>
         <p:nvSpPr>
           <p:cNvPr id="5" name="Text 2"/>
@@ -7304,8 +9094,296 @@
         </p:nvSpPr>
         <p:spPr>
           <a:xfrm>
-            <a:off x="6062472" y="1143000"/>
-            <a:ext cx="2459736" cy="228600"/>
+            <a:off x="2532888" y="1024128"/>
+            <a:ext cx="2011680" cy="274320"/>
+          </a:xfrm>
+          <a:prstGeom prst="rect">
+            <a:avLst/>
+          </a:prstGeom>
+          <a:noFill/>
+          <a:ln/>
+        </p:spPr>
+        <p:txBody>
+          <a:bodyPr wrap="square" lIns="0" tIns="0" rIns="0" bIns="0" rtlCol="0" anchor="t"/>
+          <a:lstStyle/>
+          <a:p>
+            <a:pPr algn="ctr" indent="0" marL="0">
+              <a:buNone/>
+            </a:pPr>
+            <a:r>
+              <a:rPr lang="en-US" sz="1400" b="1" dirty="0">
+                <a:solidFill>
+                  <a:schemeClr val="tx1"/>
+                </a:solidFill>
+              </a:rPr>
+              <a:t>JPEG-XL 82×</a:t>
+            </a:r>
+            <a:endParaRPr lang="en-US" sz="1400" dirty="0"/>
+          </a:p>
+        </p:txBody>
+      </p:sp>
+      <p:pic>
+        <p:nvPicPr>
+          <p:cNvPr id="6" name="four-jpegxl" descr="D:\masters\MLCV seminar\TeamProject\presentation\figs\four_jpegxl.png">    </p:cNvPr>
+          <p:cNvPicPr>
+            <a:picLocks noChangeAspect="1"/>
+          </p:cNvPicPr>
+          <p:nvPr/>
+        </p:nvPicPr>
+        <p:blipFill>
+          <a:blip r:embed="rId2"/>
+          <a:stretch>
+            <a:fillRect/>
+          </a:stretch>
+        </p:blipFill>
+        <p:spPr>
+          <a:xfrm>
+            <a:off x="2532888" y="1325880"/>
+            <a:ext cx="2011680" cy="1536192"/>
+          </a:xfrm>
+          <a:prstGeom prst="rect">
+            <a:avLst/>
+          </a:prstGeom>
+        </p:spPr>
+      </p:pic>
+      <p:sp>
+        <p:nvSpPr>
+          <p:cNvPr id="7" name="Text 3"/>
+          <p:cNvSpPr txBox="1"/>
+          <p:nvPr/>
+        </p:nvSpPr>
+        <p:spPr>
+          <a:xfrm>
+            <a:off x="2532888" y="2880360"/>
+            <a:ext cx="2011680" cy="256032"/>
+          </a:xfrm>
+          <a:prstGeom prst="rect">
+            <a:avLst/>
+          </a:prstGeom>
+          <a:noFill/>
+          <a:ln/>
+        </p:spPr>
+        <p:txBody>
+          <a:bodyPr wrap="square" lIns="0" tIns="0" rIns="0" bIns="0" rtlCol="0" anchor="t"/>
+          <a:lstStyle/>
+          <a:p>
+            <a:pPr algn="ctr" indent="0" marL="0">
+              <a:buNone/>
+            </a:pPr>
+            <a:r>
+              <a:rPr lang="en-US" sz="1200" dirty="0">
+                <a:solidFill>
+                  <a:schemeClr val="accent5"/>
+                </a:solidFill>
+              </a:rPr>
+              <a:t>100% of nuclei kept</a:t>
+            </a:r>
+            <a:endParaRPr lang="en-US" sz="1200" dirty="0"/>
+          </a:p>
+        </p:txBody>
+      </p:sp>
+      <p:sp>
+        <p:nvSpPr>
+          <p:cNvPr id="8" name="Text 4"/>
+          <p:cNvSpPr txBox="1"/>
+          <p:nvPr/>
+        </p:nvSpPr>
+        <p:spPr>
+          <a:xfrm>
+            <a:off x="4608576" y="1024128"/>
+            <a:ext cx="2011680" cy="274320"/>
+          </a:xfrm>
+          <a:prstGeom prst="rect">
+            <a:avLst/>
+          </a:prstGeom>
+          <a:noFill/>
+          <a:ln/>
+        </p:spPr>
+        <p:txBody>
+          <a:bodyPr wrap="square" lIns="0" tIns="0" rIns="0" bIns="0" rtlCol="0" anchor="t"/>
+          <a:lstStyle/>
+          <a:p>
+            <a:pPr algn="ctr" indent="0" marL="0">
+              <a:buNone/>
+            </a:pPr>
+            <a:r>
+              <a:rPr lang="en-US" sz="1400" b="1" dirty="0">
+                <a:solidFill>
+                  <a:schemeClr val="tx1"/>
+                </a:solidFill>
+              </a:rPr>
+              <a:t>JPEG2000 89×</a:t>
+            </a:r>
+            <a:endParaRPr lang="en-US" sz="1400" dirty="0"/>
+          </a:p>
+        </p:txBody>
+      </p:sp>
+      <p:pic>
+        <p:nvPicPr>
+          <p:cNvPr id="9" name="four-jpeg2k" descr="D:\masters\MLCV seminar\TeamProject\presentation\figs\four_jpeg2k.png">    </p:cNvPr>
+          <p:cNvPicPr>
+            <a:picLocks noChangeAspect="1"/>
+          </p:cNvPicPr>
+          <p:nvPr/>
+        </p:nvPicPr>
+        <p:blipFill>
+          <a:blip r:embed="rId3"/>
+          <a:stretch>
+            <a:fillRect/>
+          </a:stretch>
+        </p:blipFill>
+        <p:spPr>
+          <a:xfrm>
+            <a:off x="4608576" y="1325880"/>
+            <a:ext cx="2011680" cy="1536192"/>
+          </a:xfrm>
+          <a:prstGeom prst="rect">
+            <a:avLst/>
+          </a:prstGeom>
+        </p:spPr>
+      </p:pic>
+      <p:sp>
+        <p:nvSpPr>
+          <p:cNvPr id="10" name="Text 5"/>
+          <p:cNvSpPr txBox="1"/>
+          <p:nvPr/>
+        </p:nvSpPr>
+        <p:spPr>
+          <a:xfrm>
+            <a:off x="4608576" y="2880360"/>
+            <a:ext cx="2011680" cy="256032"/>
+          </a:xfrm>
+          <a:prstGeom prst="rect">
+            <a:avLst/>
+          </a:prstGeom>
+          <a:noFill/>
+          <a:ln/>
+        </p:spPr>
+        <p:txBody>
+          <a:bodyPr wrap="square" lIns="0" tIns="0" rIns="0" bIns="0" rtlCol="0" anchor="t"/>
+          <a:lstStyle/>
+          <a:p>
+            <a:pPr algn="ctr" indent="0" marL="0">
+              <a:buNone/>
+            </a:pPr>
+            <a:r>
+              <a:rPr lang="en-US" sz="1200" dirty="0">
+                <a:solidFill>
+                  <a:schemeClr val="accent5"/>
+                </a:solidFill>
+              </a:rPr>
+              <a:t>97% of nuclei kept</a:t>
+            </a:r>
+            <a:endParaRPr lang="en-US" sz="1200" dirty="0"/>
+          </a:p>
+        </p:txBody>
+      </p:sp>
+      <p:sp>
+        <p:nvSpPr>
+          <p:cNvPr id="11" name="Text 6"/>
+          <p:cNvSpPr txBox="1"/>
+          <p:nvPr/>
+        </p:nvSpPr>
+        <p:spPr>
+          <a:xfrm>
+            <a:off x="6684264" y="1024128"/>
+            <a:ext cx="2011680" cy="274320"/>
+          </a:xfrm>
+          <a:prstGeom prst="rect">
+            <a:avLst/>
+          </a:prstGeom>
+          <a:noFill/>
+          <a:ln/>
+        </p:spPr>
+        <p:txBody>
+          <a:bodyPr wrap="square" lIns="0" tIns="0" rIns="0" bIns="0" rtlCol="0" anchor="t"/>
+          <a:lstStyle/>
+          <a:p>
+            <a:pPr algn="ctr" indent="0" marL="0">
+              <a:buNone/>
+            </a:pPr>
+            <a:r>
+              <a:rPr lang="en-US" sz="1400" b="1" dirty="0">
+                <a:solidFill>
+                  <a:schemeClr val="tx1"/>
+                </a:solidFill>
+              </a:rPr>
+              <a:t>Luxar 89×</a:t>
+            </a:r>
+            <a:endParaRPr lang="en-US" sz="1400" dirty="0"/>
+          </a:p>
+        </p:txBody>
+      </p:sp>
+      <p:pic>
+        <p:nvPicPr>
+          <p:cNvPr id="12" name="four-luxar" descr="D:\masters\MLCV seminar\TeamProject\presentation\figs\four_luxar.png">    </p:cNvPr>
+          <p:cNvPicPr>
+            <a:picLocks noChangeAspect="1"/>
+          </p:cNvPicPr>
+          <p:nvPr/>
+        </p:nvPicPr>
+        <p:blipFill>
+          <a:blip r:embed="rId4"/>
+          <a:stretch>
+            <a:fillRect/>
+          </a:stretch>
+        </p:blipFill>
+        <p:spPr>
+          <a:xfrm>
+            <a:off x="6684264" y="1325880"/>
+            <a:ext cx="2011680" cy="1536192"/>
+          </a:xfrm>
+          <a:prstGeom prst="rect">
+            <a:avLst/>
+          </a:prstGeom>
+        </p:spPr>
+      </p:pic>
+      <p:sp>
+        <p:nvSpPr>
+          <p:cNvPr id="13" name="Text 7"/>
+          <p:cNvSpPr txBox="1"/>
+          <p:nvPr/>
+        </p:nvSpPr>
+        <p:spPr>
+          <a:xfrm>
+            <a:off x="6684264" y="2880360"/>
+            <a:ext cx="2011680" cy="256032"/>
+          </a:xfrm>
+          <a:prstGeom prst="rect">
+            <a:avLst/>
+          </a:prstGeom>
+          <a:noFill/>
+          <a:ln/>
+        </p:spPr>
+        <p:txBody>
+          <a:bodyPr wrap="square" lIns="0" tIns="0" rIns="0" bIns="0" rtlCol="0" anchor="t"/>
+          <a:lstStyle/>
+          <a:p>
+            <a:pPr algn="ctr" indent="0" marL="0">
+              <a:buNone/>
+            </a:pPr>
+            <a:r>
+              <a:rPr lang="en-US" sz="1200" dirty="0">
+                <a:solidFill>
+                  <a:schemeClr val="accent5"/>
+                </a:solidFill>
+              </a:rPr>
+              <a:t>88% of nuclei kept</a:t>
+            </a:r>
+            <a:endParaRPr lang="en-US" sz="1200" dirty="0"/>
+          </a:p>
+        </p:txBody>
+      </p:sp>
+      <p:sp>
+        <p:nvSpPr>
+          <p:cNvPr id="14" name="Text 8"/>
+          <p:cNvSpPr txBox="1"/>
+          <p:nvPr/>
+        </p:nvSpPr>
+        <p:spPr>
+          <a:xfrm>
+            <a:off x="457200" y="3291840"/>
+            <a:ext cx="2606040" cy="1188720"/>
           </a:xfrm>
           <a:prstGeom prst="rect">
             <a:avLst/>
@@ -7321,90 +9399,41 @@
               <a:buNone/>
             </a:pPr>
             <a:r>
-              <a:rPr lang="en-US" sz="1200" b="1" dirty="0">
-                <a:solidFill>
-                  <a:schemeClr val="accent1"/>
+              <a:rPr lang="en-US" sz="1500" b="1" dirty="0">
+                <a:solidFill>
+                  <a:srgbClr val="E8730C"/>
                 </a:solidFill>
               </a:rPr>
-              <a:t>WHAT WE SEE</a:t>
-            </a:r>
-            <a:endParaRPr lang="en-US" sz="1200" dirty="0"/>
-          </a:p>
-        </p:txBody>
-      </p:sp>
-      <p:sp>
-        <p:nvSpPr>
-          <p:cNvPr id="6" name="Text 3"/>
-          <p:cNvSpPr txBox="1"/>
-          <p:nvPr/>
-        </p:nvSpPr>
-        <p:spPr>
-          <a:xfrm>
-            <a:off x="6062472" y="1399032"/>
-            <a:ext cx="2459736" cy="722376"/>
-          </a:xfrm>
-          <a:prstGeom prst="rect">
-            <a:avLst/>
-          </a:prstGeom>
-          <a:noFill/>
-          <a:ln/>
-        </p:spPr>
-        <p:txBody>
-          <a:bodyPr wrap="square" lIns="0" tIns="0" rIns="0" bIns="0" rtlCol="0" anchor="t"/>
-          <a:lstStyle/>
+              <a:t>Luxar (2026)</a:t>
+            </a:r>
+            <a:endParaRPr lang="en-US" sz="1500" dirty="0"/>
+          </a:p>
           <a:p>
             <a:pPr indent="0" marL="0">
               <a:buNone/>
             </a:pPr>
             <a:r>
-              <a:rPr lang="en-US" sz="1400" dirty="0">
+              <a:rPr lang="en-US" sz="1500" dirty="0">
                 <a:solidFill>
                   <a:schemeClr val="tx1"/>
                 </a:solidFill>
               </a:rPr>
-              <a:t>Nuclei kept drops below 90% at 1.1-3.1 blobs per nucleus, on all 12 frames</a:t>
-            </a:r>
-            <a:endParaRPr lang="en-US" sz="1400" dirty="0"/>
-          </a:p>
-        </p:txBody>
-      </p:sp>
-      <p:sp>
-        <p:nvSpPr>
-          <p:cNvPr id="7" name="step-card-1"/>
-          <p:cNvSpPr/>
-          <p:nvPr/>
-        </p:nvSpPr>
-        <p:spPr>
-          <a:xfrm>
-            <a:off x="5897880" y="2258568"/>
-            <a:ext cx="2788920" cy="1143000"/>
-          </a:xfrm>
-          <a:prstGeom prst="roundRect">
-            <a:avLst>
-              <a:gd name="adj" fmla="val 6400"/>
-            </a:avLst>
-          </a:prstGeom>
-          <a:solidFill>
-            <a:schemeClr val="bg2"/>
-          </a:solidFill>
-          <a:ln w="12700">
-            <a:solidFill>
-              <a:schemeClr val="bg2"/>
-            </a:solidFill>
-            <a:prstDash val="solid"/>
-          </a:ln>
-        </p:spPr>
-      </p:sp>
-      <p:sp>
-        <p:nvSpPr>
-          <p:cNvPr id="8" name="Text 5"/>
+              <a:t>state-of-the-art Gaussian-blob tool for microscopy</a:t>
+            </a:r>
+            <a:endParaRPr lang="en-US" sz="1500" dirty="0"/>
+          </a:p>
+        </p:txBody>
+      </p:sp>
+      <p:sp>
+        <p:nvSpPr>
+          <p:cNvPr id="15" name="Text 9"/>
           <p:cNvSpPr txBox="1"/>
           <p:nvPr/>
         </p:nvSpPr>
         <p:spPr>
           <a:xfrm>
-            <a:off x="6062472" y="2350008"/>
-            <a:ext cx="2459736" cy="228600"/>
+            <a:off x="3246120" y="3291840"/>
+            <a:ext cx="2606040" cy="1188720"/>
           </a:xfrm>
           <a:prstGeom prst="rect">
             <a:avLst/>
@@ -7420,90 +9449,41 @@
               <a:buNone/>
             </a:pPr>
             <a:r>
-              <a:rPr lang="en-US" sz="1200" b="1" dirty="0">
-                <a:solidFill>
-                  <a:schemeClr val="accent1"/>
+              <a:rPr lang="en-US" sz="1500" b="1" dirty="0">
+                <a:solidFill>
+                  <a:srgbClr val="E8730C"/>
                 </a:solidFill>
               </a:rPr>
-              <a:t>PSNR</a:t>
-            </a:r>
-            <a:endParaRPr lang="en-US" sz="1200" dirty="0"/>
-          </a:p>
-        </p:txBody>
-      </p:sp>
-      <p:sp>
-        <p:nvSpPr>
-          <p:cNvPr id="9" name="Text 6"/>
-          <p:cNvSpPr txBox="1"/>
-          <p:nvPr/>
-        </p:nvSpPr>
-        <p:spPr>
-          <a:xfrm>
-            <a:off x="6062472" y="2606040"/>
-            <a:ext cx="2459736" cy="722376"/>
-          </a:xfrm>
-          <a:prstGeom prst="rect">
-            <a:avLst/>
-          </a:prstGeom>
-          <a:noFill/>
-          <a:ln/>
-        </p:spPr>
-        <p:txBody>
-          <a:bodyPr wrap="square" lIns="0" tIns="0" rIns="0" bIns="0" rtlCol="0" anchor="t"/>
-          <a:lstStyle/>
+              <a:t>JPEG2000</a:t>
+            </a:r>
+            <a:endParaRPr lang="en-US" sz="1500" dirty="0"/>
+          </a:p>
           <a:p>
             <a:pPr indent="0" marL="0">
               <a:buNone/>
             </a:pPr>
             <a:r>
-              <a:rPr lang="en-US" sz="1400" dirty="0">
+              <a:rPr lang="en-US" sz="1500" dirty="0">
                 <a:solidFill>
                   <a:schemeClr val="tx1"/>
                 </a:solidFill>
               </a:rPr>
-              <a:t>Barely moves over these budgets: at most 2.6 dB per frame</a:t>
-            </a:r>
-            <a:endParaRPr lang="en-US" sz="1400" dirty="0"/>
-          </a:p>
-        </p:txBody>
-      </p:sp>
-      <p:sp>
-        <p:nvSpPr>
-          <p:cNvPr id="10" name="step-card-2"/>
-          <p:cNvSpPr/>
-          <p:nvPr/>
-        </p:nvSpPr>
-        <p:spPr>
-          <a:xfrm>
-            <a:off x="5897880" y="3465576"/>
-            <a:ext cx="2788920" cy="1143000"/>
-          </a:xfrm>
-          <a:prstGeom prst="roundRect">
-            <a:avLst>
-              <a:gd name="adj" fmla="val 6400"/>
-            </a:avLst>
-          </a:prstGeom>
-          <a:solidFill>
-            <a:schemeClr val="bg2"/>
-          </a:solidFill>
-          <a:ln w="12700">
-            <a:solidFill>
-              <a:schemeClr val="bg2"/>
-            </a:solidFill>
-            <a:prstDash val="solid"/>
-          </a:ln>
-        </p:spPr>
-      </p:sp>
-      <p:sp>
-        <p:nvSpPr>
-          <p:cNvPr id="11" name="Text 8"/>
+              <a:t>standard image compression, set to exactly the same file size</a:t>
+            </a:r>
+            <a:endParaRPr lang="en-US" sz="1500" dirty="0"/>
+          </a:p>
+        </p:txBody>
+      </p:sp>
+      <p:sp>
+        <p:nvSpPr>
+          <p:cNvPr id="16" name="Text 10"/>
           <p:cNvSpPr txBox="1"/>
           <p:nvPr/>
         </p:nvSpPr>
         <p:spPr>
           <a:xfrm>
-            <a:off x="6062472" y="3557016"/>
-            <a:ext cx="2459736" cy="228600"/>
+            <a:off x="6035040" y="3291840"/>
+            <a:ext cx="2606040" cy="1188720"/>
           </a:xfrm>
           <a:prstGeom prst="rect">
             <a:avLst/>
@@ -7519,50 +9499,28 @@
               <a:buNone/>
             </a:pPr>
             <a:r>
-              <a:rPr lang="en-US" sz="1200" b="1" dirty="0">
-                <a:solidFill>
-                  <a:schemeClr val="accent1"/>
+              <a:rPr lang="en-US" sz="1500" b="1" dirty="0">
+                <a:solidFill>
+                  <a:srgbClr val="E8730C"/>
                 </a:solidFill>
               </a:rPr>
-              <a:t>SO</a:t>
-            </a:r>
-            <a:endParaRPr lang="en-US" sz="1200" dirty="0"/>
-          </a:p>
-        </p:txBody>
-      </p:sp>
-      <p:sp>
-        <p:nvSpPr>
-          <p:cNvPr id="12" name="Text 9"/>
-          <p:cNvSpPr txBox="1"/>
-          <p:nvPr/>
-        </p:nvSpPr>
-        <p:spPr>
-          <a:xfrm>
-            <a:off x="6062472" y="3813048"/>
-            <a:ext cx="2459736" cy="722376"/>
-          </a:xfrm>
-          <a:prstGeom prst="rect">
-            <a:avLst/>
-          </a:prstGeom>
-          <a:noFill/>
-          <a:ln/>
-        </p:spPr>
-        <p:txBody>
-          <a:bodyPr wrap="square" lIns="0" tIns="0" rIns="0" bIns="0" rtlCol="0" anchor="t"/>
-          <a:lstStyle/>
+              <a:t>Test</a:t>
+            </a:r>
+            <a:endParaRPr lang="en-US" sz="1500" dirty="0"/>
+          </a:p>
           <a:p>
             <a:pPr indent="0" marL="0">
               <a:buNone/>
             </a:pPr>
             <a:r>
-              <a:rPr lang="en-US" sz="1400" dirty="0">
+              <a:rPr lang="en-US" sz="1500" dirty="0">
                 <a:solidFill>
                   <a:schemeClr val="tx1"/>
                 </a:solidFill>
               </a:rPr>
-              <a:t>Image quality cannot tell you when the blob budget is too small</a:t>
-            </a:r>
-            <a:endParaRPr lang="en-US" sz="1400" dirty="0"/>
+              <a:t>12 C. elegans frames, 2,958 hand-marked nuclei, 4 nucleus detectors</a:t>
+            </a:r>
+            <a:endParaRPr lang="en-US" sz="1500" dirty="0"/>
           </a:p>
         </p:txBody>
       </p:sp>
@@ -7646,8 +9604,8 @@
         </p:nvSpPr>
         <p:spPr>
           <a:xfrm>
-            <a:off x="548640" y="411480"/>
-            <a:ext cx="5486400" cy="731520"/>
+            <a:off x="457200" y="256032"/>
+            <a:ext cx="8229600" cy="640080"/>
           </a:xfrm>
           <a:prstGeom prst="rect">
             <a:avLst/>
@@ -7663,29 +9621,70 @@
               <a:buNone/>
             </a:pPr>
             <a:r>
-              <a:rPr lang="en-US" sz="3200" b="1" dirty="0">
-                <a:solidFill>
-                  <a:schemeClr val="bg1"/>
+              <a:rPr lang="en-US" sz="2800" b="1" dirty="0">
+                <a:solidFill>
+                  <a:schemeClr val="tx1"/>
                 </a:solidFill>
               </a:rPr>
-              <a:t>What we learned</a:t>
-            </a:r>
-            <a:endParaRPr lang="en-US" sz="3200" dirty="0"/>
-          </a:p>
-        </p:txBody>
-      </p:sp>
-      <p:sp>
-        <p:nvSpPr>
-          <p:cNvPr id="3" name="Text 0"/>
+              <a:t>Same file size: the winner depends on the detector</a:t>
+            </a:r>
+            <a:endParaRPr lang="en-US" sz="2800" dirty="0"/>
+          </a:p>
+        </p:txBody>
+      </p:sp>
+      <p:graphicFrame>
+        <p:nvGraphicFramePr>
+          <p:cNvPr id="3" name="Chart 0" descr=""/>
+          <p:cNvGraphicFramePr/>
+          <p:nvPr/>
+        </p:nvGraphicFramePr>
+        <p:xfrm>
+          <a:off x="457200" y="1051560"/>
+          <a:ext cx="5120640" cy="3429000"/>
+        </p:xfrm>
+        <a:graphic xmlns:a="http://schemas.openxmlformats.org/drawingml/2006/main">
+          <a:graphicData uri="http://schemas.openxmlformats.org/drawingml/2006/chart">
+            <c:chart xmlns:c="http://schemas.openxmlformats.org/drawingml/2006/chart" r:id="rId1"/>
+          </a:graphicData>
+        </a:graphic>
+      </p:graphicFrame>
+      <p:sp>
+        <p:nvSpPr>
+          <p:cNvPr id="4" name="psnr-card"/>
           <p:cNvSpPr/>
-          <p:nvPr>
-            <p:ph idx="101" type="body" hasCustomPrompt="1"/>
-          </p:nvPr>
-        </p:nvSpPr>
-        <p:spPr>
-          <a:xfrm>
-            <a:off x="548640" y="1371600"/>
-            <a:ext cx="5486400" cy="3200400"/>
+          <p:nvPr/>
+        </p:nvSpPr>
+        <p:spPr>
+          <a:xfrm>
+            <a:off x="5806440" y="1143000"/>
+            <a:ext cx="2880360" cy="1417320"/>
+          </a:xfrm>
+          <a:prstGeom prst="roundRect">
+            <a:avLst>
+              <a:gd name="adj" fmla="val 5161"/>
+            </a:avLst>
+          </a:prstGeom>
+          <a:solidFill>
+            <a:schemeClr val="bg2"/>
+          </a:solidFill>
+          <a:ln w="12700">
+            <a:solidFill>
+              <a:schemeClr val="bg2"/>
+            </a:solidFill>
+            <a:prstDash val="solid"/>
+          </a:ln>
+        </p:spPr>
+      </p:sp>
+      <p:sp>
+        <p:nvSpPr>
+          <p:cNvPr id="5" name="Text 2"/>
+          <p:cNvSpPr txBox="1"/>
+          <p:nvPr/>
+        </p:nvSpPr>
+        <p:spPr>
+          <a:xfrm>
+            <a:off x="5989320" y="1298448"/>
+            <a:ext cx="2560320" cy="1097280"/>
           </a:xfrm>
           <a:prstGeom prst="rect">
             <a:avLst/>
@@ -7697,85 +9696,157 @@
           <a:bodyPr wrap="square" lIns="0" tIns="0" rIns="0" bIns="0" rtlCol="0" anchor="t"/>
           <a:lstStyle/>
           <a:p>
-            <a:pPr algn="l" marL="342900" indent="-342900">
-              <a:spcAft>
-                <a:spcPts val="1400"/>
-              </a:spcAft>
-              <a:buSzPct val="100000"/>
-              <a:buChar char="•"/>
+            <a:pPr indent="0" marL="0">
+              <a:buNone/>
             </a:pPr>
             <a:r>
-              <a:rPr lang="en-US" sz="1700" dirty="0">
-                <a:solidFill>
-                  <a:srgbClr val="E5E7EB"/>
+              <a:rPr lang="en-US" sz="1800" b="1" dirty="0">
+                <a:solidFill>
+                  <a:schemeClr val="tx1"/>
                 </a:solidFill>
               </a:rPr>
-              <a:t>Shape, starting points, step size and a size cap each made the fit find more nuclei.</a:t>
-            </a:r>
-            <a:endParaRPr lang="en-US" sz="1700" dirty="0"/>
-          </a:p>
-          <a:p>
-            <a:pPr algn="l" marL="342900" indent="-342900">
-              <a:spcAft>
-                <a:spcPts val="1400"/>
-              </a:spcAft>
-              <a:buSzPct val="100000"/>
-              <a:buChar char="•"/>
+              <a:t>PSNR: JPEG2000 better</a:t>
+            </a:r>
+            <a:endParaRPr lang="en-US" sz="1800" dirty="0"/>
+          </a:p>
+          <a:p>
+            <a:pPr indent="0" marL="0">
+              <a:buNone/>
             </a:pPr>
             <a:r>
-              <a:rPr lang="en-US" sz="1700" dirty="0">
-                <a:solidFill>
-                  <a:srgbClr val="E5E7EB"/>
+              <a:rPr lang="en-US" sz="1800" dirty="0">
+                <a:solidFill>
+                  <a:schemeClr val="tx1"/>
                 </a:solidFill>
               </a:rPr>
-              <a:t>Blobs are good for looking, not for measuring: at the same file size a standard codec keeps nuclei as well or better.</a:t>
-            </a:r>
-            <a:endParaRPr lang="en-US" sz="1700" dirty="0"/>
-          </a:p>
-          <a:p>
-            <a:pPr algn="l" marL="342900" indent="-342900">
-              <a:spcAft>
-                <a:spcPts val="1400"/>
-              </a:spcAft>
-              <a:buSzPct val="100000"/>
-              <a:buChar char="•"/>
+              <a:t>on 12 of 12 frames</a:t>
+            </a:r>
+            <a:endParaRPr lang="en-US" sz="1800" dirty="0"/>
+          </a:p>
+        </p:txBody>
+      </p:sp>
+      <p:sp>
+        <p:nvSpPr>
+          <p:cNvPr id="6" name="detectors-card"/>
+          <p:cNvSpPr/>
+          <p:nvPr/>
+        </p:nvSpPr>
+        <p:spPr>
+          <a:xfrm>
+            <a:off x="5806440" y="2697480"/>
+            <a:ext cx="2880360" cy="1783080"/>
+          </a:xfrm>
+          <a:prstGeom prst="roundRect">
+            <a:avLst>
+              <a:gd name="adj" fmla="val 4103"/>
+            </a:avLst>
+          </a:prstGeom>
+          <a:solidFill>
+            <a:schemeClr val="bg2"/>
+          </a:solidFill>
+          <a:ln w="12700">
+            <a:solidFill>
+              <a:schemeClr val="bg2"/>
+            </a:solidFill>
+            <a:prstDash val="solid"/>
+          </a:ln>
+        </p:spPr>
+      </p:sp>
+      <p:sp>
+        <p:nvSpPr>
+          <p:cNvPr id="7" name="Text 4"/>
+          <p:cNvSpPr txBox="1"/>
+          <p:nvPr/>
+        </p:nvSpPr>
+        <p:spPr>
+          <a:xfrm>
+            <a:off x="5989320" y="2834640"/>
+            <a:ext cx="2560320" cy="1554480"/>
+          </a:xfrm>
+          <a:prstGeom prst="rect">
+            <a:avLst/>
+          </a:prstGeom>
+          <a:noFill/>
+          <a:ln/>
+        </p:spPr>
+        <p:txBody>
+          <a:bodyPr wrap="square" lIns="0" tIns="0" rIns="0" bIns="0" rtlCol="0" anchor="t"/>
+          <a:lstStyle/>
+          <a:p>
+            <a:pPr indent="0" marL="0">
+              <a:buNone/>
             </a:pPr>
             <a:r>
-              <a:rPr lang="en-US" sz="1700" dirty="0">
-                <a:solidFill>
-                  <a:srgbClr val="E5E7EB"/>
+              <a:rPr lang="en-US" sz="1500" b="1" dirty="0">
+                <a:solidFill>
+                  <a:schemeClr val="tx1"/>
                 </a:solidFill>
               </a:rPr>
-              <a:t>PSNR cannot choose the format: test with the analysis you will actually run.</a:t>
-            </a:r>
-            <a:endParaRPr lang="en-US" sz="1700" dirty="0"/>
-          </a:p>
-        </p:txBody>
-      </p:sp>
-      <p:pic>
-        <p:nvPicPr>
-          <p:cNvPr id="4" name="end-tribolium" descr="D:\masters\MLCV seminar\TeamProject\presentation\figs\title_tribolium.png">    </p:cNvPr>
-          <p:cNvPicPr>
-            <a:picLocks noChangeAspect="1"/>
-          </p:cNvPicPr>
-          <p:nvPr/>
-        </p:nvPicPr>
-        <p:blipFill>
-          <a:blip r:embed="rId1"/>
-          <a:stretch>
-            <a:fillRect/>
-          </a:stretch>
-        </p:blipFill>
-        <p:spPr>
-          <a:xfrm>
-            <a:off x="6446520" y="320040"/>
-            <a:ext cx="2331720" cy="4434840"/>
+              <a:t>Detectors disagree</a:t>
+            </a:r>
+            <a:endParaRPr lang="en-US" sz="1500" dirty="0"/>
+          </a:p>
+          <a:p>
+            <a:pPr indent="0" marL="0">
+              <a:buNone/>
+            </a:pPr>
+            <a:r>
+              <a:rPr lang="en-US" sz="1500" dirty="0">
+                <a:solidFill>
+                  <a:schemeClr val="tx1"/>
+                </a:solidFill>
+              </a:rPr>
+              <a:t>Cellpose 3D prefers blobs; watershed and Cellpose 2D prefer JPEG2000; all prefer JPEG2000 past 300×</a:t>
+            </a:r>
+            <a:endParaRPr lang="en-US" sz="1500" dirty="0"/>
+          </a:p>
+        </p:txBody>
+      </p:sp>
+      <p:sp>
+        <p:nvSpPr>
+          <p:cNvPr id="25" name="Slide Number Placeholder 0"/>
+          <p:cNvSpPr>
+            <a:spLocks noGrp="1"/>
+          </p:cNvSpPr>
+          <p:nvPr>
+            <p:ph type="sldNum" sz="quarter" idx="4294967295"/>
+          </p:nvPr>
+        </p:nvSpPr>
+        <p:spPr>
+          <a:xfrm>
+            <a:off x="8229600" y="4754880"/>
+            <a:ext cx="457200" cy="228600"/>
           </a:xfrm>
           <a:prstGeom prst="rect">
             <a:avLst/>
           </a:prstGeom>
-        </p:spPr>
-      </p:pic>
+          <a:extLst>
+            <a:ext uri="{C572A759-6A51-4108-AA02-DFA0A04FC94B}">
+              <ma14:wrappingTextBoxFlag xmlns:ma14="http://schemas.microsoft.com/office/mac/drawingml/2011/main" val="0"/>
+            </a:ext>
+          </a:extLst>
+        </p:spPr>
+        <p:txBody>
+          <a:bodyPr/>
+          <a:lstStyle>
+            <a:lvl1pPr>
+              <a:defRPr sz="900">
+                <a:solidFill>
+                  <a:schemeClr val="accent5"/>
+                </a:solidFill>
+              </a:defRPr>
+            </a:lvl1pPr>
+          </a:lstStyle>
+          <a:p>
+            <a:pPr algn="r"/>
+            <a:fld id="{F7021451-1387-4CA6-816F-3879F97B5CBC}" type="slidenum">
+              <a:rPr b="0" lang="en-US"/>
+              <a:t>15</a:t>
+            </a:fld>
+            <a:endParaRPr lang="en-US"/>
+          </a:p>
+        </p:txBody>
+      </p:sp>
     </p:spTree>
   </p:cSld>
   <p:clrMapOvr>
@@ -7833,6 +9904,600 @@
                   <a:schemeClr val="tx1"/>
                 </a:solidFill>
               </a:rPr>
+              <a:t>Below ~3 blobs per nucleus, nuclei vanish</a:t>
+            </a:r>
+            <a:endParaRPr lang="en-US" sz="2800" dirty="0"/>
+          </a:p>
+        </p:txBody>
+      </p:sp>
+      <p:pic>
+        <p:nvPicPr>
+          <p:cNvPr id="3" name="cliff" descr="D:\masters\MLCV seminar\TeamProject\presentation\figs\cliff_deck.png">    </p:cNvPr>
+          <p:cNvPicPr>
+            <a:picLocks noChangeAspect="1"/>
+          </p:cNvPicPr>
+          <p:nvPr/>
+        </p:nvPicPr>
+        <p:blipFill>
+          <a:blip r:embed="rId1"/>
+          <a:stretch>
+            <a:fillRect/>
+          </a:stretch>
+        </p:blipFill>
+        <p:spPr>
+          <a:xfrm>
+            <a:off x="457200" y="1097280"/>
+            <a:ext cx="5257800" cy="3108960"/>
+          </a:xfrm>
+          <a:prstGeom prst="rect">
+            <a:avLst/>
+          </a:prstGeom>
+        </p:spPr>
+      </p:pic>
+      <p:sp>
+        <p:nvSpPr>
+          <p:cNvPr id="4" name="step-card-0"/>
+          <p:cNvSpPr/>
+          <p:nvPr/>
+        </p:nvSpPr>
+        <p:spPr>
+          <a:xfrm>
+            <a:off x="5897880" y="1051560"/>
+            <a:ext cx="2788920" cy="1143000"/>
+          </a:xfrm>
+          <a:prstGeom prst="roundRect">
+            <a:avLst>
+              <a:gd name="adj" fmla="val 6400"/>
+            </a:avLst>
+          </a:prstGeom>
+          <a:solidFill>
+            <a:schemeClr val="bg2"/>
+          </a:solidFill>
+          <a:ln w="12700">
+            <a:solidFill>
+              <a:schemeClr val="bg2"/>
+            </a:solidFill>
+            <a:prstDash val="solid"/>
+          </a:ln>
+        </p:spPr>
+      </p:sp>
+      <p:sp>
+        <p:nvSpPr>
+          <p:cNvPr id="5" name="Text 2"/>
+          <p:cNvSpPr txBox="1"/>
+          <p:nvPr/>
+        </p:nvSpPr>
+        <p:spPr>
+          <a:xfrm>
+            <a:off x="6062472" y="1143000"/>
+            <a:ext cx="2459736" cy="228600"/>
+          </a:xfrm>
+          <a:prstGeom prst="rect">
+            <a:avLst/>
+          </a:prstGeom>
+          <a:noFill/>
+          <a:ln/>
+        </p:spPr>
+        <p:txBody>
+          <a:bodyPr wrap="square" lIns="0" tIns="0" rIns="0" bIns="0" rtlCol="0" anchor="t"/>
+          <a:lstStyle/>
+          <a:p>
+            <a:pPr indent="0" marL="0">
+              <a:buNone/>
+            </a:pPr>
+            <a:r>
+              <a:rPr lang="en-US" sz="1200" b="1" dirty="0">
+                <a:solidFill>
+                  <a:schemeClr val="accent1"/>
+                </a:solidFill>
+              </a:rPr>
+              <a:t>WHAT WE SEE</a:t>
+            </a:r>
+            <a:endParaRPr lang="en-US" sz="1200" dirty="0"/>
+          </a:p>
+        </p:txBody>
+      </p:sp>
+      <p:sp>
+        <p:nvSpPr>
+          <p:cNvPr id="6" name="Text 3"/>
+          <p:cNvSpPr txBox="1"/>
+          <p:nvPr/>
+        </p:nvSpPr>
+        <p:spPr>
+          <a:xfrm>
+            <a:off x="6062472" y="1399032"/>
+            <a:ext cx="2459736" cy="722376"/>
+          </a:xfrm>
+          <a:prstGeom prst="rect">
+            <a:avLst/>
+          </a:prstGeom>
+          <a:noFill/>
+          <a:ln/>
+        </p:spPr>
+        <p:txBody>
+          <a:bodyPr wrap="square" lIns="0" tIns="0" rIns="0" bIns="0" rtlCol="0" anchor="t"/>
+          <a:lstStyle/>
+          <a:p>
+            <a:pPr indent="0" marL="0">
+              <a:buNone/>
+            </a:pPr>
+            <a:r>
+              <a:rPr lang="en-US" sz="1400" dirty="0">
+                <a:solidFill>
+                  <a:schemeClr val="tx1"/>
+                </a:solidFill>
+              </a:rPr>
+              <a:t>Nuclei kept drops below 90% at 1.1-3.1 blobs per nucleus, on all 12 frames</a:t>
+            </a:r>
+            <a:endParaRPr lang="en-US" sz="1400" dirty="0"/>
+          </a:p>
+        </p:txBody>
+      </p:sp>
+      <p:sp>
+        <p:nvSpPr>
+          <p:cNvPr id="7" name="step-card-1"/>
+          <p:cNvSpPr/>
+          <p:nvPr/>
+        </p:nvSpPr>
+        <p:spPr>
+          <a:xfrm>
+            <a:off x="5897880" y="2258568"/>
+            <a:ext cx="2788920" cy="1143000"/>
+          </a:xfrm>
+          <a:prstGeom prst="roundRect">
+            <a:avLst>
+              <a:gd name="adj" fmla="val 6400"/>
+            </a:avLst>
+          </a:prstGeom>
+          <a:solidFill>
+            <a:schemeClr val="bg2"/>
+          </a:solidFill>
+          <a:ln w="12700">
+            <a:solidFill>
+              <a:schemeClr val="bg2"/>
+            </a:solidFill>
+            <a:prstDash val="solid"/>
+          </a:ln>
+        </p:spPr>
+      </p:sp>
+      <p:sp>
+        <p:nvSpPr>
+          <p:cNvPr id="8" name="Text 5"/>
+          <p:cNvSpPr txBox="1"/>
+          <p:nvPr/>
+        </p:nvSpPr>
+        <p:spPr>
+          <a:xfrm>
+            <a:off x="6062472" y="2350008"/>
+            <a:ext cx="2459736" cy="228600"/>
+          </a:xfrm>
+          <a:prstGeom prst="rect">
+            <a:avLst/>
+          </a:prstGeom>
+          <a:noFill/>
+          <a:ln/>
+        </p:spPr>
+        <p:txBody>
+          <a:bodyPr wrap="square" lIns="0" tIns="0" rIns="0" bIns="0" rtlCol="0" anchor="t"/>
+          <a:lstStyle/>
+          <a:p>
+            <a:pPr indent="0" marL="0">
+              <a:buNone/>
+            </a:pPr>
+            <a:r>
+              <a:rPr lang="en-US" sz="1200" b="1" dirty="0">
+                <a:solidFill>
+                  <a:schemeClr val="accent1"/>
+                </a:solidFill>
+              </a:rPr>
+              <a:t>PSNR</a:t>
+            </a:r>
+            <a:endParaRPr lang="en-US" sz="1200" dirty="0"/>
+          </a:p>
+        </p:txBody>
+      </p:sp>
+      <p:sp>
+        <p:nvSpPr>
+          <p:cNvPr id="9" name="Text 6"/>
+          <p:cNvSpPr txBox="1"/>
+          <p:nvPr/>
+        </p:nvSpPr>
+        <p:spPr>
+          <a:xfrm>
+            <a:off x="6062472" y="2606040"/>
+            <a:ext cx="2459736" cy="722376"/>
+          </a:xfrm>
+          <a:prstGeom prst="rect">
+            <a:avLst/>
+          </a:prstGeom>
+          <a:noFill/>
+          <a:ln/>
+        </p:spPr>
+        <p:txBody>
+          <a:bodyPr wrap="square" lIns="0" tIns="0" rIns="0" bIns="0" rtlCol="0" anchor="t"/>
+          <a:lstStyle/>
+          <a:p>
+            <a:pPr indent="0" marL="0">
+              <a:buNone/>
+            </a:pPr>
+            <a:r>
+              <a:rPr lang="en-US" sz="1400" dirty="0">
+                <a:solidFill>
+                  <a:schemeClr val="tx1"/>
+                </a:solidFill>
+              </a:rPr>
+              <a:t>Barely moves over these budgets: at most 2.6 dB per frame</a:t>
+            </a:r>
+            <a:endParaRPr lang="en-US" sz="1400" dirty="0"/>
+          </a:p>
+        </p:txBody>
+      </p:sp>
+      <p:sp>
+        <p:nvSpPr>
+          <p:cNvPr id="10" name="step-card-2"/>
+          <p:cNvSpPr/>
+          <p:nvPr/>
+        </p:nvSpPr>
+        <p:spPr>
+          <a:xfrm>
+            <a:off x="5897880" y="3465576"/>
+            <a:ext cx="2788920" cy="1143000"/>
+          </a:xfrm>
+          <a:prstGeom prst="roundRect">
+            <a:avLst>
+              <a:gd name="adj" fmla="val 6400"/>
+            </a:avLst>
+          </a:prstGeom>
+          <a:solidFill>
+            <a:schemeClr val="bg2"/>
+          </a:solidFill>
+          <a:ln w="12700">
+            <a:solidFill>
+              <a:schemeClr val="bg2"/>
+            </a:solidFill>
+            <a:prstDash val="solid"/>
+          </a:ln>
+        </p:spPr>
+      </p:sp>
+      <p:sp>
+        <p:nvSpPr>
+          <p:cNvPr id="11" name="Text 8"/>
+          <p:cNvSpPr txBox="1"/>
+          <p:nvPr/>
+        </p:nvSpPr>
+        <p:spPr>
+          <a:xfrm>
+            <a:off x="6062472" y="3557016"/>
+            <a:ext cx="2459736" cy="228600"/>
+          </a:xfrm>
+          <a:prstGeom prst="rect">
+            <a:avLst/>
+          </a:prstGeom>
+          <a:noFill/>
+          <a:ln/>
+        </p:spPr>
+        <p:txBody>
+          <a:bodyPr wrap="square" lIns="0" tIns="0" rIns="0" bIns="0" rtlCol="0" anchor="t"/>
+          <a:lstStyle/>
+          <a:p>
+            <a:pPr indent="0" marL="0">
+              <a:buNone/>
+            </a:pPr>
+            <a:r>
+              <a:rPr lang="en-US" sz="1200" b="1" dirty="0">
+                <a:solidFill>
+                  <a:schemeClr val="accent1"/>
+                </a:solidFill>
+              </a:rPr>
+              <a:t>SO</a:t>
+            </a:r>
+            <a:endParaRPr lang="en-US" sz="1200" dirty="0"/>
+          </a:p>
+        </p:txBody>
+      </p:sp>
+      <p:sp>
+        <p:nvSpPr>
+          <p:cNvPr id="12" name="Text 9"/>
+          <p:cNvSpPr txBox="1"/>
+          <p:nvPr/>
+        </p:nvSpPr>
+        <p:spPr>
+          <a:xfrm>
+            <a:off x="6062472" y="3813048"/>
+            <a:ext cx="2459736" cy="722376"/>
+          </a:xfrm>
+          <a:prstGeom prst="rect">
+            <a:avLst/>
+          </a:prstGeom>
+          <a:noFill/>
+          <a:ln/>
+        </p:spPr>
+        <p:txBody>
+          <a:bodyPr wrap="square" lIns="0" tIns="0" rIns="0" bIns="0" rtlCol="0" anchor="t"/>
+          <a:lstStyle/>
+          <a:p>
+            <a:pPr indent="0" marL="0">
+              <a:buNone/>
+            </a:pPr>
+            <a:r>
+              <a:rPr lang="en-US" sz="1400" dirty="0">
+                <a:solidFill>
+                  <a:schemeClr val="tx1"/>
+                </a:solidFill>
+              </a:rPr>
+              <a:t>Image quality cannot tell you when the blob budget is too small</a:t>
+            </a:r>
+            <a:endParaRPr lang="en-US" sz="1400" dirty="0"/>
+          </a:p>
+        </p:txBody>
+      </p:sp>
+      <p:sp>
+        <p:nvSpPr>
+          <p:cNvPr id="25" name="Slide Number Placeholder 0"/>
+          <p:cNvSpPr>
+            <a:spLocks noGrp="1"/>
+          </p:cNvSpPr>
+          <p:nvPr>
+            <p:ph type="sldNum" sz="quarter" idx="4294967295"/>
+          </p:nvPr>
+        </p:nvSpPr>
+        <p:spPr>
+          <a:xfrm>
+            <a:off x="8229600" y="4754880"/>
+            <a:ext cx="457200" cy="228600"/>
+          </a:xfrm>
+          <a:prstGeom prst="rect">
+            <a:avLst/>
+          </a:prstGeom>
+          <a:extLst>
+            <a:ext uri="{C572A759-6A51-4108-AA02-DFA0A04FC94B}">
+              <ma14:wrappingTextBoxFlag xmlns:ma14="http://schemas.microsoft.com/office/mac/drawingml/2011/main" val="0"/>
+            </a:ext>
+          </a:extLst>
+        </p:spPr>
+        <p:txBody>
+          <a:bodyPr/>
+          <a:lstStyle>
+            <a:lvl1pPr>
+              <a:defRPr sz="900">
+                <a:solidFill>
+                  <a:schemeClr val="accent5"/>
+                </a:solidFill>
+              </a:defRPr>
+            </a:lvl1pPr>
+          </a:lstStyle>
+          <a:p>
+            <a:pPr algn="r"/>
+            <a:fld id="{F7021451-1387-4CA6-816F-3879F97B5CBC}" type="slidenum">
+              <a:rPr b="0" lang="en-US"/>
+              <a:t>16</a:t>
+            </a:fld>
+            <a:endParaRPr lang="en-US"/>
+          </a:p>
+        </p:txBody>
+      </p:sp>
+    </p:spTree>
+  </p:cSld>
+  <p:clrMapOvr>
+    <a:masterClrMapping/>
+  </p:clrMapOvr>
+</p:sld>
+</file>
+
+<file path=ppt/slides/slide17.xml><?xml version="1.0" encoding="utf-8"?>
+<p:sld xmlns:a="http://schemas.openxmlformats.org/drawingml/2006/main" xmlns:r="http://schemas.openxmlformats.org/officeDocument/2006/relationships" xmlns:p="http://schemas.openxmlformats.org/presentationml/2006/main">
+  <p:cSld name="Slide 17">
+    <p:spTree>
+      <p:nvGrpSpPr>
+        <p:cNvPr id="1" name=""/>
+        <p:cNvGrpSpPr/>
+        <p:nvPr/>
+      </p:nvGrpSpPr>
+      <p:grpSpPr>
+        <a:xfrm>
+          <a:off x="0" y="0"/>
+          <a:ext cx="0" cy="0"/>
+          <a:chOff x="0" y="0"/>
+          <a:chExt cx="0" cy="0"/>
+        </a:xfrm>
+      </p:grpSpPr>
+      <p:sp>
+        <p:nvSpPr>
+          <p:cNvPr id="2" name="Text 0"/>
+          <p:cNvSpPr/>
+          <p:nvPr>
+            <p:ph idx="100" type="title" hasCustomPrompt="1"/>
+          </p:nvPr>
+        </p:nvSpPr>
+        <p:spPr>
+          <a:xfrm>
+            <a:off x="548640" y="411480"/>
+            <a:ext cx="5486400" cy="731520"/>
+          </a:xfrm>
+          <a:prstGeom prst="rect">
+            <a:avLst/>
+          </a:prstGeom>
+          <a:noFill/>
+          <a:ln/>
+        </p:spPr>
+        <p:txBody>
+          <a:bodyPr wrap="square" lIns="0" tIns="0" rIns="0" bIns="0" rtlCol="0" anchor="ctr"/>
+          <a:lstStyle/>
+          <a:p>
+            <a:pPr algn="l" indent="0" marL="0">
+              <a:buNone/>
+            </a:pPr>
+            <a:r>
+              <a:rPr lang="en-US" sz="3200" b="1" dirty="0">
+                <a:solidFill>
+                  <a:schemeClr val="bg1"/>
+                </a:solidFill>
+              </a:rPr>
+              <a:t>What we learned</a:t>
+            </a:r>
+            <a:endParaRPr lang="en-US" sz="3200" dirty="0"/>
+          </a:p>
+        </p:txBody>
+      </p:sp>
+      <p:sp>
+        <p:nvSpPr>
+          <p:cNvPr id="3" name="Text 0"/>
+          <p:cNvSpPr/>
+          <p:nvPr>
+            <p:ph idx="101" type="body" hasCustomPrompt="1"/>
+          </p:nvPr>
+        </p:nvSpPr>
+        <p:spPr>
+          <a:xfrm>
+            <a:off x="548640" y="1371600"/>
+            <a:ext cx="5486400" cy="3200400"/>
+          </a:xfrm>
+          <a:prstGeom prst="rect">
+            <a:avLst/>
+          </a:prstGeom>
+          <a:noFill/>
+          <a:ln/>
+        </p:spPr>
+        <p:txBody>
+          <a:bodyPr wrap="square" lIns="0" tIns="0" rIns="0" bIns="0" rtlCol="0" anchor="t"/>
+          <a:lstStyle/>
+          <a:p>
+            <a:pPr algn="l" marL="342900" indent="-342900">
+              <a:spcAft>
+                <a:spcPts val="1400"/>
+              </a:spcAft>
+              <a:buSzPct val="100000"/>
+              <a:buChar char="•"/>
+            </a:pPr>
+            <a:r>
+              <a:rPr lang="en-US" sz="1700" dirty="0">
+                <a:solidFill>
+                  <a:srgbClr val="E5E7EB"/>
+                </a:solidFill>
+              </a:rPr>
+              <a:t>Shape, starting points, step size and a size cap each made the fit find more nuclei.</a:t>
+            </a:r>
+            <a:endParaRPr lang="en-US" sz="1700" dirty="0"/>
+          </a:p>
+          <a:p>
+            <a:pPr algn="l" marL="342900" indent="-342900">
+              <a:spcAft>
+                <a:spcPts val="1400"/>
+              </a:spcAft>
+              <a:buSzPct val="100000"/>
+              <a:buChar char="•"/>
+            </a:pPr>
+            <a:r>
+              <a:rPr lang="en-US" sz="1700" dirty="0">
+                <a:solidFill>
+                  <a:srgbClr val="E5E7EB"/>
+                </a:solidFill>
+              </a:rPr>
+              <a:t>Blobs are good for looking, not for measuring: at the same file size a standard codec keeps nuclei as well or better.</a:t>
+            </a:r>
+            <a:endParaRPr lang="en-US" sz="1700" dirty="0"/>
+          </a:p>
+          <a:p>
+            <a:pPr algn="l" marL="342900" indent="-342900">
+              <a:spcAft>
+                <a:spcPts val="1400"/>
+              </a:spcAft>
+              <a:buSzPct val="100000"/>
+              <a:buChar char="•"/>
+            </a:pPr>
+            <a:r>
+              <a:rPr lang="en-US" sz="1700" dirty="0">
+                <a:solidFill>
+                  <a:srgbClr val="E5E7EB"/>
+                </a:solidFill>
+              </a:rPr>
+              <a:t>PSNR cannot choose the format: test with the analysis you will actually run.</a:t>
+            </a:r>
+            <a:endParaRPr lang="en-US" sz="1700" dirty="0"/>
+          </a:p>
+        </p:txBody>
+      </p:sp>
+      <p:pic>
+        <p:nvPicPr>
+          <p:cNvPr id="4" name="end-tribolium" descr="D:\masters\MLCV seminar\TeamProject\presentation\figs\title_tribolium.png">    </p:cNvPr>
+          <p:cNvPicPr>
+            <a:picLocks noChangeAspect="1"/>
+          </p:cNvPicPr>
+          <p:nvPr/>
+        </p:nvPicPr>
+        <p:blipFill>
+          <a:blip r:embed="rId1"/>
+          <a:stretch>
+            <a:fillRect/>
+          </a:stretch>
+        </p:blipFill>
+        <p:spPr>
+          <a:xfrm>
+            <a:off x="6446520" y="320040"/>
+            <a:ext cx="2331720" cy="4434840"/>
+          </a:xfrm>
+          <a:prstGeom prst="rect">
+            <a:avLst/>
+          </a:prstGeom>
+        </p:spPr>
+      </p:pic>
+    </p:spTree>
+  </p:cSld>
+  <p:clrMapOvr>
+    <a:masterClrMapping/>
+  </p:clrMapOvr>
+</p:sld>
+</file>
+
+<file path=ppt/slides/slide18.xml><?xml version="1.0" encoding="utf-8"?>
+<p:sld xmlns:a="http://schemas.openxmlformats.org/drawingml/2006/main" xmlns:r="http://schemas.openxmlformats.org/officeDocument/2006/relationships" xmlns:p="http://schemas.openxmlformats.org/presentationml/2006/main">
+  <p:cSld name="Slide 18">
+    <p:spTree>
+      <p:nvGrpSpPr>
+        <p:cNvPr id="1" name=""/>
+        <p:cNvGrpSpPr/>
+        <p:nvPr/>
+      </p:nvGrpSpPr>
+      <p:grpSpPr>
+        <a:xfrm>
+          <a:off x="0" y="0"/>
+          <a:ext cx="0" cy="0"/>
+          <a:chOff x="0" y="0"/>
+          <a:chExt cx="0" cy="0"/>
+        </a:xfrm>
+      </p:grpSpPr>
+      <p:sp>
+        <p:nvSpPr>
+          <p:cNvPr id="2" name="Text 0"/>
+          <p:cNvSpPr/>
+          <p:nvPr>
+            <p:ph idx="100" type="title" hasCustomPrompt="1"/>
+          </p:nvPr>
+        </p:nvSpPr>
+        <p:spPr>
+          <a:xfrm>
+            <a:off x="457200" y="256032"/>
+            <a:ext cx="8229600" cy="640080"/>
+          </a:xfrm>
+          <a:prstGeom prst="rect">
+            <a:avLst/>
+          </a:prstGeom>
+          <a:noFill/>
+          <a:ln/>
+        </p:spPr>
+        <p:txBody>
+          <a:bodyPr wrap="square" lIns="0" tIns="0" rIns="0" bIns="0" rtlCol="0" anchor="ctr"/>
+          <a:lstStyle/>
+          <a:p>
+            <a:pPr algn="l" indent="0" marL="0">
+              <a:buNone/>
+            </a:pPr>
+            <a:r>
+              <a:rPr lang="en-US" sz="2800" b="1" dirty="0">
+                <a:solidFill>
+                  <a:schemeClr val="tx1"/>
+                </a:solidFill>
+              </a:rPr>
               <a:t>Next: compression that biologists can use</a:t>
             </a:r>
             <a:endParaRPr lang="en-US" sz="2800" dirty="0"/>
@@ -8211,7 +10876,7 @@
             <a:pPr algn="r"/>
             <a:fld id="{F7021451-1387-4CA6-816F-3879F97B5CBC}" type="slidenum">
               <a:rPr b="0" lang="en-US"/>
-              <a:t>16</a:t>
+              <a:t>18</a:t>
             </a:fld>
             <a:endParaRPr lang="en-US"/>
           </a:p>
@@ -10434,7 +13099,7 @@
                   <a:schemeClr val="tx1"/>
                 </a:solidFill>
               </a:rPr>
-              <a:t>Step 1 · Let blobs stretch and rotate</a:t>
+              <a:t>Step 1 · Start blobs on bright peaks</a:t>
             </a:r>
             <a:endParaRPr lang="en-US" sz="2800" dirty="0"/>
           </a:p>
@@ -10513,7 +13178,7 @@
                   <a:schemeClr val="accent1"/>
                 </a:solidFill>
               </a:rPr>
-              <a:t>WHAT WE CHANGED</a:t>
+              <a:t>WHAT AKIM CHANGED</a:t>
             </a:r>
             <a:endParaRPr lang="en-US" sz="1200" dirty="0"/>
           </a:p>
@@ -10549,7 +13214,7 @@
                   <a:schemeClr val="tx1"/>
                 </a:solidFill>
               </a:rPr>
-              <a:t>One size per blob → three sizes → three sizes plus rotation</a:t>
+              <a:t>Random starting positions → one blob on each bright peak</a:t>
             </a:r>
             <a:endParaRPr lang="en-US" sz="1400" dirty="0"/>
           </a:p>
@@ -10648,7 +13313,7 @@
                   <a:schemeClr val="tx1"/>
                 </a:solidFill>
               </a:rPr>
-              <a:t>Nuclei look elongated in depth, and round blobs cannot fit that</a:t>
+              <a:t>A blob that starts far from any structure wastes the whole fit</a:t>
             </a:r>
             <a:endParaRPr lang="en-US" sz="1400" dirty="0"/>
           </a:p>
@@ -10747,7 +13412,7 @@
                   <a:schemeClr val="tx1"/>
                 </a:solidFill>
               </a:rPr>
-              <a:t>+3.2 dB (15 fits per bar). Learned blobs are as stretched as real nuclei</a:t>
+              <a:t>+21 dB on the phantom (32 → 53); more steps alone gave only +1.7</a:t>
             </a:r>
             <a:endParaRPr lang="en-US" sz="1400" dirty="0"/>
           </a:p>
@@ -10855,7 +13520,7 @@
                   <a:schemeClr val="tx1"/>
                 </a:solidFill>
               </a:rPr>
-              <a:t>Step 2 · Start each blob on a nucleus</a:t>
+              <a:t>Step 2 · Real data: stretched, rotated blobs win</a:t>
             </a:r>
             <a:endParaRPr lang="en-US" sz="2800" dirty="0"/>
           </a:p>
@@ -10934,7 +13599,7 @@
                   <a:schemeClr val="accent1"/>
                 </a:solidFill>
               </a:rPr>
-              <a:t>WHAT WE CHANGED</a:t>
+              <a:t>WHAT AKIM TESTED</a:t>
             </a:r>
             <a:endParaRPr lang="en-US" sz="1200" dirty="0"/>
           </a:p>
@@ -10970,7 +13635,7 @@
                   <a:schemeClr val="tx1"/>
                 </a:solidFill>
               </a:rPr>
-              <a:t>Place one starting blob on every detected nucleus before spending blobs elsewhere</a:t>
+              <a:t>43 experiments, 299 fits: 4 blob shapes, 50-1,000 blobs, sampling, loss, automatic settings</a:t>
             </a:r>
             <a:endParaRPr lang="en-US" sz="1400" dirty="0"/>
           </a:p>
@@ -11069,7 +13734,7 @@
                   <a:schemeClr val="tx1"/>
                 </a:solidFill>
               </a:rPr>
-              <a:t>During fitting blobs moved less than 1 voxel; nuclei are ~20 voxels apart</a:t>
+              <a:t>Real nuclei are not the phantom: stretched, unevenly bright, packed tightly</a:t>
             </a:r>
             <a:endParaRPr lang="en-US" sz="1400" dirty="0"/>
           </a:p>
@@ -11168,7 +13833,7 @@
                   <a:schemeClr val="tx1"/>
                 </a:solidFill>
               </a:rPr>
-              <a:t>Every nucleus gets a blob (73% → 100%); found nuclei 52% → 71%</a:t>
+              <a:t>Stretched + rotated blobs best; top fit 25.9 dB with 750-1,000 blobs on the whole volume</a:t>
             </a:r>
             <a:endParaRPr lang="en-US" sz="1400" dirty="0"/>
           </a:p>
@@ -11276,7 +13941,7 @@
                   <a:schemeClr val="tx1"/>
                 </a:solidFill>
               </a:rPr>
-              <a:t>Step 3 · Bigger steps let blobs travel</a:t>
+              <a:t>Step 3 · Repeats confirm: stretching is real</a:t>
             </a:r>
             <a:endParaRPr lang="en-US" sz="2800" dirty="0"/>
           </a:p>
@@ -11355,7 +14020,7 @@
                   <a:schemeClr val="accent1"/>
                 </a:solidFill>
               </a:rPr>
-              <a:t>WHAT WE CHANGED</a:t>
+              <a:t>WHAT WE DID</a:t>
             </a:r>
             <a:endParaRPr lang="en-US" sz="1200" dirty="0"/>
           </a:p>
@@ -11391,7 +14056,7 @@
                   <a:schemeClr val="tx1"/>
                 </a:solidFill>
               </a:rPr>
-              <a:t>Raised the step size for blob positions up to 62×</a:t>
+              <a:t>Re-ran round, stretched and stretched + rotated blobs with 5 seeds and 3 budgets each</a:t>
             </a:r>
             <a:endParaRPr lang="en-US" sz="1400" dirty="0"/>
           </a:p>
@@ -11490,7 +14155,7 @@
                   <a:schemeClr val="tx1"/>
                 </a:solidFill>
               </a:rPr>
-              <a:t>The default was copied from photo-scene code and never scaled to voxel units</a:t>
+              <a:t>Akim had one run per setting; a single run can be luck</a:t>
             </a:r>
             <a:endParaRPr lang="en-US" sz="1400" dirty="0"/>
           </a:p>
@@ -11589,7 +14254,7 @@
                   <a:schemeClr val="tx1"/>
                 </a:solidFill>
               </a:rPr>
-              <a:t>Badly started fits catch up (F1 0.64 → 0.78), but good starts get worse (0.84 → 0.78)</a:t>
+              <a:t>+3.2 dB with small spread; learned blobs are as stretched as real nuclei</a:t>
             </a:r>
             <a:endParaRPr lang="en-US" sz="1400" dirty="0"/>
           </a:p>
@@ -11697,75 +14362,31 @@
                   <a:schemeClr val="tx1"/>
                 </a:solidFill>
               </a:rPr>
-              <a:t>Step 4 · Faint nuclei: cap the blob size</a:t>
+              <a:t>Step 4 · Start each blob on a nucleus</a:t>
             </a:r>
             <a:endParaRPr lang="en-US" sz="2800" dirty="0"/>
           </a:p>
         </p:txBody>
       </p:sp>
-      <p:pic>
-        <p:nvPicPr>
-          <p:cNvPr id="3" name="size-cap" descr="D:\masters\MLCV seminar\TeamProject\presentation\figs\size_cap.png">    </p:cNvPr>
-          <p:cNvPicPr>
-            <a:picLocks noChangeAspect="1"/>
-          </p:cNvPicPr>
+      <p:graphicFrame>
+        <p:nvGraphicFramePr>
+          <p:cNvPr id="3" name="Chart 0" descr=""/>
+          <p:cNvGraphicFramePr/>
           <p:nvPr/>
-        </p:nvPicPr>
-        <p:blipFill>
-          <a:blip r:embed="rId1"/>
-          <a:stretch>
-            <a:fillRect/>
-          </a:stretch>
-        </p:blipFill>
-        <p:spPr>
-          <a:xfrm>
-            <a:off x="457200" y="1097280"/>
-            <a:ext cx="4754880" cy="2377440"/>
-          </a:xfrm>
-          <a:prstGeom prst="rect">
-            <a:avLst/>
-          </a:prstGeom>
-        </p:spPr>
-      </p:pic>
-      <p:sp>
-        <p:nvSpPr>
-          <p:cNvPr id="4" name="Text 1"/>
-          <p:cNvSpPr txBox="1"/>
-          <p:nvPr/>
-        </p:nvSpPr>
-        <p:spPr>
-          <a:xfrm>
-            <a:off x="457200" y="3566160"/>
-            <a:ext cx="4754880" cy="274320"/>
-          </a:xfrm>
-          <a:prstGeom prst="rect">
-            <a:avLst/>
-          </a:prstGeom>
-          <a:noFill/>
-          <a:ln/>
-        </p:spPr>
-        <p:txBody>
-          <a:bodyPr wrap="square" lIns="0" tIns="0" rIns="0" bIns="0" rtlCol="0" anchor="t"/>
-          <a:lstStyle/>
-          <a:p>
-            <a:pPr indent="0" marL="0">
-              <a:buNone/>
-            </a:pPr>
-            <a:r>
-              <a:rPr lang="en-US" sz="1100" dirty="0">
-                <a:solidFill>
-                  <a:schemeClr val="accent5"/>
-                </a:solidFill>
-              </a:rPr>
-              <a:t>Green: nucleus found  ·  red: missed</a:t>
-            </a:r>
-            <a:endParaRPr lang="en-US" sz="1100" dirty="0"/>
-          </a:p>
-        </p:txBody>
-      </p:sp>
-      <p:sp>
-        <p:nvSpPr>
-          <p:cNvPr id="5" name="step-card-0"/>
+        </p:nvGraphicFramePr>
+        <p:xfrm>
+          <a:off x="457200" y="1051560"/>
+          <a:ext cx="4754880" cy="3246120"/>
+        </p:xfrm>
+        <a:graphic xmlns:a="http://schemas.openxmlformats.org/drawingml/2006/main">
+          <a:graphicData uri="http://schemas.openxmlformats.org/drawingml/2006/chart">
+            <c:chart xmlns:c="http://schemas.openxmlformats.org/drawingml/2006/chart" r:id="rId1"/>
+          </a:graphicData>
+        </a:graphic>
+      </p:graphicFrame>
+      <p:sp>
+        <p:nvSpPr>
+          <p:cNvPr id="4" name="step-card-0"/>
           <p:cNvSpPr/>
           <p:nvPr/>
         </p:nvSpPr>
@@ -11792,14 +14413,50 @@
       </p:sp>
       <p:sp>
         <p:nvSpPr>
+          <p:cNvPr id="5" name="Text 2"/>
+          <p:cNvSpPr txBox="1"/>
+          <p:nvPr/>
+        </p:nvSpPr>
+        <p:spPr>
+          <a:xfrm>
+            <a:off x="5650992" y="1143000"/>
+            <a:ext cx="2871216" cy="228600"/>
+          </a:xfrm>
+          <a:prstGeom prst="rect">
+            <a:avLst/>
+          </a:prstGeom>
+          <a:noFill/>
+          <a:ln/>
+        </p:spPr>
+        <p:txBody>
+          <a:bodyPr wrap="square" lIns="0" tIns="0" rIns="0" bIns="0" rtlCol="0" anchor="t"/>
+          <a:lstStyle/>
+          <a:p>
+            <a:pPr indent="0" marL="0">
+              <a:buNone/>
+            </a:pPr>
+            <a:r>
+              <a:rPr lang="en-US" sz="1200" b="1" dirty="0">
+                <a:solidFill>
+                  <a:schemeClr val="accent1"/>
+                </a:solidFill>
+              </a:rPr>
+              <a:t>WHAT WE CHANGED</a:t>
+            </a:r>
+            <a:endParaRPr lang="en-US" sz="1200" dirty="0"/>
+          </a:p>
+        </p:txBody>
+      </p:sp>
+      <p:sp>
+        <p:nvSpPr>
           <p:cNvPr id="6" name="Text 3"/>
           <p:cNvSpPr txBox="1"/>
           <p:nvPr/>
         </p:nvSpPr>
         <p:spPr>
           <a:xfrm>
-            <a:off x="5650992" y="1143000"/>
-            <a:ext cx="2871216" cy="228600"/>
+            <a:off x="5650992" y="1399032"/>
+            <a:ext cx="2871216" cy="722376"/>
           </a:xfrm>
           <a:prstGeom prst="rect">
             <a:avLst/>
@@ -11815,48 +14472,12 @@
               <a:buNone/>
             </a:pPr>
             <a:r>
-              <a:rPr lang="en-US" sz="1200" b="1" dirty="0">
-                <a:solidFill>
-                  <a:schemeClr val="accent1"/>
+              <a:rPr lang="en-US" sz="1400" dirty="0">
+                <a:solidFill>
+                  <a:schemeClr val="tx1"/>
                 </a:solidFill>
               </a:rPr>
-              <a:t>WHAT WE CHANGED</a:t>
-            </a:r>
-            <a:endParaRPr lang="en-US" sz="1200" dirty="0"/>
-          </a:p>
-        </p:txBody>
-      </p:sp>
-      <p:sp>
-        <p:nvSpPr>
-          <p:cNvPr id="7" name="Text 4"/>
-          <p:cNvSpPr txBox="1"/>
-          <p:nvPr/>
-        </p:nvSpPr>
-        <p:spPr>
-          <a:xfrm>
-            <a:off x="5650992" y="1399032"/>
-            <a:ext cx="2871216" cy="722376"/>
-          </a:xfrm>
-          <a:prstGeom prst="rect">
-            <a:avLst/>
-          </a:prstGeom>
-          <a:noFill/>
-          <a:ln/>
-        </p:spPr>
-        <p:txBody>
-          <a:bodyPr wrap="square" lIns="0" tIns="0" rIns="0" bIns="0" rtlCol="0" anchor="t"/>
-          <a:lstStyle/>
-          <a:p>
-            <a:pPr indent="0" marL="0">
-              <a:buNone/>
-            </a:pPr>
-            <a:r>
-              <a:rPr lang="en-US" sz="1400" dirty="0">
-                <a:solidFill>
-                  <a:schemeClr val="tx1"/>
-                </a:solidFill>
-              </a:rPr>
-              <a:t>Limited how wide a nucleus blob may grow (10 voxels)</a:t>
+              <a:t>Bright-peak starts → one starting blob on every detected nucleus first</a:t>
             </a:r>
             <a:endParaRPr lang="en-US" sz="1400" dirty="0"/>
           </a:p>
@@ -11864,7 +14485,7 @@
       </p:sp>
       <p:sp>
         <p:nvSpPr>
-          <p:cNvPr id="8" name="step-card-1"/>
+          <p:cNvPr id="7" name="step-card-1"/>
           <p:cNvSpPr/>
           <p:nvPr/>
         </p:nvSpPr>
@@ -11891,14 +14512,50 @@
       </p:sp>
       <p:sp>
         <p:nvSpPr>
+          <p:cNvPr id="8" name="Text 5"/>
+          <p:cNvSpPr txBox="1"/>
+          <p:nvPr/>
+        </p:nvSpPr>
+        <p:spPr>
+          <a:xfrm>
+            <a:off x="5650992" y="2350008"/>
+            <a:ext cx="2871216" cy="228600"/>
+          </a:xfrm>
+          <a:prstGeom prst="rect">
+            <a:avLst/>
+          </a:prstGeom>
+          <a:noFill/>
+          <a:ln/>
+        </p:spPr>
+        <p:txBody>
+          <a:bodyPr wrap="square" lIns="0" tIns="0" rIns="0" bIns="0" rtlCol="0" anchor="t"/>
+          <a:lstStyle/>
+          <a:p>
+            <a:pPr indent="0" marL="0">
+              <a:buNone/>
+            </a:pPr>
+            <a:r>
+              <a:rPr lang="en-US" sz="1200" b="1" dirty="0">
+                <a:solidFill>
+                  <a:schemeClr val="accent1"/>
+                </a:solidFill>
+              </a:rPr>
+              <a:t>WHY</a:t>
+            </a:r>
+            <a:endParaRPr lang="en-US" sz="1200" dirty="0"/>
+          </a:p>
+        </p:txBody>
+      </p:sp>
+      <p:sp>
+        <p:nvSpPr>
           <p:cNvPr id="9" name="Text 6"/>
           <p:cNvSpPr txBox="1"/>
           <p:nvPr/>
         </p:nvSpPr>
         <p:spPr>
           <a:xfrm>
-            <a:off x="5650992" y="2350008"/>
-            <a:ext cx="2871216" cy="228600"/>
+            <a:off x="5650992" y="2606040"/>
+            <a:ext cx="2871216" cy="722376"/>
           </a:xfrm>
           <a:prstGeom prst="rect">
             <a:avLst/>
@@ -11914,48 +14571,12 @@
               <a:buNone/>
             </a:pPr>
             <a:r>
-              <a:rPr lang="en-US" sz="1200" b="1" dirty="0">
-                <a:solidFill>
-                  <a:schemeClr val="accent1"/>
+              <a:rPr lang="en-US" sz="1400" dirty="0">
+                <a:solidFill>
+                  <a:schemeClr val="tx1"/>
                 </a:solidFill>
               </a:rPr>
-              <a:t>WHY</a:t>
-            </a:r>
-            <a:endParaRPr lang="en-US" sz="1200" dirty="0"/>
-          </a:p>
-        </p:txBody>
-      </p:sp>
-      <p:sp>
-        <p:nvSpPr>
-          <p:cNvPr id="10" name="Text 7"/>
-          <p:cNvSpPr txBox="1"/>
-          <p:nvPr/>
-        </p:nvSpPr>
-        <p:spPr>
-          <a:xfrm>
-            <a:off x="5650992" y="2606040"/>
-            <a:ext cx="2871216" cy="722376"/>
-          </a:xfrm>
-          <a:prstGeom prst="rect">
-            <a:avLst/>
-          </a:prstGeom>
-          <a:noFill/>
-          <a:ln/>
-        </p:spPr>
-        <p:txBody>
-          <a:bodyPr wrap="square" lIns="0" tIns="0" rIns="0" bIns="0" rtlCol="0" anchor="t"/>
-          <a:lstStyle/>
-          <a:p>
-            <a:pPr indent="0" marL="0">
-              <a:buNone/>
-            </a:pPr>
-            <a:r>
-              <a:rPr lang="en-US" sz="1400" dirty="0">
-                <a:solidFill>
-                  <a:schemeClr val="tx1"/>
-                </a:solidFill>
-              </a:rPr>
-              <a:t>Lost faint nuclei had blobs ~30% wider, spread out until no peak was left</a:t>
+              <a:t>During fitting blobs moved less than 1 voxel; nuclei are ~20 voxels apart</a:t>
             </a:r>
             <a:endParaRPr lang="en-US" sz="1400" dirty="0"/>
           </a:p>
@@ -11963,7 +14584,7 @@
       </p:sp>
       <p:sp>
         <p:nvSpPr>
-          <p:cNvPr id="11" name="step-card-2"/>
+          <p:cNvPr id="10" name="step-card-2"/>
           <p:cNvSpPr/>
           <p:nvPr/>
         </p:nvSpPr>
@@ -11990,14 +14611,50 @@
       </p:sp>
       <p:sp>
         <p:nvSpPr>
+          <p:cNvPr id="11" name="Text 8"/>
+          <p:cNvSpPr txBox="1"/>
+          <p:nvPr/>
+        </p:nvSpPr>
+        <p:spPr>
+          <a:xfrm>
+            <a:off x="5650992" y="3557016"/>
+            <a:ext cx="2871216" cy="228600"/>
+          </a:xfrm>
+          <a:prstGeom prst="rect">
+            <a:avLst/>
+          </a:prstGeom>
+          <a:noFill/>
+          <a:ln/>
+        </p:spPr>
+        <p:txBody>
+          <a:bodyPr wrap="square" lIns="0" tIns="0" rIns="0" bIns="0" rtlCol="0" anchor="t"/>
+          <a:lstStyle/>
+          <a:p>
+            <a:pPr indent="0" marL="0">
+              <a:buNone/>
+            </a:pPr>
+            <a:r>
+              <a:rPr lang="en-US" sz="1200" b="1" dirty="0">
+                <a:solidFill>
+                  <a:schemeClr val="accent1"/>
+                </a:solidFill>
+              </a:rPr>
+              <a:t>RESULT</a:t>
+            </a:r>
+            <a:endParaRPr lang="en-US" sz="1200" dirty="0"/>
+          </a:p>
+        </p:txBody>
+      </p:sp>
+      <p:sp>
+        <p:nvSpPr>
           <p:cNvPr id="12" name="Text 9"/>
           <p:cNvSpPr txBox="1"/>
           <p:nvPr/>
         </p:nvSpPr>
         <p:spPr>
           <a:xfrm>
-            <a:off x="5650992" y="3557016"/>
-            <a:ext cx="2871216" cy="228600"/>
+            <a:off x="5650992" y="3813048"/>
+            <a:ext cx="2871216" cy="722376"/>
           </a:xfrm>
           <a:prstGeom prst="rect">
             <a:avLst/>
@@ -12013,48 +14670,12 @@
               <a:buNone/>
             </a:pPr>
             <a:r>
-              <a:rPr lang="en-US" sz="1200" b="1" dirty="0">
-                <a:solidFill>
-                  <a:schemeClr val="accent1"/>
+              <a:rPr lang="en-US" sz="1400" dirty="0">
+                <a:solidFill>
+                  <a:schemeClr val="tx1"/>
                 </a:solidFill>
               </a:rPr>
-              <a:t>RESULT</a:t>
-            </a:r>
-            <a:endParaRPr lang="en-US" sz="1200" dirty="0"/>
-          </a:p>
-        </p:txBody>
-      </p:sp>
-      <p:sp>
-        <p:nvSpPr>
-          <p:cNvPr id="13" name="Text 10"/>
-          <p:cNvSpPr txBox="1"/>
-          <p:nvPr/>
-        </p:nvSpPr>
-        <p:spPr>
-          <a:xfrm>
-            <a:off x="5650992" y="3813048"/>
-            <a:ext cx="2871216" cy="722376"/>
-          </a:xfrm>
-          <a:prstGeom prst="rect">
-            <a:avLst/>
-          </a:prstGeom>
-          <a:noFill/>
-          <a:ln/>
-        </p:spPr>
-        <p:txBody>
-          <a:bodyPr wrap="square" lIns="0" tIns="0" rIns="0" bIns="0" rtlCol="0" anchor="t"/>
-          <a:lstStyle/>
-          <a:p>
-            <a:pPr indent="0" marL="0">
-              <a:buNone/>
-            </a:pPr>
-            <a:r>
-              <a:rPr lang="en-US" sz="1400" dirty="0">
-                <a:solidFill>
-                  <a:schemeClr val="tx1"/>
-                </a:solidFill>
-              </a:rPr>
-              <a:t>Faint nuclei found: 13 → 19 of 31. Image quality unchanged; 1 of 4 regions worse</a:t>
+              <a:t>Every nucleus gets a blob (73% → 100%); found nuclei 52% → 71%</a:t>
             </a:r>
             <a:endParaRPr lang="en-US" sz="1400" dirty="0"/>
           </a:p>

--- a/Gaussian_Blobs_Microscopy_v3.pptx
+++ b/Gaussian_Blobs_Microscopy_v3.pptx
@@ -23,9 +23,11 @@
     <p:sldId id="271" r:id="rId17"/>
     <p:sldId id="272" r:id="rId18"/>
     <p:sldId id="273" r:id="rId19"/>
+    <p:sldId id="274" r:id="rId20"/>
+    <p:sldId id="275" r:id="rId21"/>
   </p:sldIdLst>
   <p:notesMasterIdLst>
-    <p:notesMasterId r:id="rId20"/>
+    <p:notesMasterId r:id="rId22"/>
   </p:notesMasterIdLst>
   <p:sldSz cx="9144000" cy="5143500"/>
   <p:notesSz cx="5143500" cy="9144000"/>
@@ -124,14 +126,14 @@
   <p:extLst>
     <p:ext uri="{521415D9-36F7-43E2-AB2F-B90AF26B5E84}">
       <p14:sectionLst xmlns:p14="http://schemas.microsoft.com/office/powerpoint/2010/main">
-        <p14:section name="Problem and data" id="{91ee26a0-ae3c-47fd-8e07-59eade617032}">
+        <p14:section name="Problem and data" id="{11d47e98-1aea-dc8d-4605-6e7523f19562}">
           <p14:sldIdLst>
             <p14:sldId id="256"/>
             <p14:sldId id="257"/>
             <p14:sldId id="258"/>
           </p14:sldIdLst>
         </p14:section>
-        <p14:section name="Simple setup and changes" id="{bb0a7a01-7063-2fd8-bc30-daee9a11b2f1}">
+        <p14:section name="Simple setup and changes" id="{20c4a4f5-636f-974d-d750-c953526ffaec}">
           <p14:sldIdLst>
             <p14:sldId id="259"/>
             <p14:sldId id="260"/>
@@ -141,25 +143,27 @@
             <p14:sldId id="264"/>
             <p14:sldId id="265"/>
             <p14:sldId id="266"/>
-          </p14:sldIdLst>
-        </p14:section>
-        <p14:section name="Results and validation" id="{73db0fab-f6a8-0c17-91fd-017d1b546af0}">
-          <p14:sldIdLst>
             <p14:sldId id="267"/>
             <p14:sldId id="268"/>
           </p14:sldIdLst>
         </p14:section>
-        <p14:section name="State of the art" id="{e23e6550-bb1f-fb27-3a4d-05fdc81a7f82}">
+        <p14:section name="Results and validation" id="{7544ffb0-a542-f7b4-ea5c-7fba919547b9}">
           <p14:sldIdLst>
             <p14:sldId id="269"/>
             <p14:sldId id="270"/>
-            <p14:sldId id="271"/>
           </p14:sldIdLst>
         </p14:section>
-        <p14:section name="Conclusion" id="{e0fd0226-ba45-3b9b-289c-5128779c7d57}">
+        <p14:section name="State of the art" id="{b06002a7-9664-84cf-0af9-5cf6b1599407}">
           <p14:sldIdLst>
+            <p14:sldId id="271"/>
             <p14:sldId id="272"/>
             <p14:sldId id="273"/>
+          </p14:sldIdLst>
+        </p14:section>
+        <p14:section name="Conclusion" id="{59f75a01-f393-fed4-0e18-603fb614352f}">
+          <p14:sldIdLst>
+            <p14:sldId id="274"/>
+            <p14:sldId id="275"/>
           </p14:sldIdLst>
         </p14:section>
       </p14:sectionLst>
@@ -2565,13 +2569,15 @@
             <a:r>
               <a:rPr lang="en-US" dirty="0"/>
               <a:t>SAY:
-Why did blobs not move? The step size for positions was taken from 3D-splatting code made for photo scenes, where coordinates are small, and we never rescaled it for voxel coordinates. Raising it lets blobs travel: one in three moves to a different nucleus. With bad starting points this closes the gap completely. But with good starting points it slightly hurts. So the lesson is a trade-off: good starts with small steps is still best, at F1 0.84.
+Our first own step was to check Akim's shape result with repeats: the same three blob shapes, each fitted 15 times, with 5 random seeds and 3 blob budgets, on the same kind of real crops. The result holds: 22.3 dB for round blobs, 25.5 for stretched and rotated, and the spread between repeats is small. Most of the gain comes from stretching; rotation adds half a dB. And the blobs did what we expected: their depth-to-width ratio, 0.79, is close to the ratio measured on the real nuclei, 0.73. Real nuclei look stretched in depth partly because the microscope blurs more along that axis.
 TERMS ON THIS SLIDE:
-- Learning rate / step size: how far each fitting step moves the numbers. Too small: blobs barely move. Too large: they overshoot.
-- F1: one number combining 'how many real nuclei were found' and 'how many detections were real'; 1.0 is perfect.
-- Moved to another nucleus (migration): the nearest nucleus of a blob changed between start and end.
+- Round (isotropic) blob: same size in every direction.
+- Stretched (anisotropic, axis-aligned) blob: three independent sizes along x, y and z.
+- Rotation: lets the stretched blob point in any direction.
+- Seed: the random number that decides the starting point of a fit; different seeds test whether a result is luck.
 IF ASKED:
-- Does that undo Steps 1 and 4? It reframes them: starting points mattered so much because blobs could not move. With a suitable step size, a random start reaches the same F1.</a:t>
+- Did this also help finding nuclei? Slightly: nucleus F1 0.745 (round) vs 0.805 (stretched + rotated), significant in a paired test (p = 0.006, 5 seeds).
+- Why does the axis start at 20? To make a 3 dB difference visible; it is stated on the chart.</a:t>
             </a:r>
             <a:endParaRPr lang="en-US" dirty="0"/>
           </a:p>
@@ -2660,13 +2666,14 @@
             <a:r>
               <a:rPr lang="en-US" dirty="0"/>
               <a:t>SAY:
-We then asked which nuclei are still lost. They are the faint ones, and when we followed their blobs during fitting, the blobs did not fade; they spread out, about 30 percent wider than for nuclei we kept, until there was no peak left to detect. So we capped the width of nucleus blobs. Over four regions, faint nuclei found went from 13 of 31 to 19 of 31, and image quality changed by only 0.01 dB. Honestly: one region got worse, and on the Drosophila data the cap changed nothing.
+Building on Akim's peak starts. We measured how far blobs travel during fitting: less than one voxel on average, while nuclei are about 20 voxels apart. So a blob that starts between nuclei stays there. Akim's start put blobs on the brightest peaks, and bright background crowded out faint nuclei: only 73% of nuclei had a blob at the start. Starting one blob per detected nucleus covers all of them and raises the share of nuclei found after fitting from 52 to 71%.
 TERMS ON THIS SLIDE:
-- Faint nucleus: one whose brightness above the surroundings is in the lower half.
-- Size cap: an upper limit on a blob's size, applied only to the blobs that started on nuclei.
-- Region: one 64 x 128 x 128 crop of the Tribolium frame.
+- Detected nucleus / peak: a local brightness maximum found by a simple detector before fitting.
+- Peak-search window (non-maximum suppression): around each peak, weaker peaks closer than a set distance are ignored, so one nucleus gives one peak.
+- Found after fitting (recall): the share of reference nuclei that a detector still finds in the reconstruction.
 IF ASKED:
-- Is +6 nuclei significant? It is one seed and 4 regions, so treat it as promising, not settled. The result survived a scoring-bug fix (it was +7 before).</a:t>
+- Is this circular? Partly, on Tribolium: the reference nuclei came from a related detector. On hand-marked Drosophila nuclei the 'window = nucleus spacing' rule did NOT transfer; what transferred was setting windows in micrometres, not voxels.
+- Why did blobs not move? See the next step: the step size was too small.</a:t>
             </a:r>
             <a:endParaRPr lang="en-US" dirty="0"/>
           </a:p>
@@ -2755,11 +2762,13 @@
             <a:r>
               <a:rPr lang="en-US" dirty="0"/>
               <a:t>SAY:
-Here are all six changes side by side, two by Akim and four by us, each compared with the version just before it. I want to be clear that these were measured one at a time, on different data and with different numbers of repeats, so you cannot add them up into one overall improvement. Together they turn a fit that merely looks right into one where the nuclei are found much more reliably.
+Why did blobs not move? The step size for positions was taken from 3D-splatting code made for photo scenes, where coordinates are small, and we never rescaled it for voxel coordinates. Raising it lets blobs travel: one in three moves to a different nucleus. With bad starting points this closes the gap completely. But with good starting points it slightly hurts. So the lesson is a trade-off: good starts with small steps is still best, at F1 0.84.
 TERMS ON THIS SLIDE:
-- Naive / simple setup: round blobs with random starting positions, default step size, no cap.
+- Learning rate / step size: how far each fitting step moves the numbers. Too small: blobs barely move. Too large: they overshoot.
+- F1: one number combining 'how many real nuclei were found' and 'how many detections were real'; 1.0 is perfect.
+- Moved to another nucleus (migration): the nearest nucleus of a blob changed between start and end.
 IF ASKED:
-- Why not one combined number? Each experiment used a different number of regions, seeds and references; combining them would hide that.</a:t>
+- Does that undo Steps 1 and 6? It reframes them: starting points mattered so much because blobs could not move. With a suitable step size, a random start reaches the same F1.</a:t>
             </a:r>
             <a:endParaRPr lang="en-US" dirty="0"/>
           </a:p>
@@ -2848,13 +2857,13 @@
             <a:r>
               <a:rPr lang="en-US" dirty="0"/>
               <a:t>SAY:
-Three checks that the fit does what we think. First, shape: the learned blobs are about as stretched as the real nuclei. Second, the honest test against people's annotations: on Drosophila, among the 100 most confident detections, the fitted blobs contain 14 of 29 hand-marked nuclei, the raw image only 10. So fitting ranks real nuclei higher. Third, fits are repeatable. And the limit: if the plain detector may use all its candidates it finds 26 of 29, more than any fit. So this is better ranking, not a better detector.
+We then asked which nuclei are still lost. They are the faint ones, and when we followed their blobs during fitting, the blobs did not fade; they spread out, about 30 percent wider than for nuclei we kept, until there was no peak left to detect. So we capped the width of nucleus blobs. Over four regions, faint nuclei found went from 13 of 31 to 19 of 31, and image quality changed by only 0.01 dB. Honestly: one region got worse, and on the Drosophila data the cap changed nothing.
 TERMS ON THIS SLIDE:
-- Top 100 detections: compare methods at the same number of guesses, because only some nuclei are marked and extra detections cannot be judged as wrong.
-- Raw-image detector: the same peak detector run directly on the original data.
-- Repeated fits: the same data fitted three times; for the Luxar fits used later, nuclei kept differed by at most 2.1-3.7 points depending on the detector.
+- Faint nucleus: one whose brightness above the surroundings is in the lower half.
+- Size cap: an upper limit on a blob's size, applied only to the blobs that started on nuclei.
+- Region: one 64 x 128 x 128 crop of the Tribolium frame.
 IF ASKED:
-- How noisy is 14 vs 10? One nucleus is 3.4% of 29; we only call a difference real if it is about 3 nuclei and has the same sign in all seeds (mean of 3 seeds here).</a:t>
+- Is +6 nuclei significant? It is one seed and 4 regions, so treat it as promising, not settled. The result survived a scoring-bug fix (it was +7 before).</a:t>
             </a:r>
             <a:endParaRPr lang="en-US" dirty="0"/>
           </a:p>
@@ -2943,15 +2952,11 @@
             <a:r>
               <a:rPr lang="en-US" dirty="0"/>
               <a:t>SAY:
-Our own fits were better than our naive start, but are they better than what exists? The strongest existing tool is Luxar, from the Royer lab, which fits Gaussian blobs to large microscopy data. We compared Luxar with ordinary image compression, JPEG2000, squeezed to exactly the same number of bytes, on 12 C. elegans frames with almost 3,000 hand-marked nuclei, and asked four different nucleus detectors how many nuclei survive. The pictures show the same region at about 89 times smaller: the codecs keep the texture, Luxar draws smooth blobs.
+Here are all eight changes side by side, four by Akim and four by us, each compared with the version just before it. I want to be clear that these were measured one at a time, on different data and with different numbers of repeats, so you cannot add them up into one overall improvement. Together they turn a fit that merely looks right into one where the nuclei are found much more reliably.
 TERMS ON THIS SLIDE:
-- Compression ratio: original size divided by compressed size; 100x means 100 times smaller.
-- Same file size (matched bytes): every Luxar file is compared with a JPEG2000 file of exactly the same size on disk.
-- JPEG2000 / JPEG-XL: standard image compression formats; here each 2D slice of the volume is compressed.
-- Nuclei kept: nuclei found after compression divided by nuclei found in the original by the same detector (1.0 = nothing lost).
+- Naive / simple setup: round blobs with random starting positions, default step size, no cap.
 IF ASKED:
-- Why not compare with our own fits? Luxar is faster and better engineered; if blobs are to win anywhere, the strongest blob tool must win.
-- We found a bug in our own first JPEG2000 setup (it compressed the volume along the wrong axes, about 10 dB worse). Fixing it reversed our first conclusion; a test now prevents it.</a:t>
+- Why not one combined number? Each experiment used a different number of regions, seeds and references; combining them would hide that.</a:t>
             </a:r>
             <a:endParaRPr lang="en-US" dirty="0"/>
           </a:p>
@@ -3040,16 +3045,13 @@
             <a:r>
               <a:rPr lang="en-US" dirty="0"/>
               <a:t>SAY:
-The result. Bars above zero mean the blobs kept more nuclei than JPEG2000 at the same file size; below zero, JPEG2000 kept more. Up to about 300 times compression the answer depends on the detector: Cellpose in 3D mode finds 3.5 points more nuclei in the blob version, the classical watershed and Cellpose in 2D mode find more in JPEG2000, and the simple blob detector LoG shows no consistent difference. Beyond 300 times, every detector prefers JPEG2000 by 17 to 23 points. Meanwhile PSNR says JPEG2000 is better on every single frame, so PSNR alone could not have told you which format a given analysis needs. The same Cellpose network changing sides between 2D and 3D mode shows the problem comes from processing slice by slice.
+Three checks that the fit does what we think. First, shape: the learned blobs are about as stretched as the real nuclei. Second, the honest test against people's annotations: on Drosophila, among the 100 most confident detections, the fitted blobs contain 14 of 29 hand-marked nuclei, the raw image only 10. So fitting ranks real nuclei higher. Third, fits are repeatable. And the limit: if the plain detector may use all its candidates it finds 26 of 29, more than any fit. So this is better ranking, not a better detector.
 TERMS ON THIS SLIDE:
-- LoG (Laplacian of Gaussian): a classic blob detector that responds to bright round spots of a given size.
-- Watershed: a classical segmentation that separates touching bright regions, like water filling valleys.
-- Cellpose: a widely used deep-learning model that outlines cells or nuclei. 2D mode works slice by slice and joins slices; 3D mode looks at the volume in three directions at once.
-- Points: percentage points of nuclei kept, e.g. 0.90 vs 0.86 is 4 points.
-- Statistics: each frame counts once; Wilcoxon signed-rank tests over the 12 frames, Holm-corrected for 8 tests. Everything except LoG below 300x is significant (p ≤ 0.01).
+- Top 100 detections: compare methods at the same number of guesses, because only some nuclei are marked and extra detections cannot be judged as wrong.
+- Raw-image detector: the same peak detector run directly on the original data.
+- Repeated fits: the same data fitted three times; for the Luxar fits used later, nuclei kept differed by at most 2.1-3.7 points depending on the detector.
 IF ASKED:
-- Is LoG +1.3 real? No: 8 of 12 frames, p = 0.11; it comes from one embryo only.
-- Why does JPEG2000 win at high compression? Below about 3 blobs per nucleus, blob fits lose whole nuclei; wavelet compression degrades gradually.</a:t>
+- How noisy is 14 vs 10? One nucleus is 3.4% of 29; we only call a difference real if it is about 3 nuclei and has the same sign in all seeds (mean of 3 seeds here).</a:t>
             </a:r>
             <a:endParaRPr lang="en-US" dirty="0"/>
           </a:p>
@@ -3138,13 +3140,15 @@
             <a:r>
               <a:rPr lang="en-US" dirty="0"/>
               <a:t>SAY:
-Why do blobs collapse at high compression? Each point is one Luxar fit; the x axis is blobs per hand-marked nucleus. Above about 3 blobs per nucleus almost every nucleus survives; below that, they disappear quickly, on every frame of both embryos. At the same time, PSNR changes very little across these budgets. So if you choose the budget by image quality, you can fall off this cliff without noticing.
+Our own fits were better than our naive start, but are they better than what exists? The strongest existing tool is Luxar, from the Royer lab, which fits Gaussian blobs to large microscopy data. We compared Luxar with ordinary image compression, JPEG2000, squeezed to exactly the same number of bytes, on 12 C. elegans frames with almost 3,000 hand-marked nuclei, and asked four different nucleus detectors how many nuclei survive. The pictures show the same region at about 89 times smaller: the codecs keep the texture, Luxar draws smooth blobs.
 TERMS ON THIS SLIDE:
-- Blobs per nucleus: number of blobs in the fit divided by the number of hand-marked nuclei in that frame.
-- Cliff: a sudden drop instead of a gradual decline.
-- 90% line: the threshold we fixed in advance to define the cliff (we wrote down '≤ 3.5 blobs per nucleus' before running the extra frames).
+- Compression ratio: original size divided by compressed size; 100x means 100 times smaller.
+- Same file size (matched bytes): every Luxar file is compared with a JPEG2000 file of exactly the same size on disk.
+- JPEG2000 / JPEG-XL: standard image compression formats; here each 2D slice of the volume is compressed.
+- Nuclei kept: nuclei found after compression divided by nuclei found in the original by the same detector (1.0 = nothing lost).
 IF ASKED:
-- Why fix thresholds in advance? So we cannot tune the claim to the data afterwards. Two of our advance predictions failed, and we report them as failed.</a:t>
+- Why not compare with our own fits? Luxar is faster and better engineered; if blobs are to win anywhere, the strongest blob tool must win.
+- We found a bug in our own first JPEG2000 setup (it compressed the volume along the wrong axes, about 10 dB worse). Fixing it reversed our first conclusion; a test now prevents it.</a:t>
             </a:r>
             <a:endParaRPr lang="en-US" dirty="0"/>
           </a:p>
@@ -3233,11 +3237,16 @@
             <a:r>
               <a:rPr lang="en-US" dirty="0"/>
               <a:t>SAY:
-Three take-aways. One: our step-by-step changes made blob fits find nuclei much more reliably. Two: compared with the state of the art at equal file size, blobs are good for viewing but not the right format for measuring; a standard codec keeps the nuclei as well or better. Three: the usual image-quality number cannot decide this; you have to test with the analysis you plan to run.
+The result. Bars above zero mean the blobs kept more nuclei than JPEG2000 at the same file size; below zero, JPEG2000 kept more. Up to about 300 times compression the answer depends on the detector: Cellpose in 3D mode finds 3.5 points more nuclei in the blob version, the classical watershed and Cellpose in 2D mode find more in JPEG2000, and the simple blob detector LoG shows no consistent difference. Beyond 300 times, every detector prefers JPEG2000 by 17 to 23 points. Meanwhile PSNR says JPEG2000 is better on every single frame, so PSNR alone could not have told you which format a given analysis needs. The same Cellpose network changing sides between 2D and 3D mode shows the problem comes from processing slice by slice.
 TERMS ON THIS SLIDE:
-- Codec: a compression method (coder-decoder).
+- LoG (Laplacian of Gaussian): a classic blob detector that responds to bright round spots of a given size.
+- Watershed: a classical segmentation that separates touching bright regions, like water filling valleys.
+- Cellpose: a widely used deep-learning model that outlines cells or nuclei. 2D mode works slice by slice and joins slices; 3D mode looks at the volume in three directions at once.
+- Points: percentage points of nuclei kept, e.g. 0.90 vs 0.86 is 4 points.
+- Statistics: each frame counts once; Wilcoxon signed-rank tests over the 12 frames, Holm-corrected for 8 tests. Everything except LoG below 300x is significant (p ≤ 0.01).
 IF ASKED:
-- So was the project a failure? No: we now know where blobs should and should not be trusted, which is what a user needs; and the evaluation method itself is reusable.</a:t>
+- Is LoG +1.3 real? No: 8 of 12 frames, p = 0.11; it comes from one embryo only.
+- Why does JPEG2000 win at high compression? Below about 3 blobs per nucleus, blob fits lose whole nuclei; wavelet compression degrades gradually.</a:t>
             </a:r>
             <a:endParaRPr lang="en-US" dirty="0"/>
           </a:p>
@@ -3326,14 +3335,13 @@
             <a:r>
               <a:rPr lang="en-US" dirty="0"/>
               <a:t>SAY:
-Following our supervisor's advice, the next step is compression biologists would actually use: lossless storage, or near-lossless where every error stays below the camera noise; video codecs, which exploit the similarity between neighbouring slices and time points; and judging success by whether cells can still be tracked, using the Cell Tracking Challenge's official scores.
+Why do blobs collapse at high compression? Each point is one Luxar fit; the x axis is blobs per hand-marked nucleus. Above about 3 blobs per nucleus almost every nucleus survives; below that, they disappear quickly, on every frame of both embryos. At the same time, PSNR changes very little across these budgets. So if you choose the budget by image quality, you can fall off this cliff without noticing.
 TERMS ON THIS SLIDE:
-- Lossless: the decompressed data is bit-for-bit identical to the original.
-- Near-lossless / noise-bounded: every voxel may change, but by less than the camera's own noise.
-- Video codec: compression made for movies (e.g. H.265, AV1) that predicts each frame from its neighbours.
-- Tracking: following each cell over time, including divisions.
+- Blobs per nucleus: number of blobs in the fit divided by the number of hand-marked nuclei in that frame.
+- Cliff: a sudden drop instead of a gradual decline.
+- 90% line: the threshold we fixed in advance to define the cliff (we wrote down '≤ 3.5 blobs per nucleus' before running the extra frames).
 IF ASKED:
-- How much do lossless methods give? Typically 2-4x on microscopy (we measured 4.2x with lossless JPEG-XL on C. elegans); noise-bounded methods reach far more on raw camera data (up to ~100x reported for B3D).</a:t>
+- Why fix thresholds in advance? So we cannot tune the claim to the data afterwards. Two of our advance predictions failed, and we report them as failed.</a:t>
             </a:r>
             <a:endParaRPr lang="en-US" dirty="0"/>
           </a:p>
@@ -3357,6 +3365,99 @@
             <a:fld id="{F7021451-1387-4CA6-816F-3879F97B5CBC}" type="slidenum">
               <a:rPr lang="en-US"/>
               <a:t>18</a:t>
+            </a:fld>
+            <a:endParaRPr lang="en-US"/>
+          </a:p>
+        </p:txBody>
+      </p:sp>
+    </p:spTree>
+    <p:extLst>
+      <p:ext uri="{BB962C8B-B14F-4D97-AF65-F5344CB8AC3E}">
+        <p14:creationId xmlns:p14="http://schemas.microsoft.com/office/powerpoint/2010/main" val="1024086991"/>
+      </p:ext>
+    </p:extLst>
+  </p:cSld>
+  <p:clrMapOvr>
+    <a:masterClrMapping/>
+  </p:clrMapOvr>
+</p:notes>
+</file>
+
+<file path=ppt/notesSlides/notesSlide19.xml><?xml version="1.0" encoding="utf-8"?>
+<p:notes xmlns:a="http://schemas.openxmlformats.org/drawingml/2006/main" xmlns:r="http://schemas.openxmlformats.org/officeDocument/2006/relationships" xmlns:p="http://schemas.openxmlformats.org/presentationml/2006/main">
+  <p:cSld>
+    <p:spTree>
+      <p:nvGrpSpPr>
+        <p:cNvPr id="1" name=""/>
+        <p:cNvGrpSpPr/>
+        <p:nvPr/>
+      </p:nvGrpSpPr>
+      <p:grpSpPr>
+        <a:xfrm>
+          <a:off x="0" y="0"/>
+          <a:ext cx="0" cy="0"/>
+          <a:chOff x="0" y="0"/>
+          <a:chExt cx="0" cy="0"/>
+        </a:xfrm>
+      </p:grpSpPr>
+      <p:sp>
+        <p:nvSpPr>
+          <p:cNvPr id="2" name="Slide Image Placeholder 1"/>
+          <p:cNvSpPr>
+            <a:spLocks noGrp="1" noRot="1" noChangeAspect="1"/>
+          </p:cNvSpPr>
+          <p:nvPr>
+            <p:ph type="sldImg"/>
+          </p:nvPr>
+        </p:nvSpPr>
+        <p:spPr/>
+      </p:sp>
+      <p:sp>
+        <p:nvSpPr>
+          <p:cNvPr id="3" name="Notes Placeholder 2"/>
+          <p:cNvSpPr>
+            <a:spLocks noGrp="1"/>
+          </p:cNvSpPr>
+          <p:nvPr>
+            <p:ph type="body" idx="1"/>
+          </p:nvPr>
+        </p:nvSpPr>
+        <p:spPr/>
+        <p:txBody>
+          <a:bodyPr/>
+          <a:lstStyle/>
+          <a:p>
+            <a:r>
+              <a:rPr lang="en-US" dirty="0"/>
+              <a:t>SAY:
+Three take-aways. One: our step-by-step changes made blob fits find nuclei much more reliably. Two: compared with the state of the art at equal file size, blobs are good for viewing but not the right format for measuring; a standard codec keeps the nuclei as well or better. Three: the usual image-quality number cannot decide this; you have to test with the analysis you plan to run.
+TERMS ON THIS SLIDE:
+- Codec: a compression method (coder-decoder).
+IF ASKED:
+- So was the project a failure? No: we now know where blobs should and should not be trusted, which is what a user needs; and the evaluation method itself is reusable.</a:t>
+            </a:r>
+            <a:endParaRPr lang="en-US" dirty="0"/>
+          </a:p>
+        </p:txBody>
+      </p:sp>
+      <p:sp>
+        <p:nvSpPr>
+          <p:cNvPr id="4" name="Slide Number Placeholder 3"/>
+          <p:cNvSpPr>
+            <a:spLocks noGrp="1"/>
+          </p:cNvSpPr>
+          <p:nvPr>
+            <p:ph type="sldNum" sz="quarter" idx="10"/>
+          </p:nvPr>
+        </p:nvSpPr>
+        <p:spPr/>
+        <p:txBody>
+          <a:bodyPr/>
+          <a:lstStyle/>
+          <a:p>
+            <a:fld id="{F7021451-1387-4CA6-816F-3879F97B5CBC}" type="slidenum">
+              <a:rPr lang="en-US"/>
+              <a:t>19</a:t>
             </a:fld>
             <a:endParaRPr lang="en-US"/>
           </a:p>
@@ -3470,6 +3571,102 @@
 </p:notes>
 </file>
 
+<file path=ppt/notesSlides/notesSlide20.xml><?xml version="1.0" encoding="utf-8"?>
+<p:notes xmlns:a="http://schemas.openxmlformats.org/drawingml/2006/main" xmlns:r="http://schemas.openxmlformats.org/officeDocument/2006/relationships" xmlns:p="http://schemas.openxmlformats.org/presentationml/2006/main">
+  <p:cSld>
+    <p:spTree>
+      <p:nvGrpSpPr>
+        <p:cNvPr id="1" name=""/>
+        <p:cNvGrpSpPr/>
+        <p:nvPr/>
+      </p:nvGrpSpPr>
+      <p:grpSpPr>
+        <a:xfrm>
+          <a:off x="0" y="0"/>
+          <a:ext cx="0" cy="0"/>
+          <a:chOff x="0" y="0"/>
+          <a:chExt cx="0" cy="0"/>
+        </a:xfrm>
+      </p:grpSpPr>
+      <p:sp>
+        <p:nvSpPr>
+          <p:cNvPr id="2" name="Slide Image Placeholder 1"/>
+          <p:cNvSpPr>
+            <a:spLocks noGrp="1" noRot="1" noChangeAspect="1"/>
+          </p:cNvSpPr>
+          <p:nvPr>
+            <p:ph type="sldImg"/>
+          </p:nvPr>
+        </p:nvSpPr>
+        <p:spPr/>
+      </p:sp>
+      <p:sp>
+        <p:nvSpPr>
+          <p:cNvPr id="3" name="Notes Placeholder 2"/>
+          <p:cNvSpPr>
+            <a:spLocks noGrp="1"/>
+          </p:cNvSpPr>
+          <p:nvPr>
+            <p:ph type="body" idx="1"/>
+          </p:nvPr>
+        </p:nvSpPr>
+        <p:spPr/>
+        <p:txBody>
+          <a:bodyPr/>
+          <a:lstStyle/>
+          <a:p>
+            <a:r>
+              <a:rPr lang="en-US" dirty="0"/>
+              <a:t>SAY:
+Following our supervisor's advice, the next step is compression biologists would actually use: lossless storage, or near-lossless where every error stays below the camera noise; video codecs, which exploit the similarity between neighbouring slices and time points; and judging success by whether cells can still be tracked, using the Cell Tracking Challenge's official scores.
+TERMS ON THIS SLIDE:
+- Lossless: the decompressed data is bit-for-bit identical to the original.
+- Near-lossless / noise-bounded: every voxel may change, but by less than the camera's own noise.
+- Video codec: compression made for movies (e.g. H.265, AV1) that predicts each frame from its neighbours.
+- Tracking: following each cell over time, including divisions.
+IF ASKED:
+- How much do lossless methods give? Typically 2-4x on microscopy (we measured 4.2x with lossless JPEG-XL on C. elegans); noise-bounded methods reach far more on raw camera data (up to ~100x reported for B3D).</a:t>
+            </a:r>
+            <a:endParaRPr lang="en-US" dirty="0"/>
+          </a:p>
+        </p:txBody>
+      </p:sp>
+      <p:sp>
+        <p:nvSpPr>
+          <p:cNvPr id="4" name="Slide Number Placeholder 3"/>
+          <p:cNvSpPr>
+            <a:spLocks noGrp="1"/>
+          </p:cNvSpPr>
+          <p:nvPr>
+            <p:ph type="sldNum" sz="quarter" idx="10"/>
+          </p:nvPr>
+        </p:nvSpPr>
+        <p:spPr/>
+        <p:txBody>
+          <a:bodyPr/>
+          <a:lstStyle/>
+          <a:p>
+            <a:fld id="{F7021451-1387-4CA6-816F-3879F97B5CBC}" type="slidenum">
+              <a:rPr lang="en-US"/>
+              <a:t>20</a:t>
+            </a:fld>
+            <a:endParaRPr lang="en-US"/>
+          </a:p>
+        </p:txBody>
+      </p:sp>
+    </p:spTree>
+    <p:extLst>
+      <p:ext uri="{BB962C8B-B14F-4D97-AF65-F5344CB8AC3E}">
+        <p14:creationId xmlns:p14="http://schemas.microsoft.com/office/powerpoint/2010/main" val="1024086991"/>
+      </p:ext>
+    </p:extLst>
+  </p:cSld>
+  <p:clrMapOvr>
+    <a:masterClrMapping/>
+  </p:clrMapOvr>
+</p:notes>
+</file>
+
 <file path=ppt/notesSlides/notesSlide3.xml><?xml version="1.0" encoding="utf-8"?>
 <p:notes xmlns:a="http://schemas.openxmlformats.org/drawingml/2006/main" xmlns:r="http://schemas.openxmlformats.org/officeDocument/2006/relationships" xmlns:p="http://schemas.openxmlformats.org/presentationml/2006/main">
   <p:cSld>
@@ -3813,8 +4010,8 @@
 - Fitting steps (iterations): how many times all blob numbers are adjusted.
 - Best of 8 fits: each setting was run with four blob shapes and two budgets (50 and 100 blobs); the bar shows the best one.
 IF ASKED:
-- Why does a random start fail? Later we found the reason: blobs barely move during fitting with the default step size (Step 5).
-- Who did what? Steps 1 and 2 are Akim's experiments; Steps 0 and 3-6 are ours; the comparison with the state of the art is ours.</a:t>
+- Why does a random start fail? Later we found the reason: blobs barely move during fitting with the default step size (Step 7).
+- Who did what? Steps 1-4 are Akim's experiments; Steps 0 and 5-8 are ours; the comparison with the state of the art is ours.</a:t>
             </a:r>
             <a:endParaRPr lang="en-US" dirty="0"/>
           </a:p>
@@ -4002,15 +4199,15 @@
             <a:r>
               <a:rPr lang="en-US" dirty="0"/>
               <a:t>SAY:
-Our first own step was to check Akim's shape result with repeats: the same three blob shapes, each fitted 15 times, with 5 random seeds and 3 blob budgets, on the same kind of real crops. The result holds: 22.3 dB for round blobs, 25.5 for stretched and rotated, and the spread between repeats is small. Most of the gain comes from stretching; rotation adds half a dB. And the blobs did what we expected: their depth-to-width ratio, 0.79, is close to the ratio measured on the real nuclei, 0.73. Real nuclei look stretched in depth partly because the microscope blurs more along that axis.
+Akim also tried letting the number of blobs grow during fitting. He starts with 25 blobs and, where the error stays high, splits or copies blobs, a standard trick from 3D Gaussian splatting called densification. He tried 12 variants: when to add blobs, whether new blobs inherit their parent's settings, how many voxels to sample. On the same crop, grown fits reached slightly better quality for the same number of blobs, for example 24.3 dB with 34 grown blobs against 23.8 dB with 50 fixed blobs. But the best values are close, 24.9 against 24.5 dB, so it is a modest gain, not a breakthrough, and we kept a fixed budget afterwards because it is simpler to control.
 TERMS ON THIS SLIDE:
-- Round (isotropic) blob: same size in every direction.
-- Stretched (anisotropic, axis-aligned) blob: three independent sizes along x, y and z.
-- Rotation: lets the stretched blob point in any direction.
-- Seed: the random number that decides the starting point of a fit; different seeds test whether a result is luck.
+- Densification: adding blobs during fitting by splitting or cloning existing ones where the reconstruction error is large.
+- Plateau trigger: only add blobs once the error stops improving.
+- Inherit: a new blob starts with its parent's size and brightness instead of default values.
+- Fixed budget: the number of blobs is set before fitting and never changes.
 IF ASKED:
-- Did this also help finding nuclei? Slightly: nucleus F1 0.745 (round) vs 0.805 (stretched + rotated), significant in a paired test (p = 0.006, 5 seeds).
-- Why does the axis start at 20? To make a 3 dB difference visible; it is stated on the chart.</a:t>
+- Why not use densification then? The gain was within about half a dB, the final number of blobs is harder to predict, and fixed budgets made the later comparisons cleaner.
+- Does more fitting time explain it? Partly: the best grown fit used 5,000 steps; the fixed budgets used 3,000.</a:t>
             </a:r>
             <a:endParaRPr lang="en-US" dirty="0"/>
           </a:p>
@@ -4099,14 +4296,15 @@
             <a:r>
               <a:rPr lang="en-US" dirty="0"/>
               <a:t>SAY:
-Building on Akim's peak starts. We measured how far blobs travel during fitting: less than one voxel on average, while nuclei are about 20 voxels apart. So a blob that starts between nuclei stays there. Akim's start put blobs on the brightest peaks, and bright background crowded out faint nuclei: only 73% of nuclei had a blob at the start. Starting one blob per detected nucleus covers all of them and raises the share of nuclei found after fitting from 52 to 71%.
+Akim's last idea: instead of guessing the number of blobs, count the cells first. A detector found about 230 cells in the whole volume; he then used 1.15 blobs per cell plus 12 percent for the background, which gives 301 blobs, and multiples of that. He then checked how well peaks in the blob reconstruction match the detected cells. Matching improves steadily with more blobs, from F1 0.35 at 301 blobs to 0.76 at 1,804. But look at the right panel: image quality peaks around 900 blobs and then drops. The reason is that all runs stopped after 3,000 steps, which is not enough for a large number of blobs. This was the first sign that image quality and finding cells do not always agree.
 TERMS ON THIS SLIDE:
-- Detected nucleus / peak: a local brightness maximum found by a simple detector before fitting.
-- Peak-search window (non-maximum suppression): around each peak, weaker peaks closer than a set distance are ignored, so one nucleus gives one peak.
-- Found after fitting (recall): the share of reference nuclei that a detector still finds in the reconstruction.
+- Cell count: the number of cells, here estimated by a detector from the data, not counted by a person.
+- Cell matching F1: how well peaks in the reconstruction match the detected cells; 1.0 is perfect.
+- Support blobs (background): the extra blobs not tied to a cell, for the dimmer tissue between nuclei.
+- Under-trained: the fit stopped before it had finished improving.
 IF ASKED:
-- Is this circular? Partly, on Tribolium: the reference nuclei came from a related detector. On hand-marked Drosophila nuclei the 'window = nucleus spacing' rule did NOT transfer; what transferred was setting windows in micrometres, not voxels.
-- Why did blobs not move? See the next step: the step size was too small.</a:t>
+- Are the 230 cells ground truth? No, they come from a detector with fixed settings; the hand-marked checks come later (validation slide and the state-of-the-art test).
+- Why does PSNR fall with more blobs? The number of fitting steps was fixed at 3,000; more blobs need more steps. We later saw the same confound in our own experiments.</a:t>
             </a:r>
             <a:endParaRPr lang="en-US" dirty="0"/>
           </a:p>
@@ -5113,7 +5311,7 @@
                   <a:schemeClr val="tx1"/>
                 </a:solidFill>
               </a:rPr>
-              <a:t>Step 5 · Bigger steps let blobs travel</a:t>
+              <a:t>Step 5 · Repeats confirm: stretching is real</a:t>
             </a:r>
             <a:endParaRPr lang="en-US" sz="2800" dirty="0"/>
           </a:p>
@@ -5192,7 +5390,7 @@
                   <a:schemeClr val="accent1"/>
                 </a:solidFill>
               </a:rPr>
-              <a:t>WHAT WE CHANGED</a:t>
+              <a:t>WHAT WE DID</a:t>
             </a:r>
             <a:endParaRPr lang="en-US" sz="1200" dirty="0"/>
           </a:p>
@@ -5228,7 +5426,7 @@
                   <a:schemeClr val="tx1"/>
                 </a:solidFill>
               </a:rPr>
-              <a:t>Raised the step size for blob positions up to 62×</a:t>
+              <a:t>Re-ran round, stretched and stretched + rotated blobs with 5 seeds and 3 budgets each</a:t>
             </a:r>
             <a:endParaRPr lang="en-US" sz="1400" dirty="0"/>
           </a:p>
@@ -5327,7 +5525,7 @@
                   <a:schemeClr val="tx1"/>
                 </a:solidFill>
               </a:rPr>
-              <a:t>The default was copied from photo-scene code and never scaled to voxel units</a:t>
+              <a:t>Akim had one run per setting; a single run can be luck</a:t>
             </a:r>
             <a:endParaRPr lang="en-US" sz="1400" dirty="0"/>
           </a:p>
@@ -5426,7 +5624,7 @@
                   <a:schemeClr val="tx1"/>
                 </a:solidFill>
               </a:rPr>
-              <a:t>Badly started fits catch up (F1 0.64 → 0.78), but good starts get worse (0.84 → 0.78)</a:t>
+              <a:t>+3.2 dB with small spread; learned blobs are as stretched as real nuclei</a:t>
             </a:r>
             <a:endParaRPr lang="en-US" sz="1400" dirty="0"/>
           </a:p>
@@ -5534,75 +5732,31 @@
                   <a:schemeClr val="tx1"/>
                 </a:solidFill>
               </a:rPr>
-              <a:t>Step 6 · Faint nuclei: cap the blob size</a:t>
+              <a:t>Step 6 · Start each blob on a nucleus</a:t>
             </a:r>
             <a:endParaRPr lang="en-US" sz="2800" dirty="0"/>
           </a:p>
         </p:txBody>
       </p:sp>
-      <p:pic>
-        <p:nvPicPr>
-          <p:cNvPr id="3" name="size-cap" descr="D:\masters\MLCV seminar\TeamProject\presentation\figs\size_cap.png">    </p:cNvPr>
-          <p:cNvPicPr>
-            <a:picLocks noChangeAspect="1"/>
-          </p:cNvPicPr>
+      <p:graphicFrame>
+        <p:nvGraphicFramePr>
+          <p:cNvPr id="3" name="Chart 0" descr=""/>
+          <p:cNvGraphicFramePr/>
           <p:nvPr/>
-        </p:nvPicPr>
-        <p:blipFill>
-          <a:blip r:embed="rId1"/>
-          <a:stretch>
-            <a:fillRect/>
-          </a:stretch>
-        </p:blipFill>
-        <p:spPr>
-          <a:xfrm>
-            <a:off x="457200" y="1097280"/>
-            <a:ext cx="4754880" cy="2377440"/>
-          </a:xfrm>
-          <a:prstGeom prst="rect">
-            <a:avLst/>
-          </a:prstGeom>
-        </p:spPr>
-      </p:pic>
-      <p:sp>
-        <p:nvSpPr>
-          <p:cNvPr id="4" name="Text 1"/>
-          <p:cNvSpPr txBox="1"/>
-          <p:nvPr/>
-        </p:nvSpPr>
-        <p:spPr>
-          <a:xfrm>
-            <a:off x="457200" y="3566160"/>
-            <a:ext cx="4754880" cy="274320"/>
-          </a:xfrm>
-          <a:prstGeom prst="rect">
-            <a:avLst/>
-          </a:prstGeom>
-          <a:noFill/>
-          <a:ln/>
-        </p:spPr>
-        <p:txBody>
-          <a:bodyPr wrap="square" lIns="0" tIns="0" rIns="0" bIns="0" rtlCol="0" anchor="t"/>
-          <a:lstStyle/>
-          <a:p>
-            <a:pPr indent="0" marL="0">
-              <a:buNone/>
-            </a:pPr>
-            <a:r>
-              <a:rPr lang="en-US" sz="1100" dirty="0">
-                <a:solidFill>
-                  <a:schemeClr val="accent5"/>
-                </a:solidFill>
-              </a:rPr>
-              <a:t>Green: nucleus found  ·  red: missed</a:t>
-            </a:r>
-            <a:endParaRPr lang="en-US" sz="1100" dirty="0"/>
-          </a:p>
-        </p:txBody>
-      </p:sp>
-      <p:sp>
-        <p:nvSpPr>
-          <p:cNvPr id="5" name="step-card-0"/>
+        </p:nvGraphicFramePr>
+        <p:xfrm>
+          <a:off x="457200" y="1051560"/>
+          <a:ext cx="4754880" cy="3246120"/>
+        </p:xfrm>
+        <a:graphic xmlns:a="http://schemas.openxmlformats.org/drawingml/2006/main">
+          <a:graphicData uri="http://schemas.openxmlformats.org/drawingml/2006/chart">
+            <c:chart xmlns:c="http://schemas.openxmlformats.org/drawingml/2006/chart" r:id="rId1"/>
+          </a:graphicData>
+        </a:graphic>
+      </p:graphicFrame>
+      <p:sp>
+        <p:nvSpPr>
+          <p:cNvPr id="4" name="step-card-0"/>
           <p:cNvSpPr/>
           <p:nvPr/>
         </p:nvSpPr>
@@ -5629,14 +5783,50 @@
       </p:sp>
       <p:sp>
         <p:nvSpPr>
+          <p:cNvPr id="5" name="Text 2"/>
+          <p:cNvSpPr txBox="1"/>
+          <p:nvPr/>
+        </p:nvSpPr>
+        <p:spPr>
+          <a:xfrm>
+            <a:off x="5650992" y="1143000"/>
+            <a:ext cx="2871216" cy="228600"/>
+          </a:xfrm>
+          <a:prstGeom prst="rect">
+            <a:avLst/>
+          </a:prstGeom>
+          <a:noFill/>
+          <a:ln/>
+        </p:spPr>
+        <p:txBody>
+          <a:bodyPr wrap="square" lIns="0" tIns="0" rIns="0" bIns="0" rtlCol="0" anchor="t"/>
+          <a:lstStyle/>
+          <a:p>
+            <a:pPr indent="0" marL="0">
+              <a:buNone/>
+            </a:pPr>
+            <a:r>
+              <a:rPr lang="en-US" sz="1200" b="1" dirty="0">
+                <a:solidFill>
+                  <a:schemeClr val="accent1"/>
+                </a:solidFill>
+              </a:rPr>
+              <a:t>WHAT WE CHANGED</a:t>
+            </a:r>
+            <a:endParaRPr lang="en-US" sz="1200" dirty="0"/>
+          </a:p>
+        </p:txBody>
+      </p:sp>
+      <p:sp>
+        <p:nvSpPr>
           <p:cNvPr id="6" name="Text 3"/>
           <p:cNvSpPr txBox="1"/>
           <p:nvPr/>
         </p:nvSpPr>
         <p:spPr>
           <a:xfrm>
-            <a:off x="5650992" y="1143000"/>
-            <a:ext cx="2871216" cy="228600"/>
+            <a:off x="5650992" y="1399032"/>
+            <a:ext cx="2871216" cy="722376"/>
           </a:xfrm>
           <a:prstGeom prst="rect">
             <a:avLst/>
@@ -5652,48 +5842,12 @@
               <a:buNone/>
             </a:pPr>
             <a:r>
-              <a:rPr lang="en-US" sz="1200" b="1" dirty="0">
-                <a:solidFill>
-                  <a:schemeClr val="accent1"/>
+              <a:rPr lang="en-US" sz="1400" dirty="0">
+                <a:solidFill>
+                  <a:schemeClr val="tx1"/>
                 </a:solidFill>
               </a:rPr>
-              <a:t>WHAT WE CHANGED</a:t>
-            </a:r>
-            <a:endParaRPr lang="en-US" sz="1200" dirty="0"/>
-          </a:p>
-        </p:txBody>
-      </p:sp>
-      <p:sp>
-        <p:nvSpPr>
-          <p:cNvPr id="7" name="Text 4"/>
-          <p:cNvSpPr txBox="1"/>
-          <p:nvPr/>
-        </p:nvSpPr>
-        <p:spPr>
-          <a:xfrm>
-            <a:off x="5650992" y="1399032"/>
-            <a:ext cx="2871216" cy="722376"/>
-          </a:xfrm>
-          <a:prstGeom prst="rect">
-            <a:avLst/>
-          </a:prstGeom>
-          <a:noFill/>
-          <a:ln/>
-        </p:spPr>
-        <p:txBody>
-          <a:bodyPr wrap="square" lIns="0" tIns="0" rIns="0" bIns="0" rtlCol="0" anchor="t"/>
-          <a:lstStyle/>
-          <a:p>
-            <a:pPr indent="0" marL="0">
-              <a:buNone/>
-            </a:pPr>
-            <a:r>
-              <a:rPr lang="en-US" sz="1400" dirty="0">
-                <a:solidFill>
-                  <a:schemeClr val="tx1"/>
-                </a:solidFill>
-              </a:rPr>
-              <a:t>Limited how wide a nucleus blob may grow (10 voxels)</a:t>
+              <a:t>Bright-peak starts → one starting blob on every detected nucleus first</a:t>
             </a:r>
             <a:endParaRPr lang="en-US" sz="1400" dirty="0"/>
           </a:p>
@@ -5701,7 +5855,7 @@
       </p:sp>
       <p:sp>
         <p:nvSpPr>
-          <p:cNvPr id="8" name="step-card-1"/>
+          <p:cNvPr id="7" name="step-card-1"/>
           <p:cNvSpPr/>
           <p:nvPr/>
         </p:nvSpPr>
@@ -5728,14 +5882,50 @@
       </p:sp>
       <p:sp>
         <p:nvSpPr>
+          <p:cNvPr id="8" name="Text 5"/>
+          <p:cNvSpPr txBox="1"/>
+          <p:nvPr/>
+        </p:nvSpPr>
+        <p:spPr>
+          <a:xfrm>
+            <a:off x="5650992" y="2350008"/>
+            <a:ext cx="2871216" cy="228600"/>
+          </a:xfrm>
+          <a:prstGeom prst="rect">
+            <a:avLst/>
+          </a:prstGeom>
+          <a:noFill/>
+          <a:ln/>
+        </p:spPr>
+        <p:txBody>
+          <a:bodyPr wrap="square" lIns="0" tIns="0" rIns="0" bIns="0" rtlCol="0" anchor="t"/>
+          <a:lstStyle/>
+          <a:p>
+            <a:pPr indent="0" marL="0">
+              <a:buNone/>
+            </a:pPr>
+            <a:r>
+              <a:rPr lang="en-US" sz="1200" b="1" dirty="0">
+                <a:solidFill>
+                  <a:schemeClr val="accent1"/>
+                </a:solidFill>
+              </a:rPr>
+              <a:t>WHY</a:t>
+            </a:r>
+            <a:endParaRPr lang="en-US" sz="1200" dirty="0"/>
+          </a:p>
+        </p:txBody>
+      </p:sp>
+      <p:sp>
+        <p:nvSpPr>
           <p:cNvPr id="9" name="Text 6"/>
           <p:cNvSpPr txBox="1"/>
           <p:nvPr/>
         </p:nvSpPr>
         <p:spPr>
           <a:xfrm>
-            <a:off x="5650992" y="2350008"/>
-            <a:ext cx="2871216" cy="228600"/>
+            <a:off x="5650992" y="2606040"/>
+            <a:ext cx="2871216" cy="722376"/>
           </a:xfrm>
           <a:prstGeom prst="rect">
             <a:avLst/>
@@ -5751,48 +5941,12 @@
               <a:buNone/>
             </a:pPr>
             <a:r>
-              <a:rPr lang="en-US" sz="1200" b="1" dirty="0">
-                <a:solidFill>
-                  <a:schemeClr val="accent1"/>
+              <a:rPr lang="en-US" sz="1400" dirty="0">
+                <a:solidFill>
+                  <a:schemeClr val="tx1"/>
                 </a:solidFill>
               </a:rPr>
-              <a:t>WHY</a:t>
-            </a:r>
-            <a:endParaRPr lang="en-US" sz="1200" dirty="0"/>
-          </a:p>
-        </p:txBody>
-      </p:sp>
-      <p:sp>
-        <p:nvSpPr>
-          <p:cNvPr id="10" name="Text 7"/>
-          <p:cNvSpPr txBox="1"/>
-          <p:nvPr/>
-        </p:nvSpPr>
-        <p:spPr>
-          <a:xfrm>
-            <a:off x="5650992" y="2606040"/>
-            <a:ext cx="2871216" cy="722376"/>
-          </a:xfrm>
-          <a:prstGeom prst="rect">
-            <a:avLst/>
-          </a:prstGeom>
-          <a:noFill/>
-          <a:ln/>
-        </p:spPr>
-        <p:txBody>
-          <a:bodyPr wrap="square" lIns="0" tIns="0" rIns="0" bIns="0" rtlCol="0" anchor="t"/>
-          <a:lstStyle/>
-          <a:p>
-            <a:pPr indent="0" marL="0">
-              <a:buNone/>
-            </a:pPr>
-            <a:r>
-              <a:rPr lang="en-US" sz="1400" dirty="0">
-                <a:solidFill>
-                  <a:schemeClr val="tx1"/>
-                </a:solidFill>
-              </a:rPr>
-              <a:t>Lost faint nuclei had blobs ~30% wider, spread out until no peak was left</a:t>
+              <a:t>During fitting blobs moved less than 1 voxel; nuclei are ~20 voxels apart</a:t>
             </a:r>
             <a:endParaRPr lang="en-US" sz="1400" dirty="0"/>
           </a:p>
@@ -5800,7 +5954,7 @@
       </p:sp>
       <p:sp>
         <p:nvSpPr>
-          <p:cNvPr id="11" name="step-card-2"/>
+          <p:cNvPr id="10" name="step-card-2"/>
           <p:cNvSpPr/>
           <p:nvPr/>
         </p:nvSpPr>
@@ -5827,14 +5981,50 @@
       </p:sp>
       <p:sp>
         <p:nvSpPr>
+          <p:cNvPr id="11" name="Text 8"/>
+          <p:cNvSpPr txBox="1"/>
+          <p:nvPr/>
+        </p:nvSpPr>
+        <p:spPr>
+          <a:xfrm>
+            <a:off x="5650992" y="3557016"/>
+            <a:ext cx="2871216" cy="228600"/>
+          </a:xfrm>
+          <a:prstGeom prst="rect">
+            <a:avLst/>
+          </a:prstGeom>
+          <a:noFill/>
+          <a:ln/>
+        </p:spPr>
+        <p:txBody>
+          <a:bodyPr wrap="square" lIns="0" tIns="0" rIns="0" bIns="0" rtlCol="0" anchor="t"/>
+          <a:lstStyle/>
+          <a:p>
+            <a:pPr indent="0" marL="0">
+              <a:buNone/>
+            </a:pPr>
+            <a:r>
+              <a:rPr lang="en-US" sz="1200" b="1" dirty="0">
+                <a:solidFill>
+                  <a:schemeClr val="accent1"/>
+                </a:solidFill>
+              </a:rPr>
+              <a:t>RESULT</a:t>
+            </a:r>
+            <a:endParaRPr lang="en-US" sz="1200" dirty="0"/>
+          </a:p>
+        </p:txBody>
+      </p:sp>
+      <p:sp>
+        <p:nvSpPr>
           <p:cNvPr id="12" name="Text 9"/>
           <p:cNvSpPr txBox="1"/>
           <p:nvPr/>
         </p:nvSpPr>
         <p:spPr>
           <a:xfrm>
-            <a:off x="5650992" y="3557016"/>
-            <a:ext cx="2871216" cy="228600"/>
+            <a:off x="5650992" y="3813048"/>
+            <a:ext cx="2871216" cy="722376"/>
           </a:xfrm>
           <a:prstGeom prst="rect">
             <a:avLst/>
@@ -5850,48 +6040,12 @@
               <a:buNone/>
             </a:pPr>
             <a:r>
-              <a:rPr lang="en-US" sz="1200" b="1" dirty="0">
-                <a:solidFill>
-                  <a:schemeClr val="accent1"/>
+              <a:rPr lang="en-US" sz="1400" dirty="0">
+                <a:solidFill>
+                  <a:schemeClr val="tx1"/>
                 </a:solidFill>
               </a:rPr>
-              <a:t>RESULT</a:t>
-            </a:r>
-            <a:endParaRPr lang="en-US" sz="1200" dirty="0"/>
-          </a:p>
-        </p:txBody>
-      </p:sp>
-      <p:sp>
-        <p:nvSpPr>
-          <p:cNvPr id="13" name="Text 10"/>
-          <p:cNvSpPr txBox="1"/>
-          <p:nvPr/>
-        </p:nvSpPr>
-        <p:spPr>
-          <a:xfrm>
-            <a:off x="5650992" y="3813048"/>
-            <a:ext cx="2871216" cy="722376"/>
-          </a:xfrm>
-          <a:prstGeom prst="rect">
-            <a:avLst/>
-          </a:prstGeom>
-          <a:noFill/>
-          <a:ln/>
-        </p:spPr>
-        <p:txBody>
-          <a:bodyPr wrap="square" lIns="0" tIns="0" rIns="0" bIns="0" rtlCol="0" anchor="t"/>
-          <a:lstStyle/>
-          <a:p>
-            <a:pPr indent="0" marL="0">
-              <a:buNone/>
-            </a:pPr>
-            <a:r>
-              <a:rPr lang="en-US" sz="1400" dirty="0">
-                <a:solidFill>
-                  <a:schemeClr val="tx1"/>
-                </a:solidFill>
-              </a:rPr>
-              <a:t>Faint nuclei found: 13 → 19 of 31. Image quality unchanged; 1 of 4 regions worse</a:t>
+              <a:t>Every nucleus gets a blob (73% → 100%); found nuclei 52% → 71%</a:t>
             </a:r>
             <a:endParaRPr lang="en-US" sz="1400" dirty="0"/>
           </a:p>
@@ -5999,7 +6153,7 @@
                   <a:schemeClr val="tx1"/>
                 </a:solidFill>
               </a:rPr>
-              <a:t>From the simple setup to the final recipe</a:t>
+              <a:t>Step 7 · Bigger steps let blobs travel</a:t>
             </a:r>
             <a:endParaRPr lang="en-US" sz="2800" dirty="0"/>
           </a:p>
@@ -6007,7 +6161,893 @@
       </p:sp>
       <p:graphicFrame>
         <p:nvGraphicFramePr>
-          <p:cNvPr id="13" name="Table 0"/>
+          <p:cNvPr id="3" name="Chart 0" descr=""/>
+          <p:cNvGraphicFramePr/>
+          <p:nvPr/>
+        </p:nvGraphicFramePr>
+        <p:xfrm>
+          <a:off x="457200" y="1051560"/>
+          <a:ext cx="4754880" cy="3246120"/>
+        </p:xfrm>
+        <a:graphic xmlns:a="http://schemas.openxmlformats.org/drawingml/2006/main">
+          <a:graphicData uri="http://schemas.openxmlformats.org/drawingml/2006/chart">
+            <c:chart xmlns:c="http://schemas.openxmlformats.org/drawingml/2006/chart" r:id="rId1"/>
+          </a:graphicData>
+        </a:graphic>
+      </p:graphicFrame>
+      <p:sp>
+        <p:nvSpPr>
+          <p:cNvPr id="4" name="step-card-0"/>
+          <p:cNvSpPr/>
+          <p:nvPr/>
+        </p:nvSpPr>
+        <p:spPr>
+          <a:xfrm>
+            <a:off x="5486400" y="1051560"/>
+            <a:ext cx="3200400" cy="1143000"/>
+          </a:xfrm>
+          <a:prstGeom prst="roundRect">
+            <a:avLst>
+              <a:gd name="adj" fmla="val 6400"/>
+            </a:avLst>
+          </a:prstGeom>
+          <a:solidFill>
+            <a:schemeClr val="bg2"/>
+          </a:solidFill>
+          <a:ln w="12700">
+            <a:solidFill>
+              <a:schemeClr val="bg2"/>
+            </a:solidFill>
+            <a:prstDash val="solid"/>
+          </a:ln>
+        </p:spPr>
+      </p:sp>
+      <p:sp>
+        <p:nvSpPr>
+          <p:cNvPr id="5" name="Text 2"/>
+          <p:cNvSpPr txBox="1"/>
+          <p:nvPr/>
+        </p:nvSpPr>
+        <p:spPr>
+          <a:xfrm>
+            <a:off x="5650992" y="1143000"/>
+            <a:ext cx="2871216" cy="228600"/>
+          </a:xfrm>
+          <a:prstGeom prst="rect">
+            <a:avLst/>
+          </a:prstGeom>
+          <a:noFill/>
+          <a:ln/>
+        </p:spPr>
+        <p:txBody>
+          <a:bodyPr wrap="square" lIns="0" tIns="0" rIns="0" bIns="0" rtlCol="0" anchor="t"/>
+          <a:lstStyle/>
+          <a:p>
+            <a:pPr indent="0" marL="0">
+              <a:buNone/>
+            </a:pPr>
+            <a:r>
+              <a:rPr lang="en-US" sz="1200" b="1" dirty="0">
+                <a:solidFill>
+                  <a:schemeClr val="accent1"/>
+                </a:solidFill>
+              </a:rPr>
+              <a:t>WHAT WE CHANGED</a:t>
+            </a:r>
+            <a:endParaRPr lang="en-US" sz="1200" dirty="0"/>
+          </a:p>
+        </p:txBody>
+      </p:sp>
+      <p:sp>
+        <p:nvSpPr>
+          <p:cNvPr id="6" name="Text 3"/>
+          <p:cNvSpPr txBox="1"/>
+          <p:nvPr/>
+        </p:nvSpPr>
+        <p:spPr>
+          <a:xfrm>
+            <a:off x="5650992" y="1399032"/>
+            <a:ext cx="2871216" cy="722376"/>
+          </a:xfrm>
+          <a:prstGeom prst="rect">
+            <a:avLst/>
+          </a:prstGeom>
+          <a:noFill/>
+          <a:ln/>
+        </p:spPr>
+        <p:txBody>
+          <a:bodyPr wrap="square" lIns="0" tIns="0" rIns="0" bIns="0" rtlCol="0" anchor="t"/>
+          <a:lstStyle/>
+          <a:p>
+            <a:pPr indent="0" marL="0">
+              <a:buNone/>
+            </a:pPr>
+            <a:r>
+              <a:rPr lang="en-US" sz="1400" dirty="0">
+                <a:solidFill>
+                  <a:schemeClr val="tx1"/>
+                </a:solidFill>
+              </a:rPr>
+              <a:t>Raised the step size for blob positions up to 62×</a:t>
+            </a:r>
+            <a:endParaRPr lang="en-US" sz="1400" dirty="0"/>
+          </a:p>
+        </p:txBody>
+      </p:sp>
+      <p:sp>
+        <p:nvSpPr>
+          <p:cNvPr id="7" name="step-card-1"/>
+          <p:cNvSpPr/>
+          <p:nvPr/>
+        </p:nvSpPr>
+        <p:spPr>
+          <a:xfrm>
+            <a:off x="5486400" y="2258568"/>
+            <a:ext cx="3200400" cy="1143000"/>
+          </a:xfrm>
+          <a:prstGeom prst="roundRect">
+            <a:avLst>
+              <a:gd name="adj" fmla="val 6400"/>
+            </a:avLst>
+          </a:prstGeom>
+          <a:solidFill>
+            <a:schemeClr val="bg2"/>
+          </a:solidFill>
+          <a:ln w="12700">
+            <a:solidFill>
+              <a:schemeClr val="bg2"/>
+            </a:solidFill>
+            <a:prstDash val="solid"/>
+          </a:ln>
+        </p:spPr>
+      </p:sp>
+      <p:sp>
+        <p:nvSpPr>
+          <p:cNvPr id="8" name="Text 5"/>
+          <p:cNvSpPr txBox="1"/>
+          <p:nvPr/>
+        </p:nvSpPr>
+        <p:spPr>
+          <a:xfrm>
+            <a:off x="5650992" y="2350008"/>
+            <a:ext cx="2871216" cy="228600"/>
+          </a:xfrm>
+          <a:prstGeom prst="rect">
+            <a:avLst/>
+          </a:prstGeom>
+          <a:noFill/>
+          <a:ln/>
+        </p:spPr>
+        <p:txBody>
+          <a:bodyPr wrap="square" lIns="0" tIns="0" rIns="0" bIns="0" rtlCol="0" anchor="t"/>
+          <a:lstStyle/>
+          <a:p>
+            <a:pPr indent="0" marL="0">
+              <a:buNone/>
+            </a:pPr>
+            <a:r>
+              <a:rPr lang="en-US" sz="1200" b="1" dirty="0">
+                <a:solidFill>
+                  <a:schemeClr val="accent1"/>
+                </a:solidFill>
+              </a:rPr>
+              <a:t>WHY</a:t>
+            </a:r>
+            <a:endParaRPr lang="en-US" sz="1200" dirty="0"/>
+          </a:p>
+        </p:txBody>
+      </p:sp>
+      <p:sp>
+        <p:nvSpPr>
+          <p:cNvPr id="9" name="Text 6"/>
+          <p:cNvSpPr txBox="1"/>
+          <p:nvPr/>
+        </p:nvSpPr>
+        <p:spPr>
+          <a:xfrm>
+            <a:off x="5650992" y="2606040"/>
+            <a:ext cx="2871216" cy="722376"/>
+          </a:xfrm>
+          <a:prstGeom prst="rect">
+            <a:avLst/>
+          </a:prstGeom>
+          <a:noFill/>
+          <a:ln/>
+        </p:spPr>
+        <p:txBody>
+          <a:bodyPr wrap="square" lIns="0" tIns="0" rIns="0" bIns="0" rtlCol="0" anchor="t"/>
+          <a:lstStyle/>
+          <a:p>
+            <a:pPr indent="0" marL="0">
+              <a:buNone/>
+            </a:pPr>
+            <a:r>
+              <a:rPr lang="en-US" sz="1400" dirty="0">
+                <a:solidFill>
+                  <a:schemeClr val="tx1"/>
+                </a:solidFill>
+              </a:rPr>
+              <a:t>The default was copied from photo-scene code and never scaled to voxel units</a:t>
+            </a:r>
+            <a:endParaRPr lang="en-US" sz="1400" dirty="0"/>
+          </a:p>
+        </p:txBody>
+      </p:sp>
+      <p:sp>
+        <p:nvSpPr>
+          <p:cNvPr id="10" name="step-card-2"/>
+          <p:cNvSpPr/>
+          <p:nvPr/>
+        </p:nvSpPr>
+        <p:spPr>
+          <a:xfrm>
+            <a:off x="5486400" y="3465576"/>
+            <a:ext cx="3200400" cy="1143000"/>
+          </a:xfrm>
+          <a:prstGeom prst="roundRect">
+            <a:avLst>
+              <a:gd name="adj" fmla="val 6400"/>
+            </a:avLst>
+          </a:prstGeom>
+          <a:solidFill>
+            <a:schemeClr val="bg2"/>
+          </a:solidFill>
+          <a:ln w="12700">
+            <a:solidFill>
+              <a:schemeClr val="bg2"/>
+            </a:solidFill>
+            <a:prstDash val="solid"/>
+          </a:ln>
+        </p:spPr>
+      </p:sp>
+      <p:sp>
+        <p:nvSpPr>
+          <p:cNvPr id="11" name="Text 8"/>
+          <p:cNvSpPr txBox="1"/>
+          <p:nvPr/>
+        </p:nvSpPr>
+        <p:spPr>
+          <a:xfrm>
+            <a:off x="5650992" y="3557016"/>
+            <a:ext cx="2871216" cy="228600"/>
+          </a:xfrm>
+          <a:prstGeom prst="rect">
+            <a:avLst/>
+          </a:prstGeom>
+          <a:noFill/>
+          <a:ln/>
+        </p:spPr>
+        <p:txBody>
+          <a:bodyPr wrap="square" lIns="0" tIns="0" rIns="0" bIns="0" rtlCol="0" anchor="t"/>
+          <a:lstStyle/>
+          <a:p>
+            <a:pPr indent="0" marL="0">
+              <a:buNone/>
+            </a:pPr>
+            <a:r>
+              <a:rPr lang="en-US" sz="1200" b="1" dirty="0">
+                <a:solidFill>
+                  <a:schemeClr val="accent1"/>
+                </a:solidFill>
+              </a:rPr>
+              <a:t>RESULT</a:t>
+            </a:r>
+            <a:endParaRPr lang="en-US" sz="1200" dirty="0"/>
+          </a:p>
+        </p:txBody>
+      </p:sp>
+      <p:sp>
+        <p:nvSpPr>
+          <p:cNvPr id="12" name="Text 9"/>
+          <p:cNvSpPr txBox="1"/>
+          <p:nvPr/>
+        </p:nvSpPr>
+        <p:spPr>
+          <a:xfrm>
+            <a:off x="5650992" y="3813048"/>
+            <a:ext cx="2871216" cy="722376"/>
+          </a:xfrm>
+          <a:prstGeom prst="rect">
+            <a:avLst/>
+          </a:prstGeom>
+          <a:noFill/>
+          <a:ln/>
+        </p:spPr>
+        <p:txBody>
+          <a:bodyPr wrap="square" lIns="0" tIns="0" rIns="0" bIns="0" rtlCol="0" anchor="t"/>
+          <a:lstStyle/>
+          <a:p>
+            <a:pPr indent="0" marL="0">
+              <a:buNone/>
+            </a:pPr>
+            <a:r>
+              <a:rPr lang="en-US" sz="1400" dirty="0">
+                <a:solidFill>
+                  <a:schemeClr val="tx1"/>
+                </a:solidFill>
+              </a:rPr>
+              <a:t>Badly started fits catch up (F1 0.64 → 0.78), but good starts get worse (0.84 → 0.78)</a:t>
+            </a:r>
+            <a:endParaRPr lang="en-US" sz="1400" dirty="0"/>
+          </a:p>
+        </p:txBody>
+      </p:sp>
+      <p:sp>
+        <p:nvSpPr>
+          <p:cNvPr id="25" name="Slide Number Placeholder 0"/>
+          <p:cNvSpPr>
+            <a:spLocks noGrp="1"/>
+          </p:cNvSpPr>
+          <p:nvPr>
+            <p:ph type="sldNum" sz="quarter" idx="4294967295"/>
+          </p:nvPr>
+        </p:nvSpPr>
+        <p:spPr>
+          <a:xfrm>
+            <a:off x="8229600" y="4754880"/>
+            <a:ext cx="457200" cy="228600"/>
+          </a:xfrm>
+          <a:prstGeom prst="rect">
+            <a:avLst/>
+          </a:prstGeom>
+          <a:extLst>
+            <a:ext uri="{C572A759-6A51-4108-AA02-DFA0A04FC94B}">
+              <ma14:wrappingTextBoxFlag xmlns:ma14="http://schemas.microsoft.com/office/mac/drawingml/2011/main" val="0"/>
+            </a:ext>
+          </a:extLst>
+        </p:spPr>
+        <p:txBody>
+          <a:bodyPr/>
+          <a:lstStyle>
+            <a:lvl1pPr>
+              <a:defRPr sz="900">
+                <a:solidFill>
+                  <a:schemeClr val="accent5"/>
+                </a:solidFill>
+              </a:defRPr>
+            </a:lvl1pPr>
+          </a:lstStyle>
+          <a:p>
+            <a:pPr algn="r"/>
+            <a:fld id="{F7021451-1387-4CA6-816F-3879F97B5CBC}" type="slidenum">
+              <a:rPr b="0" lang="en-US"/>
+              <a:t>12</a:t>
+            </a:fld>
+            <a:endParaRPr lang="en-US"/>
+          </a:p>
+        </p:txBody>
+      </p:sp>
+    </p:spTree>
+  </p:cSld>
+  <p:clrMapOvr>
+    <a:masterClrMapping/>
+  </p:clrMapOvr>
+</p:sld>
+</file>
+
+<file path=ppt/slides/slide13.xml><?xml version="1.0" encoding="utf-8"?>
+<p:sld xmlns:a="http://schemas.openxmlformats.org/drawingml/2006/main" xmlns:r="http://schemas.openxmlformats.org/officeDocument/2006/relationships" xmlns:p="http://schemas.openxmlformats.org/presentationml/2006/main">
+  <p:cSld name="Slide 13">
+    <p:spTree>
+      <p:nvGrpSpPr>
+        <p:cNvPr id="1" name=""/>
+        <p:cNvGrpSpPr/>
+        <p:nvPr/>
+      </p:nvGrpSpPr>
+      <p:grpSpPr>
+        <a:xfrm>
+          <a:off x="0" y="0"/>
+          <a:ext cx="0" cy="0"/>
+          <a:chOff x="0" y="0"/>
+          <a:chExt cx="0" cy="0"/>
+        </a:xfrm>
+      </p:grpSpPr>
+      <p:sp>
+        <p:nvSpPr>
+          <p:cNvPr id="2" name="Text 0"/>
+          <p:cNvSpPr/>
+          <p:nvPr>
+            <p:ph idx="100" type="title" hasCustomPrompt="1"/>
+          </p:nvPr>
+        </p:nvSpPr>
+        <p:spPr>
+          <a:xfrm>
+            <a:off x="457200" y="256032"/>
+            <a:ext cx="8229600" cy="640080"/>
+          </a:xfrm>
+          <a:prstGeom prst="rect">
+            <a:avLst/>
+          </a:prstGeom>
+          <a:noFill/>
+          <a:ln/>
+        </p:spPr>
+        <p:txBody>
+          <a:bodyPr wrap="square" lIns="0" tIns="0" rIns="0" bIns="0" rtlCol="0" anchor="ctr"/>
+          <a:lstStyle/>
+          <a:p>
+            <a:pPr algn="l" indent="0" marL="0">
+              <a:buNone/>
+            </a:pPr>
+            <a:r>
+              <a:rPr lang="en-US" sz="2800" b="1" dirty="0">
+                <a:solidFill>
+                  <a:schemeClr val="tx1"/>
+                </a:solidFill>
+              </a:rPr>
+              <a:t>Step 8 · Faint nuclei: cap the blob size</a:t>
+            </a:r>
+            <a:endParaRPr lang="en-US" sz="2800" dirty="0"/>
+          </a:p>
+        </p:txBody>
+      </p:sp>
+      <p:pic>
+        <p:nvPicPr>
+          <p:cNvPr id="3" name="size-cap" descr="D:\masters\MLCV seminar\TeamProject\presentation\figs\size_cap.png">    </p:cNvPr>
+          <p:cNvPicPr>
+            <a:picLocks noChangeAspect="1"/>
+          </p:cNvPicPr>
+          <p:nvPr/>
+        </p:nvPicPr>
+        <p:blipFill>
+          <a:blip r:embed="rId1"/>
+          <a:stretch>
+            <a:fillRect/>
+          </a:stretch>
+        </p:blipFill>
+        <p:spPr>
+          <a:xfrm>
+            <a:off x="457200" y="1097280"/>
+            <a:ext cx="4754880" cy="2377440"/>
+          </a:xfrm>
+          <a:prstGeom prst="rect">
+            <a:avLst/>
+          </a:prstGeom>
+        </p:spPr>
+      </p:pic>
+      <p:sp>
+        <p:nvSpPr>
+          <p:cNvPr id="4" name="Text 1"/>
+          <p:cNvSpPr txBox="1"/>
+          <p:nvPr/>
+        </p:nvSpPr>
+        <p:spPr>
+          <a:xfrm>
+            <a:off x="457200" y="3566160"/>
+            <a:ext cx="4754880" cy="274320"/>
+          </a:xfrm>
+          <a:prstGeom prst="rect">
+            <a:avLst/>
+          </a:prstGeom>
+          <a:noFill/>
+          <a:ln/>
+        </p:spPr>
+        <p:txBody>
+          <a:bodyPr wrap="square" lIns="0" tIns="0" rIns="0" bIns="0" rtlCol="0" anchor="t"/>
+          <a:lstStyle/>
+          <a:p>
+            <a:pPr indent="0" marL="0">
+              <a:buNone/>
+            </a:pPr>
+            <a:r>
+              <a:rPr lang="en-US" sz="1100" dirty="0">
+                <a:solidFill>
+                  <a:schemeClr val="accent5"/>
+                </a:solidFill>
+              </a:rPr>
+              <a:t>Green: nucleus found  ·  red: missed</a:t>
+            </a:r>
+            <a:endParaRPr lang="en-US" sz="1100" dirty="0"/>
+          </a:p>
+        </p:txBody>
+      </p:sp>
+      <p:sp>
+        <p:nvSpPr>
+          <p:cNvPr id="5" name="step-card-0"/>
+          <p:cNvSpPr/>
+          <p:nvPr/>
+        </p:nvSpPr>
+        <p:spPr>
+          <a:xfrm>
+            <a:off x="5486400" y="1051560"/>
+            <a:ext cx="3200400" cy="1143000"/>
+          </a:xfrm>
+          <a:prstGeom prst="roundRect">
+            <a:avLst>
+              <a:gd name="adj" fmla="val 6400"/>
+            </a:avLst>
+          </a:prstGeom>
+          <a:solidFill>
+            <a:schemeClr val="bg2"/>
+          </a:solidFill>
+          <a:ln w="12700">
+            <a:solidFill>
+              <a:schemeClr val="bg2"/>
+            </a:solidFill>
+            <a:prstDash val="solid"/>
+          </a:ln>
+        </p:spPr>
+      </p:sp>
+      <p:sp>
+        <p:nvSpPr>
+          <p:cNvPr id="6" name="Text 3"/>
+          <p:cNvSpPr txBox="1"/>
+          <p:nvPr/>
+        </p:nvSpPr>
+        <p:spPr>
+          <a:xfrm>
+            <a:off x="5650992" y="1143000"/>
+            <a:ext cx="2871216" cy="228600"/>
+          </a:xfrm>
+          <a:prstGeom prst="rect">
+            <a:avLst/>
+          </a:prstGeom>
+          <a:noFill/>
+          <a:ln/>
+        </p:spPr>
+        <p:txBody>
+          <a:bodyPr wrap="square" lIns="0" tIns="0" rIns="0" bIns="0" rtlCol="0" anchor="t"/>
+          <a:lstStyle/>
+          <a:p>
+            <a:pPr indent="0" marL="0">
+              <a:buNone/>
+            </a:pPr>
+            <a:r>
+              <a:rPr lang="en-US" sz="1200" b="1" dirty="0">
+                <a:solidFill>
+                  <a:schemeClr val="accent1"/>
+                </a:solidFill>
+              </a:rPr>
+              <a:t>WHAT WE CHANGED</a:t>
+            </a:r>
+            <a:endParaRPr lang="en-US" sz="1200" dirty="0"/>
+          </a:p>
+        </p:txBody>
+      </p:sp>
+      <p:sp>
+        <p:nvSpPr>
+          <p:cNvPr id="7" name="Text 4"/>
+          <p:cNvSpPr txBox="1"/>
+          <p:nvPr/>
+        </p:nvSpPr>
+        <p:spPr>
+          <a:xfrm>
+            <a:off x="5650992" y="1399032"/>
+            <a:ext cx="2871216" cy="722376"/>
+          </a:xfrm>
+          <a:prstGeom prst="rect">
+            <a:avLst/>
+          </a:prstGeom>
+          <a:noFill/>
+          <a:ln/>
+        </p:spPr>
+        <p:txBody>
+          <a:bodyPr wrap="square" lIns="0" tIns="0" rIns="0" bIns="0" rtlCol="0" anchor="t"/>
+          <a:lstStyle/>
+          <a:p>
+            <a:pPr indent="0" marL="0">
+              <a:buNone/>
+            </a:pPr>
+            <a:r>
+              <a:rPr lang="en-US" sz="1400" dirty="0">
+                <a:solidFill>
+                  <a:schemeClr val="tx1"/>
+                </a:solidFill>
+              </a:rPr>
+              <a:t>Limited how wide a nucleus blob may grow (10 voxels)</a:t>
+            </a:r>
+            <a:endParaRPr lang="en-US" sz="1400" dirty="0"/>
+          </a:p>
+        </p:txBody>
+      </p:sp>
+      <p:sp>
+        <p:nvSpPr>
+          <p:cNvPr id="8" name="step-card-1"/>
+          <p:cNvSpPr/>
+          <p:nvPr/>
+        </p:nvSpPr>
+        <p:spPr>
+          <a:xfrm>
+            <a:off x="5486400" y="2258568"/>
+            <a:ext cx="3200400" cy="1143000"/>
+          </a:xfrm>
+          <a:prstGeom prst="roundRect">
+            <a:avLst>
+              <a:gd name="adj" fmla="val 6400"/>
+            </a:avLst>
+          </a:prstGeom>
+          <a:solidFill>
+            <a:schemeClr val="bg2"/>
+          </a:solidFill>
+          <a:ln w="12700">
+            <a:solidFill>
+              <a:schemeClr val="bg2"/>
+            </a:solidFill>
+            <a:prstDash val="solid"/>
+          </a:ln>
+        </p:spPr>
+      </p:sp>
+      <p:sp>
+        <p:nvSpPr>
+          <p:cNvPr id="9" name="Text 6"/>
+          <p:cNvSpPr txBox="1"/>
+          <p:nvPr/>
+        </p:nvSpPr>
+        <p:spPr>
+          <a:xfrm>
+            <a:off x="5650992" y="2350008"/>
+            <a:ext cx="2871216" cy="228600"/>
+          </a:xfrm>
+          <a:prstGeom prst="rect">
+            <a:avLst/>
+          </a:prstGeom>
+          <a:noFill/>
+          <a:ln/>
+        </p:spPr>
+        <p:txBody>
+          <a:bodyPr wrap="square" lIns="0" tIns="0" rIns="0" bIns="0" rtlCol="0" anchor="t"/>
+          <a:lstStyle/>
+          <a:p>
+            <a:pPr indent="0" marL="0">
+              <a:buNone/>
+            </a:pPr>
+            <a:r>
+              <a:rPr lang="en-US" sz="1200" b="1" dirty="0">
+                <a:solidFill>
+                  <a:schemeClr val="accent1"/>
+                </a:solidFill>
+              </a:rPr>
+              <a:t>WHY</a:t>
+            </a:r>
+            <a:endParaRPr lang="en-US" sz="1200" dirty="0"/>
+          </a:p>
+        </p:txBody>
+      </p:sp>
+      <p:sp>
+        <p:nvSpPr>
+          <p:cNvPr id="10" name="Text 7"/>
+          <p:cNvSpPr txBox="1"/>
+          <p:nvPr/>
+        </p:nvSpPr>
+        <p:spPr>
+          <a:xfrm>
+            <a:off x="5650992" y="2606040"/>
+            <a:ext cx="2871216" cy="722376"/>
+          </a:xfrm>
+          <a:prstGeom prst="rect">
+            <a:avLst/>
+          </a:prstGeom>
+          <a:noFill/>
+          <a:ln/>
+        </p:spPr>
+        <p:txBody>
+          <a:bodyPr wrap="square" lIns="0" tIns="0" rIns="0" bIns="0" rtlCol="0" anchor="t"/>
+          <a:lstStyle/>
+          <a:p>
+            <a:pPr indent="0" marL="0">
+              <a:buNone/>
+            </a:pPr>
+            <a:r>
+              <a:rPr lang="en-US" sz="1400" dirty="0">
+                <a:solidFill>
+                  <a:schemeClr val="tx1"/>
+                </a:solidFill>
+              </a:rPr>
+              <a:t>Lost faint nuclei had blobs ~30% wider, spread out until no peak was left</a:t>
+            </a:r>
+            <a:endParaRPr lang="en-US" sz="1400" dirty="0"/>
+          </a:p>
+        </p:txBody>
+      </p:sp>
+      <p:sp>
+        <p:nvSpPr>
+          <p:cNvPr id="11" name="step-card-2"/>
+          <p:cNvSpPr/>
+          <p:nvPr/>
+        </p:nvSpPr>
+        <p:spPr>
+          <a:xfrm>
+            <a:off x="5486400" y="3465576"/>
+            <a:ext cx="3200400" cy="1143000"/>
+          </a:xfrm>
+          <a:prstGeom prst="roundRect">
+            <a:avLst>
+              <a:gd name="adj" fmla="val 6400"/>
+            </a:avLst>
+          </a:prstGeom>
+          <a:solidFill>
+            <a:schemeClr val="bg2"/>
+          </a:solidFill>
+          <a:ln w="12700">
+            <a:solidFill>
+              <a:schemeClr val="bg2"/>
+            </a:solidFill>
+            <a:prstDash val="solid"/>
+          </a:ln>
+        </p:spPr>
+      </p:sp>
+      <p:sp>
+        <p:nvSpPr>
+          <p:cNvPr id="12" name="Text 9"/>
+          <p:cNvSpPr txBox="1"/>
+          <p:nvPr/>
+        </p:nvSpPr>
+        <p:spPr>
+          <a:xfrm>
+            <a:off x="5650992" y="3557016"/>
+            <a:ext cx="2871216" cy="228600"/>
+          </a:xfrm>
+          <a:prstGeom prst="rect">
+            <a:avLst/>
+          </a:prstGeom>
+          <a:noFill/>
+          <a:ln/>
+        </p:spPr>
+        <p:txBody>
+          <a:bodyPr wrap="square" lIns="0" tIns="0" rIns="0" bIns="0" rtlCol="0" anchor="t"/>
+          <a:lstStyle/>
+          <a:p>
+            <a:pPr indent="0" marL="0">
+              <a:buNone/>
+            </a:pPr>
+            <a:r>
+              <a:rPr lang="en-US" sz="1200" b="1" dirty="0">
+                <a:solidFill>
+                  <a:schemeClr val="accent1"/>
+                </a:solidFill>
+              </a:rPr>
+              <a:t>RESULT</a:t>
+            </a:r>
+            <a:endParaRPr lang="en-US" sz="1200" dirty="0"/>
+          </a:p>
+        </p:txBody>
+      </p:sp>
+      <p:sp>
+        <p:nvSpPr>
+          <p:cNvPr id="13" name="Text 10"/>
+          <p:cNvSpPr txBox="1"/>
+          <p:nvPr/>
+        </p:nvSpPr>
+        <p:spPr>
+          <a:xfrm>
+            <a:off x="5650992" y="3813048"/>
+            <a:ext cx="2871216" cy="722376"/>
+          </a:xfrm>
+          <a:prstGeom prst="rect">
+            <a:avLst/>
+          </a:prstGeom>
+          <a:noFill/>
+          <a:ln/>
+        </p:spPr>
+        <p:txBody>
+          <a:bodyPr wrap="square" lIns="0" tIns="0" rIns="0" bIns="0" rtlCol="0" anchor="t"/>
+          <a:lstStyle/>
+          <a:p>
+            <a:pPr indent="0" marL="0">
+              <a:buNone/>
+            </a:pPr>
+            <a:r>
+              <a:rPr lang="en-US" sz="1400" dirty="0">
+                <a:solidFill>
+                  <a:schemeClr val="tx1"/>
+                </a:solidFill>
+              </a:rPr>
+              <a:t>Faint nuclei found: 13 → 19 of 31. Image quality unchanged; 1 of 4 regions worse</a:t>
+            </a:r>
+            <a:endParaRPr lang="en-US" sz="1400" dirty="0"/>
+          </a:p>
+        </p:txBody>
+      </p:sp>
+      <p:sp>
+        <p:nvSpPr>
+          <p:cNvPr id="25" name="Slide Number Placeholder 0"/>
+          <p:cNvSpPr>
+            <a:spLocks noGrp="1"/>
+          </p:cNvSpPr>
+          <p:nvPr>
+            <p:ph type="sldNum" sz="quarter" idx="4294967295"/>
+          </p:nvPr>
+        </p:nvSpPr>
+        <p:spPr>
+          <a:xfrm>
+            <a:off x="8229600" y="4754880"/>
+            <a:ext cx="457200" cy="228600"/>
+          </a:xfrm>
+          <a:prstGeom prst="rect">
+            <a:avLst/>
+          </a:prstGeom>
+          <a:extLst>
+            <a:ext uri="{C572A759-6A51-4108-AA02-DFA0A04FC94B}">
+              <ma14:wrappingTextBoxFlag xmlns:ma14="http://schemas.microsoft.com/office/mac/drawingml/2011/main" val="0"/>
+            </a:ext>
+          </a:extLst>
+        </p:spPr>
+        <p:txBody>
+          <a:bodyPr/>
+          <a:lstStyle>
+            <a:lvl1pPr>
+              <a:defRPr sz="900">
+                <a:solidFill>
+                  <a:schemeClr val="accent5"/>
+                </a:solidFill>
+              </a:defRPr>
+            </a:lvl1pPr>
+          </a:lstStyle>
+          <a:p>
+            <a:pPr algn="r"/>
+            <a:fld id="{F7021451-1387-4CA6-816F-3879F97B5CBC}" type="slidenum">
+              <a:rPr b="0" lang="en-US"/>
+              <a:t>13</a:t>
+            </a:fld>
+            <a:endParaRPr lang="en-US"/>
+          </a:p>
+        </p:txBody>
+      </p:sp>
+    </p:spTree>
+  </p:cSld>
+  <p:clrMapOvr>
+    <a:masterClrMapping/>
+  </p:clrMapOvr>
+</p:sld>
+</file>
+
+<file path=ppt/slides/slide14.xml><?xml version="1.0" encoding="utf-8"?>
+<p:sld xmlns:a="http://schemas.openxmlformats.org/drawingml/2006/main" xmlns:r="http://schemas.openxmlformats.org/officeDocument/2006/relationships" xmlns:p="http://schemas.openxmlformats.org/presentationml/2006/main">
+  <p:cSld name="Slide 14">
+    <p:spTree>
+      <p:nvGrpSpPr>
+        <p:cNvPr id="1" name=""/>
+        <p:cNvGrpSpPr/>
+        <p:nvPr/>
+      </p:nvGrpSpPr>
+      <p:grpSpPr>
+        <a:xfrm>
+          <a:off x="0" y="0"/>
+          <a:ext cx="0" cy="0"/>
+          <a:chOff x="0" y="0"/>
+          <a:chExt cx="0" cy="0"/>
+        </a:xfrm>
+      </p:grpSpPr>
+      <p:sp>
+        <p:nvSpPr>
+          <p:cNvPr id="2" name="Text 0"/>
+          <p:cNvSpPr/>
+          <p:nvPr>
+            <p:ph idx="100" type="title" hasCustomPrompt="1"/>
+          </p:nvPr>
+        </p:nvSpPr>
+        <p:spPr>
+          <a:xfrm>
+            <a:off x="457200" y="256032"/>
+            <a:ext cx="8229600" cy="640080"/>
+          </a:xfrm>
+          <a:prstGeom prst="rect">
+            <a:avLst/>
+          </a:prstGeom>
+          <a:noFill/>
+          <a:ln/>
+        </p:spPr>
+        <p:txBody>
+          <a:bodyPr wrap="square" lIns="0" tIns="0" rIns="0" bIns="0" rtlCol="0" anchor="ctr"/>
+          <a:lstStyle/>
+          <a:p>
+            <a:pPr algn="l" indent="0" marL="0">
+              <a:buNone/>
+            </a:pPr>
+            <a:r>
+              <a:rPr lang="en-US" sz="2800" b="1" dirty="0">
+                <a:solidFill>
+                  <a:schemeClr val="tx1"/>
+                </a:solidFill>
+              </a:rPr>
+              <a:t>From the simple setup to the final recipe</a:t>
+            </a:r>
+            <a:endParaRPr lang="en-US" sz="2800" dirty="0"/>
+          </a:p>
+        </p:txBody>
+      </p:sp>
+      <p:graphicFrame>
+        <p:nvGraphicFramePr>
+          <p:cNvPr id="15" name="Table 0"/>
           <p:cNvGraphicFramePr>
             <a:graphicFrameLocks noGrp="1"/>
           </p:cNvGraphicFramePr>
@@ -6034,7 +7074,7 @@
                 <a:gridCol w="1325880"/>
                 <a:gridCol w="1325880"/>
               </a:tblGrid>
-              <a:tr h="393192">
+              <a:tr h="329184">
                 <a:tc>
                   <a:txBody>
                     <a:bodyPr/>
@@ -6044,7 +7084,7 @@
                         <a:buNone/>
                       </a:pPr>
                       <a:r>
-                        <a:rPr lang="en-US" sz="1500" b="1" dirty="0">
+                        <a:rPr lang="en-US" sz="1400" b="1" dirty="0">
                           <a:solidFill>
                             <a:srgbClr val="FFFFFF"/>
                           </a:solidFill>
@@ -6054,7 +7094,7 @@
                         </a:rPr>
                         <a:t>Change</a:t>
                       </a:r>
-                      <a:endParaRPr lang="en-US" sz="1500" dirty="0">
+                      <a:endParaRPr lang="en-US" sz="1400" dirty="0">
                         <a:latin typeface="Calibri" charset="0"/>
                         <a:ea typeface="Calibri" charset="0"/>
                         <a:cs typeface="Calibri" charset="0"/>
@@ -6112,7 +7152,7 @@
                         <a:buNone/>
                       </a:pPr>
                       <a:r>
-                        <a:rPr lang="en-US" sz="1500" b="1" dirty="0">
+                        <a:rPr lang="en-US" sz="1400" b="1" dirty="0">
                           <a:solidFill>
                             <a:srgbClr val="FFFFFF"/>
                           </a:solidFill>
@@ -6122,7 +7162,7 @@
                         </a:rPr>
                         <a:t>By</a:t>
                       </a:r>
-                      <a:endParaRPr lang="en-US" sz="1500" dirty="0">
+                      <a:endParaRPr lang="en-US" sz="1400" dirty="0">
                         <a:latin typeface="Calibri" charset="0"/>
                         <a:ea typeface="Calibri" charset="0"/>
                         <a:cs typeface="Calibri" charset="0"/>
@@ -6180,7 +7220,7 @@
                         <a:buNone/>
                       </a:pPr>
                       <a:r>
-                        <a:rPr lang="en-US" sz="1500" b="1" dirty="0">
+                        <a:rPr lang="en-US" sz="1400" b="1" dirty="0">
                           <a:solidFill>
                             <a:srgbClr val="FFFFFF"/>
                           </a:solidFill>
@@ -6190,7 +7230,7 @@
                         </a:rPr>
                         <a:t>Measured on</a:t>
                       </a:r>
-                      <a:endParaRPr lang="en-US" sz="1500" dirty="0">
+                      <a:endParaRPr lang="en-US" sz="1400" dirty="0">
                         <a:latin typeface="Calibri" charset="0"/>
                         <a:ea typeface="Calibri" charset="0"/>
                         <a:cs typeface="Calibri" charset="0"/>
@@ -6248,7 +7288,7 @@
                         <a:buNone/>
                       </a:pPr>
                       <a:r>
-                        <a:rPr lang="en-US" sz="1500" b="1" dirty="0">
+                        <a:rPr lang="en-US" sz="1400" b="1" dirty="0">
                           <a:solidFill>
                             <a:srgbClr val="FFFFFF"/>
                           </a:solidFill>
@@ -6258,7 +7298,7 @@
                         </a:rPr>
                         <a:t>Before</a:t>
                       </a:r>
-                      <a:endParaRPr lang="en-US" sz="1500" dirty="0">
+                      <a:endParaRPr lang="en-US" sz="1400" dirty="0">
                         <a:latin typeface="Calibri" charset="0"/>
                         <a:ea typeface="Calibri" charset="0"/>
                         <a:cs typeface="Calibri" charset="0"/>
@@ -6316,7 +7356,7 @@
                         <a:buNone/>
                       </a:pPr>
                       <a:r>
-                        <a:rPr lang="en-US" sz="1500" b="1" dirty="0">
+                        <a:rPr lang="en-US" sz="1400" b="1" dirty="0">
                           <a:solidFill>
                             <a:srgbClr val="FFFFFF"/>
                           </a:solidFill>
@@ -6326,7 +7366,7 @@
                         </a:rPr>
                         <a:t>After</a:t>
                       </a:r>
-                      <a:endParaRPr lang="en-US" sz="1500" dirty="0">
+                      <a:endParaRPr lang="en-US" sz="1400" dirty="0">
                         <a:latin typeface="Calibri" charset="0"/>
                         <a:ea typeface="Calibri" charset="0"/>
                         <a:cs typeface="Calibri" charset="0"/>
@@ -6376,7 +7416,7 @@
                   </a:tcPr>
                 </a:tc>
               </a:tr>
-              <a:tr h="393192">
+              <a:tr h="329184">
                 <a:tc>
                   <a:txBody>
                     <a:bodyPr/>
@@ -6386,7 +7426,7 @@
                         <a:buNone/>
                       </a:pPr>
                       <a:r>
-                        <a:rPr lang="en-US" sz="1500" dirty="0">
+                        <a:rPr lang="en-US" sz="1400" dirty="0">
                           <a:solidFill>
                             <a:srgbClr val="15171C"/>
                           </a:solidFill>
@@ -6396,7 +7436,7 @@
                         </a:rPr>
                         <a:t>Start on bright peaks</a:t>
                       </a:r>
-                      <a:endParaRPr lang="en-US" sz="1500" dirty="0">
+                      <a:endParaRPr lang="en-US" sz="1400" dirty="0">
                         <a:latin typeface="Calibri" charset="0"/>
                         <a:ea typeface="Calibri" charset="0"/>
                         <a:cs typeface="Calibri" charset="0"/>
@@ -6454,7 +7494,7 @@
                         <a:buNone/>
                       </a:pPr>
                       <a:r>
-                        <a:rPr lang="en-US" sz="1500" dirty="0">
+                        <a:rPr lang="en-US" sz="1400" dirty="0">
                           <a:solidFill>
                             <a:srgbClr val="15171C"/>
                           </a:solidFill>
@@ -6464,7 +7504,7 @@
                         </a:rPr>
                         <a:t>Akim</a:t>
                       </a:r>
-                      <a:endParaRPr lang="en-US" sz="1500" dirty="0">
+                      <a:endParaRPr lang="en-US" sz="1400" dirty="0">
                         <a:latin typeface="Calibri" charset="0"/>
                         <a:ea typeface="Calibri" charset="0"/>
                         <a:cs typeface="Calibri" charset="0"/>
@@ -6522,7 +7562,7 @@
                         <a:buNone/>
                       </a:pPr>
                       <a:r>
-                        <a:rPr lang="en-US" sz="1500" dirty="0">
+                        <a:rPr lang="en-US" sz="1400" dirty="0">
                           <a:solidFill>
                             <a:srgbClr val="15171C"/>
                           </a:solidFill>
@@ -6532,7 +7572,7 @@
                         </a:rPr>
                         <a:t>PSNR, phantom</a:t>
                       </a:r>
-                      <a:endParaRPr lang="en-US" sz="1500" dirty="0">
+                      <a:endParaRPr lang="en-US" sz="1400" dirty="0">
                         <a:latin typeface="Calibri" charset="0"/>
                         <a:ea typeface="Calibri" charset="0"/>
                         <a:cs typeface="Calibri" charset="0"/>
@@ -6590,7 +7630,7 @@
                         <a:buNone/>
                       </a:pPr>
                       <a:r>
-                        <a:rPr lang="en-US" sz="1500" dirty="0">
+                        <a:rPr lang="en-US" sz="1400" dirty="0">
                           <a:solidFill>
                             <a:srgbClr val="15171C"/>
                           </a:solidFill>
@@ -6600,7 +7640,7 @@
                         </a:rPr>
                         <a:t>32.0 dB</a:t>
                       </a:r>
-                      <a:endParaRPr lang="en-US" sz="1500" dirty="0">
+                      <a:endParaRPr lang="en-US" sz="1400" dirty="0">
                         <a:latin typeface="Calibri" charset="0"/>
                         <a:ea typeface="Calibri" charset="0"/>
                         <a:cs typeface="Calibri" charset="0"/>
@@ -6658,7 +7698,7 @@
                         <a:buNone/>
                       </a:pPr>
                       <a:r>
-                        <a:rPr lang="en-US" sz="1500" b="1" dirty="0">
+                        <a:rPr lang="en-US" sz="1400" b="1" dirty="0">
                           <a:solidFill>
                             <a:srgbClr val="E8730C"/>
                           </a:solidFill>
@@ -6668,7 +7708,7 @@
                         </a:rPr>
                         <a:t>53.1 dB</a:t>
                       </a:r>
-                      <a:endParaRPr lang="en-US" sz="1500" dirty="0">
+                      <a:endParaRPr lang="en-US" sz="1400" dirty="0">
                         <a:latin typeface="Calibri" charset="0"/>
                         <a:ea typeface="Calibri" charset="0"/>
                         <a:cs typeface="Calibri" charset="0"/>
@@ -6718,7 +7758,7 @@
                   </a:tcPr>
                 </a:tc>
               </a:tr>
-              <a:tr h="393192">
+              <a:tr h="329184">
                 <a:tc>
                   <a:txBody>
                     <a:bodyPr/>
@@ -6728,7 +7768,7 @@
                         <a:buNone/>
                       </a:pPr>
                       <a:r>
-                        <a:rPr lang="en-US" sz="1500" dirty="0">
+                        <a:rPr lang="en-US" sz="1400" dirty="0">
                           <a:solidFill>
                             <a:srgbClr val="15171C"/>
                           </a:solidFill>
@@ -6738,7 +7778,7 @@
                         </a:rPr>
                         <a:t>Stretched + rotated blobs</a:t>
                       </a:r>
-                      <a:endParaRPr lang="en-US" sz="1500" dirty="0">
+                      <a:endParaRPr lang="en-US" sz="1400" dirty="0">
                         <a:latin typeface="Calibri" charset="0"/>
                         <a:ea typeface="Calibri" charset="0"/>
                         <a:cs typeface="Calibri" charset="0"/>
@@ -6796,7 +7836,7 @@
                         <a:buNone/>
                       </a:pPr>
                       <a:r>
-                        <a:rPr lang="en-US" sz="1500" dirty="0">
+                        <a:rPr lang="en-US" sz="1400" dirty="0">
                           <a:solidFill>
                             <a:srgbClr val="15171C"/>
                           </a:solidFill>
@@ -6806,7 +7846,7 @@
                         </a:rPr>
                         <a:t>Akim</a:t>
                       </a:r>
-                      <a:endParaRPr lang="en-US" sz="1500" dirty="0">
+                      <a:endParaRPr lang="en-US" sz="1400" dirty="0">
                         <a:latin typeface="Calibri" charset="0"/>
                         <a:ea typeface="Calibri" charset="0"/>
                         <a:cs typeface="Calibri" charset="0"/>
@@ -6864,7 +7904,7 @@
                         <a:buNone/>
                       </a:pPr>
                       <a:r>
-                        <a:rPr lang="en-US" sz="1500" dirty="0">
+                        <a:rPr lang="en-US" sz="1400" dirty="0">
                           <a:solidFill>
                             <a:srgbClr val="15171C"/>
                           </a:solidFill>
@@ -6874,7 +7914,7 @@
                         </a:rPr>
                         <a:t>PSNR, real data, median</a:t>
                       </a:r>
-                      <a:endParaRPr lang="en-US" sz="1500" dirty="0">
+                      <a:endParaRPr lang="en-US" sz="1400" dirty="0">
                         <a:latin typeface="Calibri" charset="0"/>
                         <a:ea typeface="Calibri" charset="0"/>
                         <a:cs typeface="Calibri" charset="0"/>
@@ -6932,7 +7972,7 @@
                         <a:buNone/>
                       </a:pPr>
                       <a:r>
-                        <a:rPr lang="en-US" sz="1500" dirty="0">
+                        <a:rPr lang="en-US" sz="1400" dirty="0">
                           <a:solidFill>
                             <a:srgbClr val="15171C"/>
                           </a:solidFill>
@@ -6942,7 +7982,7 @@
                         </a:rPr>
                         <a:t>20.4 dB</a:t>
                       </a:r>
-                      <a:endParaRPr lang="en-US" sz="1500" dirty="0">
+                      <a:endParaRPr lang="en-US" sz="1400" dirty="0">
                         <a:latin typeface="Calibri" charset="0"/>
                         <a:ea typeface="Calibri" charset="0"/>
                         <a:cs typeface="Calibri" charset="0"/>
@@ -7000,7 +8040,7 @@
                         <a:buNone/>
                       </a:pPr>
                       <a:r>
-                        <a:rPr lang="en-US" sz="1500" b="1" dirty="0">
+                        <a:rPr lang="en-US" sz="1400" b="1" dirty="0">
                           <a:solidFill>
                             <a:srgbClr val="E8730C"/>
                           </a:solidFill>
@@ -7010,7 +8050,7 @@
                         </a:rPr>
                         <a:t>24.0 dB</a:t>
                       </a:r>
-                      <a:endParaRPr lang="en-US" sz="1500" dirty="0">
+                      <a:endParaRPr lang="en-US" sz="1400" dirty="0">
                         <a:latin typeface="Calibri" charset="0"/>
                         <a:ea typeface="Calibri" charset="0"/>
                         <a:cs typeface="Calibri" charset="0"/>
@@ -7060,7 +8100,7 @@
                   </a:tcPr>
                 </a:tc>
               </a:tr>
-              <a:tr h="393192">
+              <a:tr h="329184">
                 <a:tc>
                   <a:txBody>
                     <a:bodyPr/>
@@ -7070,7 +8110,7 @@
                         <a:buNone/>
                       </a:pPr>
                       <a:r>
-                        <a:rPr lang="en-US" sz="1500" dirty="0">
+                        <a:rPr lang="en-US" sz="1400" dirty="0">
                           <a:solidFill>
                             <a:srgbClr val="15171C"/>
                           </a:solidFill>
@@ -7078,9 +8118,9 @@
                           <a:ea typeface="Calibri" pitchFamily="34" charset="-122"/>
                           <a:cs typeface="Calibri" pitchFamily="34" charset="-120"/>
                         </a:rPr>
-                        <a:t>Repeats of the shape test</a:t>
+                        <a:t>Grow blobs during fitting</a:t>
                       </a:r>
-                      <a:endParaRPr lang="en-US" sz="1500" dirty="0">
+                      <a:endParaRPr lang="en-US" sz="1400" dirty="0">
                         <a:latin typeface="Calibri" charset="0"/>
                         <a:ea typeface="Calibri" charset="0"/>
                         <a:cs typeface="Calibri" charset="0"/>
@@ -7138,7 +8178,7 @@
                         <a:buNone/>
                       </a:pPr>
                       <a:r>
-                        <a:rPr lang="en-US" sz="1500" dirty="0">
+                        <a:rPr lang="en-US" sz="1400" dirty="0">
                           <a:solidFill>
                             <a:srgbClr val="15171C"/>
                           </a:solidFill>
@@ -7146,9 +8186,9 @@
                           <a:ea typeface="Calibri" pitchFamily="34" charset="-122"/>
                           <a:cs typeface="Calibri" pitchFamily="34" charset="-120"/>
                         </a:rPr>
-                        <a:t>us</a:t>
+                        <a:t>Akim</a:t>
                       </a:r>
-                      <a:endParaRPr lang="en-US" sz="1500" dirty="0">
+                      <a:endParaRPr lang="en-US" sz="1400" dirty="0">
                         <a:latin typeface="Calibri" charset="0"/>
                         <a:ea typeface="Calibri" charset="0"/>
                         <a:cs typeface="Calibri" charset="0"/>
@@ -7206,7 +8246,7 @@
                         <a:buNone/>
                       </a:pPr>
                       <a:r>
-                        <a:rPr lang="en-US" sz="1500" dirty="0">
+                        <a:rPr lang="en-US" sz="1400" dirty="0">
                           <a:solidFill>
                             <a:srgbClr val="15171C"/>
                           </a:solidFill>
@@ -7214,9 +8254,9 @@
                           <a:ea typeface="Calibri" pitchFamily="34" charset="-122"/>
                           <a:cs typeface="Calibri" pitchFamily="34" charset="-120"/>
                         </a:rPr>
-                        <a:t>PSNR, 15 fits</a:t>
+                        <a:t>PSNR, ~35-50 blobs</a:t>
                       </a:r>
-                      <a:endParaRPr lang="en-US" sz="1500" dirty="0">
+                      <a:endParaRPr lang="en-US" sz="1400" dirty="0">
                         <a:latin typeface="Calibri" charset="0"/>
                         <a:ea typeface="Calibri" charset="0"/>
                         <a:cs typeface="Calibri" charset="0"/>
@@ -7274,7 +8314,7 @@
                         <a:buNone/>
                       </a:pPr>
                       <a:r>
-                        <a:rPr lang="en-US" sz="1500" dirty="0">
+                        <a:rPr lang="en-US" sz="1400" dirty="0">
                           <a:solidFill>
                             <a:srgbClr val="15171C"/>
                           </a:solidFill>
@@ -7282,9 +8322,9 @@
                           <a:ea typeface="Calibri" pitchFamily="34" charset="-122"/>
                           <a:cs typeface="Calibri" pitchFamily="34" charset="-120"/>
                         </a:rPr>
-                        <a:t>22.3 dB</a:t>
+                        <a:t>23.8 dB</a:t>
                       </a:r>
-                      <a:endParaRPr lang="en-US" sz="1500" dirty="0">
+                      <a:endParaRPr lang="en-US" sz="1400" dirty="0">
                         <a:latin typeface="Calibri" charset="0"/>
                         <a:ea typeface="Calibri" charset="0"/>
                         <a:cs typeface="Calibri" charset="0"/>
@@ -7342,7 +8382,7 @@
                         <a:buNone/>
                       </a:pPr>
                       <a:r>
-                        <a:rPr lang="en-US" sz="1500" b="1" dirty="0">
+                        <a:rPr lang="en-US" sz="1400" b="1" dirty="0">
                           <a:solidFill>
                             <a:srgbClr val="E8730C"/>
                           </a:solidFill>
@@ -7350,9 +8390,9 @@
                           <a:ea typeface="Calibri" pitchFamily="34" charset="-122"/>
                           <a:cs typeface="Calibri" pitchFamily="34" charset="-120"/>
                         </a:rPr>
-                        <a:t>25.5 dB</a:t>
+                        <a:t>24.3 dB</a:t>
                       </a:r>
-                      <a:endParaRPr lang="en-US" sz="1500" dirty="0">
+                      <a:endParaRPr lang="en-US" sz="1400" dirty="0">
                         <a:latin typeface="Calibri" charset="0"/>
                         <a:ea typeface="Calibri" charset="0"/>
                         <a:cs typeface="Calibri" charset="0"/>
@@ -7402,7 +8442,7 @@
                   </a:tcPr>
                 </a:tc>
               </a:tr>
-              <a:tr h="393192">
+              <a:tr h="329184">
                 <a:tc>
                   <a:txBody>
                     <a:bodyPr/>
@@ -7412,7 +8452,7 @@
                         <a:buNone/>
                       </a:pPr>
                       <a:r>
-                        <a:rPr lang="en-US" sz="1500" dirty="0">
+                        <a:rPr lang="en-US" sz="1400" dirty="0">
                           <a:solidFill>
                             <a:srgbClr val="15171C"/>
                           </a:solidFill>
@@ -7420,9 +8460,9 @@
                           <a:ea typeface="Calibri" pitchFamily="34" charset="-122"/>
                           <a:cs typeface="Calibri" pitchFamily="34" charset="-120"/>
                         </a:rPr>
-                        <a:t>One start per nucleus</a:t>
+                        <a:t>Blobs set from cell count</a:t>
                       </a:r>
-                      <a:endParaRPr lang="en-US" sz="1500" dirty="0">
+                      <a:endParaRPr lang="en-US" sz="1400" dirty="0">
                         <a:latin typeface="Calibri" charset="0"/>
                         <a:ea typeface="Calibri" charset="0"/>
                         <a:cs typeface="Calibri" charset="0"/>
@@ -7480,7 +8520,7 @@
                         <a:buNone/>
                       </a:pPr>
                       <a:r>
-                        <a:rPr lang="en-US" sz="1500" dirty="0">
+                        <a:rPr lang="en-US" sz="1400" dirty="0">
                           <a:solidFill>
                             <a:srgbClr val="15171C"/>
                           </a:solidFill>
@@ -7488,9 +8528,9 @@
                           <a:ea typeface="Calibri" pitchFamily="34" charset="-122"/>
                           <a:cs typeface="Calibri" pitchFamily="34" charset="-120"/>
                         </a:rPr>
-                        <a:t>us</a:t>
+                        <a:t>Akim</a:t>
                       </a:r>
-                      <a:endParaRPr lang="en-US" sz="1500" dirty="0">
+                      <a:endParaRPr lang="en-US" sz="1400" dirty="0">
                         <a:latin typeface="Calibri" charset="0"/>
                         <a:ea typeface="Calibri" charset="0"/>
                         <a:cs typeface="Calibri" charset="0"/>
@@ -7548,7 +8588,7 @@
                         <a:buNone/>
                       </a:pPr>
                       <a:r>
-                        <a:rPr lang="en-US" sz="1500" dirty="0">
+                        <a:rPr lang="en-US" sz="1400" dirty="0">
                           <a:solidFill>
                             <a:srgbClr val="15171C"/>
                           </a:solidFill>
@@ -7556,9 +8596,9 @@
                           <a:ea typeface="Calibri" pitchFamily="34" charset="-122"/>
                           <a:cs typeface="Calibri" pitchFamily="34" charset="-120"/>
                         </a:rPr>
-                        <a:t>nuclei found, of 110</a:t>
+                        <a:t>cell matching F1</a:t>
                       </a:r>
-                      <a:endParaRPr lang="en-US" sz="1500" dirty="0">
+                      <a:endParaRPr lang="en-US" sz="1400" dirty="0">
                         <a:latin typeface="Calibri" charset="0"/>
                         <a:ea typeface="Calibri" charset="0"/>
                         <a:cs typeface="Calibri" charset="0"/>
@@ -7616,7 +8656,7 @@
                         <a:buNone/>
                       </a:pPr>
                       <a:r>
-                        <a:rPr lang="en-US" sz="1500" dirty="0">
+                        <a:rPr lang="en-US" sz="1400" dirty="0">
                           <a:solidFill>
                             <a:srgbClr val="15171C"/>
                           </a:solidFill>
@@ -7624,9 +8664,9 @@
                           <a:ea typeface="Calibri" pitchFamily="34" charset="-122"/>
                           <a:cs typeface="Calibri" pitchFamily="34" charset="-120"/>
                         </a:rPr>
-                        <a:t>52%</a:t>
+                        <a:t>0.35</a:t>
                       </a:r>
-                      <a:endParaRPr lang="en-US" sz="1500" dirty="0">
+                      <a:endParaRPr lang="en-US" sz="1400" dirty="0">
                         <a:latin typeface="Calibri" charset="0"/>
                         <a:ea typeface="Calibri" charset="0"/>
                         <a:cs typeface="Calibri" charset="0"/>
@@ -7684,7 +8724,7 @@
                         <a:buNone/>
                       </a:pPr>
                       <a:r>
-                        <a:rPr lang="en-US" sz="1500" b="1" dirty="0">
+                        <a:rPr lang="en-US" sz="1400" b="1" dirty="0">
                           <a:solidFill>
                             <a:srgbClr val="E8730C"/>
                           </a:solidFill>
@@ -7692,9 +8732,9 @@
                           <a:ea typeface="Calibri" pitchFamily="34" charset="-122"/>
                           <a:cs typeface="Calibri" pitchFamily="34" charset="-120"/>
                         </a:rPr>
-                        <a:t>71%</a:t>
+                        <a:t>0.76</a:t>
                       </a:r>
-                      <a:endParaRPr lang="en-US" sz="1500" dirty="0">
+                      <a:endParaRPr lang="en-US" sz="1400" dirty="0">
                         <a:latin typeface="Calibri" charset="0"/>
                         <a:ea typeface="Calibri" charset="0"/>
                         <a:cs typeface="Calibri" charset="0"/>
@@ -7744,7 +8784,7 @@
                   </a:tcPr>
                 </a:tc>
               </a:tr>
-              <a:tr h="393192">
+              <a:tr h="329184">
                 <a:tc>
                   <a:txBody>
                     <a:bodyPr/>
@@ -7754,7 +8794,7 @@
                         <a:buNone/>
                       </a:pPr>
                       <a:r>
-                        <a:rPr lang="en-US" sz="1500" dirty="0">
+                        <a:rPr lang="en-US" sz="1400" dirty="0">
                           <a:solidFill>
                             <a:srgbClr val="15171C"/>
                           </a:solidFill>
@@ -7762,9 +8802,9 @@
                           <a:ea typeface="Calibri" pitchFamily="34" charset="-122"/>
                           <a:cs typeface="Calibri" pitchFamily="34" charset="-120"/>
                         </a:rPr>
-                        <a:t>Bigger position steps</a:t>
+                        <a:t>Repeats of the shape test</a:t>
                       </a:r>
-                      <a:endParaRPr lang="en-US" sz="1500" dirty="0">
+                      <a:endParaRPr lang="en-US" sz="1400" dirty="0">
                         <a:latin typeface="Calibri" charset="0"/>
                         <a:ea typeface="Calibri" charset="0"/>
                         <a:cs typeface="Calibri" charset="0"/>
@@ -7822,7 +8862,7 @@
                         <a:buNone/>
                       </a:pPr>
                       <a:r>
-                        <a:rPr lang="en-US" sz="1500" dirty="0">
+                        <a:rPr lang="en-US" sz="1400" dirty="0">
                           <a:solidFill>
                             <a:srgbClr val="15171C"/>
                           </a:solidFill>
@@ -7832,7 +8872,7 @@
                         </a:rPr>
                         <a:t>us</a:t>
                       </a:r>
-                      <a:endParaRPr lang="en-US" sz="1500" dirty="0">
+                      <a:endParaRPr lang="en-US" sz="1400" dirty="0">
                         <a:latin typeface="Calibri" charset="0"/>
                         <a:ea typeface="Calibri" charset="0"/>
                         <a:cs typeface="Calibri" charset="0"/>
@@ -7890,7 +8930,7 @@
                         <a:buNone/>
                       </a:pPr>
                       <a:r>
-                        <a:rPr lang="en-US" sz="1500" dirty="0">
+                        <a:rPr lang="en-US" sz="1400" dirty="0">
                           <a:solidFill>
                             <a:srgbClr val="15171C"/>
                           </a:solidFill>
@@ -7898,9 +8938,9 @@
                           <a:ea typeface="Calibri" pitchFamily="34" charset="-122"/>
                           <a:cs typeface="Calibri" pitchFamily="34" charset="-120"/>
                         </a:rPr>
-                        <a:t>F1, random starts</a:t>
+                        <a:t>PSNR, 15 fits</a:t>
                       </a:r>
-                      <a:endParaRPr lang="en-US" sz="1500" dirty="0">
+                      <a:endParaRPr lang="en-US" sz="1400" dirty="0">
                         <a:latin typeface="Calibri" charset="0"/>
                         <a:ea typeface="Calibri" charset="0"/>
                         <a:cs typeface="Calibri" charset="0"/>
@@ -7958,7 +8998,7 @@
                         <a:buNone/>
                       </a:pPr>
                       <a:r>
-                        <a:rPr lang="en-US" sz="1500" dirty="0">
+                        <a:rPr lang="en-US" sz="1400" dirty="0">
                           <a:solidFill>
                             <a:srgbClr val="15171C"/>
                           </a:solidFill>
@@ -7966,9 +9006,9 @@
                           <a:ea typeface="Calibri" pitchFamily="34" charset="-122"/>
                           <a:cs typeface="Calibri" pitchFamily="34" charset="-120"/>
                         </a:rPr>
-                        <a:t>0.64</a:t>
+                        <a:t>22.3 dB</a:t>
                       </a:r>
-                      <a:endParaRPr lang="en-US" sz="1500" dirty="0">
+                      <a:endParaRPr lang="en-US" sz="1400" dirty="0">
                         <a:latin typeface="Calibri" charset="0"/>
                         <a:ea typeface="Calibri" charset="0"/>
                         <a:cs typeface="Calibri" charset="0"/>
@@ -8026,7 +9066,7 @@
                         <a:buNone/>
                       </a:pPr>
                       <a:r>
-                        <a:rPr lang="en-US" sz="1500" b="1" dirty="0">
+                        <a:rPr lang="en-US" sz="1400" b="1" dirty="0">
                           <a:solidFill>
                             <a:srgbClr val="E8730C"/>
                           </a:solidFill>
@@ -8034,9 +9074,9 @@
                           <a:ea typeface="Calibri" pitchFamily="34" charset="-122"/>
                           <a:cs typeface="Calibri" pitchFamily="34" charset="-120"/>
                         </a:rPr>
-                        <a:t>0.78</a:t>
+                        <a:t>25.5 dB</a:t>
                       </a:r>
-                      <a:endParaRPr lang="en-US" sz="1500" dirty="0">
+                      <a:endParaRPr lang="en-US" sz="1400" dirty="0">
                         <a:latin typeface="Calibri" charset="0"/>
                         <a:ea typeface="Calibri" charset="0"/>
                         <a:cs typeface="Calibri" charset="0"/>
@@ -8086,7 +9126,7 @@
                   </a:tcPr>
                 </a:tc>
               </a:tr>
-              <a:tr h="393192">
+              <a:tr h="329184">
                 <a:tc>
                   <a:txBody>
                     <a:bodyPr/>
@@ -8096,7 +9136,7 @@
                         <a:buNone/>
                       </a:pPr>
                       <a:r>
-                        <a:rPr lang="en-US" sz="1500" dirty="0">
+                        <a:rPr lang="en-US" sz="1400" dirty="0">
                           <a:solidFill>
                             <a:srgbClr val="15171C"/>
                           </a:solidFill>
@@ -8104,9 +9144,9 @@
                           <a:ea typeface="Calibri" pitchFamily="34" charset="-122"/>
                           <a:cs typeface="Calibri" pitchFamily="34" charset="-120"/>
                         </a:rPr>
-                        <a:t>Size cap</a:t>
+                        <a:t>One start per nucleus</a:t>
                       </a:r>
-                      <a:endParaRPr lang="en-US" sz="1500" dirty="0">
+                      <a:endParaRPr lang="en-US" sz="1400" dirty="0">
                         <a:latin typeface="Calibri" charset="0"/>
                         <a:ea typeface="Calibri" charset="0"/>
                         <a:cs typeface="Calibri" charset="0"/>
@@ -8164,7 +9204,7 @@
                         <a:buNone/>
                       </a:pPr>
                       <a:r>
-                        <a:rPr lang="en-US" sz="1500" dirty="0">
+                        <a:rPr lang="en-US" sz="1400" dirty="0">
                           <a:solidFill>
                             <a:srgbClr val="15171C"/>
                           </a:solidFill>
@@ -8174,7 +9214,7 @@
                         </a:rPr>
                         <a:t>us</a:t>
                       </a:r>
-                      <a:endParaRPr lang="en-US" sz="1500" dirty="0">
+                      <a:endParaRPr lang="en-US" sz="1400" dirty="0">
                         <a:latin typeface="Calibri" charset="0"/>
                         <a:ea typeface="Calibri" charset="0"/>
                         <a:cs typeface="Calibri" charset="0"/>
@@ -8232,7 +9272,7 @@
                         <a:buNone/>
                       </a:pPr>
                       <a:r>
-                        <a:rPr lang="en-US" sz="1500" dirty="0">
+                        <a:rPr lang="en-US" sz="1400" dirty="0">
                           <a:solidFill>
                             <a:srgbClr val="15171C"/>
                           </a:solidFill>
@@ -8240,9 +9280,9 @@
                           <a:ea typeface="Calibri" pitchFamily="34" charset="-122"/>
                           <a:cs typeface="Calibri" pitchFamily="34" charset="-120"/>
                         </a:rPr>
-                        <a:t>faint nuclei found, of 31</a:t>
+                        <a:t>nuclei found, of 110</a:t>
                       </a:r>
-                      <a:endParaRPr lang="en-US" sz="1500" dirty="0">
+                      <a:endParaRPr lang="en-US" sz="1400" dirty="0">
                         <a:latin typeface="Calibri" charset="0"/>
                         <a:ea typeface="Calibri" charset="0"/>
                         <a:cs typeface="Calibri" charset="0"/>
@@ -8300,7 +9340,7 @@
                         <a:buNone/>
                       </a:pPr>
                       <a:r>
-                        <a:rPr lang="en-US" sz="1500" dirty="0">
+                        <a:rPr lang="en-US" sz="1400" dirty="0">
                           <a:solidFill>
                             <a:srgbClr val="15171C"/>
                           </a:solidFill>
@@ -8308,9 +9348,9 @@
                           <a:ea typeface="Calibri" pitchFamily="34" charset="-122"/>
                           <a:cs typeface="Calibri" pitchFamily="34" charset="-120"/>
                         </a:rPr>
-                        <a:t>13</a:t>
+                        <a:t>52%</a:t>
                       </a:r>
-                      <a:endParaRPr lang="en-US" sz="1500" dirty="0">
+                      <a:endParaRPr lang="en-US" sz="1400" dirty="0">
                         <a:latin typeface="Calibri" charset="0"/>
                         <a:ea typeface="Calibri" charset="0"/>
                         <a:cs typeface="Calibri" charset="0"/>
@@ -8368,7 +9408,691 @@
                         <a:buNone/>
                       </a:pPr>
                       <a:r>
-                        <a:rPr lang="en-US" sz="1500" b="1" dirty="0">
+                        <a:rPr lang="en-US" sz="1400" b="1" dirty="0">
+                          <a:solidFill>
+                            <a:srgbClr val="E8730C"/>
+                          </a:solidFill>
+                          <a:latin typeface="Calibri" pitchFamily="34" charset="0"/>
+                          <a:ea typeface="Calibri" pitchFamily="34" charset="-122"/>
+                          <a:cs typeface="Calibri" pitchFamily="34" charset="-120"/>
+                        </a:rPr>
+                        <a:t>71%</a:t>
+                      </a:r>
+                      <a:endParaRPr lang="en-US" sz="1400" dirty="0">
+                        <a:latin typeface="Calibri" charset="0"/>
+                        <a:ea typeface="Calibri" charset="0"/>
+                        <a:cs typeface="Calibri" charset="0"/>
+                      </a:endParaRPr>
+                    </a:p>
+                  </a:txBody>
+                  <a:tcPr marL="91440" marR="91440" marT="45720" marB="45720">
+                    <a:lnL w="6350" cap="flat" cmpd="sng" algn="ctr">
+                      <a:solidFill>
+                        <a:srgbClr val="E5E7EB"/>
+                      </a:solidFill>
+                      <a:prstDash val="solid"/>
+                      <a:round/>
+                      <a:headEnd type="none" w="med" len="med"/>
+                      <a:tailEnd type="none" w="med" len="med"/>
+                    </a:lnL>
+                    <a:lnR w="6350" cap="flat" cmpd="sng" algn="ctr">
+                      <a:solidFill>
+                        <a:srgbClr val="E5E7EB"/>
+                      </a:solidFill>
+                      <a:prstDash val="solid"/>
+                      <a:round/>
+                      <a:headEnd type="none" w="med" len="med"/>
+                      <a:tailEnd type="none" w="med" len="med"/>
+                    </a:lnR>
+                    <a:lnT w="6350" cap="flat" cmpd="sng" algn="ctr">
+                      <a:solidFill>
+                        <a:srgbClr val="E5E7EB"/>
+                      </a:solidFill>
+                      <a:prstDash val="solid"/>
+                      <a:round/>
+                      <a:headEnd type="none" w="med" len="med"/>
+                      <a:tailEnd type="none" w="med" len="med"/>
+                    </a:lnT>
+                    <a:lnB w="6350" cap="flat" cmpd="sng" algn="ctr">
+                      <a:solidFill>
+                        <a:srgbClr val="E5E7EB"/>
+                      </a:solidFill>
+                      <a:prstDash val="solid"/>
+                      <a:round/>
+                      <a:headEnd type="none" w="med" len="med"/>
+                      <a:tailEnd type="none" w="med" len="med"/>
+                    </a:lnB>
+                    <a:solidFill>
+                      <a:srgbClr val="FFFFFF"/>
+                    </a:solidFill>
+                  </a:tcPr>
+                </a:tc>
+              </a:tr>
+              <a:tr h="329184">
+                <a:tc>
+                  <a:txBody>
+                    <a:bodyPr/>
+                    <a:lstStyle/>
+                    <a:p>
+                      <a:pPr algn="l" indent="0" marL="0">
+                        <a:buNone/>
+                      </a:pPr>
+                      <a:r>
+                        <a:rPr lang="en-US" sz="1400" dirty="0">
+                          <a:solidFill>
+                            <a:srgbClr val="15171C"/>
+                          </a:solidFill>
+                          <a:latin typeface="Calibri" pitchFamily="34" charset="0"/>
+                          <a:ea typeface="Calibri" pitchFamily="34" charset="-122"/>
+                          <a:cs typeface="Calibri" pitchFamily="34" charset="-120"/>
+                        </a:rPr>
+                        <a:t>Bigger position steps</a:t>
+                      </a:r>
+                      <a:endParaRPr lang="en-US" sz="1400" dirty="0">
+                        <a:latin typeface="Calibri" charset="0"/>
+                        <a:ea typeface="Calibri" charset="0"/>
+                        <a:cs typeface="Calibri" charset="0"/>
+                      </a:endParaRPr>
+                    </a:p>
+                  </a:txBody>
+                  <a:tcPr marL="91440" marR="91440" marT="45720" marB="45720">
+                    <a:lnL w="6350" cap="flat" cmpd="sng" algn="ctr">
+                      <a:solidFill>
+                        <a:srgbClr val="E5E7EB"/>
+                      </a:solidFill>
+                      <a:prstDash val="solid"/>
+                      <a:round/>
+                      <a:headEnd type="none" w="med" len="med"/>
+                      <a:tailEnd type="none" w="med" len="med"/>
+                    </a:lnL>
+                    <a:lnR w="6350" cap="flat" cmpd="sng" algn="ctr">
+                      <a:solidFill>
+                        <a:srgbClr val="E5E7EB"/>
+                      </a:solidFill>
+                      <a:prstDash val="solid"/>
+                      <a:round/>
+                      <a:headEnd type="none" w="med" len="med"/>
+                      <a:tailEnd type="none" w="med" len="med"/>
+                    </a:lnR>
+                    <a:lnT w="6350" cap="flat" cmpd="sng" algn="ctr">
+                      <a:solidFill>
+                        <a:srgbClr val="E5E7EB"/>
+                      </a:solidFill>
+                      <a:prstDash val="solid"/>
+                      <a:round/>
+                      <a:headEnd type="none" w="med" len="med"/>
+                      <a:tailEnd type="none" w="med" len="med"/>
+                    </a:lnT>
+                    <a:lnB w="6350" cap="flat" cmpd="sng" algn="ctr">
+                      <a:solidFill>
+                        <a:srgbClr val="E5E7EB"/>
+                      </a:solidFill>
+                      <a:prstDash val="solid"/>
+                      <a:round/>
+                      <a:headEnd type="none" w="med" len="med"/>
+                      <a:tailEnd type="none" w="med" len="med"/>
+                    </a:lnB>
+                    <a:solidFill>
+                      <a:srgbClr val="FFFFFF"/>
+                    </a:solidFill>
+                  </a:tcPr>
+                </a:tc>
+                <a:tc>
+                  <a:txBody>
+                    <a:bodyPr/>
+                    <a:lstStyle/>
+                    <a:p>
+                      <a:pPr algn="l" indent="0" marL="0">
+                        <a:buNone/>
+                      </a:pPr>
+                      <a:r>
+                        <a:rPr lang="en-US" sz="1400" dirty="0">
+                          <a:solidFill>
+                            <a:srgbClr val="15171C"/>
+                          </a:solidFill>
+                          <a:latin typeface="Calibri" pitchFamily="34" charset="0"/>
+                          <a:ea typeface="Calibri" pitchFamily="34" charset="-122"/>
+                          <a:cs typeface="Calibri" pitchFamily="34" charset="-120"/>
+                        </a:rPr>
+                        <a:t>us</a:t>
+                      </a:r>
+                      <a:endParaRPr lang="en-US" sz="1400" dirty="0">
+                        <a:latin typeface="Calibri" charset="0"/>
+                        <a:ea typeface="Calibri" charset="0"/>
+                        <a:cs typeface="Calibri" charset="0"/>
+                      </a:endParaRPr>
+                    </a:p>
+                  </a:txBody>
+                  <a:tcPr marL="91440" marR="91440" marT="45720" marB="45720">
+                    <a:lnL w="6350" cap="flat" cmpd="sng" algn="ctr">
+                      <a:solidFill>
+                        <a:srgbClr val="E5E7EB"/>
+                      </a:solidFill>
+                      <a:prstDash val="solid"/>
+                      <a:round/>
+                      <a:headEnd type="none" w="med" len="med"/>
+                      <a:tailEnd type="none" w="med" len="med"/>
+                    </a:lnL>
+                    <a:lnR w="6350" cap="flat" cmpd="sng" algn="ctr">
+                      <a:solidFill>
+                        <a:srgbClr val="E5E7EB"/>
+                      </a:solidFill>
+                      <a:prstDash val="solid"/>
+                      <a:round/>
+                      <a:headEnd type="none" w="med" len="med"/>
+                      <a:tailEnd type="none" w="med" len="med"/>
+                    </a:lnR>
+                    <a:lnT w="6350" cap="flat" cmpd="sng" algn="ctr">
+                      <a:solidFill>
+                        <a:srgbClr val="E5E7EB"/>
+                      </a:solidFill>
+                      <a:prstDash val="solid"/>
+                      <a:round/>
+                      <a:headEnd type="none" w="med" len="med"/>
+                      <a:tailEnd type="none" w="med" len="med"/>
+                    </a:lnT>
+                    <a:lnB w="6350" cap="flat" cmpd="sng" algn="ctr">
+                      <a:solidFill>
+                        <a:srgbClr val="E5E7EB"/>
+                      </a:solidFill>
+                      <a:prstDash val="solid"/>
+                      <a:round/>
+                      <a:headEnd type="none" w="med" len="med"/>
+                      <a:tailEnd type="none" w="med" len="med"/>
+                    </a:lnB>
+                    <a:solidFill>
+                      <a:srgbClr val="FFFFFF"/>
+                    </a:solidFill>
+                  </a:tcPr>
+                </a:tc>
+                <a:tc>
+                  <a:txBody>
+                    <a:bodyPr/>
+                    <a:lstStyle/>
+                    <a:p>
+                      <a:pPr algn="l" indent="0" marL="0">
+                        <a:buNone/>
+                      </a:pPr>
+                      <a:r>
+                        <a:rPr lang="en-US" sz="1400" dirty="0">
+                          <a:solidFill>
+                            <a:srgbClr val="15171C"/>
+                          </a:solidFill>
+                          <a:latin typeface="Calibri" pitchFamily="34" charset="0"/>
+                          <a:ea typeface="Calibri" pitchFamily="34" charset="-122"/>
+                          <a:cs typeface="Calibri" pitchFamily="34" charset="-120"/>
+                        </a:rPr>
+                        <a:t>F1, random starts</a:t>
+                      </a:r>
+                      <a:endParaRPr lang="en-US" sz="1400" dirty="0">
+                        <a:latin typeface="Calibri" charset="0"/>
+                        <a:ea typeface="Calibri" charset="0"/>
+                        <a:cs typeface="Calibri" charset="0"/>
+                      </a:endParaRPr>
+                    </a:p>
+                  </a:txBody>
+                  <a:tcPr marL="91440" marR="91440" marT="45720" marB="45720">
+                    <a:lnL w="6350" cap="flat" cmpd="sng" algn="ctr">
+                      <a:solidFill>
+                        <a:srgbClr val="E5E7EB"/>
+                      </a:solidFill>
+                      <a:prstDash val="solid"/>
+                      <a:round/>
+                      <a:headEnd type="none" w="med" len="med"/>
+                      <a:tailEnd type="none" w="med" len="med"/>
+                    </a:lnL>
+                    <a:lnR w="6350" cap="flat" cmpd="sng" algn="ctr">
+                      <a:solidFill>
+                        <a:srgbClr val="E5E7EB"/>
+                      </a:solidFill>
+                      <a:prstDash val="solid"/>
+                      <a:round/>
+                      <a:headEnd type="none" w="med" len="med"/>
+                      <a:tailEnd type="none" w="med" len="med"/>
+                    </a:lnR>
+                    <a:lnT w="6350" cap="flat" cmpd="sng" algn="ctr">
+                      <a:solidFill>
+                        <a:srgbClr val="E5E7EB"/>
+                      </a:solidFill>
+                      <a:prstDash val="solid"/>
+                      <a:round/>
+                      <a:headEnd type="none" w="med" len="med"/>
+                      <a:tailEnd type="none" w="med" len="med"/>
+                    </a:lnT>
+                    <a:lnB w="6350" cap="flat" cmpd="sng" algn="ctr">
+                      <a:solidFill>
+                        <a:srgbClr val="E5E7EB"/>
+                      </a:solidFill>
+                      <a:prstDash val="solid"/>
+                      <a:round/>
+                      <a:headEnd type="none" w="med" len="med"/>
+                      <a:tailEnd type="none" w="med" len="med"/>
+                    </a:lnB>
+                    <a:solidFill>
+                      <a:srgbClr val="FFFFFF"/>
+                    </a:solidFill>
+                  </a:tcPr>
+                </a:tc>
+                <a:tc>
+                  <a:txBody>
+                    <a:bodyPr/>
+                    <a:lstStyle/>
+                    <a:p>
+                      <a:pPr algn="ctr" indent="0" marL="0">
+                        <a:buNone/>
+                      </a:pPr>
+                      <a:r>
+                        <a:rPr lang="en-US" sz="1400" dirty="0">
+                          <a:solidFill>
+                            <a:srgbClr val="15171C"/>
+                          </a:solidFill>
+                          <a:latin typeface="Calibri" pitchFamily="34" charset="0"/>
+                          <a:ea typeface="Calibri" pitchFamily="34" charset="-122"/>
+                          <a:cs typeface="Calibri" pitchFamily="34" charset="-120"/>
+                        </a:rPr>
+                        <a:t>0.64</a:t>
+                      </a:r>
+                      <a:endParaRPr lang="en-US" sz="1400" dirty="0">
+                        <a:latin typeface="Calibri" charset="0"/>
+                        <a:ea typeface="Calibri" charset="0"/>
+                        <a:cs typeface="Calibri" charset="0"/>
+                      </a:endParaRPr>
+                    </a:p>
+                  </a:txBody>
+                  <a:tcPr marL="91440" marR="91440" marT="45720" marB="45720">
+                    <a:lnL w="6350" cap="flat" cmpd="sng" algn="ctr">
+                      <a:solidFill>
+                        <a:srgbClr val="E5E7EB"/>
+                      </a:solidFill>
+                      <a:prstDash val="solid"/>
+                      <a:round/>
+                      <a:headEnd type="none" w="med" len="med"/>
+                      <a:tailEnd type="none" w="med" len="med"/>
+                    </a:lnL>
+                    <a:lnR w="6350" cap="flat" cmpd="sng" algn="ctr">
+                      <a:solidFill>
+                        <a:srgbClr val="E5E7EB"/>
+                      </a:solidFill>
+                      <a:prstDash val="solid"/>
+                      <a:round/>
+                      <a:headEnd type="none" w="med" len="med"/>
+                      <a:tailEnd type="none" w="med" len="med"/>
+                    </a:lnR>
+                    <a:lnT w="6350" cap="flat" cmpd="sng" algn="ctr">
+                      <a:solidFill>
+                        <a:srgbClr val="E5E7EB"/>
+                      </a:solidFill>
+                      <a:prstDash val="solid"/>
+                      <a:round/>
+                      <a:headEnd type="none" w="med" len="med"/>
+                      <a:tailEnd type="none" w="med" len="med"/>
+                    </a:lnT>
+                    <a:lnB w="6350" cap="flat" cmpd="sng" algn="ctr">
+                      <a:solidFill>
+                        <a:srgbClr val="E5E7EB"/>
+                      </a:solidFill>
+                      <a:prstDash val="solid"/>
+                      <a:round/>
+                      <a:headEnd type="none" w="med" len="med"/>
+                      <a:tailEnd type="none" w="med" len="med"/>
+                    </a:lnB>
+                    <a:solidFill>
+                      <a:srgbClr val="FFFFFF"/>
+                    </a:solidFill>
+                  </a:tcPr>
+                </a:tc>
+                <a:tc>
+                  <a:txBody>
+                    <a:bodyPr/>
+                    <a:lstStyle/>
+                    <a:p>
+                      <a:pPr algn="ctr" indent="0" marL="0">
+                        <a:buNone/>
+                      </a:pPr>
+                      <a:r>
+                        <a:rPr lang="en-US" sz="1400" b="1" dirty="0">
+                          <a:solidFill>
+                            <a:srgbClr val="E8730C"/>
+                          </a:solidFill>
+                          <a:latin typeface="Calibri" pitchFamily="34" charset="0"/>
+                          <a:ea typeface="Calibri" pitchFamily="34" charset="-122"/>
+                          <a:cs typeface="Calibri" pitchFamily="34" charset="-120"/>
+                        </a:rPr>
+                        <a:t>0.78</a:t>
+                      </a:r>
+                      <a:endParaRPr lang="en-US" sz="1400" dirty="0">
+                        <a:latin typeface="Calibri" charset="0"/>
+                        <a:ea typeface="Calibri" charset="0"/>
+                        <a:cs typeface="Calibri" charset="0"/>
+                      </a:endParaRPr>
+                    </a:p>
+                  </a:txBody>
+                  <a:tcPr marL="91440" marR="91440" marT="45720" marB="45720">
+                    <a:lnL w="6350" cap="flat" cmpd="sng" algn="ctr">
+                      <a:solidFill>
+                        <a:srgbClr val="E5E7EB"/>
+                      </a:solidFill>
+                      <a:prstDash val="solid"/>
+                      <a:round/>
+                      <a:headEnd type="none" w="med" len="med"/>
+                      <a:tailEnd type="none" w="med" len="med"/>
+                    </a:lnL>
+                    <a:lnR w="6350" cap="flat" cmpd="sng" algn="ctr">
+                      <a:solidFill>
+                        <a:srgbClr val="E5E7EB"/>
+                      </a:solidFill>
+                      <a:prstDash val="solid"/>
+                      <a:round/>
+                      <a:headEnd type="none" w="med" len="med"/>
+                      <a:tailEnd type="none" w="med" len="med"/>
+                    </a:lnR>
+                    <a:lnT w="6350" cap="flat" cmpd="sng" algn="ctr">
+                      <a:solidFill>
+                        <a:srgbClr val="E5E7EB"/>
+                      </a:solidFill>
+                      <a:prstDash val="solid"/>
+                      <a:round/>
+                      <a:headEnd type="none" w="med" len="med"/>
+                      <a:tailEnd type="none" w="med" len="med"/>
+                    </a:lnT>
+                    <a:lnB w="6350" cap="flat" cmpd="sng" algn="ctr">
+                      <a:solidFill>
+                        <a:srgbClr val="E5E7EB"/>
+                      </a:solidFill>
+                      <a:prstDash val="solid"/>
+                      <a:round/>
+                      <a:headEnd type="none" w="med" len="med"/>
+                      <a:tailEnd type="none" w="med" len="med"/>
+                    </a:lnB>
+                    <a:solidFill>
+                      <a:srgbClr val="FFFFFF"/>
+                    </a:solidFill>
+                  </a:tcPr>
+                </a:tc>
+              </a:tr>
+              <a:tr h="329184">
+                <a:tc>
+                  <a:txBody>
+                    <a:bodyPr/>
+                    <a:lstStyle/>
+                    <a:p>
+                      <a:pPr algn="l" indent="0" marL="0">
+                        <a:buNone/>
+                      </a:pPr>
+                      <a:r>
+                        <a:rPr lang="en-US" sz="1400" dirty="0">
+                          <a:solidFill>
+                            <a:srgbClr val="15171C"/>
+                          </a:solidFill>
+                          <a:latin typeface="Calibri" pitchFamily="34" charset="0"/>
+                          <a:ea typeface="Calibri" pitchFamily="34" charset="-122"/>
+                          <a:cs typeface="Calibri" pitchFamily="34" charset="-120"/>
+                        </a:rPr>
+                        <a:t>Size cap</a:t>
+                      </a:r>
+                      <a:endParaRPr lang="en-US" sz="1400" dirty="0">
+                        <a:latin typeface="Calibri" charset="0"/>
+                        <a:ea typeface="Calibri" charset="0"/>
+                        <a:cs typeface="Calibri" charset="0"/>
+                      </a:endParaRPr>
+                    </a:p>
+                  </a:txBody>
+                  <a:tcPr marL="91440" marR="91440" marT="45720" marB="45720">
+                    <a:lnL w="6350" cap="flat" cmpd="sng" algn="ctr">
+                      <a:solidFill>
+                        <a:srgbClr val="E5E7EB"/>
+                      </a:solidFill>
+                      <a:prstDash val="solid"/>
+                      <a:round/>
+                      <a:headEnd type="none" w="med" len="med"/>
+                      <a:tailEnd type="none" w="med" len="med"/>
+                    </a:lnL>
+                    <a:lnR w="6350" cap="flat" cmpd="sng" algn="ctr">
+                      <a:solidFill>
+                        <a:srgbClr val="E5E7EB"/>
+                      </a:solidFill>
+                      <a:prstDash val="solid"/>
+                      <a:round/>
+                      <a:headEnd type="none" w="med" len="med"/>
+                      <a:tailEnd type="none" w="med" len="med"/>
+                    </a:lnR>
+                    <a:lnT w="6350" cap="flat" cmpd="sng" algn="ctr">
+                      <a:solidFill>
+                        <a:srgbClr val="E5E7EB"/>
+                      </a:solidFill>
+                      <a:prstDash val="solid"/>
+                      <a:round/>
+                      <a:headEnd type="none" w="med" len="med"/>
+                      <a:tailEnd type="none" w="med" len="med"/>
+                    </a:lnT>
+                    <a:lnB w="6350" cap="flat" cmpd="sng" algn="ctr">
+                      <a:solidFill>
+                        <a:srgbClr val="E5E7EB"/>
+                      </a:solidFill>
+                      <a:prstDash val="solid"/>
+                      <a:round/>
+                      <a:headEnd type="none" w="med" len="med"/>
+                      <a:tailEnd type="none" w="med" len="med"/>
+                    </a:lnB>
+                    <a:solidFill>
+                      <a:srgbClr val="FFFFFF"/>
+                    </a:solidFill>
+                  </a:tcPr>
+                </a:tc>
+                <a:tc>
+                  <a:txBody>
+                    <a:bodyPr/>
+                    <a:lstStyle/>
+                    <a:p>
+                      <a:pPr algn="l" indent="0" marL="0">
+                        <a:buNone/>
+                      </a:pPr>
+                      <a:r>
+                        <a:rPr lang="en-US" sz="1400" dirty="0">
+                          <a:solidFill>
+                            <a:srgbClr val="15171C"/>
+                          </a:solidFill>
+                          <a:latin typeface="Calibri" pitchFamily="34" charset="0"/>
+                          <a:ea typeface="Calibri" pitchFamily="34" charset="-122"/>
+                          <a:cs typeface="Calibri" pitchFamily="34" charset="-120"/>
+                        </a:rPr>
+                        <a:t>us</a:t>
+                      </a:r>
+                      <a:endParaRPr lang="en-US" sz="1400" dirty="0">
+                        <a:latin typeface="Calibri" charset="0"/>
+                        <a:ea typeface="Calibri" charset="0"/>
+                        <a:cs typeface="Calibri" charset="0"/>
+                      </a:endParaRPr>
+                    </a:p>
+                  </a:txBody>
+                  <a:tcPr marL="91440" marR="91440" marT="45720" marB="45720">
+                    <a:lnL w="6350" cap="flat" cmpd="sng" algn="ctr">
+                      <a:solidFill>
+                        <a:srgbClr val="E5E7EB"/>
+                      </a:solidFill>
+                      <a:prstDash val="solid"/>
+                      <a:round/>
+                      <a:headEnd type="none" w="med" len="med"/>
+                      <a:tailEnd type="none" w="med" len="med"/>
+                    </a:lnL>
+                    <a:lnR w="6350" cap="flat" cmpd="sng" algn="ctr">
+                      <a:solidFill>
+                        <a:srgbClr val="E5E7EB"/>
+                      </a:solidFill>
+                      <a:prstDash val="solid"/>
+                      <a:round/>
+                      <a:headEnd type="none" w="med" len="med"/>
+                      <a:tailEnd type="none" w="med" len="med"/>
+                    </a:lnR>
+                    <a:lnT w="6350" cap="flat" cmpd="sng" algn="ctr">
+                      <a:solidFill>
+                        <a:srgbClr val="E5E7EB"/>
+                      </a:solidFill>
+                      <a:prstDash val="solid"/>
+                      <a:round/>
+                      <a:headEnd type="none" w="med" len="med"/>
+                      <a:tailEnd type="none" w="med" len="med"/>
+                    </a:lnT>
+                    <a:lnB w="6350" cap="flat" cmpd="sng" algn="ctr">
+                      <a:solidFill>
+                        <a:srgbClr val="E5E7EB"/>
+                      </a:solidFill>
+                      <a:prstDash val="solid"/>
+                      <a:round/>
+                      <a:headEnd type="none" w="med" len="med"/>
+                      <a:tailEnd type="none" w="med" len="med"/>
+                    </a:lnB>
+                    <a:solidFill>
+                      <a:srgbClr val="FFFFFF"/>
+                    </a:solidFill>
+                  </a:tcPr>
+                </a:tc>
+                <a:tc>
+                  <a:txBody>
+                    <a:bodyPr/>
+                    <a:lstStyle/>
+                    <a:p>
+                      <a:pPr algn="l" indent="0" marL="0">
+                        <a:buNone/>
+                      </a:pPr>
+                      <a:r>
+                        <a:rPr lang="en-US" sz="1400" dirty="0">
+                          <a:solidFill>
+                            <a:srgbClr val="15171C"/>
+                          </a:solidFill>
+                          <a:latin typeface="Calibri" pitchFamily="34" charset="0"/>
+                          <a:ea typeface="Calibri" pitchFamily="34" charset="-122"/>
+                          <a:cs typeface="Calibri" pitchFamily="34" charset="-120"/>
+                        </a:rPr>
+                        <a:t>faint nuclei found, of 31</a:t>
+                      </a:r>
+                      <a:endParaRPr lang="en-US" sz="1400" dirty="0">
+                        <a:latin typeface="Calibri" charset="0"/>
+                        <a:ea typeface="Calibri" charset="0"/>
+                        <a:cs typeface="Calibri" charset="0"/>
+                      </a:endParaRPr>
+                    </a:p>
+                  </a:txBody>
+                  <a:tcPr marL="91440" marR="91440" marT="45720" marB="45720">
+                    <a:lnL w="6350" cap="flat" cmpd="sng" algn="ctr">
+                      <a:solidFill>
+                        <a:srgbClr val="E5E7EB"/>
+                      </a:solidFill>
+                      <a:prstDash val="solid"/>
+                      <a:round/>
+                      <a:headEnd type="none" w="med" len="med"/>
+                      <a:tailEnd type="none" w="med" len="med"/>
+                    </a:lnL>
+                    <a:lnR w="6350" cap="flat" cmpd="sng" algn="ctr">
+                      <a:solidFill>
+                        <a:srgbClr val="E5E7EB"/>
+                      </a:solidFill>
+                      <a:prstDash val="solid"/>
+                      <a:round/>
+                      <a:headEnd type="none" w="med" len="med"/>
+                      <a:tailEnd type="none" w="med" len="med"/>
+                    </a:lnR>
+                    <a:lnT w="6350" cap="flat" cmpd="sng" algn="ctr">
+                      <a:solidFill>
+                        <a:srgbClr val="E5E7EB"/>
+                      </a:solidFill>
+                      <a:prstDash val="solid"/>
+                      <a:round/>
+                      <a:headEnd type="none" w="med" len="med"/>
+                      <a:tailEnd type="none" w="med" len="med"/>
+                    </a:lnT>
+                    <a:lnB w="6350" cap="flat" cmpd="sng" algn="ctr">
+                      <a:solidFill>
+                        <a:srgbClr val="E5E7EB"/>
+                      </a:solidFill>
+                      <a:prstDash val="solid"/>
+                      <a:round/>
+                      <a:headEnd type="none" w="med" len="med"/>
+                      <a:tailEnd type="none" w="med" len="med"/>
+                    </a:lnB>
+                    <a:solidFill>
+                      <a:srgbClr val="FFFFFF"/>
+                    </a:solidFill>
+                  </a:tcPr>
+                </a:tc>
+                <a:tc>
+                  <a:txBody>
+                    <a:bodyPr/>
+                    <a:lstStyle/>
+                    <a:p>
+                      <a:pPr algn="ctr" indent="0" marL="0">
+                        <a:buNone/>
+                      </a:pPr>
+                      <a:r>
+                        <a:rPr lang="en-US" sz="1400" dirty="0">
+                          <a:solidFill>
+                            <a:srgbClr val="15171C"/>
+                          </a:solidFill>
+                          <a:latin typeface="Calibri" pitchFamily="34" charset="0"/>
+                          <a:ea typeface="Calibri" pitchFamily="34" charset="-122"/>
+                          <a:cs typeface="Calibri" pitchFamily="34" charset="-120"/>
+                        </a:rPr>
+                        <a:t>13</a:t>
+                      </a:r>
+                      <a:endParaRPr lang="en-US" sz="1400" dirty="0">
+                        <a:latin typeface="Calibri" charset="0"/>
+                        <a:ea typeface="Calibri" charset="0"/>
+                        <a:cs typeface="Calibri" charset="0"/>
+                      </a:endParaRPr>
+                    </a:p>
+                  </a:txBody>
+                  <a:tcPr marL="91440" marR="91440" marT="45720" marB="45720">
+                    <a:lnL w="6350" cap="flat" cmpd="sng" algn="ctr">
+                      <a:solidFill>
+                        <a:srgbClr val="E5E7EB"/>
+                      </a:solidFill>
+                      <a:prstDash val="solid"/>
+                      <a:round/>
+                      <a:headEnd type="none" w="med" len="med"/>
+                      <a:tailEnd type="none" w="med" len="med"/>
+                    </a:lnL>
+                    <a:lnR w="6350" cap="flat" cmpd="sng" algn="ctr">
+                      <a:solidFill>
+                        <a:srgbClr val="E5E7EB"/>
+                      </a:solidFill>
+                      <a:prstDash val="solid"/>
+                      <a:round/>
+                      <a:headEnd type="none" w="med" len="med"/>
+                      <a:tailEnd type="none" w="med" len="med"/>
+                    </a:lnR>
+                    <a:lnT w="6350" cap="flat" cmpd="sng" algn="ctr">
+                      <a:solidFill>
+                        <a:srgbClr val="E5E7EB"/>
+                      </a:solidFill>
+                      <a:prstDash val="solid"/>
+                      <a:round/>
+                      <a:headEnd type="none" w="med" len="med"/>
+                      <a:tailEnd type="none" w="med" len="med"/>
+                    </a:lnT>
+                    <a:lnB w="6350" cap="flat" cmpd="sng" algn="ctr">
+                      <a:solidFill>
+                        <a:srgbClr val="E5E7EB"/>
+                      </a:solidFill>
+                      <a:prstDash val="solid"/>
+                      <a:round/>
+                      <a:headEnd type="none" w="med" len="med"/>
+                      <a:tailEnd type="none" w="med" len="med"/>
+                    </a:lnB>
+                    <a:solidFill>
+                      <a:srgbClr val="FFFFFF"/>
+                    </a:solidFill>
+                  </a:tcPr>
+                </a:tc>
+                <a:tc>
+                  <a:txBody>
+                    <a:bodyPr/>
+                    <a:lstStyle/>
+                    <a:p>
+                      <a:pPr algn="ctr" indent="0" marL="0">
+                        <a:buNone/>
+                      </a:pPr>
+                      <a:r>
+                        <a:rPr lang="en-US" sz="1400" b="1" dirty="0">
                           <a:solidFill>
                             <a:srgbClr val="E8730C"/>
                           </a:solidFill>
@@ -8378,7 +10102,7 @@
                         </a:rPr>
                         <a:t>19</a:t>
                       </a:r>
-                      <a:endParaRPr lang="en-US" sz="1500" dirty="0">
+                      <a:endParaRPr lang="en-US" sz="1400" dirty="0">
                         <a:latin typeface="Calibri" charset="0"/>
                         <a:ea typeface="Calibri" charset="0"/>
                         <a:cs typeface="Calibri" charset="0"/>
@@ -8440,8 +10164,8 @@
         </p:nvSpPr>
         <p:spPr>
           <a:xfrm>
-            <a:off x="457200" y="3977640"/>
-            <a:ext cx="8229600" cy="411480"/>
+            <a:off x="457200" y="4224528"/>
+            <a:ext cx="8229600" cy="365760"/>
           </a:xfrm>
           <a:prstGeom prst="rect">
             <a:avLst/>
@@ -8457,1070 +10181,14 @@
               <a:buNone/>
             </a:pPr>
             <a:r>
-              <a:rPr lang="en-US" sz="1500" dirty="0">
+              <a:rPr lang="en-US" sz="1400" dirty="0">
                 <a:solidFill>
                   <a:schemeClr val="tx2"/>
                 </a:solidFill>
               </a:rPr>
               <a:t>Each change measured on its own, against the version before it; the numbers are not added together.</a:t>
             </a:r>
-            <a:endParaRPr lang="en-US" sz="1500" dirty="0"/>
-          </a:p>
-        </p:txBody>
-      </p:sp>
-      <p:sp>
-        <p:nvSpPr>
-          <p:cNvPr id="25" name="Slide Number Placeholder 0"/>
-          <p:cNvSpPr>
-            <a:spLocks noGrp="1"/>
-          </p:cNvSpPr>
-          <p:nvPr>
-            <p:ph type="sldNum" sz="quarter" idx="4294967295"/>
-          </p:nvPr>
-        </p:nvSpPr>
-        <p:spPr>
-          <a:xfrm>
-            <a:off x="8229600" y="4754880"/>
-            <a:ext cx="457200" cy="228600"/>
-          </a:xfrm>
-          <a:prstGeom prst="rect">
-            <a:avLst/>
-          </a:prstGeom>
-          <a:extLst>
-            <a:ext uri="{C572A759-6A51-4108-AA02-DFA0A04FC94B}">
-              <ma14:wrappingTextBoxFlag xmlns:ma14="http://schemas.microsoft.com/office/mac/drawingml/2011/main" val="0"/>
-            </a:ext>
-          </a:extLst>
-        </p:spPr>
-        <p:txBody>
-          <a:bodyPr/>
-          <a:lstStyle>
-            <a:lvl1pPr>
-              <a:defRPr sz="900">
-                <a:solidFill>
-                  <a:schemeClr val="accent5"/>
-                </a:solidFill>
-              </a:defRPr>
-            </a:lvl1pPr>
-          </a:lstStyle>
-          <a:p>
-            <a:pPr algn="r"/>
-            <a:fld id="{F7021451-1387-4CA6-816F-3879F97B5CBC}" type="slidenum">
-              <a:rPr b="0" lang="en-US"/>
-              <a:t>12</a:t>
-            </a:fld>
-            <a:endParaRPr lang="en-US"/>
-          </a:p>
-        </p:txBody>
-      </p:sp>
-    </p:spTree>
-  </p:cSld>
-  <p:clrMapOvr>
-    <a:masterClrMapping/>
-  </p:clrMapOvr>
-</p:sld>
-</file>
-
-<file path=ppt/slides/slide13.xml><?xml version="1.0" encoding="utf-8"?>
-<p:sld xmlns:a="http://schemas.openxmlformats.org/drawingml/2006/main" xmlns:r="http://schemas.openxmlformats.org/officeDocument/2006/relationships" xmlns:p="http://schemas.openxmlformats.org/presentationml/2006/main">
-  <p:cSld name="Slide 13">
-    <p:spTree>
-      <p:nvGrpSpPr>
-        <p:cNvPr id="1" name=""/>
-        <p:cNvGrpSpPr/>
-        <p:nvPr/>
-      </p:nvGrpSpPr>
-      <p:grpSpPr>
-        <a:xfrm>
-          <a:off x="0" y="0"/>
-          <a:ext cx="0" cy="0"/>
-          <a:chOff x="0" y="0"/>
-          <a:chExt cx="0" cy="0"/>
-        </a:xfrm>
-      </p:grpSpPr>
-      <p:sp>
-        <p:nvSpPr>
-          <p:cNvPr id="2" name="Text 0"/>
-          <p:cNvSpPr/>
-          <p:nvPr>
-            <p:ph idx="100" type="title" hasCustomPrompt="1"/>
-          </p:nvPr>
-        </p:nvSpPr>
-        <p:spPr>
-          <a:xfrm>
-            <a:off x="457200" y="256032"/>
-            <a:ext cx="8229600" cy="640080"/>
-          </a:xfrm>
-          <a:prstGeom prst="rect">
-            <a:avLst/>
-          </a:prstGeom>
-          <a:noFill/>
-          <a:ln/>
-        </p:spPr>
-        <p:txBody>
-          <a:bodyPr wrap="square" lIns="0" tIns="0" rIns="0" bIns="0" rtlCol="0" anchor="ctr"/>
-          <a:lstStyle/>
-          <a:p>
-            <a:pPr algn="l" indent="0" marL="0">
-              <a:buNone/>
-            </a:pPr>
-            <a:r>
-              <a:rPr lang="en-US" sz="2800" b="1" dirty="0">
-                <a:solidFill>
-                  <a:schemeClr val="tx1"/>
-                </a:solidFill>
-              </a:rPr>
-              <a:t>Does the fit behave as expected?</a:t>
-            </a:r>
-            <a:endParaRPr lang="en-US" sz="2800" dirty="0"/>
-          </a:p>
-        </p:txBody>
-      </p:sp>
-      <p:sp>
-        <p:nvSpPr>
-          <p:cNvPr id="3" name="check-0"/>
-          <p:cNvSpPr/>
-          <p:nvPr/>
-        </p:nvSpPr>
-        <p:spPr>
-          <a:xfrm>
-            <a:off x="457200" y="1143000"/>
-            <a:ext cx="2606040" cy="2377440"/>
-          </a:xfrm>
-          <a:prstGeom prst="roundRect">
-            <a:avLst>
-              <a:gd name="adj" fmla="val 3077"/>
-            </a:avLst>
-          </a:prstGeom>
-          <a:solidFill>
-            <a:schemeClr val="bg2"/>
-          </a:solidFill>
-          <a:ln w="12700">
-            <a:solidFill>
-              <a:schemeClr val="bg2"/>
-            </a:solidFill>
-            <a:prstDash val="solid"/>
-          </a:ln>
-        </p:spPr>
-      </p:sp>
-      <p:sp>
-        <p:nvSpPr>
-          <p:cNvPr id="4" name="Text 2"/>
-          <p:cNvSpPr txBox="1"/>
-          <p:nvPr/>
-        </p:nvSpPr>
-        <p:spPr>
-          <a:xfrm>
-            <a:off x="640080" y="1325880"/>
-            <a:ext cx="2240280" cy="731520"/>
-          </a:xfrm>
-          <a:prstGeom prst="rect">
-            <a:avLst/>
-          </a:prstGeom>
-          <a:noFill/>
-          <a:ln/>
-        </p:spPr>
-        <p:txBody>
-          <a:bodyPr wrap="square" lIns="0" tIns="0" rIns="0" bIns="0" rtlCol="0" anchor="t"/>
-          <a:lstStyle/>
-          <a:p>
-            <a:pPr indent="0" marL="0">
-              <a:buNone/>
-            </a:pPr>
-            <a:r>
-              <a:rPr lang="en-US" sz="3200" b="1" dirty="0">
-                <a:solidFill>
-                  <a:schemeClr val="accent3"/>
-                </a:solidFill>
-                <a:latin typeface="Cambria" pitchFamily="34" charset="0"/>
-                <a:ea typeface="Cambria" pitchFamily="34" charset="-122"/>
-                <a:cs typeface="Cambria" pitchFamily="34" charset="-120"/>
-              </a:rPr>
-              <a:t>0.79 vs 0.73</a:t>
-            </a:r>
-            <a:endParaRPr lang="en-US" sz="3200" dirty="0"/>
-          </a:p>
-        </p:txBody>
-      </p:sp>
-      <p:sp>
-        <p:nvSpPr>
-          <p:cNvPr id="5" name="Text 3"/>
-          <p:cNvSpPr txBox="1"/>
-          <p:nvPr/>
-        </p:nvSpPr>
-        <p:spPr>
-          <a:xfrm>
-            <a:off x="640080" y="2148840"/>
-            <a:ext cx="2240280" cy="1234440"/>
-          </a:xfrm>
-          <a:prstGeom prst="rect">
-            <a:avLst/>
-          </a:prstGeom>
-          <a:noFill/>
-          <a:ln/>
-        </p:spPr>
-        <p:txBody>
-          <a:bodyPr wrap="square" lIns="0" tIns="0" rIns="0" bIns="0" rtlCol="0" anchor="t"/>
-          <a:lstStyle/>
-          <a:p>
-            <a:pPr indent="0" marL="0">
-              <a:buNone/>
-            </a:pPr>
-            <a:r>
-              <a:rPr lang="en-US" sz="1500" dirty="0">
-                <a:solidFill>
-                  <a:schemeClr val="tx2"/>
-                </a:solidFill>
-              </a:rPr>
-              <a:t>depth-to-width ratio: learned blobs vs measured nuclei</a:t>
-            </a:r>
-            <a:endParaRPr lang="en-US" sz="1500" dirty="0"/>
-          </a:p>
-        </p:txBody>
-      </p:sp>
-      <p:sp>
-        <p:nvSpPr>
-          <p:cNvPr id="6" name="check-1"/>
-          <p:cNvSpPr/>
-          <p:nvPr/>
-        </p:nvSpPr>
-        <p:spPr>
-          <a:xfrm>
-            <a:off x="3246120" y="1143000"/>
-            <a:ext cx="2606040" cy="2377440"/>
-          </a:xfrm>
-          <a:prstGeom prst="roundRect">
-            <a:avLst>
-              <a:gd name="adj" fmla="val 3077"/>
-            </a:avLst>
-          </a:prstGeom>
-          <a:solidFill>
-            <a:schemeClr val="bg2"/>
-          </a:solidFill>
-          <a:ln w="12700">
-            <a:solidFill>
-              <a:schemeClr val="bg2"/>
-            </a:solidFill>
-            <a:prstDash val="solid"/>
-          </a:ln>
-        </p:spPr>
-      </p:sp>
-      <p:sp>
-        <p:nvSpPr>
-          <p:cNvPr id="7" name="Text 5"/>
-          <p:cNvSpPr txBox="1"/>
-          <p:nvPr/>
-        </p:nvSpPr>
-        <p:spPr>
-          <a:xfrm>
-            <a:off x="3429000" y="1325880"/>
-            <a:ext cx="2240280" cy="731520"/>
-          </a:xfrm>
-          <a:prstGeom prst="rect">
-            <a:avLst/>
-          </a:prstGeom>
-          <a:noFill/>
-          <a:ln/>
-        </p:spPr>
-        <p:txBody>
-          <a:bodyPr wrap="square" lIns="0" tIns="0" rIns="0" bIns="0" rtlCol="0" anchor="t"/>
-          <a:lstStyle/>
-          <a:p>
-            <a:pPr indent="0" marL="0">
-              <a:buNone/>
-            </a:pPr>
-            <a:r>
-              <a:rPr lang="en-US" sz="3200" b="1" dirty="0">
-                <a:solidFill>
-                  <a:schemeClr val="accent3"/>
-                </a:solidFill>
-                <a:latin typeface="Cambria" pitchFamily="34" charset="0"/>
-                <a:ea typeface="Cambria" pitchFamily="34" charset="-122"/>
-                <a:cs typeface="Cambria" pitchFamily="34" charset="-120"/>
-              </a:rPr>
-              <a:t>14 vs 10</a:t>
-            </a:r>
-            <a:endParaRPr lang="en-US" sz="3200" dirty="0"/>
-          </a:p>
-        </p:txBody>
-      </p:sp>
-      <p:sp>
-        <p:nvSpPr>
-          <p:cNvPr id="8" name="Text 6"/>
-          <p:cNvSpPr txBox="1"/>
-          <p:nvPr/>
-        </p:nvSpPr>
-        <p:spPr>
-          <a:xfrm>
-            <a:off x="3429000" y="2148840"/>
-            <a:ext cx="2240280" cy="1234440"/>
-          </a:xfrm>
-          <a:prstGeom prst="rect">
-            <a:avLst/>
-          </a:prstGeom>
-          <a:noFill/>
-          <a:ln/>
-        </p:spPr>
-        <p:txBody>
-          <a:bodyPr wrap="square" lIns="0" tIns="0" rIns="0" bIns="0" rtlCol="0" anchor="t"/>
-          <a:lstStyle/>
-          <a:p>
-            <a:pPr indent="0" marL="0">
-              <a:buNone/>
-            </a:pPr>
-            <a:r>
-              <a:rPr lang="en-US" sz="1500" dirty="0">
-                <a:solidFill>
-                  <a:schemeClr val="tx2"/>
-                </a:solidFill>
-              </a:rPr>
-              <a:t>hand-marked Drosophila nuclei in the top 100 detections: fitted blobs vs raw image</a:t>
-            </a:r>
-            <a:endParaRPr lang="en-US" sz="1500" dirty="0"/>
-          </a:p>
-        </p:txBody>
-      </p:sp>
-      <p:sp>
-        <p:nvSpPr>
-          <p:cNvPr id="9" name="check-2"/>
-          <p:cNvSpPr/>
-          <p:nvPr/>
-        </p:nvSpPr>
-        <p:spPr>
-          <a:xfrm>
-            <a:off x="6035040" y="1143000"/>
-            <a:ext cx="2606040" cy="2377440"/>
-          </a:xfrm>
-          <a:prstGeom prst="roundRect">
-            <a:avLst>
-              <a:gd name="adj" fmla="val 3077"/>
-            </a:avLst>
-          </a:prstGeom>
-          <a:solidFill>
-            <a:schemeClr val="bg2"/>
-          </a:solidFill>
-          <a:ln w="12700">
-            <a:solidFill>
-              <a:schemeClr val="bg2"/>
-            </a:solidFill>
-            <a:prstDash val="solid"/>
-          </a:ln>
-        </p:spPr>
-      </p:sp>
-      <p:sp>
-        <p:nvSpPr>
-          <p:cNvPr id="10" name="Text 8"/>
-          <p:cNvSpPr txBox="1"/>
-          <p:nvPr/>
-        </p:nvSpPr>
-        <p:spPr>
-          <a:xfrm>
-            <a:off x="6217920" y="1325880"/>
-            <a:ext cx="2240280" cy="731520"/>
-          </a:xfrm>
-          <a:prstGeom prst="rect">
-            <a:avLst/>
-          </a:prstGeom>
-          <a:noFill/>
-          <a:ln/>
-        </p:spPr>
-        <p:txBody>
-          <a:bodyPr wrap="square" lIns="0" tIns="0" rIns="0" bIns="0" rtlCol="0" anchor="t"/>
-          <a:lstStyle/>
-          <a:p>
-            <a:pPr indent="0" marL="0">
-              <a:buNone/>
-            </a:pPr>
-            <a:r>
-              <a:rPr lang="en-US" sz="3200" b="1" dirty="0">
-                <a:solidFill>
-                  <a:schemeClr val="accent3"/>
-                </a:solidFill>
-                <a:latin typeface="Cambria" pitchFamily="34" charset="0"/>
-                <a:ea typeface="Cambria" pitchFamily="34" charset="-122"/>
-                <a:cs typeface="Cambria" pitchFamily="34" charset="-120"/>
-              </a:rPr>
-              <a:t>≤ 4%</a:t>
-            </a:r>
-            <a:endParaRPr lang="en-US" sz="3200" dirty="0"/>
-          </a:p>
-        </p:txBody>
-      </p:sp>
-      <p:sp>
-        <p:nvSpPr>
-          <p:cNvPr id="11" name="Text 9"/>
-          <p:cNvSpPr txBox="1"/>
-          <p:nvPr/>
-        </p:nvSpPr>
-        <p:spPr>
-          <a:xfrm>
-            <a:off x="6217920" y="2148840"/>
-            <a:ext cx="2240280" cy="1234440"/>
-          </a:xfrm>
-          <a:prstGeom prst="rect">
-            <a:avLst/>
-          </a:prstGeom>
-          <a:noFill/>
-          <a:ln/>
-        </p:spPr>
-        <p:txBody>
-          <a:bodyPr wrap="square" lIns="0" tIns="0" rIns="0" bIns="0" rtlCol="0" anchor="t"/>
-          <a:lstStyle/>
-          <a:p>
-            <a:pPr indent="0" marL="0">
-              <a:buNone/>
-            </a:pPr>
-            <a:r>
-              <a:rPr lang="en-US" sz="1500" dirty="0">
-                <a:solidFill>
-                  <a:schemeClr val="tx2"/>
-                </a:solidFill>
-              </a:rPr>
-              <a:t>difference in nuclei found between three repeated fits</a:t>
-            </a:r>
-            <a:endParaRPr lang="en-US" sz="1500" dirty="0"/>
-          </a:p>
-        </p:txBody>
-      </p:sp>
-      <p:sp>
-        <p:nvSpPr>
-          <p:cNvPr id="12" name="Text 10"/>
-          <p:cNvSpPr txBox="1"/>
-          <p:nvPr/>
-        </p:nvSpPr>
-        <p:spPr>
-          <a:xfrm>
-            <a:off x="457200" y="3840480"/>
-            <a:ext cx="8229600" cy="548640"/>
-          </a:xfrm>
-          <a:prstGeom prst="rect">
-            <a:avLst/>
-          </a:prstGeom>
-          <a:noFill/>
-          <a:ln/>
-        </p:spPr>
-        <p:txBody>
-          <a:bodyPr wrap="square" lIns="0" tIns="0" rIns="0" bIns="0" rtlCol="0" anchor="t"/>
-          <a:lstStyle/>
-          <a:p>
-            <a:pPr indent="0" marL="0">
-              <a:buNone/>
-            </a:pPr>
-            <a:r>
-              <a:rPr lang="en-US" sz="1500" dirty="0">
-                <a:solidFill>
-                  <a:schemeClr val="tx2"/>
-                </a:solidFill>
-              </a:rPr>
-              <a:t>Limit: with all 457 of its candidates the raw-image detector finds 26 of 29, more than any fit.</a:t>
-            </a:r>
-            <a:endParaRPr lang="en-US" sz="1500" dirty="0"/>
-          </a:p>
-        </p:txBody>
-      </p:sp>
-      <p:sp>
-        <p:nvSpPr>
-          <p:cNvPr id="25" name="Slide Number Placeholder 0"/>
-          <p:cNvSpPr>
-            <a:spLocks noGrp="1"/>
-          </p:cNvSpPr>
-          <p:nvPr>
-            <p:ph type="sldNum" sz="quarter" idx="4294967295"/>
-          </p:nvPr>
-        </p:nvSpPr>
-        <p:spPr>
-          <a:xfrm>
-            <a:off x="8229600" y="4754880"/>
-            <a:ext cx="457200" cy="228600"/>
-          </a:xfrm>
-          <a:prstGeom prst="rect">
-            <a:avLst/>
-          </a:prstGeom>
-          <a:extLst>
-            <a:ext uri="{C572A759-6A51-4108-AA02-DFA0A04FC94B}">
-              <ma14:wrappingTextBoxFlag xmlns:ma14="http://schemas.microsoft.com/office/mac/drawingml/2011/main" val="0"/>
-            </a:ext>
-          </a:extLst>
-        </p:spPr>
-        <p:txBody>
-          <a:bodyPr/>
-          <a:lstStyle>
-            <a:lvl1pPr>
-              <a:defRPr sz="900">
-                <a:solidFill>
-                  <a:schemeClr val="accent5"/>
-                </a:solidFill>
-              </a:defRPr>
-            </a:lvl1pPr>
-          </a:lstStyle>
-          <a:p>
-            <a:pPr algn="r"/>
-            <a:fld id="{F7021451-1387-4CA6-816F-3879F97B5CBC}" type="slidenum">
-              <a:rPr b="0" lang="en-US"/>
-              <a:t>13</a:t>
-            </a:fld>
-            <a:endParaRPr lang="en-US"/>
-          </a:p>
-        </p:txBody>
-      </p:sp>
-    </p:spTree>
-  </p:cSld>
-  <p:clrMapOvr>
-    <a:masterClrMapping/>
-  </p:clrMapOvr>
-</p:sld>
-</file>
-
-<file path=ppt/slides/slide14.xml><?xml version="1.0" encoding="utf-8"?>
-<p:sld xmlns:a="http://schemas.openxmlformats.org/drawingml/2006/main" xmlns:r="http://schemas.openxmlformats.org/officeDocument/2006/relationships" xmlns:p="http://schemas.openxmlformats.org/presentationml/2006/main">
-  <p:cSld name="Slide 14">
-    <p:spTree>
-      <p:nvGrpSpPr>
-        <p:cNvPr id="1" name=""/>
-        <p:cNvGrpSpPr/>
-        <p:nvPr/>
-      </p:nvGrpSpPr>
-      <p:grpSpPr>
-        <a:xfrm>
-          <a:off x="0" y="0"/>
-          <a:ext cx="0" cy="0"/>
-          <a:chOff x="0" y="0"/>
-          <a:chExt cx="0" cy="0"/>
-        </a:xfrm>
-      </p:grpSpPr>
-      <p:sp>
-        <p:nvSpPr>
-          <p:cNvPr id="2" name="Text 0"/>
-          <p:cNvSpPr/>
-          <p:nvPr>
-            <p:ph idx="100" type="title" hasCustomPrompt="1"/>
-          </p:nvPr>
-        </p:nvSpPr>
-        <p:spPr>
-          <a:xfrm>
-            <a:off x="457200" y="256032"/>
-            <a:ext cx="8229600" cy="640080"/>
-          </a:xfrm>
-          <a:prstGeom prst="rect">
-            <a:avLst/>
-          </a:prstGeom>
-          <a:noFill/>
-          <a:ln/>
-        </p:spPr>
-        <p:txBody>
-          <a:bodyPr wrap="square" lIns="0" tIns="0" rIns="0" bIns="0" rtlCol="0" anchor="ctr"/>
-          <a:lstStyle/>
-          <a:p>
-            <a:pPr algn="l" indent="0" marL="0">
-              <a:buNone/>
-            </a:pPr>
-            <a:r>
-              <a:rPr lang="en-US" sz="2800" b="1" dirty="0">
-                <a:solidFill>
-                  <a:schemeClr val="tx1"/>
-                </a:solidFill>
-              </a:rPr>
-              <a:t>Against the state of the art, at the same file size</a:t>
-            </a:r>
-            <a:endParaRPr lang="en-US" sz="2800" dirty="0"/>
-          </a:p>
-        </p:txBody>
-      </p:sp>
-      <p:sp>
-        <p:nvSpPr>
-          <p:cNvPr id="3" name="Text 1"/>
-          <p:cNvSpPr txBox="1"/>
-          <p:nvPr/>
-        </p:nvSpPr>
-        <p:spPr>
-          <a:xfrm>
-            <a:off x="457200" y="1024128"/>
-            <a:ext cx="2011680" cy="274320"/>
-          </a:xfrm>
-          <a:prstGeom prst="rect">
-            <a:avLst/>
-          </a:prstGeom>
-          <a:noFill/>
-          <a:ln/>
-        </p:spPr>
-        <p:txBody>
-          <a:bodyPr wrap="square" lIns="0" tIns="0" rIns="0" bIns="0" rtlCol="0" anchor="t"/>
-          <a:lstStyle/>
-          <a:p>
-            <a:pPr algn="ctr" indent="0" marL="0">
-              <a:buNone/>
-            </a:pPr>
-            <a:r>
-              <a:rPr lang="en-US" sz="1400" b="1" dirty="0">
-                <a:solidFill>
-                  <a:schemeClr val="tx1"/>
-                </a:solidFill>
-              </a:rPr>
-              <a:t>Original</a:t>
-            </a:r>
             <a:endParaRPr lang="en-US" sz="1400" dirty="0"/>
-          </a:p>
-        </p:txBody>
-      </p:sp>
-      <p:pic>
-        <p:nvPicPr>
-          <p:cNvPr id="4" name="four-raw" descr="D:\masters\MLCV seminar\TeamProject\presentation\figs\four_raw.png">    </p:cNvPr>
-          <p:cNvPicPr>
-            <a:picLocks noChangeAspect="1"/>
-          </p:cNvPicPr>
-          <p:nvPr/>
-        </p:nvPicPr>
-        <p:blipFill>
-          <a:blip r:embed="rId1"/>
-          <a:stretch>
-            <a:fillRect/>
-          </a:stretch>
-        </p:blipFill>
-        <p:spPr>
-          <a:xfrm>
-            <a:off x="457200" y="1325880"/>
-            <a:ext cx="2011680" cy="1536192"/>
-          </a:xfrm>
-          <a:prstGeom prst="rect">
-            <a:avLst/>
-          </a:prstGeom>
-        </p:spPr>
-      </p:pic>
-      <p:sp>
-        <p:nvSpPr>
-          <p:cNvPr id="5" name="Text 2"/>
-          <p:cNvSpPr txBox="1"/>
-          <p:nvPr/>
-        </p:nvSpPr>
-        <p:spPr>
-          <a:xfrm>
-            <a:off x="2532888" y="1024128"/>
-            <a:ext cx="2011680" cy="274320"/>
-          </a:xfrm>
-          <a:prstGeom prst="rect">
-            <a:avLst/>
-          </a:prstGeom>
-          <a:noFill/>
-          <a:ln/>
-        </p:spPr>
-        <p:txBody>
-          <a:bodyPr wrap="square" lIns="0" tIns="0" rIns="0" bIns="0" rtlCol="0" anchor="t"/>
-          <a:lstStyle/>
-          <a:p>
-            <a:pPr algn="ctr" indent="0" marL="0">
-              <a:buNone/>
-            </a:pPr>
-            <a:r>
-              <a:rPr lang="en-US" sz="1400" b="1" dirty="0">
-                <a:solidFill>
-                  <a:schemeClr val="tx1"/>
-                </a:solidFill>
-              </a:rPr>
-              <a:t>JPEG-XL 82×</a:t>
-            </a:r>
-            <a:endParaRPr lang="en-US" sz="1400" dirty="0"/>
-          </a:p>
-        </p:txBody>
-      </p:sp>
-      <p:pic>
-        <p:nvPicPr>
-          <p:cNvPr id="6" name="four-jpegxl" descr="D:\masters\MLCV seminar\TeamProject\presentation\figs\four_jpegxl.png">    </p:cNvPr>
-          <p:cNvPicPr>
-            <a:picLocks noChangeAspect="1"/>
-          </p:cNvPicPr>
-          <p:nvPr/>
-        </p:nvPicPr>
-        <p:blipFill>
-          <a:blip r:embed="rId2"/>
-          <a:stretch>
-            <a:fillRect/>
-          </a:stretch>
-        </p:blipFill>
-        <p:spPr>
-          <a:xfrm>
-            <a:off x="2532888" y="1325880"/>
-            <a:ext cx="2011680" cy="1536192"/>
-          </a:xfrm>
-          <a:prstGeom prst="rect">
-            <a:avLst/>
-          </a:prstGeom>
-        </p:spPr>
-      </p:pic>
-      <p:sp>
-        <p:nvSpPr>
-          <p:cNvPr id="7" name="Text 3"/>
-          <p:cNvSpPr txBox="1"/>
-          <p:nvPr/>
-        </p:nvSpPr>
-        <p:spPr>
-          <a:xfrm>
-            <a:off x="2532888" y="2880360"/>
-            <a:ext cx="2011680" cy="256032"/>
-          </a:xfrm>
-          <a:prstGeom prst="rect">
-            <a:avLst/>
-          </a:prstGeom>
-          <a:noFill/>
-          <a:ln/>
-        </p:spPr>
-        <p:txBody>
-          <a:bodyPr wrap="square" lIns="0" tIns="0" rIns="0" bIns="0" rtlCol="0" anchor="t"/>
-          <a:lstStyle/>
-          <a:p>
-            <a:pPr algn="ctr" indent="0" marL="0">
-              <a:buNone/>
-            </a:pPr>
-            <a:r>
-              <a:rPr lang="en-US" sz="1200" dirty="0">
-                <a:solidFill>
-                  <a:schemeClr val="accent5"/>
-                </a:solidFill>
-              </a:rPr>
-              <a:t>100% of nuclei kept</a:t>
-            </a:r>
-            <a:endParaRPr lang="en-US" sz="1200" dirty="0"/>
-          </a:p>
-        </p:txBody>
-      </p:sp>
-      <p:sp>
-        <p:nvSpPr>
-          <p:cNvPr id="8" name="Text 4"/>
-          <p:cNvSpPr txBox="1"/>
-          <p:nvPr/>
-        </p:nvSpPr>
-        <p:spPr>
-          <a:xfrm>
-            <a:off x="4608576" y="1024128"/>
-            <a:ext cx="2011680" cy="274320"/>
-          </a:xfrm>
-          <a:prstGeom prst="rect">
-            <a:avLst/>
-          </a:prstGeom>
-          <a:noFill/>
-          <a:ln/>
-        </p:spPr>
-        <p:txBody>
-          <a:bodyPr wrap="square" lIns="0" tIns="0" rIns="0" bIns="0" rtlCol="0" anchor="t"/>
-          <a:lstStyle/>
-          <a:p>
-            <a:pPr algn="ctr" indent="0" marL="0">
-              <a:buNone/>
-            </a:pPr>
-            <a:r>
-              <a:rPr lang="en-US" sz="1400" b="1" dirty="0">
-                <a:solidFill>
-                  <a:schemeClr val="tx1"/>
-                </a:solidFill>
-              </a:rPr>
-              <a:t>JPEG2000 89×</a:t>
-            </a:r>
-            <a:endParaRPr lang="en-US" sz="1400" dirty="0"/>
-          </a:p>
-        </p:txBody>
-      </p:sp>
-      <p:pic>
-        <p:nvPicPr>
-          <p:cNvPr id="9" name="four-jpeg2k" descr="D:\masters\MLCV seminar\TeamProject\presentation\figs\four_jpeg2k.png">    </p:cNvPr>
-          <p:cNvPicPr>
-            <a:picLocks noChangeAspect="1"/>
-          </p:cNvPicPr>
-          <p:nvPr/>
-        </p:nvPicPr>
-        <p:blipFill>
-          <a:blip r:embed="rId3"/>
-          <a:stretch>
-            <a:fillRect/>
-          </a:stretch>
-        </p:blipFill>
-        <p:spPr>
-          <a:xfrm>
-            <a:off x="4608576" y="1325880"/>
-            <a:ext cx="2011680" cy="1536192"/>
-          </a:xfrm>
-          <a:prstGeom prst="rect">
-            <a:avLst/>
-          </a:prstGeom>
-        </p:spPr>
-      </p:pic>
-      <p:sp>
-        <p:nvSpPr>
-          <p:cNvPr id="10" name="Text 5"/>
-          <p:cNvSpPr txBox="1"/>
-          <p:nvPr/>
-        </p:nvSpPr>
-        <p:spPr>
-          <a:xfrm>
-            <a:off x="4608576" y="2880360"/>
-            <a:ext cx="2011680" cy="256032"/>
-          </a:xfrm>
-          <a:prstGeom prst="rect">
-            <a:avLst/>
-          </a:prstGeom>
-          <a:noFill/>
-          <a:ln/>
-        </p:spPr>
-        <p:txBody>
-          <a:bodyPr wrap="square" lIns="0" tIns="0" rIns="0" bIns="0" rtlCol="0" anchor="t"/>
-          <a:lstStyle/>
-          <a:p>
-            <a:pPr algn="ctr" indent="0" marL="0">
-              <a:buNone/>
-            </a:pPr>
-            <a:r>
-              <a:rPr lang="en-US" sz="1200" dirty="0">
-                <a:solidFill>
-                  <a:schemeClr val="accent5"/>
-                </a:solidFill>
-              </a:rPr>
-              <a:t>97% of nuclei kept</a:t>
-            </a:r>
-            <a:endParaRPr lang="en-US" sz="1200" dirty="0"/>
-          </a:p>
-        </p:txBody>
-      </p:sp>
-      <p:sp>
-        <p:nvSpPr>
-          <p:cNvPr id="11" name="Text 6"/>
-          <p:cNvSpPr txBox="1"/>
-          <p:nvPr/>
-        </p:nvSpPr>
-        <p:spPr>
-          <a:xfrm>
-            <a:off x="6684264" y="1024128"/>
-            <a:ext cx="2011680" cy="274320"/>
-          </a:xfrm>
-          <a:prstGeom prst="rect">
-            <a:avLst/>
-          </a:prstGeom>
-          <a:noFill/>
-          <a:ln/>
-        </p:spPr>
-        <p:txBody>
-          <a:bodyPr wrap="square" lIns="0" tIns="0" rIns="0" bIns="0" rtlCol="0" anchor="t"/>
-          <a:lstStyle/>
-          <a:p>
-            <a:pPr algn="ctr" indent="0" marL="0">
-              <a:buNone/>
-            </a:pPr>
-            <a:r>
-              <a:rPr lang="en-US" sz="1400" b="1" dirty="0">
-                <a:solidFill>
-                  <a:schemeClr val="tx1"/>
-                </a:solidFill>
-              </a:rPr>
-              <a:t>Luxar 89×</a:t>
-            </a:r>
-            <a:endParaRPr lang="en-US" sz="1400" dirty="0"/>
-          </a:p>
-        </p:txBody>
-      </p:sp>
-      <p:pic>
-        <p:nvPicPr>
-          <p:cNvPr id="12" name="four-luxar" descr="D:\masters\MLCV seminar\TeamProject\presentation\figs\four_luxar.png">    </p:cNvPr>
-          <p:cNvPicPr>
-            <a:picLocks noChangeAspect="1"/>
-          </p:cNvPicPr>
-          <p:nvPr/>
-        </p:nvPicPr>
-        <p:blipFill>
-          <a:blip r:embed="rId4"/>
-          <a:stretch>
-            <a:fillRect/>
-          </a:stretch>
-        </p:blipFill>
-        <p:spPr>
-          <a:xfrm>
-            <a:off x="6684264" y="1325880"/>
-            <a:ext cx="2011680" cy="1536192"/>
-          </a:xfrm>
-          <a:prstGeom prst="rect">
-            <a:avLst/>
-          </a:prstGeom>
-        </p:spPr>
-      </p:pic>
-      <p:sp>
-        <p:nvSpPr>
-          <p:cNvPr id="13" name="Text 7"/>
-          <p:cNvSpPr txBox="1"/>
-          <p:nvPr/>
-        </p:nvSpPr>
-        <p:spPr>
-          <a:xfrm>
-            <a:off x="6684264" y="2880360"/>
-            <a:ext cx="2011680" cy="256032"/>
-          </a:xfrm>
-          <a:prstGeom prst="rect">
-            <a:avLst/>
-          </a:prstGeom>
-          <a:noFill/>
-          <a:ln/>
-        </p:spPr>
-        <p:txBody>
-          <a:bodyPr wrap="square" lIns="0" tIns="0" rIns="0" bIns="0" rtlCol="0" anchor="t"/>
-          <a:lstStyle/>
-          <a:p>
-            <a:pPr algn="ctr" indent="0" marL="0">
-              <a:buNone/>
-            </a:pPr>
-            <a:r>
-              <a:rPr lang="en-US" sz="1200" dirty="0">
-                <a:solidFill>
-                  <a:schemeClr val="accent5"/>
-                </a:solidFill>
-              </a:rPr>
-              <a:t>88% of nuclei kept</a:t>
-            </a:r>
-            <a:endParaRPr lang="en-US" sz="1200" dirty="0"/>
-          </a:p>
-        </p:txBody>
-      </p:sp>
-      <p:sp>
-        <p:nvSpPr>
-          <p:cNvPr id="14" name="Text 8"/>
-          <p:cNvSpPr txBox="1"/>
-          <p:nvPr/>
-        </p:nvSpPr>
-        <p:spPr>
-          <a:xfrm>
-            <a:off x="457200" y="3291840"/>
-            <a:ext cx="2606040" cy="1188720"/>
-          </a:xfrm>
-          <a:prstGeom prst="rect">
-            <a:avLst/>
-          </a:prstGeom>
-          <a:noFill/>
-          <a:ln/>
-        </p:spPr>
-        <p:txBody>
-          <a:bodyPr wrap="square" lIns="0" tIns="0" rIns="0" bIns="0" rtlCol="0" anchor="t"/>
-          <a:lstStyle/>
-          <a:p>
-            <a:pPr indent="0" marL="0">
-              <a:buNone/>
-            </a:pPr>
-            <a:r>
-              <a:rPr lang="en-US" sz="1500" b="1" dirty="0">
-                <a:solidFill>
-                  <a:srgbClr val="E8730C"/>
-                </a:solidFill>
-              </a:rPr>
-              <a:t>Luxar (2026)</a:t>
-            </a:r>
-            <a:endParaRPr lang="en-US" sz="1500" dirty="0"/>
-          </a:p>
-          <a:p>
-            <a:pPr indent="0" marL="0">
-              <a:buNone/>
-            </a:pPr>
-            <a:r>
-              <a:rPr lang="en-US" sz="1500" dirty="0">
-                <a:solidFill>
-                  <a:schemeClr val="tx1"/>
-                </a:solidFill>
-              </a:rPr>
-              <a:t>state-of-the-art Gaussian-blob tool for microscopy</a:t>
-            </a:r>
-            <a:endParaRPr lang="en-US" sz="1500" dirty="0"/>
-          </a:p>
-        </p:txBody>
-      </p:sp>
-      <p:sp>
-        <p:nvSpPr>
-          <p:cNvPr id="15" name="Text 9"/>
-          <p:cNvSpPr txBox="1"/>
-          <p:nvPr/>
-        </p:nvSpPr>
-        <p:spPr>
-          <a:xfrm>
-            <a:off x="3246120" y="3291840"/>
-            <a:ext cx="2606040" cy="1188720"/>
-          </a:xfrm>
-          <a:prstGeom prst="rect">
-            <a:avLst/>
-          </a:prstGeom>
-          <a:noFill/>
-          <a:ln/>
-        </p:spPr>
-        <p:txBody>
-          <a:bodyPr wrap="square" lIns="0" tIns="0" rIns="0" bIns="0" rtlCol="0" anchor="t"/>
-          <a:lstStyle/>
-          <a:p>
-            <a:pPr indent="0" marL="0">
-              <a:buNone/>
-            </a:pPr>
-            <a:r>
-              <a:rPr lang="en-US" sz="1500" b="1" dirty="0">
-                <a:solidFill>
-                  <a:srgbClr val="E8730C"/>
-                </a:solidFill>
-              </a:rPr>
-              <a:t>JPEG2000</a:t>
-            </a:r>
-            <a:endParaRPr lang="en-US" sz="1500" dirty="0"/>
-          </a:p>
-          <a:p>
-            <a:pPr indent="0" marL="0">
-              <a:buNone/>
-            </a:pPr>
-            <a:r>
-              <a:rPr lang="en-US" sz="1500" dirty="0">
-                <a:solidFill>
-                  <a:schemeClr val="tx1"/>
-                </a:solidFill>
-              </a:rPr>
-              <a:t>standard image compression, set to exactly the same file size</a:t>
-            </a:r>
-            <a:endParaRPr lang="en-US" sz="1500" dirty="0"/>
-          </a:p>
-        </p:txBody>
-      </p:sp>
-      <p:sp>
-        <p:nvSpPr>
-          <p:cNvPr id="16" name="Text 10"/>
-          <p:cNvSpPr txBox="1"/>
-          <p:nvPr/>
-        </p:nvSpPr>
-        <p:spPr>
-          <a:xfrm>
-            <a:off x="6035040" y="3291840"/>
-            <a:ext cx="2606040" cy="1188720"/>
-          </a:xfrm>
-          <a:prstGeom prst="rect">
-            <a:avLst/>
-          </a:prstGeom>
-          <a:noFill/>
-          <a:ln/>
-        </p:spPr>
-        <p:txBody>
-          <a:bodyPr wrap="square" lIns="0" tIns="0" rIns="0" bIns="0" rtlCol="0" anchor="t"/>
-          <a:lstStyle/>
-          <a:p>
-            <a:pPr indent="0" marL="0">
-              <a:buNone/>
-            </a:pPr>
-            <a:r>
-              <a:rPr lang="en-US" sz="1500" b="1" dirty="0">
-                <a:solidFill>
-                  <a:srgbClr val="E8730C"/>
-                </a:solidFill>
-              </a:rPr>
-              <a:t>Test</a:t>
-            </a:r>
-            <a:endParaRPr lang="en-US" sz="1500" dirty="0"/>
-          </a:p>
-          <a:p>
-            <a:pPr indent="0" marL="0">
-              <a:buNone/>
-            </a:pPr>
-            <a:r>
-              <a:rPr lang="en-US" sz="1500" dirty="0">
-                <a:solidFill>
-                  <a:schemeClr val="tx1"/>
-                </a:solidFill>
-              </a:rPr>
-              <a:t>12 C. elegans frames, 2,958 hand-marked nuclei, 4 nucleus detectors</a:t>
-            </a:r>
-            <a:endParaRPr lang="en-US" sz="1500" dirty="0"/>
           </a:p>
         </p:txBody>
       </p:sp>
@@ -9626,42 +10294,26 @@
                   <a:schemeClr val="tx1"/>
                 </a:solidFill>
               </a:rPr>
-              <a:t>Same file size: the winner depends on the detector</a:t>
+              <a:t>Does the fit behave as expected?</a:t>
             </a:r>
             <a:endParaRPr lang="en-US" sz="2800" dirty="0"/>
           </a:p>
         </p:txBody>
       </p:sp>
-      <p:graphicFrame>
-        <p:nvGraphicFramePr>
-          <p:cNvPr id="3" name="Chart 0" descr=""/>
-          <p:cNvGraphicFramePr/>
-          <p:nvPr/>
-        </p:nvGraphicFramePr>
-        <p:xfrm>
-          <a:off x="457200" y="1051560"/>
-          <a:ext cx="5120640" cy="3429000"/>
-        </p:xfrm>
-        <a:graphic xmlns:a="http://schemas.openxmlformats.org/drawingml/2006/main">
-          <a:graphicData uri="http://schemas.openxmlformats.org/drawingml/2006/chart">
-            <c:chart xmlns:c="http://schemas.openxmlformats.org/drawingml/2006/chart" r:id="rId1"/>
-          </a:graphicData>
-        </a:graphic>
-      </p:graphicFrame>
-      <p:sp>
-        <p:nvSpPr>
-          <p:cNvPr id="4" name="psnr-card"/>
+      <p:sp>
+        <p:nvSpPr>
+          <p:cNvPr id="3" name="check-0"/>
           <p:cNvSpPr/>
           <p:nvPr/>
         </p:nvSpPr>
         <p:spPr>
           <a:xfrm>
-            <a:off x="5806440" y="1143000"/>
-            <a:ext cx="2880360" cy="1417320"/>
+            <a:off x="457200" y="1143000"/>
+            <a:ext cx="2606040" cy="2377440"/>
           </a:xfrm>
           <a:prstGeom prst="roundRect">
             <a:avLst>
-              <a:gd name="adj" fmla="val 5161"/>
+              <a:gd name="adj" fmla="val 3077"/>
             </a:avLst>
           </a:prstGeom>
           <a:solidFill>
@@ -9677,14 +10329,14 @@
       </p:sp>
       <p:sp>
         <p:nvSpPr>
-          <p:cNvPr id="5" name="Text 2"/>
+          <p:cNvPr id="4" name="Text 2"/>
           <p:cNvSpPr txBox="1"/>
           <p:nvPr/>
         </p:nvSpPr>
         <p:spPr>
           <a:xfrm>
-            <a:off x="5989320" y="1298448"/>
-            <a:ext cx="2560320" cy="1097280"/>
+            <a:off x="640080" y="1325880"/>
+            <a:ext cx="2240280" cy="731520"/>
           </a:xfrm>
           <a:prstGeom prst="rect">
             <a:avLst/>
@@ -9700,45 +10352,70 @@
               <a:buNone/>
             </a:pPr>
             <a:r>
-              <a:rPr lang="en-US" sz="1800" b="1" dirty="0">
-                <a:solidFill>
-                  <a:schemeClr val="tx1"/>
-                </a:solidFill>
+              <a:rPr lang="en-US" sz="3200" b="1" dirty="0">
+                <a:solidFill>
+                  <a:schemeClr val="accent3"/>
+                </a:solidFill>
+                <a:latin typeface="Cambria" pitchFamily="34" charset="0"/>
+                <a:ea typeface="Cambria" pitchFamily="34" charset="-122"/>
+                <a:cs typeface="Cambria" pitchFamily="34" charset="-120"/>
               </a:rPr>
-              <a:t>PSNR: JPEG2000 better</a:t>
-            </a:r>
-            <a:endParaRPr lang="en-US" sz="1800" dirty="0"/>
-          </a:p>
+              <a:t>0.79 vs 0.73</a:t>
+            </a:r>
+            <a:endParaRPr lang="en-US" sz="3200" dirty="0"/>
+          </a:p>
+        </p:txBody>
+      </p:sp>
+      <p:sp>
+        <p:nvSpPr>
+          <p:cNvPr id="5" name="Text 3"/>
+          <p:cNvSpPr txBox="1"/>
+          <p:nvPr/>
+        </p:nvSpPr>
+        <p:spPr>
+          <a:xfrm>
+            <a:off x="640080" y="2148840"/>
+            <a:ext cx="2240280" cy="1234440"/>
+          </a:xfrm>
+          <a:prstGeom prst="rect">
+            <a:avLst/>
+          </a:prstGeom>
+          <a:noFill/>
+          <a:ln/>
+        </p:spPr>
+        <p:txBody>
+          <a:bodyPr wrap="square" lIns="0" tIns="0" rIns="0" bIns="0" rtlCol="0" anchor="t"/>
+          <a:lstStyle/>
           <a:p>
             <a:pPr indent="0" marL="0">
               <a:buNone/>
             </a:pPr>
             <a:r>
-              <a:rPr lang="en-US" sz="1800" dirty="0">
-                <a:solidFill>
-                  <a:schemeClr val="tx1"/>
+              <a:rPr lang="en-US" sz="1500" dirty="0">
+                <a:solidFill>
+                  <a:schemeClr val="tx2"/>
                 </a:solidFill>
               </a:rPr>
-              <a:t>on 12 of 12 frames</a:t>
-            </a:r>
-            <a:endParaRPr lang="en-US" sz="1800" dirty="0"/>
-          </a:p>
-        </p:txBody>
-      </p:sp>
-      <p:sp>
-        <p:nvSpPr>
-          <p:cNvPr id="6" name="detectors-card"/>
+              <a:t>depth-to-width ratio: learned blobs vs measured nuclei</a:t>
+            </a:r>
+            <a:endParaRPr lang="en-US" sz="1500" dirty="0"/>
+          </a:p>
+        </p:txBody>
+      </p:sp>
+      <p:sp>
+        <p:nvSpPr>
+          <p:cNvPr id="6" name="check-1"/>
           <p:cNvSpPr/>
           <p:nvPr/>
         </p:nvSpPr>
         <p:spPr>
           <a:xfrm>
-            <a:off x="5806440" y="2697480"/>
-            <a:ext cx="2880360" cy="1783080"/>
+            <a:off x="3246120" y="1143000"/>
+            <a:ext cx="2606040" cy="2377440"/>
           </a:xfrm>
           <a:prstGeom prst="roundRect">
             <a:avLst>
-              <a:gd name="adj" fmla="val 4103"/>
+              <a:gd name="adj" fmla="val 3077"/>
             </a:avLst>
           </a:prstGeom>
           <a:solidFill>
@@ -9754,14 +10431,14 @@
       </p:sp>
       <p:sp>
         <p:nvSpPr>
-          <p:cNvPr id="7" name="Text 4"/>
+          <p:cNvPr id="7" name="Text 5"/>
           <p:cNvSpPr txBox="1"/>
           <p:nvPr/>
         </p:nvSpPr>
         <p:spPr>
           <a:xfrm>
-            <a:off x="5989320" y="2834640"/>
-            <a:ext cx="2560320" cy="1554480"/>
+            <a:off x="3429000" y="1325880"/>
+            <a:ext cx="2240280" cy="731520"/>
           </a:xfrm>
           <a:prstGeom prst="rect">
             <a:avLst/>
@@ -9777,15 +10454,40 @@
               <a:buNone/>
             </a:pPr>
             <a:r>
-              <a:rPr lang="en-US" sz="1500" b="1" dirty="0">
-                <a:solidFill>
-                  <a:schemeClr val="tx1"/>
-                </a:solidFill>
+              <a:rPr lang="en-US" sz="3200" b="1" dirty="0">
+                <a:solidFill>
+                  <a:schemeClr val="accent3"/>
+                </a:solidFill>
+                <a:latin typeface="Cambria" pitchFamily="34" charset="0"/>
+                <a:ea typeface="Cambria" pitchFamily="34" charset="-122"/>
+                <a:cs typeface="Cambria" pitchFamily="34" charset="-120"/>
               </a:rPr>
-              <a:t>Detectors disagree</a:t>
-            </a:r>
-            <a:endParaRPr lang="en-US" sz="1500" dirty="0"/>
-          </a:p>
+              <a:t>14 vs 10</a:t>
+            </a:r>
+            <a:endParaRPr lang="en-US" sz="3200" dirty="0"/>
+          </a:p>
+        </p:txBody>
+      </p:sp>
+      <p:sp>
+        <p:nvSpPr>
+          <p:cNvPr id="8" name="Text 6"/>
+          <p:cNvSpPr txBox="1"/>
+          <p:nvPr/>
+        </p:nvSpPr>
+        <p:spPr>
+          <a:xfrm>
+            <a:off x="3429000" y="2148840"/>
+            <a:ext cx="2240280" cy="1234440"/>
+          </a:xfrm>
+          <a:prstGeom prst="rect">
+            <a:avLst/>
+          </a:prstGeom>
+          <a:noFill/>
+          <a:ln/>
+        </p:spPr>
+        <p:txBody>
+          <a:bodyPr wrap="square" lIns="0" tIns="0" rIns="0" bIns="0" rtlCol="0" anchor="t"/>
+          <a:lstStyle/>
           <a:p>
             <a:pPr indent="0" marL="0">
               <a:buNone/>
@@ -9793,10 +10495,148 @@
             <a:r>
               <a:rPr lang="en-US" sz="1500" dirty="0">
                 <a:solidFill>
-                  <a:schemeClr val="tx1"/>
+                  <a:schemeClr val="tx2"/>
                 </a:solidFill>
               </a:rPr>
-              <a:t>Cellpose 3D prefers blobs; watershed and Cellpose 2D prefer JPEG2000; all prefer JPEG2000 past 300×</a:t>
+              <a:t>hand-marked Drosophila nuclei in the top 100 detections: fitted blobs vs raw image</a:t>
+            </a:r>
+            <a:endParaRPr lang="en-US" sz="1500" dirty="0"/>
+          </a:p>
+        </p:txBody>
+      </p:sp>
+      <p:sp>
+        <p:nvSpPr>
+          <p:cNvPr id="9" name="check-2"/>
+          <p:cNvSpPr/>
+          <p:nvPr/>
+        </p:nvSpPr>
+        <p:spPr>
+          <a:xfrm>
+            <a:off x="6035040" y="1143000"/>
+            <a:ext cx="2606040" cy="2377440"/>
+          </a:xfrm>
+          <a:prstGeom prst="roundRect">
+            <a:avLst>
+              <a:gd name="adj" fmla="val 3077"/>
+            </a:avLst>
+          </a:prstGeom>
+          <a:solidFill>
+            <a:schemeClr val="bg2"/>
+          </a:solidFill>
+          <a:ln w="12700">
+            <a:solidFill>
+              <a:schemeClr val="bg2"/>
+            </a:solidFill>
+            <a:prstDash val="solid"/>
+          </a:ln>
+        </p:spPr>
+      </p:sp>
+      <p:sp>
+        <p:nvSpPr>
+          <p:cNvPr id="10" name="Text 8"/>
+          <p:cNvSpPr txBox="1"/>
+          <p:nvPr/>
+        </p:nvSpPr>
+        <p:spPr>
+          <a:xfrm>
+            <a:off x="6217920" y="1325880"/>
+            <a:ext cx="2240280" cy="731520"/>
+          </a:xfrm>
+          <a:prstGeom prst="rect">
+            <a:avLst/>
+          </a:prstGeom>
+          <a:noFill/>
+          <a:ln/>
+        </p:spPr>
+        <p:txBody>
+          <a:bodyPr wrap="square" lIns="0" tIns="0" rIns="0" bIns="0" rtlCol="0" anchor="t"/>
+          <a:lstStyle/>
+          <a:p>
+            <a:pPr indent="0" marL="0">
+              <a:buNone/>
+            </a:pPr>
+            <a:r>
+              <a:rPr lang="en-US" sz="3200" b="1" dirty="0">
+                <a:solidFill>
+                  <a:schemeClr val="accent3"/>
+                </a:solidFill>
+                <a:latin typeface="Cambria" pitchFamily="34" charset="0"/>
+                <a:ea typeface="Cambria" pitchFamily="34" charset="-122"/>
+                <a:cs typeface="Cambria" pitchFamily="34" charset="-120"/>
+              </a:rPr>
+              <a:t>≤ 4%</a:t>
+            </a:r>
+            <a:endParaRPr lang="en-US" sz="3200" dirty="0"/>
+          </a:p>
+        </p:txBody>
+      </p:sp>
+      <p:sp>
+        <p:nvSpPr>
+          <p:cNvPr id="11" name="Text 9"/>
+          <p:cNvSpPr txBox="1"/>
+          <p:nvPr/>
+        </p:nvSpPr>
+        <p:spPr>
+          <a:xfrm>
+            <a:off x="6217920" y="2148840"/>
+            <a:ext cx="2240280" cy="1234440"/>
+          </a:xfrm>
+          <a:prstGeom prst="rect">
+            <a:avLst/>
+          </a:prstGeom>
+          <a:noFill/>
+          <a:ln/>
+        </p:spPr>
+        <p:txBody>
+          <a:bodyPr wrap="square" lIns="0" tIns="0" rIns="0" bIns="0" rtlCol="0" anchor="t"/>
+          <a:lstStyle/>
+          <a:p>
+            <a:pPr indent="0" marL="0">
+              <a:buNone/>
+            </a:pPr>
+            <a:r>
+              <a:rPr lang="en-US" sz="1500" dirty="0">
+                <a:solidFill>
+                  <a:schemeClr val="tx2"/>
+                </a:solidFill>
+              </a:rPr>
+              <a:t>difference in nuclei found between three repeated fits</a:t>
+            </a:r>
+            <a:endParaRPr lang="en-US" sz="1500" dirty="0"/>
+          </a:p>
+        </p:txBody>
+      </p:sp>
+      <p:sp>
+        <p:nvSpPr>
+          <p:cNvPr id="12" name="Text 10"/>
+          <p:cNvSpPr txBox="1"/>
+          <p:nvPr/>
+        </p:nvSpPr>
+        <p:spPr>
+          <a:xfrm>
+            <a:off x="457200" y="3840480"/>
+            <a:ext cx="8229600" cy="548640"/>
+          </a:xfrm>
+          <a:prstGeom prst="rect">
+            <a:avLst/>
+          </a:prstGeom>
+          <a:noFill/>
+          <a:ln/>
+        </p:spPr>
+        <p:txBody>
+          <a:bodyPr wrap="square" lIns="0" tIns="0" rIns="0" bIns="0" rtlCol="0" anchor="t"/>
+          <a:lstStyle/>
+          <a:p>
+            <a:pPr indent="0" marL="0">
+              <a:buNone/>
+            </a:pPr>
+            <a:r>
+              <a:rPr lang="en-US" sz="1500" dirty="0">
+                <a:solidFill>
+                  <a:schemeClr val="tx2"/>
+                </a:solidFill>
+              </a:rPr>
+              <a:t>Limit: with all 457 of its candidates the raw-image detector finds 26 of 29, more than any fit.</a:t>
             </a:r>
             <a:endParaRPr lang="en-US" sz="1500" dirty="0"/>
           </a:p>
@@ -9904,15 +10744,51 @@
                   <a:schemeClr val="tx1"/>
                 </a:solidFill>
               </a:rPr>
-              <a:t>Below ~3 blobs per nucleus, nuclei vanish</a:t>
+              <a:t>Against the state of the art, at the same file size</a:t>
             </a:r>
             <a:endParaRPr lang="en-US" sz="2800" dirty="0"/>
+          </a:p>
+        </p:txBody>
+      </p:sp>
+      <p:sp>
+        <p:nvSpPr>
+          <p:cNvPr id="3" name="Text 1"/>
+          <p:cNvSpPr txBox="1"/>
+          <p:nvPr/>
+        </p:nvSpPr>
+        <p:spPr>
+          <a:xfrm>
+            <a:off x="457200" y="1024128"/>
+            <a:ext cx="2011680" cy="274320"/>
+          </a:xfrm>
+          <a:prstGeom prst="rect">
+            <a:avLst/>
+          </a:prstGeom>
+          <a:noFill/>
+          <a:ln/>
+        </p:spPr>
+        <p:txBody>
+          <a:bodyPr wrap="square" lIns="0" tIns="0" rIns="0" bIns="0" rtlCol="0" anchor="t"/>
+          <a:lstStyle/>
+          <a:p>
+            <a:pPr algn="ctr" indent="0" marL="0">
+              <a:buNone/>
+            </a:pPr>
+            <a:r>
+              <a:rPr lang="en-US" sz="1400" b="1" dirty="0">
+                <a:solidFill>
+                  <a:schemeClr val="tx1"/>
+                </a:solidFill>
+              </a:rPr>
+              <a:t>Original</a:t>
+            </a:r>
+            <a:endParaRPr lang="en-US" sz="1400" dirty="0"/>
           </a:p>
         </p:txBody>
       </p:sp>
       <p:pic>
         <p:nvPicPr>
-          <p:cNvPr id="3" name="cliff" descr="D:\masters\MLCV seminar\TeamProject\presentation\figs\cliff_deck.png">    </p:cNvPr>
+          <p:cNvPr id="4" name="four-raw" descr="D:\masters\MLCV seminar\TeamProject\presentation\figs\four_raw.png">    </p:cNvPr>
           <p:cNvPicPr>
             <a:picLocks noChangeAspect="1"/>
           </p:cNvPicPr>
@@ -9926,41 +10802,14 @@
         </p:blipFill>
         <p:spPr>
           <a:xfrm>
-            <a:off x="457200" y="1097280"/>
-            <a:ext cx="5257800" cy="3108960"/>
+            <a:off x="457200" y="1325880"/>
+            <a:ext cx="2011680" cy="1536192"/>
           </a:xfrm>
           <a:prstGeom prst="rect">
             <a:avLst/>
           </a:prstGeom>
         </p:spPr>
       </p:pic>
-      <p:sp>
-        <p:nvSpPr>
-          <p:cNvPr id="4" name="step-card-0"/>
-          <p:cNvSpPr/>
-          <p:nvPr/>
-        </p:nvSpPr>
-        <p:spPr>
-          <a:xfrm>
-            <a:off x="5897880" y="1051560"/>
-            <a:ext cx="2788920" cy="1143000"/>
-          </a:xfrm>
-          <a:prstGeom prst="roundRect">
-            <a:avLst>
-              <a:gd name="adj" fmla="val 6400"/>
-            </a:avLst>
-          </a:prstGeom>
-          <a:solidFill>
-            <a:schemeClr val="bg2"/>
-          </a:solidFill>
-          <a:ln w="12700">
-            <a:solidFill>
-              <a:schemeClr val="bg2"/>
-            </a:solidFill>
-            <a:prstDash val="solid"/>
-          </a:ln>
-        </p:spPr>
-      </p:sp>
       <p:sp>
         <p:nvSpPr>
           <p:cNvPr id="5" name="Text 2"/>
@@ -9969,8 +10818,296 @@
         </p:nvSpPr>
         <p:spPr>
           <a:xfrm>
-            <a:off x="6062472" y="1143000"/>
-            <a:ext cx="2459736" cy="228600"/>
+            <a:off x="2532888" y="1024128"/>
+            <a:ext cx="2011680" cy="274320"/>
+          </a:xfrm>
+          <a:prstGeom prst="rect">
+            <a:avLst/>
+          </a:prstGeom>
+          <a:noFill/>
+          <a:ln/>
+        </p:spPr>
+        <p:txBody>
+          <a:bodyPr wrap="square" lIns="0" tIns="0" rIns="0" bIns="0" rtlCol="0" anchor="t"/>
+          <a:lstStyle/>
+          <a:p>
+            <a:pPr algn="ctr" indent="0" marL="0">
+              <a:buNone/>
+            </a:pPr>
+            <a:r>
+              <a:rPr lang="en-US" sz="1400" b="1" dirty="0">
+                <a:solidFill>
+                  <a:schemeClr val="tx1"/>
+                </a:solidFill>
+              </a:rPr>
+              <a:t>JPEG-XL 82×</a:t>
+            </a:r>
+            <a:endParaRPr lang="en-US" sz="1400" dirty="0"/>
+          </a:p>
+        </p:txBody>
+      </p:sp>
+      <p:pic>
+        <p:nvPicPr>
+          <p:cNvPr id="6" name="four-jpegxl" descr="D:\masters\MLCV seminar\TeamProject\presentation\figs\four_jpegxl.png">    </p:cNvPr>
+          <p:cNvPicPr>
+            <a:picLocks noChangeAspect="1"/>
+          </p:cNvPicPr>
+          <p:nvPr/>
+        </p:nvPicPr>
+        <p:blipFill>
+          <a:blip r:embed="rId2"/>
+          <a:stretch>
+            <a:fillRect/>
+          </a:stretch>
+        </p:blipFill>
+        <p:spPr>
+          <a:xfrm>
+            <a:off x="2532888" y="1325880"/>
+            <a:ext cx="2011680" cy="1536192"/>
+          </a:xfrm>
+          <a:prstGeom prst="rect">
+            <a:avLst/>
+          </a:prstGeom>
+        </p:spPr>
+      </p:pic>
+      <p:sp>
+        <p:nvSpPr>
+          <p:cNvPr id="7" name="Text 3"/>
+          <p:cNvSpPr txBox="1"/>
+          <p:nvPr/>
+        </p:nvSpPr>
+        <p:spPr>
+          <a:xfrm>
+            <a:off x="2532888" y="2880360"/>
+            <a:ext cx="2011680" cy="256032"/>
+          </a:xfrm>
+          <a:prstGeom prst="rect">
+            <a:avLst/>
+          </a:prstGeom>
+          <a:noFill/>
+          <a:ln/>
+        </p:spPr>
+        <p:txBody>
+          <a:bodyPr wrap="square" lIns="0" tIns="0" rIns="0" bIns="0" rtlCol="0" anchor="t"/>
+          <a:lstStyle/>
+          <a:p>
+            <a:pPr algn="ctr" indent="0" marL="0">
+              <a:buNone/>
+            </a:pPr>
+            <a:r>
+              <a:rPr lang="en-US" sz="1200" dirty="0">
+                <a:solidFill>
+                  <a:schemeClr val="accent5"/>
+                </a:solidFill>
+              </a:rPr>
+              <a:t>100% of nuclei kept</a:t>
+            </a:r>
+            <a:endParaRPr lang="en-US" sz="1200" dirty="0"/>
+          </a:p>
+        </p:txBody>
+      </p:sp>
+      <p:sp>
+        <p:nvSpPr>
+          <p:cNvPr id="8" name="Text 4"/>
+          <p:cNvSpPr txBox="1"/>
+          <p:nvPr/>
+        </p:nvSpPr>
+        <p:spPr>
+          <a:xfrm>
+            <a:off x="4608576" y="1024128"/>
+            <a:ext cx="2011680" cy="274320"/>
+          </a:xfrm>
+          <a:prstGeom prst="rect">
+            <a:avLst/>
+          </a:prstGeom>
+          <a:noFill/>
+          <a:ln/>
+        </p:spPr>
+        <p:txBody>
+          <a:bodyPr wrap="square" lIns="0" tIns="0" rIns="0" bIns="0" rtlCol="0" anchor="t"/>
+          <a:lstStyle/>
+          <a:p>
+            <a:pPr algn="ctr" indent="0" marL="0">
+              <a:buNone/>
+            </a:pPr>
+            <a:r>
+              <a:rPr lang="en-US" sz="1400" b="1" dirty="0">
+                <a:solidFill>
+                  <a:schemeClr val="tx1"/>
+                </a:solidFill>
+              </a:rPr>
+              <a:t>JPEG2000 89×</a:t>
+            </a:r>
+            <a:endParaRPr lang="en-US" sz="1400" dirty="0"/>
+          </a:p>
+        </p:txBody>
+      </p:sp>
+      <p:pic>
+        <p:nvPicPr>
+          <p:cNvPr id="9" name="four-jpeg2k" descr="D:\masters\MLCV seminar\TeamProject\presentation\figs\four_jpeg2k.png">    </p:cNvPr>
+          <p:cNvPicPr>
+            <a:picLocks noChangeAspect="1"/>
+          </p:cNvPicPr>
+          <p:nvPr/>
+        </p:nvPicPr>
+        <p:blipFill>
+          <a:blip r:embed="rId3"/>
+          <a:stretch>
+            <a:fillRect/>
+          </a:stretch>
+        </p:blipFill>
+        <p:spPr>
+          <a:xfrm>
+            <a:off x="4608576" y="1325880"/>
+            <a:ext cx="2011680" cy="1536192"/>
+          </a:xfrm>
+          <a:prstGeom prst="rect">
+            <a:avLst/>
+          </a:prstGeom>
+        </p:spPr>
+      </p:pic>
+      <p:sp>
+        <p:nvSpPr>
+          <p:cNvPr id="10" name="Text 5"/>
+          <p:cNvSpPr txBox="1"/>
+          <p:nvPr/>
+        </p:nvSpPr>
+        <p:spPr>
+          <a:xfrm>
+            <a:off x="4608576" y="2880360"/>
+            <a:ext cx="2011680" cy="256032"/>
+          </a:xfrm>
+          <a:prstGeom prst="rect">
+            <a:avLst/>
+          </a:prstGeom>
+          <a:noFill/>
+          <a:ln/>
+        </p:spPr>
+        <p:txBody>
+          <a:bodyPr wrap="square" lIns="0" tIns="0" rIns="0" bIns="0" rtlCol="0" anchor="t"/>
+          <a:lstStyle/>
+          <a:p>
+            <a:pPr algn="ctr" indent="0" marL="0">
+              <a:buNone/>
+            </a:pPr>
+            <a:r>
+              <a:rPr lang="en-US" sz="1200" dirty="0">
+                <a:solidFill>
+                  <a:schemeClr val="accent5"/>
+                </a:solidFill>
+              </a:rPr>
+              <a:t>97% of nuclei kept</a:t>
+            </a:r>
+            <a:endParaRPr lang="en-US" sz="1200" dirty="0"/>
+          </a:p>
+        </p:txBody>
+      </p:sp>
+      <p:sp>
+        <p:nvSpPr>
+          <p:cNvPr id="11" name="Text 6"/>
+          <p:cNvSpPr txBox="1"/>
+          <p:nvPr/>
+        </p:nvSpPr>
+        <p:spPr>
+          <a:xfrm>
+            <a:off x="6684264" y="1024128"/>
+            <a:ext cx="2011680" cy="274320"/>
+          </a:xfrm>
+          <a:prstGeom prst="rect">
+            <a:avLst/>
+          </a:prstGeom>
+          <a:noFill/>
+          <a:ln/>
+        </p:spPr>
+        <p:txBody>
+          <a:bodyPr wrap="square" lIns="0" tIns="0" rIns="0" bIns="0" rtlCol="0" anchor="t"/>
+          <a:lstStyle/>
+          <a:p>
+            <a:pPr algn="ctr" indent="0" marL="0">
+              <a:buNone/>
+            </a:pPr>
+            <a:r>
+              <a:rPr lang="en-US" sz="1400" b="1" dirty="0">
+                <a:solidFill>
+                  <a:schemeClr val="tx1"/>
+                </a:solidFill>
+              </a:rPr>
+              <a:t>Luxar 89×</a:t>
+            </a:r>
+            <a:endParaRPr lang="en-US" sz="1400" dirty="0"/>
+          </a:p>
+        </p:txBody>
+      </p:sp>
+      <p:pic>
+        <p:nvPicPr>
+          <p:cNvPr id="12" name="four-luxar" descr="D:\masters\MLCV seminar\TeamProject\presentation\figs\four_luxar.png">    </p:cNvPr>
+          <p:cNvPicPr>
+            <a:picLocks noChangeAspect="1"/>
+          </p:cNvPicPr>
+          <p:nvPr/>
+        </p:nvPicPr>
+        <p:blipFill>
+          <a:blip r:embed="rId4"/>
+          <a:stretch>
+            <a:fillRect/>
+          </a:stretch>
+        </p:blipFill>
+        <p:spPr>
+          <a:xfrm>
+            <a:off x="6684264" y="1325880"/>
+            <a:ext cx="2011680" cy="1536192"/>
+          </a:xfrm>
+          <a:prstGeom prst="rect">
+            <a:avLst/>
+          </a:prstGeom>
+        </p:spPr>
+      </p:pic>
+      <p:sp>
+        <p:nvSpPr>
+          <p:cNvPr id="13" name="Text 7"/>
+          <p:cNvSpPr txBox="1"/>
+          <p:nvPr/>
+        </p:nvSpPr>
+        <p:spPr>
+          <a:xfrm>
+            <a:off x="6684264" y="2880360"/>
+            <a:ext cx="2011680" cy="256032"/>
+          </a:xfrm>
+          <a:prstGeom prst="rect">
+            <a:avLst/>
+          </a:prstGeom>
+          <a:noFill/>
+          <a:ln/>
+        </p:spPr>
+        <p:txBody>
+          <a:bodyPr wrap="square" lIns="0" tIns="0" rIns="0" bIns="0" rtlCol="0" anchor="t"/>
+          <a:lstStyle/>
+          <a:p>
+            <a:pPr algn="ctr" indent="0" marL="0">
+              <a:buNone/>
+            </a:pPr>
+            <a:r>
+              <a:rPr lang="en-US" sz="1200" dirty="0">
+                <a:solidFill>
+                  <a:schemeClr val="accent5"/>
+                </a:solidFill>
+              </a:rPr>
+              <a:t>88% of nuclei kept</a:t>
+            </a:r>
+            <a:endParaRPr lang="en-US" sz="1200" dirty="0"/>
+          </a:p>
+        </p:txBody>
+      </p:sp>
+      <p:sp>
+        <p:nvSpPr>
+          <p:cNvPr id="14" name="Text 8"/>
+          <p:cNvSpPr txBox="1"/>
+          <p:nvPr/>
+        </p:nvSpPr>
+        <p:spPr>
+          <a:xfrm>
+            <a:off x="457200" y="3291840"/>
+            <a:ext cx="2606040" cy="1188720"/>
           </a:xfrm>
           <a:prstGeom prst="rect">
             <a:avLst/>
@@ -9986,90 +11123,41 @@
               <a:buNone/>
             </a:pPr>
             <a:r>
-              <a:rPr lang="en-US" sz="1200" b="1" dirty="0">
-                <a:solidFill>
-                  <a:schemeClr val="accent1"/>
+              <a:rPr lang="en-US" sz="1500" b="1" dirty="0">
+                <a:solidFill>
+                  <a:srgbClr val="E8730C"/>
                 </a:solidFill>
               </a:rPr>
-              <a:t>WHAT WE SEE</a:t>
-            </a:r>
-            <a:endParaRPr lang="en-US" sz="1200" dirty="0"/>
-          </a:p>
-        </p:txBody>
-      </p:sp>
-      <p:sp>
-        <p:nvSpPr>
-          <p:cNvPr id="6" name="Text 3"/>
-          <p:cNvSpPr txBox="1"/>
-          <p:nvPr/>
-        </p:nvSpPr>
-        <p:spPr>
-          <a:xfrm>
-            <a:off x="6062472" y="1399032"/>
-            <a:ext cx="2459736" cy="722376"/>
-          </a:xfrm>
-          <a:prstGeom prst="rect">
-            <a:avLst/>
-          </a:prstGeom>
-          <a:noFill/>
-          <a:ln/>
-        </p:spPr>
-        <p:txBody>
-          <a:bodyPr wrap="square" lIns="0" tIns="0" rIns="0" bIns="0" rtlCol="0" anchor="t"/>
-          <a:lstStyle/>
+              <a:t>Luxar (2026)</a:t>
+            </a:r>
+            <a:endParaRPr lang="en-US" sz="1500" dirty="0"/>
+          </a:p>
           <a:p>
             <a:pPr indent="0" marL="0">
               <a:buNone/>
             </a:pPr>
             <a:r>
-              <a:rPr lang="en-US" sz="1400" dirty="0">
+              <a:rPr lang="en-US" sz="1500" dirty="0">
                 <a:solidFill>
                   <a:schemeClr val="tx1"/>
                 </a:solidFill>
               </a:rPr>
-              <a:t>Nuclei kept drops below 90% at 1.1-3.1 blobs per nucleus, on all 12 frames</a:t>
-            </a:r>
-            <a:endParaRPr lang="en-US" sz="1400" dirty="0"/>
-          </a:p>
-        </p:txBody>
-      </p:sp>
-      <p:sp>
-        <p:nvSpPr>
-          <p:cNvPr id="7" name="step-card-1"/>
-          <p:cNvSpPr/>
-          <p:nvPr/>
-        </p:nvSpPr>
-        <p:spPr>
-          <a:xfrm>
-            <a:off x="5897880" y="2258568"/>
-            <a:ext cx="2788920" cy="1143000"/>
-          </a:xfrm>
-          <a:prstGeom prst="roundRect">
-            <a:avLst>
-              <a:gd name="adj" fmla="val 6400"/>
-            </a:avLst>
-          </a:prstGeom>
-          <a:solidFill>
-            <a:schemeClr val="bg2"/>
-          </a:solidFill>
-          <a:ln w="12700">
-            <a:solidFill>
-              <a:schemeClr val="bg2"/>
-            </a:solidFill>
-            <a:prstDash val="solid"/>
-          </a:ln>
-        </p:spPr>
-      </p:sp>
-      <p:sp>
-        <p:nvSpPr>
-          <p:cNvPr id="8" name="Text 5"/>
+              <a:t>state-of-the-art Gaussian-blob tool for microscopy</a:t>
+            </a:r>
+            <a:endParaRPr lang="en-US" sz="1500" dirty="0"/>
+          </a:p>
+        </p:txBody>
+      </p:sp>
+      <p:sp>
+        <p:nvSpPr>
+          <p:cNvPr id="15" name="Text 9"/>
           <p:cNvSpPr txBox="1"/>
           <p:nvPr/>
         </p:nvSpPr>
         <p:spPr>
           <a:xfrm>
-            <a:off x="6062472" y="2350008"/>
-            <a:ext cx="2459736" cy="228600"/>
+            <a:off x="3246120" y="3291840"/>
+            <a:ext cx="2606040" cy="1188720"/>
           </a:xfrm>
           <a:prstGeom prst="rect">
             <a:avLst/>
@@ -10085,90 +11173,41 @@
               <a:buNone/>
             </a:pPr>
             <a:r>
-              <a:rPr lang="en-US" sz="1200" b="1" dirty="0">
-                <a:solidFill>
-                  <a:schemeClr val="accent1"/>
+              <a:rPr lang="en-US" sz="1500" b="1" dirty="0">
+                <a:solidFill>
+                  <a:srgbClr val="E8730C"/>
                 </a:solidFill>
               </a:rPr>
-              <a:t>PSNR</a:t>
-            </a:r>
-            <a:endParaRPr lang="en-US" sz="1200" dirty="0"/>
-          </a:p>
-        </p:txBody>
-      </p:sp>
-      <p:sp>
-        <p:nvSpPr>
-          <p:cNvPr id="9" name="Text 6"/>
-          <p:cNvSpPr txBox="1"/>
-          <p:nvPr/>
-        </p:nvSpPr>
-        <p:spPr>
-          <a:xfrm>
-            <a:off x="6062472" y="2606040"/>
-            <a:ext cx="2459736" cy="722376"/>
-          </a:xfrm>
-          <a:prstGeom prst="rect">
-            <a:avLst/>
-          </a:prstGeom>
-          <a:noFill/>
-          <a:ln/>
-        </p:spPr>
-        <p:txBody>
-          <a:bodyPr wrap="square" lIns="0" tIns="0" rIns="0" bIns="0" rtlCol="0" anchor="t"/>
-          <a:lstStyle/>
+              <a:t>JPEG2000</a:t>
+            </a:r>
+            <a:endParaRPr lang="en-US" sz="1500" dirty="0"/>
+          </a:p>
           <a:p>
             <a:pPr indent="0" marL="0">
               <a:buNone/>
             </a:pPr>
             <a:r>
-              <a:rPr lang="en-US" sz="1400" dirty="0">
+              <a:rPr lang="en-US" sz="1500" dirty="0">
                 <a:solidFill>
                   <a:schemeClr val="tx1"/>
                 </a:solidFill>
               </a:rPr>
-              <a:t>Barely moves over these budgets: at most 2.6 dB per frame</a:t>
-            </a:r>
-            <a:endParaRPr lang="en-US" sz="1400" dirty="0"/>
-          </a:p>
-        </p:txBody>
-      </p:sp>
-      <p:sp>
-        <p:nvSpPr>
-          <p:cNvPr id="10" name="step-card-2"/>
-          <p:cNvSpPr/>
-          <p:nvPr/>
-        </p:nvSpPr>
-        <p:spPr>
-          <a:xfrm>
-            <a:off x="5897880" y="3465576"/>
-            <a:ext cx="2788920" cy="1143000"/>
-          </a:xfrm>
-          <a:prstGeom prst="roundRect">
-            <a:avLst>
-              <a:gd name="adj" fmla="val 6400"/>
-            </a:avLst>
-          </a:prstGeom>
-          <a:solidFill>
-            <a:schemeClr val="bg2"/>
-          </a:solidFill>
-          <a:ln w="12700">
-            <a:solidFill>
-              <a:schemeClr val="bg2"/>
-            </a:solidFill>
-            <a:prstDash val="solid"/>
-          </a:ln>
-        </p:spPr>
-      </p:sp>
-      <p:sp>
-        <p:nvSpPr>
-          <p:cNvPr id="11" name="Text 8"/>
+              <a:t>standard image compression, set to exactly the same file size</a:t>
+            </a:r>
+            <a:endParaRPr lang="en-US" sz="1500" dirty="0"/>
+          </a:p>
+        </p:txBody>
+      </p:sp>
+      <p:sp>
+        <p:nvSpPr>
+          <p:cNvPr id="16" name="Text 10"/>
           <p:cNvSpPr txBox="1"/>
           <p:nvPr/>
         </p:nvSpPr>
         <p:spPr>
           <a:xfrm>
-            <a:off x="6062472" y="3557016"/>
-            <a:ext cx="2459736" cy="228600"/>
+            <a:off x="6035040" y="3291840"/>
+            <a:ext cx="2606040" cy="1188720"/>
           </a:xfrm>
           <a:prstGeom prst="rect">
             <a:avLst/>
@@ -10184,50 +11223,28 @@
               <a:buNone/>
             </a:pPr>
             <a:r>
-              <a:rPr lang="en-US" sz="1200" b="1" dirty="0">
-                <a:solidFill>
-                  <a:schemeClr val="accent1"/>
+              <a:rPr lang="en-US" sz="1500" b="1" dirty="0">
+                <a:solidFill>
+                  <a:srgbClr val="E8730C"/>
                 </a:solidFill>
               </a:rPr>
-              <a:t>SO</a:t>
-            </a:r>
-            <a:endParaRPr lang="en-US" sz="1200" dirty="0"/>
-          </a:p>
-        </p:txBody>
-      </p:sp>
-      <p:sp>
-        <p:nvSpPr>
-          <p:cNvPr id="12" name="Text 9"/>
-          <p:cNvSpPr txBox="1"/>
-          <p:nvPr/>
-        </p:nvSpPr>
-        <p:spPr>
-          <a:xfrm>
-            <a:off x="6062472" y="3813048"/>
-            <a:ext cx="2459736" cy="722376"/>
-          </a:xfrm>
-          <a:prstGeom prst="rect">
-            <a:avLst/>
-          </a:prstGeom>
-          <a:noFill/>
-          <a:ln/>
-        </p:spPr>
-        <p:txBody>
-          <a:bodyPr wrap="square" lIns="0" tIns="0" rIns="0" bIns="0" rtlCol="0" anchor="t"/>
-          <a:lstStyle/>
+              <a:t>Test</a:t>
+            </a:r>
+            <a:endParaRPr lang="en-US" sz="1500" dirty="0"/>
+          </a:p>
           <a:p>
             <a:pPr indent="0" marL="0">
               <a:buNone/>
             </a:pPr>
             <a:r>
-              <a:rPr lang="en-US" sz="1400" dirty="0">
+              <a:rPr lang="en-US" sz="1500" dirty="0">
                 <a:solidFill>
                   <a:schemeClr val="tx1"/>
                 </a:solidFill>
               </a:rPr>
-              <a:t>Image quality cannot tell you when the blob budget is too small</a:t>
-            </a:r>
-            <a:endParaRPr lang="en-US" sz="1400" dirty="0"/>
+              <a:t>12 C. elegans frames, 2,958 hand-marked nuclei, 4 nucleus detectors</a:t>
+            </a:r>
+            <a:endParaRPr lang="en-US" sz="1500" dirty="0"/>
           </a:p>
         </p:txBody>
       </p:sp>
@@ -10311,8 +11328,8 @@
         </p:nvSpPr>
         <p:spPr>
           <a:xfrm>
-            <a:off x="548640" y="411480"/>
-            <a:ext cx="5486400" cy="731520"/>
+            <a:off x="457200" y="256032"/>
+            <a:ext cx="8229600" cy="640080"/>
           </a:xfrm>
           <a:prstGeom prst="rect">
             <a:avLst/>
@@ -10328,29 +11345,70 @@
               <a:buNone/>
             </a:pPr>
             <a:r>
-              <a:rPr lang="en-US" sz="3200" b="1" dirty="0">
-                <a:solidFill>
-                  <a:schemeClr val="bg1"/>
+              <a:rPr lang="en-US" sz="2800" b="1" dirty="0">
+                <a:solidFill>
+                  <a:schemeClr val="tx1"/>
                 </a:solidFill>
               </a:rPr>
-              <a:t>What we learned</a:t>
-            </a:r>
-            <a:endParaRPr lang="en-US" sz="3200" dirty="0"/>
-          </a:p>
-        </p:txBody>
-      </p:sp>
-      <p:sp>
-        <p:nvSpPr>
-          <p:cNvPr id="3" name="Text 0"/>
+              <a:t>Same file size: the winner depends on the detector</a:t>
+            </a:r>
+            <a:endParaRPr lang="en-US" sz="2800" dirty="0"/>
+          </a:p>
+        </p:txBody>
+      </p:sp>
+      <p:graphicFrame>
+        <p:nvGraphicFramePr>
+          <p:cNvPr id="3" name="Chart 0" descr=""/>
+          <p:cNvGraphicFramePr/>
+          <p:nvPr/>
+        </p:nvGraphicFramePr>
+        <p:xfrm>
+          <a:off x="457200" y="1051560"/>
+          <a:ext cx="5120640" cy="3429000"/>
+        </p:xfrm>
+        <a:graphic xmlns:a="http://schemas.openxmlformats.org/drawingml/2006/main">
+          <a:graphicData uri="http://schemas.openxmlformats.org/drawingml/2006/chart">
+            <c:chart xmlns:c="http://schemas.openxmlformats.org/drawingml/2006/chart" r:id="rId1"/>
+          </a:graphicData>
+        </a:graphic>
+      </p:graphicFrame>
+      <p:sp>
+        <p:nvSpPr>
+          <p:cNvPr id="4" name="psnr-card"/>
           <p:cNvSpPr/>
-          <p:nvPr>
-            <p:ph idx="101" type="body" hasCustomPrompt="1"/>
-          </p:nvPr>
-        </p:nvSpPr>
-        <p:spPr>
-          <a:xfrm>
-            <a:off x="548640" y="1371600"/>
-            <a:ext cx="5486400" cy="3200400"/>
+          <p:nvPr/>
+        </p:nvSpPr>
+        <p:spPr>
+          <a:xfrm>
+            <a:off x="5806440" y="1143000"/>
+            <a:ext cx="2880360" cy="1417320"/>
+          </a:xfrm>
+          <a:prstGeom prst="roundRect">
+            <a:avLst>
+              <a:gd name="adj" fmla="val 5161"/>
+            </a:avLst>
+          </a:prstGeom>
+          <a:solidFill>
+            <a:schemeClr val="bg2"/>
+          </a:solidFill>
+          <a:ln w="12700">
+            <a:solidFill>
+              <a:schemeClr val="bg2"/>
+            </a:solidFill>
+            <a:prstDash val="solid"/>
+          </a:ln>
+        </p:spPr>
+      </p:sp>
+      <p:sp>
+        <p:nvSpPr>
+          <p:cNvPr id="5" name="Text 2"/>
+          <p:cNvSpPr txBox="1"/>
+          <p:nvPr/>
+        </p:nvSpPr>
+        <p:spPr>
+          <a:xfrm>
+            <a:off x="5989320" y="1298448"/>
+            <a:ext cx="2560320" cy="1097280"/>
           </a:xfrm>
           <a:prstGeom prst="rect">
             <a:avLst/>
@@ -10362,85 +11420,157 @@
           <a:bodyPr wrap="square" lIns="0" tIns="0" rIns="0" bIns="0" rtlCol="0" anchor="t"/>
           <a:lstStyle/>
           <a:p>
-            <a:pPr algn="l" marL="342900" indent="-342900">
-              <a:spcAft>
-                <a:spcPts val="1400"/>
-              </a:spcAft>
-              <a:buSzPct val="100000"/>
-              <a:buChar char="•"/>
+            <a:pPr indent="0" marL="0">
+              <a:buNone/>
             </a:pPr>
             <a:r>
-              <a:rPr lang="en-US" sz="1700" dirty="0">
-                <a:solidFill>
-                  <a:srgbClr val="E5E7EB"/>
+              <a:rPr lang="en-US" sz="1800" b="1" dirty="0">
+                <a:solidFill>
+                  <a:schemeClr val="tx1"/>
                 </a:solidFill>
               </a:rPr>
-              <a:t>Shape, starting points, step size and a size cap each made the fit find more nuclei.</a:t>
-            </a:r>
-            <a:endParaRPr lang="en-US" sz="1700" dirty="0"/>
-          </a:p>
-          <a:p>
-            <a:pPr algn="l" marL="342900" indent="-342900">
-              <a:spcAft>
-                <a:spcPts val="1400"/>
-              </a:spcAft>
-              <a:buSzPct val="100000"/>
-              <a:buChar char="•"/>
+              <a:t>PSNR: JPEG2000 better</a:t>
+            </a:r>
+            <a:endParaRPr lang="en-US" sz="1800" dirty="0"/>
+          </a:p>
+          <a:p>
+            <a:pPr indent="0" marL="0">
+              <a:buNone/>
             </a:pPr>
             <a:r>
-              <a:rPr lang="en-US" sz="1700" dirty="0">
-                <a:solidFill>
-                  <a:srgbClr val="E5E7EB"/>
+              <a:rPr lang="en-US" sz="1800" dirty="0">
+                <a:solidFill>
+                  <a:schemeClr val="tx1"/>
                 </a:solidFill>
               </a:rPr>
-              <a:t>Blobs are good for looking, not for measuring: at the same file size a standard codec keeps nuclei as well or better.</a:t>
-            </a:r>
-            <a:endParaRPr lang="en-US" sz="1700" dirty="0"/>
-          </a:p>
-          <a:p>
-            <a:pPr algn="l" marL="342900" indent="-342900">
-              <a:spcAft>
-                <a:spcPts val="1400"/>
-              </a:spcAft>
-              <a:buSzPct val="100000"/>
-              <a:buChar char="•"/>
+              <a:t>on 12 of 12 frames</a:t>
+            </a:r>
+            <a:endParaRPr lang="en-US" sz="1800" dirty="0"/>
+          </a:p>
+        </p:txBody>
+      </p:sp>
+      <p:sp>
+        <p:nvSpPr>
+          <p:cNvPr id="6" name="detectors-card"/>
+          <p:cNvSpPr/>
+          <p:nvPr/>
+        </p:nvSpPr>
+        <p:spPr>
+          <a:xfrm>
+            <a:off x="5806440" y="2697480"/>
+            <a:ext cx="2880360" cy="1783080"/>
+          </a:xfrm>
+          <a:prstGeom prst="roundRect">
+            <a:avLst>
+              <a:gd name="adj" fmla="val 4103"/>
+            </a:avLst>
+          </a:prstGeom>
+          <a:solidFill>
+            <a:schemeClr val="bg2"/>
+          </a:solidFill>
+          <a:ln w="12700">
+            <a:solidFill>
+              <a:schemeClr val="bg2"/>
+            </a:solidFill>
+            <a:prstDash val="solid"/>
+          </a:ln>
+        </p:spPr>
+      </p:sp>
+      <p:sp>
+        <p:nvSpPr>
+          <p:cNvPr id="7" name="Text 4"/>
+          <p:cNvSpPr txBox="1"/>
+          <p:nvPr/>
+        </p:nvSpPr>
+        <p:spPr>
+          <a:xfrm>
+            <a:off x="5989320" y="2834640"/>
+            <a:ext cx="2560320" cy="1554480"/>
+          </a:xfrm>
+          <a:prstGeom prst="rect">
+            <a:avLst/>
+          </a:prstGeom>
+          <a:noFill/>
+          <a:ln/>
+        </p:spPr>
+        <p:txBody>
+          <a:bodyPr wrap="square" lIns="0" tIns="0" rIns="0" bIns="0" rtlCol="0" anchor="t"/>
+          <a:lstStyle/>
+          <a:p>
+            <a:pPr indent="0" marL="0">
+              <a:buNone/>
             </a:pPr>
             <a:r>
-              <a:rPr lang="en-US" sz="1700" dirty="0">
-                <a:solidFill>
-                  <a:srgbClr val="E5E7EB"/>
+              <a:rPr lang="en-US" sz="1500" b="1" dirty="0">
+                <a:solidFill>
+                  <a:schemeClr val="tx1"/>
                 </a:solidFill>
               </a:rPr>
-              <a:t>PSNR cannot choose the format: test with the analysis you will actually run.</a:t>
-            </a:r>
-            <a:endParaRPr lang="en-US" sz="1700" dirty="0"/>
-          </a:p>
-        </p:txBody>
-      </p:sp>
-      <p:pic>
-        <p:nvPicPr>
-          <p:cNvPr id="4" name="end-tribolium" descr="D:\masters\MLCV seminar\TeamProject\presentation\figs\title_tribolium.png">    </p:cNvPr>
-          <p:cNvPicPr>
-            <a:picLocks noChangeAspect="1"/>
-          </p:cNvPicPr>
-          <p:nvPr/>
-        </p:nvPicPr>
-        <p:blipFill>
-          <a:blip r:embed="rId1"/>
-          <a:stretch>
-            <a:fillRect/>
-          </a:stretch>
-        </p:blipFill>
-        <p:spPr>
-          <a:xfrm>
-            <a:off x="6446520" y="320040"/>
-            <a:ext cx="2331720" cy="4434840"/>
-          </a:xfrm>
-          <a:prstGeom prst="rect">
-            <a:avLst/>
-          </a:prstGeom>
-        </p:spPr>
-      </p:pic>
+              <a:t>Detectors disagree</a:t>
+            </a:r>
+            <a:endParaRPr lang="en-US" sz="1500" dirty="0"/>
+          </a:p>
+          <a:p>
+            <a:pPr indent="0" marL="0">
+              <a:buNone/>
+            </a:pPr>
+            <a:r>
+              <a:rPr lang="en-US" sz="1500" dirty="0">
+                <a:solidFill>
+                  <a:schemeClr val="tx1"/>
+                </a:solidFill>
+              </a:rPr>
+              <a:t>Cellpose 3D prefers blobs; watershed and Cellpose 2D prefer JPEG2000; all prefer JPEG2000 past 300×</a:t>
+            </a:r>
+            <a:endParaRPr lang="en-US" sz="1500" dirty="0"/>
+          </a:p>
+        </p:txBody>
+      </p:sp>
+      <p:sp>
+        <p:nvSpPr>
+          <p:cNvPr id="25" name="Slide Number Placeholder 0"/>
+          <p:cNvSpPr>
+            <a:spLocks noGrp="1"/>
+          </p:cNvSpPr>
+          <p:nvPr>
+            <p:ph type="sldNum" sz="quarter" idx="4294967295"/>
+          </p:nvPr>
+        </p:nvSpPr>
+        <p:spPr>
+          <a:xfrm>
+            <a:off x="8229600" y="4754880"/>
+            <a:ext cx="457200" cy="228600"/>
+          </a:xfrm>
+          <a:prstGeom prst="rect">
+            <a:avLst/>
+          </a:prstGeom>
+          <a:extLst>
+            <a:ext uri="{C572A759-6A51-4108-AA02-DFA0A04FC94B}">
+              <ma14:wrappingTextBoxFlag xmlns:ma14="http://schemas.microsoft.com/office/mac/drawingml/2011/main" val="0"/>
+            </a:ext>
+          </a:extLst>
+        </p:spPr>
+        <p:txBody>
+          <a:bodyPr/>
+          <a:lstStyle>
+            <a:lvl1pPr>
+              <a:defRPr sz="900">
+                <a:solidFill>
+                  <a:schemeClr val="accent5"/>
+                </a:solidFill>
+              </a:defRPr>
+            </a:lvl1pPr>
+          </a:lstStyle>
+          <a:p>
+            <a:pPr algn="r"/>
+            <a:fld id="{F7021451-1387-4CA6-816F-3879F97B5CBC}" type="slidenum">
+              <a:rPr b="0" lang="en-US"/>
+              <a:t>17</a:t>
+            </a:fld>
+            <a:endParaRPr lang="en-US"/>
+          </a:p>
+        </p:txBody>
+      </p:sp>
     </p:spTree>
   </p:cSld>
   <p:clrMapOvr>
@@ -10498,32 +11628,58 @@
                   <a:schemeClr val="tx1"/>
                 </a:solidFill>
               </a:rPr>
-              <a:t>Next: compression that biologists can use</a:t>
+              <a:t>Below ~3 blobs per nucleus, nuclei vanish</a:t>
             </a:r>
             <a:endParaRPr lang="en-US" sz="2800" dirty="0"/>
           </a:p>
         </p:txBody>
       </p:sp>
-      <p:sp>
-        <p:nvSpPr>
-          <p:cNvPr id="3" name="num-0"/>
+      <p:pic>
+        <p:nvPicPr>
+          <p:cNvPr id="3" name="cliff" descr="D:\masters\MLCV seminar\TeamProject\presentation\figs\cliff_deck.png">    </p:cNvPr>
+          <p:cNvPicPr>
+            <a:picLocks noChangeAspect="1"/>
+          </p:cNvPicPr>
+          <p:nvPr/>
+        </p:nvPicPr>
+        <p:blipFill>
+          <a:blip r:embed="rId1"/>
+          <a:stretch>
+            <a:fillRect/>
+          </a:stretch>
+        </p:blipFill>
+        <p:spPr>
+          <a:xfrm>
+            <a:off x="457200" y="1097280"/>
+            <a:ext cx="5257800" cy="3108960"/>
+          </a:xfrm>
+          <a:prstGeom prst="rect">
+            <a:avLst/>
+          </a:prstGeom>
+        </p:spPr>
+      </p:pic>
+      <p:sp>
+        <p:nvSpPr>
+          <p:cNvPr id="4" name="step-card-0"/>
           <p:cNvSpPr/>
           <p:nvPr/>
         </p:nvSpPr>
         <p:spPr>
           <a:xfrm>
-            <a:off x="457200" y="1188720"/>
-            <a:ext cx="548640" cy="548640"/>
-          </a:xfrm>
-          <a:prstGeom prst="ellipse">
-            <a:avLst/>
+            <a:off x="5897880" y="1051560"/>
+            <a:ext cx="2788920" cy="1143000"/>
+          </a:xfrm>
+          <a:prstGeom prst="roundRect">
+            <a:avLst>
+              <a:gd name="adj" fmla="val 6400"/>
+            </a:avLst>
           </a:prstGeom>
           <a:solidFill>
-            <a:schemeClr val="accent1"/>
+            <a:schemeClr val="bg2"/>
           </a:solidFill>
           <a:ln w="12700">
             <a:solidFill>
-              <a:schemeClr val="accent1"/>
+              <a:schemeClr val="bg2"/>
             </a:solidFill>
             <a:prstDash val="solid"/>
           </a:ln>
@@ -10531,50 +11687,14 @@
       </p:sp>
       <p:sp>
         <p:nvSpPr>
-          <p:cNvPr id="4" name="Text 2"/>
+          <p:cNvPr id="5" name="Text 2"/>
           <p:cNvSpPr txBox="1"/>
           <p:nvPr/>
         </p:nvSpPr>
         <p:spPr>
           <a:xfrm>
-            <a:off x="457200" y="1188720"/>
-            <a:ext cx="548640" cy="548640"/>
-          </a:xfrm>
-          <a:prstGeom prst="rect">
-            <a:avLst/>
-          </a:prstGeom>
-          <a:noFill/>
-          <a:ln/>
-        </p:spPr>
-        <p:txBody>
-          <a:bodyPr wrap="square" lIns="0" tIns="0" rIns="0" bIns="0" rtlCol="0" anchor="ctr"/>
-          <a:lstStyle/>
-          <a:p>
-            <a:pPr algn="ctr" indent="0" marL="0">
-              <a:buNone/>
-            </a:pPr>
-            <a:r>
-              <a:rPr lang="en-US" sz="2000" b="1" dirty="0">
-                <a:solidFill>
-                  <a:schemeClr val="bg1"/>
-                </a:solidFill>
-              </a:rPr>
-              <a:t>1</a:t>
-            </a:r>
-            <a:endParaRPr lang="en-US" sz="2000" dirty="0"/>
-          </a:p>
-        </p:txBody>
-      </p:sp>
-      <p:sp>
-        <p:nvSpPr>
-          <p:cNvPr id="5" name="Text 3"/>
-          <p:cNvSpPr txBox="1"/>
-          <p:nvPr/>
-        </p:nvSpPr>
-        <p:spPr>
-          <a:xfrm>
-            <a:off x="1234440" y="1143000"/>
-            <a:ext cx="7406640" cy="914400"/>
+            <a:off x="6062472" y="1143000"/>
+            <a:ext cx="2459736" cy="228600"/>
           </a:xfrm>
           <a:prstGeom prst="rect">
             <a:avLst/>
@@ -10590,51 +11710,75 @@
               <a:buNone/>
             </a:pPr>
             <a:r>
-              <a:rPr lang="en-US" sz="1700" b="1" dirty="0">
-                <a:solidFill>
-                  <a:schemeClr val="tx1"/>
+              <a:rPr lang="en-US" sz="1200" b="1" dirty="0">
+                <a:solidFill>
+                  <a:schemeClr val="accent1"/>
                 </a:solidFill>
               </a:rPr>
-              <a:t>Lossless and near-lossless</a:t>
-            </a:r>
-            <a:endParaRPr lang="en-US" sz="1700" dirty="0"/>
-          </a:p>
+              <a:t>WHAT WE SEE</a:t>
+            </a:r>
+            <a:endParaRPr lang="en-US" sz="1200" dirty="0"/>
+          </a:p>
+        </p:txBody>
+      </p:sp>
+      <p:sp>
+        <p:nvSpPr>
+          <p:cNvPr id="6" name="Text 3"/>
+          <p:cNvSpPr txBox="1"/>
+          <p:nvPr/>
+        </p:nvSpPr>
+        <p:spPr>
+          <a:xfrm>
+            <a:off x="6062472" y="1399032"/>
+            <a:ext cx="2459736" cy="722376"/>
+          </a:xfrm>
+          <a:prstGeom prst="rect">
+            <a:avLst/>
+          </a:prstGeom>
+          <a:noFill/>
+          <a:ln/>
+        </p:spPr>
+        <p:txBody>
+          <a:bodyPr wrap="square" lIns="0" tIns="0" rIns="0" bIns="0" rtlCol="0" anchor="t"/>
+          <a:lstStyle/>
           <a:p>
             <a:pPr indent="0" marL="0">
               <a:buNone/>
             </a:pPr>
             <a:r>
-              <a:rPr lang="en-US" sz="1700" dirty="0">
-                <a:solidFill>
-                  <a:srgbClr val="3A3F4B"/>
+              <a:rPr lang="en-US" sz="1400" dirty="0">
+                <a:solidFill>
+                  <a:schemeClr val="tx1"/>
                 </a:solidFill>
               </a:rPr>
-              <a:t>what labs actually store: exact, or errors kept below the camera noise</a:t>
-            </a:r>
-            <a:endParaRPr lang="en-US" sz="1700" dirty="0"/>
-          </a:p>
-        </p:txBody>
-      </p:sp>
-      <p:sp>
-        <p:nvSpPr>
-          <p:cNvPr id="6" name="num-1"/>
+              <a:t>Nuclei kept drops below 90% at 1.1-3.1 blobs per nucleus, on all 12 frames</a:t>
+            </a:r>
+            <a:endParaRPr lang="en-US" sz="1400" dirty="0"/>
+          </a:p>
+        </p:txBody>
+      </p:sp>
+      <p:sp>
+        <p:nvSpPr>
+          <p:cNvPr id="7" name="step-card-1"/>
           <p:cNvSpPr/>
           <p:nvPr/>
         </p:nvSpPr>
         <p:spPr>
           <a:xfrm>
-            <a:off x="457200" y="2286000"/>
-            <a:ext cx="548640" cy="548640"/>
-          </a:xfrm>
-          <a:prstGeom prst="ellipse">
-            <a:avLst/>
+            <a:off x="5897880" y="2258568"/>
+            <a:ext cx="2788920" cy="1143000"/>
+          </a:xfrm>
+          <a:prstGeom prst="roundRect">
+            <a:avLst>
+              <a:gd name="adj" fmla="val 6400"/>
+            </a:avLst>
           </a:prstGeom>
           <a:solidFill>
-            <a:schemeClr val="accent1"/>
+            <a:schemeClr val="bg2"/>
           </a:solidFill>
           <a:ln w="12700">
             <a:solidFill>
-              <a:schemeClr val="accent1"/>
+              <a:schemeClr val="bg2"/>
             </a:solidFill>
             <a:prstDash val="solid"/>
           </a:ln>
@@ -10642,50 +11786,14 @@
       </p:sp>
       <p:sp>
         <p:nvSpPr>
-          <p:cNvPr id="7" name="Text 5"/>
+          <p:cNvPr id="8" name="Text 5"/>
           <p:cNvSpPr txBox="1"/>
           <p:nvPr/>
         </p:nvSpPr>
         <p:spPr>
           <a:xfrm>
-            <a:off x="457200" y="2286000"/>
-            <a:ext cx="548640" cy="548640"/>
-          </a:xfrm>
-          <a:prstGeom prst="rect">
-            <a:avLst/>
-          </a:prstGeom>
-          <a:noFill/>
-          <a:ln/>
-        </p:spPr>
-        <p:txBody>
-          <a:bodyPr wrap="square" lIns="0" tIns="0" rIns="0" bIns="0" rtlCol="0" anchor="ctr"/>
-          <a:lstStyle/>
-          <a:p>
-            <a:pPr algn="ctr" indent="0" marL="0">
-              <a:buNone/>
-            </a:pPr>
-            <a:r>
-              <a:rPr lang="en-US" sz="2000" b="1" dirty="0">
-                <a:solidFill>
-                  <a:schemeClr val="bg1"/>
-                </a:solidFill>
-              </a:rPr>
-              <a:t>2</a:t>
-            </a:r>
-            <a:endParaRPr lang="en-US" sz="2000" dirty="0"/>
-          </a:p>
-        </p:txBody>
-      </p:sp>
-      <p:sp>
-        <p:nvSpPr>
-          <p:cNvPr id="8" name="Text 6"/>
-          <p:cNvSpPr txBox="1"/>
-          <p:nvPr/>
-        </p:nvSpPr>
-        <p:spPr>
-          <a:xfrm>
-            <a:off x="1234440" y="2240280"/>
-            <a:ext cx="7406640" cy="914400"/>
+            <a:off x="6062472" y="2350008"/>
+            <a:ext cx="2459736" cy="228600"/>
           </a:xfrm>
           <a:prstGeom prst="rect">
             <a:avLst/>
@@ -10701,51 +11809,75 @@
               <a:buNone/>
             </a:pPr>
             <a:r>
-              <a:rPr lang="en-US" sz="1700" b="1" dirty="0">
-                <a:solidFill>
-                  <a:schemeClr val="tx1"/>
+              <a:rPr lang="en-US" sz="1200" b="1" dirty="0">
+                <a:solidFill>
+                  <a:schemeClr val="accent1"/>
                 </a:solidFill>
               </a:rPr>
-              <a:t>Video codecs</a:t>
-            </a:r>
-            <a:endParaRPr lang="en-US" sz="1700" dirty="0"/>
-          </a:p>
+              <a:t>PSNR</a:t>
+            </a:r>
+            <a:endParaRPr lang="en-US" sz="1200" dirty="0"/>
+          </a:p>
+        </p:txBody>
+      </p:sp>
+      <p:sp>
+        <p:nvSpPr>
+          <p:cNvPr id="9" name="Text 6"/>
+          <p:cNvSpPr txBox="1"/>
+          <p:nvPr/>
+        </p:nvSpPr>
+        <p:spPr>
+          <a:xfrm>
+            <a:off x="6062472" y="2606040"/>
+            <a:ext cx="2459736" cy="722376"/>
+          </a:xfrm>
+          <a:prstGeom prst="rect">
+            <a:avLst/>
+          </a:prstGeom>
+          <a:noFill/>
+          <a:ln/>
+        </p:spPr>
+        <p:txBody>
+          <a:bodyPr wrap="square" lIns="0" tIns="0" rIns="0" bIns="0" rtlCol="0" anchor="t"/>
+          <a:lstStyle/>
           <a:p>
             <a:pPr indent="0" marL="0">
               <a:buNone/>
             </a:pPr>
             <a:r>
-              <a:rPr lang="en-US" sz="1700" dirty="0">
-                <a:solidFill>
-                  <a:srgbClr val="3A3F4B"/>
+              <a:rPr lang="en-US" sz="1400" dirty="0">
+                <a:solidFill>
+                  <a:schemeClr val="tx1"/>
                 </a:solidFill>
               </a:rPr>
-              <a:t>use the similarity between neighbouring slices and time points</a:t>
-            </a:r>
-            <a:endParaRPr lang="en-US" sz="1700" dirty="0"/>
-          </a:p>
-        </p:txBody>
-      </p:sp>
-      <p:sp>
-        <p:nvSpPr>
-          <p:cNvPr id="9" name="num-2"/>
+              <a:t>Barely moves over these budgets: at most 2.6 dB per frame</a:t>
+            </a:r>
+            <a:endParaRPr lang="en-US" sz="1400" dirty="0"/>
+          </a:p>
+        </p:txBody>
+      </p:sp>
+      <p:sp>
+        <p:nvSpPr>
+          <p:cNvPr id="10" name="step-card-2"/>
           <p:cNvSpPr/>
           <p:nvPr/>
         </p:nvSpPr>
         <p:spPr>
           <a:xfrm>
-            <a:off x="457200" y="3383280"/>
-            <a:ext cx="548640" cy="548640"/>
-          </a:xfrm>
-          <a:prstGeom prst="ellipse">
-            <a:avLst/>
+            <a:off x="5897880" y="3465576"/>
+            <a:ext cx="2788920" cy="1143000"/>
+          </a:xfrm>
+          <a:prstGeom prst="roundRect">
+            <a:avLst>
+              <a:gd name="adj" fmla="val 6400"/>
+            </a:avLst>
           </a:prstGeom>
           <a:solidFill>
-            <a:schemeClr val="accent1"/>
+            <a:schemeClr val="bg2"/>
           </a:solidFill>
           <a:ln w="12700">
             <a:solidFill>
-              <a:schemeClr val="accent1"/>
+              <a:schemeClr val="bg2"/>
             </a:solidFill>
             <a:prstDash val="solid"/>
           </a:ln>
@@ -10753,50 +11885,14 @@
       </p:sp>
       <p:sp>
         <p:nvSpPr>
-          <p:cNvPr id="10" name="Text 8"/>
+          <p:cNvPr id="11" name="Text 8"/>
           <p:cNvSpPr txBox="1"/>
           <p:nvPr/>
         </p:nvSpPr>
         <p:spPr>
           <a:xfrm>
-            <a:off x="457200" y="3383280"/>
-            <a:ext cx="548640" cy="548640"/>
-          </a:xfrm>
-          <a:prstGeom prst="rect">
-            <a:avLst/>
-          </a:prstGeom>
-          <a:noFill/>
-          <a:ln/>
-        </p:spPr>
-        <p:txBody>
-          <a:bodyPr wrap="square" lIns="0" tIns="0" rIns="0" bIns="0" rtlCol="0" anchor="ctr"/>
-          <a:lstStyle/>
-          <a:p>
-            <a:pPr algn="ctr" indent="0" marL="0">
-              <a:buNone/>
-            </a:pPr>
-            <a:r>
-              <a:rPr lang="en-US" sz="2000" b="1" dirty="0">
-                <a:solidFill>
-                  <a:schemeClr val="bg1"/>
-                </a:solidFill>
-              </a:rPr>
-              <a:t>3</a:t>
-            </a:r>
-            <a:endParaRPr lang="en-US" sz="2000" dirty="0"/>
-          </a:p>
-        </p:txBody>
-      </p:sp>
-      <p:sp>
-        <p:nvSpPr>
-          <p:cNvPr id="11" name="Text 9"/>
-          <p:cNvSpPr txBox="1"/>
-          <p:nvPr/>
-        </p:nvSpPr>
-        <p:spPr>
-          <a:xfrm>
-            <a:off x="1234440" y="3337560"/>
-            <a:ext cx="7406640" cy="914400"/>
+            <a:off x="6062472" y="3557016"/>
+            <a:ext cx="2459736" cy="228600"/>
           </a:xfrm>
           <a:prstGeom prst="rect">
             <a:avLst/>
@@ -10812,28 +11908,50 @@
               <a:buNone/>
             </a:pPr>
             <a:r>
-              <a:rPr lang="en-US" sz="1700" b="1" dirty="0">
-                <a:solidFill>
-                  <a:schemeClr val="tx1"/>
+              <a:rPr lang="en-US" sz="1200" b="1" dirty="0">
+                <a:solidFill>
+                  <a:schemeClr val="accent1"/>
                 </a:solidFill>
               </a:rPr>
-              <a:t>Judge by tracking</a:t>
-            </a:r>
-            <a:endParaRPr lang="en-US" sz="1700" dirty="0"/>
-          </a:p>
+              <a:t>SO</a:t>
+            </a:r>
+            <a:endParaRPr lang="en-US" sz="1200" dirty="0"/>
+          </a:p>
+        </p:txBody>
+      </p:sp>
+      <p:sp>
+        <p:nvSpPr>
+          <p:cNvPr id="12" name="Text 9"/>
+          <p:cNvSpPr txBox="1"/>
+          <p:nvPr/>
+        </p:nvSpPr>
+        <p:spPr>
+          <a:xfrm>
+            <a:off x="6062472" y="3813048"/>
+            <a:ext cx="2459736" cy="722376"/>
+          </a:xfrm>
+          <a:prstGeom prst="rect">
+            <a:avLst/>
+          </a:prstGeom>
+          <a:noFill/>
+          <a:ln/>
+        </p:spPr>
+        <p:txBody>
+          <a:bodyPr wrap="square" lIns="0" tIns="0" rIns="0" bIns="0" rtlCol="0" anchor="t"/>
+          <a:lstStyle/>
           <a:p>
             <a:pPr indent="0" marL="0">
               <a:buNone/>
             </a:pPr>
             <a:r>
-              <a:rPr lang="en-US" sz="1700" dirty="0">
-                <a:solidFill>
-                  <a:srgbClr val="3A3F4B"/>
+              <a:rPr lang="en-US" sz="1400" dirty="0">
+                <a:solidFill>
+                  <a:schemeClr val="tx1"/>
                 </a:solidFill>
               </a:rPr>
-              <a:t>measure with the Cell Tracking Challenge scores, not image quality</a:t>
-            </a:r>
-            <a:endParaRPr lang="en-US" sz="1700" dirty="0"/>
+              <a:t>Image quality cannot tell you when the blob budget is too small</a:t>
+            </a:r>
+            <a:endParaRPr lang="en-US" sz="1400" dirty="0"/>
           </a:p>
         </p:txBody>
       </p:sp>
@@ -10882,6 +12000,171 @@
           </a:p>
         </p:txBody>
       </p:sp>
+    </p:spTree>
+  </p:cSld>
+  <p:clrMapOvr>
+    <a:masterClrMapping/>
+  </p:clrMapOvr>
+</p:sld>
+</file>
+
+<file path=ppt/slides/slide19.xml><?xml version="1.0" encoding="utf-8"?>
+<p:sld xmlns:a="http://schemas.openxmlformats.org/drawingml/2006/main" xmlns:r="http://schemas.openxmlformats.org/officeDocument/2006/relationships" xmlns:p="http://schemas.openxmlformats.org/presentationml/2006/main">
+  <p:cSld name="Slide 19">
+    <p:spTree>
+      <p:nvGrpSpPr>
+        <p:cNvPr id="1" name=""/>
+        <p:cNvGrpSpPr/>
+        <p:nvPr/>
+      </p:nvGrpSpPr>
+      <p:grpSpPr>
+        <a:xfrm>
+          <a:off x="0" y="0"/>
+          <a:ext cx="0" cy="0"/>
+          <a:chOff x="0" y="0"/>
+          <a:chExt cx="0" cy="0"/>
+        </a:xfrm>
+      </p:grpSpPr>
+      <p:sp>
+        <p:nvSpPr>
+          <p:cNvPr id="2" name="Text 0"/>
+          <p:cNvSpPr/>
+          <p:nvPr>
+            <p:ph idx="100" type="title" hasCustomPrompt="1"/>
+          </p:nvPr>
+        </p:nvSpPr>
+        <p:spPr>
+          <a:xfrm>
+            <a:off x="548640" y="411480"/>
+            <a:ext cx="5486400" cy="731520"/>
+          </a:xfrm>
+          <a:prstGeom prst="rect">
+            <a:avLst/>
+          </a:prstGeom>
+          <a:noFill/>
+          <a:ln/>
+        </p:spPr>
+        <p:txBody>
+          <a:bodyPr wrap="square" lIns="0" tIns="0" rIns="0" bIns="0" rtlCol="0" anchor="ctr"/>
+          <a:lstStyle/>
+          <a:p>
+            <a:pPr algn="l" indent="0" marL="0">
+              <a:buNone/>
+            </a:pPr>
+            <a:r>
+              <a:rPr lang="en-US" sz="3200" b="1" dirty="0">
+                <a:solidFill>
+                  <a:schemeClr val="bg1"/>
+                </a:solidFill>
+              </a:rPr>
+              <a:t>What we learned</a:t>
+            </a:r>
+            <a:endParaRPr lang="en-US" sz="3200" dirty="0"/>
+          </a:p>
+        </p:txBody>
+      </p:sp>
+      <p:sp>
+        <p:nvSpPr>
+          <p:cNvPr id="3" name="Text 0"/>
+          <p:cNvSpPr/>
+          <p:nvPr>
+            <p:ph idx="101" type="body" hasCustomPrompt="1"/>
+          </p:nvPr>
+        </p:nvSpPr>
+        <p:spPr>
+          <a:xfrm>
+            <a:off x="548640" y="1371600"/>
+            <a:ext cx="5486400" cy="3200400"/>
+          </a:xfrm>
+          <a:prstGeom prst="rect">
+            <a:avLst/>
+          </a:prstGeom>
+          <a:noFill/>
+          <a:ln/>
+        </p:spPr>
+        <p:txBody>
+          <a:bodyPr wrap="square" lIns="0" tIns="0" rIns="0" bIns="0" rtlCol="0" anchor="t"/>
+          <a:lstStyle/>
+          <a:p>
+            <a:pPr algn="l" marL="342900" indent="-342900">
+              <a:spcAft>
+                <a:spcPts val="1400"/>
+              </a:spcAft>
+              <a:buSzPct val="100000"/>
+              <a:buChar char="•"/>
+            </a:pPr>
+            <a:r>
+              <a:rPr lang="en-US" sz="1700" dirty="0">
+                <a:solidFill>
+                  <a:srgbClr val="E5E7EB"/>
+                </a:solidFill>
+              </a:rPr>
+              <a:t>Shape, starting points, step size and a size cap each made the fit find more nuclei.</a:t>
+            </a:r>
+            <a:endParaRPr lang="en-US" sz="1700" dirty="0"/>
+          </a:p>
+          <a:p>
+            <a:pPr algn="l" marL="342900" indent="-342900">
+              <a:spcAft>
+                <a:spcPts val="1400"/>
+              </a:spcAft>
+              <a:buSzPct val="100000"/>
+              <a:buChar char="•"/>
+            </a:pPr>
+            <a:r>
+              <a:rPr lang="en-US" sz="1700" dirty="0">
+                <a:solidFill>
+                  <a:srgbClr val="E5E7EB"/>
+                </a:solidFill>
+              </a:rPr>
+              <a:t>Blobs are good for looking, not for measuring: at the same file size a standard codec keeps nuclei as well or better.</a:t>
+            </a:r>
+            <a:endParaRPr lang="en-US" sz="1700" dirty="0"/>
+          </a:p>
+          <a:p>
+            <a:pPr algn="l" marL="342900" indent="-342900">
+              <a:spcAft>
+                <a:spcPts val="1400"/>
+              </a:spcAft>
+              <a:buSzPct val="100000"/>
+              <a:buChar char="•"/>
+            </a:pPr>
+            <a:r>
+              <a:rPr lang="en-US" sz="1700" dirty="0">
+                <a:solidFill>
+                  <a:srgbClr val="E5E7EB"/>
+                </a:solidFill>
+              </a:rPr>
+              <a:t>PSNR cannot choose the format: test with the analysis you will actually run.</a:t>
+            </a:r>
+            <a:endParaRPr lang="en-US" sz="1700" dirty="0"/>
+          </a:p>
+        </p:txBody>
+      </p:sp>
+      <p:pic>
+        <p:nvPicPr>
+          <p:cNvPr id="4" name="end-tribolium" descr="D:\masters\MLCV seminar\TeamProject\presentation\figs\title_tribolium.png">    </p:cNvPr>
+          <p:cNvPicPr>
+            <a:picLocks noChangeAspect="1"/>
+          </p:cNvPicPr>
+          <p:nvPr/>
+        </p:nvPicPr>
+        <p:blipFill>
+          <a:blip r:embed="rId1"/>
+          <a:stretch>
+            <a:fillRect/>
+          </a:stretch>
+        </p:blipFill>
+        <p:spPr>
+          <a:xfrm>
+            <a:off x="6446520" y="320040"/>
+            <a:ext cx="2331720" cy="4434840"/>
+          </a:xfrm>
+          <a:prstGeom prst="rect">
+            <a:avLst/>
+          </a:prstGeom>
+        </p:spPr>
+      </p:pic>
     </p:spTree>
   </p:cSld>
   <p:clrMapOvr>
@@ -11327,6 +12610,447 @@
             <a:fld id="{F7021451-1387-4CA6-816F-3879F97B5CBC}" type="slidenum">
               <a:rPr b="0" lang="en-US"/>
               <a:t>2</a:t>
+            </a:fld>
+            <a:endParaRPr lang="en-US"/>
+          </a:p>
+        </p:txBody>
+      </p:sp>
+    </p:spTree>
+  </p:cSld>
+  <p:clrMapOvr>
+    <a:masterClrMapping/>
+  </p:clrMapOvr>
+</p:sld>
+</file>
+
+<file path=ppt/slides/slide20.xml><?xml version="1.0" encoding="utf-8"?>
+<p:sld xmlns:a="http://schemas.openxmlformats.org/drawingml/2006/main" xmlns:r="http://schemas.openxmlformats.org/officeDocument/2006/relationships" xmlns:p="http://schemas.openxmlformats.org/presentationml/2006/main">
+  <p:cSld name="Slide 20">
+    <p:spTree>
+      <p:nvGrpSpPr>
+        <p:cNvPr id="1" name=""/>
+        <p:cNvGrpSpPr/>
+        <p:nvPr/>
+      </p:nvGrpSpPr>
+      <p:grpSpPr>
+        <a:xfrm>
+          <a:off x="0" y="0"/>
+          <a:ext cx="0" cy="0"/>
+          <a:chOff x="0" y="0"/>
+          <a:chExt cx="0" cy="0"/>
+        </a:xfrm>
+      </p:grpSpPr>
+      <p:sp>
+        <p:nvSpPr>
+          <p:cNvPr id="2" name="Text 0"/>
+          <p:cNvSpPr/>
+          <p:nvPr>
+            <p:ph idx="100" type="title" hasCustomPrompt="1"/>
+          </p:nvPr>
+        </p:nvSpPr>
+        <p:spPr>
+          <a:xfrm>
+            <a:off x="457200" y="256032"/>
+            <a:ext cx="8229600" cy="640080"/>
+          </a:xfrm>
+          <a:prstGeom prst="rect">
+            <a:avLst/>
+          </a:prstGeom>
+          <a:noFill/>
+          <a:ln/>
+        </p:spPr>
+        <p:txBody>
+          <a:bodyPr wrap="square" lIns="0" tIns="0" rIns="0" bIns="0" rtlCol="0" anchor="ctr"/>
+          <a:lstStyle/>
+          <a:p>
+            <a:pPr algn="l" indent="0" marL="0">
+              <a:buNone/>
+            </a:pPr>
+            <a:r>
+              <a:rPr lang="en-US" sz="2800" b="1" dirty="0">
+                <a:solidFill>
+                  <a:schemeClr val="tx1"/>
+                </a:solidFill>
+              </a:rPr>
+              <a:t>Next: compression that biologists can use</a:t>
+            </a:r>
+            <a:endParaRPr lang="en-US" sz="2800" dirty="0"/>
+          </a:p>
+        </p:txBody>
+      </p:sp>
+      <p:sp>
+        <p:nvSpPr>
+          <p:cNvPr id="3" name="num-0"/>
+          <p:cNvSpPr/>
+          <p:nvPr/>
+        </p:nvSpPr>
+        <p:spPr>
+          <a:xfrm>
+            <a:off x="457200" y="1188720"/>
+            <a:ext cx="548640" cy="548640"/>
+          </a:xfrm>
+          <a:prstGeom prst="ellipse">
+            <a:avLst/>
+          </a:prstGeom>
+          <a:solidFill>
+            <a:schemeClr val="accent1"/>
+          </a:solidFill>
+          <a:ln w="12700">
+            <a:solidFill>
+              <a:schemeClr val="accent1"/>
+            </a:solidFill>
+            <a:prstDash val="solid"/>
+          </a:ln>
+        </p:spPr>
+      </p:sp>
+      <p:sp>
+        <p:nvSpPr>
+          <p:cNvPr id="4" name="Text 2"/>
+          <p:cNvSpPr txBox="1"/>
+          <p:nvPr/>
+        </p:nvSpPr>
+        <p:spPr>
+          <a:xfrm>
+            <a:off x="457200" y="1188720"/>
+            <a:ext cx="548640" cy="548640"/>
+          </a:xfrm>
+          <a:prstGeom prst="rect">
+            <a:avLst/>
+          </a:prstGeom>
+          <a:noFill/>
+          <a:ln/>
+        </p:spPr>
+        <p:txBody>
+          <a:bodyPr wrap="square" lIns="0" tIns="0" rIns="0" bIns="0" rtlCol="0" anchor="ctr"/>
+          <a:lstStyle/>
+          <a:p>
+            <a:pPr algn="ctr" indent="0" marL="0">
+              <a:buNone/>
+            </a:pPr>
+            <a:r>
+              <a:rPr lang="en-US" sz="2000" b="1" dirty="0">
+                <a:solidFill>
+                  <a:schemeClr val="bg1"/>
+                </a:solidFill>
+              </a:rPr>
+              <a:t>1</a:t>
+            </a:r>
+            <a:endParaRPr lang="en-US" sz="2000" dirty="0"/>
+          </a:p>
+        </p:txBody>
+      </p:sp>
+      <p:sp>
+        <p:nvSpPr>
+          <p:cNvPr id="5" name="Text 3"/>
+          <p:cNvSpPr txBox="1"/>
+          <p:nvPr/>
+        </p:nvSpPr>
+        <p:spPr>
+          <a:xfrm>
+            <a:off x="1234440" y="1143000"/>
+            <a:ext cx="7406640" cy="914400"/>
+          </a:xfrm>
+          <a:prstGeom prst="rect">
+            <a:avLst/>
+          </a:prstGeom>
+          <a:noFill/>
+          <a:ln/>
+        </p:spPr>
+        <p:txBody>
+          <a:bodyPr wrap="square" lIns="0" tIns="0" rIns="0" bIns="0" rtlCol="0" anchor="t"/>
+          <a:lstStyle/>
+          <a:p>
+            <a:pPr indent="0" marL="0">
+              <a:buNone/>
+            </a:pPr>
+            <a:r>
+              <a:rPr lang="en-US" sz="1700" b="1" dirty="0">
+                <a:solidFill>
+                  <a:schemeClr val="tx1"/>
+                </a:solidFill>
+              </a:rPr>
+              <a:t>Lossless and near-lossless</a:t>
+            </a:r>
+            <a:endParaRPr lang="en-US" sz="1700" dirty="0"/>
+          </a:p>
+          <a:p>
+            <a:pPr indent="0" marL="0">
+              <a:buNone/>
+            </a:pPr>
+            <a:r>
+              <a:rPr lang="en-US" sz="1700" dirty="0">
+                <a:solidFill>
+                  <a:srgbClr val="3A3F4B"/>
+                </a:solidFill>
+              </a:rPr>
+              <a:t>what labs actually store: exact, or errors kept below the camera noise</a:t>
+            </a:r>
+            <a:endParaRPr lang="en-US" sz="1700" dirty="0"/>
+          </a:p>
+        </p:txBody>
+      </p:sp>
+      <p:sp>
+        <p:nvSpPr>
+          <p:cNvPr id="6" name="num-1"/>
+          <p:cNvSpPr/>
+          <p:nvPr/>
+        </p:nvSpPr>
+        <p:spPr>
+          <a:xfrm>
+            <a:off x="457200" y="2286000"/>
+            <a:ext cx="548640" cy="548640"/>
+          </a:xfrm>
+          <a:prstGeom prst="ellipse">
+            <a:avLst/>
+          </a:prstGeom>
+          <a:solidFill>
+            <a:schemeClr val="accent1"/>
+          </a:solidFill>
+          <a:ln w="12700">
+            <a:solidFill>
+              <a:schemeClr val="accent1"/>
+            </a:solidFill>
+            <a:prstDash val="solid"/>
+          </a:ln>
+        </p:spPr>
+      </p:sp>
+      <p:sp>
+        <p:nvSpPr>
+          <p:cNvPr id="7" name="Text 5"/>
+          <p:cNvSpPr txBox="1"/>
+          <p:nvPr/>
+        </p:nvSpPr>
+        <p:spPr>
+          <a:xfrm>
+            <a:off x="457200" y="2286000"/>
+            <a:ext cx="548640" cy="548640"/>
+          </a:xfrm>
+          <a:prstGeom prst="rect">
+            <a:avLst/>
+          </a:prstGeom>
+          <a:noFill/>
+          <a:ln/>
+        </p:spPr>
+        <p:txBody>
+          <a:bodyPr wrap="square" lIns="0" tIns="0" rIns="0" bIns="0" rtlCol="0" anchor="ctr"/>
+          <a:lstStyle/>
+          <a:p>
+            <a:pPr algn="ctr" indent="0" marL="0">
+              <a:buNone/>
+            </a:pPr>
+            <a:r>
+              <a:rPr lang="en-US" sz="2000" b="1" dirty="0">
+                <a:solidFill>
+                  <a:schemeClr val="bg1"/>
+                </a:solidFill>
+              </a:rPr>
+              <a:t>2</a:t>
+            </a:r>
+            <a:endParaRPr lang="en-US" sz="2000" dirty="0"/>
+          </a:p>
+        </p:txBody>
+      </p:sp>
+      <p:sp>
+        <p:nvSpPr>
+          <p:cNvPr id="8" name="Text 6"/>
+          <p:cNvSpPr txBox="1"/>
+          <p:nvPr/>
+        </p:nvSpPr>
+        <p:spPr>
+          <a:xfrm>
+            <a:off x="1234440" y="2240280"/>
+            <a:ext cx="7406640" cy="914400"/>
+          </a:xfrm>
+          <a:prstGeom prst="rect">
+            <a:avLst/>
+          </a:prstGeom>
+          <a:noFill/>
+          <a:ln/>
+        </p:spPr>
+        <p:txBody>
+          <a:bodyPr wrap="square" lIns="0" tIns="0" rIns="0" bIns="0" rtlCol="0" anchor="t"/>
+          <a:lstStyle/>
+          <a:p>
+            <a:pPr indent="0" marL="0">
+              <a:buNone/>
+            </a:pPr>
+            <a:r>
+              <a:rPr lang="en-US" sz="1700" b="1" dirty="0">
+                <a:solidFill>
+                  <a:schemeClr val="tx1"/>
+                </a:solidFill>
+              </a:rPr>
+              <a:t>Video codecs</a:t>
+            </a:r>
+            <a:endParaRPr lang="en-US" sz="1700" dirty="0"/>
+          </a:p>
+          <a:p>
+            <a:pPr indent="0" marL="0">
+              <a:buNone/>
+            </a:pPr>
+            <a:r>
+              <a:rPr lang="en-US" sz="1700" dirty="0">
+                <a:solidFill>
+                  <a:srgbClr val="3A3F4B"/>
+                </a:solidFill>
+              </a:rPr>
+              <a:t>use the similarity between neighbouring slices and time points</a:t>
+            </a:r>
+            <a:endParaRPr lang="en-US" sz="1700" dirty="0"/>
+          </a:p>
+        </p:txBody>
+      </p:sp>
+      <p:sp>
+        <p:nvSpPr>
+          <p:cNvPr id="9" name="num-2"/>
+          <p:cNvSpPr/>
+          <p:nvPr/>
+        </p:nvSpPr>
+        <p:spPr>
+          <a:xfrm>
+            <a:off x="457200" y="3383280"/>
+            <a:ext cx="548640" cy="548640"/>
+          </a:xfrm>
+          <a:prstGeom prst="ellipse">
+            <a:avLst/>
+          </a:prstGeom>
+          <a:solidFill>
+            <a:schemeClr val="accent1"/>
+          </a:solidFill>
+          <a:ln w="12700">
+            <a:solidFill>
+              <a:schemeClr val="accent1"/>
+            </a:solidFill>
+            <a:prstDash val="solid"/>
+          </a:ln>
+        </p:spPr>
+      </p:sp>
+      <p:sp>
+        <p:nvSpPr>
+          <p:cNvPr id="10" name="Text 8"/>
+          <p:cNvSpPr txBox="1"/>
+          <p:nvPr/>
+        </p:nvSpPr>
+        <p:spPr>
+          <a:xfrm>
+            <a:off x="457200" y="3383280"/>
+            <a:ext cx="548640" cy="548640"/>
+          </a:xfrm>
+          <a:prstGeom prst="rect">
+            <a:avLst/>
+          </a:prstGeom>
+          <a:noFill/>
+          <a:ln/>
+        </p:spPr>
+        <p:txBody>
+          <a:bodyPr wrap="square" lIns="0" tIns="0" rIns="0" bIns="0" rtlCol="0" anchor="ctr"/>
+          <a:lstStyle/>
+          <a:p>
+            <a:pPr algn="ctr" indent="0" marL="0">
+              <a:buNone/>
+            </a:pPr>
+            <a:r>
+              <a:rPr lang="en-US" sz="2000" b="1" dirty="0">
+                <a:solidFill>
+                  <a:schemeClr val="bg1"/>
+                </a:solidFill>
+              </a:rPr>
+              <a:t>3</a:t>
+            </a:r>
+            <a:endParaRPr lang="en-US" sz="2000" dirty="0"/>
+          </a:p>
+        </p:txBody>
+      </p:sp>
+      <p:sp>
+        <p:nvSpPr>
+          <p:cNvPr id="11" name="Text 9"/>
+          <p:cNvSpPr txBox="1"/>
+          <p:nvPr/>
+        </p:nvSpPr>
+        <p:spPr>
+          <a:xfrm>
+            <a:off x="1234440" y="3337560"/>
+            <a:ext cx="7406640" cy="914400"/>
+          </a:xfrm>
+          <a:prstGeom prst="rect">
+            <a:avLst/>
+          </a:prstGeom>
+          <a:noFill/>
+          <a:ln/>
+        </p:spPr>
+        <p:txBody>
+          <a:bodyPr wrap="square" lIns="0" tIns="0" rIns="0" bIns="0" rtlCol="0" anchor="t"/>
+          <a:lstStyle/>
+          <a:p>
+            <a:pPr indent="0" marL="0">
+              <a:buNone/>
+            </a:pPr>
+            <a:r>
+              <a:rPr lang="en-US" sz="1700" b="1" dirty="0">
+                <a:solidFill>
+                  <a:schemeClr val="tx1"/>
+                </a:solidFill>
+              </a:rPr>
+              <a:t>Judge by tracking</a:t>
+            </a:r>
+            <a:endParaRPr lang="en-US" sz="1700" dirty="0"/>
+          </a:p>
+          <a:p>
+            <a:pPr indent="0" marL="0">
+              <a:buNone/>
+            </a:pPr>
+            <a:r>
+              <a:rPr lang="en-US" sz="1700" dirty="0">
+                <a:solidFill>
+                  <a:srgbClr val="3A3F4B"/>
+                </a:solidFill>
+              </a:rPr>
+              <a:t>measure with the Cell Tracking Challenge scores, not image quality</a:t>
+            </a:r>
+            <a:endParaRPr lang="en-US" sz="1700" dirty="0"/>
+          </a:p>
+        </p:txBody>
+      </p:sp>
+      <p:sp>
+        <p:nvSpPr>
+          <p:cNvPr id="25" name="Slide Number Placeholder 0"/>
+          <p:cNvSpPr>
+            <a:spLocks noGrp="1"/>
+          </p:cNvSpPr>
+          <p:nvPr>
+            <p:ph type="sldNum" sz="quarter" idx="4294967295"/>
+          </p:nvPr>
+        </p:nvSpPr>
+        <p:spPr>
+          <a:xfrm>
+            <a:off x="8229600" y="4754880"/>
+            <a:ext cx="457200" cy="228600"/>
+          </a:xfrm>
+          <a:prstGeom prst="rect">
+            <a:avLst/>
+          </a:prstGeom>
+          <a:extLst>
+            <a:ext uri="{C572A759-6A51-4108-AA02-DFA0A04FC94B}">
+              <ma14:wrappingTextBoxFlag xmlns:ma14="http://schemas.microsoft.com/office/mac/drawingml/2011/main" val="0"/>
+            </a:ext>
+          </a:extLst>
+        </p:spPr>
+        <p:txBody>
+          <a:bodyPr/>
+          <a:lstStyle>
+            <a:lvl1pPr>
+              <a:defRPr sz="900">
+                <a:solidFill>
+                  <a:schemeClr val="accent5"/>
+                </a:solidFill>
+              </a:defRPr>
+            </a:lvl1pPr>
+          </a:lstStyle>
+          <a:p>
+            <a:pPr algn="r"/>
+            <a:fld id="{F7021451-1387-4CA6-816F-3879F97B5CBC}" type="slidenum">
+              <a:rPr b="0" lang="en-US"/>
+              <a:t>20</a:t>
             </a:fld>
             <a:endParaRPr lang="en-US"/>
           </a:p>
@@ -13941,31 +15665,75 @@
                   <a:schemeClr val="tx1"/>
                 </a:solidFill>
               </a:rPr>
-              <a:t>Step 3 · Repeats confirm: stretching is real</a:t>
+              <a:t>Step 3 · Grow blobs where the error is large</a:t>
             </a:r>
             <a:endParaRPr lang="en-US" sz="2800" dirty="0"/>
           </a:p>
         </p:txBody>
       </p:sp>
-      <p:graphicFrame>
-        <p:nvGraphicFramePr>
-          <p:cNvPr id="3" name="Chart 0" descr=""/>
-          <p:cNvGraphicFramePr/>
+      <p:pic>
+        <p:nvPicPr>
+          <p:cNvPr id="3" name="akim-densify" descr="D:\masters\MLCV seminar\TeamProject\presentation\figs\akim_densify.png">    </p:cNvPr>
+          <p:cNvPicPr>
+            <a:picLocks noChangeAspect="1"/>
+          </p:cNvPicPr>
           <p:nvPr/>
-        </p:nvGraphicFramePr>
-        <p:xfrm>
-          <a:off x="457200" y="1051560"/>
-          <a:ext cx="4754880" cy="3246120"/>
-        </p:xfrm>
-        <a:graphic xmlns:a="http://schemas.openxmlformats.org/drawingml/2006/main">
-          <a:graphicData uri="http://schemas.openxmlformats.org/drawingml/2006/chart">
-            <c:chart xmlns:c="http://schemas.openxmlformats.org/drawingml/2006/chart" r:id="rId1"/>
-          </a:graphicData>
-        </a:graphic>
-      </p:graphicFrame>
-      <p:sp>
-        <p:nvSpPr>
-          <p:cNvPr id="4" name="step-card-0"/>
+        </p:nvPicPr>
+        <p:blipFill>
+          <a:blip r:embed="rId1"/>
+          <a:stretch>
+            <a:fillRect/>
+          </a:stretch>
+        </p:blipFill>
+        <p:spPr>
+          <a:xfrm>
+            <a:off x="457200" y="1097280"/>
+            <a:ext cx="4846320" cy="2971800"/>
+          </a:xfrm>
+          <a:prstGeom prst="rect">
+            <a:avLst/>
+          </a:prstGeom>
+        </p:spPr>
+      </p:pic>
+      <p:sp>
+        <p:nvSpPr>
+          <p:cNvPr id="4" name="Text 1"/>
+          <p:cNvSpPr txBox="1"/>
+          <p:nvPr/>
+        </p:nvSpPr>
+        <p:spPr>
+          <a:xfrm>
+            <a:off x="457200" y="4160520"/>
+            <a:ext cx="4846320" cy="274320"/>
+          </a:xfrm>
+          <a:prstGeom prst="rect">
+            <a:avLst/>
+          </a:prstGeom>
+          <a:noFill/>
+          <a:ln/>
+        </p:spPr>
+        <p:txBody>
+          <a:bodyPr wrap="square" lIns="0" tIns="0" rIns="0" bIns="0" rtlCol="0" anchor="t"/>
+          <a:lstStyle/>
+          <a:p>
+            <a:pPr indent="0" marL="0">
+              <a:buNone/>
+            </a:pPr>
+            <a:r>
+              <a:rPr lang="en-US" sz="1100" dirty="0">
+                <a:solidFill>
+                  <a:schemeClr val="accent5"/>
+                </a:solidFill>
+              </a:rPr>
+              <a:t>Akim's runs, same Tribolium crop, stretched + rotated blobs</a:t>
+            </a:r>
+            <a:endParaRPr lang="en-US" sz="1100" dirty="0"/>
+          </a:p>
+        </p:txBody>
+      </p:sp>
+      <p:sp>
+        <p:nvSpPr>
+          <p:cNvPr id="5" name="step-card-0"/>
           <p:cNvSpPr/>
           <p:nvPr/>
         </p:nvSpPr>
@@ -13992,7 +15760,7 @@
       </p:sp>
       <p:sp>
         <p:nvSpPr>
-          <p:cNvPr id="5" name="Text 2"/>
+          <p:cNvPr id="6" name="Text 3"/>
           <p:cNvSpPr txBox="1"/>
           <p:nvPr/>
         </p:nvSpPr>
@@ -14020,7 +15788,7 @@
                   <a:schemeClr val="accent1"/>
                 </a:solidFill>
               </a:rPr>
-              <a:t>WHAT WE DID</a:t>
+              <a:t>WHAT AKIM CHANGED</a:t>
             </a:r>
             <a:endParaRPr lang="en-US" sz="1200" dirty="0"/>
           </a:p>
@@ -14028,7 +15796,7 @@
       </p:sp>
       <p:sp>
         <p:nvSpPr>
-          <p:cNvPr id="6" name="Text 3"/>
+          <p:cNvPr id="7" name="Text 4"/>
           <p:cNvSpPr txBox="1"/>
           <p:nvPr/>
         </p:nvSpPr>
@@ -14056,7 +15824,7 @@
                   <a:schemeClr val="tx1"/>
                 </a:solidFill>
               </a:rPr>
-              <a:t>Re-ran round, stretched and stretched + rotated blobs with 5 seeds and 3 budgets each</a:t>
+              <a:t>Start with 25 blobs; add new ones where the error stays high (12 variants)</a:t>
             </a:r>
             <a:endParaRPr lang="en-US" sz="1400" dirty="0"/>
           </a:p>
@@ -14064,7 +15832,7 @@
       </p:sp>
       <p:sp>
         <p:nvSpPr>
-          <p:cNvPr id="7" name="step-card-1"/>
+          <p:cNvPr id="8" name="step-card-1"/>
           <p:cNvSpPr/>
           <p:nvPr/>
         </p:nvSpPr>
@@ -14091,7 +15859,7 @@
       </p:sp>
       <p:sp>
         <p:nvSpPr>
-          <p:cNvPr id="8" name="Text 5"/>
+          <p:cNvPr id="9" name="Text 6"/>
           <p:cNvSpPr txBox="1"/>
           <p:nvPr/>
         </p:nvSpPr>
@@ -14127,7 +15895,7 @@
       </p:sp>
       <p:sp>
         <p:nvSpPr>
-          <p:cNvPr id="9" name="Text 6"/>
+          <p:cNvPr id="10" name="Text 7"/>
           <p:cNvSpPr txBox="1"/>
           <p:nvPr/>
         </p:nvSpPr>
@@ -14155,7 +15923,7 @@
                   <a:schemeClr val="tx1"/>
                 </a:solidFill>
               </a:rPr>
-              <a:t>Akim had one run per setting; a single run can be luck</a:t>
+              <a:t>Let the data decide how many blobs it needs, instead of guessing</a:t>
             </a:r>
             <a:endParaRPr lang="en-US" sz="1400" dirty="0"/>
           </a:p>
@@ -14163,7 +15931,7 @@
       </p:sp>
       <p:sp>
         <p:nvSpPr>
-          <p:cNvPr id="10" name="step-card-2"/>
+          <p:cNvPr id="11" name="step-card-2"/>
           <p:cNvSpPr/>
           <p:nvPr/>
         </p:nvSpPr>
@@ -14190,7 +15958,7 @@
       </p:sp>
       <p:sp>
         <p:nvSpPr>
-          <p:cNvPr id="11" name="Text 8"/>
+          <p:cNvPr id="12" name="Text 9"/>
           <p:cNvSpPr txBox="1"/>
           <p:nvPr/>
         </p:nvSpPr>
@@ -14226,7 +15994,7 @@
       </p:sp>
       <p:sp>
         <p:nvSpPr>
-          <p:cNvPr id="12" name="Text 9"/>
+          <p:cNvPr id="13" name="Text 10"/>
           <p:cNvSpPr txBox="1"/>
           <p:nvPr/>
         </p:nvSpPr>
@@ -14254,7 +16022,7 @@
                   <a:schemeClr val="tx1"/>
                 </a:solidFill>
               </a:rPr>
-              <a:t>+3.2 dB with small spread; learned blobs are as stretched as real nuclei</a:t>
+              <a:t>Slightly better per blob (34 grown: 24.3 dB vs 50 fixed: 23.8 dB); best 24.9 vs 24.5 dB</a:t>
             </a:r>
             <a:endParaRPr lang="en-US" sz="1400" dirty="0"/>
           </a:p>
@@ -14362,31 +16130,75 @@
                   <a:schemeClr val="tx1"/>
                 </a:solidFill>
               </a:rPr>
-              <a:t>Step 4 · Start each blob on a nucleus</a:t>
+              <a:t>Step 4 · Set the budget from the cell count</a:t>
             </a:r>
             <a:endParaRPr lang="en-US" sz="2800" dirty="0"/>
           </a:p>
         </p:txBody>
       </p:sp>
-      <p:graphicFrame>
-        <p:nvGraphicFramePr>
-          <p:cNvPr id="3" name="Chart 0" descr=""/>
-          <p:cNvGraphicFramePr/>
+      <p:pic>
+        <p:nvPicPr>
+          <p:cNvPr id="3" name="akim-cellbudget" descr="D:\masters\MLCV seminar\TeamProject\presentation\figs\akim_cellbudget.png">    </p:cNvPr>
+          <p:cNvPicPr>
+            <a:picLocks noChangeAspect="1"/>
+          </p:cNvPicPr>
           <p:nvPr/>
-        </p:nvGraphicFramePr>
-        <p:xfrm>
-          <a:off x="457200" y="1051560"/>
-          <a:ext cx="4754880" cy="3246120"/>
-        </p:xfrm>
-        <a:graphic xmlns:a="http://schemas.openxmlformats.org/drawingml/2006/main">
-          <a:graphicData uri="http://schemas.openxmlformats.org/drawingml/2006/chart">
-            <c:chart xmlns:c="http://schemas.openxmlformats.org/drawingml/2006/chart" r:id="rId1"/>
-          </a:graphicData>
-        </a:graphic>
-      </p:graphicFrame>
-      <p:sp>
-        <p:nvSpPr>
-          <p:cNvPr id="4" name="step-card-0"/>
+        </p:nvPicPr>
+        <p:blipFill>
+          <a:blip r:embed="rId1"/>
+          <a:stretch>
+            <a:fillRect/>
+          </a:stretch>
+        </p:blipFill>
+        <p:spPr>
+          <a:xfrm>
+            <a:off x="457200" y="1097280"/>
+            <a:ext cx="4846320" cy="2852928"/>
+          </a:xfrm>
+          <a:prstGeom prst="rect">
+            <a:avLst/>
+          </a:prstGeom>
+        </p:spPr>
+      </p:pic>
+      <p:sp>
+        <p:nvSpPr>
+          <p:cNvPr id="4" name="Text 1"/>
+          <p:cNvSpPr txBox="1"/>
+          <p:nvPr/>
+        </p:nvSpPr>
+        <p:spPr>
+          <a:xfrm>
+            <a:off x="457200" y="4023360"/>
+            <a:ext cx="4846320" cy="274320"/>
+          </a:xfrm>
+          <a:prstGeom prst="rect">
+            <a:avLst/>
+          </a:prstGeom>
+          <a:noFill/>
+          <a:ln/>
+        </p:spPr>
+        <p:txBody>
+          <a:bodyPr wrap="square" lIns="0" tIns="0" rIns="0" bIns="0" rtlCol="0" anchor="t"/>
+          <a:lstStyle/>
+          <a:p>
+            <a:pPr indent="0" marL="0">
+              <a:buNone/>
+            </a:pPr>
+            <a:r>
+              <a:rPr lang="en-US" sz="1100" dirty="0">
+                <a:solidFill>
+                  <a:schemeClr val="accent5"/>
+                </a:solidFill>
+              </a:rPr>
+              <a:t>Akim's runs, whole Tribolium volume, 230 cells found by a detector</a:t>
+            </a:r>
+            <a:endParaRPr lang="en-US" sz="1100" dirty="0"/>
+          </a:p>
+        </p:txBody>
+      </p:sp>
+      <p:sp>
+        <p:nvSpPr>
+          <p:cNvPr id="5" name="step-card-0"/>
           <p:cNvSpPr/>
           <p:nvPr/>
         </p:nvSpPr>
@@ -14413,7 +16225,7 @@
       </p:sp>
       <p:sp>
         <p:nvSpPr>
-          <p:cNvPr id="5" name="Text 2"/>
+          <p:cNvPr id="6" name="Text 3"/>
           <p:cNvSpPr txBox="1"/>
           <p:nvPr/>
         </p:nvSpPr>
@@ -14441,7 +16253,7 @@
                   <a:schemeClr val="accent1"/>
                 </a:solidFill>
               </a:rPr>
-              <a:t>WHAT WE CHANGED</a:t>
+              <a:t>WHAT AKIM CHANGED</a:t>
             </a:r>
             <a:endParaRPr lang="en-US" sz="1200" dirty="0"/>
           </a:p>
@@ -14449,7 +16261,7 @@
       </p:sp>
       <p:sp>
         <p:nvSpPr>
-          <p:cNvPr id="6" name="Text 3"/>
+          <p:cNvPr id="7" name="Text 4"/>
           <p:cNvSpPr txBox="1"/>
           <p:nvPr/>
         </p:nvSpPr>
@@ -14477,7 +16289,7 @@
                   <a:schemeClr val="tx1"/>
                 </a:solidFill>
               </a:rPr>
-              <a:t>Bright-peak starts → one starting blob on every detected nucleus first</a:t>
+              <a:t>Count cells first (230), then use ~1.15 blobs per cell + 12% for background (301), and multiples</a:t>
             </a:r>
             <a:endParaRPr lang="en-US" sz="1400" dirty="0"/>
           </a:p>
@@ -14485,7 +16297,7 @@
       </p:sp>
       <p:sp>
         <p:nvSpPr>
-          <p:cNvPr id="7" name="step-card-1"/>
+          <p:cNvPr id="8" name="step-card-1"/>
           <p:cNvSpPr/>
           <p:nvPr/>
         </p:nvSpPr>
@@ -14512,7 +16324,7 @@
       </p:sp>
       <p:sp>
         <p:nvSpPr>
-          <p:cNvPr id="8" name="Text 5"/>
+          <p:cNvPr id="9" name="Text 6"/>
           <p:cNvSpPr txBox="1"/>
           <p:nvPr/>
         </p:nvSpPr>
@@ -14548,7 +16360,7 @@
       </p:sp>
       <p:sp>
         <p:nvSpPr>
-          <p:cNvPr id="9" name="Text 6"/>
+          <p:cNvPr id="10" name="Text 7"/>
           <p:cNvSpPr txBox="1"/>
           <p:nvPr/>
         </p:nvSpPr>
@@ -14576,7 +16388,7 @@
                   <a:schemeClr val="tx1"/>
                 </a:solidFill>
               </a:rPr>
-              <a:t>During fitting blobs moved less than 1 voxel; nuclei are ~20 voxels apart</a:t>
+              <a:t>If each cell gets a blob, the blobs should match the cells</a:t>
             </a:r>
             <a:endParaRPr lang="en-US" sz="1400" dirty="0"/>
           </a:p>
@@ -14584,7 +16396,7 @@
       </p:sp>
       <p:sp>
         <p:nvSpPr>
-          <p:cNvPr id="10" name="step-card-2"/>
+          <p:cNvPr id="11" name="step-card-2"/>
           <p:cNvSpPr/>
           <p:nvPr/>
         </p:nvSpPr>
@@ -14611,7 +16423,7 @@
       </p:sp>
       <p:sp>
         <p:nvSpPr>
-          <p:cNvPr id="11" name="Text 8"/>
+          <p:cNvPr id="12" name="Text 9"/>
           <p:cNvSpPr txBox="1"/>
           <p:nvPr/>
         </p:nvSpPr>
@@ -14647,7 +16459,7 @@
       </p:sp>
       <p:sp>
         <p:nvSpPr>
-          <p:cNvPr id="12" name="Text 9"/>
+          <p:cNvPr id="13" name="Text 10"/>
           <p:cNvSpPr txBox="1"/>
           <p:nvPr/>
         </p:nvSpPr>
@@ -14675,7 +16487,7 @@
                   <a:schemeClr val="tx1"/>
                 </a:solidFill>
               </a:rPr>
-              <a:t>Every nucleus gets a blob (73% → 100%); found nuclei 52% → 71%</a:t>
+              <a:t>Cell matching F1 0.35 → 0.76 with more blobs, while PSNR falls past ~900 blobs</a:t>
             </a:r>
             <a:endParaRPr lang="en-US" sz="1400" dirty="0"/>
           </a:p>

--- a/Gaussian_Blobs_Microscopy_v3.pptx
+++ b/Gaussian_Blobs_Microscopy_v3.pptx
@@ -126,14 +126,14 @@
   <p:extLst>
     <p:ext uri="{521415D9-36F7-43E2-AB2F-B90AF26B5E84}">
       <p14:sectionLst xmlns:p14="http://schemas.microsoft.com/office/powerpoint/2010/main">
-        <p14:section name="Problem and data" id="{11d47e98-1aea-dc8d-4605-6e7523f19562}">
+        <p14:section name="Problem and data" id="{f0cb90bf-5370-dd24-6bd1-a6a499ffaea1}">
           <p14:sldIdLst>
             <p14:sldId id="256"/>
             <p14:sldId id="257"/>
             <p14:sldId id="258"/>
           </p14:sldIdLst>
         </p14:section>
-        <p14:section name="Simple setup and changes" id="{20c4a4f5-636f-974d-d750-c953526ffaec}">
+        <p14:section name="Simple setup and changes" id="{955a83b3-7c75-e644-26e6-77322385f96f}">
           <p14:sldIdLst>
             <p14:sldId id="259"/>
             <p14:sldId id="260"/>
@@ -147,20 +147,20 @@
             <p14:sldId id="268"/>
           </p14:sldIdLst>
         </p14:section>
-        <p14:section name="Results and validation" id="{7544ffb0-a542-f7b4-ea5c-7fba919547b9}">
+        <p14:section name="Results and validation" id="{d2428e7c-28ba-f775-847e-5c4575903008}">
           <p14:sldIdLst>
             <p14:sldId id="269"/>
             <p14:sldId id="270"/>
           </p14:sldIdLst>
         </p14:section>
-        <p14:section name="State of the art" id="{b06002a7-9664-84cf-0af9-5cf6b1599407}">
+        <p14:section name="State of the art" id="{46c815d5-1349-f594-b4e2-df17eb9553c8}">
           <p14:sldIdLst>
             <p14:sldId id="271"/>
             <p14:sldId id="272"/>
             <p14:sldId id="273"/>
           </p14:sldIdLst>
         </p14:section>
-        <p14:section name="Conclusion" id="{59f75a01-f393-fed4-0e18-603fb614352f}">
+        <p14:section name="Conclusion" id="{272ed676-6756-d3dc-c3e9-13391b3178cc}">
           <p14:sldIdLst>
             <p14:sldId id="274"/>
             <p14:sldId id="275"/>
@@ -244,7 +244,7 @@
               <a:lstStyle/>
               <a:p>
                 <a:pPr>
-                  <a:defRPr b="0" i="0" strike="noStrike" sz="1200" u="none">
+                  <a:defRPr b="0" i="0" strike="noStrike" sz="1300" u="none">
                     <a:solidFill>
                       <a:srgbClr val="15171C"/>
                     </a:solidFill>
@@ -312,7 +312,7 @@
             <a:lstStyle/>
             <a:p>
               <a:pPr>
-                <a:defRPr b="0" i="0" strike="noStrike" sz="1200" u="none">
+                <a:defRPr b="0" i="0" strike="noStrike" sz="1300" u="none">
                   <a:solidFill>
                     <a:srgbClr val="15171C"/>
                   </a:solidFill>
@@ -414,7 +414,7 @@
           <a:lstStyle/>
           <a:p>
             <a:pPr>
-              <a:defRPr sz="1100" b="0" i="0" u="none" strike="noStrike">
+              <a:defRPr sz="1200" b="0" i="0" u="none" strike="noStrike">
                 <a:solidFill>
                   <a:srgbClr val="3A3F4B"/>
                 </a:solidFill>
@@ -521,7 +521,7 @@
               <a:lstStyle/>
               <a:p>
                 <a:pPr>
-                  <a:defRPr b="0" i="0" strike="noStrike" sz="1200" u="none">
+                  <a:defRPr b="0" i="0" strike="noStrike" sz="1300" u="none">
                     <a:solidFill>
                       <a:srgbClr val="15171C"/>
                     </a:solidFill>
@@ -589,7 +589,7 @@
             <a:lstStyle/>
             <a:p>
               <a:pPr>
-                <a:defRPr b="0" i="0" strike="noStrike" sz="1200" u="none">
+                <a:defRPr b="0" i="0" strike="noStrike" sz="1300" u="none">
                   <a:solidFill>
                     <a:srgbClr val="15171C"/>
                   </a:solidFill>
@@ -691,7 +691,7 @@
           <a:lstStyle/>
           <a:p>
             <a:pPr>
-              <a:defRPr sz="1100" b="0" i="0" u="none" strike="noStrike">
+              <a:defRPr sz="1200" b="0" i="0" u="none" strike="noStrike">
                 <a:solidFill>
                   <a:srgbClr val="3A3F4B"/>
                 </a:solidFill>
@@ -755,7 +755,7 @@
                 </a:solidFill>
                 <a:latin typeface="+mn-lt"/>
               </a:rPr>
-              <a:t>Real Tribolium crops: PSNR (dB), axis from 20</a:t>
+              <a:t>Tribolium crops: PSNR (dB), 5 seeds each, axis from 20</a:t>
             </a:r>
           </a:p>
         </c:rich>
@@ -779,26 +779,26 @@
               <c:strCache>
                 <c:ptCount val="1"/>
                 <c:pt idx="0">
-                  <c:v>PSNR (dB)</c:v>
+                  <c:v>50 blobs</c:v>
                 </c:pt>
               </c:strCache>
             </c:strRef>
           </c:tx>
           <c:spPr>
             <a:solidFill>
-              <a:srgbClr val="2A78D6"/>
+              <a:srgbClr val="9CC3EE"/>
             </a:solidFill>
             <a:effectLst/>
           </c:spPr>
           <c:invertIfNegative val="0"/>
           <c:dLbls>
-            <c:numFmt formatCode="0.0" sourceLinked="0"/>
+            <c:numFmt formatCode="#,##0" sourceLinked="0"/>
             <c:txPr>
               <a:bodyPr/>
               <a:lstStyle/>
               <a:p>
                 <a:pPr>
-                  <a:defRPr b="0" i="0" strike="noStrike" sz="1200" u="none">
+                  <a:defRPr b="0" i="0" strike="noStrike" sz="1300" u="none">
                     <a:solidFill>
                       <a:srgbClr val="15171C"/>
                     </a:solidFill>
@@ -808,7 +808,7 @@
               </a:p>
             </c:txPr>
             <c:showLegendKey val="0"/>
-            <c:showVal val="1"/>
+            <c:showVal val="0"/>
             <c:showCatName val="0"/>
             <c:showSerName val="0"/>
             <c:showPercent val="0"/>
@@ -841,26 +841,192 @@
                 <c:formatCode>General</c:formatCode>
                 <c:ptCount val="3"/>
                 <c:pt idx="0">
-                  <c:v>22.31</c:v>
+                  <c:v>21.6</c:v>
+                </c:pt>
+                <c:pt idx="1">
+                  <c:v>25.07</c:v>
+                </c:pt>
+                <c:pt idx="2">
+                  <c:v>25.46</c:v>
+                </c:pt>
+              </c:numCache>
+            </c:numRef>
+          </c:val>
+        </c:ser>
+        <c:ser>
+          <c:idx val="1"/>
+          <c:order val="1"/>
+          <c:tx>
+            <c:strRef>
+              <c:f>Sheet1!$C$1</c:f>
+              <c:strCache>
+                <c:ptCount val="1"/>
+                <c:pt idx="0">
+                  <c:v>100 blobs</c:v>
+                </c:pt>
+              </c:strCache>
+            </c:strRef>
+          </c:tx>
+          <c:spPr>
+            <a:solidFill>
+              <a:srgbClr val="2A78D6"/>
+            </a:solidFill>
+            <a:effectLst/>
+          </c:spPr>
+          <c:invertIfNegative val="0"/>
+          <c:dLbls>
+            <c:numFmt formatCode="#,##0" sourceLinked="0"/>
+            <c:txPr>
+              <a:bodyPr/>
+              <a:lstStyle/>
+              <a:p>
+                <a:pPr>
+                  <a:defRPr b="0" i="0" strike="noStrike" sz="1300" u="none">
+                    <a:solidFill>
+                      <a:srgbClr val="15171C"/>
+                    </a:solidFill>
+                    <a:latin typeface="+mn-lt"/>
+                  </a:defRPr>
+                </a:pPr>
+              </a:p>
+            </c:txPr>
+            <c:showLegendKey val="0"/>
+            <c:showVal val="0"/>
+            <c:showCatName val="0"/>
+            <c:showSerName val="0"/>
+            <c:showPercent val="0"/>
+            <c:showBubbleSize val="0"/>
+            <c:showLeaderLines val="0"/>
+          </c:dLbls>
+          <c:cat>
+            <c:multiLvlStrRef>
+              <c:f>Sheet1!$A$2:$A$4</c:f>
+              <c:multiLvlStrCache>
+                <c:ptCount val="3"/>
+                <c:lvl>
+                  <c:pt idx="0">
+                    <c:v>round</c:v>
+                  </c:pt>
+                  <c:pt idx="1">
+                    <c:v>stretched</c:v>
+                  </c:pt>
+                  <c:pt idx="2">
+                    <c:v>stretched + rotated</c:v>
+                  </c:pt>
+                </c:lvl>
+              </c:multiLvlStrCache>
+            </c:multiLvlStrRef>
+          </c:cat>
+          <c:val>
+            <c:numRef>
+              <c:f>Sheet1!$C$2:$C$4</c:f>
+              <c:numCache>
+                <c:formatCode>General</c:formatCode>
+                <c:ptCount val="3"/>
+                <c:pt idx="0">
+                  <c:v>22.2</c:v>
                 </c:pt>
                 <c:pt idx="1">
                   <c:v>25.21</c:v>
                 </c:pt>
                 <c:pt idx="2">
-                  <c:v>25.51</c:v>
+                  <c:v>25.54</c:v>
+                </c:pt>
+              </c:numCache>
+            </c:numRef>
+          </c:val>
+        </c:ser>
+        <c:ser>
+          <c:idx val="2"/>
+          <c:order val="2"/>
+          <c:tx>
+            <c:strRef>
+              <c:f>Sheet1!$D$1</c:f>
+              <c:strCache>
+                <c:ptCount val="1"/>
+                <c:pt idx="0">
+                  <c:v>250 blobs</c:v>
+                </c:pt>
+              </c:strCache>
+            </c:strRef>
+          </c:tx>
+          <c:spPr>
+            <a:solidFill>
+              <a:srgbClr val="1D4F8F"/>
+            </a:solidFill>
+            <a:effectLst/>
+          </c:spPr>
+          <c:invertIfNegative val="0"/>
+          <c:dLbls>
+            <c:numFmt formatCode="#,##0" sourceLinked="0"/>
+            <c:txPr>
+              <a:bodyPr/>
+              <a:lstStyle/>
+              <a:p>
+                <a:pPr>
+                  <a:defRPr b="0" i="0" strike="noStrike" sz="1300" u="none">
+                    <a:solidFill>
+                      <a:srgbClr val="15171C"/>
+                    </a:solidFill>
+                    <a:latin typeface="+mn-lt"/>
+                  </a:defRPr>
+                </a:pPr>
+              </a:p>
+            </c:txPr>
+            <c:showLegendKey val="0"/>
+            <c:showVal val="0"/>
+            <c:showCatName val="0"/>
+            <c:showSerName val="0"/>
+            <c:showPercent val="0"/>
+            <c:showBubbleSize val="0"/>
+            <c:showLeaderLines val="0"/>
+          </c:dLbls>
+          <c:cat>
+            <c:multiLvlStrRef>
+              <c:f>Sheet1!$A$2:$A$4</c:f>
+              <c:multiLvlStrCache>
+                <c:ptCount val="3"/>
+                <c:lvl>
+                  <c:pt idx="0">
+                    <c:v>round</c:v>
+                  </c:pt>
+                  <c:pt idx="1">
+                    <c:v>stretched</c:v>
+                  </c:pt>
+                  <c:pt idx="2">
+                    <c:v>stretched + rotated</c:v>
+                  </c:pt>
+                </c:lvl>
+              </c:multiLvlStrCache>
+            </c:multiLvlStrRef>
+          </c:cat>
+          <c:val>
+            <c:numRef>
+              <c:f>Sheet1!$D$2:$D$4</c:f>
+              <c:numCache>
+                <c:formatCode>General</c:formatCode>
+                <c:ptCount val="3"/>
+                <c:pt idx="0">
+                  <c:v>23.14</c:v>
+                </c:pt>
+                <c:pt idx="1">
+                  <c:v>25.34</c:v>
+                </c:pt>
+                <c:pt idx="2">
+                  <c:v>25.52</c:v>
                 </c:pt>
               </c:numCache>
             </c:numRef>
           </c:val>
         </c:ser>
         <c:dLbls>
-          <c:numFmt formatCode="0.0" sourceLinked="0"/>
+          <c:numFmt formatCode="#,##0" sourceLinked="0"/>
           <c:txPr>
             <a:bodyPr/>
             <a:lstStyle/>
             <a:p>
               <a:pPr>
-                <a:defRPr b="0" i="0" strike="noStrike" sz="1200" u="none">
+                <a:defRPr b="0" i="0" strike="noStrike" sz="1300" u="none">
                   <a:solidFill>
                     <a:srgbClr val="15171C"/>
                   </a:solidFill>
@@ -870,7 +1036,7 @@
             </a:p>
           </c:txPr>
           <c:showLegendKey val="0"/>
-          <c:showVal val="1"/>
+          <c:showVal val="0"/>
           <c:showCatName val="0"/>
           <c:showSerName val="0"/>
           <c:showPercent val="0"/>
@@ -908,7 +1074,7 @@
           <a:lstStyle/>
           <a:p>
             <a:pPr>
-              <a:defRPr sz="1200" b="0" i="0" u="none" strike="noStrike">
+              <a:defRPr sz="1300" b="0" i="0" u="none" strike="noStrike">
                 <a:solidFill>
                   <a:srgbClr val="3A3F4B"/>
                 </a:solidFill>
@@ -962,7 +1128,7 @@
           <a:lstStyle/>
           <a:p>
             <a:pPr>
-              <a:defRPr sz="1100" b="0" i="0" u="none" strike="noStrike">
+              <a:defRPr sz="1200" b="0" i="0" u="none" strike="noStrike">
                 <a:solidFill>
                   <a:srgbClr val="3A3F4B"/>
                 </a:solidFill>
@@ -984,6 +1150,23 @@
         <a:effectLst/>
       </c:spPr>
     </c:plotArea>
+    <c:legend>
+      <c:legendPos val="b"/>
+      <c:overlay val="0"/>
+      <c:txPr>
+        <a:bodyPr/>
+        <a:lstStyle/>
+        <a:p>
+          <a:pPr>
+            <a:defRPr sz="1200">
+              <a:latin typeface="+mn-lt"/>
+              <a:cs typeface="+mn-lt"/>
+            </a:defRPr>
+          </a:pPr>
+          <a:endParaRPr lang="en-US"/>
+        </a:p>
+      </c:txPr>
+    </c:legend>
     <c:plotVisOnly val="1"/>
     <c:dispBlanksAs val="span"/>
   </c:chart>
@@ -1069,7 +1252,7 @@
               <a:lstStyle/>
               <a:p>
                 <a:pPr>
-                  <a:defRPr b="0" i="0" strike="noStrike" sz="1200" u="none">
+                  <a:defRPr b="0" i="0" strike="noStrike" sz="1300" u="none">
                     <a:solidFill>
                       <a:srgbClr val="15171C"/>
                     </a:solidFill>
@@ -1146,7 +1329,7 @@
               <a:lstStyle/>
               <a:p>
                 <a:pPr>
-                  <a:defRPr b="0" i="0" strike="noStrike" sz="1200" u="none">
+                  <a:defRPr b="0" i="0" strike="noStrike" sz="1300" u="none">
                     <a:solidFill>
                       <a:srgbClr val="15171C"/>
                     </a:solidFill>
@@ -1202,7 +1385,7 @@
             <a:lstStyle/>
             <a:p>
               <a:pPr>
-                <a:defRPr b="0" i="0" strike="noStrike" sz="1200" u="none">
+                <a:defRPr b="0" i="0" strike="noStrike" sz="1300" u="none">
                   <a:solidFill>
                     <a:srgbClr val="15171C"/>
                   </a:solidFill>
@@ -1250,7 +1433,7 @@
           <a:lstStyle/>
           <a:p>
             <a:pPr>
-              <a:defRPr sz="1200" b="0" i="0" u="none" strike="noStrike">
+              <a:defRPr sz="1300" b="0" i="0" u="none" strike="noStrike">
                 <a:solidFill>
                   <a:srgbClr val="3A3F4B"/>
                 </a:solidFill>
@@ -1304,7 +1487,7 @@
           <a:lstStyle/>
           <a:p>
             <a:pPr>
-              <a:defRPr sz="1100" b="0" i="0" u="none" strike="noStrike">
+              <a:defRPr sz="1200" b="0" i="0" u="none" strike="noStrike">
                 <a:solidFill>
                   <a:srgbClr val="3A3F4B"/>
                 </a:solidFill>
@@ -1433,7 +1616,7 @@
               <a:lstStyle/>
               <a:p>
                 <a:pPr>
-                  <a:defRPr b="0" i="0" strike="noStrike" sz="1200" u="none">
+                  <a:defRPr b="0" i="0" strike="noStrike" sz="1300" u="none">
                     <a:solidFill>
                       <a:srgbClr val="15171C"/>
                     </a:solidFill>
@@ -1526,7 +1709,7 @@
             <a:lstStyle/>
             <a:p>
               <a:pPr>
-                <a:defRPr b="0" i="0" strike="noStrike" sz="1200" u="none">
+                <a:defRPr b="0" i="0" strike="noStrike" sz="1300" u="none">
                   <a:solidFill>
                     <a:srgbClr val="15171C"/>
                   </a:solidFill>
@@ -1603,7 +1786,7 @@
           <a:lstStyle/>
           <a:p>
             <a:pPr>
-              <a:defRPr sz="1200" b="0" i="0" u="none" strike="noStrike">
+              <a:defRPr sz="1300" b="0" i="0" u="none" strike="noStrike">
                 <a:solidFill>
                   <a:srgbClr val="3A3F4B"/>
                 </a:solidFill>
@@ -1657,7 +1840,7 @@
           <a:lstStyle/>
           <a:p>
             <a:pPr>
-              <a:defRPr sz="1100" b="0" i="0" u="none" strike="noStrike">
+              <a:defRPr sz="1200" b="0" i="0" u="none" strike="noStrike">
                 <a:solidFill>
                   <a:srgbClr val="3A3F4B"/>
                 </a:solidFill>
@@ -1721,7 +1904,7 @@
                 </a:solidFill>
                 <a:latin typeface="+mn-lt"/>
               </a:rPr>
-              <a:t>Luxar minus JPEG2000: nuclei kept (points), mean of 12 frames</a:t>
+              <a:t>Luxar minus JPEG2000: nuclei kept (points), mean of 12 frames, 2 embryos</a:t>
             </a:r>
           </a:p>
         </c:rich>
@@ -1764,7 +1947,7 @@
               <a:lstStyle/>
               <a:p>
                 <a:pPr>
-                  <a:defRPr b="0" i="0" strike="noStrike" sz="1200" u="none">
+                  <a:defRPr b="0" i="0" strike="noStrike" sz="1300" u="none">
                     <a:solidFill>
                       <a:srgbClr val="15171C"/>
                     </a:solidFill>
@@ -1853,7 +2036,7 @@
               <a:lstStyle/>
               <a:p>
                 <a:pPr>
-                  <a:defRPr b="0" i="0" strike="noStrike" sz="1200" u="none">
+                  <a:defRPr b="0" i="0" strike="noStrike" sz="1300" u="none">
                     <a:solidFill>
                       <a:srgbClr val="15171C"/>
                     </a:solidFill>
@@ -1921,7 +2104,7 @@
             <a:lstStyle/>
             <a:p>
               <a:pPr>
-                <a:defRPr b="0" i="0" strike="noStrike" sz="1200" u="none">
+                <a:defRPr b="0" i="0" strike="noStrike" sz="1300" u="none">
                   <a:solidFill>
                     <a:srgbClr val="15171C"/>
                   </a:solidFill>
@@ -1969,7 +2152,7 @@
           <a:lstStyle/>
           <a:p>
             <a:pPr>
-              <a:defRPr sz="1200" b="0" i="0" u="none" strike="noStrike">
+              <a:defRPr sz="1300" b="0" i="0" u="none" strike="noStrike">
                 <a:solidFill>
                   <a:srgbClr val="3A3F4B"/>
                 </a:solidFill>
@@ -2023,7 +2206,7 @@
           <a:lstStyle/>
           <a:p>
             <a:pPr>
-              <a:defRPr sz="1100" b="0" i="0" u="none" strike="noStrike">
+              <a:defRPr sz="1200" b="0" i="0" u="none" strike="noStrike">
                 <a:solidFill>
                   <a:srgbClr val="3A3F4B"/>
                 </a:solidFill>
@@ -2569,12 +2752,13 @@
             <a:r>
               <a:rPr lang="en-US" dirty="0"/>
               <a:t>SAY:
-Our first own step was to check Akim's shape result with repeats: the same three blob shapes, each fitted 15 times, with 5 random seeds and 3 blob budgets, on the same kind of real crops. The result holds: 22.3 dB for round blobs, 25.5 for stretched and rotated, and the spread between repeats is small. Most of the gain comes from stretching; rotation adds half a dB. And the blobs did what we expected: their depth-to-width ratio, 0.79, is close to the ratio measured on the real nuclei, 0.73. Real nuclei look stretched in depth partly because the microscope blurs more along that axis.
+Our first own step was to check Akim's shape result with repeats: the same three blob shapes, at 50, 100 and 250 blobs, each with 5 random seeds, on the same kind of real crops. The result holds at every budget: averaged over all 15 fits, 22.3 dB for round blobs and 25.5 for stretched and rotated. Repeats with different seeds differ by at most about a tenth of a dB, far less than the 3 dB effect. Most of the gain comes from stretching; rotation adds about 0.3 dB. And the blobs did what we expected: their depth-to-width ratio, 0.79, is close to the ratio measured on the real nuclei, 0.73. Real nuclei look stretched in depth partly because the microscope blurs more along that axis.
 TERMS ON THIS SLIDE:
 - Round (isotropic) blob: same size in every direction.
 - Stretched (anisotropic, axis-aligned) blob: three independent sizes along x, y and z.
 - Rotation: lets the stretched blob point in any direction.
 - Seed: the random number that decides the starting point of a fit; different seeds test whether a result is luck.
+- SD (standard deviation): the typical distance of single results from their average; here, how much repeats differ.
 IF ASKED:
 - Did this also help finding nuclei? Slightly: nucleus F1 0.745 (round) vs 0.805 (stretched + rotated), significant in a paired test (p = 0.006, 5 seeds).
 - Why does the axis start at 20? To make a 3 dB difference visible; it is stated on the chart.</a:t>
@@ -3045,13 +3229,15 @@
             <a:r>
               <a:rPr lang="en-US" dirty="0"/>
               <a:t>SAY:
-Three checks that the fit does what we think. First, shape: the learned blobs are about as stretched as the real nuclei. Second, the honest test against people's annotations: on Drosophila, among the 100 most confident detections, the fitted blobs contain 14 of 29 hand-marked nuclei, the raw image only 10. So fitting ranks real nuclei higher. Third, fits are repeatable. And the limit: if the plain detector may use all its candidates it finds 26 of 29, more than any fit. So this is better ranking, not a better detector.
+Checks that the fit does what we think. First, shape: the learned blobs are about as stretched as the real nuclei. Second, the honest test against people's annotations: on Drosophila, among the 100 most confident detections, the fitted blobs contain 14 of 29 hand-marked nuclei, the raw image ranked by brightness only 10. So fitting ranks real nuclei higher than brightness does. But third, the stronger baseline: a classic blob filter, LoG, applied to the same raw candidates puts 16 to 18 marked nuclei in the top 100, in seconds and without any fitting. So the fit beats the naive baseline, not the simple strong one. And if the plain detector may use all its candidates it finds 26 of 29, more than any fit. This is better ranking than brightness, not a better detector.
 TERMS ON THIS SLIDE:
 - Top 100 detections: compare methods at the same number of guesses, because only some nuclei are marked and extra detections cannot be judged as wrong.
-- Raw-image detector: the same peak detector run directly on the original data.
-- Repeated fits: the same data fitted three times; for the Luxar fits used later, nuclei kept differed by at most 2.1-3.7 points depending on the detector.
+- Raw brightness: the raw image's candidate peaks ranked simply by how bright they are.
+- LoG blob filter: ranks the same candidates by how well they look like a round blob of nucleus size.
 IF ASKED:
-- How noisy is 14 vs 10? One nucleus is 3.4% of 29; we only call a difference real if it is about 3 nuclei and has the same sign in all seeds (mean of 3 seeds here).</a:t>
+- How noisy is 14 vs 10? One nucleus is 3.4% of 29; we only call a difference real if it is about 3 nuclei and has the same sign in all seeds (mean of 3 seeds here).
+- Why 16-18? 16 with LoG scales fixed in advance (1.5-3 micrometres); 18 with a single 2-micrometre scale chosen after seeing results.
+- Are fits repeatable? Our own fits: seed spread at most 0.13 dB (Step 5). Luxar, used on the next slides: three repeated fits of one frame differed by at most 2.1-3.7 percentage points of nuclei kept, depending on the detector.</a:t>
             </a:r>
             <a:endParaRPr lang="en-US" dirty="0"/>
           </a:p>
@@ -3140,12 +3326,13 @@
             <a:r>
               <a:rPr lang="en-US" dirty="0"/>
               <a:t>SAY:
-Our own fits were better than our naive start, but are they better than what exists? The strongest existing tool is Luxar, from the Royer lab, which fits Gaussian blobs to large microscopy data. We compared Luxar with ordinary image compression, JPEG2000, squeezed to exactly the same number of bytes, on 12 C. elegans frames with almost 3,000 hand-marked nuclei, and asked four different nucleus detectors how many nuclei survive. The pictures show the same region at about 89 times smaller: the codecs keep the texture, Luxar draws smooth blobs.
+Our own fits were better than our naive start, but are they better than what exists? The strongest existing tool is Luxar, from the Royer lab, which fits Gaussian blobs to large microscopy data. We compared Luxar with ordinary image compression, JPEG2000, squeezed to exactly the same number of bytes, on 12 C. elegans frames from two embryos with almost 3,000 hand-marked nuclei, and asked four different nucleus detectors how many nuclei survive. The pictures show the same region at about 89 times smaller: the codecs keep the texture, Luxar draws smooth blobs. The percentages are whole-frame scores from one detector, 2D Cellpose.
 TERMS ON THIS SLIDE:
 - Compression ratio: original size divided by compressed size; 100x means 100 times smaller.
 - Same file size (matched bytes): every Luxar file is compared with a JPEG2000 file of exactly the same size on disk.
 - JPEG2000 / JPEG-XL: standard image compression formats; here each 2D slice of the volume is compressed.
-- Nuclei kept: nuclei found after compression divided by nuclei found in the original by the same detector (1.0 = nothing lost).
+- Nuclei kept: hand-marked nuclei found after compression divided by those found in the original by the same detector. 1.0 means the same number was found, not necessarily the same individual nuclei.
+- Whole-frame score: the percentages under the pictures are for the whole frame with 2D Cellpose; the pictures show only a small region.
 IF ASKED:
 - Why not compare with our own fits? Luxar is faster and better engineered; if blobs are to win anywhere, the strongest blob tool must win.
 - We found a bug in our own first JPEG2000 setup (it compressed the volume along the wrong axes, about 10 dB worse). Fixing it reversed our first conclusion; a test now prevents it.</a:t>
@@ -3243,9 +3430,10 @@
 - Watershed: a classical segmentation that separates touching bright regions, like water filling valleys.
 - Cellpose: a widely used deep-learning model that outlines cells or nuclei. 2D mode works slice by slice and joins slices; 3D mode looks at the volume in three directions at once.
 - Points: percentage points of nuclei kept, e.g. 0.90 vs 0.86 is 4 points.
-- Statistics: each frame counts once; Wilcoxon signed-rank tests over the 12 frames, Holm-corrected for 8 tests. Everything except LoG below 300x is significant (p ≤ 0.01).
+- Statistics: each frame counts once; Wilcoxon signed-rank tests over the 12 frames, Holm-corrected for 8 tests. Everything except LoG below 300x is significant (Holm-corrected p ≤ 0.01). The 12 frames come from only 2 embryos, so they are not 12 independent animals.
 IF ASKED:
 - Is LoG +1.3 real? No: 8 of 12 frames, p = 0.11; it comes from one embryo only.
+- Why frames and not single comparisons? An earlier draft averaged all matched pairs, with bootstrap intervals per pair. Pairs from one frame are not independent, so the final analysis averages per frame first and tests across frames; the numbers here are that final analysis, the same as in the paper.
 - Why does JPEG2000 win at high compression? Below about 3 blobs per nucleus, blob fits lose whole nuclei; wavelet compression degrades gradually.</a:t>
             </a:r>
             <a:endParaRPr lang="en-US" dirty="0"/>
@@ -3335,12 +3523,13 @@
             <a:r>
               <a:rPr lang="en-US" dirty="0"/>
               <a:t>SAY:
-Why do blobs collapse at high compression? Each point is one Luxar fit; the x axis is blobs per hand-marked nucleus. Above about 3 blobs per nucleus almost every nucleus survives; below that, they disappear quickly, on every frame of both embryos. At the same time, PSNR changes very little across these budgets. So if you choose the budget by image quality, you can fall off this cliff without noticing.
+Why do blobs collapse at high compression? Each point is one Luxar fit; the x axis is blobs per hand-marked nucleus. In these C. elegans frames, with the LoG detector, almost every nucleus survives above about 3 blobs per nucleus; below that, they disappear quickly, on every frame of both embryos: the 90% line is crossed between 1.1 and 3.1 blobs per nucleus. For budgets of 1,000 blobs and more, PSNR changes by at most 2.6 dB per frame. So if you choose the budget by image quality, you can fall off this cliff without noticing. Honestly, our advance test of that PSNR claim held on only 4 of the 8 added frames, because on small frames the cliff lies below 1,000 blobs.
 TERMS ON THIS SLIDE:
 - Blobs per nucleus: number of blobs in the fit divided by the number of hand-marked nuclei in that frame.
 - Cliff: a sudden drop instead of a gradual decline.
 - 90% line: the threshold we fixed in advance to define the cliff (we wrote down '≤ 3.5 blobs per nucleus' before running the extra frames).
 IF ASKED:
+- Does the 3-blobs rule hold everywhere? We only tested C. elegans frames with the LoG detector; other data or detectors may cross elsewhere.
 - Why fix thresholds in advance? So we cannot tune the claim to the data afterwards. Two of our advance predictions failed, and we report them as failed.</a:t>
             </a:r>
             <a:endParaRPr lang="en-US" dirty="0"/>
@@ -3430,11 +3619,12 @@
             <a:r>
               <a:rPr lang="en-US" dirty="0"/>
               <a:t>SAY:
-Three take-aways. One: our step-by-step changes made blob fits find nuclei much more reliably. Two: compared with the state of the art at equal file size, blobs are good for viewing but not the right format for measuring; a standard codec keeps the nuclei as well or better. Three: the usual image-quality number cannot decide this; you have to test with the analysis you plan to run.
+Three take-aways. One: our step-by-step changes made blob fits find nuclei more reliably, but on hand-marked nuclei a simple blob filter still ranks them better. Two: compared with the state of the art at the same file size, there is no single winner. Below 300 times, the blobs help 3D Cellpose and hurt the watershed and 2D Cellpose; beyond 300 times JPEG2000 keeps more nuclei for every detector. Three: a format that looks good is not automatically good for measuring, and the usual image-quality number cannot decide this; you have to test with the analysis you plan to run.
 TERMS ON THIS SLIDE:
 - Codec: a compression method (coder-decoder).
 IF ASKED:
-- So was the project a failure? No: we now know where blobs should and should not be trusted, which is what a user needs; and the evaluation method itself is reusable.</a:t>
+- So was the project a failure? No: we now know where blobs should and should not be trusted, which is what a user needs; and the evaluation method itself is reusable.
+- Are blobs useless for measuring? Not in general: with 3D Cellpose they kept more nuclei at moderate compression. But each analysis has to be checked separately.</a:t>
             </a:r>
             <a:endParaRPr lang="en-US" dirty="0"/>
           </a:p>
@@ -3618,14 +3808,15 @@
             <a:r>
               <a:rPr lang="en-US" dirty="0"/>
               <a:t>SAY:
-Following our supervisor's advice, the next step is compression biologists would actually use: lossless storage, or near-lossless where every error stays below the camera noise; video codecs, which exploit the similarity between neighbouring slices and time points; and judging success by whether cells can still be tracked, using the Cell Tracking Challenge's official scores.
+This is a change of direction, agreed with our supervisor after his feedback. So far we asked whether Gaussian blobs can store and show microscopy data; he pointed out that labs store their raw data losslessly and rarely use lossy formats like JPEG. So the next step is compression biologists would actually use. First, lossless storage, which gives about 2 to 4 times; we measured 4.2 times with lossless JPEG-XL on one C. elegans frame. Second, one specific near-lossless approach, noise-bounded coding, where every voxel may change but by less than the camera noise. Third, video codecs, which exploit the similarity between neighbouring slices and time points. And fourth, judging success by whether cells can still be tracked, using the Cell Tracking Challenge's official scores.
 TERMS ON THIS SLIDE:
 - Lossless: the decompressed data is bit-for-bit identical to the original.
-- Near-lossless / noise-bounded: every voxel may change, but by less than the camera's own noise.
+- Near-lossless: small, bounded changes are allowed. Noise-bounded coding is one way to set that bound: below the camera's own noise.
 - Video codec: compression made for movies (e.g. H.265, AV1) that predicts each frame from its neighbours.
 - Tracking: following each cell over time, including divisions.
 IF ASKED:
-- How much do lossless methods give? Typically 2-4x on microscopy (we measured 4.2x with lossless JPEG-XL on C. elegans); noise-bounded methods reach far more on raw camera data (up to ~100x reported for B3D).</a:t>
+- How much do lossless methods give? On our C. elegans frame: lossless JPEG-XL 4.2x, JPEG-LS 2.9x, JPEG2000 lossless 2.7x, Zstandard 2.5x. Noise-bounded coding can go further; how far depends on the camera noise, and we have not measured it on our data yet.
+- Why change direction? The supervisor's feedback: biologists need their measurements to stay valid, and they trust lossless or noise-bounded storage. Gaussian blobs remain interesting for viewing.</a:t>
             </a:r>
             <a:endParaRPr lang="en-US" dirty="0"/>
           </a:p>
@@ -3906,7 +4097,7 @@
             <a:r>
               <a:rPr lang="en-US" dirty="0"/>
               <a:t>SAY:
-Before touching real data we built the simplest possible test: a synthetic volume made of blobs, so we know the right answer. We fit blobs to it by comparing the blob sum with the volume at every voxel. It recovers the phantom almost perfectly, 47.9 dB. We also learned something here: the standard 3D Gaussian splatting renderer, designed for photographs of solid objects, treats blobs as blocking the ones behind them. Our volumes are transparent and glowing, so that rule is wrong; scored that way the same kind of fit collapsed to minus 7 dB. So from here on we compare blobs to voxels directly.
+Before touching real data we built the simplest possible test: a synthetic volume made of blobs, so we know the right answer. We fit blobs to it by comparing the blob sum with the volume at every voxel. We also learned something here: the standard 3D Gaussian splatting renderer, designed for photographs of solid objects, treats blobs as blocking the ones behind them. Our volumes are transparent and glowing, so that rule is wrong. In a controlled test on a small 15-blob phantom, the same fit scored 31.7 dB when compared at the voxels and minus 7.1 dB through the splatting renderer. So from here on we compare blobs to voxels directly. Our final phantom fit, with 2,000 blobs on a 50-blob phantom, reached 47.9 dB, almost perfect; that is a separate, later run.
 TERMS ON THIS SLIDE:
 - Phantom: artificial test data with a known answer.
 - PSNR (peak signal-to-noise ratio), in dB: a number for how close the reconstruction is to the data; higher is better, +3 dB roughly halves the squared error. It says nothing about whether nuclei survive.
@@ -3914,7 +4105,7 @@
 - Alpha-blending (alpha-compositing): the renderer rule that each blob partly hides the blobs behind it. Correct for opaque surfaces, wrong for glowing transparent volumes.
 - Comparing at every voxel (voxel query): evaluate the blob sum at each voxel centre and compare with the data. No camera, no hiding.
 IF ASKED:
-- Why −7.1 dB and 47.9 dB on different phantoms? −7.1 vs 31.7 dB was the controlled comparison on a 15-blob phantom (same fit, two ways of scoring). 47.9 dB is the final phantom fit with 2,000 blobs.</a:t>
+- Why two phantoms? 31.7 vs −7.1 dB is the controlled comparison (same fit, two ways of scoring, 15-blob phantom). 47.9 dB is a later run (2,000 blobs fitted to a 50-blob phantom) and is not part of that comparison.</a:t>
             </a:r>
             <a:endParaRPr lang="en-US" dirty="0"/>
           </a:p>
@@ -5160,7 +5351,7 @@
                   <a:srgbClr val="C9CDD6"/>
                 </a:solidFill>
               </a:rPr>
-              <a:t>Syed Muhammad Asad, Akim</a:t>
+              <a:t>Syed Muhammad Asad, Akim Al-Makhdar</a:t>
             </a:r>
             <a:endParaRPr lang="en-US" sz="1600" dirty="0"/>
           </a:p>
@@ -5335,7 +5526,43 @@
       </p:graphicFrame>
       <p:sp>
         <p:nvSpPr>
-          <p:cNvPr id="4" name="step-card-0"/>
+          <p:cNvPr id="4" name="Text 1"/>
+          <p:cNvSpPr txBox="1"/>
+          <p:nvPr/>
+        </p:nvSpPr>
+        <p:spPr>
+          <a:xfrm>
+            <a:off x="457200" y="4343400"/>
+            <a:ext cx="4754880" cy="274320"/>
+          </a:xfrm>
+          <a:prstGeom prst="rect">
+            <a:avLst/>
+          </a:prstGeom>
+          <a:noFill/>
+          <a:ln/>
+        </p:spPr>
+        <p:txBody>
+          <a:bodyPr wrap="square" lIns="0" tIns="0" rIns="0" bIns="0" rtlCol="0" anchor="t"/>
+          <a:lstStyle/>
+          <a:p>
+            <a:pPr indent="0" marL="0">
+              <a:buNone/>
+            </a:pPr>
+            <a:r>
+              <a:rPr lang="en-US" sz="1200" dirty="0">
+                <a:solidFill>
+                  <a:schemeClr val="accent5"/>
+                </a:solidFill>
+              </a:rPr>
+              <a:t>Seed-to-seed spread (SD) within each bar: 0.02–0.13 dB</a:t>
+            </a:r>
+            <a:endParaRPr lang="en-US" sz="1200" dirty="0"/>
+          </a:p>
+        </p:txBody>
+      </p:sp>
+      <p:sp>
+        <p:nvSpPr>
+          <p:cNvPr id="5" name="step-card-0"/>
           <p:cNvSpPr/>
           <p:nvPr/>
         </p:nvSpPr>
@@ -5362,7 +5589,7 @@
       </p:sp>
       <p:sp>
         <p:nvSpPr>
-          <p:cNvPr id="5" name="Text 2"/>
+          <p:cNvPr id="6" name="Text 3"/>
           <p:cNvSpPr txBox="1"/>
           <p:nvPr/>
         </p:nvSpPr>
@@ -5398,7 +5625,7 @@
       </p:sp>
       <p:sp>
         <p:nvSpPr>
-          <p:cNvPr id="6" name="Text 3"/>
+          <p:cNvPr id="7" name="Text 4"/>
           <p:cNvSpPr txBox="1"/>
           <p:nvPr/>
         </p:nvSpPr>
@@ -5434,7 +5661,7 @@
       </p:sp>
       <p:sp>
         <p:nvSpPr>
-          <p:cNvPr id="7" name="step-card-1"/>
+          <p:cNvPr id="8" name="step-card-1"/>
           <p:cNvSpPr/>
           <p:nvPr/>
         </p:nvSpPr>
@@ -5461,7 +5688,7 @@
       </p:sp>
       <p:sp>
         <p:nvSpPr>
-          <p:cNvPr id="8" name="Text 5"/>
+          <p:cNvPr id="9" name="Text 6"/>
           <p:cNvSpPr txBox="1"/>
           <p:nvPr/>
         </p:nvSpPr>
@@ -5497,7 +5724,7 @@
       </p:sp>
       <p:sp>
         <p:nvSpPr>
-          <p:cNvPr id="9" name="Text 6"/>
+          <p:cNvPr id="10" name="Text 7"/>
           <p:cNvSpPr txBox="1"/>
           <p:nvPr/>
         </p:nvSpPr>
@@ -5533,7 +5760,7 @@
       </p:sp>
       <p:sp>
         <p:nvSpPr>
-          <p:cNvPr id="10" name="step-card-2"/>
+          <p:cNvPr id="11" name="step-card-2"/>
           <p:cNvSpPr/>
           <p:nvPr/>
         </p:nvSpPr>
@@ -5560,7 +5787,7 @@
       </p:sp>
       <p:sp>
         <p:nvSpPr>
-          <p:cNvPr id="11" name="Text 8"/>
+          <p:cNvPr id="12" name="Text 9"/>
           <p:cNvSpPr txBox="1"/>
           <p:nvPr/>
         </p:nvSpPr>
@@ -5596,7 +5823,7 @@
       </p:sp>
       <p:sp>
         <p:nvSpPr>
-          <p:cNvPr id="12" name="Text 9"/>
+          <p:cNvPr id="13" name="Text 10"/>
           <p:cNvSpPr txBox="1"/>
           <p:nvPr/>
         </p:nvSpPr>
@@ -5624,7 +5851,7 @@
                   <a:schemeClr val="tx1"/>
                 </a:solidFill>
               </a:rPr>
-              <a:t>+3.2 dB with small spread; learned blobs are as stretched as real nuclei</a:t>
+              <a:t>+3.2 dB (22.3 → 25.5), seed SD ≤ 0.13 dB; learned blobs as stretched as real nuclei</a:t>
             </a:r>
             <a:endParaRPr lang="en-US" sz="1400" dirty="0"/>
           </a:p>
@@ -10375,7 +10602,7 @@
         <p:spPr>
           <a:xfrm>
             <a:off x="640080" y="2148840"/>
-            <a:ext cx="2240280" cy="1234440"/>
+            <a:ext cx="2240280" cy="1280160"/>
           </a:xfrm>
           <a:prstGeom prst="rect">
             <a:avLst/>
@@ -10477,7 +10704,7 @@
         <p:spPr>
           <a:xfrm>
             <a:off x="3429000" y="2148840"/>
-            <a:ext cx="2240280" cy="1234440"/>
+            <a:ext cx="2240280" cy="1280160"/>
           </a:xfrm>
           <a:prstGeom prst="rect">
             <a:avLst/>
@@ -10498,7 +10725,7 @@
                   <a:schemeClr val="tx2"/>
                 </a:solidFill>
               </a:rPr>
-              <a:t>hand-marked Drosophila nuclei in the top 100 detections: fitted blobs vs raw image</a:t>
+              <a:t>of 29 hand-marked Drosophila nuclei in the top 100 detections: fitted blobs vs raw brightness</a:t>
             </a:r>
             <a:endParaRPr lang="en-US" sz="1500" dirty="0"/>
           </a:p>
@@ -10558,13 +10785,13 @@
             <a:r>
               <a:rPr lang="en-US" sz="3200" b="1" dirty="0">
                 <a:solidFill>
-                  <a:schemeClr val="accent3"/>
+                  <a:schemeClr val="accent4"/>
                 </a:solidFill>
                 <a:latin typeface="Cambria" pitchFamily="34" charset="0"/>
                 <a:ea typeface="Cambria" pitchFamily="34" charset="-122"/>
                 <a:cs typeface="Cambria" pitchFamily="34" charset="-120"/>
               </a:rPr>
-              <a:t>≤ 4%</a:t>
+              <a:t>16–18</a:t>
             </a:r>
             <a:endParaRPr lang="en-US" sz="3200" dirty="0"/>
           </a:p>
@@ -10579,7 +10806,7 @@
         <p:spPr>
           <a:xfrm>
             <a:off x="6217920" y="2148840"/>
-            <a:ext cx="2240280" cy="1234440"/>
+            <a:ext cx="2240280" cy="1280160"/>
           </a:xfrm>
           <a:prstGeom prst="rect">
             <a:avLst/>
@@ -10600,7 +10827,7 @@
                   <a:schemeClr val="tx2"/>
                 </a:solidFill>
               </a:rPr>
-              <a:t>difference in nuclei found between three repeated fits</a:t>
+              <a:t>same top 100, raw candidates ranked by a simple LoG blob filter: better than every fit</a:t>
             </a:r>
             <a:endParaRPr lang="en-US" sz="1500" dirty="0"/>
           </a:p>
@@ -10614,8 +10841,8 @@
         </p:nvSpPr>
         <p:spPr>
           <a:xfrm>
-            <a:off x="457200" y="3840480"/>
-            <a:ext cx="8229600" cy="548640"/>
+            <a:off x="457200" y="3749040"/>
+            <a:ext cx="8229600" cy="640080"/>
           </a:xfrm>
           <a:prstGeom prst="rect">
             <a:avLst/>
@@ -10636,7 +10863,7 @@
                   <a:schemeClr val="tx2"/>
                 </a:solidFill>
               </a:rPr>
-              <a:t>Limit: with all 457 of its candidates the raw-image detector finds 26 of 29, more than any fit.</a:t>
+              <a:t>Fitting ranks nuclei better than brightness, but not better than a simple blob filter. With all 457 candidates the raw detector finds 26 of 29.</a:t>
             </a:r>
             <a:endParaRPr lang="en-US" sz="1500" dirty="0"/>
           </a:p>
@@ -10879,7 +11106,7 @@
         <p:spPr>
           <a:xfrm>
             <a:off x="2532888" y="2880360"/>
-            <a:ext cx="2011680" cy="256032"/>
+            <a:ext cx="2011680" cy="411480"/>
           </a:xfrm>
           <a:prstGeom prst="rect">
             <a:avLst/>
@@ -10901,6 +11128,20 @@
                 </a:solidFill>
               </a:rPr>
               <a:t>100% of nuclei kept</a:t>
+            </a:r>
+            <a:endParaRPr lang="en-US" sz="1200" dirty="0"/>
+          </a:p>
+          <a:p>
+            <a:pPr algn="ctr" indent="0" marL="0">
+              <a:buNone/>
+            </a:pPr>
+            <a:r>
+              <a:rPr lang="en-US" sz="1000" dirty="0">
+                <a:solidFill>
+                  <a:schemeClr val="accent5"/>
+                </a:solidFill>
+              </a:rPr>
+              <a:t>2D Cellpose, whole frame</a:t>
             </a:r>
             <a:endParaRPr lang="en-US" sz="1200" dirty="0"/>
           </a:p>
@@ -10975,7 +11216,7 @@
         <p:spPr>
           <a:xfrm>
             <a:off x="4608576" y="2880360"/>
-            <a:ext cx="2011680" cy="256032"/>
+            <a:ext cx="2011680" cy="411480"/>
           </a:xfrm>
           <a:prstGeom prst="rect">
             <a:avLst/>
@@ -10997,6 +11238,20 @@
                 </a:solidFill>
               </a:rPr>
               <a:t>97% of nuclei kept</a:t>
+            </a:r>
+            <a:endParaRPr lang="en-US" sz="1200" dirty="0"/>
+          </a:p>
+          <a:p>
+            <a:pPr algn="ctr" indent="0" marL="0">
+              <a:buNone/>
+            </a:pPr>
+            <a:r>
+              <a:rPr lang="en-US" sz="1000" dirty="0">
+                <a:solidFill>
+                  <a:schemeClr val="accent5"/>
+                </a:solidFill>
+              </a:rPr>
+              <a:t>2D Cellpose, whole frame</a:t>
             </a:r>
             <a:endParaRPr lang="en-US" sz="1200" dirty="0"/>
           </a:p>
@@ -11071,7 +11326,7 @@
         <p:spPr>
           <a:xfrm>
             <a:off x="6684264" y="2880360"/>
-            <a:ext cx="2011680" cy="256032"/>
+            <a:ext cx="2011680" cy="411480"/>
           </a:xfrm>
           <a:prstGeom prst="rect">
             <a:avLst/>
@@ -11096,6 +11351,20 @@
             </a:r>
             <a:endParaRPr lang="en-US" sz="1200" dirty="0"/>
           </a:p>
+          <a:p>
+            <a:pPr algn="ctr" indent="0" marL="0">
+              <a:buNone/>
+            </a:pPr>
+            <a:r>
+              <a:rPr lang="en-US" sz="1000" dirty="0">
+                <a:solidFill>
+                  <a:schemeClr val="accent5"/>
+                </a:solidFill>
+              </a:rPr>
+              <a:t>2D Cellpose, whole frame</a:t>
+            </a:r>
+            <a:endParaRPr lang="en-US" sz="1200" dirty="0"/>
+          </a:p>
         </p:txBody>
       </p:sp>
       <p:sp>
@@ -11106,7 +11375,7 @@
         </p:nvSpPr>
         <p:spPr>
           <a:xfrm>
-            <a:off x="457200" y="3291840"/>
+            <a:off x="457200" y="3429000"/>
             <a:ext cx="2606040" cy="1188720"/>
           </a:xfrm>
           <a:prstGeom prst="rect">
@@ -11156,7 +11425,7 @@
         </p:nvSpPr>
         <p:spPr>
           <a:xfrm>
-            <a:off x="3246120" y="3291840"/>
+            <a:off x="3246120" y="3429000"/>
             <a:ext cx="2606040" cy="1188720"/>
           </a:xfrm>
           <a:prstGeom prst="rect">
@@ -11206,7 +11475,7 @@
         </p:nvSpPr>
         <p:spPr>
           <a:xfrm>
-            <a:off x="6035040" y="3291840"/>
+            <a:off x="6035040" y="3429000"/>
             <a:ext cx="2606040" cy="1188720"/>
           </a:xfrm>
           <a:prstGeom prst="rect">
@@ -11242,7 +11511,7 @@
                   <a:schemeClr val="tx1"/>
                 </a:solidFill>
               </a:rPr>
-              <a:t>12 C. elegans frames, 2,958 hand-marked nuclei, 4 nucleus detectors</a:t>
+              <a:t>12 C. elegans frames from 2 embryos, 2,958 hand-marked nuclei, 4 detectors</a:t>
             </a:r>
             <a:endParaRPr lang="en-US" sz="1500" dirty="0"/>
           </a:p>
@@ -11628,7 +11897,7 @@
                   <a:schemeClr val="tx1"/>
                 </a:solidFill>
               </a:rPr>
-              <a:t>Below ~3 blobs per nucleus, nuclei vanish</a:t>
+              <a:t>C. elegans: nuclei vanish below ~3 blobs each</a:t>
             </a:r>
             <a:endParaRPr lang="en-US" sz="2800" dirty="0"/>
           </a:p>
@@ -11751,7 +12020,7 @@
                   <a:schemeClr val="tx1"/>
                 </a:solidFill>
               </a:rPr>
-              <a:t>Nuclei kept drops below 90% at 1.1-3.1 blobs per nucleus, on all 12 frames</a:t>
+              <a:t>Under LoG, nuclei kept crosses 90% at 1.1–3.1 blobs per nucleus (all 12 frames)</a:t>
             </a:r>
             <a:endParaRPr lang="en-US" sz="1400" dirty="0"/>
           </a:p>
@@ -11850,7 +12119,7 @@
                   <a:schemeClr val="tx1"/>
                 </a:solidFill>
               </a:rPr>
-              <a:t>Barely moves over these budgets: at most 2.6 dB per frame</a:t>
+              <a:t>For budgets of 1,000+ blobs it moves at most 2.6 dB per frame</a:t>
             </a:r>
             <a:endParaRPr lang="en-US" sz="1400" dirty="0"/>
           </a:p>
@@ -11949,7 +12218,7 @@
                   <a:schemeClr val="tx1"/>
                 </a:solidFill>
               </a:rPr>
-              <a:t>Image quality cannot tell you when the blob budget is too small</a:t>
+              <a:t>Choosing the budget by PSNR can miss the cliff: check the nuclei</a:t>
             </a:r>
             <a:endParaRPr lang="en-US" sz="1400" dirty="0"/>
           </a:p>
@@ -12088,7 +12357,7 @@
           <a:p>
             <a:pPr algn="l" marL="342900" indent="-342900">
               <a:spcAft>
-                <a:spcPts val="1400"/>
+                <a:spcPts val="1200"/>
               </a:spcAft>
               <a:buSzPct val="100000"/>
               <a:buChar char="•"/>
@@ -12099,14 +12368,14 @@
                   <a:srgbClr val="E5E7EB"/>
                 </a:solidFill>
               </a:rPr>
-              <a:t>Shape, starting points, step size and a size cap each made the fit find more nuclei.</a:t>
+              <a:t>Stretched blobs, one start per nucleus and a size cap made our fits find more nuclei; a simple blob filter still ranks them better.</a:t>
             </a:r>
             <a:endParaRPr lang="en-US" sz="1700" dirty="0"/>
           </a:p>
           <a:p>
             <a:pPr algn="l" marL="342900" indent="-342900">
               <a:spcAft>
-                <a:spcPts val="1400"/>
+                <a:spcPts val="1200"/>
               </a:spcAft>
               <a:buSzPct val="100000"/>
               <a:buChar char="•"/>
@@ -12117,14 +12386,14 @@
                   <a:srgbClr val="E5E7EB"/>
                 </a:solidFill>
               </a:rPr>
-              <a:t>Blobs are good for looking, not for measuring: at the same file size a standard codec keeps nuclei as well or better.</a:t>
+              <a:t>At the same file size, the better format depends on the detector and the compression: blobs help 3D Cellpose below 300×, JPEG2000 wins beyond.</a:t>
             </a:r>
             <a:endParaRPr lang="en-US" sz="1700" dirty="0"/>
           </a:p>
           <a:p>
             <a:pPr algn="l" marL="342900" indent="-342900">
               <a:spcAft>
-                <a:spcPts val="1400"/>
+                <a:spcPts val="1200"/>
               </a:spcAft>
               <a:buSzPct val="100000"/>
               <a:buChar char="•"/>
@@ -12135,7 +12404,7 @@
                   <a:srgbClr val="E5E7EB"/>
                 </a:solidFill>
               </a:rPr>
-              <a:t>PSNR cannot choose the format: test with the analysis you will actually run.</a:t>
+              <a:t>Viewing and measuring need separate checks: PSNR cannot choose the format.</a:t>
             </a:r>
             <a:endParaRPr lang="en-US" sz="1700" dirty="0"/>
           </a:p>
@@ -12686,8 +12955,8 @@
         </p:nvSpPr>
         <p:spPr>
           <a:xfrm>
-            <a:off x="457200" y="1188720"/>
-            <a:ext cx="548640" cy="548640"/>
+            <a:off x="457200" y="1097280"/>
+            <a:ext cx="502920" cy="502920"/>
           </a:xfrm>
           <a:prstGeom prst="ellipse">
             <a:avLst/>
@@ -12711,8 +12980,8 @@
         </p:nvSpPr>
         <p:spPr>
           <a:xfrm>
-            <a:off x="457200" y="1188720"/>
-            <a:ext cx="548640" cy="548640"/>
+            <a:off x="457200" y="1097280"/>
+            <a:ext cx="502920" cy="502920"/>
           </a:xfrm>
           <a:prstGeom prst="rect">
             <a:avLst/>
@@ -12728,14 +12997,14 @@
               <a:buNone/>
             </a:pPr>
             <a:r>
-              <a:rPr lang="en-US" sz="2000" b="1" dirty="0">
+              <a:rPr lang="en-US" sz="1800" b="1" dirty="0">
                 <a:solidFill>
                   <a:schemeClr val="bg1"/>
                 </a:solidFill>
               </a:rPr>
               <a:t>1</a:t>
             </a:r>
-            <a:endParaRPr lang="en-US" sz="2000" dirty="0"/>
+            <a:endParaRPr lang="en-US" sz="1800" dirty="0"/>
           </a:p>
         </p:txBody>
       </p:sp>
@@ -12747,8 +13016,8 @@
         </p:nvSpPr>
         <p:spPr>
           <a:xfrm>
-            <a:off x="1234440" y="1143000"/>
-            <a:ext cx="7406640" cy="914400"/>
+            <a:off x="1188720" y="1051560"/>
+            <a:ext cx="7498080" cy="777240"/>
           </a:xfrm>
           <a:prstGeom prst="rect">
             <a:avLst/>
@@ -12764,28 +13033,28 @@
               <a:buNone/>
             </a:pPr>
             <a:r>
-              <a:rPr lang="en-US" sz="1700" b="1" dirty="0">
+              <a:rPr lang="en-US" sz="1600" b="1" dirty="0">
                 <a:solidFill>
                   <a:schemeClr val="tx1"/>
                 </a:solidFill>
               </a:rPr>
-              <a:t>Lossless and near-lossless</a:t>
-            </a:r>
-            <a:endParaRPr lang="en-US" sz="1700" dirty="0"/>
+              <a:t>Lossless storage</a:t>
+            </a:r>
+            <a:endParaRPr lang="en-US" sz="1600" dirty="0"/>
           </a:p>
           <a:p>
             <a:pPr indent="0" marL="0">
               <a:buNone/>
             </a:pPr>
             <a:r>
-              <a:rPr lang="en-US" sz="1700" dirty="0">
+              <a:rPr lang="en-US" sz="1600" dirty="0">
                 <a:solidFill>
                   <a:srgbClr val="3A3F4B"/>
                 </a:solidFill>
               </a:rPr>
-              <a:t>what labs actually store: exact, or errors kept below the camera noise</a:t>
-            </a:r>
-            <a:endParaRPr lang="en-US" sz="1700" dirty="0"/>
+              <a:t>what labs keep today: bit-exact; 4.2× with lossless JPEG-XL on one C. elegans frame</a:t>
+            </a:r>
+            <a:endParaRPr lang="en-US" sz="1600" dirty="0"/>
           </a:p>
         </p:txBody>
       </p:sp>
@@ -12797,8 +13066,8 @@
         </p:nvSpPr>
         <p:spPr>
           <a:xfrm>
-            <a:off x="457200" y="2286000"/>
-            <a:ext cx="548640" cy="548640"/>
+            <a:off x="457200" y="1965960"/>
+            <a:ext cx="502920" cy="502920"/>
           </a:xfrm>
           <a:prstGeom prst="ellipse">
             <a:avLst/>
@@ -12822,8 +13091,8 @@
         </p:nvSpPr>
         <p:spPr>
           <a:xfrm>
-            <a:off x="457200" y="2286000"/>
-            <a:ext cx="548640" cy="548640"/>
+            <a:off x="457200" y="1965960"/>
+            <a:ext cx="502920" cy="502920"/>
           </a:xfrm>
           <a:prstGeom prst="rect">
             <a:avLst/>
@@ -12839,14 +13108,14 @@
               <a:buNone/>
             </a:pPr>
             <a:r>
-              <a:rPr lang="en-US" sz="2000" b="1" dirty="0">
+              <a:rPr lang="en-US" sz="1800" b="1" dirty="0">
                 <a:solidFill>
                   <a:schemeClr val="bg1"/>
                 </a:solidFill>
               </a:rPr>
               <a:t>2</a:t>
             </a:r>
-            <a:endParaRPr lang="en-US" sz="2000" dirty="0"/>
+            <a:endParaRPr lang="en-US" sz="1800" dirty="0"/>
           </a:p>
         </p:txBody>
       </p:sp>
@@ -12858,8 +13127,8 @@
         </p:nvSpPr>
         <p:spPr>
           <a:xfrm>
-            <a:off x="1234440" y="2240280"/>
-            <a:ext cx="7406640" cy="914400"/>
+            <a:off x="1188720" y="1920240"/>
+            <a:ext cx="7498080" cy="777240"/>
           </a:xfrm>
           <a:prstGeom prst="rect">
             <a:avLst/>
@@ -12875,28 +13144,28 @@
               <a:buNone/>
             </a:pPr>
             <a:r>
-              <a:rPr lang="en-US" sz="1700" b="1" dirty="0">
+              <a:rPr lang="en-US" sz="1600" b="1" dirty="0">
                 <a:solidFill>
                   <a:schemeClr val="tx1"/>
                 </a:solidFill>
               </a:rPr>
-              <a:t>Video codecs</a:t>
-            </a:r>
-            <a:endParaRPr lang="en-US" sz="1700" dirty="0"/>
+              <a:t>Noise-bounded coding</a:t>
+            </a:r>
+            <a:endParaRPr lang="en-US" sz="1600" dirty="0"/>
           </a:p>
           <a:p>
             <a:pPr indent="0" marL="0">
               <a:buNone/>
             </a:pPr>
             <a:r>
-              <a:rPr lang="en-US" sz="1700" dirty="0">
+              <a:rPr lang="en-US" sz="1600" dirty="0">
                 <a:solidFill>
                   <a:srgbClr val="3A3F4B"/>
                 </a:solidFill>
               </a:rPr>
-              <a:t>use the similarity between neighbouring slices and time points</a:t>
-            </a:r>
-            <a:endParaRPr lang="en-US" sz="1700" dirty="0"/>
+              <a:t>one specific near-lossless method: every change kept below the camera noise</a:t>
+            </a:r>
+            <a:endParaRPr lang="en-US" sz="1600" dirty="0"/>
           </a:p>
         </p:txBody>
       </p:sp>
@@ -12908,8 +13177,8 @@
         </p:nvSpPr>
         <p:spPr>
           <a:xfrm>
-            <a:off x="457200" y="3383280"/>
-            <a:ext cx="548640" cy="548640"/>
+            <a:off x="457200" y="2834640"/>
+            <a:ext cx="502920" cy="502920"/>
           </a:xfrm>
           <a:prstGeom prst="ellipse">
             <a:avLst/>
@@ -12933,8 +13202,8 @@
         </p:nvSpPr>
         <p:spPr>
           <a:xfrm>
-            <a:off x="457200" y="3383280"/>
-            <a:ext cx="548640" cy="548640"/>
+            <a:off x="457200" y="2834640"/>
+            <a:ext cx="502920" cy="502920"/>
           </a:xfrm>
           <a:prstGeom prst="rect">
             <a:avLst/>
@@ -12950,14 +13219,14 @@
               <a:buNone/>
             </a:pPr>
             <a:r>
-              <a:rPr lang="en-US" sz="2000" b="1" dirty="0">
+              <a:rPr lang="en-US" sz="1800" b="1" dirty="0">
                 <a:solidFill>
                   <a:schemeClr val="bg1"/>
                 </a:solidFill>
               </a:rPr>
               <a:t>3</a:t>
             </a:r>
-            <a:endParaRPr lang="en-US" sz="2000" dirty="0"/>
+            <a:endParaRPr lang="en-US" sz="1800" dirty="0"/>
           </a:p>
         </p:txBody>
       </p:sp>
@@ -12969,8 +13238,8 @@
         </p:nvSpPr>
         <p:spPr>
           <a:xfrm>
-            <a:off x="1234440" y="3337560"/>
-            <a:ext cx="7406640" cy="914400"/>
+            <a:off x="1188720" y="2788920"/>
+            <a:ext cx="7498080" cy="777240"/>
           </a:xfrm>
           <a:prstGeom prst="rect">
             <a:avLst/>
@@ -12986,28 +13255,139 @@
               <a:buNone/>
             </a:pPr>
             <a:r>
-              <a:rPr lang="en-US" sz="1700" b="1" dirty="0">
+              <a:rPr lang="en-US" sz="1600" b="1" dirty="0">
                 <a:solidFill>
                   <a:schemeClr val="tx1"/>
                 </a:solidFill>
               </a:rPr>
-              <a:t>Judge by tracking</a:t>
-            </a:r>
-            <a:endParaRPr lang="en-US" sz="1700" dirty="0"/>
+              <a:t>Video codecs</a:t>
+            </a:r>
+            <a:endParaRPr lang="en-US" sz="1600" dirty="0"/>
           </a:p>
           <a:p>
             <a:pPr indent="0" marL="0">
               <a:buNone/>
             </a:pPr>
             <a:r>
-              <a:rPr lang="en-US" sz="1700" dirty="0">
+              <a:rPr lang="en-US" sz="1600" dirty="0">
+                <a:solidFill>
+                  <a:srgbClr val="3A3F4B"/>
+                </a:solidFill>
+              </a:rPr>
+              <a:t>use the similarity between neighbouring slices and time points</a:t>
+            </a:r>
+            <a:endParaRPr lang="en-US" sz="1600" dirty="0"/>
+          </a:p>
+        </p:txBody>
+      </p:sp>
+      <p:sp>
+        <p:nvSpPr>
+          <p:cNvPr id="12" name="num-3"/>
+          <p:cNvSpPr/>
+          <p:nvPr/>
+        </p:nvSpPr>
+        <p:spPr>
+          <a:xfrm>
+            <a:off x="457200" y="3703320"/>
+            <a:ext cx="502920" cy="502920"/>
+          </a:xfrm>
+          <a:prstGeom prst="ellipse">
+            <a:avLst/>
+          </a:prstGeom>
+          <a:solidFill>
+            <a:schemeClr val="accent1"/>
+          </a:solidFill>
+          <a:ln w="12700">
+            <a:solidFill>
+              <a:schemeClr val="accent1"/>
+            </a:solidFill>
+            <a:prstDash val="solid"/>
+          </a:ln>
+        </p:spPr>
+      </p:sp>
+      <p:sp>
+        <p:nvSpPr>
+          <p:cNvPr id="13" name="Text 11"/>
+          <p:cNvSpPr txBox="1"/>
+          <p:nvPr/>
+        </p:nvSpPr>
+        <p:spPr>
+          <a:xfrm>
+            <a:off x="457200" y="3703320"/>
+            <a:ext cx="502920" cy="502920"/>
+          </a:xfrm>
+          <a:prstGeom prst="rect">
+            <a:avLst/>
+          </a:prstGeom>
+          <a:noFill/>
+          <a:ln/>
+        </p:spPr>
+        <p:txBody>
+          <a:bodyPr wrap="square" lIns="0" tIns="0" rIns="0" bIns="0" rtlCol="0" anchor="ctr"/>
+          <a:lstStyle/>
+          <a:p>
+            <a:pPr algn="ctr" indent="0" marL="0">
+              <a:buNone/>
+            </a:pPr>
+            <a:r>
+              <a:rPr lang="en-US" sz="1800" b="1" dirty="0">
+                <a:solidFill>
+                  <a:schemeClr val="bg1"/>
+                </a:solidFill>
+              </a:rPr>
+              <a:t>4</a:t>
+            </a:r>
+            <a:endParaRPr lang="en-US" sz="1800" dirty="0"/>
+          </a:p>
+        </p:txBody>
+      </p:sp>
+      <p:sp>
+        <p:nvSpPr>
+          <p:cNvPr id="14" name="Text 12"/>
+          <p:cNvSpPr txBox="1"/>
+          <p:nvPr/>
+        </p:nvSpPr>
+        <p:spPr>
+          <a:xfrm>
+            <a:off x="1188720" y="3657600"/>
+            <a:ext cx="7498080" cy="777240"/>
+          </a:xfrm>
+          <a:prstGeom prst="rect">
+            <a:avLst/>
+          </a:prstGeom>
+          <a:noFill/>
+          <a:ln/>
+        </p:spPr>
+        <p:txBody>
+          <a:bodyPr wrap="square" lIns="0" tIns="0" rIns="0" bIns="0" rtlCol="0" anchor="t"/>
+          <a:lstStyle/>
+          <a:p>
+            <a:pPr indent="0" marL="0">
+              <a:buNone/>
+            </a:pPr>
+            <a:r>
+              <a:rPr lang="en-US" sz="1600" b="1" dirty="0">
+                <a:solidFill>
+                  <a:schemeClr val="tx1"/>
+                </a:solidFill>
+              </a:rPr>
+              <a:t>Judge by tracking</a:t>
+            </a:r>
+            <a:endParaRPr lang="en-US" sz="1600" dirty="0"/>
+          </a:p>
+          <a:p>
+            <a:pPr indent="0" marL="0">
+              <a:buNone/>
+            </a:pPr>
+            <a:r>
+              <a:rPr lang="en-US" sz="1600" dirty="0">
                 <a:solidFill>
                   <a:srgbClr val="3A3F4B"/>
                 </a:solidFill>
               </a:rPr>
               <a:t>measure with the Cell Tracking Challenge scores, not image quality</a:t>
             </a:r>
-            <a:endParaRPr lang="en-US" sz="1700" dirty="0"/>
+            <a:endParaRPr lang="en-US" sz="1600" dirty="0"/>
           </a:p>
         </p:txBody>
       </p:sp>
@@ -14715,7 +15095,7 @@
                   <a:schemeClr val="tx1"/>
                 </a:solidFill>
               </a:rPr>
-              <a:t>47.9 dB, almost perfect. The usual splatting renderer scored −7.1 dB</a:t>
+              <a:t>Same fit, 15-blob phantom: 31.7 dB at voxels, −7.1 dB via the splatting renderer. Final fit: 47.9 dB</a:t>
             </a:r>
             <a:endParaRPr lang="en-US" sz="1400" dirty="0"/>
           </a:p>

--- a/Gaussian_Blobs_Microscopy_v3.pptx
+++ b/Gaussian_Blobs_Microscopy_v3.pptx
@@ -126,14 +126,14 @@
   <p:extLst>
     <p:ext uri="{521415D9-36F7-43E2-AB2F-B90AF26B5E84}">
       <p14:sectionLst xmlns:p14="http://schemas.microsoft.com/office/powerpoint/2010/main">
-        <p14:section name="Problem and data" id="{f0cb90bf-5370-dd24-6bd1-a6a499ffaea1}">
+        <p14:section name="Problem and data" id="{5983f150-4517-19ae-46d9-458fe5fd8afb}">
           <p14:sldIdLst>
             <p14:sldId id="256"/>
             <p14:sldId id="257"/>
             <p14:sldId id="258"/>
           </p14:sldIdLst>
         </p14:section>
-        <p14:section name="Simple setup and changes" id="{955a83b3-7c75-e644-26e6-77322385f96f}">
+        <p14:section name="Simple setup and changes" id="{6872d267-8e90-7de7-9c17-14ef7ee0ea64}">
           <p14:sldIdLst>
             <p14:sldId id="259"/>
             <p14:sldId id="260"/>
@@ -147,20 +147,20 @@
             <p14:sldId id="268"/>
           </p14:sldIdLst>
         </p14:section>
-        <p14:section name="Results and validation" id="{d2428e7c-28ba-f775-847e-5c4575903008}">
+        <p14:section name="Results and validation" id="{186691af-cd23-7d81-0408-1f0c9b9c073e}">
           <p14:sldIdLst>
             <p14:sldId id="269"/>
             <p14:sldId id="270"/>
           </p14:sldIdLst>
         </p14:section>
-        <p14:section name="State of the art" id="{46c815d5-1349-f594-b4e2-df17eb9553c8}">
+        <p14:section name="State of the art" id="{8fcbf522-fa52-f205-3a87-9e9a879bba53}">
           <p14:sldIdLst>
             <p14:sldId id="271"/>
             <p14:sldId id="272"/>
             <p14:sldId id="273"/>
           </p14:sldIdLst>
         </p14:section>
-        <p14:section name="Conclusion" id="{272ed676-6756-d3dc-c3e9-13391b3178cc}">
+        <p14:section name="Conclusion" id="{54ecf05a-c125-d6eb-39da-2a283ca0ac1b}">
           <p14:sldIdLst>
             <p14:sldId id="274"/>
             <p14:sldId id="275"/>
@@ -3041,13 +3041,14 @@
             <a:r>
               <a:rPr lang="en-US" dirty="0"/>
               <a:t>SAY:
-We then asked which nuclei are still lost. They are the faint ones, and when we followed their blobs during fitting, the blobs did not fade; they spread out, about 30 percent wider than for nuclei we kept, until there was no peak left to detect. So we capped the width of nucleus blobs. Over four regions, faint nuclei found went from 13 of 31 to 19 of 31, and image quality changed by only 0.01 dB. Honestly: one region got worse, and on the Drosophila data the cap changed nothing.
+We then asked which nuclei are still lost. They are the faint ones. At the end of fitting, the blob nearest to each lost faint nucleus was not dimmer than for the nuclei we kept, but about 30 percent wider, and a wide blob leaves only a flat peak for the detector. So we capped the width of nucleus blobs. With the cap, faint nuclei found went from 13 of 31 to 19 of 31 over four regions, and image quality changed by only 0.01 dB. Honestly: this is one seed, one region got worse, and on the Drosophila data the cap changed nothing. Also, we compared the blobs at the end of fitting; we did not track them through fitting, so the widening is an association that the cap result supports, not a demonstrated cause.
 TERMS ON THIS SLIDE:
 - Faint nucleus: one whose brightness above the surroundings is in the lower half.
 - Size cap: an upper limit on a blob's size, applied only to the blobs that started on nuclei.
 - Region: one 64 x 128 x 128 crop of the Tribolium frame.
 IF ASKED:
-- Is +6 nuclei significant? It is one seed and 4 regions, so treat it as promising, not settled. The result survived a scoring-bug fix (it was +7 before).</a:t>
+- Is +6 nuclei significant? It is one seed and 4 regions, so treat it as promising, not settled. The result survived a scoring-bug fix (it was +7 before).
+- Did you watch the blobs widen? No. We compared the blob nearest to each nucleus at the end of fitting, not blobs tracked over time. That width comparison was also scored before the scoring-bug fix and could not be redone.</a:t>
             </a:r>
             <a:endParaRPr lang="en-US" dirty="0"/>
           </a:p>
@@ -3136,7 +3137,7 @@
             <a:r>
               <a:rPr lang="en-US" dirty="0"/>
               <a:t>SAY:
-Here are all eight changes side by side, four by Akim and four by us, each compared with the version just before it. I want to be clear that these were measured one at a time, on different data and with different numbers of repeats, so you cannot add them up into one overall improvement. Together they turn a fit that merely looks right into one where the nuclei are found much more reliably.
+Here are all eight changes side by side, four by Akim and four by us. I want to be clear that these are separate comparisons, each under the settings on its own slide, not a chain where every row builds on the one above. They used different data, budgets and numbers of repeats, so you cannot add them up into one overall improvement. One row needs care: the cell-count row shows F1 rising as the budget grows from 301 to 1,804 blobs; it does not show that choosing the budget from the cell count beats another way of choosing it. Together, the changes turn a fit that merely looks right into one where the nuclei are found much more reliably.
 TERMS ON THIS SLIDE:
 - Naive / simple setup: round blobs with random starting positions, default step size, no cap.
 IF ASKED:
@@ -3237,6 +3238,7 @@
 IF ASKED:
 - How noisy is 14 vs 10? One nucleus is 3.4% of 29; we only call a difference real if it is about 3 nuclei and has the same sign in all seeds (mean of 3 seeds here).
 - Why 16-18? 16 with LoG scales fixed in advance (1.5-3 micrometres); 18 with a single 2-micrometre scale chosen after seeing results.
+- And in the top 200? There the best fit (uniform sampling, 22.7) and LoG (22) are level, within one nucleus. The filter is clearly better only in the top 100.
 - Are fits repeatable? Our own fits: seed spread at most 0.13 dB (Step 5). Luxar, used on the next slides: three repeated fits of one frame differed by at most 2.1-3.7 percentage points of nuclei kept, depending on the detector.</a:t>
             </a:r>
             <a:endParaRPr lang="en-US" dirty="0"/>
@@ -3424,7 +3426,7 @@
             <a:r>
               <a:rPr lang="en-US" dirty="0"/>
               <a:t>SAY:
-The result. Bars above zero mean the blobs kept more nuclei than JPEG2000 at the same file size; below zero, JPEG2000 kept more. Up to about 300 times compression the answer depends on the detector: Cellpose in 3D mode finds 3.5 points more nuclei in the blob version, the classical watershed and Cellpose in 2D mode find more in JPEG2000, and the simple blob detector LoG shows no consistent difference. Beyond 300 times, every detector prefers JPEG2000 by 17 to 23 points. Meanwhile PSNR says JPEG2000 is better on every single frame, so PSNR alone could not have told you which format a given analysis needs. The same Cellpose network changing sides between 2D and 3D mode shows the problem comes from processing slice by slice.
+The result. Bars above zero mean the blobs kept more nuclei than JPEG2000 at the same file size; below zero, JPEG2000 kept more. Up to about 300 times compression the answer depends on the detector: Cellpose in 3D mode finds 3.5 points more nuclei in the blob version, the classical watershed and Cellpose in 2D mode find more in JPEG2000, and the simple blob detector LoG shows no consistent difference. Beyond 300 times, every detector prefers JPEG2000 by 17 to 23 points. Meanwhile PSNR says JPEG2000 is better on every single frame, so PSNR alone could not have told you which format a given analysis needs. The same Cellpose network changing sides between 2D and 3D mode supports an explanation involving processing geometry: slice by slice versus the whole volume. Switching modes shows that the behaviour differs; it does not isolate the exact cause.
 TERMS ON THIS SLIDE:
 - LoG (Laplacian of Gaussian): a classic blob detector that responds to bright round spots of a given size.
 - Watershed: a classical segmentation that separates touching bright regions, like water filling valleys.
@@ -3433,6 +3435,7 @@
 - Statistics: each frame counts once; Wilcoxon signed-rank tests over the 12 frames, Holm-corrected for 8 tests. Everything except LoG below 300x is significant (Holm-corrected p ≤ 0.01). The 12 frames come from only 2 embryos, so they are not 12 independent animals.
 IF ASKED:
 - Is LoG +1.3 real? No: 8 of 12 frames, p = 0.11; it comes from one embryo only.
+- Is slice-by-slice processing proven to be the cause? No. Same network, same weights, different behaviour: so the penalty is not a fixed property of the learned model. But 3D mode also changes how predictions are combined and cleaned up, so the mode switch does not isolate geometry as the cause.
 - Why frames and not single comparisons? An earlier draft averaged all matched pairs, with bootstrap intervals per pair. Pairs from one frame are not independent, so the final analysis averages per frame first and tests across frames; the numbers here are that final analysis, the same as in the paper.
 - Why does JPEG2000 win at high compression? Below about 3 blobs per nucleus, blob fits lose whole nuclei; wavelet compression degrades gradually.</a:t>
             </a:r>
@@ -3619,7 +3622,7 @@
             <a:r>
               <a:rPr lang="en-US" dirty="0"/>
               <a:t>SAY:
-Three take-aways. One: our step-by-step changes made blob fits find nuclei more reliably, but on hand-marked nuclei a simple blob filter still ranks them better. Two: compared with the state of the art at the same file size, there is no single winner. Below 300 times, the blobs help 3D Cellpose and hurt the watershed and 2D Cellpose; beyond 300 times JPEG2000 keeps more nuclei for every detector. Three: a format that looks good is not automatically good for measuring, and the usual image-quality number cannot decide this; you have to test with the analysis you plan to run.
+Three take-aways. One: our step-by-step changes made blob fits find nuclei more reliably, but on hand-marked nuclei a simple blob filter still ranks them better among the top 100 detections, and as well among the top 200. Two: compared with the state of the art at the same file size, there is no single winner. Below 300 times, the blobs help 3D Cellpose and hurt the watershed and 2D Cellpose; beyond 300 times JPEG2000 keeps more nuclei for every detector. Three: a format that looks good is not automatically good for measuring, and the usual image-quality number cannot decide this; you have to test with the analysis you plan to run.
 TERMS ON THIS SLIDE:
 - Codec: a compression method (coder-decoder).
 IF ASKED:
@@ -4495,6 +4498,7 @@
 - Under-trained: the fit stopped before it had finished improving.
 IF ASKED:
 - Are the 230 cells ground truth? No, they come from a detector with fixed settings; the hand-marked checks come later (validation slide and the state-of-the-art test).
+- Does this show that the cell-count rule is a good way to pick the budget? No. F1 rose because the budget grew sixfold, from 301 to 1,804 blobs. The rule was never compared with another way of choosing the budget.
 - Why does PSNR fall with more blobs? The number of fitting steps was fixed at 3,000; more blobs need more steps. We later saw the same confound in our own experiments.</a:t>
             </a:r>
             <a:endParaRPr lang="en-US" dirty="0"/>
@@ -7059,7 +7063,7 @@
                   <a:schemeClr val="tx1"/>
                 </a:solidFill>
               </a:rPr>
-              <a:t>Lost faint nuclei had blobs ~30% wider, spread out until no peak was left</a:t>
+              <a:t>At the end of fitting, blobs at lost faint nuclei were ~30% wider than at kept ones</a:t>
             </a:r>
             <a:endParaRPr lang="en-US" sz="1400" dirty="0"/>
           </a:p>
@@ -8687,7 +8691,7 @@
                           <a:ea typeface="Calibri" pitchFamily="34" charset="-122"/>
                           <a:cs typeface="Calibri" pitchFamily="34" charset="-120"/>
                         </a:rPr>
-                        <a:t>Blobs set from cell count</a:t>
+                        <a:t>More blobs, in cell-count units</a:t>
                       </a:r>
                       <a:endParaRPr lang="en-US" sz="1400" dirty="0">
                         <a:latin typeface="Calibri" charset="0"/>
@@ -8823,7 +8827,7 @@
                           <a:ea typeface="Calibri" pitchFamily="34" charset="-122"/>
                           <a:cs typeface="Calibri" pitchFamily="34" charset="-120"/>
                         </a:rPr>
-                        <a:t>cell matching F1</a:t>
+                        <a:t>cell F1, 301 → 1,804 blobs</a:t>
                       </a:r>
                       <a:endParaRPr lang="en-US" sz="1400" dirty="0">
                         <a:latin typeface="Calibri" charset="0"/>
@@ -10413,7 +10417,7 @@
                   <a:schemeClr val="tx2"/>
                 </a:solidFill>
               </a:rPr>
-              <a:t>Each change measured on its own, against the version before it; the numbers are not added together.</a:t>
+              <a:t>Separate comparisons under the stated settings; the numbers are not added together.</a:t>
             </a:r>
             <a:endParaRPr lang="en-US" sz="1400" dirty="0"/>
           </a:p>
@@ -10863,7 +10867,7 @@
                   <a:schemeClr val="tx2"/>
                 </a:solidFill>
               </a:rPr>
-              <a:t>Fitting ranks nuclei better than brightness, but not better than a simple blob filter. With all 457 candidates the raw detector finds 26 of 29.</a:t>
+              <a:t>In the top 100, fitting ranks nuclei better than brightness but not better than a simple blob filter. With all 457 candidates the raw detector finds 26 of 29.</a:t>
             </a:r>
             <a:endParaRPr lang="en-US" sz="1500" dirty="0"/>
           </a:p>
@@ -12368,7 +12372,7 @@
                   <a:srgbClr val="E5E7EB"/>
                 </a:solidFill>
               </a:rPr>
-              <a:t>Stretched blobs, one start per nucleus and a size cap made our fits find more nuclei; a simple blob filter still ranks them better.</a:t>
+              <a:t>Stretched blobs, one start per nucleus and a size cap made our fits find more nuclei; in the top 100, a simple blob filter still ranks them better.</a:t>
             </a:r>
             <a:endParaRPr lang="en-US" sz="1700" dirty="0"/>
           </a:p>

--- a/Gaussian_Blobs_Microscopy_v3.pptx
+++ b/Gaussian_Blobs_Microscopy_v3.pptx
@@ -25,9 +25,12 @@
     <p:sldId id="273" r:id="rId19"/>
     <p:sldId id="274" r:id="rId20"/>
     <p:sldId id="275" r:id="rId21"/>
+    <p:sldId id="276" r:id="rId22"/>
+    <p:sldId id="277" r:id="rId23"/>
+    <p:sldId id="278" r:id="rId24"/>
   </p:sldIdLst>
   <p:notesMasterIdLst>
-    <p:notesMasterId r:id="rId22"/>
+    <p:notesMasterId r:id="rId25"/>
   </p:notesMasterIdLst>
   <p:sldSz cx="9144000" cy="5143500"/>
   <p:notesSz cx="5143500" cy="9144000"/>
@@ -126,16 +129,16 @@
   <p:extLst>
     <p:ext uri="{521415D9-36F7-43E2-AB2F-B90AF26B5E84}">
       <p14:sectionLst xmlns:p14="http://schemas.microsoft.com/office/powerpoint/2010/main">
-        <p14:section name="Problem and data" id="{5983f150-4517-19ae-46d9-458fe5fd8afb}">
+        <p14:section name="Problem and data" id="{adf60663-ef0a-a2aa-d98b-33bf2af348eb}">
           <p14:sldIdLst>
             <p14:sldId id="256"/>
             <p14:sldId id="257"/>
             <p14:sldId id="258"/>
+            <p14:sldId id="259"/>
           </p14:sldIdLst>
         </p14:section>
-        <p14:section name="Simple setup and changes" id="{6872d267-8e90-7de7-9c17-14ef7ee0ea64}">
+        <p14:section name="Simple setup and changes" id="{d85cf8d0-5831-383b-fa3e-563236b0bf8c}">
           <p14:sldIdLst>
-            <p14:sldId id="259"/>
             <p14:sldId id="260"/>
             <p14:sldId id="261"/>
             <p14:sldId id="262"/>
@@ -145,25 +148,32 @@
             <p14:sldId id="266"/>
             <p14:sldId id="267"/>
             <p14:sldId id="268"/>
+            <p14:sldId id="269"/>
           </p14:sldIdLst>
         </p14:section>
-        <p14:section name="Results and validation" id="{186691af-cd23-7d81-0408-1f0c9b9c073e}">
+        <p14:section name="Results and validation" id="{853eff4b-a8fa-c61c-178a-f491060d071a}">
           <p14:sldIdLst>
-            <p14:sldId id="269"/>
             <p14:sldId id="270"/>
+            <p14:sldId id="271"/>
           </p14:sldIdLst>
         </p14:section>
-        <p14:section name="State of the art" id="{8fcbf522-fa52-f205-3a87-9e9a879bba53}">
+        <p14:section name="Export, viewer and time series" id="{fce88532-203a-a303-6ad6-103c557d9271}">
           <p14:sldIdLst>
-            <p14:sldId id="271"/>
             <p14:sldId id="272"/>
             <p14:sldId id="273"/>
           </p14:sldIdLst>
         </p14:section>
-        <p14:section name="Conclusion" id="{54ecf05a-c125-d6eb-39da-2a283ca0ac1b}">
+        <p14:section name="State of the art" id="{a33dbeab-786d-bf35-453e-c1f1ebb95378}">
           <p14:sldIdLst>
             <p14:sldId id="274"/>
             <p14:sldId id="275"/>
+            <p14:sldId id="276"/>
+          </p14:sldIdLst>
+        </p14:section>
+        <p14:section name="Conclusion" id="{33ebea86-d053-b879-1824-73896c53382b}">
+          <p14:sldIdLst>
+            <p14:sldId id="277"/>
+            <p14:sldId id="278"/>
           </p14:sldIdLst>
         </p14:section>
       </p14:sectionLst>
@@ -2752,16 +2762,16 @@
             <a:r>
               <a:rPr lang="en-US" dirty="0"/>
               <a:t>SAY:
-Our first own step was to check Akim's shape result with repeats: the same three blob shapes, at 50, 100 and 250 blobs, each with 5 random seeds, on the same kind of real crops. The result holds at every budget: averaged over all 15 fits, 22.3 dB for round blobs and 25.5 for stretched and rotated. Repeats with different seeds differ by at most about a tenth of a dB, far less than the 3 dB effect. Most of the gain comes from stretching; rotation adds about 0.3 dB. And the blobs did what we expected: their depth-to-width ratio, 0.79, is close to the ratio measured on the real nuclei, 0.73. Real nuclei look stretched in depth partly because the microscope blurs more along that axis.
+Akim's last idea: instead of guessing the number of blobs, count the cells first. A detector found about 230 cells in the whole volume; he then used 1.15 blobs per cell plus 12 percent for the background, which gives 301 blobs, and multiples of that. He then checked how well peaks in the blob reconstruction match the detected cells. Matching improves steadily with more blobs, from F1 0.35 at 301 blobs to 0.76 at 1,804. But look at the right panel: image quality peaks around 900 blobs and then drops. The reason is that all runs stopped after 3,000 steps, which is not enough for a large number of blobs. This was the first sign that image quality and finding cells do not always agree.
 TERMS ON THIS SLIDE:
-- Round (isotropic) blob: same size in every direction.
-- Stretched (anisotropic, axis-aligned) blob: three independent sizes along x, y and z.
-- Rotation: lets the stretched blob point in any direction.
-- Seed: the random number that decides the starting point of a fit; different seeds test whether a result is luck.
-- SD (standard deviation): the typical distance of single results from their average; here, how much repeats differ.
+- Cell count: the number of cells, here estimated by a detector from the data, not counted by a person.
+- Cell matching F1: how well peaks in the reconstruction match the detected cells; 1.0 is perfect.
+- Support blobs (background): the extra blobs not tied to a cell, for the dimmer tissue between nuclei.
+- Under-trained: the fit stopped before it had finished improving.
 IF ASKED:
-- Did this also help finding nuclei? Slightly: nucleus F1 0.745 (round) vs 0.805 (stretched + rotated), significant in a paired test (p = 0.006, 5 seeds).
-- Why does the axis start at 20? To make a 3 dB difference visible; it is stated on the chart.</a:t>
+- Are the 230 cells ground truth? No, they come from a detector with fixed settings; the hand-marked checks come later (validation slide and the state-of-the-art test).
+- Does this show that the cell-count rule is a good way to pick the budget? No. F1 rose because the budget grew sixfold, from 301 to 1,804 blobs. The rule was never compared with another way of choosing the budget.
+- Why does PSNR fall with more blobs? The number of fitting steps was fixed at 3,000; more blobs need more steps. We later saw the same confound in our own experiments.</a:t>
             </a:r>
             <a:endParaRPr lang="en-US" dirty="0"/>
           </a:p>
@@ -2850,14 +2860,16 @@
             <a:r>
               <a:rPr lang="en-US" dirty="0"/>
               <a:t>SAY:
-Building on Akim's peak starts. We measured how far blobs travel during fitting: less than one voxel on average, while nuclei are about 20 voxels apart. So a blob that starts between nuclei stays there. Akim's start put blobs on the brightest peaks, and bright background crowded out faint nuclei: only 73% of nuclei had a blob at the start. Starting one blob per detected nucleus covers all of them and raises the share of nuclei found after fitting from 52 to 71%.
+Our first own step was to check Akim's shape result with repeats: the same three blob shapes, at 50, 100 and 250 blobs, each with 5 random seeds, on the same kind of real crops. The result holds at every budget: averaged over all 15 fits, 22.3 dB for round blobs and 25.5 for stretched and rotated. Repeats with different seeds differ by at most about a tenth of a dB, far less than the 3 dB effect. Most of the gain comes from stretching; rotation adds about 0.3 dB. And the blobs did what we expected: their depth-to-width ratio, 0.79, is close to the ratio measured on the real nuclei, 0.73. Real nuclei look stretched in depth partly because the microscope blurs more along that axis.
 TERMS ON THIS SLIDE:
-- Detected nucleus / peak: a local brightness maximum found by a simple detector before fitting.
-- Peak-search window (non-maximum suppression): around each peak, weaker peaks closer than a set distance are ignored, so one nucleus gives one peak.
-- Found after fitting (recall): the share of reference nuclei that a detector still finds in the reconstruction.
+- Round (isotropic) blob: same size in every direction.
+- Stretched (anisotropic, axis-aligned) blob: three independent sizes along x, y and z.
+- Rotation: lets the stretched blob point in any direction.
+- Seed: the random number that decides the starting point of a fit; different seeds test whether a result is luck.
+- SD (standard deviation): the typical distance of single results from their average; here, how much repeats differ.
 IF ASKED:
-- Is this circular? Partly, on Tribolium: the reference nuclei came from a related detector. On hand-marked Drosophila nuclei the 'window = nucleus spacing' rule did NOT transfer; what transferred was setting windows in micrometres, not voxels.
-- Why did blobs not move? See the next step: the step size was too small.</a:t>
+- Did this also help finding nuclei? Slightly: nucleus F1 0.745 (round) vs 0.805 (stretched + rotated), significant in a paired test (p = 0.006, 5 seeds).
+- Why does the axis start at 20? To make a 3 dB difference visible; it is stated on the chart.</a:t>
             </a:r>
             <a:endParaRPr lang="en-US" dirty="0"/>
           </a:p>
@@ -2946,13 +2958,14 @@
             <a:r>
               <a:rPr lang="en-US" dirty="0"/>
               <a:t>SAY:
-Why did blobs not move? The step size for positions was taken from 3D-splatting code made for photo scenes, where coordinates are small, and we never rescaled it for voxel coordinates. Raising it lets blobs travel: one in three moves to a different nucleus. With bad starting points this closes the gap completely. But with good starting points it slightly hurts. So the lesson is a trade-off: good starts with small steps is still best, at F1 0.84.
+Building on Akim's peak starts. We measured how far blobs travel during fitting: less than one voxel on average, while nuclei are about 20 voxels apart. So a blob that starts between nuclei stays there. Akim's start put blobs on the brightest peaks, and bright background crowded out faint nuclei: only 73% of nuclei had a blob at the start. Starting one blob per detected nucleus covers all of them and raises the share of nuclei found after fitting from 52 to 71%.
 TERMS ON THIS SLIDE:
-- Learning rate / step size: how far each fitting step moves the numbers. Too small: blobs barely move. Too large: they overshoot.
-- F1: one number combining 'how many real nuclei were found' and 'how many detections were real'; 1.0 is perfect.
-- Moved to another nucleus (migration): the nearest nucleus of a blob changed between start and end.
+- Detected nucleus / peak: a local brightness maximum found by a simple detector before fitting.
+- Peak-search window (non-maximum suppression): around each peak, weaker peaks closer than a set distance are ignored, so one nucleus gives one peak.
+- Found after fitting (recall): the share of reference nuclei that a detector still finds in the reconstruction.
 IF ASKED:
-- Does that undo Steps 1 and 6? It reframes them: starting points mattered so much because blobs could not move. With a suitable step size, a random start reaches the same F1.</a:t>
+- Is this circular? Partly, on Tribolium: the reference nuclei came from a related detector. On hand-marked Drosophila nuclei the 'window = nucleus spacing' rule did NOT transfer; what transferred was setting windows in micrometres, not voxels.
+- Why did blobs not move? See the next step: the step size was too small.</a:t>
             </a:r>
             <a:endParaRPr lang="en-US" dirty="0"/>
           </a:p>
@@ -3041,14 +3054,13 @@
             <a:r>
               <a:rPr lang="en-US" dirty="0"/>
               <a:t>SAY:
-We then asked which nuclei are still lost. They are the faint ones. At the end of fitting, the blob nearest to each lost faint nucleus was not dimmer than for the nuclei we kept, but about 30 percent wider, and a wide blob leaves only a flat peak for the detector. So we capped the width of nucleus blobs. With the cap, faint nuclei found went from 13 of 31 to 19 of 31 over four regions, and image quality changed by only 0.01 dB. Honestly: this is one seed, one region got worse, and on the Drosophila data the cap changed nothing. Also, we compared the blobs at the end of fitting; we did not track them through fitting, so the widening is an association that the cap result supports, not a demonstrated cause.
+Why did blobs not move? The step size for positions was taken from 3D-splatting code made for photo scenes, where coordinates are small, and we never rescaled it for voxel coordinates. Raising it lets blobs travel: one in three moves to a different nucleus. With bad starting points this closes the gap completely. But with good starting points it slightly hurts. So the lesson is a trade-off: good starts with small steps is still best, at F1 0.84.
 TERMS ON THIS SLIDE:
-- Faint nucleus: one whose brightness above the surroundings is in the lower half.
-- Size cap: an upper limit on a blob's size, applied only to the blobs that started on nuclei.
-- Region: one 64 x 128 x 128 crop of the Tribolium frame.
+- Learning rate / step size: how far each fitting step moves the numbers. Too small: blobs barely move. Too large: they overshoot.
+- F1: one number combining 'how many real nuclei were found' and 'how many detections were real'; 1.0 is perfect.
+- Moved to another nucleus (migration): the nearest nucleus of a blob changed between start and end.
 IF ASKED:
-- Is +6 nuclei significant? It is one seed and 4 regions, so treat it as promising, not settled. The result survived a scoring-bug fix (it was +7 before).
-- Did you watch the blobs widen? No. We compared the blob nearest to each nucleus at the end of fitting, not blobs tracked over time. That width comparison was also scored before the scoring-bug fix and could not be redone.</a:t>
+- Does that undo Steps 1 and 6? It reframes them: starting points mattered so much because blobs could not move. With a suitable step size, a random start reaches the same F1.</a:t>
             </a:r>
             <a:endParaRPr lang="en-US" dirty="0"/>
           </a:p>
@@ -3137,11 +3149,14 @@
             <a:r>
               <a:rPr lang="en-US" dirty="0"/>
               <a:t>SAY:
-Here are all eight changes side by side, four by Akim and four by us. I want to be clear that these are separate comparisons, each under the settings on its own slide, not a chain where every row builds on the one above. They used different data, budgets and numbers of repeats, so you cannot add them up into one overall improvement. One row needs care: the cell-count row shows F1 rising as the budget grows from 301 to 1,804 blobs; it does not show that choosing the budget from the cell count beats another way of choosing it. Together, the changes turn a fit that merely looks right into one where the nuclei are found much more reliably.
+We then asked which nuclei are still lost. They are the faint ones. At the end of fitting, the blob nearest to each lost faint nucleus was not dimmer than for the nuclei we kept, but about 30 percent wider, and a wide blob leaves only a flat peak for the detector. So we capped the width of nucleus blobs. With the cap, faint nuclei found went from 13 of 31 to 19 of 31 over four regions, and image quality changed by only 0.01 dB. Honestly: this is one seed, one region got worse, and on the Drosophila data the cap changed nothing. Also, we compared the blobs at the end of fitting; we did not track them through fitting, so the widening is an association that the cap result supports, not a demonstrated cause.
 TERMS ON THIS SLIDE:
-- Naive / simple setup: round blobs with random starting positions, default step size, no cap.
+- Faint nucleus: one whose brightness above the surroundings is in the lower half.
+- Size cap: an upper limit on a blob's size, applied only to the blobs that started on nuclei.
+- Region: one 64 x 128 x 128 crop of the Tribolium frame.
 IF ASKED:
-- Why not one combined number? Each experiment used a different number of regions, seeds and references; combining them would hide that.</a:t>
+- Is +6 nuclei significant? It is one seed and 4 regions, so treat it as promising, not settled. The result survived a scoring-bug fix (it was +7 before).
+- Did you watch the blobs widen? No. We compared the blob nearest to each nucleus at the end of fitting, not blobs tracked over time. That width comparison was also scored before the scoring-bug fix and could not be redone.</a:t>
             </a:r>
             <a:endParaRPr lang="en-US" dirty="0"/>
           </a:p>
@@ -3230,16 +3245,11 @@
             <a:r>
               <a:rPr lang="en-US" dirty="0"/>
               <a:t>SAY:
-Checks that the fit does what we think. First, shape: the learned blobs are about as stretched as the real nuclei. Second, the honest test against people's annotations: on Drosophila, among the 100 most confident detections, the fitted blobs contain 14 of 29 hand-marked nuclei, the raw image ranked by brightness only 10. So fitting ranks real nuclei higher than brightness does. But third, the stronger baseline: a classic blob filter, LoG, applied to the same raw candidates puts 16 to 18 marked nuclei in the top 100, in seconds and without any fitting. So the fit beats the naive baseline, not the simple strong one. And if the plain detector may use all its candidates it finds 26 of 29, more than any fit. This is better ranking than brightness, not a better detector.
+Here are all eight changes side by side, four by Akim and four by us. I want to be clear that these are separate comparisons, each under the settings on its own slide, not a chain where every row builds on the one above. They used different data, budgets and numbers of repeats, so you cannot add them up into one overall improvement. One row needs care: the cell-count row shows F1 rising as the budget grows from 301 to 1,804 blobs; it does not show that choosing the budget from the cell count beats another way of choosing it. Together, the changes turn a fit that merely looks right into one where the nuclei are found much more reliably.
 TERMS ON THIS SLIDE:
-- Top 100 detections: compare methods at the same number of guesses, because only some nuclei are marked and extra detections cannot be judged as wrong.
-- Raw brightness: the raw image's candidate peaks ranked simply by how bright they are.
-- LoG blob filter: ranks the same candidates by how well they look like a round blob of nucleus size.
+- Naive / simple setup: round blobs with random starting positions, default step size, no cap.
 IF ASKED:
-- How noisy is 14 vs 10? One nucleus is 3.4% of 29; we only call a difference real if it is about 3 nuclei and has the same sign in all seeds (mean of 3 seeds here).
-- Why 16-18? 16 with LoG scales fixed in advance (1.5-3 micrometres); 18 with a single 2-micrometre scale chosen after seeing results.
-- And in the top 200? There the best fit (uniform sampling, 22.7) and LoG (22) are level, within one nucleus. The filter is clearly better only in the top 100.
-- Are fits repeatable? Our own fits: seed spread at most 0.13 dB (Step 5). Luxar, used on the next slides: three repeated fits of one frame differed by at most 2.1-3.7 percentage points of nuclei kept, depending on the detector.</a:t>
+- Why not one combined number? Each experiment used a different number of regions, seeds and references; combining them would hide that.</a:t>
             </a:r>
             <a:endParaRPr lang="en-US" dirty="0"/>
           </a:p>
@@ -3328,16 +3338,16 @@
             <a:r>
               <a:rPr lang="en-US" dirty="0"/>
               <a:t>SAY:
-Our own fits were better than our naive start, but are they better than what exists? The strongest existing tool is Luxar, from the Royer lab, which fits Gaussian blobs to large microscopy data. We compared Luxar with ordinary image compression, JPEG2000, squeezed to exactly the same number of bytes, on 12 C. elegans frames from two embryos with almost 3,000 hand-marked nuclei, and asked four different nucleus detectors how many nuclei survive. The pictures show the same region at about 89 times smaller: the codecs keep the texture, Luxar draws smooth blobs. The percentages are whole-frame scores from one detector, 2D Cellpose.
+Checks that the fit does what we think. First, shape: the learned blobs are about as stretched as the real nuclei. Second, the honest test against people's annotations: on Drosophila, among the 100 most confident detections, the fitted blobs contain 14 of 29 hand-marked nuclei, the raw image ranked by brightness only 10. So fitting ranks real nuclei higher than brightness does. But third, the stronger baseline: a classic blob filter, LoG, applied to the same raw candidates puts 16 to 18 marked nuclei in the top 100, in seconds and without any fitting. So the fit beats the naive baseline, not the simple strong one. And if the plain detector may use all its candidates it finds 26 of 29, more than any fit. This is better ranking than brightness, not a better detector.
 TERMS ON THIS SLIDE:
-- Compression ratio: original size divided by compressed size; 100x means 100 times smaller.
-- Same file size (matched bytes): every Luxar file is compared with a JPEG2000 file of exactly the same size on disk.
-- JPEG2000 / JPEG-XL: standard image compression formats; here each 2D slice of the volume is compressed.
-- Nuclei kept: hand-marked nuclei found after compression divided by those found in the original by the same detector. 1.0 means the same number was found, not necessarily the same individual nuclei.
-- Whole-frame score: the percentages under the pictures are for the whole frame with 2D Cellpose; the pictures show only a small region.
+- Top 100 detections: compare methods at the same number of guesses, because only some nuclei are marked and extra detections cannot be judged as wrong.
+- Raw brightness: the raw image's candidate peaks ranked simply by how bright they are.
+- LoG blob filter: ranks the same candidates by how well they look like a round blob of nucleus size.
 IF ASKED:
-- Why not compare with our own fits? Luxar is faster and better engineered; if blobs are to win anywhere, the strongest blob tool must win.
-- We found a bug in our own first JPEG2000 setup (it compressed the volume along the wrong axes, about 10 dB worse). Fixing it reversed our first conclusion; a test now prevents it.</a:t>
+- How noisy is 14 vs 10? One nucleus is 3.4% of 29; we only call a difference real if it is about 3 nuclei and has the same sign in all seeds (mean of 3 seeds here).
+- Why 16-18? 16 with LoG scales fixed in advance (1.5-3 micrometres); 18 with a single 2-micrometre scale chosen after seeing results.
+- And in the top 200? There the best fit (uniform sampling, 22.7) and LoG (22) are level, within one nucleus. The filter is clearly better only in the top 100.
+- Are fits repeatable? Our own fits: seed spread at most 0.13 dB (Step 5). Luxar, used on the next slides: three repeated fits of one frame differed by at most 2.1-3.7 percentage points of nuclei kept, depending on the detector.</a:t>
             </a:r>
             <a:endParaRPr lang="en-US" dirty="0"/>
           </a:p>
@@ -3426,18 +3436,16 @@
             <a:r>
               <a:rPr lang="en-US" dirty="0"/>
               <a:t>SAY:
-The result. Bars above zero mean the blobs kept more nuclei than JPEG2000 at the same file size; below zero, JPEG2000 kept more. Up to about 300 times compression the answer depends on the detector: Cellpose in 3D mode finds 3.5 points more nuclei in the blob version, the classical watershed and Cellpose in 2D mode find more in JPEG2000, and the simple blob detector LoG shows no consistent difference. Beyond 300 times, every detector prefers JPEG2000 by 17 to 23 points. Meanwhile PSNR says JPEG2000 is better on every single frame, so PSNR alone could not have told you which format a given analysis needs. The same Cellpose network changing sides between 2D and 3D mode supports an explanation involving processing geometry: slice by slice versus the whole volume. Switching modes shows that the behaviour differs; it does not isolate the exact cause.
+The second goal of the brief: export and look at the result. We write the blobs into the two standard formats, .ply and .splat; a .splat file needs 32 bytes per blob, so this Drosophila fit with 500 blobs is 16 kilobytes, against 2.1 megabytes for the raw crop. Reading the file back returns the positions and sizes exactly; brightness is only mapped to grey and transparency for display, so these files are for looking, not for measuring. The recording shows our own browser viewer: you can rotate, zoom and hide faint blobs, which are mostly background. The curved sheet is the surface of the embryo, the bright dots are nuclei. An honest limit: our viewer draws each blob as a round dot, without its orientation, and we did not test the files in SuperSplat for this talk.
 TERMS ON THIS SLIDE:
-- LoG (Laplacian of Gaussian): a classic blob detector that responds to bright round spots of a given size.
-- Watershed: a classical segmentation that separates touching bright regions, like water filling valleys.
-- Cellpose: a widely used deep-learning model that outlines cells or nuclei. 2D mode works slice by slice and joins slices; 3D mode looks at the volume in three directions at once.
-- Points: percentage points of nuclei kept, e.g. 0.90 vs 0.86 is 4 points.
-- Statistics: each frame counts once; Wilcoxon signed-rank tests over the 12 frames, Holm-corrected for 8 tests. Everything except LoG below 300x is significant (Holm-corrected p ≤ 0.01). The 12 frames come from only 2 embryos, so they are not 12 independent animals.
+- .ply: a standard 3D point file; for Gaussian splatting it stores 17 numbers per blob.
+- .splat: a compact format from the antimatter15 web viewer, 32 bytes per blob.
+- Round trip: write the file, read it back, and check that nothing changed.
+- Point sprite: a flat round dot facing the camera, used here to draw each blob.
 IF ASKED:
-- Is LoG +1.3 real? No: 8 of 12 frames, p = 0.11; it comes from one embryo only.
-- Is slice-by-slice processing proven to be the cause? No. Same network, same weights, different behaviour: so the penalty is not a fixed property of the learned model. But 3D mode also changes how predictions are combined and cleaned up, so the mode switch does not isolate geometry as the cause.
-- Why frames and not single comparisons? An earlier draft averaged all matched pairs, with bootstrap intervals per pair. Pairs from one frame are not independent, so the final analysis averages per frame first and tests across frames; the numbers here are that final analysis, the same as in the paper.
-- Why does JPEG2000 win at high compression? Below about 3 blobs per nucleus, blob fits lose whole nuclei; wavelet compression degrades gradually.</a:t>
+- Can biologists open it elsewhere? The .ply follows the Gaussian-splatting layout used by SuperSplat; we have not tested it there for this talk.
+- Why hide faint blobs? Most blobs model the dim background between nuclei; hiding them makes the nuclei visible.
+- Is the 131x smaller file a fair compression ratio? No: brightness is stored only for display, so it cannot be compared with the codecs later in the talk.</a:t>
             </a:r>
             <a:endParaRPr lang="en-US" dirty="0"/>
           </a:p>
@@ -3526,14 +3534,17 @@
             <a:r>
               <a:rPr lang="en-US" dirty="0"/>
               <a:t>SAY:
-Why do blobs collapse at high compression? Each point is one Luxar fit; the x axis is blobs per hand-marked nucleus. In these C. elegans frames, with the LoG detector, almost every nucleus survives above about 3 blobs per nucleus; below that, they disappear quickly, on every frame of both embryos: the 90% line is crossed between 1.1 and 3.1 blobs per nucleus. For budgets of 1,000 blobs and more, PSNR changes by at most 2.6 dB per frame. So if you choose the budget by image quality, you can fall off this cliff without noticing. Honestly, our advance test of that PSNR claim held on only 4 of the 8 added frames, because on small frames the cliff lies below 1,000 blobs.
+Goals three and four of the brief: time series. We built three ways to store a recording with blobs: one set of blobs per frame, where each set starts from the previous one; 4D blobs, which also have an extent in time and fade in and out; and blobs that move along smooth paths. We compared them only on synthetic data: eight moving blobs, one of which divides. To be fair, all three store the same amount of numbers, and we test them on frames that were never used for fitting, half-way between the fitted ones. The per-frame sets reproduce their own frames best, about 37.5 dB. Between frames, the simplest trick wins: just blend the two neighbouring frames, 22.7 dB, better than the 4D models at about 16 to 20 dB. To be honest, our 4D fits got worse with more blobs, so their optimisation, which we did not tune, held them back. The recording on the left is our viewer playing a time series: the slider switches between frames; it does not interpolate.
 TERMS ON THIS SLIDE:
-- Blobs per nucleus: number of blobs in the fit divided by the number of hand-marked nuclei in that frame.
-- Cliff: a sudden drop instead of a gradual decline.
-- 90% line: the threshold we fixed in advance to define the cliff (we wrote down '≤ 3.5 blobs per nucleus' before running the extra frames).
+- Shared identity: one set of blobs per time point, each started from the previous one, so blob number i keeps describing the same thing.
+- 4D blob: a blob that also has a centre and an extent in time; it fades in and out but does not move.
+- Deformation: one set of blobs that move along smooth paths in time.
+- Held-out frame: a time point that was not used for fitting; scoring on it tests what happens between the frames we have.
+- Cross-fade: showing a 50/50 mix of the two neighbouring frames.
 IF ASKED:
-- Does the 3-blobs rule hold everywhere? We only tested C. elegans frames with the LoG detector; other data or detectors may cross elsewhere.
-- Why fix thresholds in advance? So we cannot tune the claim to the data afterwards. Two of our advance predictions failed, and we report them as failed.</a:t>
+- Why only synthetic data? Our real Drosophila time-series run used a crop with a bug (the empty inside of the embryo), so we do not report it.
+- Why the same storage? An earlier comparison gave the per-frame version 3.4 times more numbers, which made it look far better than it is.
+- Can the viewer play the 4D blobs continuously? No. It plays one file per frame; the .splat format has no time axis.</a:t>
             </a:r>
             <a:endParaRPr lang="en-US" dirty="0"/>
           </a:p>
@@ -3622,12 +3633,16 @@
             <a:r>
               <a:rPr lang="en-US" dirty="0"/>
               <a:t>SAY:
-Three take-aways. One: our step-by-step changes made blob fits find nuclei more reliably, but on hand-marked nuclei a simple blob filter still ranks them better among the top 100 detections, and as well among the top 200. Two: compared with the state of the art at the same file size, there is no single winner. Below 300 times, the blobs help 3D Cellpose and hurt the watershed and 2D Cellpose; beyond 300 times JPEG2000 keeps more nuclei for every detector. Three: a format that looks good is not automatically good for measuring, and the usual image-quality number cannot decide this; you have to test with the analysis you plan to run.
+Our own fits were better than our naive start, but are they better than what exists? The strongest existing tool is Luxar, from the Royer lab, which fits Gaussian blobs to large microscopy data. We compared Luxar with ordinary image compression, JPEG2000, squeezed to exactly the same number of bytes, on 12 C. elegans frames from two embryos with almost 3,000 hand-marked nuclei, and asked four different nucleus detectors how many nuclei survive. The pictures show the same region at about 89 times smaller: the codecs keep the texture, Luxar draws smooth blobs. The percentages are whole-frame scores from one detector, 2D Cellpose.
 TERMS ON THIS SLIDE:
-- Codec: a compression method (coder-decoder).
+- Compression ratio: original size divided by compressed size; 100x means 100 times smaller.
+- Same file size (matched bytes): every Luxar file is compared with a JPEG2000 file of exactly the same size on disk.
+- JPEG2000 / JPEG-XL: standard image compression formats; here each 2D slice of the volume is compressed.
+- Nuclei kept: hand-marked nuclei found after compression divided by those found in the original by the same detector. 1.0 means the same number was found, not necessarily the same individual nuclei.
+- Whole-frame score: the percentages under the pictures are for the whole frame with 2D Cellpose; the pictures show only a small region.
 IF ASKED:
-- So was the project a failure? No: we now know where blobs should and should not be trusted, which is what a user needs; and the evaluation method itself is reusable.
-- Are blobs useless for measuring? Not in general: with 3D Cellpose they kept more nuclei at moderate compression. But each analysis has to be checked separately.</a:t>
+- Why not compare with our own fits? Luxar is faster and better engineered; if blobs are to win anywhere, the strongest blob tool must win.
+- We found a bug in our own first JPEG2000 setup (it compressed the volume along the wrong axes, about 10 dB worse). Fixing it reversed our first conclusion; a test now prevents it.</a:t>
             </a:r>
             <a:endParaRPr lang="en-US" dirty="0"/>
           </a:p>
@@ -3811,6 +3826,296 @@
             <a:r>
               <a:rPr lang="en-US" dirty="0"/>
               <a:t>SAY:
+The result. Bars above zero mean the blobs kept more nuclei than JPEG2000 at the same file size; below zero, JPEG2000 kept more. Up to about 300 times compression the answer depends on the detector: Cellpose in 3D mode finds 3.5 points more nuclei in the blob version, the classical watershed and Cellpose in 2D mode find more in JPEG2000, and the simple blob detector LoG shows no consistent difference. Beyond 300 times, every detector prefers JPEG2000 by 17 to 23 points. Meanwhile PSNR says JPEG2000 is better on every single frame, so PSNR alone could not have told you which format a given analysis needs. The same Cellpose network changing sides between 2D and 3D mode supports an explanation involving processing geometry: slice by slice versus the whole volume. Switching modes shows that the behaviour differs; it does not isolate the exact cause.
+TERMS ON THIS SLIDE:
+- LoG (Laplacian of Gaussian): a classic blob detector that responds to bright round spots of a given size.
+- Watershed: a classical segmentation that separates touching bright regions, like water filling valleys.
+- Cellpose: a widely used deep-learning model that outlines cells or nuclei. 2D mode works slice by slice and joins slices; 3D mode looks at the volume in three directions at once.
+- Points: percentage points of nuclei kept, e.g. 0.90 vs 0.86 is 4 points.
+- Statistics: each frame counts once; Wilcoxon signed-rank tests over the 12 frames, Holm-corrected for 8 tests. Everything except LoG below 300x is significant (Holm-corrected p ≤ 0.01). The 12 frames come from only 2 embryos, so they are not 12 independent animals.
+IF ASKED:
+- Is LoG +1.3 real? No: 8 of 12 frames, p = 0.11; it comes from one embryo only.
+- Is slice-by-slice processing proven to be the cause? No. Same network, same weights, different behaviour: so the penalty is not a fixed property of the learned model. But 3D mode also changes how predictions are combined and cleaned up, so the mode switch does not isolate geometry as the cause.
+- Why frames and not single comparisons? An earlier draft averaged all matched pairs, with bootstrap intervals per pair. Pairs from one frame are not independent, so the final analysis averages per frame first and tests across frames; the numbers here are that final analysis, the same as in the paper.
+- Why does JPEG2000 win at high compression? Below about 3 blobs per nucleus, blob fits lose whole nuclei; wavelet compression degrades gradually.</a:t>
+            </a:r>
+            <a:endParaRPr lang="en-US" dirty="0"/>
+          </a:p>
+        </p:txBody>
+      </p:sp>
+      <p:sp>
+        <p:nvSpPr>
+          <p:cNvPr id="4" name="Slide Number Placeholder 3"/>
+          <p:cNvSpPr>
+            <a:spLocks noGrp="1"/>
+          </p:cNvSpPr>
+          <p:nvPr>
+            <p:ph type="sldNum" sz="quarter" idx="10"/>
+          </p:nvPr>
+        </p:nvSpPr>
+        <p:spPr/>
+        <p:txBody>
+          <a:bodyPr/>
+          <a:lstStyle/>
+          <a:p>
+            <a:fld id="{F7021451-1387-4CA6-816F-3879F97B5CBC}" type="slidenum">
+              <a:rPr lang="en-US"/>
+              <a:t>20</a:t>
+            </a:fld>
+            <a:endParaRPr lang="en-US"/>
+          </a:p>
+        </p:txBody>
+      </p:sp>
+    </p:spTree>
+    <p:extLst>
+      <p:ext uri="{BB962C8B-B14F-4D97-AF65-F5344CB8AC3E}">
+        <p14:creationId xmlns:p14="http://schemas.microsoft.com/office/powerpoint/2010/main" val="1024086991"/>
+      </p:ext>
+    </p:extLst>
+  </p:cSld>
+  <p:clrMapOvr>
+    <a:masterClrMapping/>
+  </p:clrMapOvr>
+</p:notes>
+</file>
+
+<file path=ppt/notesSlides/notesSlide21.xml><?xml version="1.0" encoding="utf-8"?>
+<p:notes xmlns:a="http://schemas.openxmlformats.org/drawingml/2006/main" xmlns:r="http://schemas.openxmlformats.org/officeDocument/2006/relationships" xmlns:p="http://schemas.openxmlformats.org/presentationml/2006/main">
+  <p:cSld>
+    <p:spTree>
+      <p:nvGrpSpPr>
+        <p:cNvPr id="1" name=""/>
+        <p:cNvGrpSpPr/>
+        <p:nvPr/>
+      </p:nvGrpSpPr>
+      <p:grpSpPr>
+        <a:xfrm>
+          <a:off x="0" y="0"/>
+          <a:ext cx="0" cy="0"/>
+          <a:chOff x="0" y="0"/>
+          <a:chExt cx="0" cy="0"/>
+        </a:xfrm>
+      </p:grpSpPr>
+      <p:sp>
+        <p:nvSpPr>
+          <p:cNvPr id="2" name="Slide Image Placeholder 1"/>
+          <p:cNvSpPr>
+            <a:spLocks noGrp="1" noRot="1" noChangeAspect="1"/>
+          </p:cNvSpPr>
+          <p:nvPr>
+            <p:ph type="sldImg"/>
+          </p:nvPr>
+        </p:nvSpPr>
+        <p:spPr/>
+      </p:sp>
+      <p:sp>
+        <p:nvSpPr>
+          <p:cNvPr id="3" name="Notes Placeholder 2"/>
+          <p:cNvSpPr>
+            <a:spLocks noGrp="1"/>
+          </p:cNvSpPr>
+          <p:nvPr>
+            <p:ph type="body" idx="1"/>
+          </p:nvPr>
+        </p:nvSpPr>
+        <p:spPr/>
+        <p:txBody>
+          <a:bodyPr/>
+          <a:lstStyle/>
+          <a:p>
+            <a:r>
+              <a:rPr lang="en-US" dirty="0"/>
+              <a:t>SAY:
+Why do blobs collapse at high compression? Each point is one Luxar fit; the x axis is blobs per hand-marked nucleus. In these C. elegans frames, with the LoG detector, almost every nucleus survives above about 3 blobs per nucleus; below that, they disappear quickly, on every frame of both embryos: the 90% line is crossed between 1.1 and 3.1 blobs per nucleus. For budgets of 1,000 blobs and more, PSNR changes by at most 2.6 dB per frame. So if you choose the budget by image quality, you can fall off this cliff without noticing. Honestly, our advance test of that PSNR claim held on only 4 of the 8 added frames, because on small frames the cliff lies below 1,000 blobs.
+TERMS ON THIS SLIDE:
+- Blobs per nucleus: number of blobs in the fit divided by the number of hand-marked nuclei in that frame.
+- Cliff: a sudden drop instead of a gradual decline.
+- 90% line: the threshold we fixed in advance to define the cliff (we wrote down '≤ 3.5 blobs per nucleus' before running the extra frames).
+IF ASKED:
+- Does the 3-blobs rule hold everywhere? We only tested C. elegans frames with the LoG detector; other data or detectors may cross elsewhere.
+- Why fix thresholds in advance? So we cannot tune the claim to the data afterwards. Two of our advance predictions failed, and we report them as failed.</a:t>
+            </a:r>
+            <a:endParaRPr lang="en-US" dirty="0"/>
+          </a:p>
+        </p:txBody>
+      </p:sp>
+      <p:sp>
+        <p:nvSpPr>
+          <p:cNvPr id="4" name="Slide Number Placeholder 3"/>
+          <p:cNvSpPr>
+            <a:spLocks noGrp="1"/>
+          </p:cNvSpPr>
+          <p:nvPr>
+            <p:ph type="sldNum" sz="quarter" idx="10"/>
+          </p:nvPr>
+        </p:nvSpPr>
+        <p:spPr/>
+        <p:txBody>
+          <a:bodyPr/>
+          <a:lstStyle/>
+          <a:p>
+            <a:fld id="{F7021451-1387-4CA6-816F-3879F97B5CBC}" type="slidenum">
+              <a:rPr lang="en-US"/>
+              <a:t>21</a:t>
+            </a:fld>
+            <a:endParaRPr lang="en-US"/>
+          </a:p>
+        </p:txBody>
+      </p:sp>
+    </p:spTree>
+    <p:extLst>
+      <p:ext uri="{BB962C8B-B14F-4D97-AF65-F5344CB8AC3E}">
+        <p14:creationId xmlns:p14="http://schemas.microsoft.com/office/powerpoint/2010/main" val="1024086991"/>
+      </p:ext>
+    </p:extLst>
+  </p:cSld>
+  <p:clrMapOvr>
+    <a:masterClrMapping/>
+  </p:clrMapOvr>
+</p:notes>
+</file>
+
+<file path=ppt/notesSlides/notesSlide22.xml><?xml version="1.0" encoding="utf-8"?>
+<p:notes xmlns:a="http://schemas.openxmlformats.org/drawingml/2006/main" xmlns:r="http://schemas.openxmlformats.org/officeDocument/2006/relationships" xmlns:p="http://schemas.openxmlformats.org/presentationml/2006/main">
+  <p:cSld>
+    <p:spTree>
+      <p:nvGrpSpPr>
+        <p:cNvPr id="1" name=""/>
+        <p:cNvGrpSpPr/>
+        <p:nvPr/>
+      </p:nvGrpSpPr>
+      <p:grpSpPr>
+        <a:xfrm>
+          <a:off x="0" y="0"/>
+          <a:ext cx="0" cy="0"/>
+          <a:chOff x="0" y="0"/>
+          <a:chExt cx="0" cy="0"/>
+        </a:xfrm>
+      </p:grpSpPr>
+      <p:sp>
+        <p:nvSpPr>
+          <p:cNvPr id="2" name="Slide Image Placeholder 1"/>
+          <p:cNvSpPr>
+            <a:spLocks noGrp="1" noRot="1" noChangeAspect="1"/>
+          </p:cNvSpPr>
+          <p:nvPr>
+            <p:ph type="sldImg"/>
+          </p:nvPr>
+        </p:nvSpPr>
+        <p:spPr/>
+      </p:sp>
+      <p:sp>
+        <p:nvSpPr>
+          <p:cNvPr id="3" name="Notes Placeholder 2"/>
+          <p:cNvSpPr>
+            <a:spLocks noGrp="1"/>
+          </p:cNvSpPr>
+          <p:nvPr>
+            <p:ph type="body" idx="1"/>
+          </p:nvPr>
+        </p:nvSpPr>
+        <p:spPr/>
+        <p:txBody>
+          <a:bodyPr/>
+          <a:lstStyle/>
+          <a:p>
+            <a:r>
+              <a:rPr lang="en-US" dirty="0"/>
+              <a:t>SAY:
+Three take-aways. One: our step-by-step changes made blob fits find nuclei more reliably, but on hand-marked nuclei a simple blob filter still ranks them better among the top 100 detections, and as well among the top 200. Two: compared with the state of the art at the same file size, there is no single winner. Below 300 times, the blobs help 3D Cellpose and hurt the watershed and 2D Cellpose; beyond 300 times JPEG2000 keeps more nuclei for every detector. Three: a format that looks good is not automatically good for measuring, and the usual image-quality number cannot decide this; you have to test with the analysis you plan to run.
+TERMS ON THIS SLIDE:
+- Codec: a compression method (coder-decoder).
+IF ASKED:
+- So was the project a failure? No: we now know where blobs should and should not be trusted, which is what a user needs; and the evaluation method itself is reusable.
+- Are blobs useless for measuring? Not in general: with 3D Cellpose they kept more nuclei at moderate compression. But each analysis has to be checked separately.</a:t>
+            </a:r>
+            <a:endParaRPr lang="en-US" dirty="0"/>
+          </a:p>
+        </p:txBody>
+      </p:sp>
+      <p:sp>
+        <p:nvSpPr>
+          <p:cNvPr id="4" name="Slide Number Placeholder 3"/>
+          <p:cNvSpPr>
+            <a:spLocks noGrp="1"/>
+          </p:cNvSpPr>
+          <p:nvPr>
+            <p:ph type="sldNum" sz="quarter" idx="10"/>
+          </p:nvPr>
+        </p:nvSpPr>
+        <p:spPr/>
+        <p:txBody>
+          <a:bodyPr/>
+          <a:lstStyle/>
+          <a:p>
+            <a:fld id="{F7021451-1387-4CA6-816F-3879F97B5CBC}" type="slidenum">
+              <a:rPr lang="en-US"/>
+              <a:t>22</a:t>
+            </a:fld>
+            <a:endParaRPr lang="en-US"/>
+          </a:p>
+        </p:txBody>
+      </p:sp>
+    </p:spTree>
+    <p:extLst>
+      <p:ext uri="{BB962C8B-B14F-4D97-AF65-F5344CB8AC3E}">
+        <p14:creationId xmlns:p14="http://schemas.microsoft.com/office/powerpoint/2010/main" val="1024086991"/>
+      </p:ext>
+    </p:extLst>
+  </p:cSld>
+  <p:clrMapOvr>
+    <a:masterClrMapping/>
+  </p:clrMapOvr>
+</p:notes>
+</file>
+
+<file path=ppt/notesSlides/notesSlide23.xml><?xml version="1.0" encoding="utf-8"?>
+<p:notes xmlns:a="http://schemas.openxmlformats.org/drawingml/2006/main" xmlns:r="http://schemas.openxmlformats.org/officeDocument/2006/relationships" xmlns:p="http://schemas.openxmlformats.org/presentationml/2006/main">
+  <p:cSld>
+    <p:spTree>
+      <p:nvGrpSpPr>
+        <p:cNvPr id="1" name=""/>
+        <p:cNvGrpSpPr/>
+        <p:nvPr/>
+      </p:nvGrpSpPr>
+      <p:grpSpPr>
+        <a:xfrm>
+          <a:off x="0" y="0"/>
+          <a:ext cx="0" cy="0"/>
+          <a:chOff x="0" y="0"/>
+          <a:chExt cx="0" cy="0"/>
+        </a:xfrm>
+      </p:grpSpPr>
+      <p:sp>
+        <p:nvSpPr>
+          <p:cNvPr id="2" name="Slide Image Placeholder 1"/>
+          <p:cNvSpPr>
+            <a:spLocks noGrp="1" noRot="1" noChangeAspect="1"/>
+          </p:cNvSpPr>
+          <p:nvPr>
+            <p:ph type="sldImg"/>
+          </p:nvPr>
+        </p:nvSpPr>
+        <p:spPr/>
+      </p:sp>
+      <p:sp>
+        <p:nvSpPr>
+          <p:cNvPr id="3" name="Notes Placeholder 2"/>
+          <p:cNvSpPr>
+            <a:spLocks noGrp="1"/>
+          </p:cNvSpPr>
+          <p:nvPr>
+            <p:ph type="body" idx="1"/>
+          </p:nvPr>
+        </p:nvSpPr>
+        <p:spPr/>
+        <p:txBody>
+          <a:bodyPr/>
+          <a:lstStyle/>
+          <a:p>
+            <a:r>
+              <a:rPr lang="en-US" dirty="0"/>
+              <a:t>SAY:
 This is a change of direction, agreed with our supervisor after his feedback. So far we asked whether Gaussian blobs can store and show microscopy data; he pointed out that labs store their raw data losslessly and rarely use lossy formats like JPEG. So the next step is compression biologists would actually use. First, lossless storage, which gives about 2 to 4 times; we measured 4.2 times with lossless JPEG-XL on one C. elegans frame. Second, one specific near-lossless approach, noise-bounded coding, where every voxel may change but by less than the camera noise. Third, video codecs, which exploit the similarity between neighbouring slices and time points. And fourth, judging success by whether cells can still be tracked, using the Cell Tracking Challenge's official scores.
 TERMS ON THIS SLIDE:
 - Lossless: the decompressed data is bit-for-bit identical to the original.
@@ -3842,7 +4147,7 @@
           <a:p>
             <a:fld id="{F7021451-1387-4CA6-816F-3879F97B5CBC}" type="slidenum">
               <a:rPr lang="en-US"/>
-              <a:t>20</a:t>
+              <a:t>23</a:t>
             </a:fld>
             <a:endParaRPr lang="en-US"/>
           </a:p>
@@ -3908,14 +4213,14 @@
             <a:r>
               <a:rPr lang="en-US" dirty="0"/>
               <a:t>SAY:
-Three real light-sheet recordings of developing embryos, shown as maximum projections. Tribolium, a beetle, was our main development data. Drosophila and C. elegans come from the Cell Tracking Challenge, a public benchmark where people have marked the nuclei by hand. Those hand-made marks are what we use to check results honestly. The C. elegans data, 12 frames with almost 3,000 marked nuclei, is what we used for the final comparison against the state of the art.
+The project brief had four goals. First, fit Gaussian blobs to one microscope volume and study how quality depends on the number of blobs, the file size and the fitting time. We did that in depth, and went further: we checked whether the nuclei survive. Second, export the blobs to standard files and look at them in a browser: done, with our own simple viewer. Third, extend the blobs to time series, comparing one set of blobs per frame with 4D blobs: we built all three versions, but compared them only on synthetic data. Fourth, a player that lets biologists scrub through time: our viewer has a frame slider, but it switches between frames and does not interpolate. In the second half, together with our supervisor, we added a question the brief did not ask: compared with standard compression at the same file size, do Gaussian blobs keep the nuclei?
 TERMS ON THIS SLIDE:
-- Maximum projection: a flat picture of a 3D volume made by keeping, along each line of sight, the brightest voxel. It shows the whole embryo at once.
-- Cell Tracking Challenge: a public collection of microscopy time-lapse recordings with expert annotations, used to compare methods fairly.
-- Marked by hand (ground truth): positions of nuclei clicked by human experts. Results checked against these are not circular.
-- Detector-derived reference: positions found by a program, not a person. Useful during development, but a method can look good just by agreeing with the detector.
+- Brief: the project description from the chair, with the four goals.
+- .ply / .splat: standard file formats for Gaussian blobs that browser viewers can open.
+- 4D blobs: blobs that also have a position and extent in time, so one set covers the whole recording.
 IF ASKED:
-- Why do the voxel sizes matter? The depth step is much larger than the pixel size (e.g. 3.0 vs 0.69 micrometres for Tribolium), so nuclei look stretched in depth. Every setting must therefore be given in micrometres, not voxels.</a:t>
+- Why is the time series only partial? The real-data run we had used a crop with a bug, so we can only report synthetic results. See the time-series slide.
+- Why not GPU memory? Our own fits ran on a laptop CPU; we did not measure GPU memory.</a:t>
             </a:r>
             <a:endParaRPr lang="en-US" dirty="0"/>
           </a:p>
@@ -4004,14 +4309,14 @@
             <a:r>
               <a:rPr lang="en-US" dirty="0"/>
               <a:t>SAY:
-Every blob is described by 11 numbers: where it is, how wide it is along three axes, how it is rotated, and how bright it is. Adding all blobs together gives back a full volume, which we compare to the real data voxel by voxel. On the right, a real crop and its reconstruction from 250 blobs: the nuclei are there, the fine texture is smoothed away. 250 blobs need 2,750 numbers instead of about a million voxels.
+Three real light-sheet recordings of developing embryos, shown as maximum projections. Tribolium, a beetle, was our main development data. Drosophila and C. elegans come from the Cell Tracking Challenge, a public benchmark where people have marked the nuclei by hand. Those hand-made marks are what we use to check results honestly. The C. elegans data, 12 frames with almost 3,000 marked nuclei, is what we used for the final comparison against the state of the art.
 TERMS ON THIS SLIDE:
-- Rotation (4 numbers): stored as a quaternion, a standard 4-number way to describe a 3D rotation without the jumps that angles can have.
-- Reconstruction: the volume we get back by drawing all blobs.
-- K: the number of blobs we allow (the budget).
+- Maximum projection: a flat picture of a 3D volume made by keeping, along each line of sight, the brightest voxel. It shows the whole embryo at once.
+- Cell Tracking Challenge: a public collection of microscopy time-lapse recordings with expert annotations, used to compare methods fairly.
+- Marked by hand (ground truth): positions of nuclei clicked by human experts. Results checked against these are not circular.
+- Detector-derived reference: positions found by a program, not a person. Useful during development, but a method can look good just by agreeing with the detector.
 IF ASKED:
-- Is 2,750 vs 1,048,576 a file-size ratio? No, it is a count of stored numbers; file sizes depend on how each is stored. The file-size comparison comes on the state-of-the-art slides.
-- How is the fit done? Start with K blobs, compare their sum with the data, and nudge all 11 x K numbers to reduce the difference (gradient descent with the Adam optimiser), for 3,000 steps.</a:t>
+- Why do the voxel sizes matter? The depth step is much larger than the pixel size (e.g. 3.0 vs 0.69 micrometres for Tribolium), so nuclei look stretched in depth. Every setting must therefore be given in micrometres, not voxels.</a:t>
             </a:r>
             <a:endParaRPr lang="en-US" dirty="0"/>
           </a:p>
@@ -4100,15 +4405,14 @@
             <a:r>
               <a:rPr lang="en-US" dirty="0"/>
               <a:t>SAY:
-Before touching real data we built the simplest possible test: a synthetic volume made of blobs, so we know the right answer. We fit blobs to it by comparing the blob sum with the volume at every voxel. We also learned something here: the standard 3D Gaussian splatting renderer, designed for photographs of solid objects, treats blobs as blocking the ones behind them. Our volumes are transparent and glowing, so that rule is wrong. In a controlled test on a small 15-blob phantom, the same fit scored 31.7 dB when compared at the voxels and minus 7.1 dB through the splatting renderer. So from here on we compare blobs to voxels directly. Our final phantom fit, with 2,000 blobs on a 50-blob phantom, reached 47.9 dB, almost perfect; that is a separate, later run.
+Every blob is described by 11 numbers: where it is, how wide it is along three axes, how it is rotated, and how bright it is. Adding all blobs together gives back a full volume, which we compare to the real data voxel by voxel. On the right, a real crop and its reconstruction from 250 blobs: the nuclei are there, the fine texture is smoothed away. 250 blobs need 2,750 numbers instead of about a million voxels.
 TERMS ON THIS SLIDE:
-- Phantom: artificial test data with a known answer.
-- PSNR (peak signal-to-noise ratio), in dB: a number for how close the reconstruction is to the data; higher is better, +3 dB roughly halves the squared error. It says nothing about whether nuclei survive.
-- 3D Gaussian splatting: a 2023 graphics method that represents scenes as blobs and draws them for a camera.
-- Alpha-blending (alpha-compositing): the renderer rule that each blob partly hides the blobs behind it. Correct for opaque surfaces, wrong for glowing transparent volumes.
-- Comparing at every voxel (voxel query): evaluate the blob sum at each voxel centre and compare with the data. No camera, no hiding.
+- Rotation (4 numbers): stored as a quaternion, a standard 4-number way to describe a 3D rotation without the jumps that angles can have.
+- Reconstruction: the volume we get back by drawing all blobs.
+- K: the number of blobs we allow (the budget).
 IF ASKED:
-- Why two phantoms? 31.7 vs −7.1 dB is the controlled comparison (same fit, two ways of scoring, 15-blob phantom). 47.9 dB is a later run (2,000 blobs fitted to a 50-blob phantom) and is not part of that comparison.</a:t>
+- Is 2,750 vs 1,048,576 a file-size ratio? No, it is a count of stored numbers; file sizes depend on how each is stored. The file-size comparison comes on the state-of-the-art slides.
+- How is the fit done? Start with K blobs, compare their sum with the data, and nudge all 11 x K numbers to reduce the difference (gradient descent with the Adam optimiser), for 3,000 steps.</a:t>
             </a:r>
             <a:endParaRPr lang="en-US" dirty="0"/>
           </a:p>
@@ -4197,15 +4501,15 @@
             <a:r>
               <a:rPr lang="en-US" dirty="0"/>
               <a:t>SAY:
-This is my teammate Akim's work, from his archive of 57 experiments. On the phantom, he compared random starting positions with starting each blob on a bright peak of the data. More fitting steps barely helped random starts, plus 1.7 dB. Starting on peaks jumped from 32 to 53 dB, and with 3,000 steps to 55. So the very first lesson was: where the blobs start matters more than how long you fit.
+Before touching real data we built the simplest possible test: a synthetic volume made of blobs, so we know the right answer. We fit blobs to it by comparing the blob sum with the volume at every voxel. We also learned something here: the standard 3D Gaussian splatting renderer, designed for photographs of solid objects, treats blobs as blocking the ones behind them. Our volumes are transparent and glowing, so that rule is wrong. In a controlled test on a small 15-blob phantom, the same fit scored 31.7 dB when compared at the voxels and minus 7.1 dB through the splatting renderer. So from here on we compare blobs to voxels directly. Our final phantom fit, with 2,000 blobs on a 50-blob phantom, reached 47.9 dB, almost perfect; that is a separate, later run.
 TERMS ON THIS SLIDE:
-- Starting position (initialisation): where each blob is placed before fitting begins.
-- Bright peak (local maximum): a voxel brighter than all its neighbours; a quick guess for where a blob belongs.
-- Fitting steps (iterations): how many times all blob numbers are adjusted.
-- Best of 8 fits: each setting was run with four blob shapes and two budgets (50 and 100 blobs); the bar shows the best one.
+- Phantom: artificial test data with a known answer.
+- PSNR (peak signal-to-noise ratio), in dB: a number for how close the reconstruction is to the data; higher is better, +3 dB roughly halves the squared error. It says nothing about whether nuclei survive.
+- 3D Gaussian splatting: a 2023 graphics method that represents scenes as blobs and draws them for a camera.
+- Alpha-blending (alpha-compositing): the renderer rule that each blob partly hides the blobs behind it. Correct for opaque surfaces, wrong for glowing transparent volumes.
+- Comparing at every voxel (voxel query): evaluate the blob sum at each voxel centre and compare with the data. No camera, no hiding.
 IF ASKED:
-- Why does a random start fail? Later we found the reason: blobs barely move during fitting with the default step size (Step 7).
-- Who did what? Steps 1-4 are Akim's experiments; Steps 0 and 5-8 are ours; the comparison with the state of the art is ours.</a:t>
+- Why two phantoms? 31.7 vs −7.1 dB is the controlled comparison (same fit, two ways of scoring, 15-blob phantom). 47.9 dB is a later run (2,000 blobs fitted to a 50-blob phantom) and is not part of that comparison.</a:t>
             </a:r>
             <a:endParaRPr lang="en-US" dirty="0"/>
           </a:p>
@@ -4294,17 +4598,15 @@
             <a:r>
               <a:rPr lang="en-US" dirty="0"/>
               <a:t>SAY:
-Then Akim moved to the real Tribolium data: 43 experiments and 299 fits. He compared four blob shapes: a fixed round blob, a round blob whose size is learned, a stretched blob, and a stretched blob that can also rotate. Fixed round blobs basically fail, 6.8 dB. Stretched and rotated blobs are best, median 24 dB. He also varied the number of blobs from 50 to 1,000, how voxels are sampled during fitting, the loss, and an automatic tuner that reads settings from the data. His best fit was 25.9 dB with 750 to 1,000 blobs on the whole volume. He also tried splitting blobs during fitting, densification, which did not beat a fixed budget, and matching the number of blobs to the number of cells, which found cells with F1 0.76.
+This is my teammate Akim's work, from his archive of 57 experiments. On the phantom, he compared random starting positions with starting each blob on a bright peak of the data. More fitting steps barely helped random starts, plus 1.7 dB. Starting on peaks jumped from 32 to 53 dB, and with 3,000 steps to 55. So the very first lesson was: where the blobs start matters more than how long you fit.
 TERMS ON THIS SLIDE:
-- Fixed round blob: every blob has the same, unchangeable size; only position and brightness are fitted.
-- Learned round blob: one size per blob, fitted.
-- Sampling: each fitting step looks at a random subset of voxels (here 50,000), partly chosen from bright regions.
-- Loss: the number the fit tries to reduce, here the squared difference between blobs and data (plus variants Akim tested).
-- Automatic settings (auto-tuner): Akim's tool that estimates background, noise, nucleus size and spacing from the data.
-- Densification: splitting or cloning blobs during fitting where the error is large (a standard 3D-splatting trick).
+- Starting position (initialisation): where each blob is placed before fitting begins.
+- Bright peak (local maximum): a voxel brighter than all its neighbours; a quick guess for where a blob belongs.
+- Fitting steps (iterations): how many times all blob numbers are adjusted.
+- Best of 8 fits: each setting was run with four blob shapes and two budgets (50 and 100 blobs); the bar shows the best one.
 IF ASKED:
-- Why is fixed round so bad? Its size was fixed at 2 voxels while real nuclei need 5-7, so it cannot cover them; part of the gap is that constant, not roundness itself.
-- Why median, not best? One run per setting can be lucky; the median over ~75 fits is more robust. Our next step re-tested this with repeated seeds.</a:t>
+- Why does a random start fail? Later we found the reason: blobs barely move during fitting with the default step size (Step 7).
+- Who did what? Steps 1-4 are Akim's experiments; Steps 0 and 5-8 are ours; the comparison with the state of the art is ours.</a:t>
             </a:r>
             <a:endParaRPr lang="en-US" dirty="0"/>
           </a:p>
@@ -4393,15 +4695,17 @@
             <a:r>
               <a:rPr lang="en-US" dirty="0"/>
               <a:t>SAY:
-Akim also tried letting the number of blobs grow during fitting. He starts with 25 blobs and, where the error stays high, splits or copies blobs, a standard trick from 3D Gaussian splatting called densification. He tried 12 variants: when to add blobs, whether new blobs inherit their parent's settings, how many voxels to sample. On the same crop, grown fits reached slightly better quality for the same number of blobs, for example 24.3 dB with 34 grown blobs against 23.8 dB with 50 fixed blobs. But the best values are close, 24.9 against 24.5 dB, so it is a modest gain, not a breakthrough, and we kept a fixed budget afterwards because it is simpler to control.
+Then Akim moved to the real Tribolium data: 43 experiments and 299 fits. He compared four blob shapes: a fixed round blob, a round blob whose size is learned, a stretched blob, and a stretched blob that can also rotate. Fixed round blobs basically fail, 6.8 dB. Stretched and rotated blobs are best, median 24 dB. He also varied the number of blobs from 50 to 1,000, how voxels are sampled during fitting, the loss, and an automatic tuner that reads settings from the data. His best fit was 25.9 dB with 750 to 1,000 blobs on the whole volume. He also tried splitting blobs during fitting, densification, which did not beat a fixed budget, and matching the number of blobs to the number of cells, which found cells with F1 0.76.
 TERMS ON THIS SLIDE:
-- Densification: adding blobs during fitting by splitting or cloning existing ones where the reconstruction error is large.
-- Plateau trigger: only add blobs once the error stops improving.
-- Inherit: a new blob starts with its parent's size and brightness instead of default values.
-- Fixed budget: the number of blobs is set before fitting and never changes.
+- Fixed round blob: every blob has the same, unchangeable size; only position and brightness are fitted.
+- Learned round blob: one size per blob, fitted.
+- Sampling: each fitting step looks at a random subset of voxels (here 50,000), partly chosen from bright regions.
+- Loss: the number the fit tries to reduce, here the squared difference between blobs and data (plus variants Akim tested).
+- Automatic settings (auto-tuner): Akim's tool that estimates background, noise, nucleus size and spacing from the data.
+- Densification: splitting or cloning blobs during fitting where the error is large (a standard 3D-splatting trick).
 IF ASKED:
-- Why not use densification then? The gain was within about half a dB, the final number of blobs is harder to predict, and fixed budgets made the later comparisons cleaner.
-- Does more fitting time explain it? Partly: the best grown fit used 5,000 steps; the fixed budgets used 3,000.</a:t>
+- Why is fixed round so bad? Its size was fixed at 2 voxels while real nuclei need 5-7, so it cannot cover them; part of the gap is that constant, not roundness itself.
+- Why median, not best? One run per setting can be lucky; the median over ~75 fits is more robust. Our next step re-tested this with repeated seeds.</a:t>
             </a:r>
             <a:endParaRPr lang="en-US" dirty="0"/>
           </a:p>
@@ -4490,16 +4794,15 @@
             <a:r>
               <a:rPr lang="en-US" dirty="0"/>
               <a:t>SAY:
-Akim's last idea: instead of guessing the number of blobs, count the cells first. A detector found about 230 cells in the whole volume; he then used 1.15 blobs per cell plus 12 percent for the background, which gives 301 blobs, and multiples of that. He then checked how well peaks in the blob reconstruction match the detected cells. Matching improves steadily with more blobs, from F1 0.35 at 301 blobs to 0.76 at 1,804. But look at the right panel: image quality peaks around 900 blobs and then drops. The reason is that all runs stopped after 3,000 steps, which is not enough for a large number of blobs. This was the first sign that image quality and finding cells do not always agree.
+Akim also tried letting the number of blobs grow during fitting. He starts with 25 blobs and, where the error stays high, splits or copies blobs, a standard trick from 3D Gaussian splatting called densification. He tried 12 variants: when to add blobs, whether new blobs inherit their parent's settings, how many voxels to sample. On the same crop, grown fits reached slightly better quality for the same number of blobs, for example 24.3 dB with 34 grown blobs against 23.8 dB with 50 fixed blobs. But the best values are close, 24.9 against 24.5 dB, so it is a modest gain, not a breakthrough, and we kept a fixed budget afterwards because it is simpler to control.
 TERMS ON THIS SLIDE:
-- Cell count: the number of cells, here estimated by a detector from the data, not counted by a person.
-- Cell matching F1: how well peaks in the reconstruction match the detected cells; 1.0 is perfect.
-- Support blobs (background): the extra blobs not tied to a cell, for the dimmer tissue between nuclei.
-- Under-trained: the fit stopped before it had finished improving.
+- Densification: adding blobs during fitting by splitting or cloning existing ones where the reconstruction error is large.
+- Plateau trigger: only add blobs once the error stops improving.
+- Inherit: a new blob starts with its parent's size and brightness instead of default values.
+- Fixed budget: the number of blobs is set before fitting and never changes.
 IF ASKED:
-- Are the 230 cells ground truth? No, they come from a detector with fixed settings; the hand-marked checks come later (validation slide and the state-of-the-art test).
-- Does this show that the cell-count rule is a good way to pick the budget? No. F1 rose because the budget grew sixfold, from 301 to 1,804 blobs. The rule was never compared with another way of choosing the budget.
-- Why does PSNR fall with more blobs? The number of fitting steps was fixed at 3,000; more blobs need more steps. We later saw the same confound in our own experiments.</a:t>
+- Why not use densification then? The gain was within about half a dB, the final number of blobs is harder to predict, and fixed budgets made the later comparisons cleaner.
+- Does more fitting time explain it? Partly: the best grown fit used 5,000 steps; the fixed budgets used 3,000.</a:t>
             </a:r>
             <a:endParaRPr lang="en-US" dirty="0"/>
           </a:p>
@@ -5506,28 +5809,36 @@
                   <a:schemeClr val="tx1"/>
                 </a:solidFill>
               </a:rPr>
-              <a:t>Step 5 · Repeats confirm: stretching is real</a:t>
+              <a:t>Step 4 · Set the budget from the cell count</a:t>
             </a:r>
             <a:endParaRPr lang="en-US" sz="2800" dirty="0"/>
           </a:p>
         </p:txBody>
       </p:sp>
-      <p:graphicFrame>
-        <p:nvGraphicFramePr>
-          <p:cNvPr id="3" name="Chart 0" descr=""/>
-          <p:cNvGraphicFramePr/>
-          <p:nvPr/>
-        </p:nvGraphicFramePr>
-        <p:xfrm>
-          <a:off x="457200" y="1051560"/>
-          <a:ext cx="4754880" cy="3246120"/>
-        </p:xfrm>
-        <a:graphic xmlns:a="http://schemas.openxmlformats.org/drawingml/2006/main">
-          <a:graphicData uri="http://schemas.openxmlformats.org/drawingml/2006/chart">
-            <c:chart xmlns:c="http://schemas.openxmlformats.org/drawingml/2006/chart" r:id="rId1"/>
-          </a:graphicData>
-        </a:graphic>
-      </p:graphicFrame>
+      <p:pic>
+        <p:nvPicPr>
+          <p:cNvPr id="3" name="akim-cellbudget" descr="D:\masters\MLCV seminar\TeamProject\presentation\figs\akim_cellbudget.png">    </p:cNvPr>
+          <p:cNvPicPr>
+            <a:picLocks noChangeAspect="1"/>
+          </p:cNvPicPr>
+          <p:nvPr/>
+        </p:nvPicPr>
+        <p:blipFill>
+          <a:blip r:embed="rId1"/>
+          <a:stretch>
+            <a:fillRect/>
+          </a:stretch>
+        </p:blipFill>
+        <p:spPr>
+          <a:xfrm>
+            <a:off x="457200" y="1097280"/>
+            <a:ext cx="4846320" cy="2852928"/>
+          </a:xfrm>
+          <a:prstGeom prst="rect">
+            <a:avLst/>
+          </a:prstGeom>
+        </p:spPr>
+      </p:pic>
       <p:sp>
         <p:nvSpPr>
           <p:cNvPr id="4" name="Text 1"/>
@@ -5536,8 +5847,8 @@
         </p:nvSpPr>
         <p:spPr>
           <a:xfrm>
-            <a:off x="457200" y="4343400"/>
-            <a:ext cx="4754880" cy="274320"/>
+            <a:off x="457200" y="4023360"/>
+            <a:ext cx="4846320" cy="274320"/>
           </a:xfrm>
           <a:prstGeom prst="rect">
             <a:avLst/>
@@ -5553,14 +5864,14 @@
               <a:buNone/>
             </a:pPr>
             <a:r>
-              <a:rPr lang="en-US" sz="1200" dirty="0">
+              <a:rPr lang="en-US" sz="1100" dirty="0">
                 <a:solidFill>
                   <a:schemeClr val="accent5"/>
                 </a:solidFill>
               </a:rPr>
-              <a:t>Seed-to-seed spread (SD) within each bar: 0.02–0.13 dB</a:t>
-            </a:r>
-            <a:endParaRPr lang="en-US" sz="1200" dirty="0"/>
+              <a:t>Akim's runs, whole Tribolium volume, 230 cells found by a detector</a:t>
+            </a:r>
+            <a:endParaRPr lang="en-US" sz="1100" dirty="0"/>
           </a:p>
         </p:txBody>
       </p:sp>
@@ -5621,7 +5932,7 @@
                   <a:schemeClr val="accent1"/>
                 </a:solidFill>
               </a:rPr>
-              <a:t>WHAT WE DID</a:t>
+              <a:t>WHAT AKIM CHANGED</a:t>
             </a:r>
             <a:endParaRPr lang="en-US" sz="1200" dirty="0"/>
           </a:p>
@@ -5657,7 +5968,7 @@
                   <a:schemeClr val="tx1"/>
                 </a:solidFill>
               </a:rPr>
-              <a:t>Re-ran round, stretched and stretched + rotated blobs with 5 seeds and 3 budgets each</a:t>
+              <a:t>Count cells first (230), then use ~1.15 blobs per cell + 12% for background (301), and multiples</a:t>
             </a:r>
             <a:endParaRPr lang="en-US" sz="1400" dirty="0"/>
           </a:p>
@@ -5756,7 +6067,7 @@
                   <a:schemeClr val="tx1"/>
                 </a:solidFill>
               </a:rPr>
-              <a:t>Akim had one run per setting; a single run can be luck</a:t>
+              <a:t>If each cell gets a blob, the blobs should match the cells</a:t>
             </a:r>
             <a:endParaRPr lang="en-US" sz="1400" dirty="0"/>
           </a:p>
@@ -5855,7 +6166,7 @@
                   <a:schemeClr val="tx1"/>
                 </a:solidFill>
               </a:rPr>
-              <a:t>+3.2 dB (22.3 → 25.5), seed SD ≤ 0.13 dB; learned blobs as stretched as real nuclei</a:t>
+              <a:t>Cell matching F1 0.35 → 0.76 with more blobs, while PSNR falls past ~900 blobs</a:t>
             </a:r>
             <a:endParaRPr lang="en-US" sz="1400" dirty="0"/>
           </a:p>
@@ -5963,7 +6274,7 @@
                   <a:schemeClr val="tx1"/>
                 </a:solidFill>
               </a:rPr>
-              <a:t>Step 6 · Start each blob on a nucleus</a:t>
+              <a:t>Step 5 · Repeats confirm: stretching is real</a:t>
             </a:r>
             <a:endParaRPr lang="en-US" sz="2800" dirty="0"/>
           </a:p>
@@ -5987,7 +6298,43 @@
       </p:graphicFrame>
       <p:sp>
         <p:nvSpPr>
-          <p:cNvPr id="4" name="step-card-0"/>
+          <p:cNvPr id="4" name="Text 1"/>
+          <p:cNvSpPr txBox="1"/>
+          <p:nvPr/>
+        </p:nvSpPr>
+        <p:spPr>
+          <a:xfrm>
+            <a:off x="457200" y="4343400"/>
+            <a:ext cx="4754880" cy="274320"/>
+          </a:xfrm>
+          <a:prstGeom prst="rect">
+            <a:avLst/>
+          </a:prstGeom>
+          <a:noFill/>
+          <a:ln/>
+        </p:spPr>
+        <p:txBody>
+          <a:bodyPr wrap="square" lIns="0" tIns="0" rIns="0" bIns="0" rtlCol="0" anchor="t"/>
+          <a:lstStyle/>
+          <a:p>
+            <a:pPr indent="0" marL="0">
+              <a:buNone/>
+            </a:pPr>
+            <a:r>
+              <a:rPr lang="en-US" sz="1200" dirty="0">
+                <a:solidFill>
+                  <a:schemeClr val="accent5"/>
+                </a:solidFill>
+              </a:rPr>
+              <a:t>Seed-to-seed spread (SD) within each bar: 0.02–0.13 dB</a:t>
+            </a:r>
+            <a:endParaRPr lang="en-US" sz="1200" dirty="0"/>
+          </a:p>
+        </p:txBody>
+      </p:sp>
+      <p:sp>
+        <p:nvSpPr>
+          <p:cNvPr id="5" name="step-card-0"/>
           <p:cNvSpPr/>
           <p:nvPr/>
         </p:nvSpPr>
@@ -6014,7 +6361,7 @@
       </p:sp>
       <p:sp>
         <p:nvSpPr>
-          <p:cNvPr id="5" name="Text 2"/>
+          <p:cNvPr id="6" name="Text 3"/>
           <p:cNvSpPr txBox="1"/>
           <p:nvPr/>
         </p:nvSpPr>
@@ -6042,7 +6389,7 @@
                   <a:schemeClr val="accent1"/>
                 </a:solidFill>
               </a:rPr>
-              <a:t>WHAT WE CHANGED</a:t>
+              <a:t>WHAT WE DID</a:t>
             </a:r>
             <a:endParaRPr lang="en-US" sz="1200" dirty="0"/>
           </a:p>
@@ -6050,7 +6397,7 @@
       </p:sp>
       <p:sp>
         <p:nvSpPr>
-          <p:cNvPr id="6" name="Text 3"/>
+          <p:cNvPr id="7" name="Text 4"/>
           <p:cNvSpPr txBox="1"/>
           <p:nvPr/>
         </p:nvSpPr>
@@ -6078,7 +6425,7 @@
                   <a:schemeClr val="tx1"/>
                 </a:solidFill>
               </a:rPr>
-              <a:t>Bright-peak starts → one starting blob on every detected nucleus first</a:t>
+              <a:t>Re-ran round, stretched and stretched + rotated blobs with 5 seeds and 3 budgets each</a:t>
             </a:r>
             <a:endParaRPr lang="en-US" sz="1400" dirty="0"/>
           </a:p>
@@ -6086,7 +6433,7 @@
       </p:sp>
       <p:sp>
         <p:nvSpPr>
-          <p:cNvPr id="7" name="step-card-1"/>
+          <p:cNvPr id="8" name="step-card-1"/>
           <p:cNvSpPr/>
           <p:nvPr/>
         </p:nvSpPr>
@@ -6113,7 +6460,7 @@
       </p:sp>
       <p:sp>
         <p:nvSpPr>
-          <p:cNvPr id="8" name="Text 5"/>
+          <p:cNvPr id="9" name="Text 6"/>
           <p:cNvSpPr txBox="1"/>
           <p:nvPr/>
         </p:nvSpPr>
@@ -6149,7 +6496,7 @@
       </p:sp>
       <p:sp>
         <p:nvSpPr>
-          <p:cNvPr id="9" name="Text 6"/>
+          <p:cNvPr id="10" name="Text 7"/>
           <p:cNvSpPr txBox="1"/>
           <p:nvPr/>
         </p:nvSpPr>
@@ -6177,7 +6524,7 @@
                   <a:schemeClr val="tx1"/>
                 </a:solidFill>
               </a:rPr>
-              <a:t>During fitting blobs moved less than 1 voxel; nuclei are ~20 voxels apart</a:t>
+              <a:t>Akim had one run per setting; a single run can be luck</a:t>
             </a:r>
             <a:endParaRPr lang="en-US" sz="1400" dirty="0"/>
           </a:p>
@@ -6185,7 +6532,7 @@
       </p:sp>
       <p:sp>
         <p:nvSpPr>
-          <p:cNvPr id="10" name="step-card-2"/>
+          <p:cNvPr id="11" name="step-card-2"/>
           <p:cNvSpPr/>
           <p:nvPr/>
         </p:nvSpPr>
@@ -6212,7 +6559,7 @@
       </p:sp>
       <p:sp>
         <p:nvSpPr>
-          <p:cNvPr id="11" name="Text 8"/>
+          <p:cNvPr id="12" name="Text 9"/>
           <p:cNvSpPr txBox="1"/>
           <p:nvPr/>
         </p:nvSpPr>
@@ -6248,7 +6595,7 @@
       </p:sp>
       <p:sp>
         <p:nvSpPr>
-          <p:cNvPr id="12" name="Text 9"/>
+          <p:cNvPr id="13" name="Text 10"/>
           <p:cNvSpPr txBox="1"/>
           <p:nvPr/>
         </p:nvSpPr>
@@ -6276,7 +6623,7 @@
                   <a:schemeClr val="tx1"/>
                 </a:solidFill>
               </a:rPr>
-              <a:t>Every nucleus gets a blob (73% → 100%); found nuclei 52% → 71%</a:t>
+              <a:t>+3.2 dB (22.3 → 25.5), seed SD ≤ 0.13 dB; learned blobs as stretched as real nuclei</a:t>
             </a:r>
             <a:endParaRPr lang="en-US" sz="1400" dirty="0"/>
           </a:p>
@@ -6384,7 +6731,7 @@
                   <a:schemeClr val="tx1"/>
                 </a:solidFill>
               </a:rPr>
-              <a:t>Step 7 · Bigger steps let blobs travel</a:t>
+              <a:t>Step 6 · Start each blob on a nucleus</a:t>
             </a:r>
             <a:endParaRPr lang="en-US" sz="2800" dirty="0"/>
           </a:p>
@@ -6499,7 +6846,7 @@
                   <a:schemeClr val="tx1"/>
                 </a:solidFill>
               </a:rPr>
-              <a:t>Raised the step size for blob positions up to 62×</a:t>
+              <a:t>Bright-peak starts → one starting blob on every detected nucleus first</a:t>
             </a:r>
             <a:endParaRPr lang="en-US" sz="1400" dirty="0"/>
           </a:p>
@@ -6598,7 +6945,7 @@
                   <a:schemeClr val="tx1"/>
                 </a:solidFill>
               </a:rPr>
-              <a:t>The default was copied from photo-scene code and never scaled to voxel units</a:t>
+              <a:t>During fitting blobs moved less than 1 voxel; nuclei are ~20 voxels apart</a:t>
             </a:r>
             <a:endParaRPr lang="en-US" sz="1400" dirty="0"/>
           </a:p>
@@ -6697,7 +7044,7 @@
                   <a:schemeClr val="tx1"/>
                 </a:solidFill>
               </a:rPr>
-              <a:t>Badly started fits catch up (F1 0.64 → 0.78), but good starts get worse (0.84 → 0.78)</a:t>
+              <a:t>Every nucleus gets a blob (73% → 100%); found nuclei 52% → 71%</a:t>
             </a:r>
             <a:endParaRPr lang="en-US" sz="1400" dirty="0"/>
           </a:p>
@@ -6805,75 +7152,31 @@
                   <a:schemeClr val="tx1"/>
                 </a:solidFill>
               </a:rPr>
-              <a:t>Step 8 · Faint nuclei: cap the blob size</a:t>
+              <a:t>Step 7 · Bigger steps let blobs travel</a:t>
             </a:r>
             <a:endParaRPr lang="en-US" sz="2800" dirty="0"/>
           </a:p>
         </p:txBody>
       </p:sp>
-      <p:pic>
-        <p:nvPicPr>
-          <p:cNvPr id="3" name="size-cap" descr="D:\masters\MLCV seminar\TeamProject\presentation\figs\size_cap.png">    </p:cNvPr>
-          <p:cNvPicPr>
-            <a:picLocks noChangeAspect="1"/>
-          </p:cNvPicPr>
-          <p:nvPr/>
-        </p:nvPicPr>
-        <p:blipFill>
-          <a:blip r:embed="rId1"/>
-          <a:stretch>
-            <a:fillRect/>
-          </a:stretch>
-        </p:blipFill>
-        <p:spPr>
-          <a:xfrm>
-            <a:off x="457200" y="1097280"/>
-            <a:ext cx="4754880" cy="2377440"/>
-          </a:xfrm>
-          <a:prstGeom prst="rect">
-            <a:avLst/>
-          </a:prstGeom>
-        </p:spPr>
-      </p:pic>
-      <p:sp>
-        <p:nvSpPr>
-          <p:cNvPr id="4" name="Text 1"/>
-          <p:cNvSpPr txBox="1"/>
-          <p:nvPr/>
-        </p:nvSpPr>
-        <p:spPr>
-          <a:xfrm>
-            <a:off x="457200" y="3566160"/>
-            <a:ext cx="4754880" cy="274320"/>
-          </a:xfrm>
-          <a:prstGeom prst="rect">
-            <a:avLst/>
-          </a:prstGeom>
-          <a:noFill/>
-          <a:ln/>
-        </p:spPr>
-        <p:txBody>
-          <a:bodyPr wrap="square" lIns="0" tIns="0" rIns="0" bIns="0" rtlCol="0" anchor="t"/>
-          <a:lstStyle/>
-          <a:p>
-            <a:pPr indent="0" marL="0">
-              <a:buNone/>
-            </a:pPr>
-            <a:r>
-              <a:rPr lang="en-US" sz="1100" dirty="0">
-                <a:solidFill>
-                  <a:schemeClr val="accent5"/>
-                </a:solidFill>
-              </a:rPr>
-              <a:t>Green: nucleus found  ·  red: missed</a:t>
-            </a:r>
-            <a:endParaRPr lang="en-US" sz="1100" dirty="0"/>
-          </a:p>
-        </p:txBody>
-      </p:sp>
-      <p:sp>
-        <p:nvSpPr>
-          <p:cNvPr id="5" name="step-card-0"/>
+      <p:graphicFrame>
+        <p:nvGraphicFramePr>
+          <p:cNvPr id="3" name="Chart 0" descr=""/>
+          <p:cNvGraphicFramePr/>
+          <p:nvPr/>
+        </p:nvGraphicFramePr>
+        <p:xfrm>
+          <a:off x="457200" y="1051560"/>
+          <a:ext cx="4754880" cy="3246120"/>
+        </p:xfrm>
+        <a:graphic xmlns:a="http://schemas.openxmlformats.org/drawingml/2006/main">
+          <a:graphicData uri="http://schemas.openxmlformats.org/drawingml/2006/chart">
+            <c:chart xmlns:c="http://schemas.openxmlformats.org/drawingml/2006/chart" r:id="rId1"/>
+          </a:graphicData>
+        </a:graphic>
+      </p:graphicFrame>
+      <p:sp>
+        <p:nvSpPr>
+          <p:cNvPr id="4" name="step-card-0"/>
           <p:cNvSpPr/>
           <p:nvPr/>
         </p:nvSpPr>
@@ -6900,14 +7203,50 @@
       </p:sp>
       <p:sp>
         <p:nvSpPr>
+          <p:cNvPr id="5" name="Text 2"/>
+          <p:cNvSpPr txBox="1"/>
+          <p:nvPr/>
+        </p:nvSpPr>
+        <p:spPr>
+          <a:xfrm>
+            <a:off x="5650992" y="1143000"/>
+            <a:ext cx="2871216" cy="228600"/>
+          </a:xfrm>
+          <a:prstGeom prst="rect">
+            <a:avLst/>
+          </a:prstGeom>
+          <a:noFill/>
+          <a:ln/>
+        </p:spPr>
+        <p:txBody>
+          <a:bodyPr wrap="square" lIns="0" tIns="0" rIns="0" bIns="0" rtlCol="0" anchor="t"/>
+          <a:lstStyle/>
+          <a:p>
+            <a:pPr indent="0" marL="0">
+              <a:buNone/>
+            </a:pPr>
+            <a:r>
+              <a:rPr lang="en-US" sz="1200" b="1" dirty="0">
+                <a:solidFill>
+                  <a:schemeClr val="accent1"/>
+                </a:solidFill>
+              </a:rPr>
+              <a:t>WHAT WE CHANGED</a:t>
+            </a:r>
+            <a:endParaRPr lang="en-US" sz="1200" dirty="0"/>
+          </a:p>
+        </p:txBody>
+      </p:sp>
+      <p:sp>
+        <p:nvSpPr>
           <p:cNvPr id="6" name="Text 3"/>
           <p:cNvSpPr txBox="1"/>
           <p:nvPr/>
         </p:nvSpPr>
         <p:spPr>
           <a:xfrm>
-            <a:off x="5650992" y="1143000"/>
-            <a:ext cx="2871216" cy="228600"/>
+            <a:off x="5650992" y="1399032"/>
+            <a:ext cx="2871216" cy="722376"/>
           </a:xfrm>
           <a:prstGeom prst="rect">
             <a:avLst/>
@@ -6923,48 +7262,12 @@
               <a:buNone/>
             </a:pPr>
             <a:r>
-              <a:rPr lang="en-US" sz="1200" b="1" dirty="0">
-                <a:solidFill>
-                  <a:schemeClr val="accent1"/>
+              <a:rPr lang="en-US" sz="1400" dirty="0">
+                <a:solidFill>
+                  <a:schemeClr val="tx1"/>
                 </a:solidFill>
               </a:rPr>
-              <a:t>WHAT WE CHANGED</a:t>
-            </a:r>
-            <a:endParaRPr lang="en-US" sz="1200" dirty="0"/>
-          </a:p>
-        </p:txBody>
-      </p:sp>
-      <p:sp>
-        <p:nvSpPr>
-          <p:cNvPr id="7" name="Text 4"/>
-          <p:cNvSpPr txBox="1"/>
-          <p:nvPr/>
-        </p:nvSpPr>
-        <p:spPr>
-          <a:xfrm>
-            <a:off x="5650992" y="1399032"/>
-            <a:ext cx="2871216" cy="722376"/>
-          </a:xfrm>
-          <a:prstGeom prst="rect">
-            <a:avLst/>
-          </a:prstGeom>
-          <a:noFill/>
-          <a:ln/>
-        </p:spPr>
-        <p:txBody>
-          <a:bodyPr wrap="square" lIns="0" tIns="0" rIns="0" bIns="0" rtlCol="0" anchor="t"/>
-          <a:lstStyle/>
-          <a:p>
-            <a:pPr indent="0" marL="0">
-              <a:buNone/>
-            </a:pPr>
-            <a:r>
-              <a:rPr lang="en-US" sz="1400" dirty="0">
-                <a:solidFill>
-                  <a:schemeClr val="tx1"/>
-                </a:solidFill>
-              </a:rPr>
-              <a:t>Limited how wide a nucleus blob may grow (10 voxels)</a:t>
+              <a:t>Raised the step size for blob positions up to 62×</a:t>
             </a:r>
             <a:endParaRPr lang="en-US" sz="1400" dirty="0"/>
           </a:p>
@@ -6972,7 +7275,7 @@
       </p:sp>
       <p:sp>
         <p:nvSpPr>
-          <p:cNvPr id="8" name="step-card-1"/>
+          <p:cNvPr id="7" name="step-card-1"/>
           <p:cNvSpPr/>
           <p:nvPr/>
         </p:nvSpPr>
@@ -6999,14 +7302,50 @@
       </p:sp>
       <p:sp>
         <p:nvSpPr>
+          <p:cNvPr id="8" name="Text 5"/>
+          <p:cNvSpPr txBox="1"/>
+          <p:nvPr/>
+        </p:nvSpPr>
+        <p:spPr>
+          <a:xfrm>
+            <a:off x="5650992" y="2350008"/>
+            <a:ext cx="2871216" cy="228600"/>
+          </a:xfrm>
+          <a:prstGeom prst="rect">
+            <a:avLst/>
+          </a:prstGeom>
+          <a:noFill/>
+          <a:ln/>
+        </p:spPr>
+        <p:txBody>
+          <a:bodyPr wrap="square" lIns="0" tIns="0" rIns="0" bIns="0" rtlCol="0" anchor="t"/>
+          <a:lstStyle/>
+          <a:p>
+            <a:pPr indent="0" marL="0">
+              <a:buNone/>
+            </a:pPr>
+            <a:r>
+              <a:rPr lang="en-US" sz="1200" b="1" dirty="0">
+                <a:solidFill>
+                  <a:schemeClr val="accent1"/>
+                </a:solidFill>
+              </a:rPr>
+              <a:t>WHY</a:t>
+            </a:r>
+            <a:endParaRPr lang="en-US" sz="1200" dirty="0"/>
+          </a:p>
+        </p:txBody>
+      </p:sp>
+      <p:sp>
+        <p:nvSpPr>
           <p:cNvPr id="9" name="Text 6"/>
           <p:cNvSpPr txBox="1"/>
           <p:nvPr/>
         </p:nvSpPr>
         <p:spPr>
           <a:xfrm>
-            <a:off x="5650992" y="2350008"/>
-            <a:ext cx="2871216" cy="228600"/>
+            <a:off x="5650992" y="2606040"/>
+            <a:ext cx="2871216" cy="722376"/>
           </a:xfrm>
           <a:prstGeom prst="rect">
             <a:avLst/>
@@ -7022,48 +7361,12 @@
               <a:buNone/>
             </a:pPr>
             <a:r>
-              <a:rPr lang="en-US" sz="1200" b="1" dirty="0">
-                <a:solidFill>
-                  <a:schemeClr val="accent1"/>
+              <a:rPr lang="en-US" sz="1400" dirty="0">
+                <a:solidFill>
+                  <a:schemeClr val="tx1"/>
                 </a:solidFill>
               </a:rPr>
-              <a:t>WHY</a:t>
-            </a:r>
-            <a:endParaRPr lang="en-US" sz="1200" dirty="0"/>
-          </a:p>
-        </p:txBody>
-      </p:sp>
-      <p:sp>
-        <p:nvSpPr>
-          <p:cNvPr id="10" name="Text 7"/>
-          <p:cNvSpPr txBox="1"/>
-          <p:nvPr/>
-        </p:nvSpPr>
-        <p:spPr>
-          <a:xfrm>
-            <a:off x="5650992" y="2606040"/>
-            <a:ext cx="2871216" cy="722376"/>
-          </a:xfrm>
-          <a:prstGeom prst="rect">
-            <a:avLst/>
-          </a:prstGeom>
-          <a:noFill/>
-          <a:ln/>
-        </p:spPr>
-        <p:txBody>
-          <a:bodyPr wrap="square" lIns="0" tIns="0" rIns="0" bIns="0" rtlCol="0" anchor="t"/>
-          <a:lstStyle/>
-          <a:p>
-            <a:pPr indent="0" marL="0">
-              <a:buNone/>
-            </a:pPr>
-            <a:r>
-              <a:rPr lang="en-US" sz="1400" dirty="0">
-                <a:solidFill>
-                  <a:schemeClr val="tx1"/>
-                </a:solidFill>
-              </a:rPr>
-              <a:t>At the end of fitting, blobs at lost faint nuclei were ~30% wider than at kept ones</a:t>
+              <a:t>The default was copied from photo-scene code and never scaled to voxel units</a:t>
             </a:r>
             <a:endParaRPr lang="en-US" sz="1400" dirty="0"/>
           </a:p>
@@ -7071,7 +7374,7 @@
       </p:sp>
       <p:sp>
         <p:nvSpPr>
-          <p:cNvPr id="11" name="step-card-2"/>
+          <p:cNvPr id="10" name="step-card-2"/>
           <p:cNvSpPr/>
           <p:nvPr/>
         </p:nvSpPr>
@@ -7098,14 +7401,50 @@
       </p:sp>
       <p:sp>
         <p:nvSpPr>
+          <p:cNvPr id="11" name="Text 8"/>
+          <p:cNvSpPr txBox="1"/>
+          <p:nvPr/>
+        </p:nvSpPr>
+        <p:spPr>
+          <a:xfrm>
+            <a:off x="5650992" y="3557016"/>
+            <a:ext cx="2871216" cy="228600"/>
+          </a:xfrm>
+          <a:prstGeom prst="rect">
+            <a:avLst/>
+          </a:prstGeom>
+          <a:noFill/>
+          <a:ln/>
+        </p:spPr>
+        <p:txBody>
+          <a:bodyPr wrap="square" lIns="0" tIns="0" rIns="0" bIns="0" rtlCol="0" anchor="t"/>
+          <a:lstStyle/>
+          <a:p>
+            <a:pPr indent="0" marL="0">
+              <a:buNone/>
+            </a:pPr>
+            <a:r>
+              <a:rPr lang="en-US" sz="1200" b="1" dirty="0">
+                <a:solidFill>
+                  <a:schemeClr val="accent1"/>
+                </a:solidFill>
+              </a:rPr>
+              <a:t>RESULT</a:t>
+            </a:r>
+            <a:endParaRPr lang="en-US" sz="1200" dirty="0"/>
+          </a:p>
+        </p:txBody>
+      </p:sp>
+      <p:sp>
+        <p:nvSpPr>
           <p:cNvPr id="12" name="Text 9"/>
           <p:cNvSpPr txBox="1"/>
           <p:nvPr/>
         </p:nvSpPr>
         <p:spPr>
           <a:xfrm>
-            <a:off x="5650992" y="3557016"/>
-            <a:ext cx="2871216" cy="228600"/>
+            <a:off x="5650992" y="3813048"/>
+            <a:ext cx="2871216" cy="722376"/>
           </a:xfrm>
           <a:prstGeom prst="rect">
             <a:avLst/>
@@ -7121,48 +7460,12 @@
               <a:buNone/>
             </a:pPr>
             <a:r>
-              <a:rPr lang="en-US" sz="1200" b="1" dirty="0">
-                <a:solidFill>
-                  <a:schemeClr val="accent1"/>
+              <a:rPr lang="en-US" sz="1400" dirty="0">
+                <a:solidFill>
+                  <a:schemeClr val="tx1"/>
                 </a:solidFill>
               </a:rPr>
-              <a:t>RESULT</a:t>
-            </a:r>
-            <a:endParaRPr lang="en-US" sz="1200" dirty="0"/>
-          </a:p>
-        </p:txBody>
-      </p:sp>
-      <p:sp>
-        <p:nvSpPr>
-          <p:cNvPr id="13" name="Text 10"/>
-          <p:cNvSpPr txBox="1"/>
-          <p:nvPr/>
-        </p:nvSpPr>
-        <p:spPr>
-          <a:xfrm>
-            <a:off x="5650992" y="3813048"/>
-            <a:ext cx="2871216" cy="722376"/>
-          </a:xfrm>
-          <a:prstGeom prst="rect">
-            <a:avLst/>
-          </a:prstGeom>
-          <a:noFill/>
-          <a:ln/>
-        </p:spPr>
-        <p:txBody>
-          <a:bodyPr wrap="square" lIns="0" tIns="0" rIns="0" bIns="0" rtlCol="0" anchor="t"/>
-          <a:lstStyle/>
-          <a:p>
-            <a:pPr indent="0" marL="0">
-              <a:buNone/>
-            </a:pPr>
-            <a:r>
-              <a:rPr lang="en-US" sz="1400" dirty="0">
-                <a:solidFill>
-                  <a:schemeClr val="tx1"/>
-                </a:solidFill>
-              </a:rPr>
-              <a:t>Faint nuclei found: 13 → 19 of 31. Image quality unchanged; 1 of 4 regions worse</a:t>
+              <a:t>Badly started fits catch up (F1 0.64 → 0.78), but good starts get worse (0.84 → 0.78)</a:t>
             </a:r>
             <a:endParaRPr lang="en-US" sz="1400" dirty="0"/>
           </a:p>
@@ -7270,6 +7573,471 @@
                   <a:schemeClr val="tx1"/>
                 </a:solidFill>
               </a:rPr>
+              <a:t>Step 8 · Faint nuclei: cap the blob size</a:t>
+            </a:r>
+            <a:endParaRPr lang="en-US" sz="2800" dirty="0"/>
+          </a:p>
+        </p:txBody>
+      </p:sp>
+      <p:pic>
+        <p:nvPicPr>
+          <p:cNvPr id="3" name="size-cap" descr="D:\masters\MLCV seminar\TeamProject\presentation\figs\size_cap.png">    </p:cNvPr>
+          <p:cNvPicPr>
+            <a:picLocks noChangeAspect="1"/>
+          </p:cNvPicPr>
+          <p:nvPr/>
+        </p:nvPicPr>
+        <p:blipFill>
+          <a:blip r:embed="rId1"/>
+          <a:stretch>
+            <a:fillRect/>
+          </a:stretch>
+        </p:blipFill>
+        <p:spPr>
+          <a:xfrm>
+            <a:off x="457200" y="1097280"/>
+            <a:ext cx="4754880" cy="2377440"/>
+          </a:xfrm>
+          <a:prstGeom prst="rect">
+            <a:avLst/>
+          </a:prstGeom>
+        </p:spPr>
+      </p:pic>
+      <p:sp>
+        <p:nvSpPr>
+          <p:cNvPr id="4" name="Text 1"/>
+          <p:cNvSpPr txBox="1"/>
+          <p:nvPr/>
+        </p:nvSpPr>
+        <p:spPr>
+          <a:xfrm>
+            <a:off x="457200" y="3566160"/>
+            <a:ext cx="4754880" cy="274320"/>
+          </a:xfrm>
+          <a:prstGeom prst="rect">
+            <a:avLst/>
+          </a:prstGeom>
+          <a:noFill/>
+          <a:ln/>
+        </p:spPr>
+        <p:txBody>
+          <a:bodyPr wrap="square" lIns="0" tIns="0" rIns="0" bIns="0" rtlCol="0" anchor="t"/>
+          <a:lstStyle/>
+          <a:p>
+            <a:pPr indent="0" marL="0">
+              <a:buNone/>
+            </a:pPr>
+            <a:r>
+              <a:rPr lang="en-US" sz="1100" dirty="0">
+                <a:solidFill>
+                  <a:schemeClr val="accent5"/>
+                </a:solidFill>
+              </a:rPr>
+              <a:t>Green: nucleus found  ·  red: missed</a:t>
+            </a:r>
+            <a:endParaRPr lang="en-US" sz="1100" dirty="0"/>
+          </a:p>
+        </p:txBody>
+      </p:sp>
+      <p:sp>
+        <p:nvSpPr>
+          <p:cNvPr id="5" name="step-card-0"/>
+          <p:cNvSpPr/>
+          <p:nvPr/>
+        </p:nvSpPr>
+        <p:spPr>
+          <a:xfrm>
+            <a:off x="5486400" y="1051560"/>
+            <a:ext cx="3200400" cy="1143000"/>
+          </a:xfrm>
+          <a:prstGeom prst="roundRect">
+            <a:avLst>
+              <a:gd name="adj" fmla="val 6400"/>
+            </a:avLst>
+          </a:prstGeom>
+          <a:solidFill>
+            <a:schemeClr val="bg2"/>
+          </a:solidFill>
+          <a:ln w="12700">
+            <a:solidFill>
+              <a:schemeClr val="bg2"/>
+            </a:solidFill>
+            <a:prstDash val="solid"/>
+          </a:ln>
+        </p:spPr>
+      </p:sp>
+      <p:sp>
+        <p:nvSpPr>
+          <p:cNvPr id="6" name="Text 3"/>
+          <p:cNvSpPr txBox="1"/>
+          <p:nvPr/>
+        </p:nvSpPr>
+        <p:spPr>
+          <a:xfrm>
+            <a:off x="5650992" y="1143000"/>
+            <a:ext cx="2871216" cy="228600"/>
+          </a:xfrm>
+          <a:prstGeom prst="rect">
+            <a:avLst/>
+          </a:prstGeom>
+          <a:noFill/>
+          <a:ln/>
+        </p:spPr>
+        <p:txBody>
+          <a:bodyPr wrap="square" lIns="0" tIns="0" rIns="0" bIns="0" rtlCol="0" anchor="t"/>
+          <a:lstStyle/>
+          <a:p>
+            <a:pPr indent="0" marL="0">
+              <a:buNone/>
+            </a:pPr>
+            <a:r>
+              <a:rPr lang="en-US" sz="1200" b="1" dirty="0">
+                <a:solidFill>
+                  <a:schemeClr val="accent1"/>
+                </a:solidFill>
+              </a:rPr>
+              <a:t>WHAT WE CHANGED</a:t>
+            </a:r>
+            <a:endParaRPr lang="en-US" sz="1200" dirty="0"/>
+          </a:p>
+        </p:txBody>
+      </p:sp>
+      <p:sp>
+        <p:nvSpPr>
+          <p:cNvPr id="7" name="Text 4"/>
+          <p:cNvSpPr txBox="1"/>
+          <p:nvPr/>
+        </p:nvSpPr>
+        <p:spPr>
+          <a:xfrm>
+            <a:off x="5650992" y="1399032"/>
+            <a:ext cx="2871216" cy="722376"/>
+          </a:xfrm>
+          <a:prstGeom prst="rect">
+            <a:avLst/>
+          </a:prstGeom>
+          <a:noFill/>
+          <a:ln/>
+        </p:spPr>
+        <p:txBody>
+          <a:bodyPr wrap="square" lIns="0" tIns="0" rIns="0" bIns="0" rtlCol="0" anchor="t"/>
+          <a:lstStyle/>
+          <a:p>
+            <a:pPr indent="0" marL="0">
+              <a:buNone/>
+            </a:pPr>
+            <a:r>
+              <a:rPr lang="en-US" sz="1400" dirty="0">
+                <a:solidFill>
+                  <a:schemeClr val="tx1"/>
+                </a:solidFill>
+              </a:rPr>
+              <a:t>Limited how wide a nucleus blob may grow (10 voxels)</a:t>
+            </a:r>
+            <a:endParaRPr lang="en-US" sz="1400" dirty="0"/>
+          </a:p>
+        </p:txBody>
+      </p:sp>
+      <p:sp>
+        <p:nvSpPr>
+          <p:cNvPr id="8" name="step-card-1"/>
+          <p:cNvSpPr/>
+          <p:nvPr/>
+        </p:nvSpPr>
+        <p:spPr>
+          <a:xfrm>
+            <a:off x="5486400" y="2258568"/>
+            <a:ext cx="3200400" cy="1143000"/>
+          </a:xfrm>
+          <a:prstGeom prst="roundRect">
+            <a:avLst>
+              <a:gd name="adj" fmla="val 6400"/>
+            </a:avLst>
+          </a:prstGeom>
+          <a:solidFill>
+            <a:schemeClr val="bg2"/>
+          </a:solidFill>
+          <a:ln w="12700">
+            <a:solidFill>
+              <a:schemeClr val="bg2"/>
+            </a:solidFill>
+            <a:prstDash val="solid"/>
+          </a:ln>
+        </p:spPr>
+      </p:sp>
+      <p:sp>
+        <p:nvSpPr>
+          <p:cNvPr id="9" name="Text 6"/>
+          <p:cNvSpPr txBox="1"/>
+          <p:nvPr/>
+        </p:nvSpPr>
+        <p:spPr>
+          <a:xfrm>
+            <a:off x="5650992" y="2350008"/>
+            <a:ext cx="2871216" cy="228600"/>
+          </a:xfrm>
+          <a:prstGeom prst="rect">
+            <a:avLst/>
+          </a:prstGeom>
+          <a:noFill/>
+          <a:ln/>
+        </p:spPr>
+        <p:txBody>
+          <a:bodyPr wrap="square" lIns="0" tIns="0" rIns="0" bIns="0" rtlCol="0" anchor="t"/>
+          <a:lstStyle/>
+          <a:p>
+            <a:pPr indent="0" marL="0">
+              <a:buNone/>
+            </a:pPr>
+            <a:r>
+              <a:rPr lang="en-US" sz="1200" b="1" dirty="0">
+                <a:solidFill>
+                  <a:schemeClr val="accent1"/>
+                </a:solidFill>
+              </a:rPr>
+              <a:t>WHY</a:t>
+            </a:r>
+            <a:endParaRPr lang="en-US" sz="1200" dirty="0"/>
+          </a:p>
+        </p:txBody>
+      </p:sp>
+      <p:sp>
+        <p:nvSpPr>
+          <p:cNvPr id="10" name="Text 7"/>
+          <p:cNvSpPr txBox="1"/>
+          <p:nvPr/>
+        </p:nvSpPr>
+        <p:spPr>
+          <a:xfrm>
+            <a:off x="5650992" y="2606040"/>
+            <a:ext cx="2871216" cy="722376"/>
+          </a:xfrm>
+          <a:prstGeom prst="rect">
+            <a:avLst/>
+          </a:prstGeom>
+          <a:noFill/>
+          <a:ln/>
+        </p:spPr>
+        <p:txBody>
+          <a:bodyPr wrap="square" lIns="0" tIns="0" rIns="0" bIns="0" rtlCol="0" anchor="t"/>
+          <a:lstStyle/>
+          <a:p>
+            <a:pPr indent="0" marL="0">
+              <a:buNone/>
+            </a:pPr>
+            <a:r>
+              <a:rPr lang="en-US" sz="1400" dirty="0">
+                <a:solidFill>
+                  <a:schemeClr val="tx1"/>
+                </a:solidFill>
+              </a:rPr>
+              <a:t>At the end of fitting, blobs at lost faint nuclei were ~30% wider than at kept ones</a:t>
+            </a:r>
+            <a:endParaRPr lang="en-US" sz="1400" dirty="0"/>
+          </a:p>
+        </p:txBody>
+      </p:sp>
+      <p:sp>
+        <p:nvSpPr>
+          <p:cNvPr id="11" name="step-card-2"/>
+          <p:cNvSpPr/>
+          <p:nvPr/>
+        </p:nvSpPr>
+        <p:spPr>
+          <a:xfrm>
+            <a:off x="5486400" y="3465576"/>
+            <a:ext cx="3200400" cy="1143000"/>
+          </a:xfrm>
+          <a:prstGeom prst="roundRect">
+            <a:avLst>
+              <a:gd name="adj" fmla="val 6400"/>
+            </a:avLst>
+          </a:prstGeom>
+          <a:solidFill>
+            <a:schemeClr val="bg2"/>
+          </a:solidFill>
+          <a:ln w="12700">
+            <a:solidFill>
+              <a:schemeClr val="bg2"/>
+            </a:solidFill>
+            <a:prstDash val="solid"/>
+          </a:ln>
+        </p:spPr>
+      </p:sp>
+      <p:sp>
+        <p:nvSpPr>
+          <p:cNvPr id="12" name="Text 9"/>
+          <p:cNvSpPr txBox="1"/>
+          <p:nvPr/>
+        </p:nvSpPr>
+        <p:spPr>
+          <a:xfrm>
+            <a:off x="5650992" y="3557016"/>
+            <a:ext cx="2871216" cy="228600"/>
+          </a:xfrm>
+          <a:prstGeom prst="rect">
+            <a:avLst/>
+          </a:prstGeom>
+          <a:noFill/>
+          <a:ln/>
+        </p:spPr>
+        <p:txBody>
+          <a:bodyPr wrap="square" lIns="0" tIns="0" rIns="0" bIns="0" rtlCol="0" anchor="t"/>
+          <a:lstStyle/>
+          <a:p>
+            <a:pPr indent="0" marL="0">
+              <a:buNone/>
+            </a:pPr>
+            <a:r>
+              <a:rPr lang="en-US" sz="1200" b="1" dirty="0">
+                <a:solidFill>
+                  <a:schemeClr val="accent1"/>
+                </a:solidFill>
+              </a:rPr>
+              <a:t>RESULT</a:t>
+            </a:r>
+            <a:endParaRPr lang="en-US" sz="1200" dirty="0"/>
+          </a:p>
+        </p:txBody>
+      </p:sp>
+      <p:sp>
+        <p:nvSpPr>
+          <p:cNvPr id="13" name="Text 10"/>
+          <p:cNvSpPr txBox="1"/>
+          <p:nvPr/>
+        </p:nvSpPr>
+        <p:spPr>
+          <a:xfrm>
+            <a:off x="5650992" y="3813048"/>
+            <a:ext cx="2871216" cy="722376"/>
+          </a:xfrm>
+          <a:prstGeom prst="rect">
+            <a:avLst/>
+          </a:prstGeom>
+          <a:noFill/>
+          <a:ln/>
+        </p:spPr>
+        <p:txBody>
+          <a:bodyPr wrap="square" lIns="0" tIns="0" rIns="0" bIns="0" rtlCol="0" anchor="t"/>
+          <a:lstStyle/>
+          <a:p>
+            <a:pPr indent="0" marL="0">
+              <a:buNone/>
+            </a:pPr>
+            <a:r>
+              <a:rPr lang="en-US" sz="1400" dirty="0">
+                <a:solidFill>
+                  <a:schemeClr val="tx1"/>
+                </a:solidFill>
+              </a:rPr>
+              <a:t>Faint nuclei found: 13 → 19 of 31. Image quality unchanged; 1 of 4 regions worse</a:t>
+            </a:r>
+            <a:endParaRPr lang="en-US" sz="1400" dirty="0"/>
+          </a:p>
+        </p:txBody>
+      </p:sp>
+      <p:sp>
+        <p:nvSpPr>
+          <p:cNvPr id="25" name="Slide Number Placeholder 0"/>
+          <p:cNvSpPr>
+            <a:spLocks noGrp="1"/>
+          </p:cNvSpPr>
+          <p:nvPr>
+            <p:ph type="sldNum" sz="quarter" idx="4294967295"/>
+          </p:nvPr>
+        </p:nvSpPr>
+        <p:spPr>
+          <a:xfrm>
+            <a:off x="8229600" y="4754880"/>
+            <a:ext cx="457200" cy="228600"/>
+          </a:xfrm>
+          <a:prstGeom prst="rect">
+            <a:avLst/>
+          </a:prstGeom>
+          <a:extLst>
+            <a:ext uri="{C572A759-6A51-4108-AA02-DFA0A04FC94B}">
+              <ma14:wrappingTextBoxFlag xmlns:ma14="http://schemas.microsoft.com/office/mac/drawingml/2011/main" val="0"/>
+            </a:ext>
+          </a:extLst>
+        </p:spPr>
+        <p:txBody>
+          <a:bodyPr/>
+          <a:lstStyle>
+            <a:lvl1pPr>
+              <a:defRPr sz="900">
+                <a:solidFill>
+                  <a:schemeClr val="accent5"/>
+                </a:solidFill>
+              </a:defRPr>
+            </a:lvl1pPr>
+          </a:lstStyle>
+          <a:p>
+            <a:pPr algn="r"/>
+            <a:fld id="{F7021451-1387-4CA6-816F-3879F97B5CBC}" type="slidenum">
+              <a:rPr b="0" lang="en-US"/>
+              <a:t>14</a:t>
+            </a:fld>
+            <a:endParaRPr lang="en-US"/>
+          </a:p>
+        </p:txBody>
+      </p:sp>
+    </p:spTree>
+  </p:cSld>
+  <p:clrMapOvr>
+    <a:masterClrMapping/>
+  </p:clrMapOvr>
+</p:sld>
+</file>
+
+<file path=ppt/slides/slide15.xml><?xml version="1.0" encoding="utf-8"?>
+<p:sld xmlns:a="http://schemas.openxmlformats.org/drawingml/2006/main" xmlns:r="http://schemas.openxmlformats.org/officeDocument/2006/relationships" xmlns:p="http://schemas.openxmlformats.org/presentationml/2006/main">
+  <p:cSld name="Slide 15">
+    <p:spTree>
+      <p:nvGrpSpPr>
+        <p:cNvPr id="1" name=""/>
+        <p:cNvGrpSpPr/>
+        <p:nvPr/>
+      </p:nvGrpSpPr>
+      <p:grpSpPr>
+        <a:xfrm>
+          <a:off x="0" y="0"/>
+          <a:ext cx="0" cy="0"/>
+          <a:chOff x="0" y="0"/>
+          <a:chExt cx="0" cy="0"/>
+        </a:xfrm>
+      </p:grpSpPr>
+      <p:sp>
+        <p:nvSpPr>
+          <p:cNvPr id="2" name="Text 0"/>
+          <p:cNvSpPr/>
+          <p:nvPr>
+            <p:ph idx="100" type="title" hasCustomPrompt="1"/>
+          </p:nvPr>
+        </p:nvSpPr>
+        <p:spPr>
+          <a:xfrm>
+            <a:off x="457200" y="256032"/>
+            <a:ext cx="8229600" cy="640080"/>
+          </a:xfrm>
+          <a:prstGeom prst="rect">
+            <a:avLst/>
+          </a:prstGeom>
+          <a:noFill/>
+          <a:ln/>
+        </p:spPr>
+        <p:txBody>
+          <a:bodyPr wrap="square" lIns="0" tIns="0" rIns="0" bIns="0" rtlCol="0" anchor="ctr"/>
+          <a:lstStyle/>
+          <a:p>
+            <a:pPr algn="l" indent="0" marL="0">
+              <a:buNone/>
+            </a:pPr>
+            <a:r>
+              <a:rPr lang="en-US" sz="2800" b="1" dirty="0">
+                <a:solidFill>
+                  <a:schemeClr val="tx1"/>
+                </a:solidFill>
+              </a:rPr>
               <a:t>From the simple setup to the final recipe</a:t>
             </a:r>
             <a:endParaRPr lang="en-US" sz="2800" dirty="0"/>
@@ -7278,7 +8046,7 @@
       </p:sp>
       <p:graphicFrame>
         <p:nvGraphicFramePr>
-          <p:cNvPr id="15" name="Table 0"/>
+          <p:cNvPr id="16" name="Table 0"/>
           <p:cNvGraphicFramePr>
             <a:graphicFrameLocks noGrp="1"/>
           </p:cNvGraphicFramePr>
@@ -10462,456 +11230,6 @@
             <a:pPr algn="r"/>
             <a:fld id="{F7021451-1387-4CA6-816F-3879F97B5CBC}" type="slidenum">
               <a:rPr b="0" lang="en-US"/>
-              <a:t>14</a:t>
-            </a:fld>
-            <a:endParaRPr lang="en-US"/>
-          </a:p>
-        </p:txBody>
-      </p:sp>
-    </p:spTree>
-  </p:cSld>
-  <p:clrMapOvr>
-    <a:masterClrMapping/>
-  </p:clrMapOvr>
-</p:sld>
-</file>
-
-<file path=ppt/slides/slide15.xml><?xml version="1.0" encoding="utf-8"?>
-<p:sld xmlns:a="http://schemas.openxmlformats.org/drawingml/2006/main" xmlns:r="http://schemas.openxmlformats.org/officeDocument/2006/relationships" xmlns:p="http://schemas.openxmlformats.org/presentationml/2006/main">
-  <p:cSld name="Slide 15">
-    <p:spTree>
-      <p:nvGrpSpPr>
-        <p:cNvPr id="1" name=""/>
-        <p:cNvGrpSpPr/>
-        <p:nvPr/>
-      </p:nvGrpSpPr>
-      <p:grpSpPr>
-        <a:xfrm>
-          <a:off x="0" y="0"/>
-          <a:ext cx="0" cy="0"/>
-          <a:chOff x="0" y="0"/>
-          <a:chExt cx="0" cy="0"/>
-        </a:xfrm>
-      </p:grpSpPr>
-      <p:sp>
-        <p:nvSpPr>
-          <p:cNvPr id="2" name="Text 0"/>
-          <p:cNvSpPr/>
-          <p:nvPr>
-            <p:ph idx="100" type="title" hasCustomPrompt="1"/>
-          </p:nvPr>
-        </p:nvSpPr>
-        <p:spPr>
-          <a:xfrm>
-            <a:off x="457200" y="256032"/>
-            <a:ext cx="8229600" cy="640080"/>
-          </a:xfrm>
-          <a:prstGeom prst="rect">
-            <a:avLst/>
-          </a:prstGeom>
-          <a:noFill/>
-          <a:ln/>
-        </p:spPr>
-        <p:txBody>
-          <a:bodyPr wrap="square" lIns="0" tIns="0" rIns="0" bIns="0" rtlCol="0" anchor="ctr"/>
-          <a:lstStyle/>
-          <a:p>
-            <a:pPr algn="l" indent="0" marL="0">
-              <a:buNone/>
-            </a:pPr>
-            <a:r>
-              <a:rPr lang="en-US" sz="2800" b="1" dirty="0">
-                <a:solidFill>
-                  <a:schemeClr val="tx1"/>
-                </a:solidFill>
-              </a:rPr>
-              <a:t>Does the fit behave as expected?</a:t>
-            </a:r>
-            <a:endParaRPr lang="en-US" sz="2800" dirty="0"/>
-          </a:p>
-        </p:txBody>
-      </p:sp>
-      <p:sp>
-        <p:nvSpPr>
-          <p:cNvPr id="3" name="check-0"/>
-          <p:cNvSpPr/>
-          <p:nvPr/>
-        </p:nvSpPr>
-        <p:spPr>
-          <a:xfrm>
-            <a:off x="457200" y="1143000"/>
-            <a:ext cx="2606040" cy="2377440"/>
-          </a:xfrm>
-          <a:prstGeom prst="roundRect">
-            <a:avLst>
-              <a:gd name="adj" fmla="val 3077"/>
-            </a:avLst>
-          </a:prstGeom>
-          <a:solidFill>
-            <a:schemeClr val="bg2"/>
-          </a:solidFill>
-          <a:ln w="12700">
-            <a:solidFill>
-              <a:schemeClr val="bg2"/>
-            </a:solidFill>
-            <a:prstDash val="solid"/>
-          </a:ln>
-        </p:spPr>
-      </p:sp>
-      <p:sp>
-        <p:nvSpPr>
-          <p:cNvPr id="4" name="Text 2"/>
-          <p:cNvSpPr txBox="1"/>
-          <p:nvPr/>
-        </p:nvSpPr>
-        <p:spPr>
-          <a:xfrm>
-            <a:off x="640080" y="1325880"/>
-            <a:ext cx="2240280" cy="731520"/>
-          </a:xfrm>
-          <a:prstGeom prst="rect">
-            <a:avLst/>
-          </a:prstGeom>
-          <a:noFill/>
-          <a:ln/>
-        </p:spPr>
-        <p:txBody>
-          <a:bodyPr wrap="square" lIns="0" tIns="0" rIns="0" bIns="0" rtlCol="0" anchor="t"/>
-          <a:lstStyle/>
-          <a:p>
-            <a:pPr indent="0" marL="0">
-              <a:buNone/>
-            </a:pPr>
-            <a:r>
-              <a:rPr lang="en-US" sz="3200" b="1" dirty="0">
-                <a:solidFill>
-                  <a:schemeClr val="accent3"/>
-                </a:solidFill>
-                <a:latin typeface="Cambria" pitchFamily="34" charset="0"/>
-                <a:ea typeface="Cambria" pitchFamily="34" charset="-122"/>
-                <a:cs typeface="Cambria" pitchFamily="34" charset="-120"/>
-              </a:rPr>
-              <a:t>0.79 vs 0.73</a:t>
-            </a:r>
-            <a:endParaRPr lang="en-US" sz="3200" dirty="0"/>
-          </a:p>
-        </p:txBody>
-      </p:sp>
-      <p:sp>
-        <p:nvSpPr>
-          <p:cNvPr id="5" name="Text 3"/>
-          <p:cNvSpPr txBox="1"/>
-          <p:nvPr/>
-        </p:nvSpPr>
-        <p:spPr>
-          <a:xfrm>
-            <a:off x="640080" y="2148840"/>
-            <a:ext cx="2240280" cy="1280160"/>
-          </a:xfrm>
-          <a:prstGeom prst="rect">
-            <a:avLst/>
-          </a:prstGeom>
-          <a:noFill/>
-          <a:ln/>
-        </p:spPr>
-        <p:txBody>
-          <a:bodyPr wrap="square" lIns="0" tIns="0" rIns="0" bIns="0" rtlCol="0" anchor="t"/>
-          <a:lstStyle/>
-          <a:p>
-            <a:pPr indent="0" marL="0">
-              <a:buNone/>
-            </a:pPr>
-            <a:r>
-              <a:rPr lang="en-US" sz="1500" dirty="0">
-                <a:solidFill>
-                  <a:schemeClr val="tx2"/>
-                </a:solidFill>
-              </a:rPr>
-              <a:t>depth-to-width ratio: learned blobs vs measured nuclei</a:t>
-            </a:r>
-            <a:endParaRPr lang="en-US" sz="1500" dirty="0"/>
-          </a:p>
-        </p:txBody>
-      </p:sp>
-      <p:sp>
-        <p:nvSpPr>
-          <p:cNvPr id="6" name="check-1"/>
-          <p:cNvSpPr/>
-          <p:nvPr/>
-        </p:nvSpPr>
-        <p:spPr>
-          <a:xfrm>
-            <a:off x="3246120" y="1143000"/>
-            <a:ext cx="2606040" cy="2377440"/>
-          </a:xfrm>
-          <a:prstGeom prst="roundRect">
-            <a:avLst>
-              <a:gd name="adj" fmla="val 3077"/>
-            </a:avLst>
-          </a:prstGeom>
-          <a:solidFill>
-            <a:schemeClr val="bg2"/>
-          </a:solidFill>
-          <a:ln w="12700">
-            <a:solidFill>
-              <a:schemeClr val="bg2"/>
-            </a:solidFill>
-            <a:prstDash val="solid"/>
-          </a:ln>
-        </p:spPr>
-      </p:sp>
-      <p:sp>
-        <p:nvSpPr>
-          <p:cNvPr id="7" name="Text 5"/>
-          <p:cNvSpPr txBox="1"/>
-          <p:nvPr/>
-        </p:nvSpPr>
-        <p:spPr>
-          <a:xfrm>
-            <a:off x="3429000" y="1325880"/>
-            <a:ext cx="2240280" cy="731520"/>
-          </a:xfrm>
-          <a:prstGeom prst="rect">
-            <a:avLst/>
-          </a:prstGeom>
-          <a:noFill/>
-          <a:ln/>
-        </p:spPr>
-        <p:txBody>
-          <a:bodyPr wrap="square" lIns="0" tIns="0" rIns="0" bIns="0" rtlCol="0" anchor="t"/>
-          <a:lstStyle/>
-          <a:p>
-            <a:pPr indent="0" marL="0">
-              <a:buNone/>
-            </a:pPr>
-            <a:r>
-              <a:rPr lang="en-US" sz="3200" b="1" dirty="0">
-                <a:solidFill>
-                  <a:schemeClr val="accent3"/>
-                </a:solidFill>
-                <a:latin typeface="Cambria" pitchFamily="34" charset="0"/>
-                <a:ea typeface="Cambria" pitchFamily="34" charset="-122"/>
-                <a:cs typeface="Cambria" pitchFamily="34" charset="-120"/>
-              </a:rPr>
-              <a:t>14 vs 10</a:t>
-            </a:r>
-            <a:endParaRPr lang="en-US" sz="3200" dirty="0"/>
-          </a:p>
-        </p:txBody>
-      </p:sp>
-      <p:sp>
-        <p:nvSpPr>
-          <p:cNvPr id="8" name="Text 6"/>
-          <p:cNvSpPr txBox="1"/>
-          <p:nvPr/>
-        </p:nvSpPr>
-        <p:spPr>
-          <a:xfrm>
-            <a:off x="3429000" y="2148840"/>
-            <a:ext cx="2240280" cy="1280160"/>
-          </a:xfrm>
-          <a:prstGeom prst="rect">
-            <a:avLst/>
-          </a:prstGeom>
-          <a:noFill/>
-          <a:ln/>
-        </p:spPr>
-        <p:txBody>
-          <a:bodyPr wrap="square" lIns="0" tIns="0" rIns="0" bIns="0" rtlCol="0" anchor="t"/>
-          <a:lstStyle/>
-          <a:p>
-            <a:pPr indent="0" marL="0">
-              <a:buNone/>
-            </a:pPr>
-            <a:r>
-              <a:rPr lang="en-US" sz="1500" dirty="0">
-                <a:solidFill>
-                  <a:schemeClr val="tx2"/>
-                </a:solidFill>
-              </a:rPr>
-              <a:t>of 29 hand-marked Drosophila nuclei in the top 100 detections: fitted blobs vs raw brightness</a:t>
-            </a:r>
-            <a:endParaRPr lang="en-US" sz="1500" dirty="0"/>
-          </a:p>
-        </p:txBody>
-      </p:sp>
-      <p:sp>
-        <p:nvSpPr>
-          <p:cNvPr id="9" name="check-2"/>
-          <p:cNvSpPr/>
-          <p:nvPr/>
-        </p:nvSpPr>
-        <p:spPr>
-          <a:xfrm>
-            <a:off x="6035040" y="1143000"/>
-            <a:ext cx="2606040" cy="2377440"/>
-          </a:xfrm>
-          <a:prstGeom prst="roundRect">
-            <a:avLst>
-              <a:gd name="adj" fmla="val 3077"/>
-            </a:avLst>
-          </a:prstGeom>
-          <a:solidFill>
-            <a:schemeClr val="bg2"/>
-          </a:solidFill>
-          <a:ln w="12700">
-            <a:solidFill>
-              <a:schemeClr val="bg2"/>
-            </a:solidFill>
-            <a:prstDash val="solid"/>
-          </a:ln>
-        </p:spPr>
-      </p:sp>
-      <p:sp>
-        <p:nvSpPr>
-          <p:cNvPr id="10" name="Text 8"/>
-          <p:cNvSpPr txBox="1"/>
-          <p:nvPr/>
-        </p:nvSpPr>
-        <p:spPr>
-          <a:xfrm>
-            <a:off x="6217920" y="1325880"/>
-            <a:ext cx="2240280" cy="731520"/>
-          </a:xfrm>
-          <a:prstGeom prst="rect">
-            <a:avLst/>
-          </a:prstGeom>
-          <a:noFill/>
-          <a:ln/>
-        </p:spPr>
-        <p:txBody>
-          <a:bodyPr wrap="square" lIns="0" tIns="0" rIns="0" bIns="0" rtlCol="0" anchor="t"/>
-          <a:lstStyle/>
-          <a:p>
-            <a:pPr indent="0" marL="0">
-              <a:buNone/>
-            </a:pPr>
-            <a:r>
-              <a:rPr lang="en-US" sz="3200" b="1" dirty="0">
-                <a:solidFill>
-                  <a:schemeClr val="accent4"/>
-                </a:solidFill>
-                <a:latin typeface="Cambria" pitchFamily="34" charset="0"/>
-                <a:ea typeface="Cambria" pitchFamily="34" charset="-122"/>
-                <a:cs typeface="Cambria" pitchFamily="34" charset="-120"/>
-              </a:rPr>
-              <a:t>16–18</a:t>
-            </a:r>
-            <a:endParaRPr lang="en-US" sz="3200" dirty="0"/>
-          </a:p>
-        </p:txBody>
-      </p:sp>
-      <p:sp>
-        <p:nvSpPr>
-          <p:cNvPr id="11" name="Text 9"/>
-          <p:cNvSpPr txBox="1"/>
-          <p:nvPr/>
-        </p:nvSpPr>
-        <p:spPr>
-          <a:xfrm>
-            <a:off x="6217920" y="2148840"/>
-            <a:ext cx="2240280" cy="1280160"/>
-          </a:xfrm>
-          <a:prstGeom prst="rect">
-            <a:avLst/>
-          </a:prstGeom>
-          <a:noFill/>
-          <a:ln/>
-        </p:spPr>
-        <p:txBody>
-          <a:bodyPr wrap="square" lIns="0" tIns="0" rIns="0" bIns="0" rtlCol="0" anchor="t"/>
-          <a:lstStyle/>
-          <a:p>
-            <a:pPr indent="0" marL="0">
-              <a:buNone/>
-            </a:pPr>
-            <a:r>
-              <a:rPr lang="en-US" sz="1500" dirty="0">
-                <a:solidFill>
-                  <a:schemeClr val="tx2"/>
-                </a:solidFill>
-              </a:rPr>
-              <a:t>same top 100, raw candidates ranked by a simple LoG blob filter: better than every fit</a:t>
-            </a:r>
-            <a:endParaRPr lang="en-US" sz="1500" dirty="0"/>
-          </a:p>
-        </p:txBody>
-      </p:sp>
-      <p:sp>
-        <p:nvSpPr>
-          <p:cNvPr id="12" name="Text 10"/>
-          <p:cNvSpPr txBox="1"/>
-          <p:nvPr/>
-        </p:nvSpPr>
-        <p:spPr>
-          <a:xfrm>
-            <a:off x="457200" y="3749040"/>
-            <a:ext cx="8229600" cy="640080"/>
-          </a:xfrm>
-          <a:prstGeom prst="rect">
-            <a:avLst/>
-          </a:prstGeom>
-          <a:noFill/>
-          <a:ln/>
-        </p:spPr>
-        <p:txBody>
-          <a:bodyPr wrap="square" lIns="0" tIns="0" rIns="0" bIns="0" rtlCol="0" anchor="t"/>
-          <a:lstStyle/>
-          <a:p>
-            <a:pPr indent="0" marL="0">
-              <a:buNone/>
-            </a:pPr>
-            <a:r>
-              <a:rPr lang="en-US" sz="1500" dirty="0">
-                <a:solidFill>
-                  <a:schemeClr val="tx2"/>
-                </a:solidFill>
-              </a:rPr>
-              <a:t>In the top 100, fitting ranks nuclei better than brightness but not better than a simple blob filter. With all 457 candidates the raw detector finds 26 of 29.</a:t>
-            </a:r>
-            <a:endParaRPr lang="en-US" sz="1500" dirty="0"/>
-          </a:p>
-        </p:txBody>
-      </p:sp>
-      <p:sp>
-        <p:nvSpPr>
-          <p:cNvPr id="25" name="Slide Number Placeholder 0"/>
-          <p:cNvSpPr>
-            <a:spLocks noGrp="1"/>
-          </p:cNvSpPr>
-          <p:nvPr>
-            <p:ph type="sldNum" sz="quarter" idx="4294967295"/>
-          </p:nvPr>
-        </p:nvSpPr>
-        <p:spPr>
-          <a:xfrm>
-            <a:off x="8229600" y="4754880"/>
-            <a:ext cx="457200" cy="228600"/>
-          </a:xfrm>
-          <a:prstGeom prst="rect">
-            <a:avLst/>
-          </a:prstGeom>
-          <a:extLst>
-            <a:ext uri="{C572A759-6A51-4108-AA02-DFA0A04FC94B}">
-              <ma14:wrappingTextBoxFlag xmlns:ma14="http://schemas.microsoft.com/office/mac/drawingml/2011/main" val="0"/>
-            </a:ext>
-          </a:extLst>
-        </p:spPr>
-        <p:txBody>
-          <a:bodyPr/>
-          <a:lstStyle>
-            <a:lvl1pPr>
-              <a:defRPr sz="900">
-                <a:solidFill>
-                  <a:schemeClr val="accent5"/>
-                </a:solidFill>
-              </a:defRPr>
-            </a:lvl1pPr>
-          </a:lstStyle>
-          <a:p>
-            <a:pPr algn="r"/>
-            <a:fld id="{F7021451-1387-4CA6-816F-3879F97B5CBC}" type="slidenum">
-              <a:rPr b="0" lang="en-US"/>
               <a:t>15</a:t>
             </a:fld>
             <a:endParaRPr lang="en-US"/>
@@ -10975,7 +11293,7 @@
                   <a:schemeClr val="tx1"/>
                 </a:solidFill>
               </a:rPr>
-              <a:t>Against the state of the art, at the same file size</a:t>
+              <a:t>Does the fit behave as expected?</a:t>
             </a:r>
             <a:endParaRPr lang="en-US" sz="2800" dirty="0"/>
           </a:p>
@@ -10983,14 +11301,41 @@
       </p:sp>
       <p:sp>
         <p:nvSpPr>
-          <p:cNvPr id="3" name="Text 1"/>
+          <p:cNvPr id="3" name="check-0"/>
+          <p:cNvSpPr/>
+          <p:nvPr/>
+        </p:nvSpPr>
+        <p:spPr>
+          <a:xfrm>
+            <a:off x="457200" y="1143000"/>
+            <a:ext cx="2606040" cy="2377440"/>
+          </a:xfrm>
+          <a:prstGeom prst="roundRect">
+            <a:avLst>
+              <a:gd name="adj" fmla="val 3077"/>
+            </a:avLst>
+          </a:prstGeom>
+          <a:solidFill>
+            <a:schemeClr val="bg2"/>
+          </a:solidFill>
+          <a:ln w="12700">
+            <a:solidFill>
+              <a:schemeClr val="bg2"/>
+            </a:solidFill>
+            <a:prstDash val="solid"/>
+          </a:ln>
+        </p:spPr>
+      </p:sp>
+      <p:sp>
+        <p:nvSpPr>
+          <p:cNvPr id="4" name="Text 2"/>
           <p:cNvSpPr txBox="1"/>
           <p:nvPr/>
         </p:nvSpPr>
         <p:spPr>
           <a:xfrm>
-            <a:off x="457200" y="1024128"/>
-            <a:ext cx="2011680" cy="274320"/>
+            <a:off x="640080" y="1325880"/>
+            <a:ext cx="2240280" cy="731520"/>
           </a:xfrm>
           <a:prstGeom prst="rect">
             <a:avLst/>
@@ -11002,55 +11347,34 @@
           <a:bodyPr wrap="square" lIns="0" tIns="0" rIns="0" bIns="0" rtlCol="0" anchor="t"/>
           <a:lstStyle/>
           <a:p>
-            <a:pPr algn="ctr" indent="0" marL="0">
+            <a:pPr indent="0" marL="0">
               <a:buNone/>
             </a:pPr>
             <a:r>
-              <a:rPr lang="en-US" sz="1400" b="1" dirty="0">
-                <a:solidFill>
-                  <a:schemeClr val="tx1"/>
-                </a:solidFill>
+              <a:rPr lang="en-US" sz="3200" b="1" dirty="0">
+                <a:solidFill>
+                  <a:schemeClr val="accent3"/>
+                </a:solidFill>
+                <a:latin typeface="Cambria" pitchFamily="34" charset="0"/>
+                <a:ea typeface="Cambria" pitchFamily="34" charset="-122"/>
+                <a:cs typeface="Cambria" pitchFamily="34" charset="-120"/>
               </a:rPr>
-              <a:t>Original</a:t>
-            </a:r>
-            <a:endParaRPr lang="en-US" sz="1400" dirty="0"/>
-          </a:p>
-        </p:txBody>
-      </p:sp>
-      <p:pic>
-        <p:nvPicPr>
-          <p:cNvPr id="4" name="four-raw" descr="D:\masters\MLCV seminar\TeamProject\presentation\figs\four_raw.png">    </p:cNvPr>
-          <p:cNvPicPr>
-            <a:picLocks noChangeAspect="1"/>
-          </p:cNvPicPr>
-          <p:nvPr/>
-        </p:nvPicPr>
-        <p:blipFill>
-          <a:blip r:embed="rId1"/>
-          <a:stretch>
-            <a:fillRect/>
-          </a:stretch>
-        </p:blipFill>
-        <p:spPr>
-          <a:xfrm>
-            <a:off x="457200" y="1325880"/>
-            <a:ext cx="2011680" cy="1536192"/>
-          </a:xfrm>
-          <a:prstGeom prst="rect">
-            <a:avLst/>
-          </a:prstGeom>
-        </p:spPr>
-      </p:pic>
-      <p:sp>
-        <p:nvSpPr>
-          <p:cNvPr id="5" name="Text 2"/>
+              <a:t>0.79 vs 0.73</a:t>
+            </a:r>
+            <a:endParaRPr lang="en-US" sz="3200" dirty="0"/>
+          </a:p>
+        </p:txBody>
+      </p:sp>
+      <p:sp>
+        <p:nvSpPr>
+          <p:cNvPr id="5" name="Text 3"/>
           <p:cNvSpPr txBox="1"/>
           <p:nvPr/>
         </p:nvSpPr>
         <p:spPr>
           <a:xfrm>
-            <a:off x="2532888" y="1024128"/>
-            <a:ext cx="2011680" cy="274320"/>
+            <a:off x="640080" y="2148840"/>
+            <a:ext cx="2240280" cy="1280160"/>
           </a:xfrm>
           <a:prstGeom prst="rect">
             <a:avLst/>
@@ -11062,55 +11386,58 @@
           <a:bodyPr wrap="square" lIns="0" tIns="0" rIns="0" bIns="0" rtlCol="0" anchor="t"/>
           <a:lstStyle/>
           <a:p>
-            <a:pPr algn="ctr" indent="0" marL="0">
+            <a:pPr indent="0" marL="0">
               <a:buNone/>
             </a:pPr>
             <a:r>
-              <a:rPr lang="en-US" sz="1400" b="1" dirty="0">
-                <a:solidFill>
-                  <a:schemeClr val="tx1"/>
+              <a:rPr lang="en-US" sz="1500" dirty="0">
+                <a:solidFill>
+                  <a:schemeClr val="tx2"/>
                 </a:solidFill>
               </a:rPr>
-              <a:t>JPEG-XL 82×</a:t>
-            </a:r>
-            <a:endParaRPr lang="en-US" sz="1400" dirty="0"/>
-          </a:p>
-        </p:txBody>
-      </p:sp>
-      <p:pic>
-        <p:nvPicPr>
-          <p:cNvPr id="6" name="four-jpegxl" descr="D:\masters\MLCV seminar\TeamProject\presentation\figs\four_jpegxl.png">    </p:cNvPr>
-          <p:cNvPicPr>
-            <a:picLocks noChangeAspect="1"/>
-          </p:cNvPicPr>
-          <p:nvPr/>
-        </p:nvPicPr>
-        <p:blipFill>
-          <a:blip r:embed="rId2"/>
-          <a:stretch>
-            <a:fillRect/>
-          </a:stretch>
-        </p:blipFill>
-        <p:spPr>
-          <a:xfrm>
-            <a:off x="2532888" y="1325880"/>
-            <a:ext cx="2011680" cy="1536192"/>
-          </a:xfrm>
-          <a:prstGeom prst="rect">
-            <a:avLst/>
-          </a:prstGeom>
-        </p:spPr>
-      </p:pic>
-      <p:sp>
-        <p:nvSpPr>
-          <p:cNvPr id="7" name="Text 3"/>
+              <a:t>depth-to-width ratio: learned blobs vs measured nuclei</a:t>
+            </a:r>
+            <a:endParaRPr lang="en-US" sz="1500" dirty="0"/>
+          </a:p>
+        </p:txBody>
+      </p:sp>
+      <p:sp>
+        <p:nvSpPr>
+          <p:cNvPr id="6" name="check-1"/>
+          <p:cNvSpPr/>
+          <p:nvPr/>
+        </p:nvSpPr>
+        <p:spPr>
+          <a:xfrm>
+            <a:off x="3246120" y="1143000"/>
+            <a:ext cx="2606040" cy="2377440"/>
+          </a:xfrm>
+          <a:prstGeom prst="roundRect">
+            <a:avLst>
+              <a:gd name="adj" fmla="val 3077"/>
+            </a:avLst>
+          </a:prstGeom>
+          <a:solidFill>
+            <a:schemeClr val="bg2"/>
+          </a:solidFill>
+          <a:ln w="12700">
+            <a:solidFill>
+              <a:schemeClr val="bg2"/>
+            </a:solidFill>
+            <a:prstDash val="solid"/>
+          </a:ln>
+        </p:spPr>
+      </p:sp>
+      <p:sp>
+        <p:nvSpPr>
+          <p:cNvPr id="7" name="Text 5"/>
           <p:cNvSpPr txBox="1"/>
           <p:nvPr/>
         </p:nvSpPr>
         <p:spPr>
           <a:xfrm>
-            <a:off x="2532888" y="2880360"/>
-            <a:ext cx="2011680" cy="411480"/>
+            <a:off x="3429000" y="1325880"/>
+            <a:ext cx="2240280" cy="731520"/>
           </a:xfrm>
           <a:prstGeom prst="rect">
             <a:avLst/>
@@ -11122,45 +11449,34 @@
           <a:bodyPr wrap="square" lIns="0" tIns="0" rIns="0" bIns="0" rtlCol="0" anchor="t"/>
           <a:lstStyle/>
           <a:p>
-            <a:pPr algn="ctr" indent="0" marL="0">
+            <a:pPr indent="0" marL="0">
               <a:buNone/>
             </a:pPr>
             <a:r>
-              <a:rPr lang="en-US" sz="1200" dirty="0">
-                <a:solidFill>
-                  <a:schemeClr val="accent5"/>
-                </a:solidFill>
+              <a:rPr lang="en-US" sz="3200" b="1" dirty="0">
+                <a:solidFill>
+                  <a:schemeClr val="accent3"/>
+                </a:solidFill>
+                <a:latin typeface="Cambria" pitchFamily="34" charset="0"/>
+                <a:ea typeface="Cambria" pitchFamily="34" charset="-122"/>
+                <a:cs typeface="Cambria" pitchFamily="34" charset="-120"/>
               </a:rPr>
-              <a:t>100% of nuclei kept</a:t>
-            </a:r>
-            <a:endParaRPr lang="en-US" sz="1200" dirty="0"/>
-          </a:p>
-          <a:p>
-            <a:pPr algn="ctr" indent="0" marL="0">
-              <a:buNone/>
-            </a:pPr>
-            <a:r>
-              <a:rPr lang="en-US" sz="1000" dirty="0">
-                <a:solidFill>
-                  <a:schemeClr val="accent5"/>
-                </a:solidFill>
-              </a:rPr>
-              <a:t>2D Cellpose, whole frame</a:t>
-            </a:r>
-            <a:endParaRPr lang="en-US" sz="1200" dirty="0"/>
-          </a:p>
-        </p:txBody>
-      </p:sp>
-      <p:sp>
-        <p:nvSpPr>
-          <p:cNvPr id="8" name="Text 4"/>
+              <a:t>14 vs 10</a:t>
+            </a:r>
+            <a:endParaRPr lang="en-US" sz="3200" dirty="0"/>
+          </a:p>
+        </p:txBody>
+      </p:sp>
+      <p:sp>
+        <p:nvSpPr>
+          <p:cNvPr id="8" name="Text 6"/>
           <p:cNvSpPr txBox="1"/>
           <p:nvPr/>
         </p:nvSpPr>
         <p:spPr>
           <a:xfrm>
-            <a:off x="4608576" y="1024128"/>
-            <a:ext cx="2011680" cy="274320"/>
+            <a:off x="3429000" y="2148840"/>
+            <a:ext cx="2240280" cy="1280160"/>
           </a:xfrm>
           <a:prstGeom prst="rect">
             <a:avLst/>
@@ -11172,55 +11488,58 @@
           <a:bodyPr wrap="square" lIns="0" tIns="0" rIns="0" bIns="0" rtlCol="0" anchor="t"/>
           <a:lstStyle/>
           <a:p>
-            <a:pPr algn="ctr" indent="0" marL="0">
+            <a:pPr indent="0" marL="0">
               <a:buNone/>
             </a:pPr>
             <a:r>
-              <a:rPr lang="en-US" sz="1400" b="1" dirty="0">
-                <a:solidFill>
-                  <a:schemeClr val="tx1"/>
+              <a:rPr lang="en-US" sz="1500" dirty="0">
+                <a:solidFill>
+                  <a:schemeClr val="tx2"/>
                 </a:solidFill>
               </a:rPr>
-              <a:t>JPEG2000 89×</a:t>
-            </a:r>
-            <a:endParaRPr lang="en-US" sz="1400" dirty="0"/>
-          </a:p>
-        </p:txBody>
-      </p:sp>
-      <p:pic>
-        <p:nvPicPr>
-          <p:cNvPr id="9" name="four-jpeg2k" descr="D:\masters\MLCV seminar\TeamProject\presentation\figs\four_jpeg2k.png">    </p:cNvPr>
-          <p:cNvPicPr>
-            <a:picLocks noChangeAspect="1"/>
-          </p:cNvPicPr>
-          <p:nvPr/>
-        </p:nvPicPr>
-        <p:blipFill>
-          <a:blip r:embed="rId3"/>
-          <a:stretch>
-            <a:fillRect/>
-          </a:stretch>
-        </p:blipFill>
-        <p:spPr>
-          <a:xfrm>
-            <a:off x="4608576" y="1325880"/>
-            <a:ext cx="2011680" cy="1536192"/>
-          </a:xfrm>
-          <a:prstGeom prst="rect">
-            <a:avLst/>
-          </a:prstGeom>
-        </p:spPr>
-      </p:pic>
-      <p:sp>
-        <p:nvSpPr>
-          <p:cNvPr id="10" name="Text 5"/>
+              <a:t>of 29 hand-marked Drosophila nuclei in the top 100 detections: fitted blobs vs raw brightness</a:t>
+            </a:r>
+            <a:endParaRPr lang="en-US" sz="1500" dirty="0"/>
+          </a:p>
+        </p:txBody>
+      </p:sp>
+      <p:sp>
+        <p:nvSpPr>
+          <p:cNvPr id="9" name="check-2"/>
+          <p:cNvSpPr/>
+          <p:nvPr/>
+        </p:nvSpPr>
+        <p:spPr>
+          <a:xfrm>
+            <a:off x="6035040" y="1143000"/>
+            <a:ext cx="2606040" cy="2377440"/>
+          </a:xfrm>
+          <a:prstGeom prst="roundRect">
+            <a:avLst>
+              <a:gd name="adj" fmla="val 3077"/>
+            </a:avLst>
+          </a:prstGeom>
+          <a:solidFill>
+            <a:schemeClr val="bg2"/>
+          </a:solidFill>
+          <a:ln w="12700">
+            <a:solidFill>
+              <a:schemeClr val="bg2"/>
+            </a:solidFill>
+            <a:prstDash val="solid"/>
+          </a:ln>
+        </p:spPr>
+      </p:sp>
+      <p:sp>
+        <p:nvSpPr>
+          <p:cNvPr id="10" name="Text 8"/>
           <p:cNvSpPr txBox="1"/>
           <p:nvPr/>
         </p:nvSpPr>
         <p:spPr>
           <a:xfrm>
-            <a:off x="4608576" y="2880360"/>
-            <a:ext cx="2011680" cy="411480"/>
+            <a:off x="6217920" y="1325880"/>
+            <a:ext cx="2240280" cy="731520"/>
           </a:xfrm>
           <a:prstGeom prst="rect">
             <a:avLst/>
@@ -11232,45 +11551,34 @@
           <a:bodyPr wrap="square" lIns="0" tIns="0" rIns="0" bIns="0" rtlCol="0" anchor="t"/>
           <a:lstStyle/>
           <a:p>
-            <a:pPr algn="ctr" indent="0" marL="0">
+            <a:pPr indent="0" marL="0">
               <a:buNone/>
             </a:pPr>
             <a:r>
-              <a:rPr lang="en-US" sz="1200" dirty="0">
-                <a:solidFill>
-                  <a:schemeClr val="accent5"/>
-                </a:solidFill>
+              <a:rPr lang="en-US" sz="3200" b="1" dirty="0">
+                <a:solidFill>
+                  <a:schemeClr val="accent4"/>
+                </a:solidFill>
+                <a:latin typeface="Cambria" pitchFamily="34" charset="0"/>
+                <a:ea typeface="Cambria" pitchFamily="34" charset="-122"/>
+                <a:cs typeface="Cambria" pitchFamily="34" charset="-120"/>
               </a:rPr>
-              <a:t>97% of nuclei kept</a:t>
-            </a:r>
-            <a:endParaRPr lang="en-US" sz="1200" dirty="0"/>
-          </a:p>
-          <a:p>
-            <a:pPr algn="ctr" indent="0" marL="0">
-              <a:buNone/>
-            </a:pPr>
-            <a:r>
-              <a:rPr lang="en-US" sz="1000" dirty="0">
-                <a:solidFill>
-                  <a:schemeClr val="accent5"/>
-                </a:solidFill>
-              </a:rPr>
-              <a:t>2D Cellpose, whole frame</a:t>
-            </a:r>
-            <a:endParaRPr lang="en-US" sz="1200" dirty="0"/>
-          </a:p>
-        </p:txBody>
-      </p:sp>
-      <p:sp>
-        <p:nvSpPr>
-          <p:cNvPr id="11" name="Text 6"/>
+              <a:t>16–18</a:t>
+            </a:r>
+            <a:endParaRPr lang="en-US" sz="3200" dirty="0"/>
+          </a:p>
+        </p:txBody>
+      </p:sp>
+      <p:sp>
+        <p:nvSpPr>
+          <p:cNvPr id="11" name="Text 9"/>
           <p:cNvSpPr txBox="1"/>
           <p:nvPr/>
         </p:nvSpPr>
         <p:spPr>
           <a:xfrm>
-            <a:off x="6684264" y="1024128"/>
-            <a:ext cx="2011680" cy="274320"/>
+            <a:off x="6217920" y="2148840"/>
+            <a:ext cx="2240280" cy="1280160"/>
           </a:xfrm>
           <a:prstGeom prst="rect">
             <a:avLst/>
@@ -11282,55 +11590,31 @@
           <a:bodyPr wrap="square" lIns="0" tIns="0" rIns="0" bIns="0" rtlCol="0" anchor="t"/>
           <a:lstStyle/>
           <a:p>
-            <a:pPr algn="ctr" indent="0" marL="0">
+            <a:pPr indent="0" marL="0">
               <a:buNone/>
             </a:pPr>
             <a:r>
-              <a:rPr lang="en-US" sz="1400" b="1" dirty="0">
-                <a:solidFill>
-                  <a:schemeClr val="tx1"/>
+              <a:rPr lang="en-US" sz="1500" dirty="0">
+                <a:solidFill>
+                  <a:schemeClr val="tx2"/>
                 </a:solidFill>
               </a:rPr>
-              <a:t>Luxar 89×</a:t>
-            </a:r>
-            <a:endParaRPr lang="en-US" sz="1400" dirty="0"/>
-          </a:p>
-        </p:txBody>
-      </p:sp>
-      <p:pic>
-        <p:nvPicPr>
-          <p:cNvPr id="12" name="four-luxar" descr="D:\masters\MLCV seminar\TeamProject\presentation\figs\four_luxar.png">    </p:cNvPr>
-          <p:cNvPicPr>
-            <a:picLocks noChangeAspect="1"/>
-          </p:cNvPicPr>
-          <p:nvPr/>
-        </p:nvPicPr>
-        <p:blipFill>
-          <a:blip r:embed="rId4"/>
-          <a:stretch>
-            <a:fillRect/>
-          </a:stretch>
-        </p:blipFill>
-        <p:spPr>
-          <a:xfrm>
-            <a:off x="6684264" y="1325880"/>
-            <a:ext cx="2011680" cy="1536192"/>
-          </a:xfrm>
-          <a:prstGeom prst="rect">
-            <a:avLst/>
-          </a:prstGeom>
-        </p:spPr>
-      </p:pic>
-      <p:sp>
-        <p:nvSpPr>
-          <p:cNvPr id="13" name="Text 7"/>
+              <a:t>same top 100, raw candidates ranked by a simple LoG blob filter: better than every fit</a:t>
+            </a:r>
+            <a:endParaRPr lang="en-US" sz="1500" dirty="0"/>
+          </a:p>
+        </p:txBody>
+      </p:sp>
+      <p:sp>
+        <p:nvSpPr>
+          <p:cNvPr id="12" name="Text 10"/>
           <p:cNvSpPr txBox="1"/>
           <p:nvPr/>
         </p:nvSpPr>
         <p:spPr>
           <a:xfrm>
-            <a:off x="6684264" y="2880360"/>
-            <a:ext cx="2011680" cy="411480"/>
+            <a:off x="457200" y="3749040"/>
+            <a:ext cx="8229600" cy="640080"/>
           </a:xfrm>
           <a:prstGeom prst="rect">
             <a:avLst/>
@@ -11342,180 +11626,16 @@
           <a:bodyPr wrap="square" lIns="0" tIns="0" rIns="0" bIns="0" rtlCol="0" anchor="t"/>
           <a:lstStyle/>
           <a:p>
-            <a:pPr algn="ctr" indent="0" marL="0">
-              <a:buNone/>
-            </a:pPr>
-            <a:r>
-              <a:rPr lang="en-US" sz="1200" dirty="0">
-                <a:solidFill>
-                  <a:schemeClr val="accent5"/>
-                </a:solidFill>
-              </a:rPr>
-              <a:t>88% of nuclei kept</a:t>
-            </a:r>
-            <a:endParaRPr lang="en-US" sz="1200" dirty="0"/>
-          </a:p>
-          <a:p>
-            <a:pPr algn="ctr" indent="0" marL="0">
-              <a:buNone/>
-            </a:pPr>
-            <a:r>
-              <a:rPr lang="en-US" sz="1000" dirty="0">
-                <a:solidFill>
-                  <a:schemeClr val="accent5"/>
-                </a:solidFill>
-              </a:rPr>
-              <a:t>2D Cellpose, whole frame</a:t>
-            </a:r>
-            <a:endParaRPr lang="en-US" sz="1200" dirty="0"/>
-          </a:p>
-        </p:txBody>
-      </p:sp>
-      <p:sp>
-        <p:nvSpPr>
-          <p:cNvPr id="14" name="Text 8"/>
-          <p:cNvSpPr txBox="1"/>
-          <p:nvPr/>
-        </p:nvSpPr>
-        <p:spPr>
-          <a:xfrm>
-            <a:off x="457200" y="3429000"/>
-            <a:ext cx="2606040" cy="1188720"/>
-          </a:xfrm>
-          <a:prstGeom prst="rect">
-            <a:avLst/>
-          </a:prstGeom>
-          <a:noFill/>
-          <a:ln/>
-        </p:spPr>
-        <p:txBody>
-          <a:bodyPr wrap="square" lIns="0" tIns="0" rIns="0" bIns="0" rtlCol="0" anchor="t"/>
-          <a:lstStyle/>
-          <a:p>
             <a:pPr indent="0" marL="0">
               <a:buNone/>
             </a:pPr>
             <a:r>
-              <a:rPr lang="en-US" sz="1500" b="1" dirty="0">
-                <a:solidFill>
-                  <a:srgbClr val="E8730C"/>
+              <a:rPr lang="en-US" sz="1500" dirty="0">
+                <a:solidFill>
+                  <a:schemeClr val="tx2"/>
                 </a:solidFill>
               </a:rPr>
-              <a:t>Luxar (2026)</a:t>
-            </a:r>
-            <a:endParaRPr lang="en-US" sz="1500" dirty="0"/>
-          </a:p>
-          <a:p>
-            <a:pPr indent="0" marL="0">
-              <a:buNone/>
-            </a:pPr>
-            <a:r>
-              <a:rPr lang="en-US" sz="1500" dirty="0">
-                <a:solidFill>
-                  <a:schemeClr val="tx1"/>
-                </a:solidFill>
-              </a:rPr>
-              <a:t>state-of-the-art Gaussian-blob tool for microscopy</a:t>
-            </a:r>
-            <a:endParaRPr lang="en-US" sz="1500" dirty="0"/>
-          </a:p>
-        </p:txBody>
-      </p:sp>
-      <p:sp>
-        <p:nvSpPr>
-          <p:cNvPr id="15" name="Text 9"/>
-          <p:cNvSpPr txBox="1"/>
-          <p:nvPr/>
-        </p:nvSpPr>
-        <p:spPr>
-          <a:xfrm>
-            <a:off x="3246120" y="3429000"/>
-            <a:ext cx="2606040" cy="1188720"/>
-          </a:xfrm>
-          <a:prstGeom prst="rect">
-            <a:avLst/>
-          </a:prstGeom>
-          <a:noFill/>
-          <a:ln/>
-        </p:spPr>
-        <p:txBody>
-          <a:bodyPr wrap="square" lIns="0" tIns="0" rIns="0" bIns="0" rtlCol="0" anchor="t"/>
-          <a:lstStyle/>
-          <a:p>
-            <a:pPr indent="0" marL="0">
-              <a:buNone/>
-            </a:pPr>
-            <a:r>
-              <a:rPr lang="en-US" sz="1500" b="1" dirty="0">
-                <a:solidFill>
-                  <a:srgbClr val="E8730C"/>
-                </a:solidFill>
-              </a:rPr>
-              <a:t>JPEG2000</a:t>
-            </a:r>
-            <a:endParaRPr lang="en-US" sz="1500" dirty="0"/>
-          </a:p>
-          <a:p>
-            <a:pPr indent="0" marL="0">
-              <a:buNone/>
-            </a:pPr>
-            <a:r>
-              <a:rPr lang="en-US" sz="1500" dirty="0">
-                <a:solidFill>
-                  <a:schemeClr val="tx1"/>
-                </a:solidFill>
-              </a:rPr>
-              <a:t>standard image compression, set to exactly the same file size</a:t>
-            </a:r>
-            <a:endParaRPr lang="en-US" sz="1500" dirty="0"/>
-          </a:p>
-        </p:txBody>
-      </p:sp>
-      <p:sp>
-        <p:nvSpPr>
-          <p:cNvPr id="16" name="Text 10"/>
-          <p:cNvSpPr txBox="1"/>
-          <p:nvPr/>
-        </p:nvSpPr>
-        <p:spPr>
-          <a:xfrm>
-            <a:off x="6035040" y="3429000"/>
-            <a:ext cx="2606040" cy="1188720"/>
-          </a:xfrm>
-          <a:prstGeom prst="rect">
-            <a:avLst/>
-          </a:prstGeom>
-          <a:noFill/>
-          <a:ln/>
-        </p:spPr>
-        <p:txBody>
-          <a:bodyPr wrap="square" lIns="0" tIns="0" rIns="0" bIns="0" rtlCol="0" anchor="t"/>
-          <a:lstStyle/>
-          <a:p>
-            <a:pPr indent="0" marL="0">
-              <a:buNone/>
-            </a:pPr>
-            <a:r>
-              <a:rPr lang="en-US" sz="1500" b="1" dirty="0">
-                <a:solidFill>
-                  <a:srgbClr val="E8730C"/>
-                </a:solidFill>
-              </a:rPr>
-              <a:t>Test</a:t>
-            </a:r>
-            <a:endParaRPr lang="en-US" sz="1500" dirty="0"/>
-          </a:p>
-          <a:p>
-            <a:pPr indent="0" marL="0">
-              <a:buNone/>
-            </a:pPr>
-            <a:r>
-              <a:rPr lang="en-US" sz="1500" dirty="0">
-                <a:solidFill>
-                  <a:schemeClr val="tx1"/>
-                </a:solidFill>
-              </a:rPr>
-              <a:t>12 C. elegans frames from 2 embryos, 2,958 hand-marked nuclei, 4 detectors</a:t>
+              <a:t>In the top 100, fitting ranks nuclei better than brightness but not better than a simple blob filter. With all 457 candidates the raw detector finds 26 of 29.</a:t>
             </a:r>
             <a:endParaRPr lang="en-US" sz="1500" dirty="0"/>
           </a:p>
@@ -11623,42 +11743,86 @@
                   <a:schemeClr val="tx1"/>
                 </a:solidFill>
               </a:rPr>
-              <a:t>Same file size: the winner depends on the detector</a:t>
+              <a:t>Export and a browser viewer</a:t>
             </a:r>
             <a:endParaRPr lang="en-US" sz="2800" dirty="0"/>
           </a:p>
         </p:txBody>
       </p:sp>
-      <p:graphicFrame>
-        <p:nvGraphicFramePr>
-          <p:cNvPr id="3" name="Chart 0" descr=""/>
-          <p:cNvGraphicFramePr/>
-          <p:nvPr/>
-        </p:nvGraphicFramePr>
-        <p:xfrm>
-          <a:off x="457200" y="1051560"/>
-          <a:ext cx="5120640" cy="3429000"/>
-        </p:xfrm>
-        <a:graphic xmlns:a="http://schemas.openxmlformats.org/drawingml/2006/main">
-          <a:graphicData uri="http://schemas.openxmlformats.org/drawingml/2006/chart">
-            <c:chart xmlns:c="http://schemas.openxmlformats.org/drawingml/2006/chart" r:id="rId1"/>
-          </a:graphicData>
-        </a:graphic>
-      </p:graphicFrame>
-      <p:sp>
-        <p:nvSpPr>
-          <p:cNvPr id="4" name="psnr-card"/>
+      <p:pic>
+        <p:nvPicPr>
+          <p:cNvPr id="3" name="viewer-rotate" descr="D:\masters\MLCV seminar\TeamProject\presentation\figs\viewer_rotate.gif">    </p:cNvPr>
+          <p:cNvPicPr>
+            <a:picLocks noChangeAspect="1"/>
+          </p:cNvPicPr>
+          <p:nvPr/>
+        </p:nvPicPr>
+        <p:blipFill>
+          <a:blip r:embed="rId1"/>
+          <a:stretch>
+            <a:fillRect/>
+          </a:stretch>
+        </p:blipFill>
+        <p:spPr>
+          <a:xfrm>
+            <a:off x="457200" y="1051560"/>
+            <a:ext cx="3657600" cy="2953512"/>
+          </a:xfrm>
+          <a:prstGeom prst="rect">
+            <a:avLst/>
+          </a:prstGeom>
+        </p:spPr>
+      </p:pic>
+      <p:sp>
+        <p:nvSpPr>
+          <p:cNvPr id="4" name="Text 1"/>
+          <p:cNvSpPr txBox="1"/>
+          <p:nvPr/>
+        </p:nvSpPr>
+        <p:spPr>
+          <a:xfrm>
+            <a:off x="457200" y="4069080"/>
+            <a:ext cx="3657600" cy="457200"/>
+          </a:xfrm>
+          <a:prstGeom prst="rect">
+            <a:avLst/>
+          </a:prstGeom>
+          <a:noFill/>
+          <a:ln/>
+        </p:spPr>
+        <p:txBody>
+          <a:bodyPr wrap="square" lIns="0" tIns="0" rIns="0" bIns="0" rtlCol="0" anchor="t"/>
+          <a:lstStyle/>
+          <a:p>
+            <a:pPr indent="0" marL="0">
+              <a:buNone/>
+            </a:pPr>
+            <a:r>
+              <a:rPr lang="en-US" sz="1100" dirty="0">
+                <a:solidFill>
+                  <a:schemeClr val="accent5"/>
+                </a:solidFill>
+              </a:rPr>
+              <a:t>Recording of our browser viewer, rotating the Drosophila fit (500 blobs; curved sheet = embryo surface)</a:t>
+            </a:r>
+            <a:endParaRPr lang="en-US" sz="1100" dirty="0"/>
+          </a:p>
+        </p:txBody>
+      </p:sp>
+      <p:sp>
+        <p:nvSpPr>
+          <p:cNvPr id="5" name="step-card-0"/>
           <p:cNvSpPr/>
           <p:nvPr/>
         </p:nvSpPr>
         <p:spPr>
           <a:xfrm>
-            <a:off x="5806440" y="1143000"/>
-            <a:ext cx="2880360" cy="1417320"/>
+            <a:off x="4343400" y="1051560"/>
+            <a:ext cx="4343400" cy="1143000"/>
           </a:xfrm>
           <a:prstGeom prst="roundRect">
             <a:avLst>
-              <a:gd name="adj" fmla="val 5161"/>
+              <a:gd name="adj" fmla="val 6400"/>
             </a:avLst>
           </a:prstGeom>
           <a:solidFill>
@@ -11674,14 +11838,14 @@
       </p:sp>
       <p:sp>
         <p:nvSpPr>
-          <p:cNvPr id="5" name="Text 2"/>
+          <p:cNvPr id="6" name="Text 3"/>
           <p:cNvSpPr txBox="1"/>
           <p:nvPr/>
         </p:nvSpPr>
         <p:spPr>
           <a:xfrm>
-            <a:off x="5989320" y="1298448"/>
-            <a:ext cx="2560320" cy="1097280"/>
+            <a:off x="4507992" y="1143000"/>
+            <a:ext cx="4014216" cy="228600"/>
           </a:xfrm>
           <a:prstGeom prst="rect">
             <a:avLst/>
@@ -11697,45 +11861,67 @@
               <a:buNone/>
             </a:pPr>
             <a:r>
-              <a:rPr lang="en-US" sz="1800" b="1" dirty="0">
-                <a:solidFill>
-                  <a:schemeClr val="tx1"/>
+              <a:rPr lang="en-US" sz="1200" b="1" dirty="0">
+                <a:solidFill>
+                  <a:schemeClr val="accent1"/>
                 </a:solidFill>
               </a:rPr>
-              <a:t>PSNR: JPEG2000 better</a:t>
-            </a:r>
-            <a:endParaRPr lang="en-US" sz="1800" dirty="0"/>
-          </a:p>
+              <a:t>WHAT WE BUILT</a:t>
+            </a:r>
+            <a:endParaRPr lang="en-US" sz="1200" dirty="0"/>
+          </a:p>
+        </p:txBody>
+      </p:sp>
+      <p:sp>
+        <p:nvSpPr>
+          <p:cNvPr id="7" name="Text 4"/>
+          <p:cNvSpPr txBox="1"/>
+          <p:nvPr/>
+        </p:nvSpPr>
+        <p:spPr>
+          <a:xfrm>
+            <a:off x="4507992" y="1399032"/>
+            <a:ext cx="4014216" cy="722376"/>
+          </a:xfrm>
+          <a:prstGeom prst="rect">
+            <a:avLst/>
+          </a:prstGeom>
+          <a:noFill/>
+          <a:ln/>
+        </p:spPr>
+        <p:txBody>
+          <a:bodyPr wrap="square" lIns="0" tIns="0" rIns="0" bIns="0" rtlCol="0" anchor="t"/>
+          <a:lstStyle/>
           <a:p>
             <a:pPr indent="0" marL="0">
               <a:buNone/>
             </a:pPr>
             <a:r>
-              <a:rPr lang="en-US" sz="1800" dirty="0">
+              <a:rPr lang="en-US" sz="1400" dirty="0">
                 <a:solidFill>
                   <a:schemeClr val="tx1"/>
                 </a:solidFill>
               </a:rPr>
-              <a:t>on 12 of 12 frames</a:t>
-            </a:r>
-            <a:endParaRPr lang="en-US" sz="1800" dirty="0"/>
-          </a:p>
-        </p:txBody>
-      </p:sp>
-      <p:sp>
-        <p:nvSpPr>
-          <p:cNvPr id="6" name="detectors-card"/>
+              <a:t>Export to .ply and .splat (32 bytes per blob); a browser viewer to rotate, zoom and filter</a:t>
+            </a:r>
+            <a:endParaRPr lang="en-US" sz="1400" dirty="0"/>
+          </a:p>
+        </p:txBody>
+      </p:sp>
+      <p:sp>
+        <p:nvSpPr>
+          <p:cNvPr id="8" name="step-card-1"/>
           <p:cNvSpPr/>
           <p:nvPr/>
         </p:nvSpPr>
         <p:spPr>
           <a:xfrm>
-            <a:off x="5806440" y="2697480"/>
-            <a:ext cx="2880360" cy="1783080"/>
+            <a:off x="4343400" y="2258568"/>
+            <a:ext cx="4343400" cy="1143000"/>
           </a:xfrm>
           <a:prstGeom prst="roundRect">
             <a:avLst>
-              <a:gd name="adj" fmla="val 4103"/>
+              <a:gd name="adj" fmla="val 6400"/>
             </a:avLst>
           </a:prstGeom>
           <a:solidFill>
@@ -11751,14 +11937,14 @@
       </p:sp>
       <p:sp>
         <p:nvSpPr>
-          <p:cNvPr id="7" name="Text 4"/>
+          <p:cNvPr id="9" name="Text 6"/>
           <p:cNvSpPr txBox="1"/>
           <p:nvPr/>
         </p:nvSpPr>
         <p:spPr>
           <a:xfrm>
-            <a:off x="5989320" y="2834640"/>
-            <a:ext cx="2560320" cy="1554480"/>
+            <a:off x="4507992" y="2350008"/>
+            <a:ext cx="4014216" cy="228600"/>
           </a:xfrm>
           <a:prstGeom prst="rect">
             <a:avLst/>
@@ -11774,28 +11960,149 @@
               <a:buNone/>
             </a:pPr>
             <a:r>
-              <a:rPr lang="en-US" sz="1500" b="1" dirty="0">
-                <a:solidFill>
-                  <a:schemeClr val="tx1"/>
+              <a:rPr lang="en-US" sz="1200" b="1" dirty="0">
+                <a:solidFill>
+                  <a:schemeClr val="accent1"/>
                 </a:solidFill>
               </a:rPr>
-              <a:t>Detectors disagree</a:t>
-            </a:r>
-            <a:endParaRPr lang="en-US" sz="1500" dirty="0"/>
-          </a:p>
+              <a:t>CHECK</a:t>
+            </a:r>
+            <a:endParaRPr lang="en-US" sz="1200" dirty="0"/>
+          </a:p>
+        </p:txBody>
+      </p:sp>
+      <p:sp>
+        <p:nvSpPr>
+          <p:cNvPr id="10" name="Text 7"/>
+          <p:cNvSpPr txBox="1"/>
+          <p:nvPr/>
+        </p:nvSpPr>
+        <p:spPr>
+          <a:xfrm>
+            <a:off x="4507992" y="2606040"/>
+            <a:ext cx="4014216" cy="722376"/>
+          </a:xfrm>
+          <a:prstGeom prst="rect">
+            <a:avLst/>
+          </a:prstGeom>
+          <a:noFill/>
+          <a:ln/>
+        </p:spPr>
+        <p:txBody>
+          <a:bodyPr wrap="square" lIns="0" tIns="0" rIns="0" bIns="0" rtlCol="0" anchor="t"/>
+          <a:lstStyle/>
           <a:p>
             <a:pPr indent="0" marL="0">
               <a:buNone/>
             </a:pPr>
             <a:r>
-              <a:rPr lang="en-US" sz="1500" dirty="0">
+              <a:rPr lang="en-US" sz="1400" dirty="0">
                 <a:solidFill>
                   <a:schemeClr val="tx1"/>
                 </a:solidFill>
               </a:rPr>
-              <a:t>Cellpose 3D prefers blobs; watershed and Cellpose 2D prefer JPEG2000; all prefer JPEG2000 past 300×</a:t>
-            </a:r>
-            <a:endParaRPr lang="en-US" sz="1500" dirty="0"/>
+              <a:t>Positions and sizes come back exactly; brightness is mapped for display only</a:t>
+            </a:r>
+            <a:endParaRPr lang="en-US" sz="1400" dirty="0"/>
+          </a:p>
+        </p:txBody>
+      </p:sp>
+      <p:sp>
+        <p:nvSpPr>
+          <p:cNvPr id="11" name="step-card-2"/>
+          <p:cNvSpPr/>
+          <p:nvPr/>
+        </p:nvSpPr>
+        <p:spPr>
+          <a:xfrm>
+            <a:off x="4343400" y="3465576"/>
+            <a:ext cx="4343400" cy="1143000"/>
+          </a:xfrm>
+          <a:prstGeom prst="roundRect">
+            <a:avLst>
+              <a:gd name="adj" fmla="val 6400"/>
+            </a:avLst>
+          </a:prstGeom>
+          <a:solidFill>
+            <a:schemeClr val="bg2"/>
+          </a:solidFill>
+          <a:ln w="12700">
+            <a:solidFill>
+              <a:schemeClr val="bg2"/>
+            </a:solidFill>
+            <a:prstDash val="solid"/>
+          </a:ln>
+        </p:spPr>
+      </p:sp>
+      <p:sp>
+        <p:nvSpPr>
+          <p:cNvPr id="12" name="Text 9"/>
+          <p:cNvSpPr txBox="1"/>
+          <p:nvPr/>
+        </p:nvSpPr>
+        <p:spPr>
+          <a:xfrm>
+            <a:off x="4507992" y="3557016"/>
+            <a:ext cx="4014216" cy="228600"/>
+          </a:xfrm>
+          <a:prstGeom prst="rect">
+            <a:avLst/>
+          </a:prstGeom>
+          <a:noFill/>
+          <a:ln/>
+        </p:spPr>
+        <p:txBody>
+          <a:bodyPr wrap="square" lIns="0" tIns="0" rIns="0" bIns="0" rtlCol="0" anchor="t"/>
+          <a:lstStyle/>
+          <a:p>
+            <a:pPr indent="0" marL="0">
+              <a:buNone/>
+            </a:pPr>
+            <a:r>
+              <a:rPr lang="en-US" sz="1200" b="1" dirty="0">
+                <a:solidFill>
+                  <a:schemeClr val="accent1"/>
+                </a:solidFill>
+              </a:rPr>
+              <a:t>SIZE / LIMIT</a:t>
+            </a:r>
+            <a:endParaRPr lang="en-US" sz="1200" dirty="0"/>
+          </a:p>
+        </p:txBody>
+      </p:sp>
+      <p:sp>
+        <p:nvSpPr>
+          <p:cNvPr id="13" name="Text 10"/>
+          <p:cNvSpPr txBox="1"/>
+          <p:nvPr/>
+        </p:nvSpPr>
+        <p:spPr>
+          <a:xfrm>
+            <a:off x="4507992" y="3813048"/>
+            <a:ext cx="4014216" cy="722376"/>
+          </a:xfrm>
+          <a:prstGeom prst="rect">
+            <a:avLst/>
+          </a:prstGeom>
+          <a:noFill/>
+          <a:ln/>
+        </p:spPr>
+        <p:txBody>
+          <a:bodyPr wrap="square" lIns="0" tIns="0" rIns="0" bIns="0" rtlCol="0" anchor="t"/>
+          <a:lstStyle/>
+          <a:p>
+            <a:pPr indent="0" marL="0">
+              <a:buNone/>
+            </a:pPr>
+            <a:r>
+              <a:rPr lang="en-US" sz="1400" dirty="0">
+                <a:solidFill>
+                  <a:schemeClr val="tx1"/>
+                </a:solidFill>
+              </a:rPr>
+              <a:t>500 blobs: 16 kB vs 2.1 MB raw crop. Blobs drawn as round dots, without orientation</a:t>
+            </a:r>
+            <a:endParaRPr lang="en-US" sz="1400" dirty="0"/>
           </a:p>
         </p:txBody>
       </p:sp>
@@ -11901,7 +12208,7 @@
                   <a:schemeClr val="tx1"/>
                 </a:solidFill>
               </a:rPr>
-              <a:t>C. elegans: nuclei vanish below ~3 blobs each</a:t>
+              <a:t>Time series: three ways, on synthetic data</a:t>
             </a:r>
             <a:endParaRPr lang="en-US" sz="2800" dirty="0"/>
           </a:p>
@@ -11909,7 +12216,7 @@
       </p:sp>
       <p:pic>
         <p:nvPicPr>
-          <p:cNvPr id="3" name="cliff" descr="D:\masters\MLCV seminar\TeamProject\presentation\figs\cliff_deck.png">    </p:cNvPr>
+          <p:cNvPr id="3" name="viewer-timeseries" descr="D:\masters\MLCV seminar\TeamProject\presentation\figs\viewer_timeseries.gif">    </p:cNvPr>
           <p:cNvPicPr>
             <a:picLocks noChangeAspect="1"/>
           </p:cNvPicPr>
@@ -11923,8 +12230,8 @@
         </p:blipFill>
         <p:spPr>
           <a:xfrm>
-            <a:off x="457200" y="1097280"/>
-            <a:ext cx="5257800" cy="3108960"/>
+            <a:off x="457200" y="1051560"/>
+            <a:ext cx="3291840" cy="2660904"/>
           </a:xfrm>
           <a:prstGeom prst="rect">
             <a:avLst/>
@@ -11933,18 +12240,1140 @@
       </p:pic>
       <p:sp>
         <p:nvSpPr>
-          <p:cNvPr id="4" name="step-card-0"/>
+          <p:cNvPr id="4" name="Text 1"/>
+          <p:cNvSpPr txBox="1"/>
+          <p:nvPr/>
+        </p:nvSpPr>
+        <p:spPr>
+          <a:xfrm>
+            <a:off x="457200" y="3767328"/>
+            <a:ext cx="3291840" cy="457200"/>
+          </a:xfrm>
+          <a:prstGeom prst="rect">
+            <a:avLst/>
+          </a:prstGeom>
+          <a:noFill/>
+          <a:ln/>
+        </p:spPr>
+        <p:txBody>
+          <a:bodyPr wrap="square" lIns="0" tIns="0" rIns="0" bIns="0" rtlCol="0" anchor="t"/>
+          <a:lstStyle/>
+          <a:p>
+            <a:pPr indent="0" marL="0">
+              <a:buNone/>
+            </a:pPr>
+            <a:r>
+              <a:rPr lang="en-US" sz="1100" dirty="0">
+                <a:solidFill>
+                  <a:schemeClr val="accent5"/>
+                </a:solidFill>
+              </a:rPr>
+              <a:t>Recording: frame slider in our viewer (synthetic, 6 frames); frames switch, no interpolation</a:t>
+            </a:r>
+            <a:endParaRPr lang="en-US" sz="1100" dirty="0"/>
+          </a:p>
+        </p:txBody>
+      </p:sp>
+      <p:graphicFrame>
+        <p:nvGraphicFramePr>
+          <p:cNvPr id="19" name="Table 0"/>
+          <p:cNvGraphicFramePr>
+            <a:graphicFrameLocks noGrp="1"/>
+          </p:cNvGraphicFramePr>
+          <p:nvPr>
+            <p:extLst>
+              <p:ext uri="{D42A27DB-BD31-4B8C-83A1-F6EECF244321}">
+                <p14:modId xmlns:p14="http://schemas.microsoft.com/office/powerpoint/2010/main" val="1579011935"/>
+              </p:ext>
+            </p:extLst>
+          </p:nvPr>
+        </p:nvGraphicFramePr>
+        <p:xfrm>
+          <a:off x="4023360" y="1051560"/>
+          <a:ext cx="4663440" cy="914400"/>
+        </p:xfrm>
+        <a:graphic>
+          <a:graphicData uri="http://schemas.openxmlformats.org/drawingml/2006/table">
+            <a:tbl>
+              <a:tblPr/>
+              <a:tblGrid>
+                <a:gridCol w="2286000"/>
+                <a:gridCol w="914400"/>
+                <a:gridCol w="1463040"/>
+              </a:tblGrid>
+              <a:tr h="329184">
+                <a:tc>
+                  <a:txBody>
+                    <a:bodyPr/>
+                    <a:lstStyle/>
+                    <a:p>
+                      <a:pPr indent="0" marL="0">
+                        <a:buNone/>
+                      </a:pPr>
+                      <a:r>
+                        <a:rPr lang="en-US" sz="1300" b="1" dirty="0">
+                          <a:solidFill>
+                            <a:srgbClr val="FFFFFF"/>
+                          </a:solidFill>
+                          <a:latin typeface="Calibri" pitchFamily="34" charset="0"/>
+                          <a:ea typeface="Calibri" pitchFamily="34" charset="-122"/>
+                          <a:cs typeface="Calibri" pitchFamily="34" charset="-120"/>
+                        </a:rPr>
+                        <a:t>Same storage (~13,200 numbers)</a:t>
+                      </a:r>
+                      <a:endParaRPr lang="en-US" sz="1300" dirty="0">
+                        <a:latin typeface="Calibri" charset="0"/>
+                        <a:ea typeface="Calibri" charset="0"/>
+                        <a:cs typeface="Calibri" charset="0"/>
+                      </a:endParaRPr>
+                    </a:p>
+                  </a:txBody>
+                  <a:tcPr marL="91440" marR="91440" marT="45720" marB="45720">
+                    <a:lnL w="6350" cap="flat" cmpd="sng" algn="ctr">
+                      <a:solidFill>
+                        <a:srgbClr val="E5E7EB"/>
+                      </a:solidFill>
+                      <a:prstDash val="solid"/>
+                      <a:round/>
+                      <a:headEnd type="none" w="med" len="med"/>
+                      <a:tailEnd type="none" w="med" len="med"/>
+                    </a:lnL>
+                    <a:lnR w="6350" cap="flat" cmpd="sng" algn="ctr">
+                      <a:solidFill>
+                        <a:srgbClr val="E5E7EB"/>
+                      </a:solidFill>
+                      <a:prstDash val="solid"/>
+                      <a:round/>
+                      <a:headEnd type="none" w="med" len="med"/>
+                      <a:tailEnd type="none" w="med" len="med"/>
+                    </a:lnR>
+                    <a:lnT w="6350" cap="flat" cmpd="sng" algn="ctr">
+                      <a:solidFill>
+                        <a:srgbClr val="E5E7EB"/>
+                      </a:solidFill>
+                      <a:prstDash val="solid"/>
+                      <a:round/>
+                      <a:headEnd type="none" w="med" len="med"/>
+                      <a:tailEnd type="none" w="med" len="med"/>
+                    </a:lnT>
+                    <a:lnB w="6350" cap="flat" cmpd="sng" algn="ctr">
+                      <a:solidFill>
+                        <a:srgbClr val="E5E7EB"/>
+                      </a:solidFill>
+                      <a:prstDash val="solid"/>
+                      <a:round/>
+                      <a:headEnd type="none" w="med" len="med"/>
+                      <a:tailEnd type="none" w="med" len="med"/>
+                    </a:lnB>
+                    <a:solidFill>
+                      <a:srgbClr val="3A3F4B"/>
+                    </a:solidFill>
+                  </a:tcPr>
+                </a:tc>
+                <a:tc>
+                  <a:txBody>
+                    <a:bodyPr/>
+                    <a:lstStyle/>
+                    <a:p>
+                      <a:pPr indent="0" marL="0">
+                        <a:buNone/>
+                      </a:pPr>
+                      <a:r>
+                        <a:rPr lang="en-US" sz="1300" b="1" dirty="0">
+                          <a:solidFill>
+                            <a:srgbClr val="FFFFFF"/>
+                          </a:solidFill>
+                          <a:latin typeface="Calibri" pitchFamily="34" charset="0"/>
+                          <a:ea typeface="Calibri" pitchFamily="34" charset="-122"/>
+                          <a:cs typeface="Calibri" pitchFamily="34" charset="-120"/>
+                        </a:rPr>
+                        <a:t>Fit frames</a:t>
+                      </a:r>
+                      <a:endParaRPr lang="en-US" sz="1300" dirty="0">
+                        <a:latin typeface="Calibri" charset="0"/>
+                        <a:ea typeface="Calibri" charset="0"/>
+                        <a:cs typeface="Calibri" charset="0"/>
+                      </a:endParaRPr>
+                    </a:p>
+                  </a:txBody>
+                  <a:tcPr marL="91440" marR="91440" marT="45720" marB="45720">
+                    <a:lnL w="6350" cap="flat" cmpd="sng" algn="ctr">
+                      <a:solidFill>
+                        <a:srgbClr val="E5E7EB"/>
+                      </a:solidFill>
+                      <a:prstDash val="solid"/>
+                      <a:round/>
+                      <a:headEnd type="none" w="med" len="med"/>
+                      <a:tailEnd type="none" w="med" len="med"/>
+                    </a:lnL>
+                    <a:lnR w="6350" cap="flat" cmpd="sng" algn="ctr">
+                      <a:solidFill>
+                        <a:srgbClr val="E5E7EB"/>
+                      </a:solidFill>
+                      <a:prstDash val="solid"/>
+                      <a:round/>
+                      <a:headEnd type="none" w="med" len="med"/>
+                      <a:tailEnd type="none" w="med" len="med"/>
+                    </a:lnR>
+                    <a:lnT w="6350" cap="flat" cmpd="sng" algn="ctr">
+                      <a:solidFill>
+                        <a:srgbClr val="E5E7EB"/>
+                      </a:solidFill>
+                      <a:prstDash val="solid"/>
+                      <a:round/>
+                      <a:headEnd type="none" w="med" len="med"/>
+                      <a:tailEnd type="none" w="med" len="med"/>
+                    </a:lnT>
+                    <a:lnB w="6350" cap="flat" cmpd="sng" algn="ctr">
+                      <a:solidFill>
+                        <a:srgbClr val="E5E7EB"/>
+                      </a:solidFill>
+                      <a:prstDash val="solid"/>
+                      <a:round/>
+                      <a:headEnd type="none" w="med" len="med"/>
+                      <a:tailEnd type="none" w="med" len="med"/>
+                    </a:lnB>
+                    <a:solidFill>
+                      <a:srgbClr val="3A3F4B"/>
+                    </a:solidFill>
+                  </a:tcPr>
+                </a:tc>
+                <a:tc>
+                  <a:txBody>
+                    <a:bodyPr/>
+                    <a:lstStyle/>
+                    <a:p>
+                      <a:pPr indent="0" marL="0">
+                        <a:buNone/>
+                      </a:pPr>
+                      <a:r>
+                        <a:rPr lang="en-US" sz="1300" b="1" dirty="0">
+                          <a:solidFill>
+                            <a:srgbClr val="FFFFFF"/>
+                          </a:solidFill>
+                          <a:latin typeface="Calibri" pitchFamily="34" charset="0"/>
+                          <a:ea typeface="Calibri" pitchFamily="34" charset="-122"/>
+                          <a:cs typeface="Calibri" pitchFamily="34" charset="-120"/>
+                        </a:rPr>
+                        <a:t>Held-out frames</a:t>
+                      </a:r>
+                      <a:endParaRPr lang="en-US" sz="1300" dirty="0">
+                        <a:latin typeface="Calibri" charset="0"/>
+                        <a:ea typeface="Calibri" charset="0"/>
+                        <a:cs typeface="Calibri" charset="0"/>
+                      </a:endParaRPr>
+                    </a:p>
+                  </a:txBody>
+                  <a:tcPr marL="91440" marR="91440" marT="45720" marB="45720">
+                    <a:lnL w="6350" cap="flat" cmpd="sng" algn="ctr">
+                      <a:solidFill>
+                        <a:srgbClr val="E5E7EB"/>
+                      </a:solidFill>
+                      <a:prstDash val="solid"/>
+                      <a:round/>
+                      <a:headEnd type="none" w="med" len="med"/>
+                      <a:tailEnd type="none" w="med" len="med"/>
+                    </a:lnL>
+                    <a:lnR w="6350" cap="flat" cmpd="sng" algn="ctr">
+                      <a:solidFill>
+                        <a:srgbClr val="E5E7EB"/>
+                      </a:solidFill>
+                      <a:prstDash val="solid"/>
+                      <a:round/>
+                      <a:headEnd type="none" w="med" len="med"/>
+                      <a:tailEnd type="none" w="med" len="med"/>
+                    </a:lnR>
+                    <a:lnT w="6350" cap="flat" cmpd="sng" algn="ctr">
+                      <a:solidFill>
+                        <a:srgbClr val="E5E7EB"/>
+                      </a:solidFill>
+                      <a:prstDash val="solid"/>
+                      <a:round/>
+                      <a:headEnd type="none" w="med" len="med"/>
+                      <a:tailEnd type="none" w="med" len="med"/>
+                    </a:lnT>
+                    <a:lnB w="6350" cap="flat" cmpd="sng" algn="ctr">
+                      <a:solidFill>
+                        <a:srgbClr val="E5E7EB"/>
+                      </a:solidFill>
+                      <a:prstDash val="solid"/>
+                      <a:round/>
+                      <a:headEnd type="none" w="med" len="med"/>
+                      <a:tailEnd type="none" w="med" len="med"/>
+                    </a:lnB>
+                    <a:solidFill>
+                      <a:srgbClr val="3A3F4B"/>
+                    </a:solidFill>
+                  </a:tcPr>
+                </a:tc>
+              </a:tr>
+              <a:tr h="329184">
+                <a:tc>
+                  <a:txBody>
+                    <a:bodyPr/>
+                    <a:lstStyle/>
+                    <a:p>
+                      <a:pPr algn="l" indent="0" marL="0">
+                        <a:buNone/>
+                      </a:pPr>
+                      <a:r>
+                        <a:rPr lang="en-US" sz="1300" dirty="0">
+                          <a:solidFill>
+                            <a:srgbClr val="15171C"/>
+                          </a:solidFill>
+                          <a:latin typeface="Calibri" pitchFamily="34" charset="0"/>
+                          <a:ea typeface="Calibri" pitchFamily="34" charset="-122"/>
+                          <a:cs typeface="Calibri" pitchFamily="34" charset="-120"/>
+                        </a:rPr>
+                        <a:t>One blob set per frame</a:t>
+                      </a:r>
+                      <a:endParaRPr lang="en-US" sz="1300" dirty="0">
+                        <a:latin typeface="Calibri" charset="0"/>
+                        <a:ea typeface="Calibri" charset="0"/>
+                        <a:cs typeface="Calibri" charset="0"/>
+                      </a:endParaRPr>
+                    </a:p>
+                  </a:txBody>
+                  <a:tcPr marL="91440" marR="91440" marT="45720" marB="45720">
+                    <a:lnL w="6350" cap="flat" cmpd="sng" algn="ctr">
+                      <a:solidFill>
+                        <a:srgbClr val="E5E7EB"/>
+                      </a:solidFill>
+                      <a:prstDash val="solid"/>
+                      <a:round/>
+                      <a:headEnd type="none" w="med" len="med"/>
+                      <a:tailEnd type="none" w="med" len="med"/>
+                    </a:lnL>
+                    <a:lnR w="6350" cap="flat" cmpd="sng" algn="ctr">
+                      <a:solidFill>
+                        <a:srgbClr val="E5E7EB"/>
+                      </a:solidFill>
+                      <a:prstDash val="solid"/>
+                      <a:round/>
+                      <a:headEnd type="none" w="med" len="med"/>
+                      <a:tailEnd type="none" w="med" len="med"/>
+                    </a:lnR>
+                    <a:lnT w="6350" cap="flat" cmpd="sng" algn="ctr">
+                      <a:solidFill>
+                        <a:srgbClr val="E5E7EB"/>
+                      </a:solidFill>
+                      <a:prstDash val="solid"/>
+                      <a:round/>
+                      <a:headEnd type="none" w="med" len="med"/>
+                      <a:tailEnd type="none" w="med" len="med"/>
+                    </a:lnT>
+                    <a:lnB w="6350" cap="flat" cmpd="sng" algn="ctr">
+                      <a:solidFill>
+                        <a:srgbClr val="E5E7EB"/>
+                      </a:solidFill>
+                      <a:prstDash val="solid"/>
+                      <a:round/>
+                      <a:headEnd type="none" w="med" len="med"/>
+                      <a:tailEnd type="none" w="med" len="med"/>
+                    </a:lnB>
+                    <a:solidFill>
+                      <a:srgbClr val="FFFFFF"/>
+                    </a:solidFill>
+                  </a:tcPr>
+                </a:tc>
+                <a:tc>
+                  <a:txBody>
+                    <a:bodyPr/>
+                    <a:lstStyle/>
+                    <a:p>
+                      <a:pPr algn="ctr" indent="0" marL="0">
+                        <a:buNone/>
+                      </a:pPr>
+                      <a:r>
+                        <a:rPr lang="en-US" sz="1300" dirty="0">
+                          <a:solidFill>
+                            <a:srgbClr val="15171C"/>
+                          </a:solidFill>
+                          <a:latin typeface="Calibri" pitchFamily="34" charset="0"/>
+                          <a:ea typeface="Calibri" pitchFamily="34" charset="-122"/>
+                          <a:cs typeface="Calibri" pitchFamily="34" charset="-120"/>
+                        </a:rPr>
+                        <a:t>37.5</a:t>
+                      </a:r>
+                      <a:endParaRPr lang="en-US" sz="1300" dirty="0">
+                        <a:latin typeface="Calibri" charset="0"/>
+                        <a:ea typeface="Calibri" charset="0"/>
+                        <a:cs typeface="Calibri" charset="0"/>
+                      </a:endParaRPr>
+                    </a:p>
+                  </a:txBody>
+                  <a:tcPr marL="91440" marR="91440" marT="45720" marB="45720">
+                    <a:lnL w="6350" cap="flat" cmpd="sng" algn="ctr">
+                      <a:solidFill>
+                        <a:srgbClr val="E5E7EB"/>
+                      </a:solidFill>
+                      <a:prstDash val="solid"/>
+                      <a:round/>
+                      <a:headEnd type="none" w="med" len="med"/>
+                      <a:tailEnd type="none" w="med" len="med"/>
+                    </a:lnL>
+                    <a:lnR w="6350" cap="flat" cmpd="sng" algn="ctr">
+                      <a:solidFill>
+                        <a:srgbClr val="E5E7EB"/>
+                      </a:solidFill>
+                      <a:prstDash val="solid"/>
+                      <a:round/>
+                      <a:headEnd type="none" w="med" len="med"/>
+                      <a:tailEnd type="none" w="med" len="med"/>
+                    </a:lnR>
+                    <a:lnT w="6350" cap="flat" cmpd="sng" algn="ctr">
+                      <a:solidFill>
+                        <a:srgbClr val="E5E7EB"/>
+                      </a:solidFill>
+                      <a:prstDash val="solid"/>
+                      <a:round/>
+                      <a:headEnd type="none" w="med" len="med"/>
+                      <a:tailEnd type="none" w="med" len="med"/>
+                    </a:lnT>
+                    <a:lnB w="6350" cap="flat" cmpd="sng" algn="ctr">
+                      <a:solidFill>
+                        <a:srgbClr val="E5E7EB"/>
+                      </a:solidFill>
+                      <a:prstDash val="solid"/>
+                      <a:round/>
+                      <a:headEnd type="none" w="med" len="med"/>
+                      <a:tailEnd type="none" w="med" len="med"/>
+                    </a:lnB>
+                    <a:solidFill>
+                      <a:srgbClr val="FFFFFF"/>
+                    </a:solidFill>
+                  </a:tcPr>
+                </a:tc>
+                <a:tc>
+                  <a:txBody>
+                    <a:bodyPr/>
+                    <a:lstStyle/>
+                    <a:p>
+                      <a:pPr algn="ctr" indent="0" marL="0">
+                        <a:buNone/>
+                      </a:pPr>
+                      <a:r>
+                        <a:rPr lang="en-US" sz="1300" dirty="0">
+                          <a:solidFill>
+                            <a:srgbClr val="15171C"/>
+                          </a:solidFill>
+                          <a:latin typeface="Calibri" pitchFamily="34" charset="0"/>
+                          <a:ea typeface="Calibri" pitchFamily="34" charset="-122"/>
+                          <a:cs typeface="Calibri" pitchFamily="34" charset="-120"/>
+                        </a:rPr>
+                        <a:t>19.8 (nearest)</a:t>
+                      </a:r>
+                      <a:endParaRPr lang="en-US" sz="1300" dirty="0">
+                        <a:latin typeface="Calibri" charset="0"/>
+                        <a:ea typeface="Calibri" charset="0"/>
+                        <a:cs typeface="Calibri" charset="0"/>
+                      </a:endParaRPr>
+                    </a:p>
+                  </a:txBody>
+                  <a:tcPr marL="91440" marR="91440" marT="45720" marB="45720">
+                    <a:lnL w="6350" cap="flat" cmpd="sng" algn="ctr">
+                      <a:solidFill>
+                        <a:srgbClr val="E5E7EB"/>
+                      </a:solidFill>
+                      <a:prstDash val="solid"/>
+                      <a:round/>
+                      <a:headEnd type="none" w="med" len="med"/>
+                      <a:tailEnd type="none" w="med" len="med"/>
+                    </a:lnL>
+                    <a:lnR w="6350" cap="flat" cmpd="sng" algn="ctr">
+                      <a:solidFill>
+                        <a:srgbClr val="E5E7EB"/>
+                      </a:solidFill>
+                      <a:prstDash val="solid"/>
+                      <a:round/>
+                      <a:headEnd type="none" w="med" len="med"/>
+                      <a:tailEnd type="none" w="med" len="med"/>
+                    </a:lnR>
+                    <a:lnT w="6350" cap="flat" cmpd="sng" algn="ctr">
+                      <a:solidFill>
+                        <a:srgbClr val="E5E7EB"/>
+                      </a:solidFill>
+                      <a:prstDash val="solid"/>
+                      <a:round/>
+                      <a:headEnd type="none" w="med" len="med"/>
+                      <a:tailEnd type="none" w="med" len="med"/>
+                    </a:lnT>
+                    <a:lnB w="6350" cap="flat" cmpd="sng" algn="ctr">
+                      <a:solidFill>
+                        <a:srgbClr val="E5E7EB"/>
+                      </a:solidFill>
+                      <a:prstDash val="solid"/>
+                      <a:round/>
+                      <a:headEnd type="none" w="med" len="med"/>
+                      <a:tailEnd type="none" w="med" len="med"/>
+                    </a:lnB>
+                    <a:solidFill>
+                      <a:srgbClr val="FFFFFF"/>
+                    </a:solidFill>
+                  </a:tcPr>
+                </a:tc>
+              </a:tr>
+              <a:tr h="329184">
+                <a:tc>
+                  <a:txBody>
+                    <a:bodyPr/>
+                    <a:lstStyle/>
+                    <a:p>
+                      <a:pPr algn="l" indent="0" marL="0">
+                        <a:buNone/>
+                      </a:pPr>
+                      <a:r>
+                        <a:rPr lang="en-US" sz="1300" dirty="0">
+                          <a:solidFill>
+                            <a:srgbClr val="15171C"/>
+                          </a:solidFill>
+                          <a:latin typeface="Calibri" pitchFamily="34" charset="0"/>
+                          <a:ea typeface="Calibri" pitchFamily="34" charset="-122"/>
+                          <a:cs typeface="Calibri" pitchFamily="34" charset="-120"/>
+                        </a:rPr>
+                        <a:t>  … blend of 2 frames</a:t>
+                      </a:r>
+                      <a:endParaRPr lang="en-US" sz="1300" dirty="0">
+                        <a:latin typeface="Calibri" charset="0"/>
+                        <a:ea typeface="Calibri" charset="0"/>
+                        <a:cs typeface="Calibri" charset="0"/>
+                      </a:endParaRPr>
+                    </a:p>
+                  </a:txBody>
+                  <a:tcPr marL="91440" marR="91440" marT="45720" marB="45720">
+                    <a:lnL w="6350" cap="flat" cmpd="sng" algn="ctr">
+                      <a:solidFill>
+                        <a:srgbClr val="E5E7EB"/>
+                      </a:solidFill>
+                      <a:prstDash val="solid"/>
+                      <a:round/>
+                      <a:headEnd type="none" w="med" len="med"/>
+                      <a:tailEnd type="none" w="med" len="med"/>
+                    </a:lnL>
+                    <a:lnR w="6350" cap="flat" cmpd="sng" algn="ctr">
+                      <a:solidFill>
+                        <a:srgbClr val="E5E7EB"/>
+                      </a:solidFill>
+                      <a:prstDash val="solid"/>
+                      <a:round/>
+                      <a:headEnd type="none" w="med" len="med"/>
+                      <a:tailEnd type="none" w="med" len="med"/>
+                    </a:lnR>
+                    <a:lnT w="6350" cap="flat" cmpd="sng" algn="ctr">
+                      <a:solidFill>
+                        <a:srgbClr val="E5E7EB"/>
+                      </a:solidFill>
+                      <a:prstDash val="solid"/>
+                      <a:round/>
+                      <a:headEnd type="none" w="med" len="med"/>
+                      <a:tailEnd type="none" w="med" len="med"/>
+                    </a:lnT>
+                    <a:lnB w="6350" cap="flat" cmpd="sng" algn="ctr">
+                      <a:solidFill>
+                        <a:srgbClr val="E5E7EB"/>
+                      </a:solidFill>
+                      <a:prstDash val="solid"/>
+                      <a:round/>
+                      <a:headEnd type="none" w="med" len="med"/>
+                      <a:tailEnd type="none" w="med" len="med"/>
+                    </a:lnB>
+                    <a:solidFill>
+                      <a:srgbClr val="FFFFFF"/>
+                    </a:solidFill>
+                  </a:tcPr>
+                </a:tc>
+                <a:tc>
+                  <a:txBody>
+                    <a:bodyPr/>
+                    <a:lstStyle/>
+                    <a:p>
+                      <a:pPr algn="ctr" indent="0" marL="0">
+                        <a:buNone/>
+                      </a:pPr>
+                      <a:endParaRPr lang="en-US" sz="1300" dirty="0">
+                        <a:latin typeface="Calibri" charset="0"/>
+                        <a:ea typeface="Calibri" charset="0"/>
+                        <a:cs typeface="Calibri" charset="0"/>
+                      </a:endParaRPr>
+                    </a:p>
+                  </a:txBody>
+                  <a:tcPr marL="91440" marR="91440" marT="45720" marB="45720">
+                    <a:lnL w="6350" cap="flat" cmpd="sng" algn="ctr">
+                      <a:solidFill>
+                        <a:srgbClr val="E5E7EB"/>
+                      </a:solidFill>
+                      <a:prstDash val="solid"/>
+                      <a:round/>
+                      <a:headEnd type="none" w="med" len="med"/>
+                      <a:tailEnd type="none" w="med" len="med"/>
+                    </a:lnL>
+                    <a:lnR w="6350" cap="flat" cmpd="sng" algn="ctr">
+                      <a:solidFill>
+                        <a:srgbClr val="E5E7EB"/>
+                      </a:solidFill>
+                      <a:prstDash val="solid"/>
+                      <a:round/>
+                      <a:headEnd type="none" w="med" len="med"/>
+                      <a:tailEnd type="none" w="med" len="med"/>
+                    </a:lnR>
+                    <a:lnT w="6350" cap="flat" cmpd="sng" algn="ctr">
+                      <a:solidFill>
+                        <a:srgbClr val="E5E7EB"/>
+                      </a:solidFill>
+                      <a:prstDash val="solid"/>
+                      <a:round/>
+                      <a:headEnd type="none" w="med" len="med"/>
+                      <a:tailEnd type="none" w="med" len="med"/>
+                    </a:lnT>
+                    <a:lnB w="6350" cap="flat" cmpd="sng" algn="ctr">
+                      <a:solidFill>
+                        <a:srgbClr val="E5E7EB"/>
+                      </a:solidFill>
+                      <a:prstDash val="solid"/>
+                      <a:round/>
+                      <a:headEnd type="none" w="med" len="med"/>
+                      <a:tailEnd type="none" w="med" len="med"/>
+                    </a:lnB>
+                    <a:solidFill>
+                      <a:srgbClr val="FFFFFF"/>
+                    </a:solidFill>
+                  </a:tcPr>
+                </a:tc>
+                <a:tc>
+                  <a:txBody>
+                    <a:bodyPr/>
+                    <a:lstStyle/>
+                    <a:p>
+                      <a:pPr algn="ctr" indent="0" marL="0">
+                        <a:buNone/>
+                      </a:pPr>
+                      <a:r>
+                        <a:rPr lang="en-US" sz="1300" dirty="0">
+                          <a:solidFill>
+                            <a:srgbClr val="15171C"/>
+                          </a:solidFill>
+                          <a:latin typeface="Calibri" pitchFamily="34" charset="0"/>
+                          <a:ea typeface="Calibri" pitchFamily="34" charset="-122"/>
+                          <a:cs typeface="Calibri" pitchFamily="34" charset="-120"/>
+                        </a:rPr>
+                        <a:t>22.7</a:t>
+                      </a:r>
+                      <a:endParaRPr lang="en-US" sz="1300" dirty="0">
+                        <a:latin typeface="Calibri" charset="0"/>
+                        <a:ea typeface="Calibri" charset="0"/>
+                        <a:cs typeface="Calibri" charset="0"/>
+                      </a:endParaRPr>
+                    </a:p>
+                  </a:txBody>
+                  <a:tcPr marL="91440" marR="91440" marT="45720" marB="45720">
+                    <a:lnL w="6350" cap="flat" cmpd="sng" algn="ctr">
+                      <a:solidFill>
+                        <a:srgbClr val="E5E7EB"/>
+                      </a:solidFill>
+                      <a:prstDash val="solid"/>
+                      <a:round/>
+                      <a:headEnd type="none" w="med" len="med"/>
+                      <a:tailEnd type="none" w="med" len="med"/>
+                    </a:lnL>
+                    <a:lnR w="6350" cap="flat" cmpd="sng" algn="ctr">
+                      <a:solidFill>
+                        <a:srgbClr val="E5E7EB"/>
+                      </a:solidFill>
+                      <a:prstDash val="solid"/>
+                      <a:round/>
+                      <a:headEnd type="none" w="med" len="med"/>
+                      <a:tailEnd type="none" w="med" len="med"/>
+                    </a:lnR>
+                    <a:lnT w="6350" cap="flat" cmpd="sng" algn="ctr">
+                      <a:solidFill>
+                        <a:srgbClr val="E5E7EB"/>
+                      </a:solidFill>
+                      <a:prstDash val="solid"/>
+                      <a:round/>
+                      <a:headEnd type="none" w="med" len="med"/>
+                      <a:tailEnd type="none" w="med" len="med"/>
+                    </a:lnT>
+                    <a:lnB w="6350" cap="flat" cmpd="sng" algn="ctr">
+                      <a:solidFill>
+                        <a:srgbClr val="E5E7EB"/>
+                      </a:solidFill>
+                      <a:prstDash val="solid"/>
+                      <a:round/>
+                      <a:headEnd type="none" w="med" len="med"/>
+                      <a:tailEnd type="none" w="med" len="med"/>
+                    </a:lnB>
+                    <a:solidFill>
+                      <a:srgbClr val="FFFFFF"/>
+                    </a:solidFill>
+                  </a:tcPr>
+                </a:tc>
+              </a:tr>
+              <a:tr h="329184">
+                <a:tc>
+                  <a:txBody>
+                    <a:bodyPr/>
+                    <a:lstStyle/>
+                    <a:p>
+                      <a:pPr algn="l" indent="0" marL="0">
+                        <a:buNone/>
+                      </a:pPr>
+                      <a:r>
+                        <a:rPr lang="en-US" sz="1300" dirty="0">
+                          <a:solidFill>
+                            <a:srgbClr val="15171C"/>
+                          </a:solidFill>
+                          <a:latin typeface="Calibri" pitchFamily="34" charset="0"/>
+                          <a:ea typeface="Calibri" pitchFamily="34" charset="-122"/>
+                          <a:cs typeface="Calibri" pitchFamily="34" charset="-120"/>
+                        </a:rPr>
+                        <a:t>4D blobs (fade in time)</a:t>
+                      </a:r>
+                      <a:endParaRPr lang="en-US" sz="1300" dirty="0">
+                        <a:latin typeface="Calibri" charset="0"/>
+                        <a:ea typeface="Calibri" charset="0"/>
+                        <a:cs typeface="Calibri" charset="0"/>
+                      </a:endParaRPr>
+                    </a:p>
+                  </a:txBody>
+                  <a:tcPr marL="91440" marR="91440" marT="45720" marB="45720">
+                    <a:lnL w="6350" cap="flat" cmpd="sng" algn="ctr">
+                      <a:solidFill>
+                        <a:srgbClr val="E5E7EB"/>
+                      </a:solidFill>
+                      <a:prstDash val="solid"/>
+                      <a:round/>
+                      <a:headEnd type="none" w="med" len="med"/>
+                      <a:tailEnd type="none" w="med" len="med"/>
+                    </a:lnL>
+                    <a:lnR w="6350" cap="flat" cmpd="sng" algn="ctr">
+                      <a:solidFill>
+                        <a:srgbClr val="E5E7EB"/>
+                      </a:solidFill>
+                      <a:prstDash val="solid"/>
+                      <a:round/>
+                      <a:headEnd type="none" w="med" len="med"/>
+                      <a:tailEnd type="none" w="med" len="med"/>
+                    </a:lnR>
+                    <a:lnT w="6350" cap="flat" cmpd="sng" algn="ctr">
+                      <a:solidFill>
+                        <a:srgbClr val="E5E7EB"/>
+                      </a:solidFill>
+                      <a:prstDash val="solid"/>
+                      <a:round/>
+                      <a:headEnd type="none" w="med" len="med"/>
+                      <a:tailEnd type="none" w="med" len="med"/>
+                    </a:lnT>
+                    <a:lnB w="6350" cap="flat" cmpd="sng" algn="ctr">
+                      <a:solidFill>
+                        <a:srgbClr val="E5E7EB"/>
+                      </a:solidFill>
+                      <a:prstDash val="solid"/>
+                      <a:round/>
+                      <a:headEnd type="none" w="med" len="med"/>
+                      <a:tailEnd type="none" w="med" len="med"/>
+                    </a:lnB>
+                    <a:solidFill>
+                      <a:srgbClr val="FFFFFF"/>
+                    </a:solidFill>
+                  </a:tcPr>
+                </a:tc>
+                <a:tc>
+                  <a:txBody>
+                    <a:bodyPr/>
+                    <a:lstStyle/>
+                    <a:p>
+                      <a:pPr algn="ctr" indent="0" marL="0">
+                        <a:buNone/>
+                      </a:pPr>
+                      <a:r>
+                        <a:rPr lang="en-US" sz="1300" dirty="0">
+                          <a:solidFill>
+                            <a:srgbClr val="15171C"/>
+                          </a:solidFill>
+                          <a:latin typeface="Calibri" pitchFamily="34" charset="0"/>
+                          <a:ea typeface="Calibri" pitchFamily="34" charset="-122"/>
+                          <a:cs typeface="Calibri" pitchFamily="34" charset="-120"/>
+                        </a:rPr>
+                        <a:t>18.5</a:t>
+                      </a:r>
+                      <a:endParaRPr lang="en-US" sz="1300" dirty="0">
+                        <a:latin typeface="Calibri" charset="0"/>
+                        <a:ea typeface="Calibri" charset="0"/>
+                        <a:cs typeface="Calibri" charset="0"/>
+                      </a:endParaRPr>
+                    </a:p>
+                  </a:txBody>
+                  <a:tcPr marL="91440" marR="91440" marT="45720" marB="45720">
+                    <a:lnL w="6350" cap="flat" cmpd="sng" algn="ctr">
+                      <a:solidFill>
+                        <a:srgbClr val="E5E7EB"/>
+                      </a:solidFill>
+                      <a:prstDash val="solid"/>
+                      <a:round/>
+                      <a:headEnd type="none" w="med" len="med"/>
+                      <a:tailEnd type="none" w="med" len="med"/>
+                    </a:lnL>
+                    <a:lnR w="6350" cap="flat" cmpd="sng" algn="ctr">
+                      <a:solidFill>
+                        <a:srgbClr val="E5E7EB"/>
+                      </a:solidFill>
+                      <a:prstDash val="solid"/>
+                      <a:round/>
+                      <a:headEnd type="none" w="med" len="med"/>
+                      <a:tailEnd type="none" w="med" len="med"/>
+                    </a:lnR>
+                    <a:lnT w="6350" cap="flat" cmpd="sng" algn="ctr">
+                      <a:solidFill>
+                        <a:srgbClr val="E5E7EB"/>
+                      </a:solidFill>
+                      <a:prstDash val="solid"/>
+                      <a:round/>
+                      <a:headEnd type="none" w="med" len="med"/>
+                      <a:tailEnd type="none" w="med" len="med"/>
+                    </a:lnT>
+                    <a:lnB w="6350" cap="flat" cmpd="sng" algn="ctr">
+                      <a:solidFill>
+                        <a:srgbClr val="E5E7EB"/>
+                      </a:solidFill>
+                      <a:prstDash val="solid"/>
+                      <a:round/>
+                      <a:headEnd type="none" w="med" len="med"/>
+                      <a:tailEnd type="none" w="med" len="med"/>
+                    </a:lnB>
+                    <a:solidFill>
+                      <a:srgbClr val="FFFFFF"/>
+                    </a:solidFill>
+                  </a:tcPr>
+                </a:tc>
+                <a:tc>
+                  <a:txBody>
+                    <a:bodyPr/>
+                    <a:lstStyle/>
+                    <a:p>
+                      <a:pPr algn="ctr" indent="0" marL="0">
+                        <a:buNone/>
+                      </a:pPr>
+                      <a:r>
+                        <a:rPr lang="en-US" sz="1300" dirty="0">
+                          <a:solidFill>
+                            <a:srgbClr val="15171C"/>
+                          </a:solidFill>
+                          <a:latin typeface="Calibri" pitchFamily="34" charset="0"/>
+                          <a:ea typeface="Calibri" pitchFamily="34" charset="-122"/>
+                          <a:cs typeface="Calibri" pitchFamily="34" charset="-120"/>
+                        </a:rPr>
+                        <a:t>16.3</a:t>
+                      </a:r>
+                      <a:endParaRPr lang="en-US" sz="1300" dirty="0">
+                        <a:latin typeface="Calibri" charset="0"/>
+                        <a:ea typeface="Calibri" charset="0"/>
+                        <a:cs typeface="Calibri" charset="0"/>
+                      </a:endParaRPr>
+                    </a:p>
+                  </a:txBody>
+                  <a:tcPr marL="91440" marR="91440" marT="45720" marB="45720">
+                    <a:lnL w="6350" cap="flat" cmpd="sng" algn="ctr">
+                      <a:solidFill>
+                        <a:srgbClr val="E5E7EB"/>
+                      </a:solidFill>
+                      <a:prstDash val="solid"/>
+                      <a:round/>
+                      <a:headEnd type="none" w="med" len="med"/>
+                      <a:tailEnd type="none" w="med" len="med"/>
+                    </a:lnL>
+                    <a:lnR w="6350" cap="flat" cmpd="sng" algn="ctr">
+                      <a:solidFill>
+                        <a:srgbClr val="E5E7EB"/>
+                      </a:solidFill>
+                      <a:prstDash val="solid"/>
+                      <a:round/>
+                      <a:headEnd type="none" w="med" len="med"/>
+                      <a:tailEnd type="none" w="med" len="med"/>
+                    </a:lnR>
+                    <a:lnT w="6350" cap="flat" cmpd="sng" algn="ctr">
+                      <a:solidFill>
+                        <a:srgbClr val="E5E7EB"/>
+                      </a:solidFill>
+                      <a:prstDash val="solid"/>
+                      <a:round/>
+                      <a:headEnd type="none" w="med" len="med"/>
+                      <a:tailEnd type="none" w="med" len="med"/>
+                    </a:lnT>
+                    <a:lnB w="6350" cap="flat" cmpd="sng" algn="ctr">
+                      <a:solidFill>
+                        <a:srgbClr val="E5E7EB"/>
+                      </a:solidFill>
+                      <a:prstDash val="solid"/>
+                      <a:round/>
+                      <a:headEnd type="none" w="med" len="med"/>
+                      <a:tailEnd type="none" w="med" len="med"/>
+                    </a:lnB>
+                    <a:solidFill>
+                      <a:srgbClr val="FFFFFF"/>
+                    </a:solidFill>
+                  </a:tcPr>
+                </a:tc>
+              </a:tr>
+              <a:tr h="329184">
+                <a:tc>
+                  <a:txBody>
+                    <a:bodyPr/>
+                    <a:lstStyle/>
+                    <a:p>
+                      <a:pPr algn="l" indent="0" marL="0">
+                        <a:buNone/>
+                      </a:pPr>
+                      <a:r>
+                        <a:rPr lang="en-US" sz="1300" dirty="0">
+                          <a:solidFill>
+                            <a:srgbClr val="15171C"/>
+                          </a:solidFill>
+                          <a:latin typeface="Calibri" pitchFamily="34" charset="0"/>
+                          <a:ea typeface="Calibri" pitchFamily="34" charset="-122"/>
+                          <a:cs typeface="Calibri" pitchFamily="34" charset="-120"/>
+                        </a:rPr>
+                        <a:t>Moving blobs (deformation)</a:t>
+                      </a:r>
+                      <a:endParaRPr lang="en-US" sz="1300" dirty="0">
+                        <a:latin typeface="Calibri" charset="0"/>
+                        <a:ea typeface="Calibri" charset="0"/>
+                        <a:cs typeface="Calibri" charset="0"/>
+                      </a:endParaRPr>
+                    </a:p>
+                  </a:txBody>
+                  <a:tcPr marL="91440" marR="91440" marT="45720" marB="45720">
+                    <a:lnL w="6350" cap="flat" cmpd="sng" algn="ctr">
+                      <a:solidFill>
+                        <a:srgbClr val="E5E7EB"/>
+                      </a:solidFill>
+                      <a:prstDash val="solid"/>
+                      <a:round/>
+                      <a:headEnd type="none" w="med" len="med"/>
+                      <a:tailEnd type="none" w="med" len="med"/>
+                    </a:lnL>
+                    <a:lnR w="6350" cap="flat" cmpd="sng" algn="ctr">
+                      <a:solidFill>
+                        <a:srgbClr val="E5E7EB"/>
+                      </a:solidFill>
+                      <a:prstDash val="solid"/>
+                      <a:round/>
+                      <a:headEnd type="none" w="med" len="med"/>
+                      <a:tailEnd type="none" w="med" len="med"/>
+                    </a:lnR>
+                    <a:lnT w="6350" cap="flat" cmpd="sng" algn="ctr">
+                      <a:solidFill>
+                        <a:srgbClr val="E5E7EB"/>
+                      </a:solidFill>
+                      <a:prstDash val="solid"/>
+                      <a:round/>
+                      <a:headEnd type="none" w="med" len="med"/>
+                      <a:tailEnd type="none" w="med" len="med"/>
+                    </a:lnT>
+                    <a:lnB w="6350" cap="flat" cmpd="sng" algn="ctr">
+                      <a:solidFill>
+                        <a:srgbClr val="E5E7EB"/>
+                      </a:solidFill>
+                      <a:prstDash val="solid"/>
+                      <a:round/>
+                      <a:headEnd type="none" w="med" len="med"/>
+                      <a:tailEnd type="none" w="med" len="med"/>
+                    </a:lnB>
+                    <a:solidFill>
+                      <a:srgbClr val="FFFFFF"/>
+                    </a:solidFill>
+                  </a:tcPr>
+                </a:tc>
+                <a:tc>
+                  <a:txBody>
+                    <a:bodyPr/>
+                    <a:lstStyle/>
+                    <a:p>
+                      <a:pPr algn="ctr" indent="0" marL="0">
+                        <a:buNone/>
+                      </a:pPr>
+                      <a:r>
+                        <a:rPr lang="en-US" sz="1300" dirty="0">
+                          <a:solidFill>
+                            <a:srgbClr val="15171C"/>
+                          </a:solidFill>
+                          <a:latin typeface="Calibri" pitchFamily="34" charset="0"/>
+                          <a:ea typeface="Calibri" pitchFamily="34" charset="-122"/>
+                          <a:cs typeface="Calibri" pitchFamily="34" charset="-120"/>
+                        </a:rPr>
+                        <a:t>20.5</a:t>
+                      </a:r>
+                      <a:endParaRPr lang="en-US" sz="1300" dirty="0">
+                        <a:latin typeface="Calibri" charset="0"/>
+                        <a:ea typeface="Calibri" charset="0"/>
+                        <a:cs typeface="Calibri" charset="0"/>
+                      </a:endParaRPr>
+                    </a:p>
+                  </a:txBody>
+                  <a:tcPr marL="91440" marR="91440" marT="45720" marB="45720">
+                    <a:lnL w="6350" cap="flat" cmpd="sng" algn="ctr">
+                      <a:solidFill>
+                        <a:srgbClr val="E5E7EB"/>
+                      </a:solidFill>
+                      <a:prstDash val="solid"/>
+                      <a:round/>
+                      <a:headEnd type="none" w="med" len="med"/>
+                      <a:tailEnd type="none" w="med" len="med"/>
+                    </a:lnL>
+                    <a:lnR w="6350" cap="flat" cmpd="sng" algn="ctr">
+                      <a:solidFill>
+                        <a:srgbClr val="E5E7EB"/>
+                      </a:solidFill>
+                      <a:prstDash val="solid"/>
+                      <a:round/>
+                      <a:headEnd type="none" w="med" len="med"/>
+                      <a:tailEnd type="none" w="med" len="med"/>
+                    </a:lnR>
+                    <a:lnT w="6350" cap="flat" cmpd="sng" algn="ctr">
+                      <a:solidFill>
+                        <a:srgbClr val="E5E7EB"/>
+                      </a:solidFill>
+                      <a:prstDash val="solid"/>
+                      <a:round/>
+                      <a:headEnd type="none" w="med" len="med"/>
+                      <a:tailEnd type="none" w="med" len="med"/>
+                    </a:lnT>
+                    <a:lnB w="6350" cap="flat" cmpd="sng" algn="ctr">
+                      <a:solidFill>
+                        <a:srgbClr val="E5E7EB"/>
+                      </a:solidFill>
+                      <a:prstDash val="solid"/>
+                      <a:round/>
+                      <a:headEnd type="none" w="med" len="med"/>
+                      <a:tailEnd type="none" w="med" len="med"/>
+                    </a:lnB>
+                    <a:solidFill>
+                      <a:srgbClr val="FFFFFF"/>
+                    </a:solidFill>
+                  </a:tcPr>
+                </a:tc>
+                <a:tc>
+                  <a:txBody>
+                    <a:bodyPr/>
+                    <a:lstStyle/>
+                    <a:p>
+                      <a:pPr algn="ctr" indent="0" marL="0">
+                        <a:buNone/>
+                      </a:pPr>
+                      <a:r>
+                        <a:rPr lang="en-US" sz="1300" dirty="0">
+                          <a:solidFill>
+                            <a:srgbClr val="15171C"/>
+                          </a:solidFill>
+                          <a:latin typeface="Calibri" pitchFamily="34" charset="0"/>
+                          <a:ea typeface="Calibri" pitchFamily="34" charset="-122"/>
+                          <a:cs typeface="Calibri" pitchFamily="34" charset="-120"/>
+                        </a:rPr>
+                        <a:t>19.0</a:t>
+                      </a:r>
+                      <a:endParaRPr lang="en-US" sz="1300" dirty="0">
+                        <a:latin typeface="Calibri" charset="0"/>
+                        <a:ea typeface="Calibri" charset="0"/>
+                        <a:cs typeface="Calibri" charset="0"/>
+                      </a:endParaRPr>
+                    </a:p>
+                  </a:txBody>
+                  <a:tcPr marL="91440" marR="91440" marT="45720" marB="45720">
+                    <a:lnL w="6350" cap="flat" cmpd="sng" algn="ctr">
+                      <a:solidFill>
+                        <a:srgbClr val="E5E7EB"/>
+                      </a:solidFill>
+                      <a:prstDash val="solid"/>
+                      <a:round/>
+                      <a:headEnd type="none" w="med" len="med"/>
+                      <a:tailEnd type="none" w="med" len="med"/>
+                    </a:lnL>
+                    <a:lnR w="6350" cap="flat" cmpd="sng" algn="ctr">
+                      <a:solidFill>
+                        <a:srgbClr val="E5E7EB"/>
+                      </a:solidFill>
+                      <a:prstDash val="solid"/>
+                      <a:round/>
+                      <a:headEnd type="none" w="med" len="med"/>
+                      <a:tailEnd type="none" w="med" len="med"/>
+                    </a:lnR>
+                    <a:lnT w="6350" cap="flat" cmpd="sng" algn="ctr">
+                      <a:solidFill>
+                        <a:srgbClr val="E5E7EB"/>
+                      </a:solidFill>
+                      <a:prstDash val="solid"/>
+                      <a:round/>
+                      <a:headEnd type="none" w="med" len="med"/>
+                      <a:tailEnd type="none" w="med" len="med"/>
+                    </a:lnT>
+                    <a:lnB w="6350" cap="flat" cmpd="sng" algn="ctr">
+                      <a:solidFill>
+                        <a:srgbClr val="E5E7EB"/>
+                      </a:solidFill>
+                      <a:prstDash val="solid"/>
+                      <a:round/>
+                      <a:headEnd type="none" w="med" len="med"/>
+                      <a:tailEnd type="none" w="med" len="med"/>
+                    </a:lnB>
+                    <a:solidFill>
+                      <a:srgbClr val="FFFFFF"/>
+                    </a:solidFill>
+                  </a:tcPr>
+                </a:tc>
+              </a:tr>
+            </a:tbl>
+          </a:graphicData>
+        </a:graphic>
+      </p:graphicFrame>
+      <p:sp>
+        <p:nvSpPr>
+          <p:cNvPr id="6" name="Text 2"/>
+          <p:cNvSpPr txBox="1"/>
+          <p:nvPr/>
+        </p:nvSpPr>
+        <p:spPr>
+          <a:xfrm>
+            <a:off x="4023360" y="2926080"/>
+            <a:ext cx="4663440" cy="274320"/>
+          </a:xfrm>
+          <a:prstGeom prst="rect">
+            <a:avLst/>
+          </a:prstGeom>
+          <a:noFill/>
+          <a:ln/>
+        </p:spPr>
+        <p:txBody>
+          <a:bodyPr wrap="square" lIns="0" tIns="0" rIns="0" bIns="0" rtlCol="0" anchor="t"/>
+          <a:lstStyle/>
+          <a:p>
+            <a:pPr indent="0" marL="0">
+              <a:buNone/>
+            </a:pPr>
+            <a:r>
+              <a:rPr lang="en-US" sz="1100" dirty="0">
+                <a:solidFill>
+                  <a:schemeClr val="accent5"/>
+                </a:solidFill>
+              </a:rPr>
+              <a:t>PSNR in dB, mean of 3 seeds. Held-out frames were never used for fitting.</a:t>
+            </a:r>
+            <a:endParaRPr lang="en-US" sz="1100" dirty="0"/>
+          </a:p>
+        </p:txBody>
+      </p:sp>
+      <p:sp>
+        <p:nvSpPr>
+          <p:cNvPr id="7" name="temporal-takeaway"/>
           <p:cNvSpPr/>
           <p:nvPr/>
         </p:nvSpPr>
         <p:spPr>
           <a:xfrm>
-            <a:off x="5897880" y="1051560"/>
-            <a:ext cx="2788920" cy="1143000"/>
+            <a:off x="4023360" y="3291840"/>
+            <a:ext cx="4663440" cy="1280160"/>
           </a:xfrm>
           <a:prstGeom prst="roundRect">
             <a:avLst>
-              <a:gd name="adj" fmla="val 6400"/>
+              <a:gd name="adj" fmla="val 5714"/>
             </a:avLst>
           </a:prstGeom>
           <a:solidFill>
@@ -11960,14 +13389,14 @@
       </p:sp>
       <p:sp>
         <p:nvSpPr>
-          <p:cNvPr id="5" name="Text 2"/>
+          <p:cNvPr id="8" name="Text 4"/>
           <p:cNvSpPr txBox="1"/>
           <p:nvPr/>
         </p:nvSpPr>
         <p:spPr>
           <a:xfrm>
-            <a:off x="6062472" y="1143000"/>
-            <a:ext cx="2459736" cy="228600"/>
+            <a:off x="4206240" y="3383280"/>
+            <a:ext cx="4297680" cy="1097280"/>
           </a:xfrm>
           <a:prstGeom prst="rect">
             <a:avLst/>
@@ -11983,38 +13412,13 @@
               <a:buNone/>
             </a:pPr>
             <a:r>
-              <a:rPr lang="en-US" sz="1200" b="1" dirty="0">
-                <a:solidFill>
-                  <a:schemeClr val="accent1"/>
+              <a:rPr lang="en-US" sz="1400" b="1" dirty="0">
+                <a:solidFill>
+                  <a:schemeClr val="tx1"/>
                 </a:solidFill>
               </a:rPr>
-              <a:t>WHAT WE SEE</a:t>
-            </a:r>
-            <a:endParaRPr lang="en-US" sz="1200" dirty="0"/>
-          </a:p>
-        </p:txBody>
-      </p:sp>
-      <p:sp>
-        <p:nvSpPr>
-          <p:cNvPr id="6" name="Text 3"/>
-          <p:cNvSpPr txBox="1"/>
-          <p:nvPr/>
-        </p:nvSpPr>
-        <p:spPr>
-          <a:xfrm>
-            <a:off x="6062472" y="1399032"/>
-            <a:ext cx="2459736" cy="722376"/>
-          </a:xfrm>
-          <a:prstGeom prst="rect">
-            <a:avLst/>
-          </a:prstGeom>
-          <a:noFill/>
-          <a:ln/>
-        </p:spPr>
-        <p:txBody>
-          <a:bodyPr wrap="square" lIns="0" tIns="0" rIns="0" bIns="0" rtlCol="0" anchor="t"/>
-          <a:lstStyle/>
-          <a:p>
+              <a:t>The simplest option won: </a:t>
+            </a:r>
             <a:pPr indent="0" marL="0">
               <a:buNone/>
             </a:pPr>
@@ -12024,205 +13428,7 @@
                   <a:schemeClr val="tx1"/>
                 </a:solidFill>
               </a:rPr>
-              <a:t>Under LoG, nuclei kept crosses 90% at 1.1–3.1 blobs per nucleus (all 12 frames)</a:t>
-            </a:r>
-            <a:endParaRPr lang="en-US" sz="1400" dirty="0"/>
-          </a:p>
-        </p:txBody>
-      </p:sp>
-      <p:sp>
-        <p:nvSpPr>
-          <p:cNvPr id="7" name="step-card-1"/>
-          <p:cNvSpPr/>
-          <p:nvPr/>
-        </p:nvSpPr>
-        <p:spPr>
-          <a:xfrm>
-            <a:off x="5897880" y="2258568"/>
-            <a:ext cx="2788920" cy="1143000"/>
-          </a:xfrm>
-          <a:prstGeom prst="roundRect">
-            <a:avLst>
-              <a:gd name="adj" fmla="val 6400"/>
-            </a:avLst>
-          </a:prstGeom>
-          <a:solidFill>
-            <a:schemeClr val="bg2"/>
-          </a:solidFill>
-          <a:ln w="12700">
-            <a:solidFill>
-              <a:schemeClr val="bg2"/>
-            </a:solidFill>
-            <a:prstDash val="solid"/>
-          </a:ln>
-        </p:spPr>
-      </p:sp>
-      <p:sp>
-        <p:nvSpPr>
-          <p:cNvPr id="8" name="Text 5"/>
-          <p:cNvSpPr txBox="1"/>
-          <p:nvPr/>
-        </p:nvSpPr>
-        <p:spPr>
-          <a:xfrm>
-            <a:off x="6062472" y="2350008"/>
-            <a:ext cx="2459736" cy="228600"/>
-          </a:xfrm>
-          <a:prstGeom prst="rect">
-            <a:avLst/>
-          </a:prstGeom>
-          <a:noFill/>
-          <a:ln/>
-        </p:spPr>
-        <p:txBody>
-          <a:bodyPr wrap="square" lIns="0" tIns="0" rIns="0" bIns="0" rtlCol="0" anchor="t"/>
-          <a:lstStyle/>
-          <a:p>
-            <a:pPr indent="0" marL="0">
-              <a:buNone/>
-            </a:pPr>
-            <a:r>
-              <a:rPr lang="en-US" sz="1200" b="1" dirty="0">
-                <a:solidFill>
-                  <a:schemeClr val="accent1"/>
-                </a:solidFill>
-              </a:rPr>
-              <a:t>PSNR</a:t>
-            </a:r>
-            <a:endParaRPr lang="en-US" sz="1200" dirty="0"/>
-          </a:p>
-        </p:txBody>
-      </p:sp>
-      <p:sp>
-        <p:nvSpPr>
-          <p:cNvPr id="9" name="Text 6"/>
-          <p:cNvSpPr txBox="1"/>
-          <p:nvPr/>
-        </p:nvSpPr>
-        <p:spPr>
-          <a:xfrm>
-            <a:off x="6062472" y="2606040"/>
-            <a:ext cx="2459736" cy="722376"/>
-          </a:xfrm>
-          <a:prstGeom prst="rect">
-            <a:avLst/>
-          </a:prstGeom>
-          <a:noFill/>
-          <a:ln/>
-        </p:spPr>
-        <p:txBody>
-          <a:bodyPr wrap="square" lIns="0" tIns="0" rIns="0" bIns="0" rtlCol="0" anchor="t"/>
-          <a:lstStyle/>
-          <a:p>
-            <a:pPr indent="0" marL="0">
-              <a:buNone/>
-            </a:pPr>
-            <a:r>
-              <a:rPr lang="en-US" sz="1400" dirty="0">
-                <a:solidFill>
-                  <a:schemeClr val="tx1"/>
-                </a:solidFill>
-              </a:rPr>
-              <a:t>For budgets of 1,000+ blobs it moves at most 2.6 dB per frame</a:t>
-            </a:r>
-            <a:endParaRPr lang="en-US" sz="1400" dirty="0"/>
-          </a:p>
-        </p:txBody>
-      </p:sp>
-      <p:sp>
-        <p:nvSpPr>
-          <p:cNvPr id="10" name="step-card-2"/>
-          <p:cNvSpPr/>
-          <p:nvPr/>
-        </p:nvSpPr>
-        <p:spPr>
-          <a:xfrm>
-            <a:off x="5897880" y="3465576"/>
-            <a:ext cx="2788920" cy="1143000"/>
-          </a:xfrm>
-          <a:prstGeom prst="roundRect">
-            <a:avLst>
-              <a:gd name="adj" fmla="val 6400"/>
-            </a:avLst>
-          </a:prstGeom>
-          <a:solidFill>
-            <a:schemeClr val="bg2"/>
-          </a:solidFill>
-          <a:ln w="12700">
-            <a:solidFill>
-              <a:schemeClr val="bg2"/>
-            </a:solidFill>
-            <a:prstDash val="solid"/>
-          </a:ln>
-        </p:spPr>
-      </p:sp>
-      <p:sp>
-        <p:nvSpPr>
-          <p:cNvPr id="11" name="Text 8"/>
-          <p:cNvSpPr txBox="1"/>
-          <p:nvPr/>
-        </p:nvSpPr>
-        <p:spPr>
-          <a:xfrm>
-            <a:off x="6062472" y="3557016"/>
-            <a:ext cx="2459736" cy="228600"/>
-          </a:xfrm>
-          <a:prstGeom prst="rect">
-            <a:avLst/>
-          </a:prstGeom>
-          <a:noFill/>
-          <a:ln/>
-        </p:spPr>
-        <p:txBody>
-          <a:bodyPr wrap="square" lIns="0" tIns="0" rIns="0" bIns="0" rtlCol="0" anchor="t"/>
-          <a:lstStyle/>
-          <a:p>
-            <a:pPr indent="0" marL="0">
-              <a:buNone/>
-            </a:pPr>
-            <a:r>
-              <a:rPr lang="en-US" sz="1200" b="1" dirty="0">
-                <a:solidFill>
-                  <a:schemeClr val="accent1"/>
-                </a:solidFill>
-              </a:rPr>
-              <a:t>SO</a:t>
-            </a:r>
-            <a:endParaRPr lang="en-US" sz="1200" dirty="0"/>
-          </a:p>
-        </p:txBody>
-      </p:sp>
-      <p:sp>
-        <p:nvSpPr>
-          <p:cNvPr id="12" name="Text 9"/>
-          <p:cNvSpPr txBox="1"/>
-          <p:nvPr/>
-        </p:nvSpPr>
-        <p:spPr>
-          <a:xfrm>
-            <a:off x="6062472" y="3813048"/>
-            <a:ext cx="2459736" cy="722376"/>
-          </a:xfrm>
-          <a:prstGeom prst="rect">
-            <a:avLst/>
-          </a:prstGeom>
-          <a:noFill/>
-          <a:ln/>
-        </p:spPr>
-        <p:txBody>
-          <a:bodyPr wrap="square" lIns="0" tIns="0" rIns="0" bIns="0" rtlCol="0" anchor="t"/>
-          <a:lstStyle/>
-          <a:p>
-            <a:pPr indent="0" marL="0">
-              <a:buNone/>
-            </a:pPr>
-            <a:r>
-              <a:rPr lang="en-US" sz="1400" dirty="0">
-                <a:solidFill>
-                  <a:schemeClr val="tx1"/>
-                </a:solidFill>
-              </a:rPr>
-              <a:t>Choosing the budget by PSNR can miss the cliff: check the nuclei</a:t>
+              <a:t>blending two neighbouring frames (22.7 dB) beat the 4D models between frames. Our 4D fits were under-optimised, and the data are synthetic.</a:t>
             </a:r>
             <a:endParaRPr lang="en-US" sz="1400" dirty="0"/>
           </a:p>
@@ -12308,8 +13514,8 @@
         </p:nvSpPr>
         <p:spPr>
           <a:xfrm>
-            <a:off x="548640" y="411480"/>
-            <a:ext cx="5486400" cy="731520"/>
+            <a:off x="457200" y="256032"/>
+            <a:ext cx="8229600" cy="640080"/>
           </a:xfrm>
           <a:prstGeom prst="rect">
             <a:avLst/>
@@ -12325,29 +13531,27 @@
               <a:buNone/>
             </a:pPr>
             <a:r>
-              <a:rPr lang="en-US" sz="3200" b="1" dirty="0">
-                <a:solidFill>
-                  <a:schemeClr val="bg1"/>
+              <a:rPr lang="en-US" sz="2800" b="1" dirty="0">
+                <a:solidFill>
+                  <a:schemeClr val="tx1"/>
                 </a:solidFill>
               </a:rPr>
-              <a:t>What we learned</a:t>
-            </a:r>
-            <a:endParaRPr lang="en-US" sz="3200" dirty="0"/>
-          </a:p>
-        </p:txBody>
-      </p:sp>
-      <p:sp>
-        <p:nvSpPr>
-          <p:cNvPr id="3" name="Text 0"/>
-          <p:cNvSpPr/>
-          <p:nvPr>
-            <p:ph idx="101" type="body" hasCustomPrompt="1"/>
-          </p:nvPr>
-        </p:nvSpPr>
-        <p:spPr>
-          <a:xfrm>
-            <a:off x="548640" y="1371600"/>
-            <a:ext cx="5486400" cy="3200400"/>
+              <a:t>Against the state of the art, at the same file size</a:t>
+            </a:r>
+            <a:endParaRPr lang="en-US" sz="2800" dirty="0"/>
+          </a:p>
+        </p:txBody>
+      </p:sp>
+      <p:sp>
+        <p:nvSpPr>
+          <p:cNvPr id="3" name="Text 1"/>
+          <p:cNvSpPr txBox="1"/>
+          <p:nvPr/>
+        </p:nvSpPr>
+        <p:spPr>
+          <a:xfrm>
+            <a:off x="457200" y="1024128"/>
+            <a:ext cx="2011680" cy="274320"/>
           </a:xfrm>
           <a:prstGeom prst="rect">
             <a:avLst/>
@@ -12359,64 +13563,24 @@
           <a:bodyPr wrap="square" lIns="0" tIns="0" rIns="0" bIns="0" rtlCol="0" anchor="t"/>
           <a:lstStyle/>
           <a:p>
-            <a:pPr algn="l" marL="342900" indent="-342900">
-              <a:spcAft>
-                <a:spcPts val="1200"/>
-              </a:spcAft>
-              <a:buSzPct val="100000"/>
-              <a:buChar char="•"/>
-            </a:pPr>
-            <a:r>
-              <a:rPr lang="en-US" sz="1700" dirty="0">
-                <a:solidFill>
-                  <a:srgbClr val="E5E7EB"/>
+            <a:pPr algn="ctr" indent="0" marL="0">
+              <a:buNone/>
+            </a:pPr>
+            <a:r>
+              <a:rPr lang="en-US" sz="1400" b="1" dirty="0">
+                <a:solidFill>
+                  <a:schemeClr val="tx1"/>
                 </a:solidFill>
               </a:rPr>
-              <a:t>Stretched blobs, one start per nucleus and a size cap made our fits find more nuclei; in the top 100, a simple blob filter still ranks them better.</a:t>
-            </a:r>
-            <a:endParaRPr lang="en-US" sz="1700" dirty="0"/>
-          </a:p>
-          <a:p>
-            <a:pPr algn="l" marL="342900" indent="-342900">
-              <a:spcAft>
-                <a:spcPts val="1200"/>
-              </a:spcAft>
-              <a:buSzPct val="100000"/>
-              <a:buChar char="•"/>
-            </a:pPr>
-            <a:r>
-              <a:rPr lang="en-US" sz="1700" dirty="0">
-                <a:solidFill>
-                  <a:srgbClr val="E5E7EB"/>
-                </a:solidFill>
-              </a:rPr>
-              <a:t>At the same file size, the better format depends on the detector and the compression: blobs help 3D Cellpose below 300×, JPEG2000 wins beyond.</a:t>
-            </a:r>
-            <a:endParaRPr lang="en-US" sz="1700" dirty="0"/>
-          </a:p>
-          <a:p>
-            <a:pPr algn="l" marL="342900" indent="-342900">
-              <a:spcAft>
-                <a:spcPts val="1200"/>
-              </a:spcAft>
-              <a:buSzPct val="100000"/>
-              <a:buChar char="•"/>
-            </a:pPr>
-            <a:r>
-              <a:rPr lang="en-US" sz="1700" dirty="0">
-                <a:solidFill>
-                  <a:srgbClr val="E5E7EB"/>
-                </a:solidFill>
-              </a:rPr>
-              <a:t>Viewing and measuring need separate checks: PSNR cannot choose the format.</a:t>
-            </a:r>
-            <a:endParaRPr lang="en-US" sz="1700" dirty="0"/>
+              <a:t>Original</a:t>
+            </a:r>
+            <a:endParaRPr lang="en-US" sz="1400" dirty="0"/>
           </a:p>
         </p:txBody>
       </p:sp>
       <p:pic>
         <p:nvPicPr>
-          <p:cNvPr id="4" name="end-tribolium" descr="D:\masters\MLCV seminar\TeamProject\presentation\figs\title_tribolium.png">    </p:cNvPr>
+          <p:cNvPr id="4" name="four-raw" descr="D:\masters\MLCV seminar\TeamProject\presentation\figs\four_raw.png">    </p:cNvPr>
           <p:cNvPicPr>
             <a:picLocks noChangeAspect="1"/>
           </p:cNvPicPr>
@@ -12430,14 +13594,539 @@
         </p:blipFill>
         <p:spPr>
           <a:xfrm>
-            <a:off x="6446520" y="320040"/>
-            <a:ext cx="2331720" cy="4434840"/>
+            <a:off x="457200" y="1325880"/>
+            <a:ext cx="2011680" cy="1536192"/>
           </a:xfrm>
           <a:prstGeom prst="rect">
             <a:avLst/>
           </a:prstGeom>
         </p:spPr>
       </p:pic>
+      <p:sp>
+        <p:nvSpPr>
+          <p:cNvPr id="5" name="Text 2"/>
+          <p:cNvSpPr txBox="1"/>
+          <p:nvPr/>
+        </p:nvSpPr>
+        <p:spPr>
+          <a:xfrm>
+            <a:off x="2532888" y="1024128"/>
+            <a:ext cx="2011680" cy="274320"/>
+          </a:xfrm>
+          <a:prstGeom prst="rect">
+            <a:avLst/>
+          </a:prstGeom>
+          <a:noFill/>
+          <a:ln/>
+        </p:spPr>
+        <p:txBody>
+          <a:bodyPr wrap="square" lIns="0" tIns="0" rIns="0" bIns="0" rtlCol="0" anchor="t"/>
+          <a:lstStyle/>
+          <a:p>
+            <a:pPr algn="ctr" indent="0" marL="0">
+              <a:buNone/>
+            </a:pPr>
+            <a:r>
+              <a:rPr lang="en-US" sz="1400" b="1" dirty="0">
+                <a:solidFill>
+                  <a:schemeClr val="tx1"/>
+                </a:solidFill>
+              </a:rPr>
+              <a:t>JPEG-XL 82×</a:t>
+            </a:r>
+            <a:endParaRPr lang="en-US" sz="1400" dirty="0"/>
+          </a:p>
+        </p:txBody>
+      </p:sp>
+      <p:pic>
+        <p:nvPicPr>
+          <p:cNvPr id="6" name="four-jpegxl" descr="D:\masters\MLCV seminar\TeamProject\presentation\figs\four_jpegxl.png">    </p:cNvPr>
+          <p:cNvPicPr>
+            <a:picLocks noChangeAspect="1"/>
+          </p:cNvPicPr>
+          <p:nvPr/>
+        </p:nvPicPr>
+        <p:blipFill>
+          <a:blip r:embed="rId2"/>
+          <a:stretch>
+            <a:fillRect/>
+          </a:stretch>
+        </p:blipFill>
+        <p:spPr>
+          <a:xfrm>
+            <a:off x="2532888" y="1325880"/>
+            <a:ext cx="2011680" cy="1536192"/>
+          </a:xfrm>
+          <a:prstGeom prst="rect">
+            <a:avLst/>
+          </a:prstGeom>
+        </p:spPr>
+      </p:pic>
+      <p:sp>
+        <p:nvSpPr>
+          <p:cNvPr id="7" name="Text 3"/>
+          <p:cNvSpPr txBox="1"/>
+          <p:nvPr/>
+        </p:nvSpPr>
+        <p:spPr>
+          <a:xfrm>
+            <a:off x="2532888" y="2880360"/>
+            <a:ext cx="2011680" cy="411480"/>
+          </a:xfrm>
+          <a:prstGeom prst="rect">
+            <a:avLst/>
+          </a:prstGeom>
+          <a:noFill/>
+          <a:ln/>
+        </p:spPr>
+        <p:txBody>
+          <a:bodyPr wrap="square" lIns="0" tIns="0" rIns="0" bIns="0" rtlCol="0" anchor="t"/>
+          <a:lstStyle/>
+          <a:p>
+            <a:pPr algn="ctr" indent="0" marL="0">
+              <a:buNone/>
+            </a:pPr>
+            <a:r>
+              <a:rPr lang="en-US" sz="1200" dirty="0">
+                <a:solidFill>
+                  <a:schemeClr val="accent5"/>
+                </a:solidFill>
+              </a:rPr>
+              <a:t>100% of nuclei kept</a:t>
+            </a:r>
+            <a:endParaRPr lang="en-US" sz="1200" dirty="0"/>
+          </a:p>
+          <a:p>
+            <a:pPr algn="ctr" indent="0" marL="0">
+              <a:buNone/>
+            </a:pPr>
+            <a:r>
+              <a:rPr lang="en-US" sz="1000" dirty="0">
+                <a:solidFill>
+                  <a:schemeClr val="accent5"/>
+                </a:solidFill>
+              </a:rPr>
+              <a:t>2D Cellpose, whole frame</a:t>
+            </a:r>
+            <a:endParaRPr lang="en-US" sz="1200" dirty="0"/>
+          </a:p>
+        </p:txBody>
+      </p:sp>
+      <p:sp>
+        <p:nvSpPr>
+          <p:cNvPr id="8" name="Text 4"/>
+          <p:cNvSpPr txBox="1"/>
+          <p:nvPr/>
+        </p:nvSpPr>
+        <p:spPr>
+          <a:xfrm>
+            <a:off x="4608576" y="1024128"/>
+            <a:ext cx="2011680" cy="274320"/>
+          </a:xfrm>
+          <a:prstGeom prst="rect">
+            <a:avLst/>
+          </a:prstGeom>
+          <a:noFill/>
+          <a:ln/>
+        </p:spPr>
+        <p:txBody>
+          <a:bodyPr wrap="square" lIns="0" tIns="0" rIns="0" bIns="0" rtlCol="0" anchor="t"/>
+          <a:lstStyle/>
+          <a:p>
+            <a:pPr algn="ctr" indent="0" marL="0">
+              <a:buNone/>
+            </a:pPr>
+            <a:r>
+              <a:rPr lang="en-US" sz="1400" b="1" dirty="0">
+                <a:solidFill>
+                  <a:schemeClr val="tx1"/>
+                </a:solidFill>
+              </a:rPr>
+              <a:t>JPEG2000 89×</a:t>
+            </a:r>
+            <a:endParaRPr lang="en-US" sz="1400" dirty="0"/>
+          </a:p>
+        </p:txBody>
+      </p:sp>
+      <p:pic>
+        <p:nvPicPr>
+          <p:cNvPr id="9" name="four-jpeg2k" descr="D:\masters\MLCV seminar\TeamProject\presentation\figs\four_jpeg2k.png">    </p:cNvPr>
+          <p:cNvPicPr>
+            <a:picLocks noChangeAspect="1"/>
+          </p:cNvPicPr>
+          <p:nvPr/>
+        </p:nvPicPr>
+        <p:blipFill>
+          <a:blip r:embed="rId3"/>
+          <a:stretch>
+            <a:fillRect/>
+          </a:stretch>
+        </p:blipFill>
+        <p:spPr>
+          <a:xfrm>
+            <a:off x="4608576" y="1325880"/>
+            <a:ext cx="2011680" cy="1536192"/>
+          </a:xfrm>
+          <a:prstGeom prst="rect">
+            <a:avLst/>
+          </a:prstGeom>
+        </p:spPr>
+      </p:pic>
+      <p:sp>
+        <p:nvSpPr>
+          <p:cNvPr id="10" name="Text 5"/>
+          <p:cNvSpPr txBox="1"/>
+          <p:nvPr/>
+        </p:nvSpPr>
+        <p:spPr>
+          <a:xfrm>
+            <a:off x="4608576" y="2880360"/>
+            <a:ext cx="2011680" cy="411480"/>
+          </a:xfrm>
+          <a:prstGeom prst="rect">
+            <a:avLst/>
+          </a:prstGeom>
+          <a:noFill/>
+          <a:ln/>
+        </p:spPr>
+        <p:txBody>
+          <a:bodyPr wrap="square" lIns="0" tIns="0" rIns="0" bIns="0" rtlCol="0" anchor="t"/>
+          <a:lstStyle/>
+          <a:p>
+            <a:pPr algn="ctr" indent="0" marL="0">
+              <a:buNone/>
+            </a:pPr>
+            <a:r>
+              <a:rPr lang="en-US" sz="1200" dirty="0">
+                <a:solidFill>
+                  <a:schemeClr val="accent5"/>
+                </a:solidFill>
+              </a:rPr>
+              <a:t>97% of nuclei kept</a:t>
+            </a:r>
+            <a:endParaRPr lang="en-US" sz="1200" dirty="0"/>
+          </a:p>
+          <a:p>
+            <a:pPr algn="ctr" indent="0" marL="0">
+              <a:buNone/>
+            </a:pPr>
+            <a:r>
+              <a:rPr lang="en-US" sz="1000" dirty="0">
+                <a:solidFill>
+                  <a:schemeClr val="accent5"/>
+                </a:solidFill>
+              </a:rPr>
+              <a:t>2D Cellpose, whole frame</a:t>
+            </a:r>
+            <a:endParaRPr lang="en-US" sz="1200" dirty="0"/>
+          </a:p>
+        </p:txBody>
+      </p:sp>
+      <p:sp>
+        <p:nvSpPr>
+          <p:cNvPr id="11" name="Text 6"/>
+          <p:cNvSpPr txBox="1"/>
+          <p:nvPr/>
+        </p:nvSpPr>
+        <p:spPr>
+          <a:xfrm>
+            <a:off x="6684264" y="1024128"/>
+            <a:ext cx="2011680" cy="274320"/>
+          </a:xfrm>
+          <a:prstGeom prst="rect">
+            <a:avLst/>
+          </a:prstGeom>
+          <a:noFill/>
+          <a:ln/>
+        </p:spPr>
+        <p:txBody>
+          <a:bodyPr wrap="square" lIns="0" tIns="0" rIns="0" bIns="0" rtlCol="0" anchor="t"/>
+          <a:lstStyle/>
+          <a:p>
+            <a:pPr algn="ctr" indent="0" marL="0">
+              <a:buNone/>
+            </a:pPr>
+            <a:r>
+              <a:rPr lang="en-US" sz="1400" b="1" dirty="0">
+                <a:solidFill>
+                  <a:schemeClr val="tx1"/>
+                </a:solidFill>
+              </a:rPr>
+              <a:t>Luxar 89×</a:t>
+            </a:r>
+            <a:endParaRPr lang="en-US" sz="1400" dirty="0"/>
+          </a:p>
+        </p:txBody>
+      </p:sp>
+      <p:pic>
+        <p:nvPicPr>
+          <p:cNvPr id="12" name="four-luxar" descr="D:\masters\MLCV seminar\TeamProject\presentation\figs\four_luxar.png">    </p:cNvPr>
+          <p:cNvPicPr>
+            <a:picLocks noChangeAspect="1"/>
+          </p:cNvPicPr>
+          <p:nvPr/>
+        </p:nvPicPr>
+        <p:blipFill>
+          <a:blip r:embed="rId4"/>
+          <a:stretch>
+            <a:fillRect/>
+          </a:stretch>
+        </p:blipFill>
+        <p:spPr>
+          <a:xfrm>
+            <a:off x="6684264" y="1325880"/>
+            <a:ext cx="2011680" cy="1536192"/>
+          </a:xfrm>
+          <a:prstGeom prst="rect">
+            <a:avLst/>
+          </a:prstGeom>
+        </p:spPr>
+      </p:pic>
+      <p:sp>
+        <p:nvSpPr>
+          <p:cNvPr id="13" name="Text 7"/>
+          <p:cNvSpPr txBox="1"/>
+          <p:nvPr/>
+        </p:nvSpPr>
+        <p:spPr>
+          <a:xfrm>
+            <a:off x="6684264" y="2880360"/>
+            <a:ext cx="2011680" cy="411480"/>
+          </a:xfrm>
+          <a:prstGeom prst="rect">
+            <a:avLst/>
+          </a:prstGeom>
+          <a:noFill/>
+          <a:ln/>
+        </p:spPr>
+        <p:txBody>
+          <a:bodyPr wrap="square" lIns="0" tIns="0" rIns="0" bIns="0" rtlCol="0" anchor="t"/>
+          <a:lstStyle/>
+          <a:p>
+            <a:pPr algn="ctr" indent="0" marL="0">
+              <a:buNone/>
+            </a:pPr>
+            <a:r>
+              <a:rPr lang="en-US" sz="1200" dirty="0">
+                <a:solidFill>
+                  <a:schemeClr val="accent5"/>
+                </a:solidFill>
+              </a:rPr>
+              <a:t>88% of nuclei kept</a:t>
+            </a:r>
+            <a:endParaRPr lang="en-US" sz="1200" dirty="0"/>
+          </a:p>
+          <a:p>
+            <a:pPr algn="ctr" indent="0" marL="0">
+              <a:buNone/>
+            </a:pPr>
+            <a:r>
+              <a:rPr lang="en-US" sz="1000" dirty="0">
+                <a:solidFill>
+                  <a:schemeClr val="accent5"/>
+                </a:solidFill>
+              </a:rPr>
+              <a:t>2D Cellpose, whole frame</a:t>
+            </a:r>
+            <a:endParaRPr lang="en-US" sz="1200" dirty="0"/>
+          </a:p>
+        </p:txBody>
+      </p:sp>
+      <p:sp>
+        <p:nvSpPr>
+          <p:cNvPr id="14" name="Text 8"/>
+          <p:cNvSpPr txBox="1"/>
+          <p:nvPr/>
+        </p:nvSpPr>
+        <p:spPr>
+          <a:xfrm>
+            <a:off x="457200" y="3429000"/>
+            <a:ext cx="2606040" cy="1188720"/>
+          </a:xfrm>
+          <a:prstGeom prst="rect">
+            <a:avLst/>
+          </a:prstGeom>
+          <a:noFill/>
+          <a:ln/>
+        </p:spPr>
+        <p:txBody>
+          <a:bodyPr wrap="square" lIns="0" tIns="0" rIns="0" bIns="0" rtlCol="0" anchor="t"/>
+          <a:lstStyle/>
+          <a:p>
+            <a:pPr indent="0" marL="0">
+              <a:buNone/>
+            </a:pPr>
+            <a:r>
+              <a:rPr lang="en-US" sz="1500" b="1" dirty="0">
+                <a:solidFill>
+                  <a:srgbClr val="E8730C"/>
+                </a:solidFill>
+              </a:rPr>
+              <a:t>Luxar (2026)</a:t>
+            </a:r>
+            <a:endParaRPr lang="en-US" sz="1500" dirty="0"/>
+          </a:p>
+          <a:p>
+            <a:pPr indent="0" marL="0">
+              <a:buNone/>
+            </a:pPr>
+            <a:r>
+              <a:rPr lang="en-US" sz="1500" dirty="0">
+                <a:solidFill>
+                  <a:schemeClr val="tx1"/>
+                </a:solidFill>
+              </a:rPr>
+              <a:t>state-of-the-art Gaussian-blob tool for microscopy</a:t>
+            </a:r>
+            <a:endParaRPr lang="en-US" sz="1500" dirty="0"/>
+          </a:p>
+        </p:txBody>
+      </p:sp>
+      <p:sp>
+        <p:nvSpPr>
+          <p:cNvPr id="15" name="Text 9"/>
+          <p:cNvSpPr txBox="1"/>
+          <p:nvPr/>
+        </p:nvSpPr>
+        <p:spPr>
+          <a:xfrm>
+            <a:off x="3246120" y="3429000"/>
+            <a:ext cx="2606040" cy="1188720"/>
+          </a:xfrm>
+          <a:prstGeom prst="rect">
+            <a:avLst/>
+          </a:prstGeom>
+          <a:noFill/>
+          <a:ln/>
+        </p:spPr>
+        <p:txBody>
+          <a:bodyPr wrap="square" lIns="0" tIns="0" rIns="0" bIns="0" rtlCol="0" anchor="t"/>
+          <a:lstStyle/>
+          <a:p>
+            <a:pPr indent="0" marL="0">
+              <a:buNone/>
+            </a:pPr>
+            <a:r>
+              <a:rPr lang="en-US" sz="1500" b="1" dirty="0">
+                <a:solidFill>
+                  <a:srgbClr val="E8730C"/>
+                </a:solidFill>
+              </a:rPr>
+              <a:t>JPEG2000</a:t>
+            </a:r>
+            <a:endParaRPr lang="en-US" sz="1500" dirty="0"/>
+          </a:p>
+          <a:p>
+            <a:pPr indent="0" marL="0">
+              <a:buNone/>
+            </a:pPr>
+            <a:r>
+              <a:rPr lang="en-US" sz="1500" dirty="0">
+                <a:solidFill>
+                  <a:schemeClr val="tx1"/>
+                </a:solidFill>
+              </a:rPr>
+              <a:t>standard image compression, set to exactly the same file size</a:t>
+            </a:r>
+            <a:endParaRPr lang="en-US" sz="1500" dirty="0"/>
+          </a:p>
+        </p:txBody>
+      </p:sp>
+      <p:sp>
+        <p:nvSpPr>
+          <p:cNvPr id="16" name="Text 10"/>
+          <p:cNvSpPr txBox="1"/>
+          <p:nvPr/>
+        </p:nvSpPr>
+        <p:spPr>
+          <a:xfrm>
+            <a:off x="6035040" y="3429000"/>
+            <a:ext cx="2606040" cy="1188720"/>
+          </a:xfrm>
+          <a:prstGeom prst="rect">
+            <a:avLst/>
+          </a:prstGeom>
+          <a:noFill/>
+          <a:ln/>
+        </p:spPr>
+        <p:txBody>
+          <a:bodyPr wrap="square" lIns="0" tIns="0" rIns="0" bIns="0" rtlCol="0" anchor="t"/>
+          <a:lstStyle/>
+          <a:p>
+            <a:pPr indent="0" marL="0">
+              <a:buNone/>
+            </a:pPr>
+            <a:r>
+              <a:rPr lang="en-US" sz="1500" b="1" dirty="0">
+                <a:solidFill>
+                  <a:srgbClr val="E8730C"/>
+                </a:solidFill>
+              </a:rPr>
+              <a:t>Test</a:t>
+            </a:r>
+            <a:endParaRPr lang="en-US" sz="1500" dirty="0"/>
+          </a:p>
+          <a:p>
+            <a:pPr indent="0" marL="0">
+              <a:buNone/>
+            </a:pPr>
+            <a:r>
+              <a:rPr lang="en-US" sz="1500" dirty="0">
+                <a:solidFill>
+                  <a:schemeClr val="tx1"/>
+                </a:solidFill>
+              </a:rPr>
+              <a:t>12 C. elegans frames from 2 embryos, 2,958 hand-marked nuclei, 4 detectors</a:t>
+            </a:r>
+            <a:endParaRPr lang="en-US" sz="1500" dirty="0"/>
+          </a:p>
+        </p:txBody>
+      </p:sp>
+      <p:sp>
+        <p:nvSpPr>
+          <p:cNvPr id="25" name="Slide Number Placeholder 0"/>
+          <p:cNvSpPr>
+            <a:spLocks noGrp="1"/>
+          </p:cNvSpPr>
+          <p:nvPr>
+            <p:ph type="sldNum" sz="quarter" idx="4294967295"/>
+          </p:nvPr>
+        </p:nvSpPr>
+        <p:spPr>
+          <a:xfrm>
+            <a:off x="8229600" y="4754880"/>
+            <a:ext cx="457200" cy="228600"/>
+          </a:xfrm>
+          <a:prstGeom prst="rect">
+            <a:avLst/>
+          </a:prstGeom>
+          <a:extLst>
+            <a:ext uri="{C572A759-6A51-4108-AA02-DFA0A04FC94B}">
+              <ma14:wrappingTextBoxFlag xmlns:ma14="http://schemas.microsoft.com/office/mac/drawingml/2011/main" val="0"/>
+            </a:ext>
+          </a:extLst>
+        </p:spPr>
+        <p:txBody>
+          <a:bodyPr/>
+          <a:lstStyle>
+            <a:lvl1pPr>
+              <a:defRPr sz="900">
+                <a:solidFill>
+                  <a:schemeClr val="accent5"/>
+                </a:solidFill>
+              </a:defRPr>
+            </a:lvl1pPr>
+          </a:lstStyle>
+          <a:p>
+            <a:pPr algn="r"/>
+            <a:fld id="{F7021451-1387-4CA6-816F-3879F97B5CBC}" type="slidenum">
+              <a:rPr b="0" lang="en-US"/>
+              <a:t>19</a:t>
+            </a:fld>
+            <a:endParaRPr lang="en-US"/>
+          </a:p>
+        </p:txBody>
+      </p:sp>
     </p:spTree>
   </p:cSld>
   <p:clrMapOvr>
@@ -12945,6 +14634,878 @@
                   <a:schemeClr val="tx1"/>
                 </a:solidFill>
               </a:rPr>
+              <a:t>Same file size: the winner depends on the detector</a:t>
+            </a:r>
+            <a:endParaRPr lang="en-US" sz="2800" dirty="0"/>
+          </a:p>
+        </p:txBody>
+      </p:sp>
+      <p:graphicFrame>
+        <p:nvGraphicFramePr>
+          <p:cNvPr id="3" name="Chart 0" descr=""/>
+          <p:cNvGraphicFramePr/>
+          <p:nvPr/>
+        </p:nvGraphicFramePr>
+        <p:xfrm>
+          <a:off x="457200" y="1051560"/>
+          <a:ext cx="5120640" cy="3429000"/>
+        </p:xfrm>
+        <a:graphic xmlns:a="http://schemas.openxmlformats.org/drawingml/2006/main">
+          <a:graphicData uri="http://schemas.openxmlformats.org/drawingml/2006/chart">
+            <c:chart xmlns:c="http://schemas.openxmlformats.org/drawingml/2006/chart" r:id="rId1"/>
+          </a:graphicData>
+        </a:graphic>
+      </p:graphicFrame>
+      <p:sp>
+        <p:nvSpPr>
+          <p:cNvPr id="4" name="psnr-card"/>
+          <p:cNvSpPr/>
+          <p:nvPr/>
+        </p:nvSpPr>
+        <p:spPr>
+          <a:xfrm>
+            <a:off x="5806440" y="1143000"/>
+            <a:ext cx="2880360" cy="1417320"/>
+          </a:xfrm>
+          <a:prstGeom prst="roundRect">
+            <a:avLst>
+              <a:gd name="adj" fmla="val 5161"/>
+            </a:avLst>
+          </a:prstGeom>
+          <a:solidFill>
+            <a:schemeClr val="bg2"/>
+          </a:solidFill>
+          <a:ln w="12700">
+            <a:solidFill>
+              <a:schemeClr val="bg2"/>
+            </a:solidFill>
+            <a:prstDash val="solid"/>
+          </a:ln>
+        </p:spPr>
+      </p:sp>
+      <p:sp>
+        <p:nvSpPr>
+          <p:cNvPr id="5" name="Text 2"/>
+          <p:cNvSpPr txBox="1"/>
+          <p:nvPr/>
+        </p:nvSpPr>
+        <p:spPr>
+          <a:xfrm>
+            <a:off x="5989320" y="1298448"/>
+            <a:ext cx="2560320" cy="1097280"/>
+          </a:xfrm>
+          <a:prstGeom prst="rect">
+            <a:avLst/>
+          </a:prstGeom>
+          <a:noFill/>
+          <a:ln/>
+        </p:spPr>
+        <p:txBody>
+          <a:bodyPr wrap="square" lIns="0" tIns="0" rIns="0" bIns="0" rtlCol="0" anchor="t"/>
+          <a:lstStyle/>
+          <a:p>
+            <a:pPr indent="0" marL="0">
+              <a:buNone/>
+            </a:pPr>
+            <a:r>
+              <a:rPr lang="en-US" sz="1800" b="1" dirty="0">
+                <a:solidFill>
+                  <a:schemeClr val="tx1"/>
+                </a:solidFill>
+              </a:rPr>
+              <a:t>PSNR: JPEG2000 better</a:t>
+            </a:r>
+            <a:endParaRPr lang="en-US" sz="1800" dirty="0"/>
+          </a:p>
+          <a:p>
+            <a:pPr indent="0" marL="0">
+              <a:buNone/>
+            </a:pPr>
+            <a:r>
+              <a:rPr lang="en-US" sz="1800" dirty="0">
+                <a:solidFill>
+                  <a:schemeClr val="tx1"/>
+                </a:solidFill>
+              </a:rPr>
+              <a:t>on 12 of 12 frames</a:t>
+            </a:r>
+            <a:endParaRPr lang="en-US" sz="1800" dirty="0"/>
+          </a:p>
+        </p:txBody>
+      </p:sp>
+      <p:sp>
+        <p:nvSpPr>
+          <p:cNvPr id="6" name="detectors-card"/>
+          <p:cNvSpPr/>
+          <p:nvPr/>
+        </p:nvSpPr>
+        <p:spPr>
+          <a:xfrm>
+            <a:off x="5806440" y="2697480"/>
+            <a:ext cx="2880360" cy="1783080"/>
+          </a:xfrm>
+          <a:prstGeom prst="roundRect">
+            <a:avLst>
+              <a:gd name="adj" fmla="val 4103"/>
+            </a:avLst>
+          </a:prstGeom>
+          <a:solidFill>
+            <a:schemeClr val="bg2"/>
+          </a:solidFill>
+          <a:ln w="12700">
+            <a:solidFill>
+              <a:schemeClr val="bg2"/>
+            </a:solidFill>
+            <a:prstDash val="solid"/>
+          </a:ln>
+        </p:spPr>
+      </p:sp>
+      <p:sp>
+        <p:nvSpPr>
+          <p:cNvPr id="7" name="Text 4"/>
+          <p:cNvSpPr txBox="1"/>
+          <p:nvPr/>
+        </p:nvSpPr>
+        <p:spPr>
+          <a:xfrm>
+            <a:off x="5989320" y="2834640"/>
+            <a:ext cx="2560320" cy="1554480"/>
+          </a:xfrm>
+          <a:prstGeom prst="rect">
+            <a:avLst/>
+          </a:prstGeom>
+          <a:noFill/>
+          <a:ln/>
+        </p:spPr>
+        <p:txBody>
+          <a:bodyPr wrap="square" lIns="0" tIns="0" rIns="0" bIns="0" rtlCol="0" anchor="t"/>
+          <a:lstStyle/>
+          <a:p>
+            <a:pPr indent="0" marL="0">
+              <a:buNone/>
+            </a:pPr>
+            <a:r>
+              <a:rPr lang="en-US" sz="1500" b="1" dirty="0">
+                <a:solidFill>
+                  <a:schemeClr val="tx1"/>
+                </a:solidFill>
+              </a:rPr>
+              <a:t>Detectors disagree</a:t>
+            </a:r>
+            <a:endParaRPr lang="en-US" sz="1500" dirty="0"/>
+          </a:p>
+          <a:p>
+            <a:pPr indent="0" marL="0">
+              <a:buNone/>
+            </a:pPr>
+            <a:r>
+              <a:rPr lang="en-US" sz="1500" dirty="0">
+                <a:solidFill>
+                  <a:schemeClr val="tx1"/>
+                </a:solidFill>
+              </a:rPr>
+              <a:t>Cellpose 3D prefers blobs; watershed and Cellpose 2D prefer JPEG2000; all prefer JPEG2000 past 300×</a:t>
+            </a:r>
+            <a:endParaRPr lang="en-US" sz="1500" dirty="0"/>
+          </a:p>
+        </p:txBody>
+      </p:sp>
+      <p:sp>
+        <p:nvSpPr>
+          <p:cNvPr id="25" name="Slide Number Placeholder 0"/>
+          <p:cNvSpPr>
+            <a:spLocks noGrp="1"/>
+          </p:cNvSpPr>
+          <p:nvPr>
+            <p:ph type="sldNum" sz="quarter" idx="4294967295"/>
+          </p:nvPr>
+        </p:nvSpPr>
+        <p:spPr>
+          <a:xfrm>
+            <a:off x="8229600" y="4754880"/>
+            <a:ext cx="457200" cy="228600"/>
+          </a:xfrm>
+          <a:prstGeom prst="rect">
+            <a:avLst/>
+          </a:prstGeom>
+          <a:extLst>
+            <a:ext uri="{C572A759-6A51-4108-AA02-DFA0A04FC94B}">
+              <ma14:wrappingTextBoxFlag xmlns:ma14="http://schemas.microsoft.com/office/mac/drawingml/2011/main" val="0"/>
+            </a:ext>
+          </a:extLst>
+        </p:spPr>
+        <p:txBody>
+          <a:bodyPr/>
+          <a:lstStyle>
+            <a:lvl1pPr>
+              <a:defRPr sz="900">
+                <a:solidFill>
+                  <a:schemeClr val="accent5"/>
+                </a:solidFill>
+              </a:defRPr>
+            </a:lvl1pPr>
+          </a:lstStyle>
+          <a:p>
+            <a:pPr algn="r"/>
+            <a:fld id="{F7021451-1387-4CA6-816F-3879F97B5CBC}" type="slidenum">
+              <a:rPr b="0" lang="en-US"/>
+              <a:t>20</a:t>
+            </a:fld>
+            <a:endParaRPr lang="en-US"/>
+          </a:p>
+        </p:txBody>
+      </p:sp>
+    </p:spTree>
+  </p:cSld>
+  <p:clrMapOvr>
+    <a:masterClrMapping/>
+  </p:clrMapOvr>
+</p:sld>
+</file>
+
+<file path=ppt/slides/slide21.xml><?xml version="1.0" encoding="utf-8"?>
+<p:sld xmlns:a="http://schemas.openxmlformats.org/drawingml/2006/main" xmlns:r="http://schemas.openxmlformats.org/officeDocument/2006/relationships" xmlns:p="http://schemas.openxmlformats.org/presentationml/2006/main">
+  <p:cSld name="Slide 21">
+    <p:spTree>
+      <p:nvGrpSpPr>
+        <p:cNvPr id="1" name=""/>
+        <p:cNvGrpSpPr/>
+        <p:nvPr/>
+      </p:nvGrpSpPr>
+      <p:grpSpPr>
+        <a:xfrm>
+          <a:off x="0" y="0"/>
+          <a:ext cx="0" cy="0"/>
+          <a:chOff x="0" y="0"/>
+          <a:chExt cx="0" cy="0"/>
+        </a:xfrm>
+      </p:grpSpPr>
+      <p:sp>
+        <p:nvSpPr>
+          <p:cNvPr id="2" name="Text 0"/>
+          <p:cNvSpPr/>
+          <p:nvPr>
+            <p:ph idx="100" type="title" hasCustomPrompt="1"/>
+          </p:nvPr>
+        </p:nvSpPr>
+        <p:spPr>
+          <a:xfrm>
+            <a:off x="457200" y="256032"/>
+            <a:ext cx="8229600" cy="640080"/>
+          </a:xfrm>
+          <a:prstGeom prst="rect">
+            <a:avLst/>
+          </a:prstGeom>
+          <a:noFill/>
+          <a:ln/>
+        </p:spPr>
+        <p:txBody>
+          <a:bodyPr wrap="square" lIns="0" tIns="0" rIns="0" bIns="0" rtlCol="0" anchor="ctr"/>
+          <a:lstStyle/>
+          <a:p>
+            <a:pPr algn="l" indent="0" marL="0">
+              <a:buNone/>
+            </a:pPr>
+            <a:r>
+              <a:rPr lang="en-US" sz="2800" b="1" dirty="0">
+                <a:solidFill>
+                  <a:schemeClr val="tx1"/>
+                </a:solidFill>
+              </a:rPr>
+              <a:t>C. elegans: nuclei vanish below ~3 blobs each</a:t>
+            </a:r>
+            <a:endParaRPr lang="en-US" sz="2800" dirty="0"/>
+          </a:p>
+        </p:txBody>
+      </p:sp>
+      <p:pic>
+        <p:nvPicPr>
+          <p:cNvPr id="3" name="cliff" descr="D:\masters\MLCV seminar\TeamProject\presentation\figs\cliff_deck.png">    </p:cNvPr>
+          <p:cNvPicPr>
+            <a:picLocks noChangeAspect="1"/>
+          </p:cNvPicPr>
+          <p:nvPr/>
+        </p:nvPicPr>
+        <p:blipFill>
+          <a:blip r:embed="rId1"/>
+          <a:stretch>
+            <a:fillRect/>
+          </a:stretch>
+        </p:blipFill>
+        <p:spPr>
+          <a:xfrm>
+            <a:off x="457200" y="1097280"/>
+            <a:ext cx="5257800" cy="3108960"/>
+          </a:xfrm>
+          <a:prstGeom prst="rect">
+            <a:avLst/>
+          </a:prstGeom>
+        </p:spPr>
+      </p:pic>
+      <p:sp>
+        <p:nvSpPr>
+          <p:cNvPr id="4" name="step-card-0"/>
+          <p:cNvSpPr/>
+          <p:nvPr/>
+        </p:nvSpPr>
+        <p:spPr>
+          <a:xfrm>
+            <a:off x="5897880" y="1051560"/>
+            <a:ext cx="2788920" cy="1143000"/>
+          </a:xfrm>
+          <a:prstGeom prst="roundRect">
+            <a:avLst>
+              <a:gd name="adj" fmla="val 6400"/>
+            </a:avLst>
+          </a:prstGeom>
+          <a:solidFill>
+            <a:schemeClr val="bg2"/>
+          </a:solidFill>
+          <a:ln w="12700">
+            <a:solidFill>
+              <a:schemeClr val="bg2"/>
+            </a:solidFill>
+            <a:prstDash val="solid"/>
+          </a:ln>
+        </p:spPr>
+      </p:sp>
+      <p:sp>
+        <p:nvSpPr>
+          <p:cNvPr id="5" name="Text 2"/>
+          <p:cNvSpPr txBox="1"/>
+          <p:nvPr/>
+        </p:nvSpPr>
+        <p:spPr>
+          <a:xfrm>
+            <a:off x="6062472" y="1143000"/>
+            <a:ext cx="2459736" cy="228600"/>
+          </a:xfrm>
+          <a:prstGeom prst="rect">
+            <a:avLst/>
+          </a:prstGeom>
+          <a:noFill/>
+          <a:ln/>
+        </p:spPr>
+        <p:txBody>
+          <a:bodyPr wrap="square" lIns="0" tIns="0" rIns="0" bIns="0" rtlCol="0" anchor="t"/>
+          <a:lstStyle/>
+          <a:p>
+            <a:pPr indent="0" marL="0">
+              <a:buNone/>
+            </a:pPr>
+            <a:r>
+              <a:rPr lang="en-US" sz="1200" b="1" dirty="0">
+                <a:solidFill>
+                  <a:schemeClr val="accent1"/>
+                </a:solidFill>
+              </a:rPr>
+              <a:t>WHAT WE SEE</a:t>
+            </a:r>
+            <a:endParaRPr lang="en-US" sz="1200" dirty="0"/>
+          </a:p>
+        </p:txBody>
+      </p:sp>
+      <p:sp>
+        <p:nvSpPr>
+          <p:cNvPr id="6" name="Text 3"/>
+          <p:cNvSpPr txBox="1"/>
+          <p:nvPr/>
+        </p:nvSpPr>
+        <p:spPr>
+          <a:xfrm>
+            <a:off x="6062472" y="1399032"/>
+            <a:ext cx="2459736" cy="722376"/>
+          </a:xfrm>
+          <a:prstGeom prst="rect">
+            <a:avLst/>
+          </a:prstGeom>
+          <a:noFill/>
+          <a:ln/>
+        </p:spPr>
+        <p:txBody>
+          <a:bodyPr wrap="square" lIns="0" tIns="0" rIns="0" bIns="0" rtlCol="0" anchor="t"/>
+          <a:lstStyle/>
+          <a:p>
+            <a:pPr indent="0" marL="0">
+              <a:buNone/>
+            </a:pPr>
+            <a:r>
+              <a:rPr lang="en-US" sz="1400" dirty="0">
+                <a:solidFill>
+                  <a:schemeClr val="tx1"/>
+                </a:solidFill>
+              </a:rPr>
+              <a:t>Under LoG, nuclei kept crosses 90% at 1.1–3.1 blobs per nucleus (all 12 frames)</a:t>
+            </a:r>
+            <a:endParaRPr lang="en-US" sz="1400" dirty="0"/>
+          </a:p>
+        </p:txBody>
+      </p:sp>
+      <p:sp>
+        <p:nvSpPr>
+          <p:cNvPr id="7" name="step-card-1"/>
+          <p:cNvSpPr/>
+          <p:nvPr/>
+        </p:nvSpPr>
+        <p:spPr>
+          <a:xfrm>
+            <a:off x="5897880" y="2258568"/>
+            <a:ext cx="2788920" cy="1143000"/>
+          </a:xfrm>
+          <a:prstGeom prst="roundRect">
+            <a:avLst>
+              <a:gd name="adj" fmla="val 6400"/>
+            </a:avLst>
+          </a:prstGeom>
+          <a:solidFill>
+            <a:schemeClr val="bg2"/>
+          </a:solidFill>
+          <a:ln w="12700">
+            <a:solidFill>
+              <a:schemeClr val="bg2"/>
+            </a:solidFill>
+            <a:prstDash val="solid"/>
+          </a:ln>
+        </p:spPr>
+      </p:sp>
+      <p:sp>
+        <p:nvSpPr>
+          <p:cNvPr id="8" name="Text 5"/>
+          <p:cNvSpPr txBox="1"/>
+          <p:nvPr/>
+        </p:nvSpPr>
+        <p:spPr>
+          <a:xfrm>
+            <a:off x="6062472" y="2350008"/>
+            <a:ext cx="2459736" cy="228600"/>
+          </a:xfrm>
+          <a:prstGeom prst="rect">
+            <a:avLst/>
+          </a:prstGeom>
+          <a:noFill/>
+          <a:ln/>
+        </p:spPr>
+        <p:txBody>
+          <a:bodyPr wrap="square" lIns="0" tIns="0" rIns="0" bIns="0" rtlCol="0" anchor="t"/>
+          <a:lstStyle/>
+          <a:p>
+            <a:pPr indent="0" marL="0">
+              <a:buNone/>
+            </a:pPr>
+            <a:r>
+              <a:rPr lang="en-US" sz="1200" b="1" dirty="0">
+                <a:solidFill>
+                  <a:schemeClr val="accent1"/>
+                </a:solidFill>
+              </a:rPr>
+              <a:t>PSNR</a:t>
+            </a:r>
+            <a:endParaRPr lang="en-US" sz="1200" dirty="0"/>
+          </a:p>
+        </p:txBody>
+      </p:sp>
+      <p:sp>
+        <p:nvSpPr>
+          <p:cNvPr id="9" name="Text 6"/>
+          <p:cNvSpPr txBox="1"/>
+          <p:nvPr/>
+        </p:nvSpPr>
+        <p:spPr>
+          <a:xfrm>
+            <a:off x="6062472" y="2606040"/>
+            <a:ext cx="2459736" cy="722376"/>
+          </a:xfrm>
+          <a:prstGeom prst="rect">
+            <a:avLst/>
+          </a:prstGeom>
+          <a:noFill/>
+          <a:ln/>
+        </p:spPr>
+        <p:txBody>
+          <a:bodyPr wrap="square" lIns="0" tIns="0" rIns="0" bIns="0" rtlCol="0" anchor="t"/>
+          <a:lstStyle/>
+          <a:p>
+            <a:pPr indent="0" marL="0">
+              <a:buNone/>
+            </a:pPr>
+            <a:r>
+              <a:rPr lang="en-US" sz="1400" dirty="0">
+                <a:solidFill>
+                  <a:schemeClr val="tx1"/>
+                </a:solidFill>
+              </a:rPr>
+              <a:t>For budgets of 1,000+ blobs it moves at most 2.6 dB per frame</a:t>
+            </a:r>
+            <a:endParaRPr lang="en-US" sz="1400" dirty="0"/>
+          </a:p>
+        </p:txBody>
+      </p:sp>
+      <p:sp>
+        <p:nvSpPr>
+          <p:cNvPr id="10" name="step-card-2"/>
+          <p:cNvSpPr/>
+          <p:nvPr/>
+        </p:nvSpPr>
+        <p:spPr>
+          <a:xfrm>
+            <a:off x="5897880" y="3465576"/>
+            <a:ext cx="2788920" cy="1143000"/>
+          </a:xfrm>
+          <a:prstGeom prst="roundRect">
+            <a:avLst>
+              <a:gd name="adj" fmla="val 6400"/>
+            </a:avLst>
+          </a:prstGeom>
+          <a:solidFill>
+            <a:schemeClr val="bg2"/>
+          </a:solidFill>
+          <a:ln w="12700">
+            <a:solidFill>
+              <a:schemeClr val="bg2"/>
+            </a:solidFill>
+            <a:prstDash val="solid"/>
+          </a:ln>
+        </p:spPr>
+      </p:sp>
+      <p:sp>
+        <p:nvSpPr>
+          <p:cNvPr id="11" name="Text 8"/>
+          <p:cNvSpPr txBox="1"/>
+          <p:nvPr/>
+        </p:nvSpPr>
+        <p:spPr>
+          <a:xfrm>
+            <a:off x="6062472" y="3557016"/>
+            <a:ext cx="2459736" cy="228600"/>
+          </a:xfrm>
+          <a:prstGeom prst="rect">
+            <a:avLst/>
+          </a:prstGeom>
+          <a:noFill/>
+          <a:ln/>
+        </p:spPr>
+        <p:txBody>
+          <a:bodyPr wrap="square" lIns="0" tIns="0" rIns="0" bIns="0" rtlCol="0" anchor="t"/>
+          <a:lstStyle/>
+          <a:p>
+            <a:pPr indent="0" marL="0">
+              <a:buNone/>
+            </a:pPr>
+            <a:r>
+              <a:rPr lang="en-US" sz="1200" b="1" dirty="0">
+                <a:solidFill>
+                  <a:schemeClr val="accent1"/>
+                </a:solidFill>
+              </a:rPr>
+              <a:t>SO</a:t>
+            </a:r>
+            <a:endParaRPr lang="en-US" sz="1200" dirty="0"/>
+          </a:p>
+        </p:txBody>
+      </p:sp>
+      <p:sp>
+        <p:nvSpPr>
+          <p:cNvPr id="12" name="Text 9"/>
+          <p:cNvSpPr txBox="1"/>
+          <p:nvPr/>
+        </p:nvSpPr>
+        <p:spPr>
+          <a:xfrm>
+            <a:off x="6062472" y="3813048"/>
+            <a:ext cx="2459736" cy="722376"/>
+          </a:xfrm>
+          <a:prstGeom prst="rect">
+            <a:avLst/>
+          </a:prstGeom>
+          <a:noFill/>
+          <a:ln/>
+        </p:spPr>
+        <p:txBody>
+          <a:bodyPr wrap="square" lIns="0" tIns="0" rIns="0" bIns="0" rtlCol="0" anchor="t"/>
+          <a:lstStyle/>
+          <a:p>
+            <a:pPr indent="0" marL="0">
+              <a:buNone/>
+            </a:pPr>
+            <a:r>
+              <a:rPr lang="en-US" sz="1400" dirty="0">
+                <a:solidFill>
+                  <a:schemeClr val="tx1"/>
+                </a:solidFill>
+              </a:rPr>
+              <a:t>Choosing the budget by PSNR can miss the cliff: check the nuclei</a:t>
+            </a:r>
+            <a:endParaRPr lang="en-US" sz="1400" dirty="0"/>
+          </a:p>
+        </p:txBody>
+      </p:sp>
+      <p:sp>
+        <p:nvSpPr>
+          <p:cNvPr id="25" name="Slide Number Placeholder 0"/>
+          <p:cNvSpPr>
+            <a:spLocks noGrp="1"/>
+          </p:cNvSpPr>
+          <p:nvPr>
+            <p:ph type="sldNum" sz="quarter" idx="4294967295"/>
+          </p:nvPr>
+        </p:nvSpPr>
+        <p:spPr>
+          <a:xfrm>
+            <a:off x="8229600" y="4754880"/>
+            <a:ext cx="457200" cy="228600"/>
+          </a:xfrm>
+          <a:prstGeom prst="rect">
+            <a:avLst/>
+          </a:prstGeom>
+          <a:extLst>
+            <a:ext uri="{C572A759-6A51-4108-AA02-DFA0A04FC94B}">
+              <ma14:wrappingTextBoxFlag xmlns:ma14="http://schemas.microsoft.com/office/mac/drawingml/2011/main" val="0"/>
+            </a:ext>
+          </a:extLst>
+        </p:spPr>
+        <p:txBody>
+          <a:bodyPr/>
+          <a:lstStyle>
+            <a:lvl1pPr>
+              <a:defRPr sz="900">
+                <a:solidFill>
+                  <a:schemeClr val="accent5"/>
+                </a:solidFill>
+              </a:defRPr>
+            </a:lvl1pPr>
+          </a:lstStyle>
+          <a:p>
+            <a:pPr algn="r"/>
+            <a:fld id="{F7021451-1387-4CA6-816F-3879F97B5CBC}" type="slidenum">
+              <a:rPr b="0" lang="en-US"/>
+              <a:t>21</a:t>
+            </a:fld>
+            <a:endParaRPr lang="en-US"/>
+          </a:p>
+        </p:txBody>
+      </p:sp>
+    </p:spTree>
+  </p:cSld>
+  <p:clrMapOvr>
+    <a:masterClrMapping/>
+  </p:clrMapOvr>
+</p:sld>
+</file>
+
+<file path=ppt/slides/slide22.xml><?xml version="1.0" encoding="utf-8"?>
+<p:sld xmlns:a="http://schemas.openxmlformats.org/drawingml/2006/main" xmlns:r="http://schemas.openxmlformats.org/officeDocument/2006/relationships" xmlns:p="http://schemas.openxmlformats.org/presentationml/2006/main">
+  <p:cSld name="Slide 22">
+    <p:spTree>
+      <p:nvGrpSpPr>
+        <p:cNvPr id="1" name=""/>
+        <p:cNvGrpSpPr/>
+        <p:nvPr/>
+      </p:nvGrpSpPr>
+      <p:grpSpPr>
+        <a:xfrm>
+          <a:off x="0" y="0"/>
+          <a:ext cx="0" cy="0"/>
+          <a:chOff x="0" y="0"/>
+          <a:chExt cx="0" cy="0"/>
+        </a:xfrm>
+      </p:grpSpPr>
+      <p:sp>
+        <p:nvSpPr>
+          <p:cNvPr id="2" name="Text 0"/>
+          <p:cNvSpPr/>
+          <p:nvPr>
+            <p:ph idx="100" type="title" hasCustomPrompt="1"/>
+          </p:nvPr>
+        </p:nvSpPr>
+        <p:spPr>
+          <a:xfrm>
+            <a:off x="548640" y="411480"/>
+            <a:ext cx="5486400" cy="731520"/>
+          </a:xfrm>
+          <a:prstGeom prst="rect">
+            <a:avLst/>
+          </a:prstGeom>
+          <a:noFill/>
+          <a:ln/>
+        </p:spPr>
+        <p:txBody>
+          <a:bodyPr wrap="square" lIns="0" tIns="0" rIns="0" bIns="0" rtlCol="0" anchor="ctr"/>
+          <a:lstStyle/>
+          <a:p>
+            <a:pPr algn="l" indent="0" marL="0">
+              <a:buNone/>
+            </a:pPr>
+            <a:r>
+              <a:rPr lang="en-US" sz="3200" b="1" dirty="0">
+                <a:solidFill>
+                  <a:schemeClr val="bg1"/>
+                </a:solidFill>
+              </a:rPr>
+              <a:t>What we learned</a:t>
+            </a:r>
+            <a:endParaRPr lang="en-US" sz="3200" dirty="0"/>
+          </a:p>
+        </p:txBody>
+      </p:sp>
+      <p:sp>
+        <p:nvSpPr>
+          <p:cNvPr id="3" name="Text 0"/>
+          <p:cNvSpPr/>
+          <p:nvPr>
+            <p:ph idx="101" type="body" hasCustomPrompt="1"/>
+          </p:nvPr>
+        </p:nvSpPr>
+        <p:spPr>
+          <a:xfrm>
+            <a:off x="548640" y="1371600"/>
+            <a:ext cx="5486400" cy="3200400"/>
+          </a:xfrm>
+          <a:prstGeom prst="rect">
+            <a:avLst/>
+          </a:prstGeom>
+          <a:noFill/>
+          <a:ln/>
+        </p:spPr>
+        <p:txBody>
+          <a:bodyPr wrap="square" lIns="0" tIns="0" rIns="0" bIns="0" rtlCol="0" anchor="t"/>
+          <a:lstStyle/>
+          <a:p>
+            <a:pPr algn="l" marL="342900" indent="-342900">
+              <a:spcAft>
+                <a:spcPts val="1200"/>
+              </a:spcAft>
+              <a:buSzPct val="100000"/>
+              <a:buChar char="•"/>
+            </a:pPr>
+            <a:r>
+              <a:rPr lang="en-US" sz="1700" dirty="0">
+                <a:solidFill>
+                  <a:srgbClr val="E5E7EB"/>
+                </a:solidFill>
+              </a:rPr>
+              <a:t>Stretched blobs, one start per nucleus and a size cap made our fits find more nuclei; in the top 100, a simple blob filter still ranks them better.</a:t>
+            </a:r>
+            <a:endParaRPr lang="en-US" sz="1700" dirty="0"/>
+          </a:p>
+          <a:p>
+            <a:pPr algn="l" marL="342900" indent="-342900">
+              <a:spcAft>
+                <a:spcPts val="1200"/>
+              </a:spcAft>
+              <a:buSzPct val="100000"/>
+              <a:buChar char="•"/>
+            </a:pPr>
+            <a:r>
+              <a:rPr lang="en-US" sz="1700" dirty="0">
+                <a:solidFill>
+                  <a:srgbClr val="E5E7EB"/>
+                </a:solidFill>
+              </a:rPr>
+              <a:t>At the same file size, the better format depends on the detector and the compression: blobs help 3D Cellpose below 300×, JPEG2000 wins beyond.</a:t>
+            </a:r>
+            <a:endParaRPr lang="en-US" sz="1700" dirty="0"/>
+          </a:p>
+          <a:p>
+            <a:pPr algn="l" marL="342900" indent="-342900">
+              <a:spcAft>
+                <a:spcPts val="1200"/>
+              </a:spcAft>
+              <a:buSzPct val="100000"/>
+              <a:buChar char="•"/>
+            </a:pPr>
+            <a:r>
+              <a:rPr lang="en-US" sz="1700" dirty="0">
+                <a:solidFill>
+                  <a:srgbClr val="E5E7EB"/>
+                </a:solidFill>
+              </a:rPr>
+              <a:t>Viewing and measuring need separate checks: PSNR cannot choose the format.</a:t>
+            </a:r>
+            <a:endParaRPr lang="en-US" sz="1700" dirty="0"/>
+          </a:p>
+        </p:txBody>
+      </p:sp>
+      <p:pic>
+        <p:nvPicPr>
+          <p:cNvPr id="4" name="end-tribolium" descr="D:\masters\MLCV seminar\TeamProject\presentation\figs\title_tribolium.png">    </p:cNvPr>
+          <p:cNvPicPr>
+            <a:picLocks noChangeAspect="1"/>
+          </p:cNvPicPr>
+          <p:nvPr/>
+        </p:nvPicPr>
+        <p:blipFill>
+          <a:blip r:embed="rId1"/>
+          <a:stretch>
+            <a:fillRect/>
+          </a:stretch>
+        </p:blipFill>
+        <p:spPr>
+          <a:xfrm>
+            <a:off x="6446520" y="320040"/>
+            <a:ext cx="2331720" cy="4434840"/>
+          </a:xfrm>
+          <a:prstGeom prst="rect">
+            <a:avLst/>
+          </a:prstGeom>
+        </p:spPr>
+      </p:pic>
+    </p:spTree>
+  </p:cSld>
+  <p:clrMapOvr>
+    <a:masterClrMapping/>
+  </p:clrMapOvr>
+</p:sld>
+</file>
+
+<file path=ppt/slides/slide23.xml><?xml version="1.0" encoding="utf-8"?>
+<p:sld xmlns:a="http://schemas.openxmlformats.org/drawingml/2006/main" xmlns:r="http://schemas.openxmlformats.org/officeDocument/2006/relationships" xmlns:p="http://schemas.openxmlformats.org/presentationml/2006/main">
+  <p:cSld name="Slide 23">
+    <p:spTree>
+      <p:nvGrpSpPr>
+        <p:cNvPr id="1" name=""/>
+        <p:cNvGrpSpPr/>
+        <p:nvPr/>
+      </p:nvGrpSpPr>
+      <p:grpSpPr>
+        <a:xfrm>
+          <a:off x="0" y="0"/>
+          <a:ext cx="0" cy="0"/>
+          <a:chOff x="0" y="0"/>
+          <a:chExt cx="0" cy="0"/>
+        </a:xfrm>
+      </p:grpSpPr>
+      <p:sp>
+        <p:nvSpPr>
+          <p:cNvPr id="2" name="Text 0"/>
+          <p:cNvSpPr/>
+          <p:nvPr>
+            <p:ph idx="100" type="title" hasCustomPrompt="1"/>
+          </p:nvPr>
+        </p:nvSpPr>
+        <p:spPr>
+          <a:xfrm>
+            <a:off x="457200" y="256032"/>
+            <a:ext cx="8229600" cy="640080"/>
+          </a:xfrm>
+          <a:prstGeom prst="rect">
+            <a:avLst/>
+          </a:prstGeom>
+          <a:noFill/>
+          <a:ln/>
+        </p:spPr>
+        <p:txBody>
+          <a:bodyPr wrap="square" lIns="0" tIns="0" rIns="0" bIns="0" rtlCol="0" anchor="ctr"/>
+          <a:lstStyle/>
+          <a:p>
+            <a:pPr algn="l" indent="0" marL="0">
+              <a:buNone/>
+            </a:pPr>
+            <a:r>
+              <a:rPr lang="en-US" sz="2800" b="1" dirty="0">
+                <a:solidFill>
+                  <a:schemeClr val="tx1"/>
+                </a:solidFill>
+              </a:rPr>
               <a:t>Next: compression that biologists can use</a:t>
             </a:r>
             <a:endParaRPr lang="en-US" sz="2800" dirty="0"/>
@@ -13434,7 +15995,7 @@
             <a:pPr algn="r"/>
             <a:fld id="{F7021451-1387-4CA6-816F-3879F97B5CBC}" type="slidenum">
               <a:rPr b="0" lang="en-US"/>
-              <a:t>20</a:t>
+              <a:t>23</a:t>
             </a:fld>
             <a:endParaRPr lang="en-US"/>
           </a:p>
@@ -13497,46 +16058,47 @@
                   <a:schemeClr val="tx1"/>
                 </a:solidFill>
               </a:rPr>
-              <a:t>Three real embryo recordings</a:t>
+              <a:t>The brief: four goals, and what we delivered</a:t>
             </a:r>
             <a:endParaRPr lang="en-US" sz="2800" dirty="0"/>
           </a:p>
         </p:txBody>
       </p:sp>
-      <p:pic>
-        <p:nvPicPr>
-          <p:cNvPr id="3" name="data-three" descr="D:\masters\MLCV seminar\TeamProject\presentation\figs\data_three.png">    </p:cNvPr>
-          <p:cNvPicPr>
-            <a:picLocks noChangeAspect="1"/>
-          </p:cNvPicPr>
-          <p:nvPr/>
-        </p:nvPicPr>
-        <p:blipFill>
-          <a:blip r:embed="rId1"/>
-          <a:stretch>
-            <a:fillRect/>
-          </a:stretch>
-        </p:blipFill>
-        <p:spPr>
-          <a:xfrm>
-            <a:off x="457200" y="1005840"/>
-            <a:ext cx="8229600" cy="2852928"/>
-          </a:xfrm>
-          <a:prstGeom prst="rect">
-            <a:avLst/>
-          </a:prstGeom>
-        </p:spPr>
-      </p:pic>
-      <p:sp>
-        <p:nvSpPr>
-          <p:cNvPr id="4" name="Text 1"/>
+      <p:sp>
+        <p:nvSpPr>
+          <p:cNvPr id="3" name="goal-num-0"/>
+          <p:cNvSpPr/>
+          <p:nvPr/>
+        </p:nvSpPr>
+        <p:spPr>
+          <a:xfrm>
+            <a:off x="457200" y="1097280"/>
+            <a:ext cx="457200" cy="457200"/>
+          </a:xfrm>
+          <a:prstGeom prst="ellipse">
+            <a:avLst/>
+          </a:prstGeom>
+          <a:solidFill>
+            <a:schemeClr val="accent2"/>
+          </a:solidFill>
+          <a:ln w="12700">
+            <a:solidFill>
+              <a:schemeClr val="accent2"/>
+            </a:solidFill>
+            <a:prstDash val="solid"/>
+          </a:ln>
+        </p:spPr>
+      </p:sp>
+      <p:sp>
+        <p:nvSpPr>
+          <p:cNvPr id="4" name="Text 2"/>
           <p:cNvSpPr txBox="1"/>
           <p:nvPr/>
         </p:nvSpPr>
         <p:spPr>
           <a:xfrm>
-            <a:off x="457200" y="3931920"/>
-            <a:ext cx="2606040" cy="731520"/>
+            <a:off x="457200" y="1097280"/>
+            <a:ext cx="457200" cy="457200"/>
           </a:xfrm>
           <a:prstGeom prst="rect">
             <a:avLst/>
@@ -13545,6 +16107,42 @@
           <a:ln/>
         </p:spPr>
         <p:txBody>
+          <a:bodyPr wrap="square" lIns="0" tIns="0" rIns="0" bIns="0" rtlCol="0" anchor="ctr"/>
+          <a:lstStyle/>
+          <a:p>
+            <a:pPr algn="ctr" indent="0" marL="0">
+              <a:buNone/>
+            </a:pPr>
+            <a:r>
+              <a:rPr lang="en-US" sz="1600" b="1" dirty="0">
+                <a:solidFill>
+                  <a:schemeClr val="bg1"/>
+                </a:solidFill>
+              </a:rPr>
+              <a:t>1</a:t>
+            </a:r>
+            <a:endParaRPr lang="en-US" sz="1600" dirty="0"/>
+          </a:p>
+        </p:txBody>
+      </p:sp>
+      <p:sp>
+        <p:nvSpPr>
+          <p:cNvPr id="5" name="Text 3"/>
+          <p:cNvSpPr txBox="1"/>
+          <p:nvPr/>
+        </p:nvSpPr>
+        <p:spPr>
+          <a:xfrm>
+            <a:off x="1097280" y="1024128"/>
+            <a:ext cx="4846320" cy="640080"/>
+          </a:xfrm>
+          <a:prstGeom prst="rect">
+            <a:avLst/>
+          </a:prstGeom>
+          <a:noFill/>
+          <a:ln/>
+        </p:spPr>
+        <p:txBody>
           <a:bodyPr wrap="square" lIns="0" tIns="0" rIns="0" bIns="0" rtlCol="0" anchor="t"/>
           <a:lstStyle/>
           <a:p>
@@ -13552,14 +16150,14 @@
               <a:buNone/>
             </a:pPr>
             <a:r>
-              <a:rPr lang="en-US" sz="1400" b="1" dirty="0">
-                <a:solidFill>
-                  <a:schemeClr val="tx2"/>
+              <a:rPr lang="en-US" sz="1600" b="1" dirty="0">
+                <a:solidFill>
+                  <a:schemeClr val="tx1"/>
                 </a:solidFill>
               </a:rPr>
-              <a:t>Tribolium</a:t>
-            </a:r>
-            <a:endParaRPr lang="en-US" sz="1400" dirty="0"/>
+              <a:t>Fit Gaussians to one volume</a:t>
+            </a:r>
+            <a:endParaRPr lang="en-US" sz="1600" dirty="0"/>
           </a:p>
           <a:p>
             <a:pPr indent="0" marL="0">
@@ -13568,25 +16166,52 @@
             <a:r>
               <a:rPr lang="en-US" sz="1400" dirty="0">
                 <a:solidFill>
-                  <a:schemeClr val="tx2"/>
+                  <a:srgbClr val="3A3F4B"/>
                 </a:solidFill>
               </a:rPr>
-              <a:t>1 frame, own reference nuclei from a detector</a:t>
-            </a:r>
-            <a:endParaRPr lang="en-US" sz="1400" dirty="0"/>
-          </a:p>
-        </p:txBody>
-      </p:sp>
-      <p:sp>
-        <p:nvSpPr>
-          <p:cNvPr id="5" name="Text 2"/>
+              <a:t>quality vs number of blobs, file size, fit time</a:t>
+            </a:r>
+            <a:endParaRPr lang="en-US" sz="1600" dirty="0"/>
+          </a:p>
+        </p:txBody>
+      </p:sp>
+      <p:sp>
+        <p:nvSpPr>
+          <p:cNvPr id="6" name="goal-status-0"/>
+          <p:cNvSpPr/>
+          <p:nvPr/>
+        </p:nvSpPr>
+        <p:spPr>
+          <a:xfrm>
+            <a:off x="6217920" y="1115568"/>
+            <a:ext cx="2468880" cy="411480"/>
+          </a:xfrm>
+          <a:prstGeom prst="roundRect">
+            <a:avLst>
+              <a:gd name="adj" fmla="val 17778"/>
+            </a:avLst>
+          </a:prstGeom>
+          <a:solidFill>
+            <a:schemeClr val="accent3"/>
+          </a:solidFill>
+          <a:ln w="12700">
+            <a:solidFill>
+              <a:schemeClr val="accent3"/>
+            </a:solidFill>
+            <a:prstDash val="solid"/>
+          </a:ln>
+        </p:spPr>
+      </p:sp>
+      <p:sp>
+        <p:nvSpPr>
+          <p:cNvPr id="7" name="Text 5"/>
           <p:cNvSpPr txBox="1"/>
           <p:nvPr/>
         </p:nvSpPr>
         <p:spPr>
           <a:xfrm>
-            <a:off x="3246120" y="3931920"/>
-            <a:ext cx="2606040" cy="731520"/>
+            <a:off x="6217920" y="1115568"/>
+            <a:ext cx="2468880" cy="411480"/>
           </a:xfrm>
           <a:prstGeom prst="rect">
             <a:avLst/>
@@ -13595,6 +16220,103 @@
           <a:ln/>
         </p:spPr>
         <p:txBody>
+          <a:bodyPr wrap="square" lIns="0" tIns="0" rIns="0" bIns="0" rtlCol="0" anchor="ctr"/>
+          <a:lstStyle/>
+          <a:p>
+            <a:pPr algn="ctr" indent="0" marL="0">
+              <a:buNone/>
+            </a:pPr>
+            <a:r>
+              <a:rPr lang="en-US" sz="1400" b="1" dirty="0">
+                <a:solidFill>
+                  <a:schemeClr val="bg1"/>
+                </a:solidFill>
+              </a:rPr>
+              <a:t>Done, extended</a:t>
+            </a:r>
+            <a:endParaRPr lang="en-US" sz="1400" dirty="0"/>
+          </a:p>
+        </p:txBody>
+      </p:sp>
+      <p:sp>
+        <p:nvSpPr>
+          <p:cNvPr id="8" name="goal-num-1"/>
+          <p:cNvSpPr/>
+          <p:nvPr/>
+        </p:nvSpPr>
+        <p:spPr>
+          <a:xfrm>
+            <a:off x="457200" y="1828800"/>
+            <a:ext cx="457200" cy="457200"/>
+          </a:xfrm>
+          <a:prstGeom prst="ellipse">
+            <a:avLst/>
+          </a:prstGeom>
+          <a:solidFill>
+            <a:schemeClr val="accent2"/>
+          </a:solidFill>
+          <a:ln w="12700">
+            <a:solidFill>
+              <a:schemeClr val="accent2"/>
+            </a:solidFill>
+            <a:prstDash val="solid"/>
+          </a:ln>
+        </p:spPr>
+      </p:sp>
+      <p:sp>
+        <p:nvSpPr>
+          <p:cNvPr id="9" name="Text 7"/>
+          <p:cNvSpPr txBox="1"/>
+          <p:nvPr/>
+        </p:nvSpPr>
+        <p:spPr>
+          <a:xfrm>
+            <a:off x="457200" y="1828800"/>
+            <a:ext cx="457200" cy="457200"/>
+          </a:xfrm>
+          <a:prstGeom prst="rect">
+            <a:avLst/>
+          </a:prstGeom>
+          <a:noFill/>
+          <a:ln/>
+        </p:spPr>
+        <p:txBody>
+          <a:bodyPr wrap="square" lIns="0" tIns="0" rIns="0" bIns="0" rtlCol="0" anchor="ctr"/>
+          <a:lstStyle/>
+          <a:p>
+            <a:pPr algn="ctr" indent="0" marL="0">
+              <a:buNone/>
+            </a:pPr>
+            <a:r>
+              <a:rPr lang="en-US" sz="1600" b="1" dirty="0">
+                <a:solidFill>
+                  <a:schemeClr val="bg1"/>
+                </a:solidFill>
+              </a:rPr>
+              <a:t>2</a:t>
+            </a:r>
+            <a:endParaRPr lang="en-US" sz="1600" dirty="0"/>
+          </a:p>
+        </p:txBody>
+      </p:sp>
+      <p:sp>
+        <p:nvSpPr>
+          <p:cNvPr id="10" name="Text 8"/>
+          <p:cNvSpPr txBox="1"/>
+          <p:nvPr/>
+        </p:nvSpPr>
+        <p:spPr>
+          <a:xfrm>
+            <a:off x="1097280" y="1755648"/>
+            <a:ext cx="4846320" cy="640080"/>
+          </a:xfrm>
+          <a:prstGeom prst="rect">
+            <a:avLst/>
+          </a:prstGeom>
+          <a:noFill/>
+          <a:ln/>
+        </p:spPr>
+        <p:txBody>
           <a:bodyPr wrap="square" lIns="0" tIns="0" rIns="0" bIns="0" rtlCol="0" anchor="t"/>
           <a:lstStyle/>
           <a:p>
@@ -13602,14 +16324,14 @@
               <a:buNone/>
             </a:pPr>
             <a:r>
-              <a:rPr lang="en-US" sz="1400" b="1" dirty="0">
-                <a:solidFill>
-                  <a:schemeClr val="tx2"/>
+              <a:rPr lang="en-US" sz="1600" b="1" dirty="0">
+                <a:solidFill>
+                  <a:schemeClr val="tx1"/>
                 </a:solidFill>
               </a:rPr>
-              <a:t>Drosophila</a:t>
-            </a:r>
-            <a:endParaRPr lang="en-US" sz="1400" dirty="0"/>
+              <a:t>Export and browser viewer</a:t>
+            </a:r>
+            <a:endParaRPr lang="en-US" sz="1600" dirty="0"/>
           </a:p>
           <a:p>
             <a:pPr indent="0" marL="0">
@@ -13618,25 +16340,52 @@
             <a:r>
               <a:rPr lang="en-US" sz="1400" dirty="0">
                 <a:solidFill>
-                  <a:schemeClr val="tx2"/>
+                  <a:srgbClr val="3A3F4B"/>
                 </a:solidFill>
               </a:rPr>
-              <a:t>Cell Tracking Challenge, nuclei marked by hand</a:t>
-            </a:r>
-            <a:endParaRPr lang="en-US" sz="1400" dirty="0"/>
-          </a:p>
-        </p:txBody>
-      </p:sp>
-      <p:sp>
-        <p:nvSpPr>
-          <p:cNvPr id="6" name="Text 3"/>
+              <a:t>.ply / .splat files, inspect in the browser</a:t>
+            </a:r>
+            <a:endParaRPr lang="en-US" sz="1600" dirty="0"/>
+          </a:p>
+        </p:txBody>
+      </p:sp>
+      <p:sp>
+        <p:nvSpPr>
+          <p:cNvPr id="11" name="goal-status-1"/>
+          <p:cNvSpPr/>
+          <p:nvPr/>
+        </p:nvSpPr>
+        <p:spPr>
+          <a:xfrm>
+            <a:off x="6217920" y="1847088"/>
+            <a:ext cx="2468880" cy="411480"/>
+          </a:xfrm>
+          <a:prstGeom prst="roundRect">
+            <a:avLst>
+              <a:gd name="adj" fmla="val 17778"/>
+            </a:avLst>
+          </a:prstGeom>
+          <a:solidFill>
+            <a:schemeClr val="accent3"/>
+          </a:solidFill>
+          <a:ln w="12700">
+            <a:solidFill>
+              <a:schemeClr val="accent3"/>
+            </a:solidFill>
+            <a:prstDash val="solid"/>
+          </a:ln>
+        </p:spPr>
+      </p:sp>
+      <p:sp>
+        <p:nvSpPr>
+          <p:cNvPr id="12" name="Text 10"/>
           <p:cNvSpPr txBox="1"/>
           <p:nvPr/>
         </p:nvSpPr>
         <p:spPr>
           <a:xfrm>
-            <a:off x="6035040" y="3931920"/>
-            <a:ext cx="2606040" cy="731520"/>
+            <a:off x="6217920" y="1847088"/>
+            <a:ext cx="2468880" cy="411480"/>
           </a:xfrm>
           <a:prstGeom prst="rect">
             <a:avLst/>
@@ -13645,6 +16394,103 @@
           <a:ln/>
         </p:spPr>
         <p:txBody>
+          <a:bodyPr wrap="square" lIns="0" tIns="0" rIns="0" bIns="0" rtlCol="0" anchor="ctr"/>
+          <a:lstStyle/>
+          <a:p>
+            <a:pPr algn="ctr" indent="0" marL="0">
+              <a:buNone/>
+            </a:pPr>
+            <a:r>
+              <a:rPr lang="en-US" sz="1400" b="1" dirty="0">
+                <a:solidFill>
+                  <a:schemeClr val="bg1"/>
+                </a:solidFill>
+              </a:rPr>
+              <a:t>Done, basic viewer</a:t>
+            </a:r>
+            <a:endParaRPr lang="en-US" sz="1400" dirty="0"/>
+          </a:p>
+        </p:txBody>
+      </p:sp>
+      <p:sp>
+        <p:nvSpPr>
+          <p:cNvPr id="13" name="goal-num-2"/>
+          <p:cNvSpPr/>
+          <p:nvPr/>
+        </p:nvSpPr>
+        <p:spPr>
+          <a:xfrm>
+            <a:off x="457200" y="2560320"/>
+            <a:ext cx="457200" cy="457200"/>
+          </a:xfrm>
+          <a:prstGeom prst="ellipse">
+            <a:avLst/>
+          </a:prstGeom>
+          <a:solidFill>
+            <a:schemeClr val="accent2"/>
+          </a:solidFill>
+          <a:ln w="12700">
+            <a:solidFill>
+              <a:schemeClr val="accent2"/>
+            </a:solidFill>
+            <a:prstDash val="solid"/>
+          </a:ln>
+        </p:spPr>
+      </p:sp>
+      <p:sp>
+        <p:nvSpPr>
+          <p:cNvPr id="14" name="Text 12"/>
+          <p:cNvSpPr txBox="1"/>
+          <p:nvPr/>
+        </p:nvSpPr>
+        <p:spPr>
+          <a:xfrm>
+            <a:off x="457200" y="2560320"/>
+            <a:ext cx="457200" cy="457200"/>
+          </a:xfrm>
+          <a:prstGeom prst="rect">
+            <a:avLst/>
+          </a:prstGeom>
+          <a:noFill/>
+          <a:ln/>
+        </p:spPr>
+        <p:txBody>
+          <a:bodyPr wrap="square" lIns="0" tIns="0" rIns="0" bIns="0" rtlCol="0" anchor="ctr"/>
+          <a:lstStyle/>
+          <a:p>
+            <a:pPr algn="ctr" indent="0" marL="0">
+              <a:buNone/>
+            </a:pPr>
+            <a:r>
+              <a:rPr lang="en-US" sz="1600" b="1" dirty="0">
+                <a:solidFill>
+                  <a:schemeClr val="bg1"/>
+                </a:solidFill>
+              </a:rPr>
+              <a:t>3</a:t>
+            </a:r>
+            <a:endParaRPr lang="en-US" sz="1600" dirty="0"/>
+          </a:p>
+        </p:txBody>
+      </p:sp>
+      <p:sp>
+        <p:nvSpPr>
+          <p:cNvPr id="15" name="Text 13"/>
+          <p:cNvSpPr txBox="1"/>
+          <p:nvPr/>
+        </p:nvSpPr>
+        <p:spPr>
+          <a:xfrm>
+            <a:off x="1097280" y="2487168"/>
+            <a:ext cx="4846320" cy="640080"/>
+          </a:xfrm>
+          <a:prstGeom prst="rect">
+            <a:avLst/>
+          </a:prstGeom>
+          <a:noFill/>
+          <a:ln/>
+        </p:spPr>
+        <p:txBody>
           <a:bodyPr wrap="square" lIns="0" tIns="0" rIns="0" bIns="0" rtlCol="0" anchor="t"/>
           <a:lstStyle/>
           <a:p>
@@ -13652,14 +16498,14 @@
               <a:buNone/>
             </a:pPr>
             <a:r>
-              <a:rPr lang="en-US" sz="1400" b="1" dirty="0">
-                <a:solidFill>
-                  <a:schemeClr val="tx2"/>
+              <a:rPr lang="en-US" sz="1600" b="1" dirty="0">
+                <a:solidFill>
+                  <a:schemeClr val="tx1"/>
                 </a:solidFill>
               </a:rPr>
-              <a:t>C. elegans</a:t>
-            </a:r>
-            <a:endParaRPr lang="en-US" sz="1400" dirty="0"/>
+              <a:t>Time series</a:t>
+            </a:r>
+            <a:endParaRPr lang="en-US" sz="1600" dirty="0"/>
           </a:p>
           <a:p>
             <a:pPr indent="0" marL="0">
@@ -13668,12 +16514,285 @@
             <a:r>
               <a:rPr lang="en-US" sz="1400" dirty="0">
                 <a:solidFill>
+                  <a:srgbClr val="3A3F4B"/>
+                </a:solidFill>
+              </a:rPr>
+              <a:t>per-frame blobs vs 4D blobs: storage, smoothness</a:t>
+            </a:r>
+            <a:endParaRPr lang="en-US" sz="1600" dirty="0"/>
+          </a:p>
+        </p:txBody>
+      </p:sp>
+      <p:sp>
+        <p:nvSpPr>
+          <p:cNvPr id="16" name="goal-status-2"/>
+          <p:cNvSpPr/>
+          <p:nvPr/>
+        </p:nvSpPr>
+        <p:spPr>
+          <a:xfrm>
+            <a:off x="6217920" y="2578608"/>
+            <a:ext cx="2468880" cy="411480"/>
+          </a:xfrm>
+          <a:prstGeom prst="roundRect">
+            <a:avLst>
+              <a:gd name="adj" fmla="val 17778"/>
+            </a:avLst>
+          </a:prstGeom>
+          <a:solidFill>
+            <a:schemeClr val="accent1"/>
+          </a:solidFill>
+          <a:ln w="12700">
+            <a:solidFill>
+              <a:schemeClr val="accent1"/>
+            </a:solidFill>
+            <a:prstDash val="solid"/>
+          </a:ln>
+        </p:spPr>
+      </p:sp>
+      <p:sp>
+        <p:nvSpPr>
+          <p:cNvPr id="17" name="Text 15"/>
+          <p:cNvSpPr txBox="1"/>
+          <p:nvPr/>
+        </p:nvSpPr>
+        <p:spPr>
+          <a:xfrm>
+            <a:off x="6217920" y="2578608"/>
+            <a:ext cx="2468880" cy="411480"/>
+          </a:xfrm>
+          <a:prstGeom prst="rect">
+            <a:avLst/>
+          </a:prstGeom>
+          <a:noFill/>
+          <a:ln/>
+        </p:spPr>
+        <p:txBody>
+          <a:bodyPr wrap="square" lIns="0" tIns="0" rIns="0" bIns="0" rtlCol="0" anchor="ctr"/>
+          <a:lstStyle/>
+          <a:p>
+            <a:pPr algn="ctr" indent="0" marL="0">
+              <a:buNone/>
+            </a:pPr>
+            <a:r>
+              <a:rPr lang="en-US" sz="1400" b="1" dirty="0">
+                <a:solidFill>
+                  <a:schemeClr val="bg1"/>
+                </a:solidFill>
+              </a:rPr>
+              <a:t>Partial: synthetic data</a:t>
+            </a:r>
+            <a:endParaRPr lang="en-US" sz="1400" dirty="0"/>
+          </a:p>
+        </p:txBody>
+      </p:sp>
+      <p:sp>
+        <p:nvSpPr>
+          <p:cNvPr id="18" name="goal-num-3"/>
+          <p:cNvSpPr/>
+          <p:nvPr/>
+        </p:nvSpPr>
+        <p:spPr>
+          <a:xfrm>
+            <a:off x="457200" y="3291840"/>
+            <a:ext cx="457200" cy="457200"/>
+          </a:xfrm>
+          <a:prstGeom prst="ellipse">
+            <a:avLst/>
+          </a:prstGeom>
+          <a:solidFill>
+            <a:schemeClr val="accent2"/>
+          </a:solidFill>
+          <a:ln w="12700">
+            <a:solidFill>
+              <a:schemeClr val="accent2"/>
+            </a:solidFill>
+            <a:prstDash val="solid"/>
+          </a:ln>
+        </p:spPr>
+      </p:sp>
+      <p:sp>
+        <p:nvSpPr>
+          <p:cNvPr id="19" name="Text 17"/>
+          <p:cNvSpPr txBox="1"/>
+          <p:nvPr/>
+        </p:nvSpPr>
+        <p:spPr>
+          <a:xfrm>
+            <a:off x="457200" y="3291840"/>
+            <a:ext cx="457200" cy="457200"/>
+          </a:xfrm>
+          <a:prstGeom prst="rect">
+            <a:avLst/>
+          </a:prstGeom>
+          <a:noFill/>
+          <a:ln/>
+        </p:spPr>
+        <p:txBody>
+          <a:bodyPr wrap="square" lIns="0" tIns="0" rIns="0" bIns="0" rtlCol="0" anchor="ctr"/>
+          <a:lstStyle/>
+          <a:p>
+            <a:pPr algn="ctr" indent="0" marL="0">
+              <a:buNone/>
+            </a:pPr>
+            <a:r>
+              <a:rPr lang="en-US" sz="1600" b="1" dirty="0">
+                <a:solidFill>
+                  <a:schemeClr val="bg1"/>
+                </a:solidFill>
+              </a:rPr>
+              <a:t>4</a:t>
+            </a:r>
+            <a:endParaRPr lang="en-US" sz="1600" dirty="0"/>
+          </a:p>
+        </p:txBody>
+      </p:sp>
+      <p:sp>
+        <p:nvSpPr>
+          <p:cNvPr id="20" name="Text 18"/>
+          <p:cNvSpPr txBox="1"/>
+          <p:nvPr/>
+        </p:nvSpPr>
+        <p:spPr>
+          <a:xfrm>
+            <a:off x="1097280" y="3218688"/>
+            <a:ext cx="4846320" cy="640080"/>
+          </a:xfrm>
+          <a:prstGeom prst="rect">
+            <a:avLst/>
+          </a:prstGeom>
+          <a:noFill/>
+          <a:ln/>
+        </p:spPr>
+        <p:txBody>
+          <a:bodyPr wrap="square" lIns="0" tIns="0" rIns="0" bIns="0" rtlCol="0" anchor="t"/>
+          <a:lstStyle/>
+          <a:p>
+            <a:pPr indent="0" marL="0">
+              <a:buNone/>
+            </a:pPr>
+            <a:r>
+              <a:rPr lang="en-US" sz="1600" b="1" dirty="0">
+                <a:solidFill>
+                  <a:schemeClr val="tx1"/>
+                </a:solidFill>
+              </a:rPr>
+              <a:t>Time-series player</a:t>
+            </a:r>
+            <a:endParaRPr lang="en-US" sz="1600" dirty="0"/>
+          </a:p>
+          <a:p>
+            <a:pPr indent="0" marL="0">
+              <a:buNone/>
+            </a:pPr>
+            <a:r>
+              <a:rPr lang="en-US" sz="1400" dirty="0">
+                <a:solidFill>
+                  <a:srgbClr val="3A3F4B"/>
+                </a:solidFill>
+              </a:rPr>
+              <a:t>scrub through development in the browser</a:t>
+            </a:r>
+            <a:endParaRPr lang="en-US" sz="1600" dirty="0"/>
+          </a:p>
+        </p:txBody>
+      </p:sp>
+      <p:sp>
+        <p:nvSpPr>
+          <p:cNvPr id="21" name="goal-status-3"/>
+          <p:cNvSpPr/>
+          <p:nvPr/>
+        </p:nvSpPr>
+        <p:spPr>
+          <a:xfrm>
+            <a:off x="6217920" y="3310128"/>
+            <a:ext cx="2468880" cy="411480"/>
+          </a:xfrm>
+          <a:prstGeom prst="roundRect">
+            <a:avLst>
+              <a:gd name="adj" fmla="val 17778"/>
+            </a:avLst>
+          </a:prstGeom>
+          <a:solidFill>
+            <a:schemeClr val="accent1"/>
+          </a:solidFill>
+          <a:ln w="12700">
+            <a:solidFill>
+              <a:schemeClr val="accent1"/>
+            </a:solidFill>
+            <a:prstDash val="solid"/>
+          </a:ln>
+        </p:spPr>
+      </p:sp>
+      <p:sp>
+        <p:nvSpPr>
+          <p:cNvPr id="22" name="Text 20"/>
+          <p:cNvSpPr txBox="1"/>
+          <p:nvPr/>
+        </p:nvSpPr>
+        <p:spPr>
+          <a:xfrm>
+            <a:off x="6217920" y="3310128"/>
+            <a:ext cx="2468880" cy="411480"/>
+          </a:xfrm>
+          <a:prstGeom prst="rect">
+            <a:avLst/>
+          </a:prstGeom>
+          <a:noFill/>
+          <a:ln/>
+        </p:spPr>
+        <p:txBody>
+          <a:bodyPr wrap="square" lIns="0" tIns="0" rIns="0" bIns="0" rtlCol="0" anchor="ctr"/>
+          <a:lstStyle/>
+          <a:p>
+            <a:pPr algn="ctr" indent="0" marL="0">
+              <a:buNone/>
+            </a:pPr>
+            <a:r>
+              <a:rPr lang="en-US" sz="1400" b="1" dirty="0">
+                <a:solidFill>
+                  <a:schemeClr val="bg1"/>
+                </a:solidFill>
+              </a:rPr>
+              <a:t>Partial: frame slider</a:t>
+            </a:r>
+            <a:endParaRPr lang="en-US" sz="1400" dirty="0"/>
+          </a:p>
+        </p:txBody>
+      </p:sp>
+      <p:sp>
+        <p:nvSpPr>
+          <p:cNvPr id="23" name="Text 21"/>
+          <p:cNvSpPr txBox="1"/>
+          <p:nvPr/>
+        </p:nvSpPr>
+        <p:spPr>
+          <a:xfrm>
+            <a:off x="457200" y="4023360"/>
+            <a:ext cx="8229600" cy="548640"/>
+          </a:xfrm>
+          <a:prstGeom prst="rect">
+            <a:avLst/>
+          </a:prstGeom>
+          <a:noFill/>
+          <a:ln/>
+        </p:spPr>
+        <p:txBody>
+          <a:bodyPr wrap="square" lIns="0" tIns="0" rIns="0" bIns="0" rtlCol="0" anchor="t"/>
+          <a:lstStyle/>
+          <a:p>
+            <a:pPr indent="0" marL="0">
+              <a:buNone/>
+            </a:pPr>
+            <a:r>
+              <a:rPr lang="en-US" sz="1500" dirty="0">
+                <a:solidFill>
                   <a:schemeClr val="tx2"/>
                 </a:solidFill>
               </a:rPr>
-              <a:t>Cell Tracking Challenge, 12 frames, 2,958 nuclei marked by hand</a:t>
-            </a:r>
-            <a:endParaRPr lang="en-US" sz="1400" dirty="0"/>
+              <a:t>Added with our supervisor: do Gaussian blobs keep the nuclei, compared with standard compression at the same file size?</a:t>
+            </a:r>
+            <a:endParaRPr lang="en-US" sz="1500" dirty="0"/>
           </a:p>
         </p:txBody>
       </p:sp>
@@ -13779,6 +16898,288 @@
                   <a:schemeClr val="tx1"/>
                 </a:solidFill>
               </a:rPr>
+              <a:t>Three real embryo recordings</a:t>
+            </a:r>
+            <a:endParaRPr lang="en-US" sz="2800" dirty="0"/>
+          </a:p>
+        </p:txBody>
+      </p:sp>
+      <p:pic>
+        <p:nvPicPr>
+          <p:cNvPr id="3" name="data-three" descr="D:\masters\MLCV seminar\TeamProject\presentation\figs\data_three.png">    </p:cNvPr>
+          <p:cNvPicPr>
+            <a:picLocks noChangeAspect="1"/>
+          </p:cNvPicPr>
+          <p:nvPr/>
+        </p:nvPicPr>
+        <p:blipFill>
+          <a:blip r:embed="rId1"/>
+          <a:stretch>
+            <a:fillRect/>
+          </a:stretch>
+        </p:blipFill>
+        <p:spPr>
+          <a:xfrm>
+            <a:off x="457200" y="1005840"/>
+            <a:ext cx="8229600" cy="2852928"/>
+          </a:xfrm>
+          <a:prstGeom prst="rect">
+            <a:avLst/>
+          </a:prstGeom>
+        </p:spPr>
+      </p:pic>
+      <p:sp>
+        <p:nvSpPr>
+          <p:cNvPr id="4" name="Text 1"/>
+          <p:cNvSpPr txBox="1"/>
+          <p:nvPr/>
+        </p:nvSpPr>
+        <p:spPr>
+          <a:xfrm>
+            <a:off x="457200" y="3931920"/>
+            <a:ext cx="2606040" cy="731520"/>
+          </a:xfrm>
+          <a:prstGeom prst="rect">
+            <a:avLst/>
+          </a:prstGeom>
+          <a:noFill/>
+          <a:ln/>
+        </p:spPr>
+        <p:txBody>
+          <a:bodyPr wrap="square" lIns="0" tIns="0" rIns="0" bIns="0" rtlCol="0" anchor="t"/>
+          <a:lstStyle/>
+          <a:p>
+            <a:pPr indent="0" marL="0">
+              <a:buNone/>
+            </a:pPr>
+            <a:r>
+              <a:rPr lang="en-US" sz="1400" b="1" dirty="0">
+                <a:solidFill>
+                  <a:schemeClr val="tx2"/>
+                </a:solidFill>
+              </a:rPr>
+              <a:t>Tribolium</a:t>
+            </a:r>
+            <a:endParaRPr lang="en-US" sz="1400" dirty="0"/>
+          </a:p>
+          <a:p>
+            <a:pPr indent="0" marL="0">
+              <a:buNone/>
+            </a:pPr>
+            <a:r>
+              <a:rPr lang="en-US" sz="1400" dirty="0">
+                <a:solidFill>
+                  <a:schemeClr val="tx2"/>
+                </a:solidFill>
+              </a:rPr>
+              <a:t>1 frame, own reference nuclei from a detector</a:t>
+            </a:r>
+            <a:endParaRPr lang="en-US" sz="1400" dirty="0"/>
+          </a:p>
+        </p:txBody>
+      </p:sp>
+      <p:sp>
+        <p:nvSpPr>
+          <p:cNvPr id="5" name="Text 2"/>
+          <p:cNvSpPr txBox="1"/>
+          <p:nvPr/>
+        </p:nvSpPr>
+        <p:spPr>
+          <a:xfrm>
+            <a:off x="3246120" y="3931920"/>
+            <a:ext cx="2606040" cy="731520"/>
+          </a:xfrm>
+          <a:prstGeom prst="rect">
+            <a:avLst/>
+          </a:prstGeom>
+          <a:noFill/>
+          <a:ln/>
+        </p:spPr>
+        <p:txBody>
+          <a:bodyPr wrap="square" lIns="0" tIns="0" rIns="0" bIns="0" rtlCol="0" anchor="t"/>
+          <a:lstStyle/>
+          <a:p>
+            <a:pPr indent="0" marL="0">
+              <a:buNone/>
+            </a:pPr>
+            <a:r>
+              <a:rPr lang="en-US" sz="1400" b="1" dirty="0">
+                <a:solidFill>
+                  <a:schemeClr val="tx2"/>
+                </a:solidFill>
+              </a:rPr>
+              <a:t>Drosophila</a:t>
+            </a:r>
+            <a:endParaRPr lang="en-US" sz="1400" dirty="0"/>
+          </a:p>
+          <a:p>
+            <a:pPr indent="0" marL="0">
+              <a:buNone/>
+            </a:pPr>
+            <a:r>
+              <a:rPr lang="en-US" sz="1400" dirty="0">
+                <a:solidFill>
+                  <a:schemeClr val="tx2"/>
+                </a:solidFill>
+              </a:rPr>
+              <a:t>Cell Tracking Challenge, nuclei marked by hand</a:t>
+            </a:r>
+            <a:endParaRPr lang="en-US" sz="1400" dirty="0"/>
+          </a:p>
+        </p:txBody>
+      </p:sp>
+      <p:sp>
+        <p:nvSpPr>
+          <p:cNvPr id="6" name="Text 3"/>
+          <p:cNvSpPr txBox="1"/>
+          <p:nvPr/>
+        </p:nvSpPr>
+        <p:spPr>
+          <a:xfrm>
+            <a:off x="6035040" y="3931920"/>
+            <a:ext cx="2606040" cy="731520"/>
+          </a:xfrm>
+          <a:prstGeom prst="rect">
+            <a:avLst/>
+          </a:prstGeom>
+          <a:noFill/>
+          <a:ln/>
+        </p:spPr>
+        <p:txBody>
+          <a:bodyPr wrap="square" lIns="0" tIns="0" rIns="0" bIns="0" rtlCol="0" anchor="t"/>
+          <a:lstStyle/>
+          <a:p>
+            <a:pPr indent="0" marL="0">
+              <a:buNone/>
+            </a:pPr>
+            <a:r>
+              <a:rPr lang="en-US" sz="1400" b="1" dirty="0">
+                <a:solidFill>
+                  <a:schemeClr val="tx2"/>
+                </a:solidFill>
+              </a:rPr>
+              <a:t>C. elegans</a:t>
+            </a:r>
+            <a:endParaRPr lang="en-US" sz="1400" dirty="0"/>
+          </a:p>
+          <a:p>
+            <a:pPr indent="0" marL="0">
+              <a:buNone/>
+            </a:pPr>
+            <a:r>
+              <a:rPr lang="en-US" sz="1400" dirty="0">
+                <a:solidFill>
+                  <a:schemeClr val="tx2"/>
+                </a:solidFill>
+              </a:rPr>
+              <a:t>Cell Tracking Challenge, 12 frames, 2,958 nuclei marked by hand</a:t>
+            </a:r>
+            <a:endParaRPr lang="en-US" sz="1400" dirty="0"/>
+          </a:p>
+        </p:txBody>
+      </p:sp>
+      <p:sp>
+        <p:nvSpPr>
+          <p:cNvPr id="25" name="Slide Number Placeholder 0"/>
+          <p:cNvSpPr>
+            <a:spLocks noGrp="1"/>
+          </p:cNvSpPr>
+          <p:nvPr>
+            <p:ph type="sldNum" sz="quarter" idx="4294967295"/>
+          </p:nvPr>
+        </p:nvSpPr>
+        <p:spPr>
+          <a:xfrm>
+            <a:off x="8229600" y="4754880"/>
+            <a:ext cx="457200" cy="228600"/>
+          </a:xfrm>
+          <a:prstGeom prst="rect">
+            <a:avLst/>
+          </a:prstGeom>
+          <a:extLst>
+            <a:ext uri="{C572A759-6A51-4108-AA02-DFA0A04FC94B}">
+              <ma14:wrappingTextBoxFlag xmlns:ma14="http://schemas.microsoft.com/office/mac/drawingml/2011/main" val="0"/>
+            </a:ext>
+          </a:extLst>
+        </p:spPr>
+        <p:txBody>
+          <a:bodyPr/>
+          <a:lstStyle>
+            <a:lvl1pPr>
+              <a:defRPr sz="900">
+                <a:solidFill>
+                  <a:schemeClr val="accent5"/>
+                </a:solidFill>
+              </a:defRPr>
+            </a:lvl1pPr>
+          </a:lstStyle>
+          <a:p>
+            <a:pPr algn="r"/>
+            <a:fld id="{F7021451-1387-4CA6-816F-3879F97B5CBC}" type="slidenum">
+              <a:rPr b="0" lang="en-US"/>
+              <a:t>4</a:t>
+            </a:fld>
+            <a:endParaRPr lang="en-US"/>
+          </a:p>
+        </p:txBody>
+      </p:sp>
+    </p:spTree>
+  </p:cSld>
+  <p:clrMapOvr>
+    <a:masterClrMapping/>
+  </p:clrMapOvr>
+</p:sld>
+</file>
+
+<file path=ppt/slides/slide5.xml><?xml version="1.0" encoding="utf-8"?>
+<p:sld xmlns:a="http://schemas.openxmlformats.org/drawingml/2006/main" xmlns:r="http://schemas.openxmlformats.org/officeDocument/2006/relationships" xmlns:p="http://schemas.openxmlformats.org/presentationml/2006/main">
+  <p:cSld name="Slide 5">
+    <p:spTree>
+      <p:nvGrpSpPr>
+        <p:cNvPr id="1" name=""/>
+        <p:cNvGrpSpPr/>
+        <p:nvPr/>
+      </p:nvGrpSpPr>
+      <p:grpSpPr>
+        <a:xfrm>
+          <a:off x="0" y="0"/>
+          <a:ext cx="0" cy="0"/>
+          <a:chOff x="0" y="0"/>
+          <a:chExt cx="0" cy="0"/>
+        </a:xfrm>
+      </p:grpSpPr>
+      <p:sp>
+        <p:nvSpPr>
+          <p:cNvPr id="2" name="Text 0"/>
+          <p:cNvSpPr/>
+          <p:nvPr>
+            <p:ph idx="100" type="title" hasCustomPrompt="1"/>
+          </p:nvPr>
+        </p:nvSpPr>
+        <p:spPr>
+          <a:xfrm>
+            <a:off x="457200" y="256032"/>
+            <a:ext cx="8229600" cy="640080"/>
+          </a:xfrm>
+          <a:prstGeom prst="rect">
+            <a:avLst/>
+          </a:prstGeom>
+          <a:noFill/>
+          <a:ln/>
+        </p:spPr>
+        <p:txBody>
+          <a:bodyPr wrap="square" lIns="0" tIns="0" rIns="0" bIns="0" rtlCol="0" anchor="ctr"/>
+          <a:lstStyle/>
+          <a:p>
+            <a:pPr algn="l" indent="0" marL="0">
+              <a:buNone/>
+            </a:pPr>
+            <a:r>
+              <a:rPr lang="en-US" sz="2800" b="1" dirty="0">
+                <a:solidFill>
+                  <a:schemeClr val="tx1"/>
+                </a:solidFill>
+              </a:rPr>
               <a:t>A volume written as a sum of blobs</a:t>
             </a:r>
             <a:endParaRPr lang="en-US" sz="2800" dirty="0"/>
@@ -13826,7 +17227,7 @@
       </p:sp>
       <p:graphicFrame>
         <p:nvGraphicFramePr>
-          <p:cNvPr id="5" name="Table 0"/>
+          <p:cNvPr id="6" name="Table 0"/>
           <p:cNvGraphicFramePr>
             <a:graphicFrameLocks noGrp="1"/>
           </p:cNvGraphicFramePr>
@@ -14679,471 +18080,6 @@
             <a:pPr algn="r"/>
             <a:fld id="{F7021451-1387-4CA6-816F-3879F97B5CBC}" type="slidenum">
               <a:rPr b="0" lang="en-US"/>
-              <a:t>4</a:t>
-            </a:fld>
-            <a:endParaRPr lang="en-US"/>
-          </a:p>
-        </p:txBody>
-      </p:sp>
-    </p:spTree>
-  </p:cSld>
-  <p:clrMapOvr>
-    <a:masterClrMapping/>
-  </p:clrMapOvr>
-</p:sld>
-</file>
-
-<file path=ppt/slides/slide5.xml><?xml version="1.0" encoding="utf-8"?>
-<p:sld xmlns:a="http://schemas.openxmlformats.org/drawingml/2006/main" xmlns:r="http://schemas.openxmlformats.org/officeDocument/2006/relationships" xmlns:p="http://schemas.openxmlformats.org/presentationml/2006/main">
-  <p:cSld name="Slide 5">
-    <p:spTree>
-      <p:nvGrpSpPr>
-        <p:cNvPr id="1" name=""/>
-        <p:cNvGrpSpPr/>
-        <p:nvPr/>
-      </p:nvGrpSpPr>
-      <p:grpSpPr>
-        <a:xfrm>
-          <a:off x="0" y="0"/>
-          <a:ext cx="0" cy="0"/>
-          <a:chOff x="0" y="0"/>
-          <a:chExt cx="0" cy="0"/>
-        </a:xfrm>
-      </p:grpSpPr>
-      <p:sp>
-        <p:nvSpPr>
-          <p:cNvPr id="2" name="Text 0"/>
-          <p:cNvSpPr/>
-          <p:nvPr>
-            <p:ph idx="100" type="title" hasCustomPrompt="1"/>
-          </p:nvPr>
-        </p:nvSpPr>
-        <p:spPr>
-          <a:xfrm>
-            <a:off x="457200" y="256032"/>
-            <a:ext cx="8229600" cy="640080"/>
-          </a:xfrm>
-          <a:prstGeom prst="rect">
-            <a:avLst/>
-          </a:prstGeom>
-          <a:noFill/>
-          <a:ln/>
-        </p:spPr>
-        <p:txBody>
-          <a:bodyPr wrap="square" lIns="0" tIns="0" rIns="0" bIns="0" rtlCol="0" anchor="ctr"/>
-          <a:lstStyle/>
-          <a:p>
-            <a:pPr algn="l" indent="0" marL="0">
-              <a:buNone/>
-            </a:pPr>
-            <a:r>
-              <a:rPr lang="en-US" sz="2800" b="1" dirty="0">
-                <a:solidFill>
-                  <a:schemeClr val="tx1"/>
-                </a:solidFill>
-              </a:rPr>
-              <a:t>Step 0 · A phantom with a known answer</a:t>
-            </a:r>
-            <a:endParaRPr lang="en-US" sz="2800" dirty="0"/>
-          </a:p>
-        </p:txBody>
-      </p:sp>
-      <p:pic>
-        <p:nvPicPr>
-          <p:cNvPr id="3" name="phantom" descr="D:\masters\MLCV seminar\TeamProject\presentation\figs\phantom.png">    </p:cNvPr>
-          <p:cNvPicPr>
-            <a:picLocks noChangeAspect="1"/>
-          </p:cNvPicPr>
-          <p:nvPr/>
-        </p:nvPicPr>
-        <p:blipFill>
-          <a:blip r:embed="rId1"/>
-          <a:stretch>
-            <a:fillRect/>
-          </a:stretch>
-        </p:blipFill>
-        <p:spPr>
-          <a:xfrm>
-            <a:off x="457200" y="1097280"/>
-            <a:ext cx="4754880" cy="2377440"/>
-          </a:xfrm>
-          <a:prstGeom prst="rect">
-            <a:avLst/>
-          </a:prstGeom>
-        </p:spPr>
-      </p:pic>
-      <p:sp>
-        <p:nvSpPr>
-          <p:cNvPr id="4" name="Text 1"/>
-          <p:cNvSpPr txBox="1"/>
-          <p:nvPr/>
-        </p:nvSpPr>
-        <p:spPr>
-          <a:xfrm>
-            <a:off x="457200" y="3566160"/>
-            <a:ext cx="4754880" cy="274320"/>
-          </a:xfrm>
-          <a:prstGeom prst="rect">
-            <a:avLst/>
-          </a:prstGeom>
-          <a:noFill/>
-          <a:ln/>
-        </p:spPr>
-        <p:txBody>
-          <a:bodyPr wrap="square" lIns="0" tIns="0" rIns="0" bIns="0" rtlCol="0" anchor="t"/>
-          <a:lstStyle/>
-          <a:p>
-            <a:pPr indent="0" marL="0">
-              <a:buNone/>
-            </a:pPr>
-            <a:r>
-              <a:rPr lang="en-US" sz="1100" dirty="0">
-                <a:solidFill>
-                  <a:schemeClr val="accent5"/>
-                </a:solidFill>
-              </a:rPr>
-              <a:t>Synthetic volume, maximum projections</a:t>
-            </a:r>
-            <a:endParaRPr lang="en-US" sz="1100" dirty="0"/>
-          </a:p>
-        </p:txBody>
-      </p:sp>
-      <p:sp>
-        <p:nvSpPr>
-          <p:cNvPr id="5" name="step-card-0"/>
-          <p:cNvSpPr/>
-          <p:nvPr/>
-        </p:nvSpPr>
-        <p:spPr>
-          <a:xfrm>
-            <a:off x="5486400" y="1051560"/>
-            <a:ext cx="3200400" cy="1143000"/>
-          </a:xfrm>
-          <a:prstGeom prst="roundRect">
-            <a:avLst>
-              <a:gd name="adj" fmla="val 6400"/>
-            </a:avLst>
-          </a:prstGeom>
-          <a:solidFill>
-            <a:schemeClr val="bg2"/>
-          </a:solidFill>
-          <a:ln w="12700">
-            <a:solidFill>
-              <a:schemeClr val="bg2"/>
-            </a:solidFill>
-            <a:prstDash val="solid"/>
-          </a:ln>
-        </p:spPr>
-      </p:sp>
-      <p:sp>
-        <p:nvSpPr>
-          <p:cNvPr id="6" name="Text 3"/>
-          <p:cNvSpPr txBox="1"/>
-          <p:nvPr/>
-        </p:nvSpPr>
-        <p:spPr>
-          <a:xfrm>
-            <a:off x="5650992" y="1143000"/>
-            <a:ext cx="2871216" cy="228600"/>
-          </a:xfrm>
-          <a:prstGeom prst="rect">
-            <a:avLst/>
-          </a:prstGeom>
-          <a:noFill/>
-          <a:ln/>
-        </p:spPr>
-        <p:txBody>
-          <a:bodyPr wrap="square" lIns="0" tIns="0" rIns="0" bIns="0" rtlCol="0" anchor="t"/>
-          <a:lstStyle/>
-          <a:p>
-            <a:pPr indent="0" marL="0">
-              <a:buNone/>
-            </a:pPr>
-            <a:r>
-              <a:rPr lang="en-US" sz="1200" b="1" dirty="0">
-                <a:solidFill>
-                  <a:schemeClr val="accent1"/>
-                </a:solidFill>
-              </a:rPr>
-              <a:t>SETUP</a:t>
-            </a:r>
-            <a:endParaRPr lang="en-US" sz="1200" dirty="0"/>
-          </a:p>
-        </p:txBody>
-      </p:sp>
-      <p:sp>
-        <p:nvSpPr>
-          <p:cNvPr id="7" name="Text 4"/>
-          <p:cNvSpPr txBox="1"/>
-          <p:nvPr/>
-        </p:nvSpPr>
-        <p:spPr>
-          <a:xfrm>
-            <a:off x="5650992" y="1399032"/>
-            <a:ext cx="2871216" cy="722376"/>
-          </a:xfrm>
-          <a:prstGeom prst="rect">
-            <a:avLst/>
-          </a:prstGeom>
-          <a:noFill/>
-          <a:ln/>
-        </p:spPr>
-        <p:txBody>
-          <a:bodyPr wrap="square" lIns="0" tIns="0" rIns="0" bIns="0" rtlCol="0" anchor="t"/>
-          <a:lstStyle/>
-          <a:p>
-            <a:pPr indent="0" marL="0">
-              <a:buNone/>
-            </a:pPr>
-            <a:r>
-              <a:rPr lang="en-US" sz="1400" dirty="0">
-                <a:solidFill>
-                  <a:schemeClr val="tx1"/>
-                </a:solidFill>
-              </a:rPr>
-              <a:t>Fit round blobs to a volume that is itself made of blobs; compare at every voxel</a:t>
-            </a:r>
-            <a:endParaRPr lang="en-US" sz="1400" dirty="0"/>
-          </a:p>
-        </p:txBody>
-      </p:sp>
-      <p:sp>
-        <p:nvSpPr>
-          <p:cNvPr id="8" name="step-card-1"/>
-          <p:cNvSpPr/>
-          <p:nvPr/>
-        </p:nvSpPr>
-        <p:spPr>
-          <a:xfrm>
-            <a:off x="5486400" y="2258568"/>
-            <a:ext cx="3200400" cy="1143000"/>
-          </a:xfrm>
-          <a:prstGeom prst="roundRect">
-            <a:avLst>
-              <a:gd name="adj" fmla="val 6400"/>
-            </a:avLst>
-          </a:prstGeom>
-          <a:solidFill>
-            <a:schemeClr val="bg2"/>
-          </a:solidFill>
-          <a:ln w="12700">
-            <a:solidFill>
-              <a:schemeClr val="bg2"/>
-            </a:solidFill>
-            <a:prstDash val="solid"/>
-          </a:ln>
-        </p:spPr>
-      </p:sp>
-      <p:sp>
-        <p:nvSpPr>
-          <p:cNvPr id="9" name="Text 6"/>
-          <p:cNvSpPr txBox="1"/>
-          <p:nvPr/>
-        </p:nvSpPr>
-        <p:spPr>
-          <a:xfrm>
-            <a:off x="5650992" y="2350008"/>
-            <a:ext cx="2871216" cy="228600"/>
-          </a:xfrm>
-          <a:prstGeom prst="rect">
-            <a:avLst/>
-          </a:prstGeom>
-          <a:noFill/>
-          <a:ln/>
-        </p:spPr>
-        <p:txBody>
-          <a:bodyPr wrap="square" lIns="0" tIns="0" rIns="0" bIns="0" rtlCol="0" anchor="t"/>
-          <a:lstStyle/>
-          <a:p>
-            <a:pPr indent="0" marL="0">
-              <a:buNone/>
-            </a:pPr>
-            <a:r>
-              <a:rPr lang="en-US" sz="1200" b="1" dirty="0">
-                <a:solidFill>
-                  <a:schemeClr val="accent1"/>
-                </a:solidFill>
-              </a:rPr>
-              <a:t>WHY</a:t>
-            </a:r>
-            <a:endParaRPr lang="en-US" sz="1200" dirty="0"/>
-          </a:p>
-        </p:txBody>
-      </p:sp>
-      <p:sp>
-        <p:nvSpPr>
-          <p:cNvPr id="10" name="Text 7"/>
-          <p:cNvSpPr txBox="1"/>
-          <p:nvPr/>
-        </p:nvSpPr>
-        <p:spPr>
-          <a:xfrm>
-            <a:off x="5650992" y="2606040"/>
-            <a:ext cx="2871216" cy="722376"/>
-          </a:xfrm>
-          <a:prstGeom prst="rect">
-            <a:avLst/>
-          </a:prstGeom>
-          <a:noFill/>
-          <a:ln/>
-        </p:spPr>
-        <p:txBody>
-          <a:bodyPr wrap="square" lIns="0" tIns="0" rIns="0" bIns="0" rtlCol="0" anchor="t"/>
-          <a:lstStyle/>
-          <a:p>
-            <a:pPr indent="0" marL="0">
-              <a:buNone/>
-            </a:pPr>
-            <a:r>
-              <a:rPr lang="en-US" sz="1400" dirty="0">
-                <a:solidFill>
-                  <a:schemeClr val="tx1"/>
-                </a:solidFill>
-              </a:rPr>
-              <a:t>If the code is right, it must recover a known answer</a:t>
-            </a:r>
-            <a:endParaRPr lang="en-US" sz="1400" dirty="0"/>
-          </a:p>
-        </p:txBody>
-      </p:sp>
-      <p:sp>
-        <p:nvSpPr>
-          <p:cNvPr id="11" name="step-card-2"/>
-          <p:cNvSpPr/>
-          <p:nvPr/>
-        </p:nvSpPr>
-        <p:spPr>
-          <a:xfrm>
-            <a:off x="5486400" y="3465576"/>
-            <a:ext cx="3200400" cy="1143000"/>
-          </a:xfrm>
-          <a:prstGeom prst="roundRect">
-            <a:avLst>
-              <a:gd name="adj" fmla="val 6400"/>
-            </a:avLst>
-          </a:prstGeom>
-          <a:solidFill>
-            <a:schemeClr val="bg2"/>
-          </a:solidFill>
-          <a:ln w="12700">
-            <a:solidFill>
-              <a:schemeClr val="bg2"/>
-            </a:solidFill>
-            <a:prstDash val="solid"/>
-          </a:ln>
-        </p:spPr>
-      </p:sp>
-      <p:sp>
-        <p:nvSpPr>
-          <p:cNvPr id="12" name="Text 9"/>
-          <p:cNvSpPr txBox="1"/>
-          <p:nvPr/>
-        </p:nvSpPr>
-        <p:spPr>
-          <a:xfrm>
-            <a:off x="5650992" y="3557016"/>
-            <a:ext cx="2871216" cy="228600"/>
-          </a:xfrm>
-          <a:prstGeom prst="rect">
-            <a:avLst/>
-          </a:prstGeom>
-          <a:noFill/>
-          <a:ln/>
-        </p:spPr>
-        <p:txBody>
-          <a:bodyPr wrap="square" lIns="0" tIns="0" rIns="0" bIns="0" rtlCol="0" anchor="t"/>
-          <a:lstStyle/>
-          <a:p>
-            <a:pPr indent="0" marL="0">
-              <a:buNone/>
-            </a:pPr>
-            <a:r>
-              <a:rPr lang="en-US" sz="1200" b="1" dirty="0">
-                <a:solidFill>
-                  <a:schemeClr val="accent1"/>
-                </a:solidFill>
-              </a:rPr>
-              <a:t>RESULT</a:t>
-            </a:r>
-            <a:endParaRPr lang="en-US" sz="1200" dirty="0"/>
-          </a:p>
-        </p:txBody>
-      </p:sp>
-      <p:sp>
-        <p:nvSpPr>
-          <p:cNvPr id="13" name="Text 10"/>
-          <p:cNvSpPr txBox="1"/>
-          <p:nvPr/>
-        </p:nvSpPr>
-        <p:spPr>
-          <a:xfrm>
-            <a:off x="5650992" y="3813048"/>
-            <a:ext cx="2871216" cy="722376"/>
-          </a:xfrm>
-          <a:prstGeom prst="rect">
-            <a:avLst/>
-          </a:prstGeom>
-          <a:noFill/>
-          <a:ln/>
-        </p:spPr>
-        <p:txBody>
-          <a:bodyPr wrap="square" lIns="0" tIns="0" rIns="0" bIns="0" rtlCol="0" anchor="t"/>
-          <a:lstStyle/>
-          <a:p>
-            <a:pPr indent="0" marL="0">
-              <a:buNone/>
-            </a:pPr>
-            <a:r>
-              <a:rPr lang="en-US" sz="1400" dirty="0">
-                <a:solidFill>
-                  <a:schemeClr val="tx1"/>
-                </a:solidFill>
-              </a:rPr>
-              <a:t>Same fit, 15-blob phantom: 31.7 dB at voxels, −7.1 dB via the splatting renderer. Final fit: 47.9 dB</a:t>
-            </a:r>
-            <a:endParaRPr lang="en-US" sz="1400" dirty="0"/>
-          </a:p>
-        </p:txBody>
-      </p:sp>
-      <p:sp>
-        <p:nvSpPr>
-          <p:cNvPr id="25" name="Slide Number Placeholder 0"/>
-          <p:cNvSpPr>
-            <a:spLocks noGrp="1"/>
-          </p:cNvSpPr>
-          <p:nvPr>
-            <p:ph type="sldNum" sz="quarter" idx="4294967295"/>
-          </p:nvPr>
-        </p:nvSpPr>
-        <p:spPr>
-          <a:xfrm>
-            <a:off x="8229600" y="4754880"/>
-            <a:ext cx="457200" cy="228600"/>
-          </a:xfrm>
-          <a:prstGeom prst="rect">
-            <a:avLst/>
-          </a:prstGeom>
-          <a:extLst>
-            <a:ext uri="{C572A759-6A51-4108-AA02-DFA0A04FC94B}">
-              <ma14:wrappingTextBoxFlag xmlns:ma14="http://schemas.microsoft.com/office/mac/drawingml/2011/main" val="0"/>
-            </a:ext>
-          </a:extLst>
-        </p:spPr>
-        <p:txBody>
-          <a:bodyPr/>
-          <a:lstStyle>
-            <a:lvl1pPr>
-              <a:defRPr sz="900">
-                <a:solidFill>
-                  <a:schemeClr val="accent5"/>
-                </a:solidFill>
-              </a:defRPr>
-            </a:lvl1pPr>
-          </a:lstStyle>
-          <a:p>
-            <a:pPr algn="r"/>
-            <a:fld id="{F7021451-1387-4CA6-816F-3879F97B5CBC}" type="slidenum">
-              <a:rPr b="0" lang="en-US"/>
               <a:t>5</a:t>
             </a:fld>
             <a:endParaRPr lang="en-US"/>
@@ -15207,31 +18143,75 @@
                   <a:schemeClr val="tx1"/>
                 </a:solidFill>
               </a:rPr>
-              <a:t>Step 1 · Start blobs on bright peaks</a:t>
+              <a:t>Step 0 · A phantom with a known answer</a:t>
             </a:r>
             <a:endParaRPr lang="en-US" sz="2800" dirty="0"/>
           </a:p>
         </p:txBody>
       </p:sp>
-      <p:graphicFrame>
-        <p:nvGraphicFramePr>
-          <p:cNvPr id="3" name="Chart 0" descr=""/>
-          <p:cNvGraphicFramePr/>
-          <p:nvPr/>
-        </p:nvGraphicFramePr>
-        <p:xfrm>
-          <a:off x="457200" y="1051560"/>
-          <a:ext cx="4754880" cy="3246120"/>
-        </p:xfrm>
-        <a:graphic xmlns:a="http://schemas.openxmlformats.org/drawingml/2006/main">
-          <a:graphicData uri="http://schemas.openxmlformats.org/drawingml/2006/chart">
-            <c:chart xmlns:c="http://schemas.openxmlformats.org/drawingml/2006/chart" r:id="rId1"/>
-          </a:graphicData>
-        </a:graphic>
-      </p:graphicFrame>
-      <p:sp>
-        <p:nvSpPr>
-          <p:cNvPr id="4" name="step-card-0"/>
+      <p:pic>
+        <p:nvPicPr>
+          <p:cNvPr id="3" name="phantom" descr="D:\masters\MLCV seminar\TeamProject\presentation\figs\phantom.png">    </p:cNvPr>
+          <p:cNvPicPr>
+            <a:picLocks noChangeAspect="1"/>
+          </p:cNvPicPr>
+          <p:nvPr/>
+        </p:nvPicPr>
+        <p:blipFill>
+          <a:blip r:embed="rId1"/>
+          <a:stretch>
+            <a:fillRect/>
+          </a:stretch>
+        </p:blipFill>
+        <p:spPr>
+          <a:xfrm>
+            <a:off x="457200" y="1097280"/>
+            <a:ext cx="4754880" cy="2377440"/>
+          </a:xfrm>
+          <a:prstGeom prst="rect">
+            <a:avLst/>
+          </a:prstGeom>
+        </p:spPr>
+      </p:pic>
+      <p:sp>
+        <p:nvSpPr>
+          <p:cNvPr id="4" name="Text 1"/>
+          <p:cNvSpPr txBox="1"/>
+          <p:nvPr/>
+        </p:nvSpPr>
+        <p:spPr>
+          <a:xfrm>
+            <a:off x="457200" y="3566160"/>
+            <a:ext cx="4754880" cy="274320"/>
+          </a:xfrm>
+          <a:prstGeom prst="rect">
+            <a:avLst/>
+          </a:prstGeom>
+          <a:noFill/>
+          <a:ln/>
+        </p:spPr>
+        <p:txBody>
+          <a:bodyPr wrap="square" lIns="0" tIns="0" rIns="0" bIns="0" rtlCol="0" anchor="t"/>
+          <a:lstStyle/>
+          <a:p>
+            <a:pPr indent="0" marL="0">
+              <a:buNone/>
+            </a:pPr>
+            <a:r>
+              <a:rPr lang="en-US" sz="1100" dirty="0">
+                <a:solidFill>
+                  <a:schemeClr val="accent5"/>
+                </a:solidFill>
+              </a:rPr>
+              <a:t>Synthetic volume, maximum projections</a:t>
+            </a:r>
+            <a:endParaRPr lang="en-US" sz="1100" dirty="0"/>
+          </a:p>
+        </p:txBody>
+      </p:sp>
+      <p:sp>
+        <p:nvSpPr>
+          <p:cNvPr id="5" name="step-card-0"/>
           <p:cNvSpPr/>
           <p:nvPr/>
         </p:nvSpPr>
@@ -15258,7 +18238,7 @@
       </p:sp>
       <p:sp>
         <p:nvSpPr>
-          <p:cNvPr id="5" name="Text 2"/>
+          <p:cNvPr id="6" name="Text 3"/>
           <p:cNvSpPr txBox="1"/>
           <p:nvPr/>
         </p:nvSpPr>
@@ -15286,7 +18266,7 @@
                   <a:schemeClr val="accent1"/>
                 </a:solidFill>
               </a:rPr>
-              <a:t>WHAT AKIM CHANGED</a:t>
+              <a:t>SETUP</a:t>
             </a:r>
             <a:endParaRPr lang="en-US" sz="1200" dirty="0"/>
           </a:p>
@@ -15294,7 +18274,7 @@
       </p:sp>
       <p:sp>
         <p:nvSpPr>
-          <p:cNvPr id="6" name="Text 3"/>
+          <p:cNvPr id="7" name="Text 4"/>
           <p:cNvSpPr txBox="1"/>
           <p:nvPr/>
         </p:nvSpPr>
@@ -15322,7 +18302,7 @@
                   <a:schemeClr val="tx1"/>
                 </a:solidFill>
               </a:rPr>
-              <a:t>Random starting positions → one blob on each bright peak</a:t>
+              <a:t>Fit round blobs to a volume that is itself made of blobs; compare at every voxel</a:t>
             </a:r>
             <a:endParaRPr lang="en-US" sz="1400" dirty="0"/>
           </a:p>
@@ -15330,7 +18310,7 @@
       </p:sp>
       <p:sp>
         <p:nvSpPr>
-          <p:cNvPr id="7" name="step-card-1"/>
+          <p:cNvPr id="8" name="step-card-1"/>
           <p:cNvSpPr/>
           <p:nvPr/>
         </p:nvSpPr>
@@ -15357,7 +18337,7 @@
       </p:sp>
       <p:sp>
         <p:nvSpPr>
-          <p:cNvPr id="8" name="Text 5"/>
+          <p:cNvPr id="9" name="Text 6"/>
           <p:cNvSpPr txBox="1"/>
           <p:nvPr/>
         </p:nvSpPr>
@@ -15393,7 +18373,7 @@
       </p:sp>
       <p:sp>
         <p:nvSpPr>
-          <p:cNvPr id="9" name="Text 6"/>
+          <p:cNvPr id="10" name="Text 7"/>
           <p:cNvSpPr txBox="1"/>
           <p:nvPr/>
         </p:nvSpPr>
@@ -15421,7 +18401,7 @@
                   <a:schemeClr val="tx1"/>
                 </a:solidFill>
               </a:rPr>
-              <a:t>A blob that starts far from any structure wastes the whole fit</a:t>
+              <a:t>If the code is right, it must recover a known answer</a:t>
             </a:r>
             <a:endParaRPr lang="en-US" sz="1400" dirty="0"/>
           </a:p>
@@ -15429,7 +18409,7 @@
       </p:sp>
       <p:sp>
         <p:nvSpPr>
-          <p:cNvPr id="10" name="step-card-2"/>
+          <p:cNvPr id="11" name="step-card-2"/>
           <p:cNvSpPr/>
           <p:nvPr/>
         </p:nvSpPr>
@@ -15456,7 +18436,7 @@
       </p:sp>
       <p:sp>
         <p:nvSpPr>
-          <p:cNvPr id="11" name="Text 8"/>
+          <p:cNvPr id="12" name="Text 9"/>
           <p:cNvSpPr txBox="1"/>
           <p:nvPr/>
         </p:nvSpPr>
@@ -15492,7 +18472,7 @@
       </p:sp>
       <p:sp>
         <p:nvSpPr>
-          <p:cNvPr id="12" name="Text 9"/>
+          <p:cNvPr id="13" name="Text 10"/>
           <p:cNvSpPr txBox="1"/>
           <p:nvPr/>
         </p:nvSpPr>
@@ -15520,7 +18500,7 @@
                   <a:schemeClr val="tx1"/>
                 </a:solidFill>
               </a:rPr>
-              <a:t>+21 dB on the phantom (32 → 53); more steps alone gave only +1.7</a:t>
+              <a:t>Same fit, 15-blob phantom: 31.7 dB at voxels, −7.1 dB via the splatting renderer. Final fit: 47.9 dB</a:t>
             </a:r>
             <a:endParaRPr lang="en-US" sz="1400" dirty="0"/>
           </a:p>
@@ -15628,7 +18608,7 @@
                   <a:schemeClr val="tx1"/>
                 </a:solidFill>
               </a:rPr>
-              <a:t>Step 2 · Real data: stretched, rotated blobs win</a:t>
+              <a:t>Step 1 · Start blobs on bright peaks</a:t>
             </a:r>
             <a:endParaRPr lang="en-US" sz="2800" dirty="0"/>
           </a:p>
@@ -15707,7 +18687,7 @@
                   <a:schemeClr val="accent1"/>
                 </a:solidFill>
               </a:rPr>
-              <a:t>WHAT AKIM TESTED</a:t>
+              <a:t>WHAT AKIM CHANGED</a:t>
             </a:r>
             <a:endParaRPr lang="en-US" sz="1200" dirty="0"/>
           </a:p>
@@ -15743,7 +18723,7 @@
                   <a:schemeClr val="tx1"/>
                 </a:solidFill>
               </a:rPr>
-              <a:t>43 experiments, 299 fits: 4 blob shapes, 50-1,000 blobs, sampling, loss, automatic settings</a:t>
+              <a:t>Random starting positions → one blob on each bright peak</a:t>
             </a:r>
             <a:endParaRPr lang="en-US" sz="1400" dirty="0"/>
           </a:p>
@@ -15842,7 +18822,7 @@
                   <a:schemeClr val="tx1"/>
                 </a:solidFill>
               </a:rPr>
-              <a:t>Real nuclei are not the phantom: stretched, unevenly bright, packed tightly</a:t>
+              <a:t>A blob that starts far from any structure wastes the whole fit</a:t>
             </a:r>
             <a:endParaRPr lang="en-US" sz="1400" dirty="0"/>
           </a:p>
@@ -15941,7 +18921,7 @@
                   <a:schemeClr val="tx1"/>
                 </a:solidFill>
               </a:rPr>
-              <a:t>Stretched + rotated blobs best; top fit 25.9 dB with 750-1,000 blobs on the whole volume</a:t>
+              <a:t>+21 dB on the phantom (32 → 53); more steps alone gave only +1.7</a:t>
             </a:r>
             <a:endParaRPr lang="en-US" sz="1400" dirty="0"/>
           </a:p>
@@ -16049,75 +19029,31 @@
                   <a:schemeClr val="tx1"/>
                 </a:solidFill>
               </a:rPr>
-              <a:t>Step 3 · Grow blobs where the error is large</a:t>
+              <a:t>Step 2 · Real data: stretched, rotated blobs win</a:t>
             </a:r>
             <a:endParaRPr lang="en-US" sz="2800" dirty="0"/>
           </a:p>
         </p:txBody>
       </p:sp>
-      <p:pic>
-        <p:nvPicPr>
-          <p:cNvPr id="3" name="akim-densify" descr="D:\masters\MLCV seminar\TeamProject\presentation\figs\akim_densify.png">    </p:cNvPr>
-          <p:cNvPicPr>
-            <a:picLocks noChangeAspect="1"/>
-          </p:cNvPicPr>
-          <p:nvPr/>
-        </p:nvPicPr>
-        <p:blipFill>
-          <a:blip r:embed="rId1"/>
-          <a:stretch>
-            <a:fillRect/>
-          </a:stretch>
-        </p:blipFill>
-        <p:spPr>
-          <a:xfrm>
-            <a:off x="457200" y="1097280"/>
-            <a:ext cx="4846320" cy="2971800"/>
-          </a:xfrm>
-          <a:prstGeom prst="rect">
-            <a:avLst/>
-          </a:prstGeom>
-        </p:spPr>
-      </p:pic>
-      <p:sp>
-        <p:nvSpPr>
-          <p:cNvPr id="4" name="Text 1"/>
-          <p:cNvSpPr txBox="1"/>
-          <p:nvPr/>
-        </p:nvSpPr>
-        <p:spPr>
-          <a:xfrm>
-            <a:off x="457200" y="4160520"/>
-            <a:ext cx="4846320" cy="274320"/>
-          </a:xfrm>
-          <a:prstGeom prst="rect">
-            <a:avLst/>
-          </a:prstGeom>
-          <a:noFill/>
-          <a:ln/>
-        </p:spPr>
-        <p:txBody>
-          <a:bodyPr wrap="square" lIns="0" tIns="0" rIns="0" bIns="0" rtlCol="0" anchor="t"/>
-          <a:lstStyle/>
-          <a:p>
-            <a:pPr indent="0" marL="0">
-              <a:buNone/>
-            </a:pPr>
-            <a:r>
-              <a:rPr lang="en-US" sz="1100" dirty="0">
-                <a:solidFill>
-                  <a:schemeClr val="accent5"/>
-                </a:solidFill>
-              </a:rPr>
-              <a:t>Akim's runs, same Tribolium crop, stretched + rotated blobs</a:t>
-            </a:r>
-            <a:endParaRPr lang="en-US" sz="1100" dirty="0"/>
-          </a:p>
-        </p:txBody>
-      </p:sp>
-      <p:sp>
-        <p:nvSpPr>
-          <p:cNvPr id="5" name="step-card-0"/>
+      <p:graphicFrame>
+        <p:nvGraphicFramePr>
+          <p:cNvPr id="3" name="Chart 0" descr=""/>
+          <p:cNvGraphicFramePr/>
+          <p:nvPr/>
+        </p:nvGraphicFramePr>
+        <p:xfrm>
+          <a:off x="457200" y="1051560"/>
+          <a:ext cx="4754880" cy="3246120"/>
+        </p:xfrm>
+        <a:graphic xmlns:a="http://schemas.openxmlformats.org/drawingml/2006/main">
+          <a:graphicData uri="http://schemas.openxmlformats.org/drawingml/2006/chart">
+            <c:chart xmlns:c="http://schemas.openxmlformats.org/drawingml/2006/chart" r:id="rId1"/>
+          </a:graphicData>
+        </a:graphic>
+      </p:graphicFrame>
+      <p:sp>
+        <p:nvSpPr>
+          <p:cNvPr id="4" name="step-card-0"/>
           <p:cNvSpPr/>
           <p:nvPr/>
         </p:nvSpPr>
@@ -16144,14 +19080,50 @@
       </p:sp>
       <p:sp>
         <p:nvSpPr>
+          <p:cNvPr id="5" name="Text 2"/>
+          <p:cNvSpPr txBox="1"/>
+          <p:nvPr/>
+        </p:nvSpPr>
+        <p:spPr>
+          <a:xfrm>
+            <a:off x="5650992" y="1143000"/>
+            <a:ext cx="2871216" cy="228600"/>
+          </a:xfrm>
+          <a:prstGeom prst="rect">
+            <a:avLst/>
+          </a:prstGeom>
+          <a:noFill/>
+          <a:ln/>
+        </p:spPr>
+        <p:txBody>
+          <a:bodyPr wrap="square" lIns="0" tIns="0" rIns="0" bIns="0" rtlCol="0" anchor="t"/>
+          <a:lstStyle/>
+          <a:p>
+            <a:pPr indent="0" marL="0">
+              <a:buNone/>
+            </a:pPr>
+            <a:r>
+              <a:rPr lang="en-US" sz="1200" b="1" dirty="0">
+                <a:solidFill>
+                  <a:schemeClr val="accent1"/>
+                </a:solidFill>
+              </a:rPr>
+              <a:t>WHAT AKIM TESTED</a:t>
+            </a:r>
+            <a:endParaRPr lang="en-US" sz="1200" dirty="0"/>
+          </a:p>
+        </p:txBody>
+      </p:sp>
+      <p:sp>
+        <p:nvSpPr>
           <p:cNvPr id="6" name="Text 3"/>
           <p:cNvSpPr txBox="1"/>
           <p:nvPr/>
         </p:nvSpPr>
         <p:spPr>
           <a:xfrm>
-            <a:off x="5650992" y="1143000"/>
-            <a:ext cx="2871216" cy="228600"/>
+            <a:off x="5650992" y="1399032"/>
+            <a:ext cx="2871216" cy="722376"/>
           </a:xfrm>
           <a:prstGeom prst="rect">
             <a:avLst/>
@@ -16167,48 +19139,12 @@
               <a:buNone/>
             </a:pPr>
             <a:r>
-              <a:rPr lang="en-US" sz="1200" b="1" dirty="0">
-                <a:solidFill>
-                  <a:schemeClr val="accent1"/>
+              <a:rPr lang="en-US" sz="1400" dirty="0">
+                <a:solidFill>
+                  <a:schemeClr val="tx1"/>
                 </a:solidFill>
               </a:rPr>
-              <a:t>WHAT AKIM CHANGED</a:t>
-            </a:r>
-            <a:endParaRPr lang="en-US" sz="1200" dirty="0"/>
-          </a:p>
-        </p:txBody>
-      </p:sp>
-      <p:sp>
-        <p:nvSpPr>
-          <p:cNvPr id="7" name="Text 4"/>
-          <p:cNvSpPr txBox="1"/>
-          <p:nvPr/>
-        </p:nvSpPr>
-        <p:spPr>
-          <a:xfrm>
-            <a:off x="5650992" y="1399032"/>
-            <a:ext cx="2871216" cy="722376"/>
-          </a:xfrm>
-          <a:prstGeom prst="rect">
-            <a:avLst/>
-          </a:prstGeom>
-          <a:noFill/>
-          <a:ln/>
-        </p:spPr>
-        <p:txBody>
-          <a:bodyPr wrap="square" lIns="0" tIns="0" rIns="0" bIns="0" rtlCol="0" anchor="t"/>
-          <a:lstStyle/>
-          <a:p>
-            <a:pPr indent="0" marL="0">
-              <a:buNone/>
-            </a:pPr>
-            <a:r>
-              <a:rPr lang="en-US" sz="1400" dirty="0">
-                <a:solidFill>
-                  <a:schemeClr val="tx1"/>
-                </a:solidFill>
-              </a:rPr>
-              <a:t>Start with 25 blobs; add new ones where the error stays high (12 variants)</a:t>
+              <a:t>43 experiments, 299 fits: 4 blob shapes, 50-1,000 blobs, sampling, loss, automatic settings</a:t>
             </a:r>
             <a:endParaRPr lang="en-US" sz="1400" dirty="0"/>
           </a:p>
@@ -16216,7 +19152,7 @@
       </p:sp>
       <p:sp>
         <p:nvSpPr>
-          <p:cNvPr id="8" name="step-card-1"/>
+          <p:cNvPr id="7" name="step-card-1"/>
           <p:cNvSpPr/>
           <p:nvPr/>
         </p:nvSpPr>
@@ -16243,14 +19179,50 @@
       </p:sp>
       <p:sp>
         <p:nvSpPr>
+          <p:cNvPr id="8" name="Text 5"/>
+          <p:cNvSpPr txBox="1"/>
+          <p:nvPr/>
+        </p:nvSpPr>
+        <p:spPr>
+          <a:xfrm>
+            <a:off x="5650992" y="2350008"/>
+            <a:ext cx="2871216" cy="228600"/>
+          </a:xfrm>
+          <a:prstGeom prst="rect">
+            <a:avLst/>
+          </a:prstGeom>
+          <a:noFill/>
+          <a:ln/>
+        </p:spPr>
+        <p:txBody>
+          <a:bodyPr wrap="square" lIns="0" tIns="0" rIns="0" bIns="0" rtlCol="0" anchor="t"/>
+          <a:lstStyle/>
+          <a:p>
+            <a:pPr indent="0" marL="0">
+              <a:buNone/>
+            </a:pPr>
+            <a:r>
+              <a:rPr lang="en-US" sz="1200" b="1" dirty="0">
+                <a:solidFill>
+                  <a:schemeClr val="accent1"/>
+                </a:solidFill>
+              </a:rPr>
+              <a:t>WHY</a:t>
+            </a:r>
+            <a:endParaRPr lang="en-US" sz="1200" dirty="0"/>
+          </a:p>
+        </p:txBody>
+      </p:sp>
+      <p:sp>
+        <p:nvSpPr>
           <p:cNvPr id="9" name="Text 6"/>
           <p:cNvSpPr txBox="1"/>
           <p:nvPr/>
         </p:nvSpPr>
         <p:spPr>
           <a:xfrm>
-            <a:off x="5650992" y="2350008"/>
-            <a:ext cx="2871216" cy="228600"/>
+            <a:off x="5650992" y="2606040"/>
+            <a:ext cx="2871216" cy="722376"/>
           </a:xfrm>
           <a:prstGeom prst="rect">
             <a:avLst/>
@@ -16266,48 +19238,12 @@
               <a:buNone/>
             </a:pPr>
             <a:r>
-              <a:rPr lang="en-US" sz="1200" b="1" dirty="0">
-                <a:solidFill>
-                  <a:schemeClr val="accent1"/>
+              <a:rPr lang="en-US" sz="1400" dirty="0">
+                <a:solidFill>
+                  <a:schemeClr val="tx1"/>
                 </a:solidFill>
               </a:rPr>
-              <a:t>WHY</a:t>
-            </a:r>
-            <a:endParaRPr lang="en-US" sz="1200" dirty="0"/>
-          </a:p>
-        </p:txBody>
-      </p:sp>
-      <p:sp>
-        <p:nvSpPr>
-          <p:cNvPr id="10" name="Text 7"/>
-          <p:cNvSpPr txBox="1"/>
-          <p:nvPr/>
-        </p:nvSpPr>
-        <p:spPr>
-          <a:xfrm>
-            <a:off x="5650992" y="2606040"/>
-            <a:ext cx="2871216" cy="722376"/>
-          </a:xfrm>
-          <a:prstGeom prst="rect">
-            <a:avLst/>
-          </a:prstGeom>
-          <a:noFill/>
-          <a:ln/>
-        </p:spPr>
-        <p:txBody>
-          <a:bodyPr wrap="square" lIns="0" tIns="0" rIns="0" bIns="0" rtlCol="0" anchor="t"/>
-          <a:lstStyle/>
-          <a:p>
-            <a:pPr indent="0" marL="0">
-              <a:buNone/>
-            </a:pPr>
-            <a:r>
-              <a:rPr lang="en-US" sz="1400" dirty="0">
-                <a:solidFill>
-                  <a:schemeClr val="tx1"/>
-                </a:solidFill>
-              </a:rPr>
-              <a:t>Let the data decide how many blobs it needs, instead of guessing</a:t>
+              <a:t>Real nuclei are not the phantom: stretched, unevenly bright, packed tightly</a:t>
             </a:r>
             <a:endParaRPr lang="en-US" sz="1400" dirty="0"/>
           </a:p>
@@ -16315,7 +19251,7 @@
       </p:sp>
       <p:sp>
         <p:nvSpPr>
-          <p:cNvPr id="11" name="step-card-2"/>
+          <p:cNvPr id="10" name="step-card-2"/>
           <p:cNvSpPr/>
           <p:nvPr/>
         </p:nvSpPr>
@@ -16342,14 +19278,50 @@
       </p:sp>
       <p:sp>
         <p:nvSpPr>
+          <p:cNvPr id="11" name="Text 8"/>
+          <p:cNvSpPr txBox="1"/>
+          <p:nvPr/>
+        </p:nvSpPr>
+        <p:spPr>
+          <a:xfrm>
+            <a:off x="5650992" y="3557016"/>
+            <a:ext cx="2871216" cy="228600"/>
+          </a:xfrm>
+          <a:prstGeom prst="rect">
+            <a:avLst/>
+          </a:prstGeom>
+          <a:noFill/>
+          <a:ln/>
+        </p:spPr>
+        <p:txBody>
+          <a:bodyPr wrap="square" lIns="0" tIns="0" rIns="0" bIns="0" rtlCol="0" anchor="t"/>
+          <a:lstStyle/>
+          <a:p>
+            <a:pPr indent="0" marL="0">
+              <a:buNone/>
+            </a:pPr>
+            <a:r>
+              <a:rPr lang="en-US" sz="1200" b="1" dirty="0">
+                <a:solidFill>
+                  <a:schemeClr val="accent1"/>
+                </a:solidFill>
+              </a:rPr>
+              <a:t>RESULT</a:t>
+            </a:r>
+            <a:endParaRPr lang="en-US" sz="1200" dirty="0"/>
+          </a:p>
+        </p:txBody>
+      </p:sp>
+      <p:sp>
+        <p:nvSpPr>
           <p:cNvPr id="12" name="Text 9"/>
           <p:cNvSpPr txBox="1"/>
           <p:nvPr/>
         </p:nvSpPr>
         <p:spPr>
           <a:xfrm>
-            <a:off x="5650992" y="3557016"/>
-            <a:ext cx="2871216" cy="228600"/>
+            <a:off x="5650992" y="3813048"/>
+            <a:ext cx="2871216" cy="722376"/>
           </a:xfrm>
           <a:prstGeom prst="rect">
             <a:avLst/>
@@ -16365,48 +19337,12 @@
               <a:buNone/>
             </a:pPr>
             <a:r>
-              <a:rPr lang="en-US" sz="1200" b="1" dirty="0">
-                <a:solidFill>
-                  <a:schemeClr val="accent1"/>
+              <a:rPr lang="en-US" sz="1400" dirty="0">
+                <a:solidFill>
+                  <a:schemeClr val="tx1"/>
                 </a:solidFill>
               </a:rPr>
-              <a:t>RESULT</a:t>
-            </a:r>
-            <a:endParaRPr lang="en-US" sz="1200" dirty="0"/>
-          </a:p>
-        </p:txBody>
-      </p:sp>
-      <p:sp>
-        <p:nvSpPr>
-          <p:cNvPr id="13" name="Text 10"/>
-          <p:cNvSpPr txBox="1"/>
-          <p:nvPr/>
-        </p:nvSpPr>
-        <p:spPr>
-          <a:xfrm>
-            <a:off x="5650992" y="3813048"/>
-            <a:ext cx="2871216" cy="722376"/>
-          </a:xfrm>
-          <a:prstGeom prst="rect">
-            <a:avLst/>
-          </a:prstGeom>
-          <a:noFill/>
-          <a:ln/>
-        </p:spPr>
-        <p:txBody>
-          <a:bodyPr wrap="square" lIns="0" tIns="0" rIns="0" bIns="0" rtlCol="0" anchor="t"/>
-          <a:lstStyle/>
-          <a:p>
-            <a:pPr indent="0" marL="0">
-              <a:buNone/>
-            </a:pPr>
-            <a:r>
-              <a:rPr lang="en-US" sz="1400" dirty="0">
-                <a:solidFill>
-                  <a:schemeClr val="tx1"/>
-                </a:solidFill>
-              </a:rPr>
-              <a:t>Slightly better per blob (34 grown: 24.3 dB vs 50 fixed: 23.8 dB); best 24.9 vs 24.5 dB</a:t>
+              <a:t>Stretched + rotated blobs best; top fit 25.9 dB with 750-1,000 blobs on the whole volume</a:t>
             </a:r>
             <a:endParaRPr lang="en-US" sz="1400" dirty="0"/>
           </a:p>
@@ -16514,7 +19450,7 @@
                   <a:schemeClr val="tx1"/>
                 </a:solidFill>
               </a:rPr>
-              <a:t>Step 4 · Set the budget from the cell count</a:t>
+              <a:t>Step 3 · Grow blobs where the error is large</a:t>
             </a:r>
             <a:endParaRPr lang="en-US" sz="2800" dirty="0"/>
           </a:p>
@@ -16522,7 +19458,7 @@
       </p:sp>
       <p:pic>
         <p:nvPicPr>
-          <p:cNvPr id="3" name="akim-cellbudget" descr="D:\masters\MLCV seminar\TeamProject\presentation\figs\akim_cellbudget.png">    </p:cNvPr>
+          <p:cNvPr id="3" name="akim-densify" descr="D:\masters\MLCV seminar\TeamProject\presentation\figs\akim_densify.png">    </p:cNvPr>
           <p:cNvPicPr>
             <a:picLocks noChangeAspect="1"/>
           </p:cNvPicPr>
@@ -16537,7 +19473,7 @@
         <p:spPr>
           <a:xfrm>
             <a:off x="457200" y="1097280"/>
-            <a:ext cx="4846320" cy="2852928"/>
+            <a:ext cx="4846320" cy="2971800"/>
           </a:xfrm>
           <a:prstGeom prst="rect">
             <a:avLst/>
@@ -16552,7 +19488,7 @@
         </p:nvSpPr>
         <p:spPr>
           <a:xfrm>
-            <a:off x="457200" y="4023360"/>
+            <a:off x="457200" y="4160520"/>
             <a:ext cx="4846320" cy="274320"/>
           </a:xfrm>
           <a:prstGeom prst="rect">
@@ -16574,7 +19510,7 @@
                   <a:schemeClr val="accent5"/>
                 </a:solidFill>
               </a:rPr>
-              <a:t>Akim's runs, whole Tribolium volume, 230 cells found by a detector</a:t>
+              <a:t>Akim's runs, same Tribolium crop, stretched + rotated blobs</a:t>
             </a:r>
             <a:endParaRPr lang="en-US" sz="1100" dirty="0"/>
           </a:p>
@@ -16673,7 +19609,7 @@
                   <a:schemeClr val="tx1"/>
                 </a:solidFill>
               </a:rPr>
-              <a:t>Count cells first (230), then use ~1.15 blobs per cell + 12% for background (301), and multiples</a:t>
+              <a:t>Start with 25 blobs; add new ones where the error stays high (12 variants)</a:t>
             </a:r>
             <a:endParaRPr lang="en-US" sz="1400" dirty="0"/>
           </a:p>
@@ -16772,7 +19708,7 @@
                   <a:schemeClr val="tx1"/>
                 </a:solidFill>
               </a:rPr>
-              <a:t>If each cell gets a blob, the blobs should match the cells</a:t>
+              <a:t>Let the data decide how many blobs it needs, instead of guessing</a:t>
             </a:r>
             <a:endParaRPr lang="en-US" sz="1400" dirty="0"/>
           </a:p>
@@ -16871,7 +19807,7 @@
                   <a:schemeClr val="tx1"/>
                 </a:solidFill>
               </a:rPr>
-              <a:t>Cell matching F1 0.35 → 0.76 with more blobs, while PSNR falls past ~900 blobs</a:t>
+              <a:t>Slightly better per blob (34 grown: 24.3 dB vs 50 fixed: 23.8 dB); best 24.9 vs 24.5 dB</a:t>
             </a:r>
             <a:endParaRPr lang="en-US" sz="1400" dirty="0"/>
           </a:p>
